--- a/Model schematic.pptx
+++ b/Model schematic.pptx
@@ -3330,10 +3330,10 @@
       </p:grpSpPr>
       <p:grpSp>
         <p:nvGrpSpPr>
-          <p:cNvPr id="41" name="Group 40">
+          <p:cNvPr id="2" name="Group 1">
             <a:extLst>
               <a:ext uri="{FF2B5EF4-FFF2-40B4-BE49-F238E27FC236}">
-                <a16:creationId xmlns:a16="http://schemas.microsoft.com/office/drawing/2014/main" id="{88018857-26DE-FCDE-16C5-122BADD43C58}"/>
+                <a16:creationId xmlns:a16="http://schemas.microsoft.com/office/drawing/2014/main" id="{3D847DE0-80EF-9133-A931-FF681477489F}"/>
               </a:ext>
             </a:extLst>
           </p:cNvPr>
@@ -3343,17 +3343,418 @@
         <p:grpSpPr>
           <a:xfrm>
             <a:off x="2455200" y="1441588"/>
-            <a:ext cx="6490737" cy="2068369"/>
-            <a:chOff x="1471519" y="429950"/>
-            <a:chExt cx="6490737" cy="2068369"/>
+            <a:ext cx="6490737" cy="3881512"/>
+            <a:chOff x="2455200" y="1441588"/>
+            <a:chExt cx="6490737" cy="3881512"/>
           </a:xfrm>
         </p:grpSpPr>
+        <p:grpSp>
+          <p:nvGrpSpPr>
+            <p:cNvPr id="41" name="Group 40">
+              <a:extLst>
+                <a:ext uri="{FF2B5EF4-FFF2-40B4-BE49-F238E27FC236}">
+                  <a16:creationId xmlns:a16="http://schemas.microsoft.com/office/drawing/2014/main" id="{88018857-26DE-FCDE-16C5-122BADD43C58}"/>
+                </a:ext>
+              </a:extLst>
+            </p:cNvPr>
+            <p:cNvGrpSpPr/>
+            <p:nvPr/>
+          </p:nvGrpSpPr>
+          <p:grpSpPr>
+            <a:xfrm>
+              <a:off x="2455200" y="1441588"/>
+              <a:ext cx="6490737" cy="2068369"/>
+              <a:chOff x="1471519" y="429950"/>
+              <a:chExt cx="6490737" cy="2068369"/>
+            </a:xfrm>
+          </p:grpSpPr>
+          <p:sp>
+            <p:nvSpPr>
+              <p:cNvPr id="5" name="Rounded Rectangle 4">
+                <a:extLst>
+                  <a:ext uri="{FF2B5EF4-FFF2-40B4-BE49-F238E27FC236}">
+                    <a16:creationId xmlns:a16="http://schemas.microsoft.com/office/drawing/2014/main" id="{FD653E7B-EDD0-77AE-51CE-8AA6112E426E}"/>
+                  </a:ext>
+                </a:extLst>
+              </p:cNvPr>
+              <p:cNvSpPr/>
+              <p:nvPr/>
+            </p:nvSpPr>
+            <p:spPr>
+              <a:xfrm>
+                <a:off x="1471519" y="896233"/>
+                <a:ext cx="1430921" cy="932566"/>
+              </a:xfrm>
+              <a:prstGeom prst="roundRect">
+                <a:avLst/>
+              </a:prstGeom>
+              <a:noFill/>
+            </p:spPr>
+            <p:style>
+              <a:lnRef idx="2">
+                <a:schemeClr val="accent1">
+                  <a:shade val="15000"/>
+                </a:schemeClr>
+              </a:lnRef>
+              <a:fillRef idx="1">
+                <a:schemeClr val="accent1"/>
+              </a:fillRef>
+              <a:effectRef idx="0">
+                <a:schemeClr val="accent1"/>
+              </a:effectRef>
+              <a:fontRef idx="minor">
+                <a:schemeClr val="lt1"/>
+              </a:fontRef>
+            </p:style>
+            <p:txBody>
+              <a:bodyPr rtlCol="0" anchor="ctr"/>
+              <a:lstStyle/>
+              <a:p>
+                <a:pPr algn="ctr"/>
+                <a:r>
+                  <a:rPr lang="en-US" sz="1600" dirty="0">
+                    <a:solidFill>
+                      <a:schemeClr val="tx1"/>
+                    </a:solidFill>
+                  </a:rPr>
+                  <a:t>Never Incarcerated PWID (D)</a:t>
+                </a:r>
+              </a:p>
+            </p:txBody>
+          </p:sp>
+          <p:sp>
+            <p:nvSpPr>
+              <p:cNvPr id="6" name="Rounded Rectangle 5">
+                <a:extLst>
+                  <a:ext uri="{FF2B5EF4-FFF2-40B4-BE49-F238E27FC236}">
+                    <a16:creationId xmlns:a16="http://schemas.microsoft.com/office/drawing/2014/main" id="{819844E7-9540-E3AC-BF93-3910B9C71C1B}"/>
+                  </a:ext>
+                </a:extLst>
+              </p:cNvPr>
+              <p:cNvSpPr/>
+              <p:nvPr/>
+            </p:nvSpPr>
+            <p:spPr>
+              <a:xfrm>
+                <a:off x="4001427" y="896233"/>
+                <a:ext cx="1430921" cy="932566"/>
+              </a:xfrm>
+              <a:prstGeom prst="roundRect">
+                <a:avLst/>
+              </a:prstGeom>
+              <a:noFill/>
+            </p:spPr>
+            <p:style>
+              <a:lnRef idx="2">
+                <a:schemeClr val="accent1">
+                  <a:shade val="15000"/>
+                </a:schemeClr>
+              </a:lnRef>
+              <a:fillRef idx="1">
+                <a:schemeClr val="accent1"/>
+              </a:fillRef>
+              <a:effectRef idx="0">
+                <a:schemeClr val="accent1"/>
+              </a:effectRef>
+              <a:fontRef idx="minor">
+                <a:schemeClr val="lt1"/>
+              </a:fontRef>
+            </p:style>
+            <p:txBody>
+              <a:bodyPr rtlCol="0" anchor="ctr"/>
+              <a:lstStyle/>
+              <a:p>
+                <a:pPr algn="ctr"/>
+                <a:r>
+                  <a:rPr lang="en-US" sz="1600" dirty="0">
+                    <a:solidFill>
+                      <a:schemeClr val="tx1"/>
+                    </a:solidFill>
+                  </a:rPr>
+                  <a:t>Currently Incarcerated Ex-PWID (J)</a:t>
+                </a:r>
+              </a:p>
+            </p:txBody>
+          </p:sp>
+          <p:sp>
+            <p:nvSpPr>
+              <p:cNvPr id="7" name="Rounded Rectangle 6">
+                <a:extLst>
+                  <a:ext uri="{FF2B5EF4-FFF2-40B4-BE49-F238E27FC236}">
+                    <a16:creationId xmlns:a16="http://schemas.microsoft.com/office/drawing/2014/main" id="{041BFD32-1EFE-6BC5-FF1F-6A4D9B19CCF2}"/>
+                  </a:ext>
+                </a:extLst>
+              </p:cNvPr>
+              <p:cNvSpPr/>
+              <p:nvPr/>
+            </p:nvSpPr>
+            <p:spPr>
+              <a:xfrm>
+                <a:off x="6531335" y="429950"/>
+                <a:ext cx="1430921" cy="932566"/>
+              </a:xfrm>
+              <a:prstGeom prst="roundRect">
+                <a:avLst/>
+              </a:prstGeom>
+              <a:noFill/>
+            </p:spPr>
+            <p:style>
+              <a:lnRef idx="2">
+                <a:schemeClr val="accent1">
+                  <a:shade val="15000"/>
+                </a:schemeClr>
+              </a:lnRef>
+              <a:fillRef idx="1">
+                <a:schemeClr val="accent1"/>
+              </a:fillRef>
+              <a:effectRef idx="0">
+                <a:schemeClr val="accent1"/>
+              </a:effectRef>
+              <a:fontRef idx="minor">
+                <a:schemeClr val="lt1"/>
+              </a:fontRef>
+            </p:style>
+            <p:txBody>
+              <a:bodyPr rtlCol="0" anchor="ctr"/>
+              <a:lstStyle/>
+              <a:p>
+                <a:pPr algn="ctr"/>
+                <a:r>
+                  <a:rPr lang="en-US" sz="1600" dirty="0">
+                    <a:solidFill>
+                      <a:schemeClr val="tx1"/>
+                    </a:solidFill>
+                  </a:rPr>
+                  <a:t>Formerly Incarcerated PWID (F)</a:t>
+                </a:r>
+              </a:p>
+            </p:txBody>
+          </p:sp>
+          <p:sp>
+            <p:nvSpPr>
+              <p:cNvPr id="10" name="Rounded Rectangle 9">
+                <a:extLst>
+                  <a:ext uri="{FF2B5EF4-FFF2-40B4-BE49-F238E27FC236}">
+                    <a16:creationId xmlns:a16="http://schemas.microsoft.com/office/drawing/2014/main" id="{FCA5B2CD-C485-3480-BC8E-46542ED96A56}"/>
+                  </a:ext>
+                </a:extLst>
+              </p:cNvPr>
+              <p:cNvSpPr/>
+              <p:nvPr/>
+            </p:nvSpPr>
+            <p:spPr>
+              <a:xfrm>
+                <a:off x="6531334" y="1565753"/>
+                <a:ext cx="1430921" cy="932566"/>
+              </a:xfrm>
+              <a:prstGeom prst="roundRect">
+                <a:avLst/>
+              </a:prstGeom>
+              <a:noFill/>
+            </p:spPr>
+            <p:style>
+              <a:lnRef idx="2">
+                <a:schemeClr val="accent1">
+                  <a:shade val="15000"/>
+                </a:schemeClr>
+              </a:lnRef>
+              <a:fillRef idx="1">
+                <a:schemeClr val="accent1"/>
+              </a:fillRef>
+              <a:effectRef idx="0">
+                <a:schemeClr val="accent1"/>
+              </a:effectRef>
+              <a:fontRef idx="minor">
+                <a:schemeClr val="lt1"/>
+              </a:fontRef>
+            </p:style>
+            <p:txBody>
+              <a:bodyPr rtlCol="0" anchor="ctr"/>
+              <a:lstStyle/>
+              <a:p>
+                <a:pPr algn="ctr"/>
+                <a:r>
+                  <a:rPr lang="en-US" dirty="0">
+                    <a:solidFill>
+                      <a:schemeClr val="tx1"/>
+                    </a:solidFill>
+                  </a:rPr>
+                  <a:t>Ex-PWID (X)</a:t>
+                </a:r>
+              </a:p>
+            </p:txBody>
+          </p:sp>
+          <p:cxnSp>
+            <p:nvCxnSpPr>
+              <p:cNvPr id="12" name="Straight Arrow Connector 11">
+                <a:extLst>
+                  <a:ext uri="{FF2B5EF4-FFF2-40B4-BE49-F238E27FC236}">
+                    <a16:creationId xmlns:a16="http://schemas.microsoft.com/office/drawing/2014/main" id="{4A8A19BD-FD31-2903-FC14-E9F33F686746}"/>
+                  </a:ext>
+                </a:extLst>
+              </p:cNvPr>
+              <p:cNvCxnSpPr>
+                <a:cxnSpLocks/>
+                <a:stCxn id="5" idx="3"/>
+                <a:endCxn id="6" idx="1"/>
+              </p:cNvCxnSpPr>
+              <p:nvPr/>
+            </p:nvCxnSpPr>
+            <p:spPr>
+              <a:xfrm>
+                <a:off x="2902440" y="1362516"/>
+                <a:ext cx="1098987" cy="0"/>
+              </a:xfrm>
+              <a:prstGeom prst="straightConnector1">
+                <a:avLst/>
+              </a:prstGeom>
+              <a:ln>
+                <a:tailEnd type="triangle"/>
+              </a:ln>
+            </p:spPr>
+            <p:style>
+              <a:lnRef idx="2">
+                <a:schemeClr val="dk1"/>
+              </a:lnRef>
+              <a:fillRef idx="0">
+                <a:schemeClr val="dk1"/>
+              </a:fillRef>
+              <a:effectRef idx="1">
+                <a:schemeClr val="dk1"/>
+              </a:effectRef>
+              <a:fontRef idx="minor">
+                <a:schemeClr val="tx1"/>
+              </a:fontRef>
+            </p:style>
+          </p:cxnSp>
+          <p:cxnSp>
+            <p:nvCxnSpPr>
+              <p:cNvPr id="13" name="Straight Arrow Connector 12">
+                <a:extLst>
+                  <a:ext uri="{FF2B5EF4-FFF2-40B4-BE49-F238E27FC236}">
+                    <a16:creationId xmlns:a16="http://schemas.microsoft.com/office/drawing/2014/main" id="{079607AF-73EA-1DCF-9A03-259F107FFF77}"/>
+                  </a:ext>
+                </a:extLst>
+              </p:cNvPr>
+              <p:cNvCxnSpPr>
+                <a:cxnSpLocks/>
+              </p:cNvCxnSpPr>
+              <p:nvPr/>
+            </p:nvCxnSpPr>
+            <p:spPr>
+              <a:xfrm flipV="1">
+                <a:off x="5432345" y="1064234"/>
+                <a:ext cx="1098987" cy="466283"/>
+              </a:xfrm>
+              <a:prstGeom prst="straightConnector1">
+                <a:avLst/>
+              </a:prstGeom>
+              <a:ln>
+                <a:tailEnd type="triangle"/>
+              </a:ln>
+            </p:spPr>
+            <p:style>
+              <a:lnRef idx="2">
+                <a:schemeClr val="dk1"/>
+              </a:lnRef>
+              <a:fillRef idx="0">
+                <a:schemeClr val="dk1"/>
+              </a:fillRef>
+              <a:effectRef idx="1">
+                <a:schemeClr val="dk1"/>
+              </a:effectRef>
+              <a:fontRef idx="minor">
+                <a:schemeClr val="tx1"/>
+              </a:fontRef>
+            </p:style>
+          </p:cxnSp>
+          <p:cxnSp>
+            <p:nvCxnSpPr>
+              <p:cNvPr id="35" name="Straight Arrow Connector 34">
+                <a:extLst>
+                  <a:ext uri="{FF2B5EF4-FFF2-40B4-BE49-F238E27FC236}">
+                    <a16:creationId xmlns:a16="http://schemas.microsoft.com/office/drawing/2014/main" id="{8C838BB7-DAE8-D83C-8D39-C00317912B10}"/>
+                  </a:ext>
+                </a:extLst>
+              </p:cNvPr>
+              <p:cNvCxnSpPr/>
+              <p:nvPr/>
+            </p:nvCxnSpPr>
+            <p:spPr>
+              <a:xfrm flipH="1">
+                <a:off x="5403117" y="860997"/>
+                <a:ext cx="1098987" cy="436379"/>
+              </a:xfrm>
+              <a:prstGeom prst="straightConnector1">
+                <a:avLst/>
+              </a:prstGeom>
+              <a:ln>
+                <a:tailEnd type="triangle"/>
+              </a:ln>
+            </p:spPr>
+            <p:style>
+              <a:lnRef idx="2">
+                <a:schemeClr val="dk1"/>
+              </a:lnRef>
+              <a:fillRef idx="0">
+                <a:schemeClr val="dk1"/>
+              </a:fillRef>
+              <a:effectRef idx="1">
+                <a:schemeClr val="dk1"/>
+              </a:effectRef>
+              <a:fontRef idx="minor">
+                <a:schemeClr val="tx1"/>
+              </a:fontRef>
+            </p:style>
+          </p:cxnSp>
+          <p:cxnSp>
+            <p:nvCxnSpPr>
+              <p:cNvPr id="36" name="Straight Arrow Connector 35">
+                <a:extLst>
+                  <a:ext uri="{FF2B5EF4-FFF2-40B4-BE49-F238E27FC236}">
+                    <a16:creationId xmlns:a16="http://schemas.microsoft.com/office/drawing/2014/main" id="{F794D6F8-8451-89C2-B0EA-BAE3EF66BC1F}"/>
+                  </a:ext>
+                </a:extLst>
+              </p:cNvPr>
+              <p:cNvCxnSpPr>
+                <a:cxnSpLocks/>
+              </p:cNvCxnSpPr>
+              <p:nvPr/>
+            </p:nvCxnSpPr>
+            <p:spPr>
+              <a:xfrm>
+                <a:off x="5432345" y="1530517"/>
+                <a:ext cx="1069759" cy="431529"/>
+              </a:xfrm>
+              <a:prstGeom prst="straightConnector1">
+                <a:avLst/>
+              </a:prstGeom>
+              <a:ln>
+                <a:tailEnd type="triangle"/>
+              </a:ln>
+            </p:spPr>
+            <p:style>
+              <a:lnRef idx="2">
+                <a:schemeClr val="dk1"/>
+              </a:lnRef>
+              <a:fillRef idx="0">
+                <a:schemeClr val="dk1"/>
+              </a:fillRef>
+              <a:effectRef idx="1">
+                <a:schemeClr val="dk1"/>
+              </a:effectRef>
+              <a:fontRef idx="minor">
+                <a:schemeClr val="tx1"/>
+              </a:fontRef>
+            </p:style>
+          </p:cxnSp>
+        </p:grpSp>
         <p:sp>
           <p:nvSpPr>
-            <p:cNvPr id="5" name="Rounded Rectangle 4">
+            <p:cNvPr id="42" name="Rounded Rectangle 41">
               <a:extLst>
                 <a:ext uri="{FF2B5EF4-FFF2-40B4-BE49-F238E27FC236}">
-                  <a16:creationId xmlns:a16="http://schemas.microsoft.com/office/drawing/2014/main" id="{FD653E7B-EDD0-77AE-51CE-8AA6112E426E}"/>
+                  <a16:creationId xmlns:a16="http://schemas.microsoft.com/office/drawing/2014/main" id="{EA21999C-211C-8849-F77F-3D39DA2BDC76}"/>
                 </a:ext>
               </a:extLst>
             </p:cNvPr>
@@ -3362,169 +3763,7 @@
           </p:nvSpPr>
           <p:spPr>
             <a:xfrm>
-              <a:off x="1471519" y="896233"/>
-              <a:ext cx="1430921" cy="932566"/>
-            </a:xfrm>
-            <a:prstGeom prst="roundRect">
-              <a:avLst/>
-            </a:prstGeom>
-            <a:noFill/>
-          </p:spPr>
-          <p:style>
-            <a:lnRef idx="2">
-              <a:schemeClr val="accent1">
-                <a:shade val="15000"/>
-              </a:schemeClr>
-            </a:lnRef>
-            <a:fillRef idx="1">
-              <a:schemeClr val="accent1"/>
-            </a:fillRef>
-            <a:effectRef idx="0">
-              <a:schemeClr val="accent1"/>
-            </a:effectRef>
-            <a:fontRef idx="minor">
-              <a:schemeClr val="lt1"/>
-            </a:fontRef>
-          </p:style>
-          <p:txBody>
-            <a:bodyPr rtlCol="0" anchor="ctr"/>
-            <a:lstStyle/>
-            <a:p>
-              <a:pPr algn="ctr"/>
-              <a:r>
-                <a:rPr lang="en-US" sz="1600" dirty="0">
-                  <a:solidFill>
-                    <a:schemeClr val="tx1"/>
-                  </a:solidFill>
-                </a:rPr>
-                <a:t>Never Incarcerated PWID (D)</a:t>
-              </a:r>
-            </a:p>
-          </p:txBody>
-        </p:sp>
-        <p:sp>
-          <p:nvSpPr>
-            <p:cNvPr id="6" name="Rounded Rectangle 5">
-              <a:extLst>
-                <a:ext uri="{FF2B5EF4-FFF2-40B4-BE49-F238E27FC236}">
-                  <a16:creationId xmlns:a16="http://schemas.microsoft.com/office/drawing/2014/main" id="{819844E7-9540-E3AC-BF93-3910B9C71C1B}"/>
-                </a:ext>
-              </a:extLst>
-            </p:cNvPr>
-            <p:cNvSpPr/>
-            <p:nvPr/>
-          </p:nvSpPr>
-          <p:spPr>
-            <a:xfrm>
-              <a:off x="4001427" y="896233"/>
-              <a:ext cx="1430921" cy="932566"/>
-            </a:xfrm>
-            <a:prstGeom prst="roundRect">
-              <a:avLst/>
-            </a:prstGeom>
-            <a:noFill/>
-          </p:spPr>
-          <p:style>
-            <a:lnRef idx="2">
-              <a:schemeClr val="accent1">
-                <a:shade val="15000"/>
-              </a:schemeClr>
-            </a:lnRef>
-            <a:fillRef idx="1">
-              <a:schemeClr val="accent1"/>
-            </a:fillRef>
-            <a:effectRef idx="0">
-              <a:schemeClr val="accent1"/>
-            </a:effectRef>
-            <a:fontRef idx="minor">
-              <a:schemeClr val="lt1"/>
-            </a:fontRef>
-          </p:style>
-          <p:txBody>
-            <a:bodyPr rtlCol="0" anchor="ctr"/>
-            <a:lstStyle/>
-            <a:p>
-              <a:pPr algn="ctr"/>
-              <a:r>
-                <a:rPr lang="en-US" sz="1600" dirty="0">
-                  <a:solidFill>
-                    <a:schemeClr val="tx1"/>
-                  </a:solidFill>
-                </a:rPr>
-                <a:t>Currently Incarcerated Ex-PWID (J)</a:t>
-              </a:r>
-            </a:p>
-          </p:txBody>
-        </p:sp>
-        <p:sp>
-          <p:nvSpPr>
-            <p:cNvPr id="7" name="Rounded Rectangle 6">
-              <a:extLst>
-                <a:ext uri="{FF2B5EF4-FFF2-40B4-BE49-F238E27FC236}">
-                  <a16:creationId xmlns:a16="http://schemas.microsoft.com/office/drawing/2014/main" id="{041BFD32-1EFE-6BC5-FF1F-6A4D9B19CCF2}"/>
-                </a:ext>
-              </a:extLst>
-            </p:cNvPr>
-            <p:cNvSpPr/>
-            <p:nvPr/>
-          </p:nvSpPr>
-          <p:spPr>
-            <a:xfrm>
-              <a:off x="6531335" y="429950"/>
-              <a:ext cx="1430921" cy="932566"/>
-            </a:xfrm>
-            <a:prstGeom prst="roundRect">
-              <a:avLst/>
-            </a:prstGeom>
-            <a:noFill/>
-          </p:spPr>
-          <p:style>
-            <a:lnRef idx="2">
-              <a:schemeClr val="accent1">
-                <a:shade val="15000"/>
-              </a:schemeClr>
-            </a:lnRef>
-            <a:fillRef idx="1">
-              <a:schemeClr val="accent1"/>
-            </a:fillRef>
-            <a:effectRef idx="0">
-              <a:schemeClr val="accent1"/>
-            </a:effectRef>
-            <a:fontRef idx="minor">
-              <a:schemeClr val="lt1"/>
-            </a:fontRef>
-          </p:style>
-          <p:txBody>
-            <a:bodyPr rtlCol="0" anchor="ctr"/>
-            <a:lstStyle/>
-            <a:p>
-              <a:pPr algn="ctr"/>
-              <a:r>
-                <a:rPr lang="en-US" sz="1600" dirty="0">
-                  <a:solidFill>
-                    <a:schemeClr val="tx1"/>
-                  </a:solidFill>
-                </a:rPr>
-                <a:t>Formerly Incarcerated PWID (F)</a:t>
-              </a:r>
-            </a:p>
-          </p:txBody>
-        </p:sp>
-        <p:sp>
-          <p:nvSpPr>
-            <p:cNvPr id="10" name="Rounded Rectangle 9">
-              <a:extLst>
-                <a:ext uri="{FF2B5EF4-FFF2-40B4-BE49-F238E27FC236}">
-                  <a16:creationId xmlns:a16="http://schemas.microsoft.com/office/drawing/2014/main" id="{FCA5B2CD-C485-3480-BC8E-46542ED96A56}"/>
-                </a:ext>
-              </a:extLst>
-            </p:cNvPr>
-            <p:cNvSpPr/>
-            <p:nvPr/>
-          </p:nvSpPr>
-          <p:spPr>
-            <a:xfrm>
-              <a:off x="6531334" y="1565753"/>
+              <a:off x="4985108" y="4390534"/>
               <a:ext cx="1430921" cy="932566"/>
             </a:xfrm>
             <a:prstGeom prst="roundRect">
@@ -3559,31 +3798,30 @@
                     <a:schemeClr val="tx1"/>
                   </a:solidFill>
                 </a:rPr>
-                <a:t>Ex-PWID (X)</a:t>
+                <a:t>Death</a:t>
               </a:r>
             </a:p>
           </p:txBody>
         </p:sp>
         <p:cxnSp>
           <p:nvCxnSpPr>
-            <p:cNvPr id="12" name="Straight Arrow Connector 11">
+            <p:cNvPr id="44" name="Straight Arrow Connector 43">
               <a:extLst>
                 <a:ext uri="{FF2B5EF4-FFF2-40B4-BE49-F238E27FC236}">
-                  <a16:creationId xmlns:a16="http://schemas.microsoft.com/office/drawing/2014/main" id="{4A8A19BD-FD31-2903-FC14-E9F33F686746}"/>
+                  <a16:creationId xmlns:a16="http://schemas.microsoft.com/office/drawing/2014/main" id="{EBF5CEE7-EE0D-7D45-12BD-B1DA1B36362F}"/>
                 </a:ext>
               </a:extLst>
             </p:cNvPr>
             <p:cNvCxnSpPr>
-              <a:cxnSpLocks/>
-              <a:stCxn id="5" idx="3"/>
-              <a:endCxn id="6" idx="1"/>
+              <a:stCxn id="5" idx="2"/>
+              <a:endCxn id="42" idx="0"/>
             </p:cNvCxnSpPr>
             <p:nvPr/>
           </p:nvCxnSpPr>
           <p:spPr>
             <a:xfrm>
-              <a:off x="2902440" y="1362516"/>
-              <a:ext cx="1098987" cy="0"/>
+              <a:off x="3170661" y="2840437"/>
+              <a:ext cx="2529908" cy="1550097"/>
             </a:xfrm>
             <a:prstGeom prst="straightConnector1">
               <a:avLst/>
@@ -3609,22 +3847,23 @@
         </p:cxnSp>
         <p:cxnSp>
           <p:nvCxnSpPr>
-            <p:cNvPr id="13" name="Straight Arrow Connector 12">
+            <p:cNvPr id="46" name="Straight Arrow Connector 45">
               <a:extLst>
                 <a:ext uri="{FF2B5EF4-FFF2-40B4-BE49-F238E27FC236}">
-                  <a16:creationId xmlns:a16="http://schemas.microsoft.com/office/drawing/2014/main" id="{079607AF-73EA-1DCF-9A03-259F107FFF77}"/>
+                  <a16:creationId xmlns:a16="http://schemas.microsoft.com/office/drawing/2014/main" id="{F1068303-5A2A-4DE6-E242-2FD485D6C3A1}"/>
                 </a:ext>
               </a:extLst>
             </p:cNvPr>
             <p:cNvCxnSpPr>
-              <a:cxnSpLocks/>
+              <a:stCxn id="6" idx="2"/>
+              <a:endCxn id="42" idx="0"/>
             </p:cNvCxnSpPr>
             <p:nvPr/>
           </p:nvCxnSpPr>
           <p:spPr>
-            <a:xfrm flipV="1">
-              <a:off x="5432345" y="1064234"/>
-              <a:ext cx="1098987" cy="466283"/>
+            <a:xfrm>
+              <a:off x="5700569" y="2840437"/>
+              <a:ext cx="0" cy="1550097"/>
             </a:xfrm>
             <a:prstGeom prst="straightConnector1">
               <a:avLst/>
@@ -3650,20 +3889,23 @@
         </p:cxnSp>
         <p:cxnSp>
           <p:nvCxnSpPr>
-            <p:cNvPr id="35" name="Straight Arrow Connector 34">
+            <p:cNvPr id="48" name="Straight Arrow Connector 47">
               <a:extLst>
                 <a:ext uri="{FF2B5EF4-FFF2-40B4-BE49-F238E27FC236}">
-                  <a16:creationId xmlns:a16="http://schemas.microsoft.com/office/drawing/2014/main" id="{8C838BB7-DAE8-D83C-8D39-C00317912B10}"/>
+                  <a16:creationId xmlns:a16="http://schemas.microsoft.com/office/drawing/2014/main" id="{0E6045F1-5633-6798-C628-1924A77D49F4}"/>
                 </a:ext>
               </a:extLst>
             </p:cNvPr>
-            <p:cNvCxnSpPr/>
+            <p:cNvCxnSpPr>
+              <a:stCxn id="10" idx="2"/>
+              <a:endCxn id="42" idx="0"/>
+            </p:cNvCxnSpPr>
             <p:nvPr/>
           </p:nvCxnSpPr>
           <p:spPr>
             <a:xfrm flipH="1">
-              <a:off x="5403117" y="860997"/>
-              <a:ext cx="1098987" cy="436379"/>
+              <a:off x="5700569" y="3509957"/>
+              <a:ext cx="2529907" cy="880577"/>
             </a:xfrm>
             <a:prstGeom prst="straightConnector1">
               <a:avLst/>
@@ -3689,25 +3931,28 @@
         </p:cxnSp>
         <p:cxnSp>
           <p:nvCxnSpPr>
-            <p:cNvPr id="36" name="Straight Arrow Connector 35">
+            <p:cNvPr id="50" name="Elbow Connector 49">
               <a:extLst>
                 <a:ext uri="{FF2B5EF4-FFF2-40B4-BE49-F238E27FC236}">
-                  <a16:creationId xmlns:a16="http://schemas.microsoft.com/office/drawing/2014/main" id="{F794D6F8-8451-89C2-B0EA-BAE3EF66BC1F}"/>
+                  <a16:creationId xmlns:a16="http://schemas.microsoft.com/office/drawing/2014/main" id="{BD059FAF-83F6-1419-20AA-9BC758023217}"/>
                 </a:ext>
               </a:extLst>
             </p:cNvPr>
             <p:cNvCxnSpPr>
-              <a:cxnSpLocks/>
+              <a:stCxn id="7" idx="3"/>
+              <a:endCxn id="42" idx="3"/>
             </p:cNvCxnSpPr>
             <p:nvPr/>
           </p:nvCxnSpPr>
           <p:spPr>
-            <a:xfrm>
-              <a:off x="5432345" y="1530517"/>
-              <a:ext cx="1069759" cy="431529"/>
+            <a:xfrm flipH="1">
+              <a:off x="6416029" y="1907871"/>
+              <a:ext cx="2529908" cy="2948946"/>
             </a:xfrm>
-            <a:prstGeom prst="straightConnector1">
-              <a:avLst/>
+            <a:prstGeom prst="bentConnector3">
+              <a:avLst>
+                <a:gd name="adj1" fmla="val -9036"/>
+              </a:avLst>
             </a:prstGeom>
             <a:ln>
               <a:tailEnd type="triangle"/>
@@ -3729,230 +3974,6 @@
           </p:style>
         </p:cxnSp>
       </p:grpSp>
-      <p:sp>
-        <p:nvSpPr>
-          <p:cNvPr id="42" name="Rounded Rectangle 41">
-            <a:extLst>
-              <a:ext uri="{FF2B5EF4-FFF2-40B4-BE49-F238E27FC236}">
-                <a16:creationId xmlns:a16="http://schemas.microsoft.com/office/drawing/2014/main" id="{EA21999C-211C-8849-F77F-3D39DA2BDC76}"/>
-              </a:ext>
-            </a:extLst>
-          </p:cNvPr>
-          <p:cNvSpPr/>
-          <p:nvPr/>
-        </p:nvSpPr>
-        <p:spPr>
-          <a:xfrm>
-            <a:off x="4985108" y="4390534"/>
-            <a:ext cx="1430921" cy="932566"/>
-          </a:xfrm>
-          <a:prstGeom prst="roundRect">
-            <a:avLst/>
-          </a:prstGeom>
-          <a:noFill/>
-        </p:spPr>
-        <p:style>
-          <a:lnRef idx="2">
-            <a:schemeClr val="accent1">
-              <a:shade val="15000"/>
-            </a:schemeClr>
-          </a:lnRef>
-          <a:fillRef idx="1">
-            <a:schemeClr val="accent1"/>
-          </a:fillRef>
-          <a:effectRef idx="0">
-            <a:schemeClr val="accent1"/>
-          </a:effectRef>
-          <a:fontRef idx="minor">
-            <a:schemeClr val="lt1"/>
-          </a:fontRef>
-        </p:style>
-        <p:txBody>
-          <a:bodyPr rtlCol="0" anchor="ctr"/>
-          <a:lstStyle/>
-          <a:p>
-            <a:pPr algn="ctr"/>
-            <a:r>
-              <a:rPr lang="en-US" dirty="0">
-                <a:solidFill>
-                  <a:schemeClr val="tx1"/>
-                </a:solidFill>
-              </a:rPr>
-              <a:t>Death</a:t>
-            </a:r>
-          </a:p>
-        </p:txBody>
-      </p:sp>
-      <p:cxnSp>
-        <p:nvCxnSpPr>
-          <p:cNvPr id="44" name="Straight Arrow Connector 43">
-            <a:extLst>
-              <a:ext uri="{FF2B5EF4-FFF2-40B4-BE49-F238E27FC236}">
-                <a16:creationId xmlns:a16="http://schemas.microsoft.com/office/drawing/2014/main" id="{EBF5CEE7-EE0D-7D45-12BD-B1DA1B36362F}"/>
-              </a:ext>
-            </a:extLst>
-          </p:cNvPr>
-          <p:cNvCxnSpPr>
-            <a:stCxn id="5" idx="2"/>
-            <a:endCxn id="42" idx="0"/>
-          </p:cNvCxnSpPr>
-          <p:nvPr/>
-        </p:nvCxnSpPr>
-        <p:spPr>
-          <a:xfrm>
-            <a:off x="3170661" y="2840437"/>
-            <a:ext cx="2529908" cy="1550097"/>
-          </a:xfrm>
-          <a:prstGeom prst="straightConnector1">
-            <a:avLst/>
-          </a:prstGeom>
-          <a:ln>
-            <a:tailEnd type="triangle"/>
-          </a:ln>
-        </p:spPr>
-        <p:style>
-          <a:lnRef idx="2">
-            <a:schemeClr val="dk1"/>
-          </a:lnRef>
-          <a:fillRef idx="0">
-            <a:schemeClr val="dk1"/>
-          </a:fillRef>
-          <a:effectRef idx="1">
-            <a:schemeClr val="dk1"/>
-          </a:effectRef>
-          <a:fontRef idx="minor">
-            <a:schemeClr val="tx1"/>
-          </a:fontRef>
-        </p:style>
-      </p:cxnSp>
-      <p:cxnSp>
-        <p:nvCxnSpPr>
-          <p:cNvPr id="46" name="Straight Arrow Connector 45">
-            <a:extLst>
-              <a:ext uri="{FF2B5EF4-FFF2-40B4-BE49-F238E27FC236}">
-                <a16:creationId xmlns:a16="http://schemas.microsoft.com/office/drawing/2014/main" id="{F1068303-5A2A-4DE6-E242-2FD485D6C3A1}"/>
-              </a:ext>
-            </a:extLst>
-          </p:cNvPr>
-          <p:cNvCxnSpPr>
-            <a:stCxn id="6" idx="2"/>
-            <a:endCxn id="42" idx="0"/>
-          </p:cNvCxnSpPr>
-          <p:nvPr/>
-        </p:nvCxnSpPr>
-        <p:spPr>
-          <a:xfrm>
-            <a:off x="5700569" y="2840437"/>
-            <a:ext cx="0" cy="1550097"/>
-          </a:xfrm>
-          <a:prstGeom prst="straightConnector1">
-            <a:avLst/>
-          </a:prstGeom>
-          <a:ln>
-            <a:tailEnd type="triangle"/>
-          </a:ln>
-        </p:spPr>
-        <p:style>
-          <a:lnRef idx="2">
-            <a:schemeClr val="dk1"/>
-          </a:lnRef>
-          <a:fillRef idx="0">
-            <a:schemeClr val="dk1"/>
-          </a:fillRef>
-          <a:effectRef idx="1">
-            <a:schemeClr val="dk1"/>
-          </a:effectRef>
-          <a:fontRef idx="minor">
-            <a:schemeClr val="tx1"/>
-          </a:fontRef>
-        </p:style>
-      </p:cxnSp>
-      <p:cxnSp>
-        <p:nvCxnSpPr>
-          <p:cNvPr id="48" name="Straight Arrow Connector 47">
-            <a:extLst>
-              <a:ext uri="{FF2B5EF4-FFF2-40B4-BE49-F238E27FC236}">
-                <a16:creationId xmlns:a16="http://schemas.microsoft.com/office/drawing/2014/main" id="{0E6045F1-5633-6798-C628-1924A77D49F4}"/>
-              </a:ext>
-            </a:extLst>
-          </p:cNvPr>
-          <p:cNvCxnSpPr>
-            <a:stCxn id="10" idx="2"/>
-            <a:endCxn id="42" idx="0"/>
-          </p:cNvCxnSpPr>
-          <p:nvPr/>
-        </p:nvCxnSpPr>
-        <p:spPr>
-          <a:xfrm flipH="1">
-            <a:off x="5700569" y="3509957"/>
-            <a:ext cx="2529907" cy="880577"/>
-          </a:xfrm>
-          <a:prstGeom prst="straightConnector1">
-            <a:avLst/>
-          </a:prstGeom>
-          <a:ln>
-            <a:tailEnd type="triangle"/>
-          </a:ln>
-        </p:spPr>
-        <p:style>
-          <a:lnRef idx="2">
-            <a:schemeClr val="dk1"/>
-          </a:lnRef>
-          <a:fillRef idx="0">
-            <a:schemeClr val="dk1"/>
-          </a:fillRef>
-          <a:effectRef idx="1">
-            <a:schemeClr val="dk1"/>
-          </a:effectRef>
-          <a:fontRef idx="minor">
-            <a:schemeClr val="tx1"/>
-          </a:fontRef>
-        </p:style>
-      </p:cxnSp>
-      <p:cxnSp>
-        <p:nvCxnSpPr>
-          <p:cNvPr id="50" name="Elbow Connector 49">
-            <a:extLst>
-              <a:ext uri="{FF2B5EF4-FFF2-40B4-BE49-F238E27FC236}">
-                <a16:creationId xmlns:a16="http://schemas.microsoft.com/office/drawing/2014/main" id="{BD059FAF-83F6-1419-20AA-9BC758023217}"/>
-              </a:ext>
-            </a:extLst>
-          </p:cNvPr>
-          <p:cNvCxnSpPr>
-            <a:stCxn id="7" idx="3"/>
-            <a:endCxn id="42" idx="3"/>
-          </p:cNvCxnSpPr>
-          <p:nvPr/>
-        </p:nvCxnSpPr>
-        <p:spPr>
-          <a:xfrm flipH="1">
-            <a:off x="6416029" y="1907871"/>
-            <a:ext cx="2529908" cy="2948946"/>
-          </a:xfrm>
-          <a:prstGeom prst="bentConnector3">
-            <a:avLst>
-              <a:gd name="adj1" fmla="val -9036"/>
-            </a:avLst>
-          </a:prstGeom>
-          <a:ln>
-            <a:tailEnd type="triangle"/>
-          </a:ln>
-        </p:spPr>
-        <p:style>
-          <a:lnRef idx="2">
-            <a:schemeClr val="dk1"/>
-          </a:lnRef>
-          <a:fillRef idx="0">
-            <a:schemeClr val="dk1"/>
-          </a:fillRef>
-          <a:effectRef idx="1">
-            <a:schemeClr val="dk1"/>
-          </a:effectRef>
-          <a:fontRef idx="minor">
-            <a:schemeClr val="tx1"/>
-          </a:fontRef>
-        </p:style>
-      </p:cxnSp>
       <p:sp>
         <p:nvSpPr>
           <p:cNvPr id="51" name="TextBox 50">

--- a/Model schematic.pptx
+++ b/Model schematic.pptx
@@ -7,7 +7,9 @@
   <p:sldIdLst>
     <p:sldId id="256" r:id="rId2"/>
     <p:sldId id="257" r:id="rId3"/>
-    <p:sldId id="258" r:id="rId4"/>
+    <p:sldId id="259" r:id="rId4"/>
+    <p:sldId id="260" r:id="rId5"/>
+    <p:sldId id="258" r:id="rId6"/>
   </p:sldIdLst>
   <p:sldSz cx="12192000" cy="6858000"/>
   <p:notesSz cx="6858000" cy="9144000"/>
@@ -261,7 +263,7 @@
           <a:p>
             <a:fld id="{4ACD6CCD-50EB-0843-8C90-55A06B658EEA}" type="datetimeFigureOut">
               <a:rPr lang="en-US" smtClean="0"/>
-              <a:t>4/23/26</a:t>
+              <a:t>5/5/26</a:t>
             </a:fld>
             <a:endParaRPr lang="en-US"/>
           </a:p>
@@ -459,7 +461,7 @@
           <a:p>
             <a:fld id="{4ACD6CCD-50EB-0843-8C90-55A06B658EEA}" type="datetimeFigureOut">
               <a:rPr lang="en-US" smtClean="0"/>
-              <a:t>4/23/26</a:t>
+              <a:t>5/5/26</a:t>
             </a:fld>
             <a:endParaRPr lang="en-US"/>
           </a:p>
@@ -667,7 +669,7 @@
           <a:p>
             <a:fld id="{4ACD6CCD-50EB-0843-8C90-55A06B658EEA}" type="datetimeFigureOut">
               <a:rPr lang="en-US" smtClean="0"/>
-              <a:t>4/23/26</a:t>
+              <a:t>5/5/26</a:t>
             </a:fld>
             <a:endParaRPr lang="en-US"/>
           </a:p>
@@ -865,7 +867,7 @@
           <a:p>
             <a:fld id="{4ACD6CCD-50EB-0843-8C90-55A06B658EEA}" type="datetimeFigureOut">
               <a:rPr lang="en-US" smtClean="0"/>
-              <a:t>4/23/26</a:t>
+              <a:t>5/5/26</a:t>
             </a:fld>
             <a:endParaRPr lang="en-US"/>
           </a:p>
@@ -1140,7 +1142,7 @@
           <a:p>
             <a:fld id="{4ACD6CCD-50EB-0843-8C90-55A06B658EEA}" type="datetimeFigureOut">
               <a:rPr lang="en-US" smtClean="0"/>
-              <a:t>4/23/26</a:t>
+              <a:t>5/5/26</a:t>
             </a:fld>
             <a:endParaRPr lang="en-US"/>
           </a:p>
@@ -1405,7 +1407,7 @@
           <a:p>
             <a:fld id="{4ACD6CCD-50EB-0843-8C90-55A06B658EEA}" type="datetimeFigureOut">
               <a:rPr lang="en-US" smtClean="0"/>
-              <a:t>4/23/26</a:t>
+              <a:t>5/5/26</a:t>
             </a:fld>
             <a:endParaRPr lang="en-US"/>
           </a:p>
@@ -1817,7 +1819,7 @@
           <a:p>
             <a:fld id="{4ACD6CCD-50EB-0843-8C90-55A06B658EEA}" type="datetimeFigureOut">
               <a:rPr lang="en-US" smtClean="0"/>
-              <a:t>4/23/26</a:t>
+              <a:t>5/5/26</a:t>
             </a:fld>
             <a:endParaRPr lang="en-US"/>
           </a:p>
@@ -1958,7 +1960,7 @@
           <a:p>
             <a:fld id="{4ACD6CCD-50EB-0843-8C90-55A06B658EEA}" type="datetimeFigureOut">
               <a:rPr lang="en-US" smtClean="0"/>
-              <a:t>4/23/26</a:t>
+              <a:t>5/5/26</a:t>
             </a:fld>
             <a:endParaRPr lang="en-US"/>
           </a:p>
@@ -2071,7 +2073,7 @@
           <a:p>
             <a:fld id="{4ACD6CCD-50EB-0843-8C90-55A06B658EEA}" type="datetimeFigureOut">
               <a:rPr lang="en-US" smtClean="0"/>
-              <a:t>4/23/26</a:t>
+              <a:t>5/5/26</a:t>
             </a:fld>
             <a:endParaRPr lang="en-US"/>
           </a:p>
@@ -2382,7 +2384,7 @@
           <a:p>
             <a:fld id="{4ACD6CCD-50EB-0843-8C90-55A06B658EEA}" type="datetimeFigureOut">
               <a:rPr lang="en-US" smtClean="0"/>
-              <a:t>4/23/26</a:t>
+              <a:t>5/5/26</a:t>
             </a:fld>
             <a:endParaRPr lang="en-US"/>
           </a:p>
@@ -2670,7 +2672,7 @@
           <a:p>
             <a:fld id="{4ACD6CCD-50EB-0843-8C90-55A06B658EEA}" type="datetimeFigureOut">
               <a:rPr lang="en-US" smtClean="0"/>
-              <a:t>4/23/26</a:t>
+              <a:t>5/5/26</a:t>
             </a:fld>
             <a:endParaRPr lang="en-US"/>
           </a:p>
@@ -2911,7 +2913,7 @@
           <a:p>
             <a:fld id="{4ACD6CCD-50EB-0843-8C90-55A06B658EEA}" type="datetimeFigureOut">
               <a:rPr lang="en-US" smtClean="0"/>
-              <a:t>4/23/26</a:t>
+              <a:t>5/5/26</a:t>
             </a:fld>
             <a:endParaRPr lang="en-US"/>
           </a:p>
@@ -3330,10 +3332,10 @@
       </p:grpSpPr>
       <p:grpSp>
         <p:nvGrpSpPr>
-          <p:cNvPr id="2" name="Group 1">
+          <p:cNvPr id="82" name="Group 81">
             <a:extLst>
               <a:ext uri="{FF2B5EF4-FFF2-40B4-BE49-F238E27FC236}">
-                <a16:creationId xmlns:a16="http://schemas.microsoft.com/office/drawing/2014/main" id="{3D847DE0-80EF-9133-A931-FF681477489F}"/>
+                <a16:creationId xmlns:a16="http://schemas.microsoft.com/office/drawing/2014/main" id="{EEE0C784-755A-90B5-EA20-F9DDAA2B54FC}"/>
               </a:ext>
             </a:extLst>
           </p:cNvPr>
@@ -3342,10 +3344,10 @@
         </p:nvGrpSpPr>
         <p:grpSpPr>
           <a:xfrm>
-            <a:off x="2455200" y="1441588"/>
-            <a:ext cx="6490737" cy="3881512"/>
-            <a:chOff x="2455200" y="1441588"/>
-            <a:chExt cx="6490737" cy="3881512"/>
+            <a:off x="154382" y="551441"/>
+            <a:ext cx="11622286" cy="5681106"/>
+            <a:chOff x="154382" y="551441"/>
+            <a:chExt cx="11622286" cy="5681106"/>
           </a:xfrm>
         </p:grpSpPr>
         <p:grpSp>
@@ -3362,10 +3364,10 @@
           </p:nvGrpSpPr>
           <p:grpSpPr>
             <a:xfrm>
-              <a:off x="2455200" y="1441588"/>
-              <a:ext cx="6490737" cy="2068369"/>
-              <a:chOff x="1471519" y="429950"/>
-              <a:chExt cx="6490737" cy="2068369"/>
+              <a:off x="154382" y="989598"/>
+              <a:ext cx="6391759" cy="2469203"/>
+              <a:chOff x="1471519" y="219121"/>
+              <a:chExt cx="6391759" cy="2469203"/>
             </a:xfrm>
           </p:grpSpPr>
           <p:sp>
@@ -3490,7 +3492,7 @@
             </p:nvSpPr>
             <p:spPr>
               <a:xfrm>
-                <a:off x="6531335" y="429950"/>
+                <a:off x="6432357" y="219121"/>
                 <a:ext cx="1430921" cy="932566"/>
               </a:xfrm>
               <a:prstGeom prst="roundRect">
@@ -3544,7 +3546,7 @@
             </p:nvSpPr>
             <p:spPr>
               <a:xfrm>
-                <a:off x="6531334" y="1565753"/>
+                <a:off x="6432357" y="1755758"/>
                 <a:ext cx="1430921" cy="932566"/>
               </a:xfrm>
               <a:prstGeom prst="roundRect">
@@ -3638,13 +3640,15 @@
               </p:cNvPr>
               <p:cNvCxnSpPr>
                 <a:cxnSpLocks/>
+                <a:stCxn id="6" idx="3"/>
+                <a:endCxn id="7" idx="1"/>
               </p:cNvCxnSpPr>
               <p:nvPr/>
             </p:nvCxnSpPr>
             <p:spPr>
               <a:xfrm flipV="1">
-                <a:off x="5432345" y="1064234"/>
-                <a:ext cx="1098987" cy="466283"/>
+                <a:off x="5432348" y="685404"/>
+                <a:ext cx="1000009" cy="677112"/>
               </a:xfrm>
               <a:prstGeom prst="straightConnector1">
                 <a:avLst/>
@@ -3677,13 +3681,15 @@
                   </a:ext>
                 </a:extLst>
               </p:cNvPr>
-              <p:cNvCxnSpPr/>
+              <p:cNvCxnSpPr>
+                <a:cxnSpLocks/>
+              </p:cNvCxnSpPr>
               <p:nvPr/>
             </p:nvCxnSpPr>
             <p:spPr>
               <a:xfrm flipH="1">
-                <a:off x="5403117" y="860997"/>
-                <a:ext cx="1098987" cy="436379"/>
+                <a:off x="5430985" y="501697"/>
+                <a:ext cx="996978" cy="633788"/>
               </a:xfrm>
               <a:prstGeom prst="straightConnector1">
                 <a:avLst/>
@@ -3718,13 +3724,15 @@
               </p:cNvPr>
               <p:cNvCxnSpPr>
                 <a:cxnSpLocks/>
+                <a:stCxn id="6" idx="3"/>
+                <a:endCxn id="10" idx="1"/>
               </p:cNvCxnSpPr>
               <p:nvPr/>
             </p:nvCxnSpPr>
             <p:spPr>
               <a:xfrm>
-                <a:off x="5432345" y="1530517"/>
-                <a:ext cx="1069759" cy="431529"/>
+                <a:off x="5432348" y="1362516"/>
+                <a:ext cx="1000009" cy="859525"/>
               </a:xfrm>
               <a:prstGeom prst="straightConnector1">
                 <a:avLst/>
@@ -3751,94 +3759,1124 @@
         </p:grpSp>
         <p:sp>
           <p:nvSpPr>
-            <p:cNvPr id="42" name="Rounded Rectangle 41">
+            <p:cNvPr id="51" name="TextBox 50">
               <a:extLst>
                 <a:ext uri="{FF2B5EF4-FFF2-40B4-BE49-F238E27FC236}">
-                  <a16:creationId xmlns:a16="http://schemas.microsoft.com/office/drawing/2014/main" id="{EA21999C-211C-8849-F77F-3D39DA2BDC76}"/>
+                  <a16:creationId xmlns:a16="http://schemas.microsoft.com/office/drawing/2014/main" id="{1A7A4915-91AE-B290-8566-B5E8330B2316}"/>
                 </a:ext>
               </a:extLst>
             </p:cNvPr>
-            <p:cNvSpPr/>
+            <p:cNvSpPr txBox="1"/>
             <p:nvPr/>
           </p:nvSpPr>
           <p:spPr>
             <a:xfrm>
-              <a:off x="4985108" y="4390534"/>
-              <a:ext cx="1430921" cy="932566"/>
+              <a:off x="1930341" y="551441"/>
+              <a:ext cx="2938818" cy="400110"/>
             </a:xfrm>
-            <a:prstGeom prst="roundRect">
+            <a:prstGeom prst="rect">
               <a:avLst/>
             </a:prstGeom>
             <a:noFill/>
           </p:spPr>
-          <p:style>
-            <a:lnRef idx="2">
-              <a:schemeClr val="accent1">
-                <a:shade val="15000"/>
-              </a:schemeClr>
-            </a:lnRef>
-            <a:fillRef idx="1">
-              <a:schemeClr val="accent1"/>
-            </a:fillRef>
-            <a:effectRef idx="0">
-              <a:schemeClr val="accent1"/>
-            </a:effectRef>
-            <a:fontRef idx="minor">
-              <a:schemeClr val="lt1"/>
-            </a:fontRef>
-          </p:style>
           <p:txBody>
-            <a:bodyPr rtlCol="0" anchor="ctr"/>
+            <a:bodyPr wrap="none" rtlCol="0">
+              <a:spAutoFit/>
+            </a:bodyPr>
             <a:lstStyle/>
             <a:p>
-              <a:pPr algn="ctr"/>
               <a:r>
-                <a:rPr lang="en-US" dirty="0">
-                  <a:solidFill>
-                    <a:schemeClr val="tx1"/>
-                  </a:solidFill>
-                </a:rPr>
-                <a:t>Death</a:t>
+                <a:rPr lang="en-US" sz="2000" b="1" dirty="0"/>
+                <a:t>Incarceration dynamics</a:t>
               </a:r>
             </a:p>
           </p:txBody>
         </p:sp>
+        <p:grpSp>
+          <p:nvGrpSpPr>
+            <p:cNvPr id="3" name="Group 2">
+              <a:extLst>
+                <a:ext uri="{FF2B5EF4-FFF2-40B4-BE49-F238E27FC236}">
+                  <a16:creationId xmlns:a16="http://schemas.microsoft.com/office/drawing/2014/main" id="{2E99952C-232C-1372-ACF4-7AD2D0E52102}"/>
+                </a:ext>
+              </a:extLst>
+            </p:cNvPr>
+            <p:cNvGrpSpPr/>
+            <p:nvPr/>
+          </p:nvGrpSpPr>
+          <p:grpSpPr>
+            <a:xfrm>
+              <a:off x="7261640" y="1171936"/>
+              <a:ext cx="4023360" cy="2507194"/>
+              <a:chOff x="1153742" y="1174785"/>
+              <a:chExt cx="3680629" cy="2293619"/>
+            </a:xfrm>
+          </p:grpSpPr>
+          <p:sp>
+            <p:nvSpPr>
+              <p:cNvPr id="4" name="Rounded Rectangle 3">
+                <a:extLst>
+                  <a:ext uri="{FF2B5EF4-FFF2-40B4-BE49-F238E27FC236}">
+                    <a16:creationId xmlns:a16="http://schemas.microsoft.com/office/drawing/2014/main" id="{7E225726-A6F1-6D67-BCB6-C499E3EA06A9}"/>
+                  </a:ext>
+                </a:extLst>
+              </p:cNvPr>
+              <p:cNvSpPr/>
+              <p:nvPr/>
+            </p:nvSpPr>
+            <p:spPr>
+              <a:xfrm>
+                <a:off x="2157927" y="1174785"/>
+                <a:ext cx="1683974" cy="478651"/>
+              </a:xfrm>
+              <a:prstGeom prst="roundRect">
+                <a:avLst/>
+              </a:prstGeom>
+              <a:noFill/>
+            </p:spPr>
+            <p:style>
+              <a:lnRef idx="2">
+                <a:schemeClr val="accent1">
+                  <a:shade val="15000"/>
+                </a:schemeClr>
+              </a:lnRef>
+              <a:fillRef idx="1">
+                <a:schemeClr val="accent1"/>
+              </a:fillRef>
+              <a:effectRef idx="0">
+                <a:schemeClr val="accent1"/>
+              </a:effectRef>
+              <a:fontRef idx="minor">
+                <a:schemeClr val="lt1"/>
+              </a:fontRef>
+            </p:style>
+            <p:txBody>
+              <a:bodyPr rtlCol="0" anchor="ctr"/>
+              <a:lstStyle/>
+              <a:p>
+                <a:pPr algn="ctr"/>
+                <a:r>
+                  <a:rPr lang="en-US" sz="1600" dirty="0">
+                    <a:solidFill>
+                      <a:schemeClr val="tx1"/>
+                    </a:solidFill>
+                  </a:rPr>
+                  <a:t>Susceptible (u)</a:t>
+                </a:r>
+              </a:p>
+            </p:txBody>
+          </p:sp>
+          <p:cxnSp>
+            <p:nvCxnSpPr>
+              <p:cNvPr id="8" name="Straight Arrow Connector 7">
+                <a:extLst>
+                  <a:ext uri="{FF2B5EF4-FFF2-40B4-BE49-F238E27FC236}">
+                    <a16:creationId xmlns:a16="http://schemas.microsoft.com/office/drawing/2014/main" id="{AFE0E9AE-8B3B-4B64-9E86-979260D9A7C4}"/>
+                  </a:ext>
+                </a:extLst>
+              </p:cNvPr>
+              <p:cNvCxnSpPr>
+                <a:cxnSpLocks/>
+              </p:cNvCxnSpPr>
+              <p:nvPr/>
+            </p:nvCxnSpPr>
+            <p:spPr>
+              <a:xfrm>
+                <a:off x="2635613" y="1653436"/>
+                <a:ext cx="0" cy="414346"/>
+              </a:xfrm>
+              <a:prstGeom prst="straightConnector1">
+                <a:avLst/>
+              </a:prstGeom>
+              <a:ln>
+                <a:tailEnd type="triangle"/>
+              </a:ln>
+            </p:spPr>
+            <p:style>
+              <a:lnRef idx="2">
+                <a:schemeClr val="dk1"/>
+              </a:lnRef>
+              <a:fillRef idx="0">
+                <a:schemeClr val="dk1"/>
+              </a:fillRef>
+              <a:effectRef idx="1">
+                <a:schemeClr val="dk1"/>
+              </a:effectRef>
+              <a:fontRef idx="minor">
+                <a:schemeClr val="tx1"/>
+              </a:fontRef>
+            </p:style>
+          </p:cxnSp>
+          <p:sp>
+            <p:nvSpPr>
+              <p:cNvPr id="9" name="Rounded Rectangle 8">
+                <a:extLst>
+                  <a:ext uri="{FF2B5EF4-FFF2-40B4-BE49-F238E27FC236}">
+                    <a16:creationId xmlns:a16="http://schemas.microsoft.com/office/drawing/2014/main" id="{671973AD-3B69-E60E-92E7-411987B1CFD8}"/>
+                  </a:ext>
+                </a:extLst>
+              </p:cNvPr>
+              <p:cNvSpPr/>
+              <p:nvPr/>
+            </p:nvSpPr>
+            <p:spPr>
+              <a:xfrm>
+                <a:off x="2157926" y="2989753"/>
+                <a:ext cx="1683974" cy="478651"/>
+              </a:xfrm>
+              <a:prstGeom prst="roundRect">
+                <a:avLst/>
+              </a:prstGeom>
+              <a:noFill/>
+            </p:spPr>
+            <p:style>
+              <a:lnRef idx="2">
+                <a:schemeClr val="accent1">
+                  <a:shade val="15000"/>
+                </a:schemeClr>
+              </a:lnRef>
+              <a:fillRef idx="1">
+                <a:schemeClr val="accent1"/>
+              </a:fillRef>
+              <a:effectRef idx="0">
+                <a:schemeClr val="accent1"/>
+              </a:effectRef>
+              <a:fontRef idx="minor">
+                <a:schemeClr val="lt1"/>
+              </a:fontRef>
+            </p:style>
+            <p:txBody>
+              <a:bodyPr rtlCol="0" anchor="ctr"/>
+              <a:lstStyle/>
+              <a:p>
+                <a:pPr algn="ctr"/>
+                <a:r>
+                  <a:rPr lang="en-US" sz="1600" dirty="0">
+                    <a:solidFill>
+                      <a:schemeClr val="tx1"/>
+                    </a:solidFill>
+                  </a:rPr>
+                  <a:t>Chronic infection (c)</a:t>
+                </a:r>
+              </a:p>
+            </p:txBody>
+          </p:sp>
+          <p:sp>
+            <p:nvSpPr>
+              <p:cNvPr id="11" name="Rounded Rectangle 10">
+                <a:extLst>
+                  <a:ext uri="{FF2B5EF4-FFF2-40B4-BE49-F238E27FC236}">
+                    <a16:creationId xmlns:a16="http://schemas.microsoft.com/office/drawing/2014/main" id="{B29284CE-0C23-7E3C-4C55-21EA2100AB28}"/>
+                  </a:ext>
+                </a:extLst>
+              </p:cNvPr>
+              <p:cNvSpPr/>
+              <p:nvPr/>
+            </p:nvSpPr>
+            <p:spPr>
+              <a:xfrm>
+                <a:off x="1153742" y="2078074"/>
+                <a:ext cx="1683974" cy="478651"/>
+              </a:xfrm>
+              <a:prstGeom prst="roundRect">
+                <a:avLst/>
+              </a:prstGeom>
+              <a:noFill/>
+            </p:spPr>
+            <p:style>
+              <a:lnRef idx="2">
+                <a:schemeClr val="accent1">
+                  <a:shade val="15000"/>
+                </a:schemeClr>
+              </a:lnRef>
+              <a:fillRef idx="1">
+                <a:schemeClr val="accent1"/>
+              </a:fillRef>
+              <a:effectRef idx="0">
+                <a:schemeClr val="accent1"/>
+              </a:effectRef>
+              <a:fontRef idx="minor">
+                <a:schemeClr val="lt1"/>
+              </a:fontRef>
+            </p:style>
+            <p:txBody>
+              <a:bodyPr rtlCol="0" anchor="ctr"/>
+              <a:lstStyle/>
+              <a:p>
+                <a:pPr algn="ctr"/>
+                <a:r>
+                  <a:rPr lang="en-US" sz="1600" dirty="0">
+                    <a:solidFill>
+                      <a:schemeClr val="tx1"/>
+                    </a:solidFill>
+                  </a:rPr>
+                  <a:t>Acute infection (a)</a:t>
+                </a:r>
+              </a:p>
+            </p:txBody>
+          </p:sp>
+          <p:sp>
+            <p:nvSpPr>
+              <p:cNvPr id="14" name="Rounded Rectangle 13">
+                <a:extLst>
+                  <a:ext uri="{FF2B5EF4-FFF2-40B4-BE49-F238E27FC236}">
+                    <a16:creationId xmlns:a16="http://schemas.microsoft.com/office/drawing/2014/main" id="{C6DBEC1D-AC46-9640-0B7E-5A00B469A63A}"/>
+                  </a:ext>
+                </a:extLst>
+              </p:cNvPr>
+              <p:cNvSpPr/>
+              <p:nvPr/>
+            </p:nvSpPr>
+            <p:spPr>
+              <a:xfrm>
+                <a:off x="3150397" y="2078074"/>
+                <a:ext cx="1683974" cy="478651"/>
+              </a:xfrm>
+              <a:prstGeom prst="roundRect">
+                <a:avLst/>
+              </a:prstGeom>
+              <a:noFill/>
+            </p:spPr>
+            <p:style>
+              <a:lnRef idx="2">
+                <a:schemeClr val="accent1">
+                  <a:shade val="15000"/>
+                </a:schemeClr>
+              </a:lnRef>
+              <a:fillRef idx="1">
+                <a:schemeClr val="accent1"/>
+              </a:fillRef>
+              <a:effectRef idx="0">
+                <a:schemeClr val="accent1"/>
+              </a:effectRef>
+              <a:fontRef idx="minor">
+                <a:schemeClr val="lt1"/>
+              </a:fontRef>
+            </p:style>
+            <p:txBody>
+              <a:bodyPr rtlCol="0" anchor="ctr"/>
+              <a:lstStyle/>
+              <a:p>
+                <a:pPr algn="ctr"/>
+                <a:r>
+                  <a:rPr lang="en-US" sz="1600" dirty="0">
+                    <a:solidFill>
+                      <a:schemeClr val="tx1"/>
+                    </a:solidFill>
+                  </a:rPr>
+                  <a:t>Treatment (t)</a:t>
+                </a:r>
+              </a:p>
+            </p:txBody>
+          </p:sp>
+          <p:cxnSp>
+            <p:nvCxnSpPr>
+              <p:cNvPr id="15" name="Straight Arrow Connector 14">
+                <a:extLst>
+                  <a:ext uri="{FF2B5EF4-FFF2-40B4-BE49-F238E27FC236}">
+                    <a16:creationId xmlns:a16="http://schemas.microsoft.com/office/drawing/2014/main" id="{04E83AFE-8E72-B66F-FF9E-75B77009C1F7}"/>
+                  </a:ext>
+                </a:extLst>
+              </p:cNvPr>
+              <p:cNvCxnSpPr>
+                <a:cxnSpLocks/>
+              </p:cNvCxnSpPr>
+              <p:nvPr/>
+            </p:nvCxnSpPr>
+            <p:spPr>
+              <a:xfrm>
+                <a:off x="2635613" y="2556726"/>
+                <a:ext cx="0" cy="414346"/>
+              </a:xfrm>
+              <a:prstGeom prst="straightConnector1">
+                <a:avLst/>
+              </a:prstGeom>
+              <a:ln>
+                <a:tailEnd type="triangle"/>
+              </a:ln>
+            </p:spPr>
+            <p:style>
+              <a:lnRef idx="2">
+                <a:schemeClr val="dk1"/>
+              </a:lnRef>
+              <a:fillRef idx="0">
+                <a:schemeClr val="dk1"/>
+              </a:fillRef>
+              <a:effectRef idx="1">
+                <a:schemeClr val="dk1"/>
+              </a:effectRef>
+              <a:fontRef idx="minor">
+                <a:schemeClr val="tx1"/>
+              </a:fontRef>
+            </p:style>
+          </p:cxnSp>
+          <p:cxnSp>
+            <p:nvCxnSpPr>
+              <p:cNvPr id="16" name="Straight Arrow Connector 15">
+                <a:extLst>
+                  <a:ext uri="{FF2B5EF4-FFF2-40B4-BE49-F238E27FC236}">
+                    <a16:creationId xmlns:a16="http://schemas.microsoft.com/office/drawing/2014/main" id="{44DC0C02-EC2B-7159-5548-73B4ED77A98C}"/>
+                  </a:ext>
+                </a:extLst>
+              </p:cNvPr>
+              <p:cNvCxnSpPr/>
+              <p:nvPr/>
+            </p:nvCxnSpPr>
+            <p:spPr>
+              <a:xfrm flipV="1">
+                <a:off x="3339444" y="2550954"/>
+                <a:ext cx="0" cy="419622"/>
+              </a:xfrm>
+              <a:prstGeom prst="straightConnector1">
+                <a:avLst/>
+              </a:prstGeom>
+              <a:ln>
+                <a:tailEnd type="triangle"/>
+              </a:ln>
+            </p:spPr>
+            <p:style>
+              <a:lnRef idx="2">
+                <a:schemeClr val="dk1"/>
+              </a:lnRef>
+              <a:fillRef idx="0">
+                <a:schemeClr val="dk1"/>
+              </a:fillRef>
+              <a:effectRef idx="1">
+                <a:schemeClr val="dk1"/>
+              </a:effectRef>
+              <a:fontRef idx="minor">
+                <a:schemeClr val="tx1"/>
+              </a:fontRef>
+            </p:style>
+          </p:cxnSp>
+          <p:cxnSp>
+            <p:nvCxnSpPr>
+              <p:cNvPr id="17" name="Straight Arrow Connector 16">
+                <a:extLst>
+                  <a:ext uri="{FF2B5EF4-FFF2-40B4-BE49-F238E27FC236}">
+                    <a16:creationId xmlns:a16="http://schemas.microsoft.com/office/drawing/2014/main" id="{1F47FB46-22DA-3D6F-2D57-A85F37862FF1}"/>
+                  </a:ext>
+                </a:extLst>
+              </p:cNvPr>
+              <p:cNvCxnSpPr/>
+              <p:nvPr/>
+            </p:nvCxnSpPr>
+            <p:spPr>
+              <a:xfrm flipV="1">
+                <a:off x="3331617" y="1648160"/>
+                <a:ext cx="0" cy="419622"/>
+              </a:xfrm>
+              <a:prstGeom prst="straightConnector1">
+                <a:avLst/>
+              </a:prstGeom>
+              <a:ln>
+                <a:tailEnd type="triangle"/>
+              </a:ln>
+            </p:spPr>
+            <p:style>
+              <a:lnRef idx="2">
+                <a:schemeClr val="dk1"/>
+              </a:lnRef>
+              <a:fillRef idx="0">
+                <a:schemeClr val="dk1"/>
+              </a:fillRef>
+              <a:effectRef idx="1">
+                <a:schemeClr val="dk1"/>
+              </a:effectRef>
+              <a:fontRef idx="minor">
+                <a:schemeClr val="tx1"/>
+              </a:fontRef>
+            </p:style>
+          </p:cxnSp>
+          <p:cxnSp>
+            <p:nvCxnSpPr>
+              <p:cNvPr id="18" name="Straight Arrow Connector 17">
+                <a:extLst>
+                  <a:ext uri="{FF2B5EF4-FFF2-40B4-BE49-F238E27FC236}">
+                    <a16:creationId xmlns:a16="http://schemas.microsoft.com/office/drawing/2014/main" id="{32344DBA-33FA-E549-E100-990F4099E6A5}"/>
+                  </a:ext>
+                </a:extLst>
+              </p:cNvPr>
+              <p:cNvCxnSpPr/>
+              <p:nvPr/>
+            </p:nvCxnSpPr>
+            <p:spPr>
+              <a:xfrm flipV="1">
+                <a:off x="2487389" y="1648160"/>
+                <a:ext cx="0" cy="419622"/>
+              </a:xfrm>
+              <a:prstGeom prst="straightConnector1">
+                <a:avLst/>
+              </a:prstGeom>
+              <a:ln>
+                <a:tailEnd type="triangle"/>
+              </a:ln>
+            </p:spPr>
+            <p:style>
+              <a:lnRef idx="2">
+                <a:schemeClr val="dk1"/>
+              </a:lnRef>
+              <a:fillRef idx="0">
+                <a:schemeClr val="dk1"/>
+              </a:fillRef>
+              <a:effectRef idx="1">
+                <a:schemeClr val="dk1"/>
+              </a:effectRef>
+              <a:fontRef idx="minor">
+                <a:schemeClr val="tx1"/>
+              </a:fontRef>
+            </p:style>
+          </p:cxnSp>
+          <p:cxnSp>
+            <p:nvCxnSpPr>
+              <p:cNvPr id="19" name="Straight Arrow Connector 18">
+                <a:extLst>
+                  <a:ext uri="{FF2B5EF4-FFF2-40B4-BE49-F238E27FC236}">
+                    <a16:creationId xmlns:a16="http://schemas.microsoft.com/office/drawing/2014/main" id="{47F558B8-744D-69D0-172D-B7C44CA1AFDA}"/>
+                  </a:ext>
+                </a:extLst>
+              </p:cNvPr>
+              <p:cNvCxnSpPr/>
+              <p:nvPr/>
+            </p:nvCxnSpPr>
+            <p:spPr>
+              <a:xfrm flipV="1">
+                <a:off x="2485302" y="2550955"/>
+                <a:ext cx="0" cy="419622"/>
+              </a:xfrm>
+              <a:prstGeom prst="straightConnector1">
+                <a:avLst/>
+              </a:prstGeom>
+              <a:ln>
+                <a:tailEnd type="triangle"/>
+              </a:ln>
+            </p:spPr>
+            <p:style>
+              <a:lnRef idx="2">
+                <a:schemeClr val="dk1"/>
+              </a:lnRef>
+              <a:fillRef idx="0">
+                <a:schemeClr val="dk1"/>
+              </a:fillRef>
+              <a:effectRef idx="1">
+                <a:schemeClr val="dk1"/>
+              </a:effectRef>
+              <a:fontRef idx="minor">
+                <a:schemeClr val="tx1"/>
+              </a:fontRef>
+            </p:style>
+          </p:cxnSp>
+          <p:cxnSp>
+            <p:nvCxnSpPr>
+              <p:cNvPr id="20" name="Straight Arrow Connector 19">
+                <a:extLst>
+                  <a:ext uri="{FF2B5EF4-FFF2-40B4-BE49-F238E27FC236}">
+                    <a16:creationId xmlns:a16="http://schemas.microsoft.com/office/drawing/2014/main" id="{484BD589-BA71-27C4-F62C-799E9B138EFC}"/>
+                  </a:ext>
+                </a:extLst>
+              </p:cNvPr>
+              <p:cNvCxnSpPr>
+                <a:cxnSpLocks/>
+              </p:cNvCxnSpPr>
+              <p:nvPr/>
+            </p:nvCxnSpPr>
+            <p:spPr>
+              <a:xfrm>
+                <a:off x="3490279" y="1659643"/>
+                <a:ext cx="0" cy="414346"/>
+              </a:xfrm>
+              <a:prstGeom prst="straightConnector1">
+                <a:avLst/>
+              </a:prstGeom>
+              <a:ln>
+                <a:tailEnd type="triangle"/>
+              </a:ln>
+            </p:spPr>
+            <p:style>
+              <a:lnRef idx="2">
+                <a:schemeClr val="dk1"/>
+              </a:lnRef>
+              <a:fillRef idx="0">
+                <a:schemeClr val="dk1"/>
+              </a:fillRef>
+              <a:effectRef idx="1">
+                <a:schemeClr val="dk1"/>
+              </a:effectRef>
+              <a:fontRef idx="minor">
+                <a:schemeClr val="tx1"/>
+              </a:fontRef>
+            </p:style>
+          </p:cxnSp>
+          <p:cxnSp>
+            <p:nvCxnSpPr>
+              <p:cNvPr id="21" name="Straight Arrow Connector 20">
+                <a:extLst>
+                  <a:ext uri="{FF2B5EF4-FFF2-40B4-BE49-F238E27FC236}">
+                    <a16:creationId xmlns:a16="http://schemas.microsoft.com/office/drawing/2014/main" id="{AA952A83-627E-B522-41E0-D71BE494F49E}"/>
+                  </a:ext>
+                </a:extLst>
+              </p:cNvPr>
+              <p:cNvCxnSpPr>
+                <a:cxnSpLocks/>
+              </p:cNvCxnSpPr>
+              <p:nvPr/>
+            </p:nvCxnSpPr>
+            <p:spPr>
+              <a:xfrm>
+                <a:off x="3498107" y="2556231"/>
+                <a:ext cx="0" cy="414346"/>
+              </a:xfrm>
+              <a:prstGeom prst="straightConnector1">
+                <a:avLst/>
+              </a:prstGeom>
+              <a:ln>
+                <a:tailEnd type="triangle"/>
+              </a:ln>
+            </p:spPr>
+            <p:style>
+              <a:lnRef idx="2">
+                <a:schemeClr val="dk1"/>
+              </a:lnRef>
+              <a:fillRef idx="0">
+                <a:schemeClr val="dk1"/>
+              </a:fillRef>
+              <a:effectRef idx="1">
+                <a:schemeClr val="dk1"/>
+              </a:effectRef>
+              <a:fontRef idx="minor">
+                <a:schemeClr val="tx1"/>
+              </a:fontRef>
+            </p:style>
+          </p:cxnSp>
+        </p:grpSp>
+        <p:sp>
+          <p:nvSpPr>
+            <p:cNvPr id="22" name="TextBox 21">
+              <a:extLst>
+                <a:ext uri="{FF2B5EF4-FFF2-40B4-BE49-F238E27FC236}">
+                  <a16:creationId xmlns:a16="http://schemas.microsoft.com/office/drawing/2014/main" id="{85A9343D-C0C3-CEA6-25FC-FE5C6314916E}"/>
+                </a:ext>
+              </a:extLst>
+            </p:cNvPr>
+            <p:cNvSpPr txBox="1"/>
+            <p:nvPr/>
+          </p:nvSpPr>
+          <p:spPr>
+            <a:xfrm>
+              <a:off x="6818879" y="555026"/>
+              <a:ext cx="4567084" cy="400110"/>
+            </a:xfrm>
+            <a:prstGeom prst="rect">
+              <a:avLst/>
+            </a:prstGeom>
+            <a:noFill/>
+          </p:spPr>
+          <p:txBody>
+            <a:bodyPr wrap="none" rtlCol="0">
+              <a:spAutoFit/>
+            </a:bodyPr>
+            <a:lstStyle/>
+            <a:p>
+              <a:r>
+                <a:rPr lang="en-US" sz="2000" b="1" dirty="0"/>
+                <a:t>HCV transmission dynamics for PWID</a:t>
+              </a:r>
+            </a:p>
+          </p:txBody>
+        </p:sp>
+        <p:sp>
+          <p:nvSpPr>
+            <p:cNvPr id="23" name="TextBox 22">
+              <a:extLst>
+                <a:ext uri="{FF2B5EF4-FFF2-40B4-BE49-F238E27FC236}">
+                  <a16:creationId xmlns:a16="http://schemas.microsoft.com/office/drawing/2014/main" id="{45EA3E0A-575A-3D2A-F08A-D85697F47EBF}"/>
+                </a:ext>
+              </a:extLst>
+            </p:cNvPr>
+            <p:cNvSpPr txBox="1"/>
+            <p:nvPr/>
+          </p:nvSpPr>
+          <p:spPr>
+            <a:xfrm>
+              <a:off x="4520216" y="4357401"/>
+              <a:ext cx="3151568" cy="400110"/>
+            </a:xfrm>
+            <a:prstGeom prst="rect">
+              <a:avLst/>
+            </a:prstGeom>
+            <a:noFill/>
+          </p:spPr>
+          <p:txBody>
+            <a:bodyPr wrap="none" rtlCol="0">
+              <a:spAutoFit/>
+            </a:bodyPr>
+            <a:lstStyle/>
+            <a:p>
+              <a:r>
+                <a:rPr lang="en-US" sz="2000" b="1" dirty="0"/>
+                <a:t>Liver disease progression</a:t>
+              </a:r>
+            </a:p>
+          </p:txBody>
+        </p:sp>
+        <p:grpSp>
+          <p:nvGrpSpPr>
+            <p:cNvPr id="24" name="Group 23">
+              <a:extLst>
+                <a:ext uri="{FF2B5EF4-FFF2-40B4-BE49-F238E27FC236}">
+                  <a16:creationId xmlns:a16="http://schemas.microsoft.com/office/drawing/2014/main" id="{843503F6-D4F8-E837-9DE0-4A53E598C1DA}"/>
+                </a:ext>
+              </a:extLst>
+            </p:cNvPr>
+            <p:cNvGrpSpPr/>
+            <p:nvPr/>
+          </p:nvGrpSpPr>
+          <p:grpSpPr>
+            <a:xfrm>
+              <a:off x="323101" y="5172746"/>
+              <a:ext cx="11213111" cy="601347"/>
+              <a:chOff x="242011" y="2431357"/>
+              <a:chExt cx="11213111" cy="601347"/>
+            </a:xfrm>
+          </p:grpSpPr>
+          <p:sp>
+            <p:nvSpPr>
+              <p:cNvPr id="25" name="Rounded Rectangle 24">
+                <a:extLst>
+                  <a:ext uri="{FF2B5EF4-FFF2-40B4-BE49-F238E27FC236}">
+                    <a16:creationId xmlns:a16="http://schemas.microsoft.com/office/drawing/2014/main" id="{05B3D97F-CA06-D52E-2F06-CB2AF7E48FF9}"/>
+                  </a:ext>
+                </a:extLst>
+              </p:cNvPr>
+              <p:cNvSpPr/>
+              <p:nvPr/>
+            </p:nvSpPr>
+            <p:spPr>
+              <a:xfrm>
+                <a:off x="242011" y="2437706"/>
+                <a:ext cx="2195226" cy="594998"/>
+              </a:xfrm>
+              <a:prstGeom prst="roundRect">
+                <a:avLst/>
+              </a:prstGeom>
+              <a:noFill/>
+            </p:spPr>
+            <p:style>
+              <a:lnRef idx="2">
+                <a:schemeClr val="accent1">
+                  <a:shade val="15000"/>
+                </a:schemeClr>
+              </a:lnRef>
+              <a:fillRef idx="1">
+                <a:schemeClr val="accent1"/>
+              </a:fillRef>
+              <a:effectRef idx="0">
+                <a:schemeClr val="accent1"/>
+              </a:effectRef>
+              <a:fontRef idx="minor">
+                <a:schemeClr val="lt1"/>
+              </a:fontRef>
+            </p:style>
+            <p:txBody>
+              <a:bodyPr tIns="0" rtlCol="0" anchor="ctr"/>
+              <a:lstStyle/>
+              <a:p>
+                <a:pPr algn="ctr"/>
+                <a:r>
+                  <a:rPr lang="en-US" dirty="0">
+                    <a:solidFill>
+                      <a:schemeClr val="tx1"/>
+                    </a:solidFill>
+                  </a:rPr>
+                  <a:t>Non-Cirrhosis (NC)</a:t>
+                </a:r>
+              </a:p>
+            </p:txBody>
+          </p:sp>
+          <p:sp>
+            <p:nvSpPr>
+              <p:cNvPr id="26" name="Rounded Rectangle 25">
+                <a:extLst>
+                  <a:ext uri="{FF2B5EF4-FFF2-40B4-BE49-F238E27FC236}">
+                    <a16:creationId xmlns:a16="http://schemas.microsoft.com/office/drawing/2014/main" id="{5831B9D4-5FE6-83C2-40C5-02502F512605}"/>
+                  </a:ext>
+                </a:extLst>
+              </p:cNvPr>
+              <p:cNvSpPr/>
+              <p:nvPr/>
+            </p:nvSpPr>
+            <p:spPr>
+              <a:xfrm>
+                <a:off x="3247973" y="2437706"/>
+                <a:ext cx="2195226" cy="594998"/>
+              </a:xfrm>
+              <a:prstGeom prst="roundRect">
+                <a:avLst/>
+              </a:prstGeom>
+              <a:noFill/>
+            </p:spPr>
+            <p:style>
+              <a:lnRef idx="2">
+                <a:schemeClr val="accent1">
+                  <a:shade val="15000"/>
+                </a:schemeClr>
+              </a:lnRef>
+              <a:fillRef idx="1">
+                <a:schemeClr val="accent1"/>
+              </a:fillRef>
+              <a:effectRef idx="0">
+                <a:schemeClr val="accent1"/>
+              </a:effectRef>
+              <a:fontRef idx="minor">
+                <a:schemeClr val="lt1"/>
+              </a:fontRef>
+            </p:style>
+            <p:txBody>
+              <a:bodyPr tIns="0" rtlCol="0" anchor="ctr"/>
+              <a:lstStyle/>
+              <a:p>
+                <a:pPr algn="ctr"/>
+                <a:r>
+                  <a:rPr lang="en-US" dirty="0">
+                    <a:solidFill>
+                      <a:schemeClr val="tx1"/>
+                    </a:solidFill>
+                  </a:rPr>
+                  <a:t>Compensated Cirrhosis (CC)</a:t>
+                </a:r>
+              </a:p>
+            </p:txBody>
+          </p:sp>
+          <p:sp>
+            <p:nvSpPr>
+              <p:cNvPr id="27" name="Rounded Rectangle 26">
+                <a:extLst>
+                  <a:ext uri="{FF2B5EF4-FFF2-40B4-BE49-F238E27FC236}">
+                    <a16:creationId xmlns:a16="http://schemas.microsoft.com/office/drawing/2014/main" id="{1077FA6D-8C49-4348-A870-91516F3B8983}"/>
+                  </a:ext>
+                </a:extLst>
+              </p:cNvPr>
+              <p:cNvSpPr/>
+              <p:nvPr/>
+            </p:nvSpPr>
+            <p:spPr>
+              <a:xfrm>
+                <a:off x="6253935" y="2437706"/>
+                <a:ext cx="2195226" cy="594998"/>
+              </a:xfrm>
+              <a:prstGeom prst="roundRect">
+                <a:avLst/>
+              </a:prstGeom>
+              <a:noFill/>
+            </p:spPr>
+            <p:style>
+              <a:lnRef idx="2">
+                <a:schemeClr val="accent1">
+                  <a:shade val="15000"/>
+                </a:schemeClr>
+              </a:lnRef>
+              <a:fillRef idx="1">
+                <a:schemeClr val="accent1"/>
+              </a:fillRef>
+              <a:effectRef idx="0">
+                <a:schemeClr val="accent1"/>
+              </a:effectRef>
+              <a:fontRef idx="minor">
+                <a:schemeClr val="lt1"/>
+              </a:fontRef>
+            </p:style>
+            <p:txBody>
+              <a:bodyPr tIns="0" rtlCol="0" anchor="ctr"/>
+              <a:lstStyle/>
+              <a:p>
+                <a:pPr algn="ctr"/>
+                <a:r>
+                  <a:rPr lang="en-US" dirty="0">
+                    <a:solidFill>
+                      <a:schemeClr val="tx1"/>
+                    </a:solidFill>
+                  </a:rPr>
+                  <a:t>Decompensated Cirrhosis (DC)</a:t>
+                </a:r>
+              </a:p>
+            </p:txBody>
+          </p:sp>
+          <p:sp>
+            <p:nvSpPr>
+              <p:cNvPr id="28" name="Rounded Rectangle 27">
+                <a:extLst>
+                  <a:ext uri="{FF2B5EF4-FFF2-40B4-BE49-F238E27FC236}">
+                    <a16:creationId xmlns:a16="http://schemas.microsoft.com/office/drawing/2014/main" id="{CE5D6A7B-C6B2-406E-BA62-FE4216F8AED6}"/>
+                  </a:ext>
+                </a:extLst>
+              </p:cNvPr>
+              <p:cNvSpPr/>
+              <p:nvPr/>
+            </p:nvSpPr>
+            <p:spPr>
+              <a:xfrm>
+                <a:off x="9259896" y="2437706"/>
+                <a:ext cx="2195226" cy="594998"/>
+              </a:xfrm>
+              <a:prstGeom prst="roundRect">
+                <a:avLst/>
+              </a:prstGeom>
+              <a:noFill/>
+            </p:spPr>
+            <p:style>
+              <a:lnRef idx="2">
+                <a:schemeClr val="accent1">
+                  <a:shade val="15000"/>
+                </a:schemeClr>
+              </a:lnRef>
+              <a:fillRef idx="1">
+                <a:schemeClr val="accent1"/>
+              </a:fillRef>
+              <a:effectRef idx="0">
+                <a:schemeClr val="accent1"/>
+              </a:effectRef>
+              <a:fontRef idx="minor">
+                <a:schemeClr val="lt1"/>
+              </a:fontRef>
+            </p:style>
+            <p:txBody>
+              <a:bodyPr tIns="0" rtlCol="0" anchor="ctr"/>
+              <a:lstStyle/>
+              <a:p>
+                <a:pPr algn="ctr"/>
+                <a:r>
+                  <a:rPr lang="en-US" dirty="0">
+                    <a:solidFill>
+                      <a:schemeClr val="tx1"/>
+                    </a:solidFill>
+                  </a:rPr>
+                  <a:t>Hepatocellular Carcinoma (HCC)</a:t>
+                </a:r>
+              </a:p>
+            </p:txBody>
+          </p:sp>
+          <p:cxnSp>
+            <p:nvCxnSpPr>
+              <p:cNvPr id="29" name="Elbow Connector 28">
+                <a:extLst>
+                  <a:ext uri="{FF2B5EF4-FFF2-40B4-BE49-F238E27FC236}">
+                    <a16:creationId xmlns:a16="http://schemas.microsoft.com/office/drawing/2014/main" id="{2CA958DD-313B-96E5-43C3-7A5A8C6BC80E}"/>
+                  </a:ext>
+                </a:extLst>
+              </p:cNvPr>
+              <p:cNvCxnSpPr>
+                <a:cxnSpLocks/>
+                <a:stCxn id="26" idx="0"/>
+                <a:endCxn id="28" idx="0"/>
+              </p:cNvCxnSpPr>
+              <p:nvPr/>
+            </p:nvCxnSpPr>
+            <p:spPr>
+              <a:xfrm rot="5400000" flipH="1" flipV="1">
+                <a:off x="7351547" y="-568255"/>
+                <a:ext cx="12700" cy="6011923"/>
+              </a:xfrm>
+              <a:prstGeom prst="bentConnector3">
+                <a:avLst>
+                  <a:gd name="adj1" fmla="val 1800000"/>
+                </a:avLst>
+              </a:prstGeom>
+              <a:ln>
+                <a:prstDash val="sysDash"/>
+                <a:tailEnd type="triangle"/>
+              </a:ln>
+            </p:spPr>
+            <p:style>
+              <a:lnRef idx="2">
+                <a:schemeClr val="dk1"/>
+              </a:lnRef>
+              <a:fillRef idx="0">
+                <a:schemeClr val="dk1"/>
+              </a:fillRef>
+              <a:effectRef idx="1">
+                <a:schemeClr val="dk1"/>
+              </a:effectRef>
+              <a:fontRef idx="minor">
+                <a:schemeClr val="tx1"/>
+              </a:fontRef>
+            </p:style>
+          </p:cxnSp>
+          <p:cxnSp>
+            <p:nvCxnSpPr>
+              <p:cNvPr id="31" name="Straight Arrow Connector 30">
+                <a:extLst>
+                  <a:ext uri="{FF2B5EF4-FFF2-40B4-BE49-F238E27FC236}">
+                    <a16:creationId xmlns:a16="http://schemas.microsoft.com/office/drawing/2014/main" id="{786248E0-35F9-4438-CE3F-4D578DED2FD1}"/>
+                  </a:ext>
+                </a:extLst>
+              </p:cNvPr>
+              <p:cNvCxnSpPr>
+                <a:stCxn id="25" idx="3"/>
+                <a:endCxn id="26" idx="1"/>
+              </p:cNvCxnSpPr>
+              <p:nvPr/>
+            </p:nvCxnSpPr>
+            <p:spPr>
+              <a:xfrm>
+                <a:off x="2437237" y="2735205"/>
+                <a:ext cx="810736" cy="0"/>
+              </a:xfrm>
+              <a:prstGeom prst="straightConnector1">
+                <a:avLst/>
+              </a:prstGeom>
+              <a:ln>
+                <a:solidFill>
+                  <a:schemeClr val="tx1"/>
+                </a:solidFill>
+                <a:tailEnd type="triangle"/>
+              </a:ln>
+            </p:spPr>
+            <p:style>
+              <a:lnRef idx="2">
+                <a:schemeClr val="accent1"/>
+              </a:lnRef>
+              <a:fillRef idx="0">
+                <a:schemeClr val="accent1"/>
+              </a:fillRef>
+              <a:effectRef idx="1">
+                <a:schemeClr val="accent1"/>
+              </a:effectRef>
+              <a:fontRef idx="minor">
+                <a:schemeClr val="tx1"/>
+              </a:fontRef>
+            </p:style>
+          </p:cxnSp>
+          <p:cxnSp>
+            <p:nvCxnSpPr>
+              <p:cNvPr id="32" name="Straight Arrow Connector 31">
+                <a:extLst>
+                  <a:ext uri="{FF2B5EF4-FFF2-40B4-BE49-F238E27FC236}">
+                    <a16:creationId xmlns:a16="http://schemas.microsoft.com/office/drawing/2014/main" id="{1786ACE1-B0D6-D41B-0BE4-CEC898B78AA9}"/>
+                  </a:ext>
+                </a:extLst>
+              </p:cNvPr>
+              <p:cNvCxnSpPr>
+                <a:cxnSpLocks/>
+                <a:stCxn id="26" idx="3"/>
+                <a:endCxn id="27" idx="1"/>
+              </p:cNvCxnSpPr>
+              <p:nvPr/>
+            </p:nvCxnSpPr>
+            <p:spPr>
+              <a:xfrm>
+                <a:off x="5443199" y="2735205"/>
+                <a:ext cx="810736" cy="0"/>
+              </a:xfrm>
+              <a:prstGeom prst="straightConnector1">
+                <a:avLst/>
+              </a:prstGeom>
+              <a:ln>
+                <a:solidFill>
+                  <a:schemeClr val="tx1"/>
+                </a:solidFill>
+                <a:tailEnd type="triangle"/>
+              </a:ln>
+            </p:spPr>
+            <p:style>
+              <a:lnRef idx="2">
+                <a:schemeClr val="accent1"/>
+              </a:lnRef>
+              <a:fillRef idx="0">
+                <a:schemeClr val="accent1"/>
+              </a:fillRef>
+              <a:effectRef idx="1">
+                <a:schemeClr val="accent1"/>
+              </a:effectRef>
+              <a:fontRef idx="minor">
+                <a:schemeClr val="tx1"/>
+              </a:fontRef>
+            </p:style>
+          </p:cxnSp>
+          <p:cxnSp>
+            <p:nvCxnSpPr>
+              <p:cNvPr id="33" name="Straight Arrow Connector 32">
+                <a:extLst>
+                  <a:ext uri="{FF2B5EF4-FFF2-40B4-BE49-F238E27FC236}">
+                    <a16:creationId xmlns:a16="http://schemas.microsoft.com/office/drawing/2014/main" id="{591F550D-AFED-2E9D-E2E5-4C83B53D378E}"/>
+                  </a:ext>
+                </a:extLst>
+              </p:cNvPr>
+              <p:cNvCxnSpPr>
+                <a:cxnSpLocks/>
+                <a:stCxn id="27" idx="3"/>
+                <a:endCxn id="28" idx="1"/>
+              </p:cNvCxnSpPr>
+              <p:nvPr/>
+            </p:nvCxnSpPr>
+            <p:spPr>
+              <a:xfrm>
+                <a:off x="8449161" y="2735205"/>
+                <a:ext cx="810735" cy="0"/>
+              </a:xfrm>
+              <a:prstGeom prst="straightConnector1">
+                <a:avLst/>
+              </a:prstGeom>
+              <a:ln>
+                <a:solidFill>
+                  <a:schemeClr val="tx1"/>
+                </a:solidFill>
+                <a:tailEnd type="triangle"/>
+              </a:ln>
+            </p:spPr>
+            <p:style>
+              <a:lnRef idx="2">
+                <a:schemeClr val="accent1"/>
+              </a:lnRef>
+              <a:fillRef idx="0">
+                <a:schemeClr val="accent1"/>
+              </a:fillRef>
+              <a:effectRef idx="1">
+                <a:schemeClr val="accent1"/>
+              </a:effectRef>
+              <a:fontRef idx="minor">
+                <a:schemeClr val="tx1"/>
+              </a:fontRef>
+            </p:style>
+          </p:cxnSp>
+        </p:grpSp>
         <p:cxnSp>
           <p:nvCxnSpPr>
-            <p:cNvPr id="44" name="Straight Arrow Connector 43">
+            <p:cNvPr id="37" name="Curved Connector 36">
               <a:extLst>
                 <a:ext uri="{FF2B5EF4-FFF2-40B4-BE49-F238E27FC236}">
-                  <a16:creationId xmlns:a16="http://schemas.microsoft.com/office/drawing/2014/main" id="{EBF5CEE7-EE0D-7D45-12BD-B1DA1B36362F}"/>
+                  <a16:creationId xmlns:a16="http://schemas.microsoft.com/office/drawing/2014/main" id="{E3E4E13A-AEB4-CCEC-5D33-01FA2FADE362}"/>
                 </a:ext>
               </a:extLst>
             </p:cNvPr>
             <p:cNvCxnSpPr>
               <a:stCxn id="5" idx="2"/>
-              <a:endCxn id="42" idx="0"/>
             </p:cNvCxnSpPr>
             <p:nvPr/>
           </p:nvCxnSpPr>
           <p:spPr>
-            <a:xfrm>
-              <a:off x="3170661" y="2840437"/>
-              <a:ext cx="2529908" cy="1550097"/>
+            <a:xfrm rot="16200000" flipH="1">
+              <a:off x="893671" y="2575448"/>
+              <a:ext cx="308401" cy="356056"/>
             </a:xfrm>
-            <a:prstGeom prst="straightConnector1">
+            <a:prstGeom prst="curvedConnector2">
               <a:avLst/>
             </a:prstGeom>
             <a:ln>
+              <a:solidFill>
+                <a:schemeClr val="tx1"/>
+              </a:solidFill>
               <a:tailEnd type="triangle"/>
             </a:ln>
           </p:spPr>
           <p:style>
             <a:lnRef idx="2">
-              <a:schemeClr val="dk1"/>
+              <a:schemeClr val="accent1"/>
             </a:lnRef>
             <a:fillRef idx="0">
-              <a:schemeClr val="dk1"/>
+              <a:schemeClr val="accent1"/>
             </a:fillRef>
             <a:effectRef idx="1">
-              <a:schemeClr val="dk1"/>
+              <a:schemeClr val="accent1"/>
             </a:effectRef>
             <a:fontRef idx="minor">
               <a:schemeClr val="tx1"/>
@@ -3847,168 +4885,1698 @@
         </p:cxnSp>
         <p:cxnSp>
           <p:nvCxnSpPr>
-            <p:cNvPr id="46" name="Straight Arrow Connector 45">
+            <p:cNvPr id="45" name="Curved Connector 44">
               <a:extLst>
                 <a:ext uri="{FF2B5EF4-FFF2-40B4-BE49-F238E27FC236}">
-                  <a16:creationId xmlns:a16="http://schemas.microsoft.com/office/drawing/2014/main" id="{F1068303-5A2A-4DE6-E242-2FD485D6C3A1}"/>
+                  <a16:creationId xmlns:a16="http://schemas.microsoft.com/office/drawing/2014/main" id="{555B929E-F272-2CD0-E97A-76CB28472BF5}"/>
                 </a:ext>
               </a:extLst>
             </p:cNvPr>
-            <p:cNvCxnSpPr>
-              <a:stCxn id="6" idx="2"/>
-              <a:endCxn id="42" idx="0"/>
-            </p:cNvCxnSpPr>
+            <p:cNvCxnSpPr/>
             <p:nvPr/>
           </p:nvCxnSpPr>
           <p:spPr>
-            <a:xfrm>
-              <a:off x="5700569" y="2840437"/>
-              <a:ext cx="0" cy="1550097"/>
+            <a:xfrm rot="16200000" flipH="1">
+              <a:off x="3423578" y="2581091"/>
+              <a:ext cx="308401" cy="356056"/>
             </a:xfrm>
-            <a:prstGeom prst="straightConnector1">
+            <a:prstGeom prst="curvedConnector2">
               <a:avLst/>
             </a:prstGeom>
             <a:ln>
+              <a:solidFill>
+                <a:schemeClr val="tx1"/>
+              </a:solidFill>
               <a:tailEnd type="triangle"/>
             </a:ln>
           </p:spPr>
           <p:style>
             <a:lnRef idx="2">
-              <a:schemeClr val="dk1"/>
+              <a:schemeClr val="accent1"/>
             </a:lnRef>
             <a:fillRef idx="0">
-              <a:schemeClr val="dk1"/>
+              <a:schemeClr val="accent1"/>
             </a:fillRef>
             <a:effectRef idx="1">
-              <a:schemeClr val="dk1"/>
+              <a:schemeClr val="accent1"/>
             </a:effectRef>
             <a:fontRef idx="minor">
               <a:schemeClr val="tx1"/>
             </a:fontRef>
           </p:style>
         </p:cxnSp>
+        <mc:AlternateContent xmlns:mc="http://schemas.openxmlformats.org/markup-compatibility/2006" xmlns:a14="http://schemas.microsoft.com/office/drawing/2010/main">
+          <mc:Choice Requires="a14">
+            <p:sp>
+              <p:nvSpPr>
+                <p:cNvPr id="59" name="TextBox 58">
+                  <a:extLst>
+                    <a:ext uri="{FF2B5EF4-FFF2-40B4-BE49-F238E27FC236}">
+                      <a16:creationId xmlns:a16="http://schemas.microsoft.com/office/drawing/2014/main" id="{624F6CE2-64D7-632D-7B99-1B66DBA306ED}"/>
+                    </a:ext>
+                  </a:extLst>
+                </p:cNvPr>
+                <p:cNvSpPr txBox="1"/>
+                <p:nvPr/>
+              </p:nvSpPr>
+              <p:spPr>
+                <a:xfrm>
+                  <a:off x="1145182" y="2717951"/>
+                  <a:ext cx="364010" cy="369332"/>
+                </a:xfrm>
+                <a:prstGeom prst="rect">
+                  <a:avLst/>
+                </a:prstGeom>
+                <a:noFill/>
+              </p:spPr>
+              <p:txBody>
+                <a:bodyPr wrap="none" rtlCol="0">
+                  <a:spAutoFit/>
+                </a:bodyPr>
+                <a:lstStyle/>
+                <a:p>
+                  <a:pPr/>
+                  <a14:m>
+                    <m:oMathPara xmlns:m="http://schemas.openxmlformats.org/officeDocument/2006/math">
+                      <m:oMathParaPr>
+                        <m:jc m:val="centerGroup"/>
+                      </m:oMathParaPr>
+                      <m:oMath xmlns:m="http://schemas.openxmlformats.org/officeDocument/2006/math">
+                        <m:r>
+                          <a:rPr lang="en-US" b="0" i="1" smtClean="0">
+                            <a:latin typeface="Cambria Math" panose="02040503050406030204" pitchFamily="18" charset="0"/>
+                          </a:rPr>
+                          <m:t>𝜇</m:t>
+                        </m:r>
+                      </m:oMath>
+                    </m:oMathPara>
+                  </a14:m>
+                  <a:endParaRPr lang="en-CN" dirty="0"/>
+                </a:p>
+              </p:txBody>
+            </p:sp>
+          </mc:Choice>
+          <mc:Fallback xmlns="">
+            <p:sp>
+              <p:nvSpPr>
+                <p:cNvPr id="59" name="TextBox 58">
+                  <a:extLst>
+                    <a:ext uri="{FF2B5EF4-FFF2-40B4-BE49-F238E27FC236}">
+                      <a16:creationId xmlns:a16="http://schemas.microsoft.com/office/drawing/2014/main" id="{624F6CE2-64D7-632D-7B99-1B66DBA306ED}"/>
+                    </a:ext>
+                  </a:extLst>
+                </p:cNvPr>
+                <p:cNvSpPr txBox="1">
+                  <a:spLocks noRot="1" noChangeAspect="1" noMove="1" noResize="1" noEditPoints="1" noAdjustHandles="1" noChangeArrowheads="1" noChangeShapeType="1" noTextEdit="1"/>
+                </p:cNvSpPr>
+                <p:nvPr/>
+              </p:nvSpPr>
+              <p:spPr>
+                <a:xfrm>
+                  <a:off x="1145182" y="2717951"/>
+                  <a:ext cx="364010" cy="369332"/>
+                </a:xfrm>
+                <a:prstGeom prst="rect">
+                  <a:avLst/>
+                </a:prstGeom>
+                <a:blipFill>
+                  <a:blip r:embed="rId2"/>
+                  <a:stretch>
+                    <a:fillRect b="-6897"/>
+                  </a:stretch>
+                </a:blipFill>
+              </p:spPr>
+              <p:txBody>
+                <a:bodyPr/>
+                <a:lstStyle/>
+                <a:p>
+                  <a:r>
+                    <a:rPr lang="en-CN">
+                      <a:noFill/>
+                    </a:rPr>
+                    <a:t> </a:t>
+                  </a:r>
+                </a:p>
+              </p:txBody>
+            </p:sp>
+          </mc:Fallback>
+        </mc:AlternateContent>
+        <mc:AlternateContent xmlns:mc="http://schemas.openxmlformats.org/markup-compatibility/2006" xmlns:a14="http://schemas.microsoft.com/office/drawing/2010/main">
+          <mc:Choice Requires="a14">
+            <p:sp>
+              <p:nvSpPr>
+                <p:cNvPr id="60" name="TextBox 59">
+                  <a:extLst>
+                    <a:ext uri="{FF2B5EF4-FFF2-40B4-BE49-F238E27FC236}">
+                      <a16:creationId xmlns:a16="http://schemas.microsoft.com/office/drawing/2014/main" id="{7890A67B-B2DC-60F1-9C35-1E4C1BC1DE55}"/>
+                    </a:ext>
+                  </a:extLst>
+                </p:cNvPr>
+                <p:cNvSpPr txBox="1"/>
+                <p:nvPr/>
+              </p:nvSpPr>
+              <p:spPr>
+                <a:xfrm>
+                  <a:off x="3682801" y="2717951"/>
+                  <a:ext cx="364010" cy="369332"/>
+                </a:xfrm>
+                <a:prstGeom prst="rect">
+                  <a:avLst/>
+                </a:prstGeom>
+                <a:noFill/>
+              </p:spPr>
+              <p:txBody>
+                <a:bodyPr wrap="none" rtlCol="0">
+                  <a:spAutoFit/>
+                </a:bodyPr>
+                <a:lstStyle/>
+                <a:p>
+                  <a:pPr/>
+                  <a14:m>
+                    <m:oMathPara xmlns:m="http://schemas.openxmlformats.org/officeDocument/2006/math">
+                      <m:oMathParaPr>
+                        <m:jc m:val="centerGroup"/>
+                      </m:oMathParaPr>
+                      <m:oMath xmlns:m="http://schemas.openxmlformats.org/officeDocument/2006/math">
+                        <m:r>
+                          <a:rPr lang="en-US" b="0" i="1" smtClean="0">
+                            <a:latin typeface="Cambria Math" panose="02040503050406030204" pitchFamily="18" charset="0"/>
+                          </a:rPr>
+                          <m:t>𝜇</m:t>
+                        </m:r>
+                      </m:oMath>
+                    </m:oMathPara>
+                  </a14:m>
+                  <a:endParaRPr lang="en-CN" dirty="0"/>
+                </a:p>
+              </p:txBody>
+            </p:sp>
+          </mc:Choice>
+          <mc:Fallback xmlns="">
+            <p:sp>
+              <p:nvSpPr>
+                <p:cNvPr id="60" name="TextBox 59">
+                  <a:extLst>
+                    <a:ext uri="{FF2B5EF4-FFF2-40B4-BE49-F238E27FC236}">
+                      <a16:creationId xmlns:a16="http://schemas.microsoft.com/office/drawing/2014/main" id="{7890A67B-B2DC-60F1-9C35-1E4C1BC1DE55}"/>
+                    </a:ext>
+                  </a:extLst>
+                </p:cNvPr>
+                <p:cNvSpPr txBox="1">
+                  <a:spLocks noRot="1" noChangeAspect="1" noMove="1" noResize="1" noEditPoints="1" noAdjustHandles="1" noChangeArrowheads="1" noChangeShapeType="1" noTextEdit="1"/>
+                </p:cNvSpPr>
+                <p:nvPr/>
+              </p:nvSpPr>
+              <p:spPr>
+                <a:xfrm>
+                  <a:off x="3682801" y="2717951"/>
+                  <a:ext cx="364010" cy="369332"/>
+                </a:xfrm>
+                <a:prstGeom prst="rect">
+                  <a:avLst/>
+                </a:prstGeom>
+                <a:blipFill>
+                  <a:blip r:embed="rId3"/>
+                  <a:stretch>
+                    <a:fillRect b="-6897"/>
+                  </a:stretch>
+                </a:blipFill>
+              </p:spPr>
+              <p:txBody>
+                <a:bodyPr/>
+                <a:lstStyle/>
+                <a:p>
+                  <a:r>
+                    <a:rPr lang="en-CN">
+                      <a:noFill/>
+                    </a:rPr>
+                    <a:t> </a:t>
+                  </a:r>
+                </a:p>
+              </p:txBody>
+            </p:sp>
+          </mc:Fallback>
+        </mc:AlternateContent>
         <p:cxnSp>
           <p:nvCxnSpPr>
-            <p:cNvPr id="48" name="Straight Arrow Connector 47">
+            <p:cNvPr id="61" name="Curved Connector 60">
               <a:extLst>
                 <a:ext uri="{FF2B5EF4-FFF2-40B4-BE49-F238E27FC236}">
-                  <a16:creationId xmlns:a16="http://schemas.microsoft.com/office/drawing/2014/main" id="{0E6045F1-5633-6798-C628-1924A77D49F4}"/>
+                  <a16:creationId xmlns:a16="http://schemas.microsoft.com/office/drawing/2014/main" id="{67EA703A-42AB-BC1F-A8B7-22E9D2E511B8}"/>
                 </a:ext>
               </a:extLst>
             </p:cNvPr>
-            <p:cNvCxnSpPr>
-              <a:stCxn id="10" idx="2"/>
-              <a:endCxn id="42" idx="0"/>
-            </p:cNvCxnSpPr>
+            <p:cNvCxnSpPr/>
             <p:nvPr/>
           </p:nvCxnSpPr>
           <p:spPr>
-            <a:xfrm flipH="1">
-              <a:off x="5700569" y="3509957"/>
-              <a:ext cx="2529907" cy="880577"/>
+            <a:xfrm rot="16200000" flipH="1">
+              <a:off x="5859324" y="1900454"/>
+              <a:ext cx="308401" cy="356056"/>
             </a:xfrm>
-            <a:prstGeom prst="straightConnector1">
+            <a:prstGeom prst="curvedConnector2">
               <a:avLst/>
             </a:prstGeom>
             <a:ln>
+              <a:solidFill>
+                <a:schemeClr val="tx1"/>
+              </a:solidFill>
               <a:tailEnd type="triangle"/>
             </a:ln>
           </p:spPr>
           <p:style>
             <a:lnRef idx="2">
-              <a:schemeClr val="dk1"/>
+              <a:schemeClr val="accent1"/>
             </a:lnRef>
             <a:fillRef idx="0">
-              <a:schemeClr val="dk1"/>
+              <a:schemeClr val="accent1"/>
             </a:fillRef>
             <a:effectRef idx="1">
-              <a:schemeClr val="dk1"/>
+              <a:schemeClr val="accent1"/>
             </a:effectRef>
             <a:fontRef idx="minor">
               <a:schemeClr val="tx1"/>
             </a:fontRef>
           </p:style>
         </p:cxnSp>
+        <mc:AlternateContent xmlns:mc="http://schemas.openxmlformats.org/markup-compatibility/2006" xmlns:a14="http://schemas.microsoft.com/office/drawing/2010/main">
+          <mc:Choice Requires="a14">
+            <p:sp>
+              <p:nvSpPr>
+                <p:cNvPr id="62" name="TextBox 61">
+                  <a:extLst>
+                    <a:ext uri="{FF2B5EF4-FFF2-40B4-BE49-F238E27FC236}">
+                      <a16:creationId xmlns:a16="http://schemas.microsoft.com/office/drawing/2014/main" id="{C150C858-2557-0C12-A7C3-51E0891B0ABD}"/>
+                    </a:ext>
+                  </a:extLst>
+                </p:cNvPr>
+                <p:cNvSpPr txBox="1"/>
+                <p:nvPr/>
+              </p:nvSpPr>
+              <p:spPr>
+                <a:xfrm>
+                  <a:off x="6110835" y="2042957"/>
+                  <a:ext cx="364010" cy="369332"/>
+                </a:xfrm>
+                <a:prstGeom prst="rect">
+                  <a:avLst/>
+                </a:prstGeom>
+                <a:noFill/>
+              </p:spPr>
+              <p:txBody>
+                <a:bodyPr wrap="none" rtlCol="0">
+                  <a:spAutoFit/>
+                </a:bodyPr>
+                <a:lstStyle/>
+                <a:p>
+                  <a:pPr/>
+                  <a14:m>
+                    <m:oMathPara xmlns:m="http://schemas.openxmlformats.org/officeDocument/2006/math">
+                      <m:oMathParaPr>
+                        <m:jc m:val="centerGroup"/>
+                      </m:oMathParaPr>
+                      <m:oMath xmlns:m="http://schemas.openxmlformats.org/officeDocument/2006/math">
+                        <m:r>
+                          <a:rPr lang="en-US" b="0" i="1" smtClean="0">
+                            <a:latin typeface="Cambria Math" panose="02040503050406030204" pitchFamily="18" charset="0"/>
+                          </a:rPr>
+                          <m:t>𝜇</m:t>
+                        </m:r>
+                      </m:oMath>
+                    </m:oMathPara>
+                  </a14:m>
+                  <a:endParaRPr lang="en-CN" dirty="0"/>
+                </a:p>
+              </p:txBody>
+            </p:sp>
+          </mc:Choice>
+          <mc:Fallback xmlns="">
+            <p:sp>
+              <p:nvSpPr>
+                <p:cNvPr id="62" name="TextBox 61">
+                  <a:extLst>
+                    <a:ext uri="{FF2B5EF4-FFF2-40B4-BE49-F238E27FC236}">
+                      <a16:creationId xmlns:a16="http://schemas.microsoft.com/office/drawing/2014/main" id="{C150C858-2557-0C12-A7C3-51E0891B0ABD}"/>
+                    </a:ext>
+                  </a:extLst>
+                </p:cNvPr>
+                <p:cNvSpPr txBox="1">
+                  <a:spLocks noRot="1" noChangeAspect="1" noMove="1" noResize="1" noEditPoints="1" noAdjustHandles="1" noChangeArrowheads="1" noChangeShapeType="1" noTextEdit="1"/>
+                </p:cNvSpPr>
+                <p:nvPr/>
+              </p:nvSpPr>
+              <p:spPr>
+                <a:xfrm>
+                  <a:off x="6110835" y="2042957"/>
+                  <a:ext cx="364010" cy="369332"/>
+                </a:xfrm>
+                <a:prstGeom prst="rect">
+                  <a:avLst/>
+                </a:prstGeom>
+                <a:blipFill>
+                  <a:blip r:embed="rId4"/>
+                  <a:stretch>
+                    <a:fillRect b="-3226"/>
+                  </a:stretch>
+                </a:blipFill>
+              </p:spPr>
+              <p:txBody>
+                <a:bodyPr/>
+                <a:lstStyle/>
+                <a:p>
+                  <a:r>
+                    <a:rPr lang="en-CN">
+                      <a:noFill/>
+                    </a:rPr>
+                    <a:t> </a:t>
+                  </a:r>
+                </a:p>
+              </p:txBody>
+            </p:sp>
+          </mc:Fallback>
+        </mc:AlternateContent>
         <p:cxnSp>
           <p:nvCxnSpPr>
-            <p:cNvPr id="50" name="Elbow Connector 49">
+            <p:cNvPr id="63" name="Curved Connector 62">
               <a:extLst>
                 <a:ext uri="{FF2B5EF4-FFF2-40B4-BE49-F238E27FC236}">
-                  <a16:creationId xmlns:a16="http://schemas.microsoft.com/office/drawing/2014/main" id="{BD059FAF-83F6-1419-20AA-9BC758023217}"/>
+                  <a16:creationId xmlns:a16="http://schemas.microsoft.com/office/drawing/2014/main" id="{C4A6B5EA-E35A-C7C6-B65C-4DA07942472F}"/>
                 </a:ext>
               </a:extLst>
             </p:cNvPr>
-            <p:cNvCxnSpPr>
-              <a:stCxn id="7" idx="3"/>
-              <a:endCxn id="42" idx="3"/>
-            </p:cNvCxnSpPr>
+            <p:cNvCxnSpPr/>
             <p:nvPr/>
           </p:nvCxnSpPr>
           <p:spPr>
-            <a:xfrm flipH="1">
-              <a:off x="6416029" y="1907871"/>
-              <a:ext cx="2529908" cy="2948946"/>
+            <a:xfrm rot="16200000" flipH="1">
+              <a:off x="5859324" y="3434792"/>
+              <a:ext cx="308401" cy="356056"/>
             </a:xfrm>
-            <a:prstGeom prst="bentConnector3">
-              <a:avLst>
-                <a:gd name="adj1" fmla="val -9036"/>
-              </a:avLst>
+            <a:prstGeom prst="curvedConnector2">
+              <a:avLst/>
             </a:prstGeom>
             <a:ln>
+              <a:solidFill>
+                <a:schemeClr val="tx1"/>
+              </a:solidFill>
               <a:tailEnd type="triangle"/>
             </a:ln>
           </p:spPr>
           <p:style>
             <a:lnRef idx="2">
-              <a:schemeClr val="dk1"/>
+              <a:schemeClr val="accent1"/>
             </a:lnRef>
             <a:fillRef idx="0">
-              <a:schemeClr val="dk1"/>
+              <a:schemeClr val="accent1"/>
             </a:fillRef>
             <a:effectRef idx="1">
-              <a:schemeClr val="dk1"/>
+              <a:schemeClr val="accent1"/>
             </a:effectRef>
             <a:fontRef idx="minor">
               <a:schemeClr val="tx1"/>
             </a:fontRef>
           </p:style>
         </p:cxnSp>
+        <mc:AlternateContent xmlns:mc="http://schemas.openxmlformats.org/markup-compatibility/2006" xmlns:a14="http://schemas.microsoft.com/office/drawing/2010/main">
+          <mc:Choice Requires="a14">
+            <p:sp>
+              <p:nvSpPr>
+                <p:cNvPr id="64" name="TextBox 63">
+                  <a:extLst>
+                    <a:ext uri="{FF2B5EF4-FFF2-40B4-BE49-F238E27FC236}">
+                      <a16:creationId xmlns:a16="http://schemas.microsoft.com/office/drawing/2014/main" id="{3583B2CB-97B3-D362-F473-9259FA781DF5}"/>
+                    </a:ext>
+                  </a:extLst>
+                </p:cNvPr>
+                <p:cNvSpPr txBox="1"/>
+                <p:nvPr/>
+              </p:nvSpPr>
+              <p:spPr>
+                <a:xfrm>
+                  <a:off x="6110835" y="3577295"/>
+                  <a:ext cx="364010" cy="369332"/>
+                </a:xfrm>
+                <a:prstGeom prst="rect">
+                  <a:avLst/>
+                </a:prstGeom>
+                <a:noFill/>
+              </p:spPr>
+              <p:txBody>
+                <a:bodyPr wrap="none" rtlCol="0">
+                  <a:spAutoFit/>
+                </a:bodyPr>
+                <a:lstStyle/>
+                <a:p>
+                  <a:pPr/>
+                  <a14:m>
+                    <m:oMathPara xmlns:m="http://schemas.openxmlformats.org/officeDocument/2006/math">
+                      <m:oMathParaPr>
+                        <m:jc m:val="centerGroup"/>
+                      </m:oMathParaPr>
+                      <m:oMath xmlns:m="http://schemas.openxmlformats.org/officeDocument/2006/math">
+                        <m:r>
+                          <a:rPr lang="en-US" b="0" i="1" smtClean="0">
+                            <a:latin typeface="Cambria Math" panose="02040503050406030204" pitchFamily="18" charset="0"/>
+                          </a:rPr>
+                          <m:t>𝜇</m:t>
+                        </m:r>
+                      </m:oMath>
+                    </m:oMathPara>
+                  </a14:m>
+                  <a:endParaRPr lang="en-CN" dirty="0"/>
+                </a:p>
+              </p:txBody>
+            </p:sp>
+          </mc:Choice>
+          <mc:Fallback xmlns="">
+            <p:sp>
+              <p:nvSpPr>
+                <p:cNvPr id="64" name="TextBox 63">
+                  <a:extLst>
+                    <a:ext uri="{FF2B5EF4-FFF2-40B4-BE49-F238E27FC236}">
+                      <a16:creationId xmlns:a16="http://schemas.microsoft.com/office/drawing/2014/main" id="{3583B2CB-97B3-D362-F473-9259FA781DF5}"/>
+                    </a:ext>
+                  </a:extLst>
+                </p:cNvPr>
+                <p:cNvSpPr txBox="1">
+                  <a:spLocks noRot="1" noChangeAspect="1" noMove="1" noResize="1" noEditPoints="1" noAdjustHandles="1" noChangeArrowheads="1" noChangeShapeType="1" noTextEdit="1"/>
+                </p:cNvSpPr>
+                <p:nvPr/>
+              </p:nvSpPr>
+              <p:spPr>
+                <a:xfrm>
+                  <a:off x="6110835" y="3577295"/>
+                  <a:ext cx="364010" cy="369332"/>
+                </a:xfrm>
+                <a:prstGeom prst="rect">
+                  <a:avLst/>
+                </a:prstGeom>
+                <a:blipFill>
+                  <a:blip r:embed="rId5"/>
+                  <a:stretch>
+                    <a:fillRect b="-6667"/>
+                  </a:stretch>
+                </a:blipFill>
+              </p:spPr>
+              <p:txBody>
+                <a:bodyPr/>
+                <a:lstStyle/>
+                <a:p>
+                  <a:r>
+                    <a:rPr lang="en-CN">
+                      <a:noFill/>
+                    </a:rPr>
+                    <a:t> </a:t>
+                  </a:r>
+                </a:p>
+              </p:txBody>
+            </p:sp>
+          </mc:Fallback>
+        </mc:AlternateContent>
+        <p:cxnSp>
+          <p:nvCxnSpPr>
+            <p:cNvPr id="65" name="Curved Connector 64">
+              <a:extLst>
+                <a:ext uri="{FF2B5EF4-FFF2-40B4-BE49-F238E27FC236}">
+                  <a16:creationId xmlns:a16="http://schemas.microsoft.com/office/drawing/2014/main" id="{C42FE247-1A73-33EF-C4AB-0B495F8E7744}"/>
+                </a:ext>
+              </a:extLst>
+            </p:cNvPr>
+            <p:cNvCxnSpPr>
+              <a:cxnSpLocks/>
+              <a:stCxn id="25" idx="2"/>
+            </p:cNvCxnSpPr>
+            <p:nvPr/>
+          </p:nvCxnSpPr>
+          <p:spPr>
+            <a:xfrm rot="16200000" flipH="1">
+              <a:off x="1453531" y="5741276"/>
+              <a:ext cx="273788" cy="339422"/>
+            </a:xfrm>
+            <a:prstGeom prst="curvedConnector2">
+              <a:avLst/>
+            </a:prstGeom>
+            <a:ln>
+              <a:solidFill>
+                <a:schemeClr val="tx1"/>
+              </a:solidFill>
+              <a:tailEnd type="triangle"/>
+            </a:ln>
+          </p:spPr>
+          <p:style>
+            <a:lnRef idx="2">
+              <a:schemeClr val="accent1"/>
+            </a:lnRef>
+            <a:fillRef idx="0">
+              <a:schemeClr val="accent1"/>
+            </a:fillRef>
+            <a:effectRef idx="1">
+              <a:schemeClr val="accent1"/>
+            </a:effectRef>
+            <a:fontRef idx="minor">
+              <a:schemeClr val="tx1"/>
+            </a:fontRef>
+          </p:style>
+        </p:cxnSp>
+        <mc:AlternateContent xmlns:mc="http://schemas.openxmlformats.org/markup-compatibility/2006" xmlns:a14="http://schemas.microsoft.com/office/drawing/2010/main">
+          <mc:Choice Requires="a14">
+            <p:sp>
+              <p:nvSpPr>
+                <p:cNvPr id="66" name="TextBox 65">
+                  <a:extLst>
+                    <a:ext uri="{FF2B5EF4-FFF2-40B4-BE49-F238E27FC236}">
+                      <a16:creationId xmlns:a16="http://schemas.microsoft.com/office/drawing/2014/main" id="{1596A452-07E1-6F1E-4008-C61039585127}"/>
+                    </a:ext>
+                  </a:extLst>
+                </p:cNvPr>
+                <p:cNvSpPr txBox="1"/>
+                <p:nvPr/>
+              </p:nvSpPr>
+              <p:spPr>
+                <a:xfrm>
+                  <a:off x="1679419" y="5858156"/>
+                  <a:ext cx="364010" cy="369332"/>
+                </a:xfrm>
+                <a:prstGeom prst="rect">
+                  <a:avLst/>
+                </a:prstGeom>
+                <a:noFill/>
+              </p:spPr>
+              <p:txBody>
+                <a:bodyPr wrap="square" rtlCol="0">
+                  <a:spAutoFit/>
+                </a:bodyPr>
+                <a:lstStyle/>
+                <a:p>
+                  <a:pPr/>
+                  <a14:m>
+                    <m:oMathPara xmlns:m="http://schemas.openxmlformats.org/officeDocument/2006/math">
+                      <m:oMathParaPr>
+                        <m:jc m:val="centerGroup"/>
+                      </m:oMathParaPr>
+                      <m:oMath xmlns:m="http://schemas.openxmlformats.org/officeDocument/2006/math">
+                        <m:r>
+                          <a:rPr lang="en-US" b="0" i="1" smtClean="0">
+                            <a:latin typeface="Cambria Math" panose="02040503050406030204" pitchFamily="18" charset="0"/>
+                          </a:rPr>
+                          <m:t>𝜇</m:t>
+                        </m:r>
+                      </m:oMath>
+                    </m:oMathPara>
+                  </a14:m>
+                  <a:endParaRPr lang="en-CN" dirty="0"/>
+                </a:p>
+              </p:txBody>
+            </p:sp>
+          </mc:Choice>
+          <mc:Fallback xmlns="">
+            <p:sp>
+              <p:nvSpPr>
+                <p:cNvPr id="66" name="TextBox 65">
+                  <a:extLst>
+                    <a:ext uri="{FF2B5EF4-FFF2-40B4-BE49-F238E27FC236}">
+                      <a16:creationId xmlns:a16="http://schemas.microsoft.com/office/drawing/2014/main" id="{1596A452-07E1-6F1E-4008-C61039585127}"/>
+                    </a:ext>
+                  </a:extLst>
+                </p:cNvPr>
+                <p:cNvSpPr txBox="1">
+                  <a:spLocks noRot="1" noChangeAspect="1" noMove="1" noResize="1" noEditPoints="1" noAdjustHandles="1" noChangeArrowheads="1" noChangeShapeType="1" noTextEdit="1"/>
+                </p:cNvSpPr>
+                <p:nvPr/>
+              </p:nvSpPr>
+              <p:spPr>
+                <a:xfrm>
+                  <a:off x="1679419" y="5858156"/>
+                  <a:ext cx="364010" cy="369332"/>
+                </a:xfrm>
+                <a:prstGeom prst="rect">
+                  <a:avLst/>
+                </a:prstGeom>
+                <a:blipFill>
+                  <a:blip r:embed="rId6"/>
+                  <a:stretch>
+                    <a:fillRect b="-6667"/>
+                  </a:stretch>
+                </a:blipFill>
+              </p:spPr>
+              <p:txBody>
+                <a:bodyPr/>
+                <a:lstStyle/>
+                <a:p>
+                  <a:r>
+                    <a:rPr lang="en-CN">
+                      <a:noFill/>
+                    </a:rPr>
+                    <a:t> </a:t>
+                  </a:r>
+                </a:p>
+              </p:txBody>
+            </p:sp>
+          </mc:Fallback>
+        </mc:AlternateContent>
+        <p:cxnSp>
+          <p:nvCxnSpPr>
+            <p:cNvPr id="68" name="Curved Connector 67">
+              <a:extLst>
+                <a:ext uri="{FF2B5EF4-FFF2-40B4-BE49-F238E27FC236}">
+                  <a16:creationId xmlns:a16="http://schemas.microsoft.com/office/drawing/2014/main" id="{5C7AE58D-FF5F-A11C-5B52-D2DB3EB60A55}"/>
+                </a:ext>
+              </a:extLst>
+            </p:cNvPr>
+            <p:cNvCxnSpPr>
+              <a:cxnSpLocks/>
+            </p:cNvCxnSpPr>
+            <p:nvPr/>
+          </p:nvCxnSpPr>
+          <p:spPr>
+            <a:xfrm rot="16200000" flipH="1">
+              <a:off x="4409166" y="5741276"/>
+              <a:ext cx="273788" cy="339422"/>
+            </a:xfrm>
+            <a:prstGeom prst="curvedConnector2">
+              <a:avLst/>
+            </a:prstGeom>
+            <a:ln>
+              <a:solidFill>
+                <a:schemeClr val="tx1"/>
+              </a:solidFill>
+              <a:tailEnd type="triangle"/>
+            </a:ln>
+          </p:spPr>
+          <p:style>
+            <a:lnRef idx="2">
+              <a:schemeClr val="accent1"/>
+            </a:lnRef>
+            <a:fillRef idx="0">
+              <a:schemeClr val="accent1"/>
+            </a:fillRef>
+            <a:effectRef idx="1">
+              <a:schemeClr val="accent1"/>
+            </a:effectRef>
+            <a:fontRef idx="minor">
+              <a:schemeClr val="tx1"/>
+            </a:fontRef>
+          </p:style>
+        </p:cxnSp>
+        <mc:AlternateContent xmlns:mc="http://schemas.openxmlformats.org/markup-compatibility/2006" xmlns:a14="http://schemas.microsoft.com/office/drawing/2010/main">
+          <mc:Choice Requires="a14">
+            <p:sp>
+              <p:nvSpPr>
+                <p:cNvPr id="69" name="TextBox 68">
+                  <a:extLst>
+                    <a:ext uri="{FF2B5EF4-FFF2-40B4-BE49-F238E27FC236}">
+                      <a16:creationId xmlns:a16="http://schemas.microsoft.com/office/drawing/2014/main" id="{726819B3-0C1E-A0D6-86F1-707AB232866A}"/>
+                    </a:ext>
+                  </a:extLst>
+                </p:cNvPr>
+                <p:cNvSpPr txBox="1"/>
+                <p:nvPr/>
+              </p:nvSpPr>
+              <p:spPr>
+                <a:xfrm>
+                  <a:off x="4635054" y="5858156"/>
+                  <a:ext cx="364010" cy="369332"/>
+                </a:xfrm>
+                <a:prstGeom prst="rect">
+                  <a:avLst/>
+                </a:prstGeom>
+                <a:noFill/>
+              </p:spPr>
+              <p:txBody>
+                <a:bodyPr wrap="square" rtlCol="0">
+                  <a:spAutoFit/>
+                </a:bodyPr>
+                <a:lstStyle/>
+                <a:p>
+                  <a:pPr/>
+                  <a14:m>
+                    <m:oMathPara xmlns:m="http://schemas.openxmlformats.org/officeDocument/2006/math">
+                      <m:oMathParaPr>
+                        <m:jc m:val="centerGroup"/>
+                      </m:oMathParaPr>
+                      <m:oMath xmlns:m="http://schemas.openxmlformats.org/officeDocument/2006/math">
+                        <m:r>
+                          <a:rPr lang="en-US" b="0" i="1" smtClean="0">
+                            <a:latin typeface="Cambria Math" panose="02040503050406030204" pitchFamily="18" charset="0"/>
+                          </a:rPr>
+                          <m:t>𝜇</m:t>
+                        </m:r>
+                      </m:oMath>
+                    </m:oMathPara>
+                  </a14:m>
+                  <a:endParaRPr lang="en-CN" dirty="0"/>
+                </a:p>
+              </p:txBody>
+            </p:sp>
+          </mc:Choice>
+          <mc:Fallback xmlns="">
+            <p:sp>
+              <p:nvSpPr>
+                <p:cNvPr id="69" name="TextBox 68">
+                  <a:extLst>
+                    <a:ext uri="{FF2B5EF4-FFF2-40B4-BE49-F238E27FC236}">
+                      <a16:creationId xmlns:a16="http://schemas.microsoft.com/office/drawing/2014/main" id="{726819B3-0C1E-A0D6-86F1-707AB232866A}"/>
+                    </a:ext>
+                  </a:extLst>
+                </p:cNvPr>
+                <p:cNvSpPr txBox="1">
+                  <a:spLocks noRot="1" noChangeAspect="1" noMove="1" noResize="1" noEditPoints="1" noAdjustHandles="1" noChangeArrowheads="1" noChangeShapeType="1" noTextEdit="1"/>
+                </p:cNvSpPr>
+                <p:nvPr/>
+              </p:nvSpPr>
+              <p:spPr>
+                <a:xfrm>
+                  <a:off x="4635054" y="5858156"/>
+                  <a:ext cx="364010" cy="369332"/>
+                </a:xfrm>
+                <a:prstGeom prst="rect">
+                  <a:avLst/>
+                </a:prstGeom>
+                <a:blipFill>
+                  <a:blip r:embed="rId7"/>
+                  <a:stretch>
+                    <a:fillRect b="-6667"/>
+                  </a:stretch>
+                </a:blipFill>
+              </p:spPr>
+              <p:txBody>
+                <a:bodyPr/>
+                <a:lstStyle/>
+                <a:p>
+                  <a:r>
+                    <a:rPr lang="en-CN">
+                      <a:noFill/>
+                    </a:rPr>
+                    <a:t> </a:t>
+                  </a:r>
+                </a:p>
+              </p:txBody>
+            </p:sp>
+          </mc:Fallback>
+        </mc:AlternateContent>
+        <p:cxnSp>
+          <p:nvCxnSpPr>
+            <p:cNvPr id="70" name="Curved Connector 69">
+              <a:extLst>
+                <a:ext uri="{FF2B5EF4-FFF2-40B4-BE49-F238E27FC236}">
+                  <a16:creationId xmlns:a16="http://schemas.microsoft.com/office/drawing/2014/main" id="{2DA06626-387C-09E3-BA3A-B012FFDB05DE}"/>
+                </a:ext>
+              </a:extLst>
+            </p:cNvPr>
+            <p:cNvCxnSpPr>
+              <a:cxnSpLocks/>
+            </p:cNvCxnSpPr>
+            <p:nvPr/>
+          </p:nvCxnSpPr>
+          <p:spPr>
+            <a:xfrm rot="16200000" flipH="1">
+              <a:off x="7459291" y="5746335"/>
+              <a:ext cx="273788" cy="339422"/>
+            </a:xfrm>
+            <a:prstGeom prst="curvedConnector2">
+              <a:avLst/>
+            </a:prstGeom>
+            <a:ln>
+              <a:solidFill>
+                <a:schemeClr val="tx1"/>
+              </a:solidFill>
+              <a:tailEnd type="triangle"/>
+            </a:ln>
+          </p:spPr>
+          <p:style>
+            <a:lnRef idx="2">
+              <a:schemeClr val="accent1"/>
+            </a:lnRef>
+            <a:fillRef idx="0">
+              <a:schemeClr val="accent1"/>
+            </a:fillRef>
+            <a:effectRef idx="1">
+              <a:schemeClr val="accent1"/>
+            </a:effectRef>
+            <a:fontRef idx="minor">
+              <a:schemeClr val="tx1"/>
+            </a:fontRef>
+          </p:style>
+        </p:cxnSp>
+        <mc:AlternateContent xmlns:mc="http://schemas.openxmlformats.org/markup-compatibility/2006" xmlns:a14="http://schemas.microsoft.com/office/drawing/2010/main">
+          <mc:Choice Requires="a14">
+            <p:sp>
+              <p:nvSpPr>
+                <p:cNvPr id="71" name="TextBox 70">
+                  <a:extLst>
+                    <a:ext uri="{FF2B5EF4-FFF2-40B4-BE49-F238E27FC236}">
+                      <a16:creationId xmlns:a16="http://schemas.microsoft.com/office/drawing/2014/main" id="{5D409464-2C46-8B96-26B0-D88D7D9238E1}"/>
+                    </a:ext>
+                  </a:extLst>
+                </p:cNvPr>
+                <p:cNvSpPr txBox="1"/>
+                <p:nvPr/>
+              </p:nvSpPr>
+              <p:spPr>
+                <a:xfrm>
+                  <a:off x="7685178" y="5863215"/>
+                  <a:ext cx="985309" cy="369332"/>
+                </a:xfrm>
+                <a:prstGeom prst="rect">
+                  <a:avLst/>
+                </a:prstGeom>
+                <a:noFill/>
+              </p:spPr>
+              <p:txBody>
+                <a:bodyPr wrap="square" rtlCol="0">
+                  <a:spAutoFit/>
+                </a:bodyPr>
+                <a:lstStyle/>
+                <a:p>
+                  <a:pPr/>
+                  <a14:m>
+                    <m:oMathPara xmlns:m="http://schemas.openxmlformats.org/officeDocument/2006/math">
+                      <m:oMathParaPr>
+                        <m:jc m:val="centerGroup"/>
+                      </m:oMathParaPr>
+                      <m:oMath xmlns:m="http://schemas.openxmlformats.org/officeDocument/2006/math">
+                        <m:r>
+                          <a:rPr lang="en-US" i="1" smtClean="0">
+                            <a:latin typeface="Cambria Math" panose="02040503050406030204" pitchFamily="18" charset="0"/>
+                          </a:rPr>
+                          <m:t>𝜇</m:t>
+                        </m:r>
+                        <m:r>
+                          <a:rPr lang="en-US" b="0" i="1" smtClean="0">
+                            <a:latin typeface="Cambria Math" panose="02040503050406030204" pitchFamily="18" charset="0"/>
+                          </a:rPr>
+                          <m:t>+</m:t>
+                        </m:r>
+                        <m:sSub>
+                          <m:sSubPr>
+                            <m:ctrlPr>
+                              <a:rPr lang="en-US" b="0" i="1" smtClean="0">
+                                <a:latin typeface="Cambria Math" panose="02040503050406030204" pitchFamily="18" charset="0"/>
+                              </a:rPr>
+                            </m:ctrlPr>
+                          </m:sSubPr>
+                          <m:e>
+                            <m:r>
+                              <a:rPr lang="en-US" b="0" i="1" smtClean="0">
+                                <a:latin typeface="Cambria Math" panose="02040503050406030204" pitchFamily="18" charset="0"/>
+                              </a:rPr>
+                              <m:t>𝜇</m:t>
+                            </m:r>
+                          </m:e>
+                          <m:sub>
+                            <m:r>
+                              <a:rPr lang="en-US" b="0" i="1" smtClean="0">
+                                <a:latin typeface="Cambria Math" panose="02040503050406030204" pitchFamily="18" charset="0"/>
+                              </a:rPr>
+                              <m:t>𝐷𝐶</m:t>
+                            </m:r>
+                          </m:sub>
+                        </m:sSub>
+                      </m:oMath>
+                    </m:oMathPara>
+                  </a14:m>
+                  <a:endParaRPr lang="en-CN" dirty="0"/>
+                </a:p>
+              </p:txBody>
+            </p:sp>
+          </mc:Choice>
+          <mc:Fallback xmlns="">
+            <p:sp>
+              <p:nvSpPr>
+                <p:cNvPr id="71" name="TextBox 70">
+                  <a:extLst>
+                    <a:ext uri="{FF2B5EF4-FFF2-40B4-BE49-F238E27FC236}">
+                      <a16:creationId xmlns:a16="http://schemas.microsoft.com/office/drawing/2014/main" id="{5D409464-2C46-8B96-26B0-D88D7D9238E1}"/>
+                    </a:ext>
+                  </a:extLst>
+                </p:cNvPr>
+                <p:cNvSpPr txBox="1">
+                  <a:spLocks noRot="1" noChangeAspect="1" noMove="1" noResize="1" noEditPoints="1" noAdjustHandles="1" noChangeArrowheads="1" noChangeShapeType="1" noTextEdit="1"/>
+                </p:cNvSpPr>
+                <p:nvPr/>
+              </p:nvSpPr>
+              <p:spPr>
+                <a:xfrm>
+                  <a:off x="7685178" y="5863215"/>
+                  <a:ext cx="985309" cy="369332"/>
+                </a:xfrm>
+                <a:prstGeom prst="rect">
+                  <a:avLst/>
+                </a:prstGeom>
+                <a:blipFill>
+                  <a:blip r:embed="rId8"/>
+                  <a:stretch>
+                    <a:fillRect b="-6667"/>
+                  </a:stretch>
+                </a:blipFill>
+              </p:spPr>
+              <p:txBody>
+                <a:bodyPr/>
+                <a:lstStyle/>
+                <a:p>
+                  <a:r>
+                    <a:rPr lang="en-CN">
+                      <a:noFill/>
+                    </a:rPr>
+                    <a:t> </a:t>
+                  </a:r>
+                </a:p>
+              </p:txBody>
+            </p:sp>
+          </mc:Fallback>
+        </mc:AlternateContent>
+        <p:cxnSp>
+          <p:nvCxnSpPr>
+            <p:cNvPr id="72" name="Curved Connector 71">
+              <a:extLst>
+                <a:ext uri="{FF2B5EF4-FFF2-40B4-BE49-F238E27FC236}">
+                  <a16:creationId xmlns:a16="http://schemas.microsoft.com/office/drawing/2014/main" id="{CF7AC566-439B-0BEA-4CAF-8263A3EF9023}"/>
+                </a:ext>
+              </a:extLst>
+            </p:cNvPr>
+            <p:cNvCxnSpPr>
+              <a:cxnSpLocks/>
+            </p:cNvCxnSpPr>
+            <p:nvPr/>
+          </p:nvCxnSpPr>
+          <p:spPr>
+            <a:xfrm rot="16200000" flipH="1">
+              <a:off x="10478673" y="5741276"/>
+              <a:ext cx="273788" cy="339422"/>
+            </a:xfrm>
+            <a:prstGeom prst="curvedConnector2">
+              <a:avLst/>
+            </a:prstGeom>
+            <a:ln>
+              <a:solidFill>
+                <a:schemeClr val="tx1"/>
+              </a:solidFill>
+              <a:tailEnd type="triangle"/>
+            </a:ln>
+          </p:spPr>
+          <p:style>
+            <a:lnRef idx="2">
+              <a:schemeClr val="accent1"/>
+            </a:lnRef>
+            <a:fillRef idx="0">
+              <a:schemeClr val="accent1"/>
+            </a:fillRef>
+            <a:effectRef idx="1">
+              <a:schemeClr val="accent1"/>
+            </a:effectRef>
+            <a:fontRef idx="minor">
+              <a:schemeClr val="tx1"/>
+            </a:fontRef>
+          </p:style>
+        </p:cxnSp>
+        <mc:AlternateContent xmlns:mc="http://schemas.openxmlformats.org/markup-compatibility/2006" xmlns:a14="http://schemas.microsoft.com/office/drawing/2010/main">
+          <mc:Choice Requires="a14">
+            <p:sp>
+              <p:nvSpPr>
+                <p:cNvPr id="73" name="TextBox 72">
+                  <a:extLst>
+                    <a:ext uri="{FF2B5EF4-FFF2-40B4-BE49-F238E27FC236}">
+                      <a16:creationId xmlns:a16="http://schemas.microsoft.com/office/drawing/2014/main" id="{783980BE-DBC6-5F49-2385-8CA6FA4FF44E}"/>
+                    </a:ext>
+                  </a:extLst>
+                </p:cNvPr>
+                <p:cNvSpPr txBox="1"/>
+                <p:nvPr/>
+              </p:nvSpPr>
+              <p:spPr>
+                <a:xfrm>
+                  <a:off x="10704560" y="5858156"/>
+                  <a:ext cx="1072108" cy="369332"/>
+                </a:xfrm>
+                <a:prstGeom prst="rect">
+                  <a:avLst/>
+                </a:prstGeom>
+                <a:noFill/>
+              </p:spPr>
+              <p:txBody>
+                <a:bodyPr wrap="square" rtlCol="0">
+                  <a:spAutoFit/>
+                </a:bodyPr>
+                <a:lstStyle/>
+                <a:p>
+                  <a:pPr/>
+                  <a14:m>
+                    <m:oMathPara xmlns:m="http://schemas.openxmlformats.org/officeDocument/2006/math">
+                      <m:oMathParaPr>
+                        <m:jc m:val="centerGroup"/>
+                      </m:oMathParaPr>
+                      <m:oMath xmlns:m="http://schemas.openxmlformats.org/officeDocument/2006/math">
+                        <m:r>
+                          <a:rPr lang="en-US" b="0" i="1" smtClean="0">
+                            <a:latin typeface="Cambria Math" panose="02040503050406030204" pitchFamily="18" charset="0"/>
+                          </a:rPr>
+                          <m:t>𝜇</m:t>
+                        </m:r>
+                        <m:r>
+                          <a:rPr lang="en-US" b="0" i="1" smtClean="0">
+                            <a:latin typeface="Cambria Math" panose="02040503050406030204" pitchFamily="18" charset="0"/>
+                          </a:rPr>
+                          <m:t>+</m:t>
+                        </m:r>
+                        <m:sSub>
+                          <m:sSubPr>
+                            <m:ctrlPr>
+                              <a:rPr lang="en-US" b="0" i="1" smtClean="0">
+                                <a:latin typeface="Cambria Math" panose="02040503050406030204" pitchFamily="18" charset="0"/>
+                              </a:rPr>
+                            </m:ctrlPr>
+                          </m:sSubPr>
+                          <m:e>
+                            <m:r>
+                              <a:rPr lang="en-US" b="0" i="1" smtClean="0">
+                                <a:latin typeface="Cambria Math" panose="02040503050406030204" pitchFamily="18" charset="0"/>
+                              </a:rPr>
+                              <m:t>𝜇</m:t>
+                            </m:r>
+                          </m:e>
+                          <m:sub>
+                            <m:r>
+                              <a:rPr lang="en-US" b="0" i="1" smtClean="0">
+                                <a:latin typeface="Cambria Math" panose="02040503050406030204" pitchFamily="18" charset="0"/>
+                              </a:rPr>
+                              <m:t>𝐻𝐶𝐶</m:t>
+                            </m:r>
+                          </m:sub>
+                        </m:sSub>
+                      </m:oMath>
+                    </m:oMathPara>
+                  </a14:m>
+                  <a:endParaRPr lang="en-CN" dirty="0"/>
+                </a:p>
+              </p:txBody>
+            </p:sp>
+          </mc:Choice>
+          <mc:Fallback xmlns="">
+            <p:sp>
+              <p:nvSpPr>
+                <p:cNvPr id="73" name="TextBox 72">
+                  <a:extLst>
+                    <a:ext uri="{FF2B5EF4-FFF2-40B4-BE49-F238E27FC236}">
+                      <a16:creationId xmlns:a16="http://schemas.microsoft.com/office/drawing/2014/main" id="{783980BE-DBC6-5F49-2385-8CA6FA4FF44E}"/>
+                    </a:ext>
+                  </a:extLst>
+                </p:cNvPr>
+                <p:cNvSpPr txBox="1">
+                  <a:spLocks noRot="1" noChangeAspect="1" noMove="1" noResize="1" noEditPoints="1" noAdjustHandles="1" noChangeArrowheads="1" noChangeShapeType="1" noTextEdit="1"/>
+                </p:cNvSpPr>
+                <p:nvPr/>
+              </p:nvSpPr>
+              <p:spPr>
+                <a:xfrm>
+                  <a:off x="10704560" y="5858156"/>
+                  <a:ext cx="1072108" cy="369332"/>
+                </a:xfrm>
+                <a:prstGeom prst="rect">
+                  <a:avLst/>
+                </a:prstGeom>
+                <a:blipFill>
+                  <a:blip r:embed="rId9"/>
+                  <a:stretch>
+                    <a:fillRect b="-6667"/>
+                  </a:stretch>
+                </a:blipFill>
+              </p:spPr>
+              <p:txBody>
+                <a:bodyPr/>
+                <a:lstStyle/>
+                <a:p>
+                  <a:r>
+                    <a:rPr lang="en-CN">
+                      <a:noFill/>
+                    </a:rPr>
+                    <a:t> </a:t>
+                  </a:r>
+                </a:p>
+              </p:txBody>
+            </p:sp>
+          </mc:Fallback>
+        </mc:AlternateContent>
+        <p:cxnSp>
+          <p:nvCxnSpPr>
+            <p:cNvPr id="74" name="Curved Connector 73">
+              <a:extLst>
+                <a:ext uri="{FF2B5EF4-FFF2-40B4-BE49-F238E27FC236}">
+                  <a16:creationId xmlns:a16="http://schemas.microsoft.com/office/drawing/2014/main" id="{3F981598-8A0E-C535-DDE2-956658286662}"/>
+                </a:ext>
+              </a:extLst>
+            </p:cNvPr>
+            <p:cNvCxnSpPr>
+              <a:cxnSpLocks/>
+            </p:cNvCxnSpPr>
+            <p:nvPr/>
+          </p:nvCxnSpPr>
+          <p:spPr>
+            <a:xfrm rot="16200000" flipH="1">
+              <a:off x="10397955" y="2649742"/>
+              <a:ext cx="273788" cy="339422"/>
+            </a:xfrm>
+            <a:prstGeom prst="curvedConnector2">
+              <a:avLst/>
+            </a:prstGeom>
+            <a:ln>
+              <a:solidFill>
+                <a:schemeClr val="tx1"/>
+              </a:solidFill>
+              <a:tailEnd type="triangle"/>
+            </a:ln>
+          </p:spPr>
+          <p:style>
+            <a:lnRef idx="2">
+              <a:schemeClr val="accent1"/>
+            </a:lnRef>
+            <a:fillRef idx="0">
+              <a:schemeClr val="accent1"/>
+            </a:fillRef>
+            <a:effectRef idx="1">
+              <a:schemeClr val="accent1"/>
+            </a:effectRef>
+            <a:fontRef idx="minor">
+              <a:schemeClr val="tx1"/>
+            </a:fontRef>
+          </p:style>
+        </p:cxnSp>
+        <mc:AlternateContent xmlns:mc="http://schemas.openxmlformats.org/markup-compatibility/2006" xmlns:a14="http://schemas.microsoft.com/office/drawing/2010/main">
+          <mc:Choice Requires="a14">
+            <p:sp>
+              <p:nvSpPr>
+                <p:cNvPr id="75" name="TextBox 74">
+                  <a:extLst>
+                    <a:ext uri="{FF2B5EF4-FFF2-40B4-BE49-F238E27FC236}">
+                      <a16:creationId xmlns:a16="http://schemas.microsoft.com/office/drawing/2014/main" id="{9855D999-B57A-7DE3-94D4-AD2DE88D5860}"/>
+                    </a:ext>
+                  </a:extLst>
+                </p:cNvPr>
+                <p:cNvSpPr txBox="1"/>
+                <p:nvPr/>
+              </p:nvSpPr>
+              <p:spPr>
+                <a:xfrm>
+                  <a:off x="10623843" y="2766622"/>
+                  <a:ext cx="364010" cy="369332"/>
+                </a:xfrm>
+                <a:prstGeom prst="rect">
+                  <a:avLst/>
+                </a:prstGeom>
+                <a:noFill/>
+              </p:spPr>
+              <p:txBody>
+                <a:bodyPr wrap="square" rtlCol="0">
+                  <a:spAutoFit/>
+                </a:bodyPr>
+                <a:lstStyle/>
+                <a:p>
+                  <a:pPr/>
+                  <a14:m>
+                    <m:oMathPara xmlns:m="http://schemas.openxmlformats.org/officeDocument/2006/math">
+                      <m:oMathParaPr>
+                        <m:jc m:val="centerGroup"/>
+                      </m:oMathParaPr>
+                      <m:oMath xmlns:m="http://schemas.openxmlformats.org/officeDocument/2006/math">
+                        <m:r>
+                          <a:rPr lang="en-US" b="0" i="1" smtClean="0">
+                            <a:latin typeface="Cambria Math" panose="02040503050406030204" pitchFamily="18" charset="0"/>
+                          </a:rPr>
+                          <m:t>𝜇</m:t>
+                        </m:r>
+                      </m:oMath>
+                    </m:oMathPara>
+                  </a14:m>
+                  <a:endParaRPr lang="en-CN" dirty="0"/>
+                </a:p>
+              </p:txBody>
+            </p:sp>
+          </mc:Choice>
+          <mc:Fallback xmlns="">
+            <p:sp>
+              <p:nvSpPr>
+                <p:cNvPr id="75" name="TextBox 74">
+                  <a:extLst>
+                    <a:ext uri="{FF2B5EF4-FFF2-40B4-BE49-F238E27FC236}">
+                      <a16:creationId xmlns:a16="http://schemas.microsoft.com/office/drawing/2014/main" id="{9855D999-B57A-7DE3-94D4-AD2DE88D5860}"/>
+                    </a:ext>
+                  </a:extLst>
+                </p:cNvPr>
+                <p:cNvSpPr txBox="1">
+                  <a:spLocks noRot="1" noChangeAspect="1" noMove="1" noResize="1" noEditPoints="1" noAdjustHandles="1" noChangeArrowheads="1" noChangeShapeType="1" noTextEdit="1"/>
+                </p:cNvSpPr>
+                <p:nvPr/>
+              </p:nvSpPr>
+              <p:spPr>
+                <a:xfrm>
+                  <a:off x="10623843" y="2766622"/>
+                  <a:ext cx="364010" cy="369332"/>
+                </a:xfrm>
+                <a:prstGeom prst="rect">
+                  <a:avLst/>
+                </a:prstGeom>
+                <a:blipFill>
+                  <a:blip r:embed="rId10"/>
+                  <a:stretch>
+                    <a:fillRect b="-6667"/>
+                  </a:stretch>
+                </a:blipFill>
+              </p:spPr>
+              <p:txBody>
+                <a:bodyPr/>
+                <a:lstStyle/>
+                <a:p>
+                  <a:r>
+                    <a:rPr lang="en-CN">
+                      <a:noFill/>
+                    </a:rPr>
+                    <a:t> </a:t>
+                  </a:r>
+                </a:p>
+              </p:txBody>
+            </p:sp>
+          </mc:Fallback>
+        </mc:AlternateContent>
+        <p:cxnSp>
+          <p:nvCxnSpPr>
+            <p:cNvPr id="76" name="Curved Connector 75">
+              <a:extLst>
+                <a:ext uri="{FF2B5EF4-FFF2-40B4-BE49-F238E27FC236}">
+                  <a16:creationId xmlns:a16="http://schemas.microsoft.com/office/drawing/2014/main" id="{E4D27BC6-B1FE-6715-C20D-A9FF38B7F0BA}"/>
+                </a:ext>
+              </a:extLst>
+            </p:cNvPr>
+            <p:cNvCxnSpPr>
+              <a:cxnSpLocks/>
+            </p:cNvCxnSpPr>
+            <p:nvPr/>
+          </p:nvCxnSpPr>
+          <p:spPr>
+            <a:xfrm rot="16200000" flipH="1">
+              <a:off x="9307325" y="3640022"/>
+              <a:ext cx="273788" cy="339422"/>
+            </a:xfrm>
+            <a:prstGeom prst="curvedConnector2">
+              <a:avLst/>
+            </a:prstGeom>
+            <a:ln>
+              <a:solidFill>
+                <a:schemeClr val="tx1"/>
+              </a:solidFill>
+              <a:tailEnd type="triangle"/>
+            </a:ln>
+          </p:spPr>
+          <p:style>
+            <a:lnRef idx="2">
+              <a:schemeClr val="accent1"/>
+            </a:lnRef>
+            <a:fillRef idx="0">
+              <a:schemeClr val="accent1"/>
+            </a:fillRef>
+            <a:effectRef idx="1">
+              <a:schemeClr val="accent1"/>
+            </a:effectRef>
+            <a:fontRef idx="minor">
+              <a:schemeClr val="tx1"/>
+            </a:fontRef>
+          </p:style>
+        </p:cxnSp>
+        <mc:AlternateContent xmlns:mc="http://schemas.openxmlformats.org/markup-compatibility/2006" xmlns:a14="http://schemas.microsoft.com/office/drawing/2010/main">
+          <mc:Choice Requires="a14">
+            <p:sp>
+              <p:nvSpPr>
+                <p:cNvPr id="77" name="TextBox 76">
+                  <a:extLst>
+                    <a:ext uri="{FF2B5EF4-FFF2-40B4-BE49-F238E27FC236}">
+                      <a16:creationId xmlns:a16="http://schemas.microsoft.com/office/drawing/2014/main" id="{2FA1AE9B-F1D1-A157-25D5-32E10E932CA6}"/>
+                    </a:ext>
+                  </a:extLst>
+                </p:cNvPr>
+                <p:cNvSpPr txBox="1"/>
+                <p:nvPr/>
+              </p:nvSpPr>
+              <p:spPr>
+                <a:xfrm>
+                  <a:off x="9533213" y="3756902"/>
+                  <a:ext cx="364010" cy="369332"/>
+                </a:xfrm>
+                <a:prstGeom prst="rect">
+                  <a:avLst/>
+                </a:prstGeom>
+                <a:noFill/>
+              </p:spPr>
+              <p:txBody>
+                <a:bodyPr wrap="square" rtlCol="0">
+                  <a:spAutoFit/>
+                </a:bodyPr>
+                <a:lstStyle/>
+                <a:p>
+                  <a:pPr/>
+                  <a14:m>
+                    <m:oMathPara xmlns:m="http://schemas.openxmlformats.org/officeDocument/2006/math">
+                      <m:oMathParaPr>
+                        <m:jc m:val="centerGroup"/>
+                      </m:oMathParaPr>
+                      <m:oMath xmlns:m="http://schemas.openxmlformats.org/officeDocument/2006/math">
+                        <m:r>
+                          <a:rPr lang="en-US" b="0" i="1" smtClean="0">
+                            <a:latin typeface="Cambria Math" panose="02040503050406030204" pitchFamily="18" charset="0"/>
+                          </a:rPr>
+                          <m:t>𝜇</m:t>
+                        </m:r>
+                      </m:oMath>
+                    </m:oMathPara>
+                  </a14:m>
+                  <a:endParaRPr lang="en-CN" dirty="0"/>
+                </a:p>
+              </p:txBody>
+            </p:sp>
+          </mc:Choice>
+          <mc:Fallback xmlns="">
+            <p:sp>
+              <p:nvSpPr>
+                <p:cNvPr id="77" name="TextBox 76">
+                  <a:extLst>
+                    <a:ext uri="{FF2B5EF4-FFF2-40B4-BE49-F238E27FC236}">
+                      <a16:creationId xmlns:a16="http://schemas.microsoft.com/office/drawing/2014/main" id="{2FA1AE9B-F1D1-A157-25D5-32E10E932CA6}"/>
+                    </a:ext>
+                  </a:extLst>
+                </p:cNvPr>
+                <p:cNvSpPr txBox="1">
+                  <a:spLocks noRot="1" noChangeAspect="1" noMove="1" noResize="1" noEditPoints="1" noAdjustHandles="1" noChangeArrowheads="1" noChangeShapeType="1" noTextEdit="1"/>
+                </p:cNvSpPr>
+                <p:nvPr/>
+              </p:nvSpPr>
+              <p:spPr>
+                <a:xfrm>
+                  <a:off x="9533213" y="3756902"/>
+                  <a:ext cx="364010" cy="369332"/>
+                </a:xfrm>
+                <a:prstGeom prst="rect">
+                  <a:avLst/>
+                </a:prstGeom>
+                <a:blipFill>
+                  <a:blip r:embed="rId11"/>
+                  <a:stretch>
+                    <a:fillRect b="-6667"/>
+                  </a:stretch>
+                </a:blipFill>
+              </p:spPr>
+              <p:txBody>
+                <a:bodyPr/>
+                <a:lstStyle/>
+                <a:p>
+                  <a:r>
+                    <a:rPr lang="en-CN">
+                      <a:noFill/>
+                    </a:rPr>
+                    <a:t> </a:t>
+                  </a:r>
+                </a:p>
+              </p:txBody>
+            </p:sp>
+          </mc:Fallback>
+        </mc:AlternateContent>
+        <p:cxnSp>
+          <p:nvCxnSpPr>
+            <p:cNvPr id="78" name="Curved Connector 77">
+              <a:extLst>
+                <a:ext uri="{FF2B5EF4-FFF2-40B4-BE49-F238E27FC236}">
+                  <a16:creationId xmlns:a16="http://schemas.microsoft.com/office/drawing/2014/main" id="{E8BC46C0-AF96-0E79-2D42-5D390E3B9C44}"/>
+                </a:ext>
+              </a:extLst>
+            </p:cNvPr>
+            <p:cNvCxnSpPr>
+              <a:cxnSpLocks/>
+            </p:cNvCxnSpPr>
+            <p:nvPr/>
+          </p:nvCxnSpPr>
+          <p:spPr>
+            <a:xfrm rot="16200000" flipH="1">
+              <a:off x="7728882" y="2654801"/>
+              <a:ext cx="273788" cy="339422"/>
+            </a:xfrm>
+            <a:prstGeom prst="curvedConnector2">
+              <a:avLst/>
+            </a:prstGeom>
+            <a:ln>
+              <a:solidFill>
+                <a:schemeClr val="tx1"/>
+              </a:solidFill>
+              <a:tailEnd type="triangle"/>
+            </a:ln>
+          </p:spPr>
+          <p:style>
+            <a:lnRef idx="2">
+              <a:schemeClr val="accent1"/>
+            </a:lnRef>
+            <a:fillRef idx="0">
+              <a:schemeClr val="accent1"/>
+            </a:fillRef>
+            <a:effectRef idx="1">
+              <a:schemeClr val="accent1"/>
+            </a:effectRef>
+            <a:fontRef idx="minor">
+              <a:schemeClr val="tx1"/>
+            </a:fontRef>
+          </p:style>
+        </p:cxnSp>
+        <mc:AlternateContent xmlns:mc="http://schemas.openxmlformats.org/markup-compatibility/2006" xmlns:a14="http://schemas.microsoft.com/office/drawing/2010/main">
+          <mc:Choice Requires="a14">
+            <p:sp>
+              <p:nvSpPr>
+                <p:cNvPr id="79" name="TextBox 78">
+                  <a:extLst>
+                    <a:ext uri="{FF2B5EF4-FFF2-40B4-BE49-F238E27FC236}">
+                      <a16:creationId xmlns:a16="http://schemas.microsoft.com/office/drawing/2014/main" id="{551B2DEE-2E56-1246-99B3-054D3E96310F}"/>
+                    </a:ext>
+                  </a:extLst>
+                </p:cNvPr>
+                <p:cNvSpPr txBox="1"/>
+                <p:nvPr/>
+              </p:nvSpPr>
+              <p:spPr>
+                <a:xfrm>
+                  <a:off x="7954770" y="2771681"/>
+                  <a:ext cx="364010" cy="369332"/>
+                </a:xfrm>
+                <a:prstGeom prst="rect">
+                  <a:avLst/>
+                </a:prstGeom>
+                <a:noFill/>
+              </p:spPr>
+              <p:txBody>
+                <a:bodyPr wrap="square" rtlCol="0">
+                  <a:spAutoFit/>
+                </a:bodyPr>
+                <a:lstStyle/>
+                <a:p>
+                  <a:pPr/>
+                  <a14:m>
+                    <m:oMathPara xmlns:m="http://schemas.openxmlformats.org/officeDocument/2006/math">
+                      <m:oMathParaPr>
+                        <m:jc m:val="centerGroup"/>
+                      </m:oMathParaPr>
+                      <m:oMath xmlns:m="http://schemas.openxmlformats.org/officeDocument/2006/math">
+                        <m:r>
+                          <a:rPr lang="en-US" b="0" i="1" smtClean="0">
+                            <a:latin typeface="Cambria Math" panose="02040503050406030204" pitchFamily="18" charset="0"/>
+                          </a:rPr>
+                          <m:t>𝜇</m:t>
+                        </m:r>
+                      </m:oMath>
+                    </m:oMathPara>
+                  </a14:m>
+                  <a:endParaRPr lang="en-CN" dirty="0"/>
+                </a:p>
+              </p:txBody>
+            </p:sp>
+          </mc:Choice>
+          <mc:Fallback xmlns="">
+            <p:sp>
+              <p:nvSpPr>
+                <p:cNvPr id="79" name="TextBox 78">
+                  <a:extLst>
+                    <a:ext uri="{FF2B5EF4-FFF2-40B4-BE49-F238E27FC236}">
+                      <a16:creationId xmlns:a16="http://schemas.microsoft.com/office/drawing/2014/main" id="{551B2DEE-2E56-1246-99B3-054D3E96310F}"/>
+                    </a:ext>
+                  </a:extLst>
+                </p:cNvPr>
+                <p:cNvSpPr txBox="1">
+                  <a:spLocks noRot="1" noChangeAspect="1" noMove="1" noResize="1" noEditPoints="1" noAdjustHandles="1" noChangeArrowheads="1" noChangeShapeType="1" noTextEdit="1"/>
+                </p:cNvSpPr>
+                <p:nvPr/>
+              </p:nvSpPr>
+              <p:spPr>
+                <a:xfrm>
+                  <a:off x="7954770" y="2771681"/>
+                  <a:ext cx="364010" cy="369332"/>
+                </a:xfrm>
+                <a:prstGeom prst="rect">
+                  <a:avLst/>
+                </a:prstGeom>
+                <a:blipFill>
+                  <a:blip r:embed="rId12"/>
+                  <a:stretch>
+                    <a:fillRect b="-6667"/>
+                  </a:stretch>
+                </a:blipFill>
+              </p:spPr>
+              <p:txBody>
+                <a:bodyPr/>
+                <a:lstStyle/>
+                <a:p>
+                  <a:r>
+                    <a:rPr lang="en-CN">
+                      <a:noFill/>
+                    </a:rPr>
+                    <a:t> </a:t>
+                  </a:r>
+                </a:p>
+              </p:txBody>
+            </p:sp>
+          </mc:Fallback>
+        </mc:AlternateContent>
+        <p:cxnSp>
+          <p:nvCxnSpPr>
+            <p:cNvPr id="80" name="Curved Connector 79">
+              <a:extLst>
+                <a:ext uri="{FF2B5EF4-FFF2-40B4-BE49-F238E27FC236}">
+                  <a16:creationId xmlns:a16="http://schemas.microsoft.com/office/drawing/2014/main" id="{35BBE7D9-D8CC-00E6-0256-738FF53B9C02}"/>
+                </a:ext>
+              </a:extLst>
+            </p:cNvPr>
+            <p:cNvCxnSpPr>
+              <a:cxnSpLocks/>
+            </p:cNvCxnSpPr>
+            <p:nvPr/>
+          </p:nvCxnSpPr>
+          <p:spPr>
+            <a:xfrm rot="16200000" flipH="1">
+              <a:off x="10144735" y="1661874"/>
+              <a:ext cx="273788" cy="339422"/>
+            </a:xfrm>
+            <a:prstGeom prst="curvedConnector2">
+              <a:avLst/>
+            </a:prstGeom>
+            <a:ln>
+              <a:solidFill>
+                <a:schemeClr val="tx1"/>
+              </a:solidFill>
+              <a:tailEnd type="triangle"/>
+            </a:ln>
+          </p:spPr>
+          <p:style>
+            <a:lnRef idx="2">
+              <a:schemeClr val="accent1"/>
+            </a:lnRef>
+            <a:fillRef idx="0">
+              <a:schemeClr val="accent1"/>
+            </a:fillRef>
+            <a:effectRef idx="1">
+              <a:schemeClr val="accent1"/>
+            </a:effectRef>
+            <a:fontRef idx="minor">
+              <a:schemeClr val="tx1"/>
+            </a:fontRef>
+          </p:style>
+        </p:cxnSp>
+        <mc:AlternateContent xmlns:mc="http://schemas.openxmlformats.org/markup-compatibility/2006" xmlns:a14="http://schemas.microsoft.com/office/drawing/2010/main">
+          <mc:Choice Requires="a14">
+            <p:sp>
+              <p:nvSpPr>
+                <p:cNvPr id="81" name="TextBox 80">
+                  <a:extLst>
+                    <a:ext uri="{FF2B5EF4-FFF2-40B4-BE49-F238E27FC236}">
+                      <a16:creationId xmlns:a16="http://schemas.microsoft.com/office/drawing/2014/main" id="{18349301-CF51-3133-8D4C-E1467ED83C99}"/>
+                    </a:ext>
+                  </a:extLst>
+                </p:cNvPr>
+                <p:cNvSpPr txBox="1"/>
+                <p:nvPr/>
+              </p:nvSpPr>
+              <p:spPr>
+                <a:xfrm>
+                  <a:off x="10370623" y="1778754"/>
+                  <a:ext cx="364010" cy="369332"/>
+                </a:xfrm>
+                <a:prstGeom prst="rect">
+                  <a:avLst/>
+                </a:prstGeom>
+                <a:noFill/>
+              </p:spPr>
+              <p:txBody>
+                <a:bodyPr wrap="square" rtlCol="0">
+                  <a:spAutoFit/>
+                </a:bodyPr>
+                <a:lstStyle/>
+                <a:p>
+                  <a:pPr/>
+                  <a14:m>
+                    <m:oMathPara xmlns:m="http://schemas.openxmlformats.org/officeDocument/2006/math">
+                      <m:oMathParaPr>
+                        <m:jc m:val="centerGroup"/>
+                      </m:oMathParaPr>
+                      <m:oMath xmlns:m="http://schemas.openxmlformats.org/officeDocument/2006/math">
+                        <m:r>
+                          <a:rPr lang="en-US" b="0" i="1" smtClean="0">
+                            <a:latin typeface="Cambria Math" panose="02040503050406030204" pitchFamily="18" charset="0"/>
+                          </a:rPr>
+                          <m:t>𝜇</m:t>
+                        </m:r>
+                      </m:oMath>
+                    </m:oMathPara>
+                  </a14:m>
+                  <a:endParaRPr lang="en-CN" dirty="0"/>
+                </a:p>
+              </p:txBody>
+            </p:sp>
+          </mc:Choice>
+          <mc:Fallback xmlns="">
+            <p:sp>
+              <p:nvSpPr>
+                <p:cNvPr id="81" name="TextBox 80">
+                  <a:extLst>
+                    <a:ext uri="{FF2B5EF4-FFF2-40B4-BE49-F238E27FC236}">
+                      <a16:creationId xmlns:a16="http://schemas.microsoft.com/office/drawing/2014/main" id="{18349301-CF51-3133-8D4C-E1467ED83C99}"/>
+                    </a:ext>
+                  </a:extLst>
+                </p:cNvPr>
+                <p:cNvSpPr txBox="1">
+                  <a:spLocks noRot="1" noChangeAspect="1" noMove="1" noResize="1" noEditPoints="1" noAdjustHandles="1" noChangeArrowheads="1" noChangeShapeType="1" noTextEdit="1"/>
+                </p:cNvSpPr>
+                <p:nvPr/>
+              </p:nvSpPr>
+              <p:spPr>
+                <a:xfrm>
+                  <a:off x="10370623" y="1778754"/>
+                  <a:ext cx="364010" cy="369332"/>
+                </a:xfrm>
+                <a:prstGeom prst="rect">
+                  <a:avLst/>
+                </a:prstGeom>
+                <a:blipFill>
+                  <a:blip r:embed="rId13"/>
+                  <a:stretch>
+                    <a:fillRect b="-6897"/>
+                  </a:stretch>
+                </a:blipFill>
+              </p:spPr>
+              <p:txBody>
+                <a:bodyPr/>
+                <a:lstStyle/>
+                <a:p>
+                  <a:r>
+                    <a:rPr lang="en-CN">
+                      <a:noFill/>
+                    </a:rPr>
+                    <a:t> </a:t>
+                  </a:r>
+                </a:p>
+              </p:txBody>
+            </p:sp>
+          </mc:Fallback>
+        </mc:AlternateContent>
       </p:grpSp>
-      <p:sp>
-        <p:nvSpPr>
-          <p:cNvPr id="51" name="TextBox 50">
-            <a:extLst>
-              <a:ext uri="{FF2B5EF4-FFF2-40B4-BE49-F238E27FC236}">
-                <a16:creationId xmlns:a16="http://schemas.microsoft.com/office/drawing/2014/main" id="{1A7A4915-91AE-B290-8566-B5E8330B2316}"/>
-              </a:ext>
-            </a:extLst>
-          </p:cNvPr>
-          <p:cNvSpPr txBox="1"/>
-          <p:nvPr/>
-        </p:nvSpPr>
-        <p:spPr>
-          <a:xfrm>
-            <a:off x="154382" y="226319"/>
-            <a:ext cx="4042325" cy="523220"/>
-          </a:xfrm>
-          <a:prstGeom prst="rect">
-            <a:avLst/>
-          </a:prstGeom>
-          <a:noFill/>
-        </p:spPr>
-        <p:txBody>
-          <a:bodyPr wrap="none" rtlCol="0">
-            <a:spAutoFit/>
-          </a:bodyPr>
-          <a:lstStyle/>
-          <a:p>
-            <a:r>
-              <a:rPr lang="en-US" sz="2800" b="1" dirty="0"/>
-              <a:t>Incarceration dynamics</a:t>
-            </a:r>
-          </a:p>
-        </p:txBody>
-      </p:sp>
     </p:spTree>
     <p:extLst>
       <p:ext uri="{BB962C8B-B14F-4D97-AF65-F5344CB8AC3E}">
@@ -4039,12 +6607,1166 @@
           <a:chExt cx="0" cy="0"/>
         </a:xfrm>
       </p:grpSpPr>
+      <p:sp>
+        <p:nvSpPr>
+          <p:cNvPr id="130" name="TextBox 129">
+            <a:extLst>
+              <a:ext uri="{FF2B5EF4-FFF2-40B4-BE49-F238E27FC236}">
+                <a16:creationId xmlns:a16="http://schemas.microsoft.com/office/drawing/2014/main" id="{5BCA5D06-19FA-9CCA-BCE2-4FC84B9D4434}"/>
+              </a:ext>
+            </a:extLst>
+          </p:cNvPr>
+          <p:cNvSpPr txBox="1"/>
+          <p:nvPr/>
+        </p:nvSpPr>
+        <p:spPr>
+          <a:xfrm>
+            <a:off x="154382" y="226319"/>
+            <a:ext cx="4337662" cy="523220"/>
+          </a:xfrm>
+          <a:prstGeom prst="rect">
+            <a:avLst/>
+          </a:prstGeom>
+          <a:noFill/>
+        </p:spPr>
+        <p:txBody>
+          <a:bodyPr wrap="none" rtlCol="0">
+            <a:spAutoFit/>
+          </a:bodyPr>
+          <a:lstStyle/>
+          <a:p>
+            <a:r>
+              <a:rPr lang="en-US" sz="2800" b="1" dirty="0"/>
+              <a:t>Liver disease progression</a:t>
+            </a:r>
+          </a:p>
+        </p:txBody>
+      </p:sp>
+      <p:grpSp>
+        <p:nvGrpSpPr>
+          <p:cNvPr id="53" name="Group 52">
+            <a:extLst>
+              <a:ext uri="{FF2B5EF4-FFF2-40B4-BE49-F238E27FC236}">
+                <a16:creationId xmlns:a16="http://schemas.microsoft.com/office/drawing/2014/main" id="{F80DA124-A9B3-A6E9-724D-E3E1FD7A6576}"/>
+              </a:ext>
+            </a:extLst>
+          </p:cNvPr>
+          <p:cNvGrpSpPr/>
+          <p:nvPr/>
+        </p:nvGrpSpPr>
+        <p:grpSpPr>
+          <a:xfrm>
+            <a:off x="242011" y="1842709"/>
+            <a:ext cx="11213111" cy="1189995"/>
+            <a:chOff x="242011" y="1842709"/>
+            <a:chExt cx="11213111" cy="1189995"/>
+          </a:xfrm>
+        </p:grpSpPr>
+        <p:sp>
+          <p:nvSpPr>
+            <p:cNvPr id="23" name="Rounded Rectangle 22">
+              <a:extLst>
+                <a:ext uri="{FF2B5EF4-FFF2-40B4-BE49-F238E27FC236}">
+                  <a16:creationId xmlns:a16="http://schemas.microsoft.com/office/drawing/2014/main" id="{8A7D14F2-D565-2A11-B71F-9D9BA73B7361}"/>
+                </a:ext>
+              </a:extLst>
+            </p:cNvPr>
+            <p:cNvSpPr/>
+            <p:nvPr/>
+          </p:nvSpPr>
+          <p:spPr>
+            <a:xfrm>
+              <a:off x="242011" y="2437706"/>
+              <a:ext cx="2195226" cy="594998"/>
+            </a:xfrm>
+            <a:prstGeom prst="roundRect">
+              <a:avLst/>
+            </a:prstGeom>
+            <a:noFill/>
+          </p:spPr>
+          <p:style>
+            <a:lnRef idx="2">
+              <a:schemeClr val="accent1">
+                <a:shade val="15000"/>
+              </a:schemeClr>
+            </a:lnRef>
+            <a:fillRef idx="1">
+              <a:schemeClr val="accent1"/>
+            </a:fillRef>
+            <a:effectRef idx="0">
+              <a:schemeClr val="accent1"/>
+            </a:effectRef>
+            <a:fontRef idx="minor">
+              <a:schemeClr val="lt1"/>
+            </a:fontRef>
+          </p:style>
+          <p:txBody>
+            <a:bodyPr tIns="0" rtlCol="0" anchor="ctr"/>
+            <a:lstStyle/>
+            <a:p>
+              <a:pPr algn="ctr"/>
+              <a:r>
+                <a:rPr lang="en-US" dirty="0">
+                  <a:solidFill>
+                    <a:schemeClr val="tx1"/>
+                  </a:solidFill>
+                </a:rPr>
+                <a:t>Non-Cirrhosis (NC)</a:t>
+              </a:r>
+            </a:p>
+          </p:txBody>
+        </p:sp>
+        <p:sp>
+          <p:nvSpPr>
+            <p:cNvPr id="31" name="Rounded Rectangle 30">
+              <a:extLst>
+                <a:ext uri="{FF2B5EF4-FFF2-40B4-BE49-F238E27FC236}">
+                  <a16:creationId xmlns:a16="http://schemas.microsoft.com/office/drawing/2014/main" id="{B289963A-7E31-1798-D7DF-ABD9CEDAF624}"/>
+                </a:ext>
+              </a:extLst>
+            </p:cNvPr>
+            <p:cNvSpPr/>
+            <p:nvPr/>
+          </p:nvSpPr>
+          <p:spPr>
+            <a:xfrm>
+              <a:off x="3247973" y="2437706"/>
+              <a:ext cx="2195226" cy="594998"/>
+            </a:xfrm>
+            <a:prstGeom prst="roundRect">
+              <a:avLst/>
+            </a:prstGeom>
+            <a:noFill/>
+          </p:spPr>
+          <p:style>
+            <a:lnRef idx="2">
+              <a:schemeClr val="accent1">
+                <a:shade val="15000"/>
+              </a:schemeClr>
+            </a:lnRef>
+            <a:fillRef idx="1">
+              <a:schemeClr val="accent1"/>
+            </a:fillRef>
+            <a:effectRef idx="0">
+              <a:schemeClr val="accent1"/>
+            </a:effectRef>
+            <a:fontRef idx="minor">
+              <a:schemeClr val="lt1"/>
+            </a:fontRef>
+          </p:style>
+          <p:txBody>
+            <a:bodyPr tIns="0" rtlCol="0" anchor="ctr"/>
+            <a:lstStyle/>
+            <a:p>
+              <a:pPr algn="ctr"/>
+              <a:r>
+                <a:rPr lang="en-US" dirty="0">
+                  <a:solidFill>
+                    <a:schemeClr val="tx1"/>
+                  </a:solidFill>
+                </a:rPr>
+                <a:t>Compensated Cirrhosis (CC)</a:t>
+              </a:r>
+            </a:p>
+          </p:txBody>
+        </p:sp>
+        <p:sp>
+          <p:nvSpPr>
+            <p:cNvPr id="81" name="Rounded Rectangle 80">
+              <a:extLst>
+                <a:ext uri="{FF2B5EF4-FFF2-40B4-BE49-F238E27FC236}">
+                  <a16:creationId xmlns:a16="http://schemas.microsoft.com/office/drawing/2014/main" id="{BE8A10DA-1FAF-E5AA-B826-A7334783703D}"/>
+                </a:ext>
+              </a:extLst>
+            </p:cNvPr>
+            <p:cNvSpPr/>
+            <p:nvPr/>
+          </p:nvSpPr>
+          <p:spPr>
+            <a:xfrm>
+              <a:off x="6253935" y="2437706"/>
+              <a:ext cx="2195226" cy="594998"/>
+            </a:xfrm>
+            <a:prstGeom prst="roundRect">
+              <a:avLst/>
+            </a:prstGeom>
+            <a:noFill/>
+          </p:spPr>
+          <p:style>
+            <a:lnRef idx="2">
+              <a:schemeClr val="accent1">
+                <a:shade val="15000"/>
+              </a:schemeClr>
+            </a:lnRef>
+            <a:fillRef idx="1">
+              <a:schemeClr val="accent1"/>
+            </a:fillRef>
+            <a:effectRef idx="0">
+              <a:schemeClr val="accent1"/>
+            </a:effectRef>
+            <a:fontRef idx="minor">
+              <a:schemeClr val="lt1"/>
+            </a:fontRef>
+          </p:style>
+          <p:txBody>
+            <a:bodyPr tIns="0" rtlCol="0" anchor="ctr"/>
+            <a:lstStyle/>
+            <a:p>
+              <a:pPr algn="ctr"/>
+              <a:r>
+                <a:rPr lang="en-US" dirty="0">
+                  <a:solidFill>
+                    <a:schemeClr val="tx1"/>
+                  </a:solidFill>
+                </a:rPr>
+                <a:t>Decompensated Cirrhosis (DC)</a:t>
+              </a:r>
+            </a:p>
+          </p:txBody>
+        </p:sp>
+        <p:sp>
+          <p:nvSpPr>
+            <p:cNvPr id="98" name="Rounded Rectangle 97">
+              <a:extLst>
+                <a:ext uri="{FF2B5EF4-FFF2-40B4-BE49-F238E27FC236}">
+                  <a16:creationId xmlns:a16="http://schemas.microsoft.com/office/drawing/2014/main" id="{96429BE9-1409-1C66-0270-AE8A37C7DFE1}"/>
+                </a:ext>
+              </a:extLst>
+            </p:cNvPr>
+            <p:cNvSpPr/>
+            <p:nvPr/>
+          </p:nvSpPr>
+          <p:spPr>
+            <a:xfrm>
+              <a:off x="9259896" y="2437706"/>
+              <a:ext cx="2195226" cy="594998"/>
+            </a:xfrm>
+            <a:prstGeom prst="roundRect">
+              <a:avLst/>
+            </a:prstGeom>
+            <a:noFill/>
+          </p:spPr>
+          <p:style>
+            <a:lnRef idx="2">
+              <a:schemeClr val="accent1">
+                <a:shade val="15000"/>
+              </a:schemeClr>
+            </a:lnRef>
+            <a:fillRef idx="1">
+              <a:schemeClr val="accent1"/>
+            </a:fillRef>
+            <a:effectRef idx="0">
+              <a:schemeClr val="accent1"/>
+            </a:effectRef>
+            <a:fontRef idx="minor">
+              <a:schemeClr val="lt1"/>
+            </a:fontRef>
+          </p:style>
+          <p:txBody>
+            <a:bodyPr tIns="0" rtlCol="0" anchor="ctr"/>
+            <a:lstStyle/>
+            <a:p>
+              <a:pPr algn="ctr"/>
+              <a:r>
+                <a:rPr lang="en-US" dirty="0">
+                  <a:solidFill>
+                    <a:schemeClr val="tx1"/>
+                  </a:solidFill>
+                </a:rPr>
+                <a:t>Hepatocellular Carcinoma (HCC)</a:t>
+              </a:r>
+            </a:p>
+          </p:txBody>
+        </p:sp>
+        <p:cxnSp>
+          <p:nvCxnSpPr>
+            <p:cNvPr id="124" name="Elbow Connector 123">
+              <a:extLst>
+                <a:ext uri="{FF2B5EF4-FFF2-40B4-BE49-F238E27FC236}">
+                  <a16:creationId xmlns:a16="http://schemas.microsoft.com/office/drawing/2014/main" id="{1A57A054-3F0A-313B-4889-8A62A55BE057}"/>
+                </a:ext>
+              </a:extLst>
+            </p:cNvPr>
+            <p:cNvCxnSpPr>
+              <a:cxnSpLocks/>
+              <a:stCxn id="31" idx="0"/>
+              <a:endCxn id="98" idx="0"/>
+            </p:cNvCxnSpPr>
+            <p:nvPr/>
+          </p:nvCxnSpPr>
+          <p:spPr>
+            <a:xfrm rot="5400000" flipH="1" flipV="1">
+              <a:off x="7351547" y="-568255"/>
+              <a:ext cx="12700" cy="6011923"/>
+            </a:xfrm>
+            <a:prstGeom prst="bentConnector3">
+              <a:avLst>
+                <a:gd name="adj1" fmla="val 1800000"/>
+              </a:avLst>
+            </a:prstGeom>
+            <a:ln>
+              <a:prstDash val="sysDash"/>
+              <a:tailEnd type="triangle"/>
+            </a:ln>
+          </p:spPr>
+          <p:style>
+            <a:lnRef idx="2">
+              <a:schemeClr val="dk1"/>
+            </a:lnRef>
+            <a:fillRef idx="0">
+              <a:schemeClr val="dk1"/>
+            </a:fillRef>
+            <a:effectRef idx="1">
+              <a:schemeClr val="dk1"/>
+            </a:effectRef>
+            <a:fontRef idx="minor">
+              <a:schemeClr val="tx1"/>
+            </a:fontRef>
+          </p:style>
+        </p:cxnSp>
+        <p:sp>
+          <p:nvSpPr>
+            <p:cNvPr id="127" name="TextBox 126">
+              <a:extLst>
+                <a:ext uri="{FF2B5EF4-FFF2-40B4-BE49-F238E27FC236}">
+                  <a16:creationId xmlns:a16="http://schemas.microsoft.com/office/drawing/2014/main" id="{24828A13-0ABB-4092-4FE7-E2461035A995}"/>
+                </a:ext>
+              </a:extLst>
+            </p:cNvPr>
+            <p:cNvSpPr txBox="1"/>
+            <p:nvPr/>
+          </p:nvSpPr>
+          <p:spPr>
+            <a:xfrm>
+              <a:off x="5848567" y="1842709"/>
+              <a:ext cx="3163896" cy="369332"/>
+            </a:xfrm>
+            <a:prstGeom prst="rect">
+              <a:avLst/>
+            </a:prstGeom>
+            <a:noFill/>
+          </p:spPr>
+          <p:txBody>
+            <a:bodyPr wrap="square" rtlCol="0">
+              <a:spAutoFit/>
+            </a:bodyPr>
+            <a:lstStyle/>
+            <a:p>
+              <a:r>
+                <a:rPr lang="en-US" dirty="0"/>
+                <a:t>Slower progression rate if SVR</a:t>
+              </a:r>
+            </a:p>
+          </p:txBody>
+        </p:sp>
+        <p:cxnSp>
+          <p:nvCxnSpPr>
+            <p:cNvPr id="46" name="Straight Arrow Connector 45">
+              <a:extLst>
+                <a:ext uri="{FF2B5EF4-FFF2-40B4-BE49-F238E27FC236}">
+                  <a16:creationId xmlns:a16="http://schemas.microsoft.com/office/drawing/2014/main" id="{B84FFF4F-F765-091F-0EFB-BEE4B36F201D}"/>
+                </a:ext>
+              </a:extLst>
+            </p:cNvPr>
+            <p:cNvCxnSpPr>
+              <a:stCxn id="23" idx="3"/>
+              <a:endCxn id="31" idx="1"/>
+            </p:cNvCxnSpPr>
+            <p:nvPr/>
+          </p:nvCxnSpPr>
+          <p:spPr>
+            <a:xfrm>
+              <a:off x="2437237" y="2735205"/>
+              <a:ext cx="810736" cy="0"/>
+            </a:xfrm>
+            <a:prstGeom prst="straightConnector1">
+              <a:avLst/>
+            </a:prstGeom>
+            <a:ln>
+              <a:solidFill>
+                <a:schemeClr val="tx1"/>
+              </a:solidFill>
+              <a:tailEnd type="triangle"/>
+            </a:ln>
+          </p:spPr>
+          <p:style>
+            <a:lnRef idx="2">
+              <a:schemeClr val="accent1"/>
+            </a:lnRef>
+            <a:fillRef idx="0">
+              <a:schemeClr val="accent1"/>
+            </a:fillRef>
+            <a:effectRef idx="1">
+              <a:schemeClr val="accent1"/>
+            </a:effectRef>
+            <a:fontRef idx="minor">
+              <a:schemeClr val="tx1"/>
+            </a:fontRef>
+          </p:style>
+        </p:cxnSp>
+        <p:cxnSp>
+          <p:nvCxnSpPr>
+            <p:cNvPr id="47" name="Straight Arrow Connector 46">
+              <a:extLst>
+                <a:ext uri="{FF2B5EF4-FFF2-40B4-BE49-F238E27FC236}">
+                  <a16:creationId xmlns:a16="http://schemas.microsoft.com/office/drawing/2014/main" id="{85DBD92B-6220-10A9-D702-E72ABD684DAE}"/>
+                </a:ext>
+              </a:extLst>
+            </p:cNvPr>
+            <p:cNvCxnSpPr>
+              <a:cxnSpLocks/>
+              <a:stCxn id="31" idx="3"/>
+              <a:endCxn id="81" idx="1"/>
+            </p:cNvCxnSpPr>
+            <p:nvPr/>
+          </p:nvCxnSpPr>
+          <p:spPr>
+            <a:xfrm>
+              <a:off x="5443199" y="2735205"/>
+              <a:ext cx="810736" cy="0"/>
+            </a:xfrm>
+            <a:prstGeom prst="straightConnector1">
+              <a:avLst/>
+            </a:prstGeom>
+            <a:ln>
+              <a:solidFill>
+                <a:schemeClr val="tx1"/>
+              </a:solidFill>
+              <a:tailEnd type="triangle"/>
+            </a:ln>
+          </p:spPr>
+          <p:style>
+            <a:lnRef idx="2">
+              <a:schemeClr val="accent1"/>
+            </a:lnRef>
+            <a:fillRef idx="0">
+              <a:schemeClr val="accent1"/>
+            </a:fillRef>
+            <a:effectRef idx="1">
+              <a:schemeClr val="accent1"/>
+            </a:effectRef>
+            <a:fontRef idx="minor">
+              <a:schemeClr val="tx1"/>
+            </a:fontRef>
+          </p:style>
+        </p:cxnSp>
+        <p:cxnSp>
+          <p:nvCxnSpPr>
+            <p:cNvPr id="50" name="Straight Arrow Connector 49">
+              <a:extLst>
+                <a:ext uri="{FF2B5EF4-FFF2-40B4-BE49-F238E27FC236}">
+                  <a16:creationId xmlns:a16="http://schemas.microsoft.com/office/drawing/2014/main" id="{FECE1834-EA3D-9BC0-74E3-586110D3AC98}"/>
+                </a:ext>
+              </a:extLst>
+            </p:cNvPr>
+            <p:cNvCxnSpPr>
+              <a:cxnSpLocks/>
+              <a:stCxn id="81" idx="3"/>
+              <a:endCxn id="98" idx="1"/>
+            </p:cNvCxnSpPr>
+            <p:nvPr/>
+          </p:nvCxnSpPr>
+          <p:spPr>
+            <a:xfrm>
+              <a:off x="8449161" y="2735205"/>
+              <a:ext cx="810735" cy="0"/>
+            </a:xfrm>
+            <a:prstGeom prst="straightConnector1">
+              <a:avLst/>
+            </a:prstGeom>
+            <a:ln>
+              <a:solidFill>
+                <a:schemeClr val="tx1"/>
+              </a:solidFill>
+              <a:tailEnd type="triangle"/>
+            </a:ln>
+          </p:spPr>
+          <p:style>
+            <a:lnRef idx="2">
+              <a:schemeClr val="accent1"/>
+            </a:lnRef>
+            <a:fillRef idx="0">
+              <a:schemeClr val="accent1"/>
+            </a:fillRef>
+            <a:effectRef idx="1">
+              <a:schemeClr val="accent1"/>
+            </a:effectRef>
+            <a:fontRef idx="minor">
+              <a:schemeClr val="tx1"/>
+            </a:fontRef>
+          </p:style>
+        </p:cxnSp>
+      </p:grpSp>
+    </p:spTree>
+    <p:extLst>
+      <p:ext uri="{BB962C8B-B14F-4D97-AF65-F5344CB8AC3E}">
+        <p14:creationId xmlns:p14="http://schemas.microsoft.com/office/powerpoint/2010/main" val="3200166923"/>
+      </p:ext>
+    </p:extLst>
+  </p:cSld>
+  <p:clrMapOvr>
+    <a:masterClrMapping/>
+  </p:clrMapOvr>
+</p:sld>
+</file>
+
+<file path=ppt/slides/slide3.xml><?xml version="1.0" encoding="utf-8"?>
+<p:sld xmlns:a="http://schemas.openxmlformats.org/drawingml/2006/main" xmlns:r="http://schemas.openxmlformats.org/officeDocument/2006/relationships" xmlns:p="http://schemas.openxmlformats.org/presentationml/2006/main">
+  <p:cSld>
+    <p:spTree>
+      <p:nvGrpSpPr>
+        <p:cNvPr id="1" name="">
+          <a:extLst>
+            <a:ext uri="{FF2B5EF4-FFF2-40B4-BE49-F238E27FC236}">
+              <a16:creationId xmlns:a16="http://schemas.microsoft.com/office/drawing/2014/main" id="{F45A1D3F-0077-DE11-0B34-3CD1284166A2}"/>
+            </a:ext>
+          </a:extLst>
+        </p:cNvPr>
+        <p:cNvGrpSpPr/>
+        <p:nvPr/>
+      </p:nvGrpSpPr>
+      <p:grpSpPr>
+        <a:xfrm>
+          <a:off x="0" y="0"/>
+          <a:ext cx="0" cy="0"/>
+          <a:chOff x="0" y="0"/>
+          <a:chExt cx="0" cy="0"/>
+        </a:xfrm>
+      </p:grpSpPr>
+      <p:grpSp>
+        <p:nvGrpSpPr>
+          <p:cNvPr id="22" name="Group 21">
+            <a:extLst>
+              <a:ext uri="{FF2B5EF4-FFF2-40B4-BE49-F238E27FC236}">
+                <a16:creationId xmlns:a16="http://schemas.microsoft.com/office/drawing/2014/main" id="{31B04CF9-AFA0-242E-EF1A-DA5D93B53A6A}"/>
+              </a:ext>
+            </a:extLst>
+          </p:cNvPr>
+          <p:cNvGrpSpPr/>
+          <p:nvPr/>
+        </p:nvGrpSpPr>
+        <p:grpSpPr>
+          <a:xfrm>
+            <a:off x="4919687" y="1985850"/>
+            <a:ext cx="2651739" cy="2886300"/>
+            <a:chOff x="1383547" y="879532"/>
+            <a:chExt cx="2894380" cy="3150404"/>
+          </a:xfrm>
+        </p:grpSpPr>
+        <p:sp>
+          <p:nvSpPr>
+            <p:cNvPr id="4" name="Rounded Rectangle 3">
+              <a:extLst>
+                <a:ext uri="{FF2B5EF4-FFF2-40B4-BE49-F238E27FC236}">
+                  <a16:creationId xmlns:a16="http://schemas.microsoft.com/office/drawing/2014/main" id="{56DC7DE5-F2D1-9B14-626E-F34206460CE5}"/>
+                </a:ext>
+              </a:extLst>
+            </p:cNvPr>
+            <p:cNvSpPr/>
+            <p:nvPr/>
+          </p:nvSpPr>
+          <p:spPr>
+            <a:xfrm>
+              <a:off x="2185502" y="879532"/>
+              <a:ext cx="1265418" cy="773904"/>
+            </a:xfrm>
+            <a:prstGeom prst="roundRect">
+              <a:avLst/>
+            </a:prstGeom>
+            <a:noFill/>
+          </p:spPr>
+          <p:style>
+            <a:lnRef idx="2">
+              <a:schemeClr val="accent1">
+                <a:shade val="15000"/>
+              </a:schemeClr>
+            </a:lnRef>
+            <a:fillRef idx="1">
+              <a:schemeClr val="accent1"/>
+            </a:fillRef>
+            <a:effectRef idx="0">
+              <a:schemeClr val="accent1"/>
+            </a:effectRef>
+            <a:fontRef idx="minor">
+              <a:schemeClr val="lt1"/>
+            </a:fontRef>
+          </p:style>
+          <p:txBody>
+            <a:bodyPr rtlCol="0" anchor="ctr"/>
+            <a:lstStyle/>
+            <a:p>
+              <a:pPr algn="ctr"/>
+              <a:r>
+                <a:rPr lang="en-US" sz="1200" dirty="0">
+                  <a:solidFill>
+                    <a:schemeClr val="tx1"/>
+                  </a:solidFill>
+                </a:rPr>
+                <a:t>Susceptible (u)</a:t>
+              </a:r>
+            </a:p>
+          </p:txBody>
+        </p:sp>
+        <p:cxnSp>
+          <p:nvCxnSpPr>
+            <p:cNvPr id="5" name="Straight Arrow Connector 4">
+              <a:extLst>
+                <a:ext uri="{FF2B5EF4-FFF2-40B4-BE49-F238E27FC236}">
+                  <a16:creationId xmlns:a16="http://schemas.microsoft.com/office/drawing/2014/main" id="{2832B463-DA3E-AACF-855F-AC3020BA3302}"/>
+                </a:ext>
+              </a:extLst>
+            </p:cNvPr>
+            <p:cNvCxnSpPr>
+              <a:cxnSpLocks/>
+            </p:cNvCxnSpPr>
+            <p:nvPr/>
+          </p:nvCxnSpPr>
+          <p:spPr>
+            <a:xfrm>
+              <a:off x="2442575" y="1653436"/>
+              <a:ext cx="0" cy="414346"/>
+            </a:xfrm>
+            <a:prstGeom prst="straightConnector1">
+              <a:avLst/>
+            </a:prstGeom>
+            <a:ln>
+              <a:tailEnd type="triangle"/>
+            </a:ln>
+          </p:spPr>
+          <p:style>
+            <a:lnRef idx="2">
+              <a:schemeClr val="dk1"/>
+            </a:lnRef>
+            <a:fillRef idx="0">
+              <a:schemeClr val="dk1"/>
+            </a:fillRef>
+            <a:effectRef idx="1">
+              <a:schemeClr val="dk1"/>
+            </a:effectRef>
+            <a:fontRef idx="minor">
+              <a:schemeClr val="tx1"/>
+            </a:fontRef>
+          </p:style>
+        </p:cxnSp>
+        <p:sp>
+          <p:nvSpPr>
+            <p:cNvPr id="6" name="Rounded Rectangle 5">
+              <a:extLst>
+                <a:ext uri="{FF2B5EF4-FFF2-40B4-BE49-F238E27FC236}">
+                  <a16:creationId xmlns:a16="http://schemas.microsoft.com/office/drawing/2014/main" id="{959C5AF2-2962-9361-E134-8F3357BD2489}"/>
+                </a:ext>
+              </a:extLst>
+            </p:cNvPr>
+            <p:cNvSpPr/>
+            <p:nvPr/>
+          </p:nvSpPr>
+          <p:spPr>
+            <a:xfrm>
+              <a:off x="2185502" y="3256032"/>
+              <a:ext cx="1265418" cy="773904"/>
+            </a:xfrm>
+            <a:prstGeom prst="roundRect">
+              <a:avLst/>
+            </a:prstGeom>
+            <a:noFill/>
+          </p:spPr>
+          <p:style>
+            <a:lnRef idx="2">
+              <a:schemeClr val="accent1">
+                <a:shade val="15000"/>
+              </a:schemeClr>
+            </a:lnRef>
+            <a:fillRef idx="1">
+              <a:schemeClr val="accent1"/>
+            </a:fillRef>
+            <a:effectRef idx="0">
+              <a:schemeClr val="accent1"/>
+            </a:effectRef>
+            <a:fontRef idx="minor">
+              <a:schemeClr val="lt1"/>
+            </a:fontRef>
+          </p:style>
+          <p:txBody>
+            <a:bodyPr rtlCol="0" anchor="ctr"/>
+            <a:lstStyle/>
+            <a:p>
+              <a:pPr algn="ctr"/>
+              <a:r>
+                <a:rPr lang="en-US" sz="1200" dirty="0">
+                  <a:solidFill>
+                    <a:schemeClr val="tx1"/>
+                  </a:solidFill>
+                </a:rPr>
+                <a:t>Chronic infection (c)</a:t>
+              </a:r>
+            </a:p>
+          </p:txBody>
+        </p:sp>
+        <p:sp>
+          <p:nvSpPr>
+            <p:cNvPr id="7" name="Rounded Rectangle 6">
+              <a:extLst>
+                <a:ext uri="{FF2B5EF4-FFF2-40B4-BE49-F238E27FC236}">
+                  <a16:creationId xmlns:a16="http://schemas.microsoft.com/office/drawing/2014/main" id="{CAE852B0-F189-5A92-48FC-D7416685FB13}"/>
+                </a:ext>
+              </a:extLst>
+            </p:cNvPr>
+            <p:cNvSpPr/>
+            <p:nvPr/>
+          </p:nvSpPr>
+          <p:spPr>
+            <a:xfrm>
+              <a:off x="1383547" y="2067782"/>
+              <a:ext cx="1265418" cy="773904"/>
+            </a:xfrm>
+            <a:prstGeom prst="roundRect">
+              <a:avLst/>
+            </a:prstGeom>
+            <a:noFill/>
+          </p:spPr>
+          <p:style>
+            <a:lnRef idx="2">
+              <a:schemeClr val="accent1">
+                <a:shade val="15000"/>
+              </a:schemeClr>
+            </a:lnRef>
+            <a:fillRef idx="1">
+              <a:schemeClr val="accent1"/>
+            </a:fillRef>
+            <a:effectRef idx="0">
+              <a:schemeClr val="accent1"/>
+            </a:effectRef>
+            <a:fontRef idx="minor">
+              <a:schemeClr val="lt1"/>
+            </a:fontRef>
+          </p:style>
+          <p:txBody>
+            <a:bodyPr rtlCol="0" anchor="ctr"/>
+            <a:lstStyle/>
+            <a:p>
+              <a:pPr algn="ctr"/>
+              <a:r>
+                <a:rPr lang="en-US" sz="1200" dirty="0">
+                  <a:solidFill>
+                    <a:schemeClr val="tx1"/>
+                  </a:solidFill>
+                </a:rPr>
+                <a:t>Acute infection (a)</a:t>
+              </a:r>
+            </a:p>
+          </p:txBody>
+        </p:sp>
+        <p:sp>
+          <p:nvSpPr>
+            <p:cNvPr id="8" name="Rounded Rectangle 7">
+              <a:extLst>
+                <a:ext uri="{FF2B5EF4-FFF2-40B4-BE49-F238E27FC236}">
+                  <a16:creationId xmlns:a16="http://schemas.microsoft.com/office/drawing/2014/main" id="{98C122C1-D9E0-449E-D90E-1BE7DC75093A}"/>
+                </a:ext>
+              </a:extLst>
+            </p:cNvPr>
+            <p:cNvSpPr/>
+            <p:nvPr/>
+          </p:nvSpPr>
+          <p:spPr>
+            <a:xfrm>
+              <a:off x="3012509" y="2067782"/>
+              <a:ext cx="1265418" cy="773904"/>
+            </a:xfrm>
+            <a:prstGeom prst="roundRect">
+              <a:avLst/>
+            </a:prstGeom>
+            <a:noFill/>
+          </p:spPr>
+          <p:style>
+            <a:lnRef idx="2">
+              <a:schemeClr val="accent1">
+                <a:shade val="15000"/>
+              </a:schemeClr>
+            </a:lnRef>
+            <a:fillRef idx="1">
+              <a:schemeClr val="accent1"/>
+            </a:fillRef>
+            <a:effectRef idx="0">
+              <a:schemeClr val="accent1"/>
+            </a:effectRef>
+            <a:fontRef idx="minor">
+              <a:schemeClr val="lt1"/>
+            </a:fontRef>
+          </p:style>
+          <p:txBody>
+            <a:bodyPr rtlCol="0" anchor="ctr"/>
+            <a:lstStyle/>
+            <a:p>
+              <a:pPr algn="ctr"/>
+              <a:r>
+                <a:rPr lang="en-US" sz="1200" dirty="0">
+                  <a:solidFill>
+                    <a:schemeClr val="tx1"/>
+                  </a:solidFill>
+                </a:rPr>
+                <a:t>Treatment (t)</a:t>
+              </a:r>
+            </a:p>
+          </p:txBody>
+        </p:sp>
+        <p:cxnSp>
+          <p:nvCxnSpPr>
+            <p:cNvPr id="11" name="Straight Arrow Connector 10">
+              <a:extLst>
+                <a:ext uri="{FF2B5EF4-FFF2-40B4-BE49-F238E27FC236}">
+                  <a16:creationId xmlns:a16="http://schemas.microsoft.com/office/drawing/2014/main" id="{498BEC07-9437-0DEF-D716-5A48A6FE39EA}"/>
+                </a:ext>
+              </a:extLst>
+            </p:cNvPr>
+            <p:cNvCxnSpPr>
+              <a:cxnSpLocks/>
+            </p:cNvCxnSpPr>
+            <p:nvPr/>
+          </p:nvCxnSpPr>
+          <p:spPr>
+            <a:xfrm>
+              <a:off x="2444662" y="2841686"/>
+              <a:ext cx="0" cy="414346"/>
+            </a:xfrm>
+            <a:prstGeom prst="straightConnector1">
+              <a:avLst/>
+            </a:prstGeom>
+            <a:ln>
+              <a:tailEnd type="triangle"/>
+            </a:ln>
+          </p:spPr>
+          <p:style>
+            <a:lnRef idx="2">
+              <a:schemeClr val="dk1"/>
+            </a:lnRef>
+            <a:fillRef idx="0">
+              <a:schemeClr val="dk1"/>
+            </a:fillRef>
+            <a:effectRef idx="1">
+              <a:schemeClr val="dk1"/>
+            </a:effectRef>
+            <a:fontRef idx="minor">
+              <a:schemeClr val="tx1"/>
+            </a:fontRef>
+          </p:style>
+        </p:cxnSp>
+        <p:cxnSp>
+          <p:nvCxnSpPr>
+            <p:cNvPr id="14" name="Straight Arrow Connector 13">
+              <a:extLst>
+                <a:ext uri="{FF2B5EF4-FFF2-40B4-BE49-F238E27FC236}">
+                  <a16:creationId xmlns:a16="http://schemas.microsoft.com/office/drawing/2014/main" id="{71020ACA-CCA8-2D87-C491-5C9E7B7CBAEE}"/>
+                </a:ext>
+              </a:extLst>
+            </p:cNvPr>
+            <p:cNvCxnSpPr/>
+            <p:nvPr/>
+          </p:nvCxnSpPr>
+          <p:spPr>
+            <a:xfrm flipV="1">
+              <a:off x="3175348" y="2835916"/>
+              <a:ext cx="0" cy="419622"/>
+            </a:xfrm>
+            <a:prstGeom prst="straightConnector1">
+              <a:avLst/>
+            </a:prstGeom>
+            <a:ln>
+              <a:tailEnd type="triangle"/>
+            </a:ln>
+          </p:spPr>
+          <p:style>
+            <a:lnRef idx="2">
+              <a:schemeClr val="dk1"/>
+            </a:lnRef>
+            <a:fillRef idx="0">
+              <a:schemeClr val="dk1"/>
+            </a:fillRef>
+            <a:effectRef idx="1">
+              <a:schemeClr val="dk1"/>
+            </a:effectRef>
+            <a:fontRef idx="minor">
+              <a:schemeClr val="tx1"/>
+            </a:fontRef>
+          </p:style>
+        </p:cxnSp>
+        <p:cxnSp>
+          <p:nvCxnSpPr>
+            <p:cNvPr id="16" name="Straight Arrow Connector 15">
+              <a:extLst>
+                <a:ext uri="{FF2B5EF4-FFF2-40B4-BE49-F238E27FC236}">
+                  <a16:creationId xmlns:a16="http://schemas.microsoft.com/office/drawing/2014/main" id="{12838710-8017-D148-689F-143D0809E311}"/>
+                </a:ext>
+              </a:extLst>
+            </p:cNvPr>
+            <p:cNvCxnSpPr/>
+            <p:nvPr/>
+          </p:nvCxnSpPr>
+          <p:spPr>
+            <a:xfrm flipV="1">
+              <a:off x="3175348" y="1648160"/>
+              <a:ext cx="0" cy="419622"/>
+            </a:xfrm>
+            <a:prstGeom prst="straightConnector1">
+              <a:avLst/>
+            </a:prstGeom>
+            <a:ln>
+              <a:tailEnd type="triangle"/>
+            </a:ln>
+          </p:spPr>
+          <p:style>
+            <a:lnRef idx="2">
+              <a:schemeClr val="dk1"/>
+            </a:lnRef>
+            <a:fillRef idx="0">
+              <a:schemeClr val="dk1"/>
+            </a:fillRef>
+            <a:effectRef idx="1">
+              <a:schemeClr val="dk1"/>
+            </a:effectRef>
+            <a:fontRef idx="minor">
+              <a:schemeClr val="tx1"/>
+            </a:fontRef>
+          </p:style>
+        </p:cxnSp>
+        <p:cxnSp>
+          <p:nvCxnSpPr>
+            <p:cNvPr id="17" name="Straight Arrow Connector 16">
+              <a:extLst>
+                <a:ext uri="{FF2B5EF4-FFF2-40B4-BE49-F238E27FC236}">
+                  <a16:creationId xmlns:a16="http://schemas.microsoft.com/office/drawing/2014/main" id="{A4F227C9-2472-CBCF-C20E-61F51F161E95}"/>
+                </a:ext>
+              </a:extLst>
+            </p:cNvPr>
+            <p:cNvCxnSpPr/>
+            <p:nvPr/>
+          </p:nvCxnSpPr>
+          <p:spPr>
+            <a:xfrm flipV="1">
+              <a:off x="2294351" y="1648160"/>
+              <a:ext cx="0" cy="419622"/>
+            </a:xfrm>
+            <a:prstGeom prst="straightConnector1">
+              <a:avLst/>
+            </a:prstGeom>
+            <a:ln>
+              <a:tailEnd type="triangle"/>
+            </a:ln>
+          </p:spPr>
+          <p:style>
+            <a:lnRef idx="2">
+              <a:schemeClr val="dk1"/>
+            </a:lnRef>
+            <a:fillRef idx="0">
+              <a:schemeClr val="dk1"/>
+            </a:fillRef>
+            <a:effectRef idx="1">
+              <a:schemeClr val="dk1"/>
+            </a:effectRef>
+            <a:fontRef idx="minor">
+              <a:schemeClr val="tx1"/>
+            </a:fontRef>
+          </p:style>
+        </p:cxnSp>
+        <p:cxnSp>
+          <p:nvCxnSpPr>
+            <p:cNvPr id="18" name="Straight Arrow Connector 17">
+              <a:extLst>
+                <a:ext uri="{FF2B5EF4-FFF2-40B4-BE49-F238E27FC236}">
+                  <a16:creationId xmlns:a16="http://schemas.microsoft.com/office/drawing/2014/main" id="{C5F47FC6-E24A-CAAB-6F47-10A50319A70E}"/>
+                </a:ext>
+              </a:extLst>
+            </p:cNvPr>
+            <p:cNvCxnSpPr/>
+            <p:nvPr/>
+          </p:nvCxnSpPr>
+          <p:spPr>
+            <a:xfrm flipV="1">
+              <a:off x="2294351" y="2835916"/>
+              <a:ext cx="0" cy="419622"/>
+            </a:xfrm>
+            <a:prstGeom prst="straightConnector1">
+              <a:avLst/>
+            </a:prstGeom>
+            <a:ln>
+              <a:tailEnd type="triangle"/>
+            </a:ln>
+          </p:spPr>
+          <p:style>
+            <a:lnRef idx="2">
+              <a:schemeClr val="dk1"/>
+            </a:lnRef>
+            <a:fillRef idx="0">
+              <a:schemeClr val="dk1"/>
+            </a:fillRef>
+            <a:effectRef idx="1">
+              <a:schemeClr val="dk1"/>
+            </a:effectRef>
+            <a:fontRef idx="minor">
+              <a:schemeClr val="tx1"/>
+            </a:fontRef>
+          </p:style>
+        </p:cxnSp>
+        <p:cxnSp>
+          <p:nvCxnSpPr>
+            <p:cNvPr id="20" name="Straight Arrow Connector 19">
+              <a:extLst>
+                <a:ext uri="{FF2B5EF4-FFF2-40B4-BE49-F238E27FC236}">
+                  <a16:creationId xmlns:a16="http://schemas.microsoft.com/office/drawing/2014/main" id="{C960DFC0-4719-94E4-2FCC-091155BB4685}"/>
+                </a:ext>
+              </a:extLst>
+            </p:cNvPr>
+            <p:cNvCxnSpPr>
+              <a:cxnSpLocks/>
+            </p:cNvCxnSpPr>
+            <p:nvPr/>
+          </p:nvCxnSpPr>
+          <p:spPr>
+            <a:xfrm>
+              <a:off x="3334010" y="1659643"/>
+              <a:ext cx="0" cy="414346"/>
+            </a:xfrm>
+            <a:prstGeom prst="straightConnector1">
+              <a:avLst/>
+            </a:prstGeom>
+            <a:ln>
+              <a:tailEnd type="triangle"/>
+            </a:ln>
+          </p:spPr>
+          <p:style>
+            <a:lnRef idx="2">
+              <a:schemeClr val="dk1"/>
+            </a:lnRef>
+            <a:fillRef idx="0">
+              <a:schemeClr val="dk1"/>
+            </a:fillRef>
+            <a:effectRef idx="1">
+              <a:schemeClr val="dk1"/>
+            </a:effectRef>
+            <a:fontRef idx="minor">
+              <a:schemeClr val="tx1"/>
+            </a:fontRef>
+          </p:style>
+        </p:cxnSp>
+        <p:cxnSp>
+          <p:nvCxnSpPr>
+            <p:cNvPr id="21" name="Straight Arrow Connector 20">
+              <a:extLst>
+                <a:ext uri="{FF2B5EF4-FFF2-40B4-BE49-F238E27FC236}">
+                  <a16:creationId xmlns:a16="http://schemas.microsoft.com/office/drawing/2014/main" id="{D5946712-156A-104C-C555-F72071A32B33}"/>
+                </a:ext>
+              </a:extLst>
+            </p:cNvPr>
+            <p:cNvCxnSpPr>
+              <a:cxnSpLocks/>
+            </p:cNvCxnSpPr>
+            <p:nvPr/>
+          </p:nvCxnSpPr>
+          <p:spPr>
+            <a:xfrm>
+              <a:off x="3334010" y="2841192"/>
+              <a:ext cx="0" cy="414346"/>
+            </a:xfrm>
+            <a:prstGeom prst="straightConnector1">
+              <a:avLst/>
+            </a:prstGeom>
+            <a:ln>
+              <a:tailEnd type="triangle"/>
+            </a:ln>
+          </p:spPr>
+          <p:style>
+            <a:lnRef idx="2">
+              <a:schemeClr val="dk1"/>
+            </a:lnRef>
+            <a:fillRef idx="0">
+              <a:schemeClr val="dk1"/>
+            </a:fillRef>
+            <a:effectRef idx="1">
+              <a:schemeClr val="dk1"/>
+            </a:effectRef>
+            <a:fontRef idx="minor">
+              <a:schemeClr val="tx1"/>
+            </a:fontRef>
+          </p:style>
+        </p:cxnSp>
+      </p:grpSp>
+      <p:sp>
+        <p:nvSpPr>
+          <p:cNvPr id="130" name="TextBox 129">
+            <a:extLst>
+              <a:ext uri="{FF2B5EF4-FFF2-40B4-BE49-F238E27FC236}">
+                <a16:creationId xmlns:a16="http://schemas.microsoft.com/office/drawing/2014/main" id="{4AA42CBE-6421-A896-08C2-67426F2904A5}"/>
+              </a:ext>
+            </a:extLst>
+          </p:cNvPr>
+          <p:cNvSpPr txBox="1"/>
+          <p:nvPr/>
+        </p:nvSpPr>
+        <p:spPr>
+          <a:xfrm>
+            <a:off x="154382" y="226319"/>
+            <a:ext cx="6315511" cy="523220"/>
+          </a:xfrm>
+          <a:prstGeom prst="rect">
+            <a:avLst/>
+          </a:prstGeom>
+          <a:noFill/>
+        </p:spPr>
+        <p:txBody>
+          <a:bodyPr wrap="none" rtlCol="0">
+            <a:spAutoFit/>
+          </a:bodyPr>
+          <a:lstStyle/>
+          <a:p>
+            <a:r>
+              <a:rPr lang="en-US" sz="2800" b="1" dirty="0"/>
+              <a:t>HCV transmission dynamics for PWID</a:t>
+            </a:r>
+          </a:p>
+        </p:txBody>
+      </p:sp>
+    </p:spTree>
+    <p:extLst>
+      <p:ext uri="{BB962C8B-B14F-4D97-AF65-F5344CB8AC3E}">
+        <p14:creationId xmlns:p14="http://schemas.microsoft.com/office/powerpoint/2010/main" val="3794661450"/>
+      </p:ext>
+    </p:extLst>
+  </p:cSld>
+  <p:clrMapOvr>
+    <a:masterClrMapping/>
+  </p:clrMapOvr>
+</p:sld>
+</file>
+
+<file path=ppt/slides/slide4.xml><?xml version="1.0" encoding="utf-8"?>
+<p:sld xmlns:a="http://schemas.openxmlformats.org/drawingml/2006/main" xmlns:r="http://schemas.openxmlformats.org/officeDocument/2006/relationships" xmlns:p="http://schemas.openxmlformats.org/presentationml/2006/main">
+  <p:cSld>
+    <p:spTree>
+      <p:nvGrpSpPr>
+        <p:cNvPr id="1" name="">
+          <a:extLst>
+            <a:ext uri="{FF2B5EF4-FFF2-40B4-BE49-F238E27FC236}">
+              <a16:creationId xmlns:a16="http://schemas.microsoft.com/office/drawing/2014/main" id="{A4435F50-7380-71E7-28C8-BC57F57D0514}"/>
+            </a:ext>
+          </a:extLst>
+        </p:cNvPr>
+        <p:cNvGrpSpPr/>
+        <p:nvPr/>
+      </p:nvGrpSpPr>
+      <p:grpSpPr>
+        <a:xfrm>
+          <a:off x="0" y="0"/>
+          <a:ext cx="0" cy="0"/>
+          <a:chOff x="0" y="0"/>
+          <a:chExt cx="0" cy="0"/>
+        </a:xfrm>
+      </p:grpSpPr>
       <p:grpSp>
         <p:nvGrpSpPr>
           <p:cNvPr id="2" name="Group 1">
             <a:extLst>
               <a:ext uri="{FF2B5EF4-FFF2-40B4-BE49-F238E27FC236}">
-                <a16:creationId xmlns:a16="http://schemas.microsoft.com/office/drawing/2014/main" id="{C709D7D8-A89F-39B4-38AA-AC4294A10199}"/>
+                <a16:creationId xmlns:a16="http://schemas.microsoft.com/office/drawing/2014/main" id="{B09C5F41-DE35-6214-5240-683D7C19A1E4}"/>
               </a:ext>
             </a:extLst>
           </p:cNvPr>
@@ -4064,7 +7786,7 @@
             <p:cNvPr id="26" name="Group 25">
               <a:extLst>
                 <a:ext uri="{FF2B5EF4-FFF2-40B4-BE49-F238E27FC236}">
-                  <a16:creationId xmlns:a16="http://schemas.microsoft.com/office/drawing/2014/main" id="{1DF54F6C-5266-D8CE-E1C4-215EBBC5A1A3}"/>
+                  <a16:creationId xmlns:a16="http://schemas.microsoft.com/office/drawing/2014/main" id="{B82B1646-BBBF-BFB1-A835-3B8962B91E7A}"/>
                 </a:ext>
               </a:extLst>
             </p:cNvPr>
@@ -4084,7 +7806,7 @@
               <p:cNvPr id="22" name="Group 21">
                 <a:extLst>
                   <a:ext uri="{FF2B5EF4-FFF2-40B4-BE49-F238E27FC236}">
-                    <a16:creationId xmlns:a16="http://schemas.microsoft.com/office/drawing/2014/main" id="{E3F73723-2FC5-6911-F9A2-69E3748E28D7}"/>
+                    <a16:creationId xmlns:a16="http://schemas.microsoft.com/office/drawing/2014/main" id="{615F5D02-7221-1659-AA70-4321654FD953}"/>
                   </a:ext>
                 </a:extLst>
               </p:cNvPr>
@@ -4104,7 +7826,7 @@
                 <p:cNvPr id="4" name="Rounded Rectangle 3">
                   <a:extLst>
                     <a:ext uri="{FF2B5EF4-FFF2-40B4-BE49-F238E27FC236}">
-                      <a16:creationId xmlns:a16="http://schemas.microsoft.com/office/drawing/2014/main" id="{E91EC6D5-1803-3CBF-3D3F-2221526491B9}"/>
+                      <a16:creationId xmlns:a16="http://schemas.microsoft.com/office/drawing/2014/main" id="{B0319C08-1ED6-4BC4-13BA-32B37FA906A4}"/>
                     </a:ext>
                   </a:extLst>
                 </p:cNvPr>
@@ -4158,7 +7880,7 @@
                 <p:cNvPr id="5" name="Straight Arrow Connector 4">
                   <a:extLst>
                     <a:ext uri="{FF2B5EF4-FFF2-40B4-BE49-F238E27FC236}">
-                      <a16:creationId xmlns:a16="http://schemas.microsoft.com/office/drawing/2014/main" id="{6041FCCD-89FA-8B3F-72E4-65433EBA496F}"/>
+                      <a16:creationId xmlns:a16="http://schemas.microsoft.com/office/drawing/2014/main" id="{ECC2F79B-CA6A-A55F-9620-753A93A4847A}"/>
                     </a:ext>
                   </a:extLst>
                 </p:cNvPr>
@@ -4199,7 +7921,7 @@
                 <p:cNvPr id="6" name="Rounded Rectangle 5">
                   <a:extLst>
                     <a:ext uri="{FF2B5EF4-FFF2-40B4-BE49-F238E27FC236}">
-                      <a16:creationId xmlns:a16="http://schemas.microsoft.com/office/drawing/2014/main" id="{3B0C960F-3041-58B6-1AE3-D872BBD42FA5}"/>
+                      <a16:creationId xmlns:a16="http://schemas.microsoft.com/office/drawing/2014/main" id="{CD990730-65B9-C5CA-F583-D081B19B78CB}"/>
                     </a:ext>
                   </a:extLst>
                 </p:cNvPr>
@@ -4253,7 +7975,7 @@
                 <p:cNvPr id="7" name="Rounded Rectangle 6">
                   <a:extLst>
                     <a:ext uri="{FF2B5EF4-FFF2-40B4-BE49-F238E27FC236}">
-                      <a16:creationId xmlns:a16="http://schemas.microsoft.com/office/drawing/2014/main" id="{4C1D1F5D-E587-CA69-9396-650D74B6BB95}"/>
+                      <a16:creationId xmlns:a16="http://schemas.microsoft.com/office/drawing/2014/main" id="{73555477-FA0E-E997-5124-9C29F735E83F}"/>
                     </a:ext>
                   </a:extLst>
                 </p:cNvPr>
@@ -4307,7 +8029,7 @@
                 <p:cNvPr id="8" name="Rounded Rectangle 7">
                   <a:extLst>
                     <a:ext uri="{FF2B5EF4-FFF2-40B4-BE49-F238E27FC236}">
-                      <a16:creationId xmlns:a16="http://schemas.microsoft.com/office/drawing/2014/main" id="{630E32AD-FB42-F308-9FA5-2436B2A81C07}"/>
+                      <a16:creationId xmlns:a16="http://schemas.microsoft.com/office/drawing/2014/main" id="{8B18EE8F-3C6A-1183-4EAD-ED274FA5AF31}"/>
                     </a:ext>
                   </a:extLst>
                 </p:cNvPr>
@@ -4361,7 +8083,7 @@
                 <p:cNvPr id="11" name="Straight Arrow Connector 10">
                   <a:extLst>
                     <a:ext uri="{FF2B5EF4-FFF2-40B4-BE49-F238E27FC236}">
-                      <a16:creationId xmlns:a16="http://schemas.microsoft.com/office/drawing/2014/main" id="{7359F486-7181-2C4C-0773-A7C0CC79EE7F}"/>
+                      <a16:creationId xmlns:a16="http://schemas.microsoft.com/office/drawing/2014/main" id="{5DBB8E5A-BB38-B607-3E1A-A77BF45739F9}"/>
                     </a:ext>
                   </a:extLst>
                 </p:cNvPr>
@@ -4402,7 +8124,7 @@
                 <p:cNvPr id="14" name="Straight Arrow Connector 13">
                   <a:extLst>
                     <a:ext uri="{FF2B5EF4-FFF2-40B4-BE49-F238E27FC236}">
-                      <a16:creationId xmlns:a16="http://schemas.microsoft.com/office/drawing/2014/main" id="{FA4A93FD-DACA-77D9-3CB9-AEAEA4C0731D}"/>
+                      <a16:creationId xmlns:a16="http://schemas.microsoft.com/office/drawing/2014/main" id="{7B21EE4B-3C58-7B42-DA19-C8DD1A21F63C}"/>
                     </a:ext>
                   </a:extLst>
                 </p:cNvPr>
@@ -4441,7 +8163,7 @@
                 <p:cNvPr id="16" name="Straight Arrow Connector 15">
                   <a:extLst>
                     <a:ext uri="{FF2B5EF4-FFF2-40B4-BE49-F238E27FC236}">
-                      <a16:creationId xmlns:a16="http://schemas.microsoft.com/office/drawing/2014/main" id="{D6490AD6-2F0A-6A8E-94F2-1738661B575C}"/>
+                      <a16:creationId xmlns:a16="http://schemas.microsoft.com/office/drawing/2014/main" id="{ED25B429-34AA-ADE5-1FDC-F39E92860257}"/>
                     </a:ext>
                   </a:extLst>
                 </p:cNvPr>
@@ -4480,7 +8202,7 @@
                 <p:cNvPr id="17" name="Straight Arrow Connector 16">
                   <a:extLst>
                     <a:ext uri="{FF2B5EF4-FFF2-40B4-BE49-F238E27FC236}">
-                      <a16:creationId xmlns:a16="http://schemas.microsoft.com/office/drawing/2014/main" id="{E70215DA-8F47-4972-7920-587CF445AA61}"/>
+                      <a16:creationId xmlns:a16="http://schemas.microsoft.com/office/drawing/2014/main" id="{2569F3AC-6654-4353-306E-97D3029B5CCC}"/>
                     </a:ext>
                   </a:extLst>
                 </p:cNvPr>
@@ -4519,7 +8241,7 @@
                 <p:cNvPr id="18" name="Straight Arrow Connector 17">
                   <a:extLst>
                     <a:ext uri="{FF2B5EF4-FFF2-40B4-BE49-F238E27FC236}">
-                      <a16:creationId xmlns:a16="http://schemas.microsoft.com/office/drawing/2014/main" id="{CD62E138-E84B-5F44-A7EE-0D3D73D484AA}"/>
+                      <a16:creationId xmlns:a16="http://schemas.microsoft.com/office/drawing/2014/main" id="{7210E782-A144-D908-C959-E119B870C61F}"/>
                     </a:ext>
                   </a:extLst>
                 </p:cNvPr>
@@ -4558,7 +8280,7 @@
                 <p:cNvPr id="20" name="Straight Arrow Connector 19">
                   <a:extLst>
                     <a:ext uri="{FF2B5EF4-FFF2-40B4-BE49-F238E27FC236}">
-                      <a16:creationId xmlns:a16="http://schemas.microsoft.com/office/drawing/2014/main" id="{9AAD420B-9D8B-1984-5396-FE2ECEEF1BCA}"/>
+                      <a16:creationId xmlns:a16="http://schemas.microsoft.com/office/drawing/2014/main" id="{F7EBABBE-85A7-7D7C-B777-058A3B99368E}"/>
                     </a:ext>
                   </a:extLst>
                 </p:cNvPr>
@@ -4599,7 +8321,7 @@
                 <p:cNvPr id="21" name="Straight Arrow Connector 20">
                   <a:extLst>
                     <a:ext uri="{FF2B5EF4-FFF2-40B4-BE49-F238E27FC236}">
-                      <a16:creationId xmlns:a16="http://schemas.microsoft.com/office/drawing/2014/main" id="{D3C23DEC-0BF8-6E96-8013-2DAEE4C40D67}"/>
+                      <a16:creationId xmlns:a16="http://schemas.microsoft.com/office/drawing/2014/main" id="{E789470A-F979-671A-E481-BEB3E082210D}"/>
                     </a:ext>
                   </a:extLst>
                 </p:cNvPr>
@@ -4641,7 +8363,7 @@
               <p:cNvPr id="23" name="Rounded Rectangle 22">
                 <a:extLst>
                   <a:ext uri="{FF2B5EF4-FFF2-40B4-BE49-F238E27FC236}">
-                    <a16:creationId xmlns:a16="http://schemas.microsoft.com/office/drawing/2014/main" id="{8A7D14F2-D565-2A11-B71F-9D9BA73B7361}"/>
+                    <a16:creationId xmlns:a16="http://schemas.microsoft.com/office/drawing/2014/main" id="{8082A3A0-17FB-AFBE-2ECC-222CF33C58AC}"/>
                   </a:ext>
                 </a:extLst>
               </p:cNvPr>
@@ -4692,7 +8414,7 @@
               <p:cNvPr id="25" name="TextBox 24">
                 <a:extLst>
                   <a:ext uri="{FF2B5EF4-FFF2-40B4-BE49-F238E27FC236}">
-                    <a16:creationId xmlns:a16="http://schemas.microsoft.com/office/drawing/2014/main" id="{71F5A395-278B-04BE-A47C-E5E67BF00367}"/>
+                    <a16:creationId xmlns:a16="http://schemas.microsoft.com/office/drawing/2014/main" id="{485DAA80-F05F-3CC7-CF2D-D635ED30F2B6}"/>
                   </a:ext>
                 </a:extLst>
               </p:cNvPr>
@@ -4728,7 +8450,7 @@
             <p:cNvPr id="28" name="Straight Arrow Connector 27">
               <a:extLst>
                 <a:ext uri="{FF2B5EF4-FFF2-40B4-BE49-F238E27FC236}">
-                  <a16:creationId xmlns:a16="http://schemas.microsoft.com/office/drawing/2014/main" id="{C3D7EB5D-329A-E04C-9548-3FB99024F8B4}"/>
+                  <a16:creationId xmlns:a16="http://schemas.microsoft.com/office/drawing/2014/main" id="{D38E1FEC-6D0E-C9B1-A905-B97D88E4BC91}"/>
                 </a:ext>
               </a:extLst>
             </p:cNvPr>
@@ -4771,7 +8493,7 @@
             <p:cNvPr id="29" name="Group 28">
               <a:extLst>
                 <a:ext uri="{FF2B5EF4-FFF2-40B4-BE49-F238E27FC236}">
-                  <a16:creationId xmlns:a16="http://schemas.microsoft.com/office/drawing/2014/main" id="{01E58B6F-F3BC-988A-29BD-6D26CA964090}"/>
+                  <a16:creationId xmlns:a16="http://schemas.microsoft.com/office/drawing/2014/main" id="{E328DB0E-3A57-021A-86B2-537D8ABD357E}"/>
                 </a:ext>
               </a:extLst>
             </p:cNvPr>
@@ -4791,7 +8513,7 @@
               <p:cNvPr id="30" name="Group 29">
                 <a:extLst>
                   <a:ext uri="{FF2B5EF4-FFF2-40B4-BE49-F238E27FC236}">
-                    <a16:creationId xmlns:a16="http://schemas.microsoft.com/office/drawing/2014/main" id="{682F546E-EFA3-3C58-81B8-80D6B2EFFFA2}"/>
+                    <a16:creationId xmlns:a16="http://schemas.microsoft.com/office/drawing/2014/main" id="{74DDDB0D-0541-4719-F0D2-196EF91EFAF4}"/>
                   </a:ext>
                 </a:extLst>
               </p:cNvPr>
@@ -4811,7 +8533,7 @@
                 <p:cNvPr id="33" name="Rounded Rectangle 32">
                   <a:extLst>
                     <a:ext uri="{FF2B5EF4-FFF2-40B4-BE49-F238E27FC236}">
-                      <a16:creationId xmlns:a16="http://schemas.microsoft.com/office/drawing/2014/main" id="{9F23EA1E-5BA9-E504-27B8-0D5610A9DC53}"/>
+                      <a16:creationId xmlns:a16="http://schemas.microsoft.com/office/drawing/2014/main" id="{359245CA-4B95-17D8-EE8F-FED33C039A3C}"/>
                     </a:ext>
                   </a:extLst>
                 </p:cNvPr>
@@ -4865,7 +8587,7 @@
                 <p:cNvPr id="34" name="Straight Arrow Connector 33">
                   <a:extLst>
                     <a:ext uri="{FF2B5EF4-FFF2-40B4-BE49-F238E27FC236}">
-                      <a16:creationId xmlns:a16="http://schemas.microsoft.com/office/drawing/2014/main" id="{9EA4C211-8290-C111-D662-8DADA6FD4810}"/>
+                      <a16:creationId xmlns:a16="http://schemas.microsoft.com/office/drawing/2014/main" id="{C2DAE0C5-7E7B-D181-2E94-960216C55FFF}"/>
                     </a:ext>
                   </a:extLst>
                 </p:cNvPr>
@@ -4906,7 +8628,7 @@
                 <p:cNvPr id="35" name="Rounded Rectangle 34">
                   <a:extLst>
                     <a:ext uri="{FF2B5EF4-FFF2-40B4-BE49-F238E27FC236}">
-                      <a16:creationId xmlns:a16="http://schemas.microsoft.com/office/drawing/2014/main" id="{49183545-D84C-C451-15EE-E9E3CCCDA858}"/>
+                      <a16:creationId xmlns:a16="http://schemas.microsoft.com/office/drawing/2014/main" id="{94701845-C563-0A31-1DF4-A0E48129305D}"/>
                     </a:ext>
                   </a:extLst>
                 </p:cNvPr>
@@ -4960,7 +8682,7 @@
                 <p:cNvPr id="36" name="Rounded Rectangle 35">
                   <a:extLst>
                     <a:ext uri="{FF2B5EF4-FFF2-40B4-BE49-F238E27FC236}">
-                      <a16:creationId xmlns:a16="http://schemas.microsoft.com/office/drawing/2014/main" id="{64FCF7B3-5AB8-D846-CAE9-F86B15F0A343}"/>
+                      <a16:creationId xmlns:a16="http://schemas.microsoft.com/office/drawing/2014/main" id="{2A7D711A-F3A1-A007-040C-76269B9F3F3B}"/>
                     </a:ext>
                   </a:extLst>
                 </p:cNvPr>
@@ -5014,7 +8736,7 @@
                 <p:cNvPr id="37" name="Rounded Rectangle 36">
                   <a:extLst>
                     <a:ext uri="{FF2B5EF4-FFF2-40B4-BE49-F238E27FC236}">
-                      <a16:creationId xmlns:a16="http://schemas.microsoft.com/office/drawing/2014/main" id="{E9CC3CE1-659B-5D58-FED4-E258DEFE0468}"/>
+                      <a16:creationId xmlns:a16="http://schemas.microsoft.com/office/drawing/2014/main" id="{53A02B30-821C-1927-9AB2-4DE35AB8C83E}"/>
                     </a:ext>
                   </a:extLst>
                 </p:cNvPr>
@@ -5068,7 +8790,7 @@
                 <p:cNvPr id="38" name="Straight Arrow Connector 37">
                   <a:extLst>
                     <a:ext uri="{FF2B5EF4-FFF2-40B4-BE49-F238E27FC236}">
-                      <a16:creationId xmlns:a16="http://schemas.microsoft.com/office/drawing/2014/main" id="{6A503462-1E93-24A2-CF11-DDDCD9732499}"/>
+                      <a16:creationId xmlns:a16="http://schemas.microsoft.com/office/drawing/2014/main" id="{C673EB25-9C10-9441-CD4D-213316F87E91}"/>
                     </a:ext>
                   </a:extLst>
                 </p:cNvPr>
@@ -5109,7 +8831,7 @@
                 <p:cNvPr id="39" name="Straight Arrow Connector 38">
                   <a:extLst>
                     <a:ext uri="{FF2B5EF4-FFF2-40B4-BE49-F238E27FC236}">
-                      <a16:creationId xmlns:a16="http://schemas.microsoft.com/office/drawing/2014/main" id="{0EAED448-FDF6-3785-B25A-B33C90FE8790}"/>
+                      <a16:creationId xmlns:a16="http://schemas.microsoft.com/office/drawing/2014/main" id="{92F2867E-8638-73D1-149F-E73834F62BC1}"/>
                     </a:ext>
                   </a:extLst>
                 </p:cNvPr>
@@ -5148,7 +8870,7 @@
                 <p:cNvPr id="40" name="Straight Arrow Connector 39">
                   <a:extLst>
                     <a:ext uri="{FF2B5EF4-FFF2-40B4-BE49-F238E27FC236}">
-                      <a16:creationId xmlns:a16="http://schemas.microsoft.com/office/drawing/2014/main" id="{F29F6C97-A2A2-A3E3-EC69-17E80291DC41}"/>
+                      <a16:creationId xmlns:a16="http://schemas.microsoft.com/office/drawing/2014/main" id="{9955BCEF-8544-19E3-9EA7-2A7DF1BC71B1}"/>
                     </a:ext>
                   </a:extLst>
                 </p:cNvPr>
@@ -5187,7 +8909,7 @@
                 <p:cNvPr id="41" name="Straight Arrow Connector 40">
                   <a:extLst>
                     <a:ext uri="{FF2B5EF4-FFF2-40B4-BE49-F238E27FC236}">
-                      <a16:creationId xmlns:a16="http://schemas.microsoft.com/office/drawing/2014/main" id="{09A1530A-9219-319E-D5E1-36007E336F27}"/>
+                      <a16:creationId xmlns:a16="http://schemas.microsoft.com/office/drawing/2014/main" id="{414D9CC3-A6EF-E15D-F58F-B86EBB806199}"/>
                     </a:ext>
                   </a:extLst>
                 </p:cNvPr>
@@ -5226,7 +8948,7 @@
                 <p:cNvPr id="42" name="Straight Arrow Connector 41">
                   <a:extLst>
                     <a:ext uri="{FF2B5EF4-FFF2-40B4-BE49-F238E27FC236}">
-                      <a16:creationId xmlns:a16="http://schemas.microsoft.com/office/drawing/2014/main" id="{A039DEC0-E888-682E-7C65-1D1F70BFE9F1}"/>
+                      <a16:creationId xmlns:a16="http://schemas.microsoft.com/office/drawing/2014/main" id="{7001678D-1F46-64C6-319A-90070AE9603A}"/>
                     </a:ext>
                   </a:extLst>
                 </p:cNvPr>
@@ -5265,7 +8987,7 @@
                 <p:cNvPr id="43" name="Straight Arrow Connector 42">
                   <a:extLst>
                     <a:ext uri="{FF2B5EF4-FFF2-40B4-BE49-F238E27FC236}">
-                      <a16:creationId xmlns:a16="http://schemas.microsoft.com/office/drawing/2014/main" id="{E750131B-B53C-94A1-B36B-6E324690D778}"/>
+                      <a16:creationId xmlns:a16="http://schemas.microsoft.com/office/drawing/2014/main" id="{3933925B-1699-025F-AB28-E430185D6491}"/>
                     </a:ext>
                   </a:extLst>
                 </p:cNvPr>
@@ -5306,7 +9028,7 @@
                 <p:cNvPr id="44" name="Straight Arrow Connector 43">
                   <a:extLst>
                     <a:ext uri="{FF2B5EF4-FFF2-40B4-BE49-F238E27FC236}">
-                      <a16:creationId xmlns:a16="http://schemas.microsoft.com/office/drawing/2014/main" id="{B975D9CF-D720-2109-F7BE-F37A88E25ACF}"/>
+                      <a16:creationId xmlns:a16="http://schemas.microsoft.com/office/drawing/2014/main" id="{AF89E73B-28C4-AC88-22F6-5D864ED28DE2}"/>
                     </a:ext>
                   </a:extLst>
                 </p:cNvPr>
@@ -5348,7 +9070,7 @@
               <p:cNvPr id="31" name="Rounded Rectangle 30">
                 <a:extLst>
                   <a:ext uri="{FF2B5EF4-FFF2-40B4-BE49-F238E27FC236}">
-                    <a16:creationId xmlns:a16="http://schemas.microsoft.com/office/drawing/2014/main" id="{B289963A-7E31-1798-D7DF-ABD9CEDAF624}"/>
+                    <a16:creationId xmlns:a16="http://schemas.microsoft.com/office/drawing/2014/main" id="{F17FD2BB-C8A9-E1F8-9D61-7AFB9E15F56C}"/>
                   </a:ext>
                 </a:extLst>
               </p:cNvPr>
@@ -5399,7 +9121,7 @@
               <p:cNvPr id="32" name="TextBox 31">
                 <a:extLst>
                   <a:ext uri="{FF2B5EF4-FFF2-40B4-BE49-F238E27FC236}">
-                    <a16:creationId xmlns:a16="http://schemas.microsoft.com/office/drawing/2014/main" id="{06A6B708-359A-43B3-7FFD-824D069BC289}"/>
+                    <a16:creationId xmlns:a16="http://schemas.microsoft.com/office/drawing/2014/main" id="{FE214183-BA97-AEEC-A3B7-DC1E2073A19A}"/>
                   </a:ext>
                 </a:extLst>
               </p:cNvPr>
@@ -5435,7 +9157,7 @@
             <p:cNvPr id="79" name="Group 78">
               <a:extLst>
                 <a:ext uri="{FF2B5EF4-FFF2-40B4-BE49-F238E27FC236}">
-                  <a16:creationId xmlns:a16="http://schemas.microsoft.com/office/drawing/2014/main" id="{2618FBA1-702B-8D93-9F53-5DDFCC1C5ADC}"/>
+                  <a16:creationId xmlns:a16="http://schemas.microsoft.com/office/drawing/2014/main" id="{0BCE644E-E157-C450-EDB9-A7062DDE49AA}"/>
                 </a:ext>
               </a:extLst>
             </p:cNvPr>
@@ -5455,7 +9177,7 @@
               <p:cNvPr id="80" name="Group 79">
                 <a:extLst>
                   <a:ext uri="{FF2B5EF4-FFF2-40B4-BE49-F238E27FC236}">
-                    <a16:creationId xmlns:a16="http://schemas.microsoft.com/office/drawing/2014/main" id="{9145A2C9-196F-3808-9564-9FCD19293E5A}"/>
+                    <a16:creationId xmlns:a16="http://schemas.microsoft.com/office/drawing/2014/main" id="{7DB70FA6-9234-F6B3-BB09-5EFCED804416}"/>
                   </a:ext>
                 </a:extLst>
               </p:cNvPr>
@@ -5475,7 +9197,7 @@
                 <p:cNvPr id="83" name="Rounded Rectangle 82">
                   <a:extLst>
                     <a:ext uri="{FF2B5EF4-FFF2-40B4-BE49-F238E27FC236}">
-                      <a16:creationId xmlns:a16="http://schemas.microsoft.com/office/drawing/2014/main" id="{922EC8B2-74EC-932F-997C-C674CCA7D244}"/>
+                      <a16:creationId xmlns:a16="http://schemas.microsoft.com/office/drawing/2014/main" id="{622E3461-58ED-9BE8-30DE-E4E9A6B259CD}"/>
                     </a:ext>
                   </a:extLst>
                 </p:cNvPr>
@@ -5529,7 +9251,7 @@
                 <p:cNvPr id="84" name="Straight Arrow Connector 83">
                   <a:extLst>
                     <a:ext uri="{FF2B5EF4-FFF2-40B4-BE49-F238E27FC236}">
-                      <a16:creationId xmlns:a16="http://schemas.microsoft.com/office/drawing/2014/main" id="{2B5AE4FB-2F65-B94C-F4B9-ADF7D46C0E86}"/>
+                      <a16:creationId xmlns:a16="http://schemas.microsoft.com/office/drawing/2014/main" id="{C9073336-CFA5-6BB9-2F76-3F3A48645058}"/>
                     </a:ext>
                   </a:extLst>
                 </p:cNvPr>
@@ -5570,7 +9292,7 @@
                 <p:cNvPr id="85" name="Rounded Rectangle 84">
                   <a:extLst>
                     <a:ext uri="{FF2B5EF4-FFF2-40B4-BE49-F238E27FC236}">
-                      <a16:creationId xmlns:a16="http://schemas.microsoft.com/office/drawing/2014/main" id="{3AA1659A-6FD4-FF21-8E7D-81066E427A9D}"/>
+                      <a16:creationId xmlns:a16="http://schemas.microsoft.com/office/drawing/2014/main" id="{A9A36F80-CAC0-3813-D994-F409BF409B3B}"/>
                     </a:ext>
                   </a:extLst>
                 </p:cNvPr>
@@ -5624,7 +9346,7 @@
                 <p:cNvPr id="86" name="Rounded Rectangle 85">
                   <a:extLst>
                     <a:ext uri="{FF2B5EF4-FFF2-40B4-BE49-F238E27FC236}">
-                      <a16:creationId xmlns:a16="http://schemas.microsoft.com/office/drawing/2014/main" id="{C8E47F66-3058-CC4F-52B8-36EA06ACE3F0}"/>
+                      <a16:creationId xmlns:a16="http://schemas.microsoft.com/office/drawing/2014/main" id="{0276C32F-4EFA-8EEB-D522-D03214A4025D}"/>
                     </a:ext>
                   </a:extLst>
                 </p:cNvPr>
@@ -5678,7 +9400,7 @@
                 <p:cNvPr id="87" name="Rounded Rectangle 86">
                   <a:extLst>
                     <a:ext uri="{FF2B5EF4-FFF2-40B4-BE49-F238E27FC236}">
-                      <a16:creationId xmlns:a16="http://schemas.microsoft.com/office/drawing/2014/main" id="{771924CB-3B2C-A548-0432-F92DF8F52287}"/>
+                      <a16:creationId xmlns:a16="http://schemas.microsoft.com/office/drawing/2014/main" id="{2EFD20B8-E421-B446-B310-699E3ECBC090}"/>
                     </a:ext>
                   </a:extLst>
                 </p:cNvPr>
@@ -5732,7 +9454,7 @@
                 <p:cNvPr id="88" name="Straight Arrow Connector 87">
                   <a:extLst>
                     <a:ext uri="{FF2B5EF4-FFF2-40B4-BE49-F238E27FC236}">
-                      <a16:creationId xmlns:a16="http://schemas.microsoft.com/office/drawing/2014/main" id="{842953D9-4E2C-EC8B-827F-BFFAF2897E86}"/>
+                      <a16:creationId xmlns:a16="http://schemas.microsoft.com/office/drawing/2014/main" id="{C744A46D-5660-068B-37CE-949B5D332589}"/>
                     </a:ext>
                   </a:extLst>
                 </p:cNvPr>
@@ -5773,7 +9495,7 @@
                 <p:cNvPr id="89" name="Straight Arrow Connector 88">
                   <a:extLst>
                     <a:ext uri="{FF2B5EF4-FFF2-40B4-BE49-F238E27FC236}">
-                      <a16:creationId xmlns:a16="http://schemas.microsoft.com/office/drawing/2014/main" id="{843D389D-46EA-244D-6722-A35F9F13B05C}"/>
+                      <a16:creationId xmlns:a16="http://schemas.microsoft.com/office/drawing/2014/main" id="{E804C34C-4685-86DE-466B-7673E61265D3}"/>
                     </a:ext>
                   </a:extLst>
                 </p:cNvPr>
@@ -5812,7 +9534,7 @@
                 <p:cNvPr id="90" name="Straight Arrow Connector 89">
                   <a:extLst>
                     <a:ext uri="{FF2B5EF4-FFF2-40B4-BE49-F238E27FC236}">
-                      <a16:creationId xmlns:a16="http://schemas.microsoft.com/office/drawing/2014/main" id="{02CC4661-946C-C586-687C-4F8086E4234E}"/>
+                      <a16:creationId xmlns:a16="http://schemas.microsoft.com/office/drawing/2014/main" id="{DBB3816B-FCF6-342E-CC51-76FC1A5C5538}"/>
                     </a:ext>
                   </a:extLst>
                 </p:cNvPr>
@@ -5851,7 +9573,7 @@
                 <p:cNvPr id="91" name="Straight Arrow Connector 90">
                   <a:extLst>
                     <a:ext uri="{FF2B5EF4-FFF2-40B4-BE49-F238E27FC236}">
-                      <a16:creationId xmlns:a16="http://schemas.microsoft.com/office/drawing/2014/main" id="{5BEADE14-C7D8-B0FA-EB21-797E2433AA02}"/>
+                      <a16:creationId xmlns:a16="http://schemas.microsoft.com/office/drawing/2014/main" id="{10DFB7E1-8CB1-012A-A6FF-9CFF101F413D}"/>
                     </a:ext>
                   </a:extLst>
                 </p:cNvPr>
@@ -5890,7 +9612,7 @@
                 <p:cNvPr id="92" name="Straight Arrow Connector 91">
                   <a:extLst>
                     <a:ext uri="{FF2B5EF4-FFF2-40B4-BE49-F238E27FC236}">
-                      <a16:creationId xmlns:a16="http://schemas.microsoft.com/office/drawing/2014/main" id="{3311630B-3C8B-50C3-A8B8-9501C25A6707}"/>
+                      <a16:creationId xmlns:a16="http://schemas.microsoft.com/office/drawing/2014/main" id="{FC09E90E-48F8-3EF3-2E2C-BC1093D3E504}"/>
                     </a:ext>
                   </a:extLst>
                 </p:cNvPr>
@@ -5929,7 +9651,7 @@
                 <p:cNvPr id="93" name="Straight Arrow Connector 92">
                   <a:extLst>
                     <a:ext uri="{FF2B5EF4-FFF2-40B4-BE49-F238E27FC236}">
-                      <a16:creationId xmlns:a16="http://schemas.microsoft.com/office/drawing/2014/main" id="{7AE56C3D-123F-BC83-DE50-0F84BFD3CC6B}"/>
+                      <a16:creationId xmlns:a16="http://schemas.microsoft.com/office/drawing/2014/main" id="{6C089B10-FB1B-EC7B-58CE-B7F134AA4B25}"/>
                     </a:ext>
                   </a:extLst>
                 </p:cNvPr>
@@ -5970,7 +9692,7 @@
                 <p:cNvPr id="94" name="Straight Arrow Connector 93">
                   <a:extLst>
                     <a:ext uri="{FF2B5EF4-FFF2-40B4-BE49-F238E27FC236}">
-                      <a16:creationId xmlns:a16="http://schemas.microsoft.com/office/drawing/2014/main" id="{1AD917E6-2F05-F5D3-A57C-F111CCC8D17C}"/>
+                      <a16:creationId xmlns:a16="http://schemas.microsoft.com/office/drawing/2014/main" id="{4E711D47-FD5E-F0D6-A10F-E1FBA85E1C52}"/>
                     </a:ext>
                   </a:extLst>
                 </p:cNvPr>
@@ -6012,7 +9734,7 @@
               <p:cNvPr id="81" name="Rounded Rectangle 80">
                 <a:extLst>
                   <a:ext uri="{FF2B5EF4-FFF2-40B4-BE49-F238E27FC236}">
-                    <a16:creationId xmlns:a16="http://schemas.microsoft.com/office/drawing/2014/main" id="{BE8A10DA-1FAF-E5AA-B826-A7334783703D}"/>
+                    <a16:creationId xmlns:a16="http://schemas.microsoft.com/office/drawing/2014/main" id="{BA3D0207-2778-707C-44FE-4D761EB90A86}"/>
                   </a:ext>
                 </a:extLst>
               </p:cNvPr>
@@ -6063,7 +9785,7 @@
               <p:cNvPr id="82" name="TextBox 81">
                 <a:extLst>
                   <a:ext uri="{FF2B5EF4-FFF2-40B4-BE49-F238E27FC236}">
-                    <a16:creationId xmlns:a16="http://schemas.microsoft.com/office/drawing/2014/main" id="{F2B20A6B-8A1D-B807-6696-F4EEA7BDE95F}"/>
+                    <a16:creationId xmlns:a16="http://schemas.microsoft.com/office/drawing/2014/main" id="{A4D1D60C-8609-19FF-CC88-05B7D4AB4FC0}"/>
                   </a:ext>
                 </a:extLst>
               </p:cNvPr>
@@ -6107,7 +9829,7 @@
             <p:cNvPr id="95" name="Straight Arrow Connector 94">
               <a:extLst>
                 <a:ext uri="{FF2B5EF4-FFF2-40B4-BE49-F238E27FC236}">
-                  <a16:creationId xmlns:a16="http://schemas.microsoft.com/office/drawing/2014/main" id="{977574D5-331A-6C50-B74F-81982F3F1B67}"/>
+                  <a16:creationId xmlns:a16="http://schemas.microsoft.com/office/drawing/2014/main" id="{0A475444-C710-8BE4-B699-422022858A8D}"/>
                 </a:ext>
               </a:extLst>
             </p:cNvPr>
@@ -6150,7 +9872,7 @@
             <p:cNvPr id="96" name="Group 95">
               <a:extLst>
                 <a:ext uri="{FF2B5EF4-FFF2-40B4-BE49-F238E27FC236}">
-                  <a16:creationId xmlns:a16="http://schemas.microsoft.com/office/drawing/2014/main" id="{5B896F87-FC41-0F16-2FAA-3C86F55D4BD8}"/>
+                  <a16:creationId xmlns:a16="http://schemas.microsoft.com/office/drawing/2014/main" id="{6E6D4A24-84AC-5DD6-83AB-0520A8CB1DF5}"/>
                 </a:ext>
               </a:extLst>
             </p:cNvPr>
@@ -6170,7 +9892,7 @@
               <p:cNvPr id="97" name="Group 96">
                 <a:extLst>
                   <a:ext uri="{FF2B5EF4-FFF2-40B4-BE49-F238E27FC236}">
-                    <a16:creationId xmlns:a16="http://schemas.microsoft.com/office/drawing/2014/main" id="{C25FEC93-B144-3E8F-45A5-860F0537E641}"/>
+                    <a16:creationId xmlns:a16="http://schemas.microsoft.com/office/drawing/2014/main" id="{AAD157D3-586F-755C-FC67-58502632CF87}"/>
                   </a:ext>
                 </a:extLst>
               </p:cNvPr>
@@ -6190,7 +9912,7 @@
                 <p:cNvPr id="100" name="Rounded Rectangle 99">
                   <a:extLst>
                     <a:ext uri="{FF2B5EF4-FFF2-40B4-BE49-F238E27FC236}">
-                      <a16:creationId xmlns:a16="http://schemas.microsoft.com/office/drawing/2014/main" id="{56DFD9D8-A8BB-2C7C-3287-5FFD6B7DA210}"/>
+                      <a16:creationId xmlns:a16="http://schemas.microsoft.com/office/drawing/2014/main" id="{EA7358DF-FFAA-7AD8-8560-5AE3754D45C9}"/>
                     </a:ext>
                   </a:extLst>
                 </p:cNvPr>
@@ -6244,7 +9966,7 @@
                 <p:cNvPr id="101" name="Straight Arrow Connector 100">
                   <a:extLst>
                     <a:ext uri="{FF2B5EF4-FFF2-40B4-BE49-F238E27FC236}">
-                      <a16:creationId xmlns:a16="http://schemas.microsoft.com/office/drawing/2014/main" id="{5934EF06-277B-9662-9085-7F82D3F3C901}"/>
+                      <a16:creationId xmlns:a16="http://schemas.microsoft.com/office/drawing/2014/main" id="{62DE1104-5328-0219-6248-E533C3926FEB}"/>
                     </a:ext>
                   </a:extLst>
                 </p:cNvPr>
@@ -6285,7 +10007,7 @@
                 <p:cNvPr id="102" name="Rounded Rectangle 101">
                   <a:extLst>
                     <a:ext uri="{FF2B5EF4-FFF2-40B4-BE49-F238E27FC236}">
-                      <a16:creationId xmlns:a16="http://schemas.microsoft.com/office/drawing/2014/main" id="{F02638E2-DE2A-1F84-309E-939A6E9881BF}"/>
+                      <a16:creationId xmlns:a16="http://schemas.microsoft.com/office/drawing/2014/main" id="{299E80AF-CE78-DB2A-8248-FFC6951E30CB}"/>
                     </a:ext>
                   </a:extLst>
                 </p:cNvPr>
@@ -6339,7 +10061,7 @@
                 <p:cNvPr id="103" name="Rounded Rectangle 102">
                   <a:extLst>
                     <a:ext uri="{FF2B5EF4-FFF2-40B4-BE49-F238E27FC236}">
-                      <a16:creationId xmlns:a16="http://schemas.microsoft.com/office/drawing/2014/main" id="{9579AD6F-4F47-8595-BE03-A0D02AE533C2}"/>
+                      <a16:creationId xmlns:a16="http://schemas.microsoft.com/office/drawing/2014/main" id="{DDBFFA46-F24E-EABB-927D-F52C2966331F}"/>
                     </a:ext>
                   </a:extLst>
                 </p:cNvPr>
@@ -6393,7 +10115,7 @@
                 <p:cNvPr id="104" name="Rounded Rectangle 103">
                   <a:extLst>
                     <a:ext uri="{FF2B5EF4-FFF2-40B4-BE49-F238E27FC236}">
-                      <a16:creationId xmlns:a16="http://schemas.microsoft.com/office/drawing/2014/main" id="{860BC869-BF2B-4EE7-6864-0B978906EAA5}"/>
+                      <a16:creationId xmlns:a16="http://schemas.microsoft.com/office/drawing/2014/main" id="{CD5049A2-62D2-791E-6449-100CD07B9173}"/>
                     </a:ext>
                   </a:extLst>
                 </p:cNvPr>
@@ -6447,7 +10169,7 @@
                 <p:cNvPr id="105" name="Straight Arrow Connector 104">
                   <a:extLst>
                     <a:ext uri="{FF2B5EF4-FFF2-40B4-BE49-F238E27FC236}">
-                      <a16:creationId xmlns:a16="http://schemas.microsoft.com/office/drawing/2014/main" id="{89F5B6CF-D978-A516-78A8-D2B65551D2DF}"/>
+                      <a16:creationId xmlns:a16="http://schemas.microsoft.com/office/drawing/2014/main" id="{1105EA2C-01B0-DF8C-593C-414CF9C8C4EB}"/>
                     </a:ext>
                   </a:extLst>
                 </p:cNvPr>
@@ -6488,7 +10210,7 @@
                 <p:cNvPr id="106" name="Straight Arrow Connector 105">
                   <a:extLst>
                     <a:ext uri="{FF2B5EF4-FFF2-40B4-BE49-F238E27FC236}">
-                      <a16:creationId xmlns:a16="http://schemas.microsoft.com/office/drawing/2014/main" id="{63BFF0D9-5C07-763F-B74D-0212D815338D}"/>
+                      <a16:creationId xmlns:a16="http://schemas.microsoft.com/office/drawing/2014/main" id="{F443F765-DA49-04C6-F779-F32E3458B187}"/>
                     </a:ext>
                   </a:extLst>
                 </p:cNvPr>
@@ -6527,7 +10249,7 @@
                 <p:cNvPr id="107" name="Straight Arrow Connector 106">
                   <a:extLst>
                     <a:ext uri="{FF2B5EF4-FFF2-40B4-BE49-F238E27FC236}">
-                      <a16:creationId xmlns:a16="http://schemas.microsoft.com/office/drawing/2014/main" id="{B37B93F6-23FE-A8F4-A8A2-4BC742011F14}"/>
+                      <a16:creationId xmlns:a16="http://schemas.microsoft.com/office/drawing/2014/main" id="{24A58BA7-7A2C-08A7-5CFC-32DD93076D49}"/>
                     </a:ext>
                   </a:extLst>
                 </p:cNvPr>
@@ -6566,7 +10288,7 @@
                 <p:cNvPr id="108" name="Straight Arrow Connector 107">
                   <a:extLst>
                     <a:ext uri="{FF2B5EF4-FFF2-40B4-BE49-F238E27FC236}">
-                      <a16:creationId xmlns:a16="http://schemas.microsoft.com/office/drawing/2014/main" id="{CA5FDB12-269F-AA96-4E02-845C19DEBFCD}"/>
+                      <a16:creationId xmlns:a16="http://schemas.microsoft.com/office/drawing/2014/main" id="{7ADB0BA9-AD2E-DAED-79C8-AB4DFD56CBFD}"/>
                     </a:ext>
                   </a:extLst>
                 </p:cNvPr>
@@ -6605,7 +10327,7 @@
                 <p:cNvPr id="109" name="Straight Arrow Connector 108">
                   <a:extLst>
                     <a:ext uri="{FF2B5EF4-FFF2-40B4-BE49-F238E27FC236}">
-                      <a16:creationId xmlns:a16="http://schemas.microsoft.com/office/drawing/2014/main" id="{CB8CC350-7F2F-53CC-2578-ABFD82158C5E}"/>
+                      <a16:creationId xmlns:a16="http://schemas.microsoft.com/office/drawing/2014/main" id="{6C77243D-4FA5-DFC5-6794-BBD02810BE8C}"/>
                     </a:ext>
                   </a:extLst>
                 </p:cNvPr>
@@ -6644,7 +10366,7 @@
                 <p:cNvPr id="110" name="Straight Arrow Connector 109">
                   <a:extLst>
                     <a:ext uri="{FF2B5EF4-FFF2-40B4-BE49-F238E27FC236}">
-                      <a16:creationId xmlns:a16="http://schemas.microsoft.com/office/drawing/2014/main" id="{11B458AA-3B6A-ACA0-8E9C-87F7E90A607D}"/>
+                      <a16:creationId xmlns:a16="http://schemas.microsoft.com/office/drawing/2014/main" id="{AD73AE50-4A10-BF78-24AB-CA1EC97CF7E0}"/>
                     </a:ext>
                   </a:extLst>
                 </p:cNvPr>
@@ -6685,7 +10407,7 @@
                 <p:cNvPr id="111" name="Straight Arrow Connector 110">
                   <a:extLst>
                     <a:ext uri="{FF2B5EF4-FFF2-40B4-BE49-F238E27FC236}">
-                      <a16:creationId xmlns:a16="http://schemas.microsoft.com/office/drawing/2014/main" id="{43654A4A-D8DC-0F79-EBAD-329DE8449A39}"/>
+                      <a16:creationId xmlns:a16="http://schemas.microsoft.com/office/drawing/2014/main" id="{E8A3C9F8-AB94-2EA2-6BF9-7F31D407DC94}"/>
                     </a:ext>
                   </a:extLst>
                 </p:cNvPr>
@@ -6727,7 +10449,7 @@
               <p:cNvPr id="98" name="Rounded Rectangle 97">
                 <a:extLst>
                   <a:ext uri="{FF2B5EF4-FFF2-40B4-BE49-F238E27FC236}">
-                    <a16:creationId xmlns:a16="http://schemas.microsoft.com/office/drawing/2014/main" id="{96429BE9-1409-1C66-0270-AE8A37C7DFE1}"/>
+                    <a16:creationId xmlns:a16="http://schemas.microsoft.com/office/drawing/2014/main" id="{65E60EB4-EC0E-29DF-B5A2-BF572F7A8540}"/>
                   </a:ext>
                 </a:extLst>
               </p:cNvPr>
@@ -6778,7 +10500,7 @@
               <p:cNvPr id="99" name="TextBox 98">
                 <a:extLst>
                   <a:ext uri="{FF2B5EF4-FFF2-40B4-BE49-F238E27FC236}">
-                    <a16:creationId xmlns:a16="http://schemas.microsoft.com/office/drawing/2014/main" id="{36B5BBCF-DE13-5919-DD89-214650F773A8}"/>
+                    <a16:creationId xmlns:a16="http://schemas.microsoft.com/office/drawing/2014/main" id="{5664A012-46EA-CD4B-F840-A202996B293A}"/>
                   </a:ext>
                 </a:extLst>
               </p:cNvPr>
@@ -6822,7 +10544,7 @@
             <p:cNvPr id="112" name="Straight Arrow Connector 111">
               <a:extLst>
                 <a:ext uri="{FF2B5EF4-FFF2-40B4-BE49-F238E27FC236}">
-                  <a16:creationId xmlns:a16="http://schemas.microsoft.com/office/drawing/2014/main" id="{E95BA144-AB2F-4454-DC7F-E7C0C9FF2802}"/>
+                  <a16:creationId xmlns:a16="http://schemas.microsoft.com/office/drawing/2014/main" id="{C9C57710-E53E-9557-5279-A2F89B84C3C6}"/>
                 </a:ext>
               </a:extLst>
             </p:cNvPr>
@@ -6865,7 +10587,7 @@
             <p:cNvPr id="115" name="Straight Arrow Connector 114">
               <a:extLst>
                 <a:ext uri="{FF2B5EF4-FFF2-40B4-BE49-F238E27FC236}">
-                  <a16:creationId xmlns:a16="http://schemas.microsoft.com/office/drawing/2014/main" id="{CD9BAECF-CCF6-DA9A-43D2-500A46D8ED67}"/>
+                  <a16:creationId xmlns:a16="http://schemas.microsoft.com/office/drawing/2014/main" id="{48CED65D-8946-5E9F-8842-8ADD6AF2E43D}"/>
                 </a:ext>
               </a:extLst>
             </p:cNvPr>
@@ -6908,7 +10630,7 @@
             <p:cNvPr id="118" name="Straight Arrow Connector 117">
               <a:extLst>
                 <a:ext uri="{FF2B5EF4-FFF2-40B4-BE49-F238E27FC236}">
-                  <a16:creationId xmlns:a16="http://schemas.microsoft.com/office/drawing/2014/main" id="{1DA3D75A-1984-45B1-9A3C-7599C7C83574}"/>
+                  <a16:creationId xmlns:a16="http://schemas.microsoft.com/office/drawing/2014/main" id="{C589DD03-E919-4BFD-7155-84B79D14A3A3}"/>
                 </a:ext>
               </a:extLst>
             </p:cNvPr>
@@ -6951,7 +10673,7 @@
             <p:cNvPr id="122" name="Elbow Connector 121">
               <a:extLst>
                 <a:ext uri="{FF2B5EF4-FFF2-40B4-BE49-F238E27FC236}">
-                  <a16:creationId xmlns:a16="http://schemas.microsoft.com/office/drawing/2014/main" id="{2578CE54-F3A1-E70C-8EB9-A0163777C742}"/>
+                  <a16:creationId xmlns:a16="http://schemas.microsoft.com/office/drawing/2014/main" id="{AFA24E20-3B69-403E-87FD-33E13C30F9E3}"/>
                 </a:ext>
               </a:extLst>
             </p:cNvPr>
@@ -6996,7 +10718,7 @@
             <p:cNvPr id="124" name="Elbow Connector 123">
               <a:extLst>
                 <a:ext uri="{FF2B5EF4-FFF2-40B4-BE49-F238E27FC236}">
-                  <a16:creationId xmlns:a16="http://schemas.microsoft.com/office/drawing/2014/main" id="{1A57A054-3F0A-313B-4889-8A62A55BE057}"/>
+                  <a16:creationId xmlns:a16="http://schemas.microsoft.com/office/drawing/2014/main" id="{5341FBFA-E607-57D2-BC2D-E031C48B4A3B}"/>
                 </a:ext>
               </a:extLst>
             </p:cNvPr>
@@ -7041,7 +10763,7 @@
             <p:cNvPr id="127" name="TextBox 126">
               <a:extLst>
                 <a:ext uri="{FF2B5EF4-FFF2-40B4-BE49-F238E27FC236}">
-                  <a16:creationId xmlns:a16="http://schemas.microsoft.com/office/drawing/2014/main" id="{24828A13-0ABB-4092-4FE7-E2461035A995}"/>
+                  <a16:creationId xmlns:a16="http://schemas.microsoft.com/office/drawing/2014/main" id="{CF388F96-B447-237A-71E6-156B4E2942B1}"/>
                 </a:ext>
               </a:extLst>
             </p:cNvPr>
@@ -7077,7 +10799,7 @@
           <p:cNvPr id="130" name="TextBox 129">
             <a:extLst>
               <a:ext uri="{FF2B5EF4-FFF2-40B4-BE49-F238E27FC236}">
-                <a16:creationId xmlns:a16="http://schemas.microsoft.com/office/drawing/2014/main" id="{5BCA5D06-19FA-9CCA-BCE2-4FC84B9D4434}"/>
+                <a16:creationId xmlns:a16="http://schemas.microsoft.com/office/drawing/2014/main" id="{59DB7BD6-57C2-9122-756C-BE71157E7552}"/>
               </a:ext>
             </a:extLst>
           </p:cNvPr>
@@ -7087,7 +10809,7 @@
         <p:spPr>
           <a:xfrm>
             <a:off x="154382" y="226319"/>
-            <a:ext cx="6315511" cy="523220"/>
+            <a:ext cx="4337662" cy="523220"/>
           </a:xfrm>
           <a:prstGeom prst="rect">
             <a:avLst/>
@@ -7102,7 +10824,7 @@
           <a:p>
             <a:r>
               <a:rPr lang="en-US" sz="2800" b="1" dirty="0"/>
-              <a:t>HCV transmission dynamics for PWID</a:t>
+              <a:t>Liver disease progression</a:t>
             </a:r>
           </a:p>
         </p:txBody>
@@ -7110,7 +10832,7 @@
     </p:spTree>
     <p:extLst>
       <p:ext uri="{BB962C8B-B14F-4D97-AF65-F5344CB8AC3E}">
-        <p14:creationId xmlns:p14="http://schemas.microsoft.com/office/powerpoint/2010/main" val="3200166923"/>
+        <p14:creationId xmlns:p14="http://schemas.microsoft.com/office/powerpoint/2010/main" val="3510300538"/>
       </p:ext>
     </p:extLst>
   </p:cSld>
@@ -7120,7 +10842,7 @@
 </p:sld>
 </file>
 
-<file path=ppt/slides/slide3.xml><?xml version="1.0" encoding="utf-8"?>
+<file path=ppt/slides/slide5.xml><?xml version="1.0" encoding="utf-8"?>
 <p:sld xmlns:a="http://schemas.openxmlformats.org/drawingml/2006/main" xmlns:r="http://schemas.openxmlformats.org/officeDocument/2006/relationships" xmlns:p="http://schemas.openxmlformats.org/presentationml/2006/main">
   <p:cSld>
     <p:spTree>

--- a/Model schematic.pptx
+++ b/Model schematic.pptx
@@ -10,6 +10,9 @@
     <p:sldId id="259" r:id="rId4"/>
     <p:sldId id="260" r:id="rId5"/>
     <p:sldId id="258" r:id="rId6"/>
+    <p:sldId id="261" r:id="rId7"/>
+    <p:sldId id="262" r:id="rId8"/>
+    <p:sldId id="263" r:id="rId9"/>
   </p:sldIdLst>
   <p:sldSz cx="12192000" cy="6858000"/>
   <p:notesSz cx="6858000" cy="9144000"/>
@@ -263,7 +266,7 @@
           <a:p>
             <a:fld id="{4ACD6CCD-50EB-0843-8C90-55A06B658EEA}" type="datetimeFigureOut">
               <a:rPr lang="en-US" smtClean="0"/>
-              <a:t>5/5/26</a:t>
+              <a:t>5/15/26</a:t>
             </a:fld>
             <a:endParaRPr lang="en-US"/>
           </a:p>
@@ -461,7 +464,7 @@
           <a:p>
             <a:fld id="{4ACD6CCD-50EB-0843-8C90-55A06B658EEA}" type="datetimeFigureOut">
               <a:rPr lang="en-US" smtClean="0"/>
-              <a:t>5/5/26</a:t>
+              <a:t>5/15/26</a:t>
             </a:fld>
             <a:endParaRPr lang="en-US"/>
           </a:p>
@@ -669,7 +672,7 @@
           <a:p>
             <a:fld id="{4ACD6CCD-50EB-0843-8C90-55A06B658EEA}" type="datetimeFigureOut">
               <a:rPr lang="en-US" smtClean="0"/>
-              <a:t>5/5/26</a:t>
+              <a:t>5/15/26</a:t>
             </a:fld>
             <a:endParaRPr lang="en-US"/>
           </a:p>
@@ -867,7 +870,7 @@
           <a:p>
             <a:fld id="{4ACD6CCD-50EB-0843-8C90-55A06B658EEA}" type="datetimeFigureOut">
               <a:rPr lang="en-US" smtClean="0"/>
-              <a:t>5/5/26</a:t>
+              <a:t>5/15/26</a:t>
             </a:fld>
             <a:endParaRPr lang="en-US"/>
           </a:p>
@@ -1142,7 +1145,7 @@
           <a:p>
             <a:fld id="{4ACD6CCD-50EB-0843-8C90-55A06B658EEA}" type="datetimeFigureOut">
               <a:rPr lang="en-US" smtClean="0"/>
-              <a:t>5/5/26</a:t>
+              <a:t>5/15/26</a:t>
             </a:fld>
             <a:endParaRPr lang="en-US"/>
           </a:p>
@@ -1407,7 +1410,7 @@
           <a:p>
             <a:fld id="{4ACD6CCD-50EB-0843-8C90-55A06B658EEA}" type="datetimeFigureOut">
               <a:rPr lang="en-US" smtClean="0"/>
-              <a:t>5/5/26</a:t>
+              <a:t>5/15/26</a:t>
             </a:fld>
             <a:endParaRPr lang="en-US"/>
           </a:p>
@@ -1819,7 +1822,7 @@
           <a:p>
             <a:fld id="{4ACD6CCD-50EB-0843-8C90-55A06B658EEA}" type="datetimeFigureOut">
               <a:rPr lang="en-US" smtClean="0"/>
-              <a:t>5/5/26</a:t>
+              <a:t>5/15/26</a:t>
             </a:fld>
             <a:endParaRPr lang="en-US"/>
           </a:p>
@@ -1960,7 +1963,7 @@
           <a:p>
             <a:fld id="{4ACD6CCD-50EB-0843-8C90-55A06B658EEA}" type="datetimeFigureOut">
               <a:rPr lang="en-US" smtClean="0"/>
-              <a:t>5/5/26</a:t>
+              <a:t>5/15/26</a:t>
             </a:fld>
             <a:endParaRPr lang="en-US"/>
           </a:p>
@@ -2073,7 +2076,7 @@
           <a:p>
             <a:fld id="{4ACD6CCD-50EB-0843-8C90-55A06B658EEA}" type="datetimeFigureOut">
               <a:rPr lang="en-US" smtClean="0"/>
-              <a:t>5/5/26</a:t>
+              <a:t>5/15/26</a:t>
             </a:fld>
             <a:endParaRPr lang="en-US"/>
           </a:p>
@@ -2384,7 +2387,7 @@
           <a:p>
             <a:fld id="{4ACD6CCD-50EB-0843-8C90-55A06B658EEA}" type="datetimeFigureOut">
               <a:rPr lang="en-US" smtClean="0"/>
-              <a:t>5/5/26</a:t>
+              <a:t>5/15/26</a:t>
             </a:fld>
             <a:endParaRPr lang="en-US"/>
           </a:p>
@@ -2672,7 +2675,7 @@
           <a:p>
             <a:fld id="{4ACD6CCD-50EB-0843-8C90-55A06B658EEA}" type="datetimeFigureOut">
               <a:rPr lang="en-US" smtClean="0"/>
-              <a:t>5/5/26</a:t>
+              <a:t>5/15/26</a:t>
             </a:fld>
             <a:endParaRPr lang="en-US"/>
           </a:p>
@@ -2913,7 +2916,7 @@
           <a:p>
             <a:fld id="{4ACD6CCD-50EB-0843-8C90-55A06B658EEA}" type="datetimeFigureOut">
               <a:rPr lang="en-US" smtClean="0"/>
-              <a:t>5/5/26</a:t>
+              <a:t>5/15/26</a:t>
             </a:fld>
             <a:endParaRPr lang="en-US"/>
           </a:p>
@@ -10945,6 +10948,8576 @@
 </p:sld>
 </file>
 
+<file path=ppt/slides/slide6.xml><?xml version="1.0" encoding="utf-8"?>
+<p:sld xmlns:a="http://schemas.openxmlformats.org/drawingml/2006/main" xmlns:r="http://schemas.openxmlformats.org/officeDocument/2006/relationships" xmlns:p="http://schemas.openxmlformats.org/presentationml/2006/main">
+  <p:cSld>
+    <p:spTree>
+      <p:nvGrpSpPr>
+        <p:cNvPr id="1" name=""/>
+        <p:cNvGrpSpPr/>
+        <p:nvPr/>
+      </p:nvGrpSpPr>
+      <p:grpSpPr>
+        <a:xfrm>
+          <a:off x="0" y="0"/>
+          <a:ext cx="0" cy="0"/>
+          <a:chOff x="0" y="0"/>
+          <a:chExt cx="0" cy="0"/>
+        </a:xfrm>
+      </p:grpSpPr>
+      <p:pic>
+        <p:nvPicPr>
+          <p:cNvPr id="1026" name="Picture 2">
+            <a:extLst>
+              <a:ext uri="{FF2B5EF4-FFF2-40B4-BE49-F238E27FC236}">
+                <a16:creationId xmlns:a16="http://schemas.microsoft.com/office/drawing/2014/main" id="{81F56814-5050-A14A-BD61-73392A686532}"/>
+              </a:ext>
+            </a:extLst>
+          </p:cNvPr>
+          <p:cNvPicPr>
+            <a:picLocks noChangeAspect="1" noChangeArrowheads="1"/>
+          </p:cNvPicPr>
+          <p:nvPr/>
+        </p:nvPicPr>
+        <p:blipFill>
+          <a:blip r:embed="rId2">
+            <a:extLst>
+              <a:ext uri="{28A0092B-C50C-407E-A947-70E740481C1C}">
+                <a14:useLocalDpi xmlns:a14="http://schemas.microsoft.com/office/drawing/2010/main" val="0"/>
+              </a:ext>
+            </a:extLst>
+          </a:blip>
+          <a:srcRect/>
+          <a:stretch>
+            <a:fillRect/>
+          </a:stretch>
+        </p:blipFill>
+        <p:spPr bwMode="auto">
+          <a:xfrm>
+            <a:off x="0" y="0"/>
+            <a:ext cx="4754563" cy="6858000"/>
+          </a:xfrm>
+          <a:prstGeom prst="rect">
+            <a:avLst/>
+          </a:prstGeom>
+          <a:noFill/>
+          <a:extLst>
+            <a:ext uri="{909E8E84-426E-40DD-AFC4-6F175D3DCCD1}">
+              <a14:hiddenFill xmlns:a14="http://schemas.microsoft.com/office/drawing/2010/main">
+                <a:solidFill>
+                  <a:srgbClr val="FFFFFF"/>
+                </a:solidFill>
+              </a14:hiddenFill>
+            </a:ext>
+          </a:extLst>
+        </p:spPr>
+      </p:pic>
+    </p:spTree>
+    <p:extLst>
+      <p:ext uri="{BB962C8B-B14F-4D97-AF65-F5344CB8AC3E}">
+        <p14:creationId xmlns:p14="http://schemas.microsoft.com/office/powerpoint/2010/main" val="3380877300"/>
+      </p:ext>
+    </p:extLst>
+  </p:cSld>
+  <p:clrMapOvr>
+    <a:masterClrMapping/>
+  </p:clrMapOvr>
+</p:sld>
+</file>
+
+<file path=ppt/slides/slide7.xml><?xml version="1.0" encoding="utf-8"?>
+<p:sld xmlns:a="http://schemas.openxmlformats.org/drawingml/2006/main" xmlns:r="http://schemas.openxmlformats.org/officeDocument/2006/relationships" xmlns:p="http://schemas.openxmlformats.org/presentationml/2006/main">
+  <p:cSld>
+    <p:spTree>
+      <p:nvGrpSpPr>
+        <p:cNvPr id="1" name="">
+          <a:extLst>
+            <a:ext uri="{FF2B5EF4-FFF2-40B4-BE49-F238E27FC236}">
+              <a16:creationId xmlns:a16="http://schemas.microsoft.com/office/drawing/2014/main" id="{5BEA07CA-3734-4BCC-8FCD-6F978CED0B26}"/>
+            </a:ext>
+          </a:extLst>
+        </p:cNvPr>
+        <p:cNvGrpSpPr/>
+        <p:nvPr/>
+      </p:nvGrpSpPr>
+      <p:grpSpPr>
+        <a:xfrm>
+          <a:off x="0" y="0"/>
+          <a:ext cx="0" cy="0"/>
+          <a:chOff x="0" y="0"/>
+          <a:chExt cx="0" cy="0"/>
+        </a:xfrm>
+      </p:grpSpPr>
+      <p:grpSp>
+        <p:nvGrpSpPr>
+          <p:cNvPr id="12" name="Group 11">
+            <a:extLst>
+              <a:ext uri="{FF2B5EF4-FFF2-40B4-BE49-F238E27FC236}">
+                <a16:creationId xmlns:a16="http://schemas.microsoft.com/office/drawing/2014/main" id="{66A7251A-CE28-8B0B-E42F-C49778800CAE}"/>
+              </a:ext>
+            </a:extLst>
+          </p:cNvPr>
+          <p:cNvGrpSpPr/>
+          <p:nvPr/>
+        </p:nvGrpSpPr>
+        <p:grpSpPr>
+          <a:xfrm>
+            <a:off x="0" y="-6067781"/>
+            <a:ext cx="11561222" cy="13349114"/>
+            <a:chOff x="0" y="-6067781"/>
+            <a:chExt cx="11561222" cy="13349114"/>
+          </a:xfrm>
+        </p:grpSpPr>
+        <p:grpSp>
+          <p:nvGrpSpPr>
+            <p:cNvPr id="1284" name="Group 1283">
+              <a:extLst>
+                <a:ext uri="{FF2B5EF4-FFF2-40B4-BE49-F238E27FC236}">
+                  <a16:creationId xmlns:a16="http://schemas.microsoft.com/office/drawing/2014/main" id="{26A41D5C-8BC3-1748-D3F6-CE6EDD2F560B}"/>
+                </a:ext>
+              </a:extLst>
+            </p:cNvPr>
+            <p:cNvGrpSpPr/>
+            <p:nvPr/>
+          </p:nvGrpSpPr>
+          <p:grpSpPr>
+            <a:xfrm>
+              <a:off x="0" y="-6067781"/>
+              <a:ext cx="11561222" cy="13349114"/>
+              <a:chOff x="-15013297" y="-2157588"/>
+              <a:chExt cx="11561222" cy="13349114"/>
+            </a:xfrm>
+          </p:grpSpPr>
+          <p:sp>
+            <p:nvSpPr>
+              <p:cNvPr id="1152" name="Rounded Rectangle 1151">
+                <a:extLst>
+                  <a:ext uri="{FF2B5EF4-FFF2-40B4-BE49-F238E27FC236}">
+                    <a16:creationId xmlns:a16="http://schemas.microsoft.com/office/drawing/2014/main" id="{7D7E75CE-FAB2-E166-BC10-42084EF57389}"/>
+                  </a:ext>
+                </a:extLst>
+              </p:cNvPr>
+              <p:cNvSpPr/>
+              <p:nvPr/>
+            </p:nvSpPr>
+            <p:spPr>
+              <a:xfrm>
+                <a:off x="-15006467" y="-2157588"/>
+                <a:ext cx="11554392" cy="6676493"/>
+              </a:xfrm>
+              <a:prstGeom prst="roundRect">
+                <a:avLst>
+                  <a:gd name="adj" fmla="val 0"/>
+                </a:avLst>
+              </a:prstGeom>
+              <a:solidFill>
+                <a:schemeClr val="bg1"/>
+              </a:solidFill>
+              <a:ln>
+                <a:noFill/>
+              </a:ln>
+            </p:spPr>
+            <p:style>
+              <a:lnRef idx="2">
+                <a:schemeClr val="accent1">
+                  <a:shade val="15000"/>
+                </a:schemeClr>
+              </a:lnRef>
+              <a:fillRef idx="1">
+                <a:schemeClr val="accent1"/>
+              </a:fillRef>
+              <a:effectRef idx="0">
+                <a:schemeClr val="accent1"/>
+              </a:effectRef>
+              <a:fontRef idx="minor">
+                <a:schemeClr val="lt1"/>
+              </a:fontRef>
+            </p:style>
+            <p:txBody>
+              <a:bodyPr rtlCol="0" anchor="ctr"/>
+              <a:lstStyle/>
+              <a:p>
+                <a:pPr algn="ctr"/>
+                <a:endParaRPr lang="en-US" sz="1600" dirty="0">
+                  <a:solidFill>
+                    <a:sysClr val="windowText" lastClr="000000"/>
+                  </a:solidFill>
+                </a:endParaRPr>
+              </a:p>
+            </p:txBody>
+          </p:sp>
+          <p:cxnSp>
+            <p:nvCxnSpPr>
+              <p:cNvPr id="37" name="Elbow Connector 36">
+                <a:extLst>
+                  <a:ext uri="{FF2B5EF4-FFF2-40B4-BE49-F238E27FC236}">
+                    <a16:creationId xmlns:a16="http://schemas.microsoft.com/office/drawing/2014/main" id="{0BB48516-449D-74CA-BC31-AE78F79389D8}"/>
+                  </a:ext>
+                </a:extLst>
+              </p:cNvPr>
+              <p:cNvCxnSpPr>
+                <a:stCxn id="4" idx="3"/>
+                <a:endCxn id="14" idx="1"/>
+              </p:cNvCxnSpPr>
+              <p:nvPr/>
+            </p:nvCxnSpPr>
+            <p:spPr>
+              <a:xfrm flipV="1">
+                <a:off x="-12001194" y="-1126006"/>
+                <a:ext cx="695275" cy="3419345"/>
+              </a:xfrm>
+              <a:prstGeom prst="bentConnector3">
+                <a:avLst>
+                  <a:gd name="adj1" fmla="val 24708"/>
+                </a:avLst>
+              </a:prstGeom>
+              <a:ln>
+                <a:solidFill>
+                  <a:schemeClr val="tx1"/>
+                </a:solidFill>
+                <a:tailEnd type="triangle"/>
+              </a:ln>
+            </p:spPr>
+            <p:style>
+              <a:lnRef idx="2">
+                <a:schemeClr val="accent1"/>
+              </a:lnRef>
+              <a:fillRef idx="0">
+                <a:schemeClr val="accent1"/>
+              </a:fillRef>
+              <a:effectRef idx="1">
+                <a:schemeClr val="accent1"/>
+              </a:effectRef>
+              <a:fontRef idx="minor">
+                <a:schemeClr val="tx1"/>
+              </a:fontRef>
+            </p:style>
+          </p:cxnSp>
+          <p:cxnSp>
+            <p:nvCxnSpPr>
+              <p:cNvPr id="39" name="Elbow Connector 38">
+                <a:extLst>
+                  <a:ext uri="{FF2B5EF4-FFF2-40B4-BE49-F238E27FC236}">
+                    <a16:creationId xmlns:a16="http://schemas.microsoft.com/office/drawing/2014/main" id="{B454BF38-26A7-676A-3D93-A31E5E3A76F6}"/>
+                  </a:ext>
+                </a:extLst>
+              </p:cNvPr>
+              <p:cNvCxnSpPr>
+                <a:cxnSpLocks/>
+                <a:stCxn id="4" idx="3"/>
+                <a:endCxn id="16" idx="1"/>
+              </p:cNvCxnSpPr>
+              <p:nvPr/>
+            </p:nvCxnSpPr>
+            <p:spPr>
+              <a:xfrm flipV="1">
+                <a:off x="-12001194" y="170224"/>
+                <a:ext cx="695275" cy="2123115"/>
+              </a:xfrm>
+              <a:prstGeom prst="bentConnector3">
+                <a:avLst>
+                  <a:gd name="adj1" fmla="val 24708"/>
+                </a:avLst>
+              </a:prstGeom>
+              <a:ln>
+                <a:solidFill>
+                  <a:schemeClr val="tx1"/>
+                </a:solidFill>
+                <a:tailEnd type="triangle"/>
+              </a:ln>
+            </p:spPr>
+            <p:style>
+              <a:lnRef idx="2">
+                <a:schemeClr val="accent1"/>
+              </a:lnRef>
+              <a:fillRef idx="0">
+                <a:schemeClr val="accent1"/>
+              </a:fillRef>
+              <a:effectRef idx="1">
+                <a:schemeClr val="accent1"/>
+              </a:effectRef>
+              <a:fontRef idx="minor">
+                <a:schemeClr val="tx1"/>
+              </a:fontRef>
+            </p:style>
+          </p:cxnSp>
+          <p:cxnSp>
+            <p:nvCxnSpPr>
+              <p:cNvPr id="1077" name="Straight Arrow Connector 1076">
+                <a:extLst>
+                  <a:ext uri="{FF2B5EF4-FFF2-40B4-BE49-F238E27FC236}">
+                    <a16:creationId xmlns:a16="http://schemas.microsoft.com/office/drawing/2014/main" id="{DDFF5F7D-78F5-52B7-29B2-F04ACE81464F}"/>
+                  </a:ext>
+                </a:extLst>
+              </p:cNvPr>
+              <p:cNvCxnSpPr>
+                <a:stCxn id="14" idx="3"/>
+                <a:endCxn id="1037" idx="1"/>
+              </p:cNvCxnSpPr>
+              <p:nvPr/>
+            </p:nvCxnSpPr>
+            <p:spPr>
+              <a:xfrm flipV="1">
+                <a:off x="-10405009" y="-1126007"/>
+                <a:ext cx="4337051" cy="1"/>
+              </a:xfrm>
+              <a:prstGeom prst="straightConnector1">
+                <a:avLst/>
+              </a:prstGeom>
+              <a:ln>
+                <a:solidFill>
+                  <a:schemeClr val="tx1"/>
+                </a:solidFill>
+                <a:prstDash val="dash"/>
+                <a:tailEnd type="triangle"/>
+              </a:ln>
+            </p:spPr>
+            <p:style>
+              <a:lnRef idx="2">
+                <a:schemeClr val="accent1"/>
+              </a:lnRef>
+              <a:fillRef idx="0">
+                <a:schemeClr val="accent1"/>
+              </a:fillRef>
+              <a:effectRef idx="1">
+                <a:schemeClr val="accent1"/>
+              </a:effectRef>
+              <a:fontRef idx="minor">
+                <a:schemeClr val="tx1"/>
+              </a:fontRef>
+            </p:style>
+          </p:cxnSp>
+          <p:cxnSp>
+            <p:nvCxnSpPr>
+              <p:cNvPr id="1078" name="Straight Arrow Connector 1077">
+                <a:extLst>
+                  <a:ext uri="{FF2B5EF4-FFF2-40B4-BE49-F238E27FC236}">
+                    <a16:creationId xmlns:a16="http://schemas.microsoft.com/office/drawing/2014/main" id="{F6BEAFDB-522A-D523-224A-82A7749045C8}"/>
+                  </a:ext>
+                </a:extLst>
+              </p:cNvPr>
+              <p:cNvCxnSpPr>
+                <a:cxnSpLocks/>
+                <a:stCxn id="15" idx="3"/>
+                <a:endCxn id="1038" idx="1"/>
+              </p:cNvCxnSpPr>
+              <p:nvPr/>
+            </p:nvCxnSpPr>
+            <p:spPr>
+              <a:xfrm flipV="1">
+                <a:off x="-10405009" y="-477891"/>
+                <a:ext cx="4337051" cy="4295"/>
+              </a:xfrm>
+              <a:prstGeom prst="straightConnector1">
+                <a:avLst/>
+              </a:prstGeom>
+              <a:ln>
+                <a:solidFill>
+                  <a:schemeClr val="tx1"/>
+                </a:solidFill>
+                <a:prstDash val="dash"/>
+                <a:tailEnd type="triangle"/>
+              </a:ln>
+            </p:spPr>
+            <p:style>
+              <a:lnRef idx="2">
+                <a:schemeClr val="accent1"/>
+              </a:lnRef>
+              <a:fillRef idx="0">
+                <a:schemeClr val="accent1"/>
+              </a:fillRef>
+              <a:effectRef idx="1">
+                <a:schemeClr val="accent1"/>
+              </a:effectRef>
+              <a:fontRef idx="minor">
+                <a:schemeClr val="tx1"/>
+              </a:fontRef>
+            </p:style>
+          </p:cxnSp>
+          <p:cxnSp>
+            <p:nvCxnSpPr>
+              <p:cNvPr id="1081" name="Straight Arrow Connector 1080">
+                <a:extLst>
+                  <a:ext uri="{FF2B5EF4-FFF2-40B4-BE49-F238E27FC236}">
+                    <a16:creationId xmlns:a16="http://schemas.microsoft.com/office/drawing/2014/main" id="{E06CDDD3-F00F-AA0A-015B-11A671ABEAB3}"/>
+                  </a:ext>
+                </a:extLst>
+              </p:cNvPr>
+              <p:cNvCxnSpPr>
+                <a:cxnSpLocks/>
+                <a:stCxn id="16" idx="3"/>
+                <a:endCxn id="1039" idx="1"/>
+              </p:cNvCxnSpPr>
+              <p:nvPr/>
+            </p:nvCxnSpPr>
+            <p:spPr>
+              <a:xfrm>
+                <a:off x="-10405009" y="170224"/>
+                <a:ext cx="4337051" cy="1"/>
+              </a:xfrm>
+              <a:prstGeom prst="straightConnector1">
+                <a:avLst/>
+              </a:prstGeom>
+              <a:ln>
+                <a:solidFill>
+                  <a:schemeClr val="tx1"/>
+                </a:solidFill>
+                <a:prstDash val="dash"/>
+                <a:tailEnd type="triangle"/>
+              </a:ln>
+            </p:spPr>
+            <p:style>
+              <a:lnRef idx="2">
+                <a:schemeClr val="accent1"/>
+              </a:lnRef>
+              <a:fillRef idx="0">
+                <a:schemeClr val="accent1"/>
+              </a:fillRef>
+              <a:effectRef idx="1">
+                <a:schemeClr val="accent1"/>
+              </a:effectRef>
+              <a:fontRef idx="minor">
+                <a:schemeClr val="tx1"/>
+              </a:fontRef>
+            </p:style>
+          </p:cxnSp>
+          <p:cxnSp>
+            <p:nvCxnSpPr>
+              <p:cNvPr id="1084" name="Straight Arrow Connector 1083">
+                <a:extLst>
+                  <a:ext uri="{FF2B5EF4-FFF2-40B4-BE49-F238E27FC236}">
+                    <a16:creationId xmlns:a16="http://schemas.microsoft.com/office/drawing/2014/main" id="{4ED7EF70-FD80-C46C-4FFA-E46A87F0566B}"/>
+                  </a:ext>
+                </a:extLst>
+              </p:cNvPr>
+              <p:cNvCxnSpPr>
+                <a:cxnSpLocks/>
+                <a:stCxn id="23" idx="3"/>
+                <a:endCxn id="1043" idx="1"/>
+              </p:cNvCxnSpPr>
+              <p:nvPr/>
+            </p:nvCxnSpPr>
+            <p:spPr>
+              <a:xfrm>
+                <a:off x="-9006437" y="818341"/>
+                <a:ext cx="2938479" cy="0"/>
+              </a:xfrm>
+              <a:prstGeom prst="straightConnector1">
+                <a:avLst/>
+              </a:prstGeom>
+              <a:ln>
+                <a:solidFill>
+                  <a:schemeClr val="tx1"/>
+                </a:solidFill>
+                <a:prstDash val="dash"/>
+                <a:tailEnd type="triangle"/>
+              </a:ln>
+            </p:spPr>
+            <p:style>
+              <a:lnRef idx="2">
+                <a:schemeClr val="accent1"/>
+              </a:lnRef>
+              <a:fillRef idx="0">
+                <a:schemeClr val="accent1"/>
+              </a:fillRef>
+              <a:effectRef idx="1">
+                <a:schemeClr val="accent1"/>
+              </a:effectRef>
+              <a:fontRef idx="minor">
+                <a:schemeClr val="tx1"/>
+              </a:fontRef>
+            </p:style>
+          </p:cxnSp>
+          <p:cxnSp>
+            <p:nvCxnSpPr>
+              <p:cNvPr id="1087" name="Straight Arrow Connector 1086">
+                <a:extLst>
+                  <a:ext uri="{FF2B5EF4-FFF2-40B4-BE49-F238E27FC236}">
+                    <a16:creationId xmlns:a16="http://schemas.microsoft.com/office/drawing/2014/main" id="{CCBDB1B7-05D1-1847-6A8E-0DB18ADC0ED6}"/>
+                  </a:ext>
+                </a:extLst>
+              </p:cNvPr>
+              <p:cNvCxnSpPr>
+                <a:cxnSpLocks/>
+                <a:stCxn id="24" idx="3"/>
+                <a:endCxn id="1044" idx="1"/>
+              </p:cNvCxnSpPr>
+              <p:nvPr/>
+            </p:nvCxnSpPr>
+            <p:spPr>
+              <a:xfrm>
+                <a:off x="-9006437" y="1466457"/>
+                <a:ext cx="2938479" cy="0"/>
+              </a:xfrm>
+              <a:prstGeom prst="straightConnector1">
+                <a:avLst/>
+              </a:prstGeom>
+              <a:ln>
+                <a:solidFill>
+                  <a:schemeClr val="tx1"/>
+                </a:solidFill>
+                <a:prstDash val="dash"/>
+                <a:tailEnd type="triangle"/>
+              </a:ln>
+            </p:spPr>
+            <p:style>
+              <a:lnRef idx="2">
+                <a:schemeClr val="accent1"/>
+              </a:lnRef>
+              <a:fillRef idx="0">
+                <a:schemeClr val="accent1"/>
+              </a:fillRef>
+              <a:effectRef idx="1">
+                <a:schemeClr val="accent1"/>
+              </a:effectRef>
+              <a:fontRef idx="minor">
+                <a:schemeClr val="tx1"/>
+              </a:fontRef>
+            </p:style>
+          </p:cxnSp>
+          <p:cxnSp>
+            <p:nvCxnSpPr>
+              <p:cNvPr id="1090" name="Straight Arrow Connector 1089">
+                <a:extLst>
+                  <a:ext uri="{FF2B5EF4-FFF2-40B4-BE49-F238E27FC236}">
+                    <a16:creationId xmlns:a16="http://schemas.microsoft.com/office/drawing/2014/main" id="{8DD51178-F027-EB01-5B2C-2549F16D0941}"/>
+                  </a:ext>
+                </a:extLst>
+              </p:cNvPr>
+              <p:cNvCxnSpPr>
+                <a:cxnSpLocks/>
+                <a:stCxn id="25" idx="3"/>
+                <a:endCxn id="1045" idx="1"/>
+              </p:cNvCxnSpPr>
+              <p:nvPr/>
+            </p:nvCxnSpPr>
+            <p:spPr>
+              <a:xfrm>
+                <a:off x="-9006437" y="2114573"/>
+                <a:ext cx="2938479" cy="0"/>
+              </a:xfrm>
+              <a:prstGeom prst="straightConnector1">
+                <a:avLst/>
+              </a:prstGeom>
+              <a:ln>
+                <a:solidFill>
+                  <a:schemeClr val="tx1"/>
+                </a:solidFill>
+                <a:prstDash val="dash"/>
+                <a:tailEnd type="triangle"/>
+              </a:ln>
+            </p:spPr>
+            <p:style>
+              <a:lnRef idx="2">
+                <a:schemeClr val="accent1"/>
+              </a:lnRef>
+              <a:fillRef idx="0">
+                <a:schemeClr val="accent1"/>
+              </a:fillRef>
+              <a:effectRef idx="1">
+                <a:schemeClr val="accent1"/>
+              </a:effectRef>
+              <a:fontRef idx="minor">
+                <a:schemeClr val="tx1"/>
+              </a:fontRef>
+            </p:style>
+          </p:cxnSp>
+          <p:cxnSp>
+            <p:nvCxnSpPr>
+              <p:cNvPr id="1093" name="Straight Arrow Connector 1092">
+                <a:extLst>
+                  <a:ext uri="{FF2B5EF4-FFF2-40B4-BE49-F238E27FC236}">
+                    <a16:creationId xmlns:a16="http://schemas.microsoft.com/office/drawing/2014/main" id="{D05FFFF3-5128-3CA6-B6D5-74C6B3880852}"/>
+                  </a:ext>
+                </a:extLst>
+              </p:cNvPr>
+              <p:cNvCxnSpPr>
+                <a:cxnSpLocks/>
+                <a:stCxn id="28" idx="3"/>
+                <a:endCxn id="1049" idx="1"/>
+              </p:cNvCxnSpPr>
+              <p:nvPr/>
+            </p:nvCxnSpPr>
+            <p:spPr>
+              <a:xfrm>
+                <a:off x="-7607862" y="2762689"/>
+                <a:ext cx="1539904" cy="0"/>
+              </a:xfrm>
+              <a:prstGeom prst="straightConnector1">
+                <a:avLst/>
+              </a:prstGeom>
+              <a:ln>
+                <a:solidFill>
+                  <a:schemeClr val="tx1"/>
+                </a:solidFill>
+                <a:prstDash val="dash"/>
+                <a:tailEnd type="triangle"/>
+              </a:ln>
+            </p:spPr>
+            <p:style>
+              <a:lnRef idx="2">
+                <a:schemeClr val="accent1"/>
+              </a:lnRef>
+              <a:fillRef idx="0">
+                <a:schemeClr val="accent1"/>
+              </a:fillRef>
+              <a:effectRef idx="1">
+                <a:schemeClr val="accent1"/>
+              </a:effectRef>
+              <a:fontRef idx="minor">
+                <a:schemeClr val="tx1"/>
+              </a:fontRef>
+            </p:style>
+          </p:cxnSp>
+          <p:cxnSp>
+            <p:nvCxnSpPr>
+              <p:cNvPr id="1096" name="Straight Arrow Connector 1095">
+                <a:extLst>
+                  <a:ext uri="{FF2B5EF4-FFF2-40B4-BE49-F238E27FC236}">
+                    <a16:creationId xmlns:a16="http://schemas.microsoft.com/office/drawing/2014/main" id="{23282513-C217-A473-4C58-A84DAB282E33}"/>
+                  </a:ext>
+                </a:extLst>
+              </p:cNvPr>
+              <p:cNvCxnSpPr>
+                <a:cxnSpLocks/>
+                <a:stCxn id="29" idx="3"/>
+                <a:endCxn id="1050" idx="1"/>
+              </p:cNvCxnSpPr>
+              <p:nvPr/>
+            </p:nvCxnSpPr>
+            <p:spPr>
+              <a:xfrm>
+                <a:off x="-7607862" y="3406848"/>
+                <a:ext cx="1539904" cy="3957"/>
+              </a:xfrm>
+              <a:prstGeom prst="straightConnector1">
+                <a:avLst/>
+              </a:prstGeom>
+              <a:ln>
+                <a:solidFill>
+                  <a:schemeClr val="tx1"/>
+                </a:solidFill>
+                <a:prstDash val="dash"/>
+                <a:tailEnd type="triangle"/>
+              </a:ln>
+            </p:spPr>
+            <p:style>
+              <a:lnRef idx="2">
+                <a:schemeClr val="accent1"/>
+              </a:lnRef>
+              <a:fillRef idx="0">
+                <a:schemeClr val="accent1"/>
+              </a:fillRef>
+              <a:effectRef idx="1">
+                <a:schemeClr val="accent1"/>
+              </a:effectRef>
+              <a:fontRef idx="minor">
+                <a:schemeClr val="tx1"/>
+              </a:fontRef>
+            </p:style>
+          </p:cxnSp>
+          <p:cxnSp>
+            <p:nvCxnSpPr>
+              <p:cNvPr id="1099" name="Straight Arrow Connector 1098">
+                <a:extLst>
+                  <a:ext uri="{FF2B5EF4-FFF2-40B4-BE49-F238E27FC236}">
+                    <a16:creationId xmlns:a16="http://schemas.microsoft.com/office/drawing/2014/main" id="{4944AF36-BA52-F294-7864-F066EBABEEFB}"/>
+                  </a:ext>
+                </a:extLst>
+              </p:cNvPr>
+              <p:cNvCxnSpPr>
+                <a:cxnSpLocks/>
+                <a:stCxn id="30" idx="3"/>
+                <a:endCxn id="1051" idx="1"/>
+              </p:cNvCxnSpPr>
+              <p:nvPr/>
+            </p:nvCxnSpPr>
+            <p:spPr>
+              <a:xfrm>
+                <a:off x="-7607862" y="4058923"/>
+                <a:ext cx="1539904" cy="0"/>
+              </a:xfrm>
+              <a:prstGeom prst="straightConnector1">
+                <a:avLst/>
+              </a:prstGeom>
+              <a:ln>
+                <a:solidFill>
+                  <a:schemeClr val="tx1"/>
+                </a:solidFill>
+                <a:prstDash val="dash"/>
+                <a:tailEnd type="triangle"/>
+              </a:ln>
+            </p:spPr>
+            <p:style>
+              <a:lnRef idx="2">
+                <a:schemeClr val="accent1"/>
+              </a:lnRef>
+              <a:fillRef idx="0">
+                <a:schemeClr val="accent1"/>
+              </a:fillRef>
+              <a:effectRef idx="1">
+                <a:schemeClr val="accent1"/>
+              </a:effectRef>
+              <a:fontRef idx="minor">
+                <a:schemeClr val="tx1"/>
+              </a:fontRef>
+            </p:style>
+          </p:cxnSp>
+          <p:sp>
+            <p:nvSpPr>
+              <p:cNvPr id="1106" name="Rounded Rectangle 1105">
+                <a:extLst>
+                  <a:ext uri="{FF2B5EF4-FFF2-40B4-BE49-F238E27FC236}">
+                    <a16:creationId xmlns:a16="http://schemas.microsoft.com/office/drawing/2014/main" id="{9AA70773-3ACE-5675-5B16-94646739C490}"/>
+                  </a:ext>
+                </a:extLst>
+              </p:cNvPr>
+              <p:cNvSpPr/>
+              <p:nvPr/>
+            </p:nvSpPr>
+            <p:spPr>
+              <a:xfrm>
+                <a:off x="-4759041" y="1341622"/>
+                <a:ext cx="971824" cy="248564"/>
+              </a:xfrm>
+              <a:prstGeom prst="roundRect">
+                <a:avLst>
+                  <a:gd name="adj" fmla="val 22916"/>
+                </a:avLst>
+              </a:prstGeom>
+              <a:solidFill>
+                <a:schemeClr val="bg1"/>
+              </a:solidFill>
+            </p:spPr>
+            <p:style>
+              <a:lnRef idx="2">
+                <a:schemeClr val="accent1">
+                  <a:shade val="15000"/>
+                </a:schemeClr>
+              </a:lnRef>
+              <a:fillRef idx="1">
+                <a:schemeClr val="accent1"/>
+              </a:fillRef>
+              <a:effectRef idx="0">
+                <a:schemeClr val="accent1"/>
+              </a:effectRef>
+              <a:fontRef idx="minor">
+                <a:schemeClr val="lt1"/>
+              </a:fontRef>
+            </p:style>
+            <p:txBody>
+              <a:bodyPr rtlCol="0" anchor="ctr"/>
+              <a:lstStyle/>
+              <a:p>
+                <a:pPr algn="ctr"/>
+                <a:r>
+                  <a:rPr lang="en-US" sz="2000" b="1" dirty="0">
+                    <a:solidFill>
+                      <a:sysClr val="windowText" lastClr="000000"/>
+                    </a:solidFill>
+                  </a:rPr>
+                  <a:t>Death</a:t>
+                </a:r>
+              </a:p>
+            </p:txBody>
+          </p:sp>
+          <p:grpSp>
+            <p:nvGrpSpPr>
+              <p:cNvPr id="1030" name="Group 1029">
+                <a:extLst>
+                  <a:ext uri="{FF2B5EF4-FFF2-40B4-BE49-F238E27FC236}">
+                    <a16:creationId xmlns:a16="http://schemas.microsoft.com/office/drawing/2014/main" id="{7C06023D-5421-530E-B06E-5D54D970F213}"/>
+                  </a:ext>
+                </a:extLst>
+              </p:cNvPr>
+              <p:cNvGrpSpPr/>
+              <p:nvPr/>
+            </p:nvGrpSpPr>
+            <p:grpSpPr>
+              <a:xfrm>
+                <a:off x="-14672911" y="-1694"/>
+                <a:ext cx="2671718" cy="2646092"/>
+                <a:chOff x="265690" y="285110"/>
+                <a:chExt cx="2671718" cy="2646092"/>
+              </a:xfrm>
+            </p:grpSpPr>
+            <p:sp>
+              <p:nvSpPr>
+                <p:cNvPr id="2" name="Rounded Rectangle 1">
+                  <a:extLst>
+                    <a:ext uri="{FF2B5EF4-FFF2-40B4-BE49-F238E27FC236}">
+                      <a16:creationId xmlns:a16="http://schemas.microsoft.com/office/drawing/2014/main" id="{FD5DAEED-6C27-12E7-D2F7-196F8EE94CB5}"/>
+                    </a:ext>
+                  </a:extLst>
+                </p:cNvPr>
+                <p:cNvSpPr/>
+                <p:nvPr/>
+              </p:nvSpPr>
+              <p:spPr>
+                <a:xfrm>
+                  <a:off x="265691" y="285110"/>
+                  <a:ext cx="2671717" cy="702119"/>
+                </a:xfrm>
+                <a:prstGeom prst="roundRect">
+                  <a:avLst/>
+                </a:prstGeom>
+                <a:noFill/>
+              </p:spPr>
+              <p:style>
+                <a:lnRef idx="2">
+                  <a:schemeClr val="accent1">
+                    <a:shade val="15000"/>
+                  </a:schemeClr>
+                </a:lnRef>
+                <a:fillRef idx="1">
+                  <a:schemeClr val="accent1"/>
+                </a:fillRef>
+                <a:effectRef idx="0">
+                  <a:schemeClr val="accent1"/>
+                </a:effectRef>
+                <a:fontRef idx="minor">
+                  <a:schemeClr val="lt1"/>
+                </a:fontRef>
+              </p:style>
+              <p:txBody>
+                <a:bodyPr rtlCol="0" anchor="ctr"/>
+                <a:lstStyle/>
+                <a:p>
+                  <a:pPr algn="ctr"/>
+                  <a:r>
+                    <a:rPr lang="en-US" sz="1600" dirty="0">
+                      <a:solidFill>
+                        <a:sysClr val="windowText" lastClr="000000"/>
+                      </a:solidFill>
+                    </a:rPr>
+                    <a:t>DEMOS </a:t>
+                  </a:r>
+                </a:p>
+                <a:p>
+                  <a:pPr algn="ctr"/>
+                  <a:r>
+                    <a:rPr lang="en-US" sz="1600" dirty="0">
+                      <a:solidFill>
+                        <a:sysClr val="windowText" lastClr="000000"/>
+                      </a:solidFill>
+                    </a:rPr>
+                    <a:t>(Virtual healthy cohort)</a:t>
+                  </a:r>
+                </a:p>
+              </p:txBody>
+            </p:sp>
+            <mc:AlternateContent xmlns:mc="http://schemas.openxmlformats.org/markup-compatibility/2006" xmlns:a14="http://schemas.microsoft.com/office/drawing/2010/main">
+              <mc:Choice Requires="a14">
+                <p:sp>
+                  <p:nvSpPr>
+                    <p:cNvPr id="3" name="Rounded Rectangle 2">
+                      <a:extLst>
+                        <a:ext uri="{FF2B5EF4-FFF2-40B4-BE49-F238E27FC236}">
+                          <a16:creationId xmlns:a16="http://schemas.microsoft.com/office/drawing/2014/main" id="{9D0BF0A4-3011-6CCC-ECB8-AB037EDF347C}"/>
+                        </a:ext>
+                      </a:extLst>
+                    </p:cNvPr>
+                    <p:cNvSpPr/>
+                    <p:nvPr/>
+                  </p:nvSpPr>
+                  <p:spPr>
+                    <a:xfrm>
+                      <a:off x="265691" y="1257097"/>
+                      <a:ext cx="2671717" cy="702119"/>
+                    </a:xfrm>
+                    <a:prstGeom prst="roundRect">
+                      <a:avLst/>
+                    </a:prstGeom>
+                    <a:noFill/>
+                  </p:spPr>
+                  <p:style>
+                    <a:lnRef idx="2">
+                      <a:schemeClr val="accent1">
+                        <a:shade val="15000"/>
+                      </a:schemeClr>
+                    </a:lnRef>
+                    <a:fillRef idx="1">
+                      <a:schemeClr val="accent1"/>
+                    </a:fillRef>
+                    <a:effectRef idx="0">
+                      <a:schemeClr val="accent1"/>
+                    </a:effectRef>
+                    <a:fontRef idx="minor">
+                      <a:schemeClr val="lt1"/>
+                    </a:fontRef>
+                  </p:style>
+                  <p:txBody>
+                    <a:bodyPr rtlCol="0" anchor="ctr"/>
+                    <a:lstStyle/>
+                    <a:p>
+                      <a:pPr algn="ctr"/>
+                      <a:r>
+                        <a:rPr lang="en-US" sz="1400" dirty="0">
+                          <a:solidFill>
+                            <a:sysClr val="windowText" lastClr="000000"/>
+                          </a:solidFill>
+                        </a:rPr>
+                        <a:t>Joint distribution sampling</a:t>
+                      </a:r>
+                    </a:p>
+                    <a:p>
+                      <a:pPr algn="ctr"/>
+                      <a:r>
+                        <a:rPr lang="en-US" sz="1400" dirty="0">
+                          <a:solidFill>
+                            <a:sysClr val="windowText" lastClr="000000"/>
+                          </a:solidFill>
+                        </a:rPr>
+                        <a:t>by</a:t>
+                      </a:r>
+                    </a:p>
+                    <a:p>
+                      <a:pPr algn="ctr"/>
+                      <a:r>
+                        <a:rPr lang="en-US" sz="1400" dirty="0">
+                          <a:solidFill>
+                            <a:sysClr val="windowText" lastClr="000000"/>
+                          </a:solidFill>
+                        </a:rPr>
+                        <a:t>PRS </a:t>
+                      </a:r>
+                      <a14:m>
+                        <m:oMath xmlns:m="http://schemas.openxmlformats.org/officeDocument/2006/math">
+                          <m:r>
+                            <a:rPr lang="en-US" sz="1400" b="0" i="1" smtClean="0">
+                              <a:solidFill>
+                                <a:sysClr val="windowText" lastClr="000000"/>
+                              </a:solidFill>
+                              <a:latin typeface="Cambria Math" panose="02040503050406030204" pitchFamily="18" charset="0"/>
+                            </a:rPr>
+                            <m:t>×</m:t>
+                          </m:r>
+                        </m:oMath>
+                      </a14:m>
+                      <a:r>
+                        <a:rPr lang="en-US" sz="1400" dirty="0">
+                          <a:solidFill>
+                            <a:sysClr val="windowText" lastClr="000000"/>
+                          </a:solidFill>
+                        </a:rPr>
+                        <a:t> FH </a:t>
+                      </a:r>
+                      <a14:m>
+                        <m:oMath xmlns:m="http://schemas.openxmlformats.org/officeDocument/2006/math">
+                          <m:r>
+                            <a:rPr lang="en-US" sz="1400" i="1">
+                              <a:solidFill>
+                                <a:sysClr val="windowText" lastClr="000000"/>
+                              </a:solidFill>
+                              <a:latin typeface="Cambria Math" panose="02040503050406030204" pitchFamily="18" charset="0"/>
+                            </a:rPr>
+                            <m:t>×</m:t>
+                          </m:r>
+                        </m:oMath>
+                      </a14:m>
+                      <a:r>
+                        <a:rPr lang="en-US" sz="1400" dirty="0">
+                          <a:solidFill>
+                            <a:sysClr val="windowText" lastClr="000000"/>
+                          </a:solidFill>
+                        </a:rPr>
+                        <a:t> Race </a:t>
+                      </a:r>
+                      <a14:m>
+                        <m:oMath xmlns:m="http://schemas.openxmlformats.org/officeDocument/2006/math">
+                          <m:r>
+                            <a:rPr lang="en-US" sz="1400" i="1">
+                              <a:solidFill>
+                                <a:sysClr val="windowText" lastClr="000000"/>
+                              </a:solidFill>
+                              <a:latin typeface="Cambria Math" panose="02040503050406030204" pitchFamily="18" charset="0"/>
+                            </a:rPr>
+                            <m:t>×</m:t>
+                          </m:r>
+                        </m:oMath>
+                      </a14:m>
+                      <a:r>
+                        <a:rPr lang="en-US" sz="1400" dirty="0">
+                          <a:solidFill>
+                            <a:sysClr val="windowText" lastClr="000000"/>
+                          </a:solidFill>
+                        </a:rPr>
+                        <a:t> Birth year</a:t>
+                      </a:r>
+                    </a:p>
+                  </p:txBody>
+                </p:sp>
+              </mc:Choice>
+              <mc:Fallback xmlns="">
+                <p:sp>
+                  <p:nvSpPr>
+                    <p:cNvPr id="3" name="Rounded Rectangle 2">
+                      <a:extLst>
+                        <a:ext uri="{FF2B5EF4-FFF2-40B4-BE49-F238E27FC236}">
+                          <a16:creationId xmlns:a16="http://schemas.microsoft.com/office/drawing/2014/main" id="{9D0BF0A4-3011-6CCC-ECB8-AB037EDF347C}"/>
+                        </a:ext>
+                      </a:extLst>
+                    </p:cNvPr>
+                    <p:cNvSpPr>
+                      <a:spLocks noRot="1" noChangeAspect="1" noMove="1" noResize="1" noEditPoints="1" noAdjustHandles="1" noChangeArrowheads="1" noChangeShapeType="1" noTextEdit="1"/>
+                    </p:cNvSpPr>
+                    <p:nvPr/>
+                  </p:nvSpPr>
+                  <p:spPr>
+                    <a:xfrm>
+                      <a:off x="265691" y="1257097"/>
+                      <a:ext cx="2671717" cy="702119"/>
+                    </a:xfrm>
+                    <a:prstGeom prst="roundRect">
+                      <a:avLst/>
+                    </a:prstGeom>
+                    <a:blipFill>
+                      <a:blip r:embed="rId2"/>
+                      <a:stretch>
+                        <a:fillRect t="-3509" b="-10526"/>
+                      </a:stretch>
+                    </a:blipFill>
+                  </p:spPr>
+                  <p:txBody>
+                    <a:bodyPr/>
+                    <a:lstStyle/>
+                    <a:p>
+                      <a:r>
+                        <a:rPr lang="en-US">
+                          <a:noFill/>
+                        </a:rPr>
+                        <a:t> </a:t>
+                      </a:r>
+                    </a:p>
+                  </p:txBody>
+                </p:sp>
+              </mc:Fallback>
+            </mc:AlternateContent>
+            <mc:AlternateContent xmlns:mc="http://schemas.openxmlformats.org/markup-compatibility/2006" xmlns:a14="http://schemas.microsoft.com/office/drawing/2010/main">
+              <mc:Choice Requires="a14">
+                <p:sp>
+                  <p:nvSpPr>
+                    <p:cNvPr id="4" name="Rounded Rectangle 3">
+                      <a:extLst>
+                        <a:ext uri="{FF2B5EF4-FFF2-40B4-BE49-F238E27FC236}">
+                          <a16:creationId xmlns:a16="http://schemas.microsoft.com/office/drawing/2014/main" id="{1787D0AD-BE90-2A05-D977-5A1D097E2546}"/>
+                        </a:ext>
+                      </a:extLst>
+                    </p:cNvPr>
+                    <p:cNvSpPr/>
+                    <p:nvPr/>
+                  </p:nvSpPr>
+                  <p:spPr>
+                    <a:xfrm>
+                      <a:off x="265690" y="2229083"/>
+                      <a:ext cx="2671717" cy="702119"/>
+                    </a:xfrm>
+                    <a:prstGeom prst="roundRect">
+                      <a:avLst/>
+                    </a:prstGeom>
+                    <a:noFill/>
+                  </p:spPr>
+                  <p:style>
+                    <a:lnRef idx="2">
+                      <a:schemeClr val="accent1">
+                        <a:shade val="15000"/>
+                      </a:schemeClr>
+                    </a:lnRef>
+                    <a:fillRef idx="1">
+                      <a:schemeClr val="accent1"/>
+                    </a:fillRef>
+                    <a:effectRef idx="0">
+                      <a:schemeClr val="accent1"/>
+                    </a:effectRef>
+                    <a:fontRef idx="minor">
+                      <a:schemeClr val="lt1"/>
+                    </a:fontRef>
+                  </p:style>
+                  <p:txBody>
+                    <a:bodyPr rtlCol="0" anchor="ctr"/>
+                    <a:lstStyle/>
+                    <a:p>
+                      <a:pPr algn="ctr"/>
+                      <a:r>
+                        <a:rPr lang="en-US" sz="1400" dirty="0">
+                          <a:solidFill>
+                            <a:sysClr val="windowText" lastClr="000000"/>
+                          </a:solidFill>
+                        </a:rPr>
+                        <a:t>Age-varying cancer onset risk</a:t>
+                      </a:r>
+                    </a:p>
+                    <a:p>
+                      <a:pPr algn="ctr"/>
+                      <a:r>
+                        <a:rPr lang="en-US" sz="1400" dirty="0">
+                          <a:solidFill>
+                            <a:sysClr val="windowText" lastClr="000000"/>
+                          </a:solidFill>
+                        </a:rPr>
+                        <a:t>adjusted by</a:t>
+                      </a:r>
+                    </a:p>
+                    <a:p>
+                      <a:pPr algn="ctr"/>
+                      <a14:m>
+                        <m:oMath xmlns:m="http://schemas.openxmlformats.org/officeDocument/2006/math">
+                          <m:sSub>
+                            <m:sSubPr>
+                              <m:ctrlPr>
+                                <a:rPr lang="en-US" sz="1400" b="0" i="1" smtClean="0">
+                                  <a:solidFill>
+                                    <a:sysClr val="windowText" lastClr="000000"/>
+                                  </a:solidFill>
+                                  <a:latin typeface="Cambria Math" panose="02040503050406030204" pitchFamily="18" charset="0"/>
+                                </a:rPr>
+                              </m:ctrlPr>
+                            </m:sSubPr>
+                            <m:e>
+                              <m:r>
+                                <m:rPr>
+                                  <m:sty m:val="p"/>
+                                </m:rPr>
+                                <a:rPr lang="en-US" sz="1400" b="0" i="0" smtClean="0">
+                                  <a:solidFill>
+                                    <a:sysClr val="windowText" lastClr="000000"/>
+                                  </a:solidFill>
+                                  <a:latin typeface="Cambria Math" panose="02040503050406030204" pitchFamily="18" charset="0"/>
+                                </a:rPr>
+                                <m:t>RR</m:t>
+                              </m:r>
+                            </m:e>
+                            <m:sub>
+                              <m:r>
+                                <m:rPr>
+                                  <m:sty m:val="p"/>
+                                </m:rPr>
+                                <a:rPr lang="en-US" sz="1400" b="0" i="0" smtClean="0">
+                                  <a:solidFill>
+                                    <a:sysClr val="windowText" lastClr="000000"/>
+                                  </a:solidFill>
+                                  <a:latin typeface="Cambria Math" panose="02040503050406030204" pitchFamily="18" charset="0"/>
+                                </a:rPr>
+                                <m:t>PRS</m:t>
+                              </m:r>
+                            </m:sub>
+                          </m:sSub>
+                          <m:r>
+                            <a:rPr lang="en-US" sz="1400" b="0" i="1" smtClean="0">
+                              <a:solidFill>
+                                <a:sysClr val="windowText" lastClr="000000"/>
+                              </a:solidFill>
+                              <a:latin typeface="Cambria Math" panose="02040503050406030204" pitchFamily="18" charset="0"/>
+                            </a:rPr>
+                            <m:t>×</m:t>
+                          </m:r>
+                          <m:sSub>
+                            <m:sSubPr>
+                              <m:ctrlPr>
+                                <a:rPr lang="en-US" sz="1400" b="0" i="1" smtClean="0">
+                                  <a:solidFill>
+                                    <a:sysClr val="windowText" lastClr="000000"/>
+                                  </a:solidFill>
+                                  <a:latin typeface="Cambria Math" panose="02040503050406030204" pitchFamily="18" charset="0"/>
+                                </a:rPr>
+                              </m:ctrlPr>
+                            </m:sSubPr>
+                            <m:e>
+                              <m:r>
+                                <m:rPr>
+                                  <m:sty m:val="p"/>
+                                </m:rPr>
+                                <a:rPr lang="en-US" sz="1400" b="0" i="0" smtClean="0">
+                                  <a:solidFill>
+                                    <a:sysClr val="windowText" lastClr="000000"/>
+                                  </a:solidFill>
+                                  <a:latin typeface="Cambria Math" panose="02040503050406030204" pitchFamily="18" charset="0"/>
+                                </a:rPr>
+                                <m:t>RR</m:t>
+                              </m:r>
+                            </m:e>
+                            <m:sub>
+                              <m:r>
+                                <m:rPr>
+                                  <m:sty m:val="p"/>
+                                </m:rPr>
+                                <a:rPr lang="en-US" sz="1400" b="0" i="0" smtClean="0">
+                                  <a:solidFill>
+                                    <a:sysClr val="windowText" lastClr="000000"/>
+                                  </a:solidFill>
+                                  <a:latin typeface="Cambria Math" panose="02040503050406030204" pitchFamily="18" charset="0"/>
+                                </a:rPr>
+                                <m:t>FH</m:t>
+                              </m:r>
+                            </m:sub>
+                          </m:sSub>
+                        </m:oMath>
+                      </a14:m>
+                      <a:r>
+                        <a:rPr lang="en-US" sz="1400" dirty="0">
+                          <a:solidFill>
+                            <a:sysClr val="windowText" lastClr="000000"/>
+                          </a:solidFill>
+                        </a:rPr>
+                        <a:t> </a:t>
+                      </a:r>
+                    </a:p>
+                  </p:txBody>
+                </p:sp>
+              </mc:Choice>
+              <mc:Fallback xmlns="">
+                <p:sp>
+                  <p:nvSpPr>
+                    <p:cNvPr id="4" name="Rounded Rectangle 3">
+                      <a:extLst>
+                        <a:ext uri="{FF2B5EF4-FFF2-40B4-BE49-F238E27FC236}">
+                          <a16:creationId xmlns:a16="http://schemas.microsoft.com/office/drawing/2014/main" id="{1787D0AD-BE90-2A05-D977-5A1D097E2546}"/>
+                        </a:ext>
+                      </a:extLst>
+                    </p:cNvPr>
+                    <p:cNvSpPr>
+                      <a:spLocks noRot="1" noChangeAspect="1" noMove="1" noResize="1" noEditPoints="1" noAdjustHandles="1" noChangeArrowheads="1" noChangeShapeType="1" noTextEdit="1"/>
+                    </p:cNvSpPr>
+                    <p:nvPr/>
+                  </p:nvSpPr>
+                  <p:spPr>
+                    <a:xfrm>
+                      <a:off x="265690" y="2229083"/>
+                      <a:ext cx="2671717" cy="702119"/>
+                    </a:xfrm>
+                    <a:prstGeom prst="roundRect">
+                      <a:avLst/>
+                    </a:prstGeom>
+                    <a:blipFill>
+                      <a:blip r:embed="rId3"/>
+                      <a:stretch>
+                        <a:fillRect t="-1724"/>
+                      </a:stretch>
+                    </a:blipFill>
+                  </p:spPr>
+                  <p:txBody>
+                    <a:bodyPr/>
+                    <a:lstStyle/>
+                    <a:p>
+                      <a:r>
+                        <a:rPr lang="en-US">
+                          <a:noFill/>
+                        </a:rPr>
+                        <a:t> </a:t>
+                      </a:r>
+                    </a:p>
+                  </p:txBody>
+                </p:sp>
+              </mc:Fallback>
+            </mc:AlternateContent>
+            <p:cxnSp>
+              <p:nvCxnSpPr>
+                <p:cNvPr id="8" name="Straight Arrow Connector 7">
+                  <a:extLst>
+                    <a:ext uri="{FF2B5EF4-FFF2-40B4-BE49-F238E27FC236}">
+                      <a16:creationId xmlns:a16="http://schemas.microsoft.com/office/drawing/2014/main" id="{C714A17F-19A5-E8C5-0C3E-5484F1982020}"/>
+                    </a:ext>
+                  </a:extLst>
+                </p:cNvPr>
+                <p:cNvCxnSpPr>
+                  <a:cxnSpLocks/>
+                  <a:stCxn id="2" idx="2"/>
+                  <a:endCxn id="3" idx="0"/>
+                </p:cNvCxnSpPr>
+                <p:nvPr/>
+              </p:nvCxnSpPr>
+              <p:spPr>
+                <a:xfrm>
+                  <a:off x="1601550" y="987229"/>
+                  <a:ext cx="0" cy="269868"/>
+                </a:xfrm>
+                <a:prstGeom prst="straightConnector1">
+                  <a:avLst/>
+                </a:prstGeom>
+                <a:ln>
+                  <a:solidFill>
+                    <a:schemeClr val="tx1"/>
+                  </a:solidFill>
+                  <a:tailEnd type="triangle"/>
+                </a:ln>
+              </p:spPr>
+              <p:style>
+                <a:lnRef idx="2">
+                  <a:schemeClr val="accent1"/>
+                </a:lnRef>
+                <a:fillRef idx="0">
+                  <a:schemeClr val="accent1"/>
+                </a:fillRef>
+                <a:effectRef idx="1">
+                  <a:schemeClr val="accent1"/>
+                </a:effectRef>
+                <a:fontRef idx="minor">
+                  <a:schemeClr val="tx1"/>
+                </a:fontRef>
+              </p:style>
+            </p:cxnSp>
+            <p:cxnSp>
+              <p:nvCxnSpPr>
+                <p:cNvPr id="10" name="Straight Arrow Connector 9">
+                  <a:extLst>
+                    <a:ext uri="{FF2B5EF4-FFF2-40B4-BE49-F238E27FC236}">
+                      <a16:creationId xmlns:a16="http://schemas.microsoft.com/office/drawing/2014/main" id="{F9210724-839D-2F82-F99B-89614F75B5C5}"/>
+                    </a:ext>
+                  </a:extLst>
+                </p:cNvPr>
+                <p:cNvCxnSpPr>
+                  <a:cxnSpLocks/>
+                  <a:stCxn id="3" idx="2"/>
+                  <a:endCxn id="4" idx="0"/>
+                </p:cNvCxnSpPr>
+                <p:nvPr/>
+              </p:nvCxnSpPr>
+              <p:spPr>
+                <a:xfrm flipH="1">
+                  <a:off x="1601549" y="1959216"/>
+                  <a:ext cx="1" cy="269867"/>
+                </a:xfrm>
+                <a:prstGeom prst="straightConnector1">
+                  <a:avLst/>
+                </a:prstGeom>
+                <a:ln>
+                  <a:solidFill>
+                    <a:schemeClr val="tx1"/>
+                  </a:solidFill>
+                  <a:tailEnd type="triangle"/>
+                </a:ln>
+              </p:spPr>
+              <p:style>
+                <a:lnRef idx="2">
+                  <a:schemeClr val="accent1"/>
+                </a:lnRef>
+                <a:fillRef idx="0">
+                  <a:schemeClr val="accent1"/>
+                </a:fillRef>
+                <a:effectRef idx="1">
+                  <a:schemeClr val="accent1"/>
+                </a:effectRef>
+                <a:fontRef idx="minor">
+                  <a:schemeClr val="tx1"/>
+                </a:fontRef>
+              </p:style>
+            </p:cxnSp>
+          </p:grpSp>
+          <p:grpSp>
+            <p:nvGrpSpPr>
+              <p:cNvPr id="1103" name="Group 1102">
+                <a:extLst>
+                  <a:ext uri="{FF2B5EF4-FFF2-40B4-BE49-F238E27FC236}">
+                    <a16:creationId xmlns:a16="http://schemas.microsoft.com/office/drawing/2014/main" id="{675878EA-FE56-47B7-91CB-C773C30EF0DF}"/>
+                  </a:ext>
+                </a:extLst>
+              </p:cNvPr>
+              <p:cNvGrpSpPr/>
+              <p:nvPr/>
+            </p:nvGrpSpPr>
+            <p:grpSpPr>
+              <a:xfrm>
+                <a:off x="-11593185" y="-1520507"/>
+                <a:ext cx="4222684" cy="5927090"/>
+                <a:chOff x="3173432" y="279501"/>
+                <a:chExt cx="4222684" cy="5927090"/>
+              </a:xfrm>
+            </p:grpSpPr>
+            <p:sp>
+              <p:nvSpPr>
+                <p:cNvPr id="13" name="Rounded Rectangle 12">
+                  <a:extLst>
+                    <a:ext uri="{FF2B5EF4-FFF2-40B4-BE49-F238E27FC236}">
+                      <a16:creationId xmlns:a16="http://schemas.microsoft.com/office/drawing/2014/main" id="{D622B1AD-9B46-6799-45D6-CB65D18B7C5F}"/>
+                    </a:ext>
+                  </a:extLst>
+                </p:cNvPr>
+                <p:cNvSpPr/>
+                <p:nvPr/>
+              </p:nvSpPr>
+              <p:spPr>
+                <a:xfrm>
+                  <a:off x="3173432" y="285110"/>
+                  <a:ext cx="4222684" cy="5921481"/>
+                </a:xfrm>
+                <a:prstGeom prst="roundRect">
+                  <a:avLst>
+                    <a:gd name="adj" fmla="val 5023"/>
+                  </a:avLst>
+                </a:prstGeom>
+                <a:noFill/>
+              </p:spPr>
+              <p:style>
+                <a:lnRef idx="2">
+                  <a:schemeClr val="accent1">
+                    <a:shade val="15000"/>
+                  </a:schemeClr>
+                </a:lnRef>
+                <a:fillRef idx="1">
+                  <a:schemeClr val="accent1"/>
+                </a:fillRef>
+                <a:effectRef idx="0">
+                  <a:schemeClr val="accent1"/>
+                </a:effectRef>
+                <a:fontRef idx="minor">
+                  <a:schemeClr val="lt1"/>
+                </a:fontRef>
+              </p:style>
+              <p:txBody>
+                <a:bodyPr rtlCol="0" anchor="ctr"/>
+                <a:lstStyle/>
+                <a:p>
+                  <a:pPr algn="ctr"/>
+                  <a:endParaRPr lang="en-US" sz="1600" dirty="0">
+                    <a:solidFill>
+                      <a:sysClr val="windowText" lastClr="000000"/>
+                    </a:solidFill>
+                  </a:endParaRPr>
+                </a:p>
+              </p:txBody>
+            </p:sp>
+            <p:grpSp>
+              <p:nvGrpSpPr>
+                <p:cNvPr id="33" name="Group 32">
+                  <a:extLst>
+                    <a:ext uri="{FF2B5EF4-FFF2-40B4-BE49-F238E27FC236}">
+                      <a16:creationId xmlns:a16="http://schemas.microsoft.com/office/drawing/2014/main" id="{A488D069-73D5-7BBF-C375-13C08742F11B}"/>
+                    </a:ext>
+                  </a:extLst>
+                </p:cNvPr>
+                <p:cNvGrpSpPr/>
+                <p:nvPr/>
+              </p:nvGrpSpPr>
+              <p:grpSpPr>
+                <a:xfrm>
+                  <a:off x="3460698" y="529525"/>
+                  <a:ext cx="900910" cy="1585183"/>
+                  <a:chOff x="3460698" y="529525"/>
+                  <a:chExt cx="900910" cy="1585183"/>
+                </a:xfrm>
+              </p:grpSpPr>
+              <p:sp>
+                <p:nvSpPr>
+                  <p:cNvPr id="14" name="Rounded Rectangle 13">
+                    <a:extLst>
+                      <a:ext uri="{FF2B5EF4-FFF2-40B4-BE49-F238E27FC236}">
+                        <a16:creationId xmlns:a16="http://schemas.microsoft.com/office/drawing/2014/main" id="{CC9558EE-844B-5745-E378-E21A16DD23DE}"/>
+                      </a:ext>
+                    </a:extLst>
+                  </p:cNvPr>
+                  <p:cNvSpPr/>
+                  <p:nvPr/>
+                </p:nvSpPr>
+                <p:spPr>
+                  <a:xfrm>
+                    <a:off x="3460698" y="529525"/>
+                    <a:ext cx="900910" cy="288953"/>
+                  </a:xfrm>
+                  <a:prstGeom prst="roundRect">
+                    <a:avLst/>
+                  </a:prstGeom>
+                  <a:noFill/>
+                </p:spPr>
+                <p:style>
+                  <a:lnRef idx="2">
+                    <a:schemeClr val="accent1">
+                      <a:shade val="15000"/>
+                    </a:schemeClr>
+                  </a:lnRef>
+                  <a:fillRef idx="1">
+                    <a:schemeClr val="accent1"/>
+                  </a:fillRef>
+                  <a:effectRef idx="0">
+                    <a:schemeClr val="accent1"/>
+                  </a:effectRef>
+                  <a:fontRef idx="minor">
+                    <a:schemeClr val="lt1"/>
+                  </a:fontRef>
+                </p:style>
+                <p:txBody>
+                  <a:bodyPr rtlCol="0" anchor="ctr"/>
+                  <a:lstStyle/>
+                  <a:p>
+                    <a:pPr algn="ctr"/>
+                    <a:r>
+                      <a:rPr lang="en-US" sz="1600" dirty="0">
+                        <a:solidFill>
+                          <a:sysClr val="windowText" lastClr="000000"/>
+                        </a:solidFill>
+                      </a:rPr>
+                      <a:t>T1, G&lt;7</a:t>
+                    </a:r>
+                  </a:p>
+                </p:txBody>
+              </p:sp>
+              <p:sp>
+                <p:nvSpPr>
+                  <p:cNvPr id="15" name="Rounded Rectangle 14">
+                    <a:extLst>
+                      <a:ext uri="{FF2B5EF4-FFF2-40B4-BE49-F238E27FC236}">
+                        <a16:creationId xmlns:a16="http://schemas.microsoft.com/office/drawing/2014/main" id="{DAD0F0F9-EA7D-4C01-2CD5-933A831E95D6}"/>
+                      </a:ext>
+                    </a:extLst>
+                  </p:cNvPr>
+                  <p:cNvSpPr/>
+                  <p:nvPr/>
+                </p:nvSpPr>
+                <p:spPr>
+                  <a:xfrm>
+                    <a:off x="3460698" y="1181935"/>
+                    <a:ext cx="900910" cy="288953"/>
+                  </a:xfrm>
+                  <a:prstGeom prst="roundRect">
+                    <a:avLst/>
+                  </a:prstGeom>
+                  <a:noFill/>
+                </p:spPr>
+                <p:style>
+                  <a:lnRef idx="2">
+                    <a:schemeClr val="accent1">
+                      <a:shade val="15000"/>
+                    </a:schemeClr>
+                  </a:lnRef>
+                  <a:fillRef idx="1">
+                    <a:schemeClr val="accent1"/>
+                  </a:fillRef>
+                  <a:effectRef idx="0">
+                    <a:schemeClr val="accent1"/>
+                  </a:effectRef>
+                  <a:fontRef idx="minor">
+                    <a:schemeClr val="lt1"/>
+                  </a:fontRef>
+                </p:style>
+                <p:txBody>
+                  <a:bodyPr rtlCol="0" anchor="ctr"/>
+                  <a:lstStyle/>
+                  <a:p>
+                    <a:pPr algn="ctr"/>
+                    <a:r>
+                      <a:rPr lang="en-US" sz="1600" dirty="0">
+                        <a:solidFill>
+                          <a:sysClr val="windowText" lastClr="000000"/>
+                        </a:solidFill>
+                      </a:rPr>
+                      <a:t>T1, G=7</a:t>
+                    </a:r>
+                  </a:p>
+                </p:txBody>
+              </p:sp>
+              <p:sp>
+                <p:nvSpPr>
+                  <p:cNvPr id="16" name="Rounded Rectangle 15">
+                    <a:extLst>
+                      <a:ext uri="{FF2B5EF4-FFF2-40B4-BE49-F238E27FC236}">
+                        <a16:creationId xmlns:a16="http://schemas.microsoft.com/office/drawing/2014/main" id="{EC29FDAF-9131-C9DA-0B1E-12064D383AB5}"/>
+                      </a:ext>
+                    </a:extLst>
+                  </p:cNvPr>
+                  <p:cNvSpPr/>
+                  <p:nvPr/>
+                </p:nvSpPr>
+                <p:spPr>
+                  <a:xfrm>
+                    <a:off x="3460698" y="1825755"/>
+                    <a:ext cx="900910" cy="288953"/>
+                  </a:xfrm>
+                  <a:prstGeom prst="roundRect">
+                    <a:avLst/>
+                  </a:prstGeom>
+                  <a:noFill/>
+                </p:spPr>
+                <p:style>
+                  <a:lnRef idx="2">
+                    <a:schemeClr val="accent1">
+                      <a:shade val="15000"/>
+                    </a:schemeClr>
+                  </a:lnRef>
+                  <a:fillRef idx="1">
+                    <a:schemeClr val="accent1"/>
+                  </a:fillRef>
+                  <a:effectRef idx="0">
+                    <a:schemeClr val="accent1"/>
+                  </a:effectRef>
+                  <a:fontRef idx="minor">
+                    <a:schemeClr val="lt1"/>
+                  </a:fontRef>
+                </p:style>
+                <p:txBody>
+                  <a:bodyPr rtlCol="0" anchor="ctr"/>
+                  <a:lstStyle/>
+                  <a:p>
+                    <a:pPr algn="ctr"/>
+                    <a:r>
+                      <a:rPr lang="en-US" sz="1600" dirty="0">
+                        <a:solidFill>
+                          <a:sysClr val="windowText" lastClr="000000"/>
+                        </a:solidFill>
+                      </a:rPr>
+                      <a:t>T1, G&gt;7</a:t>
+                    </a:r>
+                  </a:p>
+                </p:txBody>
+              </p:sp>
+              <p:cxnSp>
+                <p:nvCxnSpPr>
+                  <p:cNvPr id="17" name="Straight Arrow Connector 16">
+                    <a:extLst>
+                      <a:ext uri="{FF2B5EF4-FFF2-40B4-BE49-F238E27FC236}">
+                        <a16:creationId xmlns:a16="http://schemas.microsoft.com/office/drawing/2014/main" id="{C87541F7-4080-754C-9E19-32D0D1F0E077}"/>
+                      </a:ext>
+                    </a:extLst>
+                  </p:cNvPr>
+                  <p:cNvCxnSpPr>
+                    <a:cxnSpLocks/>
+                    <a:stCxn id="14" idx="2"/>
+                    <a:endCxn id="15" idx="0"/>
+                  </p:cNvCxnSpPr>
+                  <p:nvPr/>
+                </p:nvCxnSpPr>
+                <p:spPr>
+                  <a:xfrm>
+                    <a:off x="3911153" y="818478"/>
+                    <a:ext cx="0" cy="363457"/>
+                  </a:xfrm>
+                  <a:prstGeom prst="straightConnector1">
+                    <a:avLst/>
+                  </a:prstGeom>
+                  <a:ln>
+                    <a:solidFill>
+                      <a:schemeClr val="tx1"/>
+                    </a:solidFill>
+                    <a:tailEnd type="triangle"/>
+                  </a:ln>
+                </p:spPr>
+                <p:style>
+                  <a:lnRef idx="2">
+                    <a:schemeClr val="accent1"/>
+                  </a:lnRef>
+                  <a:fillRef idx="0">
+                    <a:schemeClr val="accent1"/>
+                  </a:fillRef>
+                  <a:effectRef idx="1">
+                    <a:schemeClr val="accent1"/>
+                  </a:effectRef>
+                  <a:fontRef idx="minor">
+                    <a:schemeClr val="tx1"/>
+                  </a:fontRef>
+                </p:style>
+              </p:cxnSp>
+              <p:cxnSp>
+                <p:nvCxnSpPr>
+                  <p:cNvPr id="20" name="Straight Arrow Connector 19">
+                    <a:extLst>
+                      <a:ext uri="{FF2B5EF4-FFF2-40B4-BE49-F238E27FC236}">
+                        <a16:creationId xmlns:a16="http://schemas.microsoft.com/office/drawing/2014/main" id="{CCE0143B-0459-731E-EEC8-5538A3AAA2BC}"/>
+                      </a:ext>
+                    </a:extLst>
+                  </p:cNvPr>
+                  <p:cNvCxnSpPr>
+                    <a:cxnSpLocks/>
+                    <a:stCxn id="15" idx="2"/>
+                    <a:endCxn id="16" idx="0"/>
+                  </p:cNvCxnSpPr>
+                  <p:nvPr/>
+                </p:nvCxnSpPr>
+                <p:spPr>
+                  <a:xfrm>
+                    <a:off x="3911153" y="1470888"/>
+                    <a:ext cx="0" cy="354867"/>
+                  </a:xfrm>
+                  <a:prstGeom prst="straightConnector1">
+                    <a:avLst/>
+                  </a:prstGeom>
+                  <a:ln>
+                    <a:solidFill>
+                      <a:schemeClr val="tx1"/>
+                    </a:solidFill>
+                    <a:tailEnd type="triangle"/>
+                  </a:ln>
+                </p:spPr>
+                <p:style>
+                  <a:lnRef idx="2">
+                    <a:schemeClr val="accent1"/>
+                  </a:lnRef>
+                  <a:fillRef idx="0">
+                    <a:schemeClr val="accent1"/>
+                  </a:fillRef>
+                  <a:effectRef idx="1">
+                    <a:schemeClr val="accent1"/>
+                  </a:effectRef>
+                  <a:fontRef idx="minor">
+                    <a:schemeClr val="tx1"/>
+                  </a:fontRef>
+                </p:style>
+              </p:cxnSp>
+            </p:grpSp>
+            <p:grpSp>
+              <p:nvGrpSpPr>
+                <p:cNvPr id="34" name="Group 33">
+                  <a:extLst>
+                    <a:ext uri="{FF2B5EF4-FFF2-40B4-BE49-F238E27FC236}">
+                      <a16:creationId xmlns:a16="http://schemas.microsoft.com/office/drawing/2014/main" id="{F7515D9B-DCF7-86B9-E9AE-E8B98E859F53}"/>
+                    </a:ext>
+                  </a:extLst>
+                </p:cNvPr>
+                <p:cNvGrpSpPr/>
+                <p:nvPr/>
+              </p:nvGrpSpPr>
+              <p:grpSpPr>
+                <a:xfrm>
+                  <a:off x="4859270" y="2473872"/>
+                  <a:ext cx="900910" cy="1585185"/>
+                  <a:chOff x="4883548" y="2389930"/>
+                  <a:chExt cx="900910" cy="1585185"/>
+                </a:xfrm>
+              </p:grpSpPr>
+              <p:sp>
+                <p:nvSpPr>
+                  <p:cNvPr id="23" name="Rounded Rectangle 22">
+                    <a:extLst>
+                      <a:ext uri="{FF2B5EF4-FFF2-40B4-BE49-F238E27FC236}">
+                        <a16:creationId xmlns:a16="http://schemas.microsoft.com/office/drawing/2014/main" id="{04FB3AB1-C3B2-B007-BE57-4FB289307CF4}"/>
+                      </a:ext>
+                    </a:extLst>
+                  </p:cNvPr>
+                  <p:cNvSpPr/>
+                  <p:nvPr/>
+                </p:nvSpPr>
+                <p:spPr>
+                  <a:xfrm>
+                    <a:off x="4883548" y="2389930"/>
+                    <a:ext cx="900910" cy="288953"/>
+                  </a:xfrm>
+                  <a:prstGeom prst="roundRect">
+                    <a:avLst/>
+                  </a:prstGeom>
+                  <a:noFill/>
+                </p:spPr>
+                <p:style>
+                  <a:lnRef idx="2">
+                    <a:schemeClr val="accent1">
+                      <a:shade val="15000"/>
+                    </a:schemeClr>
+                  </a:lnRef>
+                  <a:fillRef idx="1">
+                    <a:schemeClr val="accent1"/>
+                  </a:fillRef>
+                  <a:effectRef idx="0">
+                    <a:schemeClr val="accent1"/>
+                  </a:effectRef>
+                  <a:fontRef idx="minor">
+                    <a:schemeClr val="lt1"/>
+                  </a:fontRef>
+                </p:style>
+                <p:txBody>
+                  <a:bodyPr rtlCol="0" anchor="ctr"/>
+                  <a:lstStyle/>
+                  <a:p>
+                    <a:pPr algn="ctr"/>
+                    <a:r>
+                      <a:rPr lang="en-US" sz="1600" dirty="0">
+                        <a:solidFill>
+                          <a:sysClr val="windowText" lastClr="000000"/>
+                        </a:solidFill>
+                      </a:rPr>
+                      <a:t>T2, G&lt;7</a:t>
+                    </a:r>
+                  </a:p>
+                </p:txBody>
+              </p:sp>
+              <p:sp>
+                <p:nvSpPr>
+                  <p:cNvPr id="24" name="Rounded Rectangle 23">
+                    <a:extLst>
+                      <a:ext uri="{FF2B5EF4-FFF2-40B4-BE49-F238E27FC236}">
+                        <a16:creationId xmlns:a16="http://schemas.microsoft.com/office/drawing/2014/main" id="{D11F1C7F-F38D-A9B7-DCCB-3C388BA6F038}"/>
+                      </a:ext>
+                    </a:extLst>
+                  </p:cNvPr>
+                  <p:cNvSpPr/>
+                  <p:nvPr/>
+                </p:nvSpPr>
+                <p:spPr>
+                  <a:xfrm>
+                    <a:off x="4883548" y="3038046"/>
+                    <a:ext cx="900910" cy="288953"/>
+                  </a:xfrm>
+                  <a:prstGeom prst="roundRect">
+                    <a:avLst/>
+                  </a:prstGeom>
+                  <a:noFill/>
+                </p:spPr>
+                <p:style>
+                  <a:lnRef idx="2">
+                    <a:schemeClr val="accent1">
+                      <a:shade val="15000"/>
+                    </a:schemeClr>
+                  </a:lnRef>
+                  <a:fillRef idx="1">
+                    <a:schemeClr val="accent1"/>
+                  </a:fillRef>
+                  <a:effectRef idx="0">
+                    <a:schemeClr val="accent1"/>
+                  </a:effectRef>
+                  <a:fontRef idx="minor">
+                    <a:schemeClr val="lt1"/>
+                  </a:fontRef>
+                </p:style>
+                <p:txBody>
+                  <a:bodyPr rtlCol="0" anchor="ctr"/>
+                  <a:lstStyle/>
+                  <a:p>
+                    <a:pPr algn="ctr"/>
+                    <a:r>
+                      <a:rPr lang="en-US" sz="1600" dirty="0">
+                        <a:solidFill>
+                          <a:sysClr val="windowText" lastClr="000000"/>
+                        </a:solidFill>
+                      </a:rPr>
+                      <a:t>T2, G=7</a:t>
+                    </a:r>
+                  </a:p>
+                </p:txBody>
+              </p:sp>
+              <p:sp>
+                <p:nvSpPr>
+                  <p:cNvPr id="25" name="Rounded Rectangle 24">
+                    <a:extLst>
+                      <a:ext uri="{FF2B5EF4-FFF2-40B4-BE49-F238E27FC236}">
+                        <a16:creationId xmlns:a16="http://schemas.microsoft.com/office/drawing/2014/main" id="{8CE5CF92-0150-78AC-507D-6E5A0C776A3C}"/>
+                      </a:ext>
+                    </a:extLst>
+                  </p:cNvPr>
+                  <p:cNvSpPr/>
+                  <p:nvPr/>
+                </p:nvSpPr>
+                <p:spPr>
+                  <a:xfrm>
+                    <a:off x="4883548" y="3686162"/>
+                    <a:ext cx="900910" cy="288953"/>
+                  </a:xfrm>
+                  <a:prstGeom prst="roundRect">
+                    <a:avLst/>
+                  </a:prstGeom>
+                  <a:noFill/>
+                </p:spPr>
+                <p:style>
+                  <a:lnRef idx="2">
+                    <a:schemeClr val="accent1">
+                      <a:shade val="15000"/>
+                    </a:schemeClr>
+                  </a:lnRef>
+                  <a:fillRef idx="1">
+                    <a:schemeClr val="accent1"/>
+                  </a:fillRef>
+                  <a:effectRef idx="0">
+                    <a:schemeClr val="accent1"/>
+                  </a:effectRef>
+                  <a:fontRef idx="minor">
+                    <a:schemeClr val="lt1"/>
+                  </a:fontRef>
+                </p:style>
+                <p:txBody>
+                  <a:bodyPr rtlCol="0" anchor="ctr"/>
+                  <a:lstStyle/>
+                  <a:p>
+                    <a:pPr algn="ctr"/>
+                    <a:r>
+                      <a:rPr lang="en-US" sz="1600" dirty="0">
+                        <a:solidFill>
+                          <a:sysClr val="windowText" lastClr="000000"/>
+                        </a:solidFill>
+                      </a:rPr>
+                      <a:t>T2, G&gt;7</a:t>
+                    </a:r>
+                  </a:p>
+                </p:txBody>
+              </p:sp>
+              <p:cxnSp>
+                <p:nvCxnSpPr>
+                  <p:cNvPr id="26" name="Straight Arrow Connector 25">
+                    <a:extLst>
+                      <a:ext uri="{FF2B5EF4-FFF2-40B4-BE49-F238E27FC236}">
+                        <a16:creationId xmlns:a16="http://schemas.microsoft.com/office/drawing/2014/main" id="{19F8CDF5-70B7-0C95-C807-FD9FFEADA793}"/>
+                      </a:ext>
+                    </a:extLst>
+                  </p:cNvPr>
+                  <p:cNvCxnSpPr>
+                    <a:cxnSpLocks/>
+                    <a:stCxn id="23" idx="2"/>
+                    <a:endCxn id="24" idx="0"/>
+                  </p:cNvCxnSpPr>
+                  <p:nvPr/>
+                </p:nvCxnSpPr>
+                <p:spPr>
+                  <a:xfrm>
+                    <a:off x="5334003" y="2678883"/>
+                    <a:ext cx="0" cy="359163"/>
+                  </a:xfrm>
+                  <a:prstGeom prst="straightConnector1">
+                    <a:avLst/>
+                  </a:prstGeom>
+                  <a:ln>
+                    <a:solidFill>
+                      <a:schemeClr val="tx1"/>
+                    </a:solidFill>
+                    <a:tailEnd type="triangle"/>
+                  </a:ln>
+                </p:spPr>
+                <p:style>
+                  <a:lnRef idx="2">
+                    <a:schemeClr val="accent1"/>
+                  </a:lnRef>
+                  <a:fillRef idx="0">
+                    <a:schemeClr val="accent1"/>
+                  </a:fillRef>
+                  <a:effectRef idx="1">
+                    <a:schemeClr val="accent1"/>
+                  </a:effectRef>
+                  <a:fontRef idx="minor">
+                    <a:schemeClr val="tx1"/>
+                  </a:fontRef>
+                </p:style>
+              </p:cxnSp>
+              <p:cxnSp>
+                <p:nvCxnSpPr>
+                  <p:cNvPr id="27" name="Straight Arrow Connector 26">
+                    <a:extLst>
+                      <a:ext uri="{FF2B5EF4-FFF2-40B4-BE49-F238E27FC236}">
+                        <a16:creationId xmlns:a16="http://schemas.microsoft.com/office/drawing/2014/main" id="{5391CBA5-4A4B-46F8-AC7D-4FED0F46C04E}"/>
+                      </a:ext>
+                    </a:extLst>
+                  </p:cNvPr>
+                  <p:cNvCxnSpPr>
+                    <a:cxnSpLocks/>
+                    <a:stCxn id="24" idx="2"/>
+                    <a:endCxn id="25" idx="0"/>
+                  </p:cNvCxnSpPr>
+                  <p:nvPr/>
+                </p:nvCxnSpPr>
+                <p:spPr>
+                  <a:xfrm>
+                    <a:off x="5334003" y="3326999"/>
+                    <a:ext cx="0" cy="359163"/>
+                  </a:xfrm>
+                  <a:prstGeom prst="straightConnector1">
+                    <a:avLst/>
+                  </a:prstGeom>
+                  <a:ln>
+                    <a:solidFill>
+                      <a:schemeClr val="tx1"/>
+                    </a:solidFill>
+                    <a:tailEnd type="triangle"/>
+                  </a:ln>
+                </p:spPr>
+                <p:style>
+                  <a:lnRef idx="2">
+                    <a:schemeClr val="accent1"/>
+                  </a:lnRef>
+                  <a:fillRef idx="0">
+                    <a:schemeClr val="accent1"/>
+                  </a:fillRef>
+                  <a:effectRef idx="1">
+                    <a:schemeClr val="accent1"/>
+                  </a:effectRef>
+                  <a:fontRef idx="minor">
+                    <a:schemeClr val="tx1"/>
+                  </a:fontRef>
+                </p:style>
+              </p:cxnSp>
+            </p:grpSp>
+            <p:grpSp>
+              <p:nvGrpSpPr>
+                <p:cNvPr id="35" name="Group 34">
+                  <a:extLst>
+                    <a:ext uri="{FF2B5EF4-FFF2-40B4-BE49-F238E27FC236}">
+                      <a16:creationId xmlns:a16="http://schemas.microsoft.com/office/drawing/2014/main" id="{E869A8CA-F068-6168-CADF-166B9DE1CA3D}"/>
+                    </a:ext>
+                  </a:extLst>
+                </p:cNvPr>
+                <p:cNvGrpSpPr/>
+                <p:nvPr/>
+              </p:nvGrpSpPr>
+              <p:grpSpPr>
+                <a:xfrm>
+                  <a:off x="6257845" y="4418220"/>
+                  <a:ext cx="900910" cy="1585187"/>
+                  <a:chOff x="6257845" y="4418220"/>
+                  <a:chExt cx="900910" cy="1585187"/>
+                </a:xfrm>
+              </p:grpSpPr>
+              <p:sp>
+                <p:nvSpPr>
+                  <p:cNvPr id="28" name="Rounded Rectangle 27">
+                    <a:extLst>
+                      <a:ext uri="{FF2B5EF4-FFF2-40B4-BE49-F238E27FC236}">
+                        <a16:creationId xmlns:a16="http://schemas.microsoft.com/office/drawing/2014/main" id="{019B5FEE-0C7D-9178-7753-B0078A89D202}"/>
+                      </a:ext>
+                    </a:extLst>
+                  </p:cNvPr>
+                  <p:cNvSpPr/>
+                  <p:nvPr/>
+                </p:nvSpPr>
+                <p:spPr>
+                  <a:xfrm>
+                    <a:off x="6257845" y="4418220"/>
+                    <a:ext cx="900910" cy="288953"/>
+                  </a:xfrm>
+                  <a:prstGeom prst="roundRect">
+                    <a:avLst/>
+                  </a:prstGeom>
+                  <a:noFill/>
+                </p:spPr>
+                <p:style>
+                  <a:lnRef idx="2">
+                    <a:schemeClr val="accent1">
+                      <a:shade val="15000"/>
+                    </a:schemeClr>
+                  </a:lnRef>
+                  <a:fillRef idx="1">
+                    <a:schemeClr val="accent1"/>
+                  </a:fillRef>
+                  <a:effectRef idx="0">
+                    <a:schemeClr val="accent1"/>
+                  </a:effectRef>
+                  <a:fontRef idx="minor">
+                    <a:schemeClr val="lt1"/>
+                  </a:fontRef>
+                </p:style>
+                <p:txBody>
+                  <a:bodyPr rtlCol="0" anchor="ctr"/>
+                  <a:lstStyle/>
+                  <a:p>
+                    <a:pPr algn="ctr"/>
+                    <a:r>
+                      <a:rPr lang="en-US" sz="1600" dirty="0">
+                        <a:solidFill>
+                          <a:sysClr val="windowText" lastClr="000000"/>
+                        </a:solidFill>
+                      </a:rPr>
+                      <a:t>T3, G&lt;7</a:t>
+                    </a:r>
+                  </a:p>
+                </p:txBody>
+              </p:sp>
+              <p:sp>
+                <p:nvSpPr>
+                  <p:cNvPr id="29" name="Rounded Rectangle 28">
+                    <a:extLst>
+                      <a:ext uri="{FF2B5EF4-FFF2-40B4-BE49-F238E27FC236}">
+                        <a16:creationId xmlns:a16="http://schemas.microsoft.com/office/drawing/2014/main" id="{821377DB-D02F-E0AE-18C8-EF403FF01DB3}"/>
+                      </a:ext>
+                    </a:extLst>
+                  </p:cNvPr>
+                  <p:cNvSpPr/>
+                  <p:nvPr/>
+                </p:nvSpPr>
+                <p:spPr>
+                  <a:xfrm>
+                    <a:off x="6257845" y="5062379"/>
+                    <a:ext cx="900910" cy="288953"/>
+                  </a:xfrm>
+                  <a:prstGeom prst="roundRect">
+                    <a:avLst/>
+                  </a:prstGeom>
+                  <a:noFill/>
+                </p:spPr>
+                <p:style>
+                  <a:lnRef idx="2">
+                    <a:schemeClr val="accent1">
+                      <a:shade val="15000"/>
+                    </a:schemeClr>
+                  </a:lnRef>
+                  <a:fillRef idx="1">
+                    <a:schemeClr val="accent1"/>
+                  </a:fillRef>
+                  <a:effectRef idx="0">
+                    <a:schemeClr val="accent1"/>
+                  </a:effectRef>
+                  <a:fontRef idx="minor">
+                    <a:schemeClr val="lt1"/>
+                  </a:fontRef>
+                </p:style>
+                <p:txBody>
+                  <a:bodyPr rtlCol="0" anchor="ctr"/>
+                  <a:lstStyle/>
+                  <a:p>
+                    <a:pPr algn="ctr"/>
+                    <a:r>
+                      <a:rPr lang="en-US" sz="1600" dirty="0">
+                        <a:solidFill>
+                          <a:sysClr val="windowText" lastClr="000000"/>
+                        </a:solidFill>
+                      </a:rPr>
+                      <a:t>T3, G=7</a:t>
+                    </a:r>
+                  </a:p>
+                </p:txBody>
+              </p:sp>
+              <p:sp>
+                <p:nvSpPr>
+                  <p:cNvPr id="30" name="Rounded Rectangle 29">
+                    <a:extLst>
+                      <a:ext uri="{FF2B5EF4-FFF2-40B4-BE49-F238E27FC236}">
+                        <a16:creationId xmlns:a16="http://schemas.microsoft.com/office/drawing/2014/main" id="{6F29EE46-61A8-EAB3-69D8-0D2CD764C676}"/>
+                      </a:ext>
+                    </a:extLst>
+                  </p:cNvPr>
+                  <p:cNvSpPr/>
+                  <p:nvPr/>
+                </p:nvSpPr>
+                <p:spPr>
+                  <a:xfrm>
+                    <a:off x="6257845" y="5714454"/>
+                    <a:ext cx="900910" cy="288953"/>
+                  </a:xfrm>
+                  <a:prstGeom prst="roundRect">
+                    <a:avLst/>
+                  </a:prstGeom>
+                  <a:noFill/>
+                </p:spPr>
+                <p:style>
+                  <a:lnRef idx="2">
+                    <a:schemeClr val="accent1">
+                      <a:shade val="15000"/>
+                    </a:schemeClr>
+                  </a:lnRef>
+                  <a:fillRef idx="1">
+                    <a:schemeClr val="accent1"/>
+                  </a:fillRef>
+                  <a:effectRef idx="0">
+                    <a:schemeClr val="accent1"/>
+                  </a:effectRef>
+                  <a:fontRef idx="minor">
+                    <a:schemeClr val="lt1"/>
+                  </a:fontRef>
+                </p:style>
+                <p:txBody>
+                  <a:bodyPr rtlCol="0" anchor="ctr"/>
+                  <a:lstStyle/>
+                  <a:p>
+                    <a:pPr algn="ctr"/>
+                    <a:r>
+                      <a:rPr lang="en-US" sz="1600" dirty="0">
+                        <a:solidFill>
+                          <a:sysClr val="windowText" lastClr="000000"/>
+                        </a:solidFill>
+                      </a:rPr>
+                      <a:t>T3, G&gt;7</a:t>
+                    </a:r>
+                  </a:p>
+                </p:txBody>
+              </p:sp>
+              <p:cxnSp>
+                <p:nvCxnSpPr>
+                  <p:cNvPr id="31" name="Straight Arrow Connector 30">
+                    <a:extLst>
+                      <a:ext uri="{FF2B5EF4-FFF2-40B4-BE49-F238E27FC236}">
+                        <a16:creationId xmlns:a16="http://schemas.microsoft.com/office/drawing/2014/main" id="{445D77D2-488D-1A07-B55E-31C30C70F9F9}"/>
+                      </a:ext>
+                    </a:extLst>
+                  </p:cNvPr>
+                  <p:cNvCxnSpPr>
+                    <a:cxnSpLocks/>
+                    <a:stCxn id="28" idx="2"/>
+                    <a:endCxn id="29" idx="0"/>
+                  </p:cNvCxnSpPr>
+                  <p:nvPr/>
+                </p:nvCxnSpPr>
+                <p:spPr>
+                  <a:xfrm>
+                    <a:off x="6708300" y="4707173"/>
+                    <a:ext cx="0" cy="355206"/>
+                  </a:xfrm>
+                  <a:prstGeom prst="straightConnector1">
+                    <a:avLst/>
+                  </a:prstGeom>
+                  <a:ln>
+                    <a:solidFill>
+                      <a:schemeClr val="tx1"/>
+                    </a:solidFill>
+                    <a:tailEnd type="triangle"/>
+                  </a:ln>
+                </p:spPr>
+                <p:style>
+                  <a:lnRef idx="2">
+                    <a:schemeClr val="accent1"/>
+                  </a:lnRef>
+                  <a:fillRef idx="0">
+                    <a:schemeClr val="accent1"/>
+                  </a:fillRef>
+                  <a:effectRef idx="1">
+                    <a:schemeClr val="accent1"/>
+                  </a:effectRef>
+                  <a:fontRef idx="minor">
+                    <a:schemeClr val="tx1"/>
+                  </a:fontRef>
+                </p:style>
+              </p:cxnSp>
+              <p:cxnSp>
+                <p:nvCxnSpPr>
+                  <p:cNvPr id="32" name="Straight Arrow Connector 31">
+                    <a:extLst>
+                      <a:ext uri="{FF2B5EF4-FFF2-40B4-BE49-F238E27FC236}">
+                        <a16:creationId xmlns:a16="http://schemas.microsoft.com/office/drawing/2014/main" id="{6149BCC6-61F1-5ACE-7A08-50382781C063}"/>
+                      </a:ext>
+                    </a:extLst>
+                  </p:cNvPr>
+                  <p:cNvCxnSpPr>
+                    <a:cxnSpLocks/>
+                    <a:stCxn id="29" idx="2"/>
+                    <a:endCxn id="30" idx="0"/>
+                  </p:cNvCxnSpPr>
+                  <p:nvPr/>
+                </p:nvCxnSpPr>
+                <p:spPr>
+                  <a:xfrm>
+                    <a:off x="6708300" y="5351332"/>
+                    <a:ext cx="0" cy="363122"/>
+                  </a:xfrm>
+                  <a:prstGeom prst="straightConnector1">
+                    <a:avLst/>
+                  </a:prstGeom>
+                  <a:ln>
+                    <a:solidFill>
+                      <a:schemeClr val="tx1"/>
+                    </a:solidFill>
+                    <a:tailEnd type="triangle"/>
+                  </a:ln>
+                </p:spPr>
+                <p:style>
+                  <a:lnRef idx="2">
+                    <a:schemeClr val="accent1"/>
+                  </a:lnRef>
+                  <a:fillRef idx="0">
+                    <a:schemeClr val="accent1"/>
+                  </a:fillRef>
+                  <a:effectRef idx="1">
+                    <a:schemeClr val="accent1"/>
+                  </a:effectRef>
+                  <a:fontRef idx="minor">
+                    <a:schemeClr val="tx1"/>
+                  </a:fontRef>
+                </p:style>
+              </p:cxnSp>
+            </p:grpSp>
+            <p:cxnSp>
+              <p:nvCxnSpPr>
+                <p:cNvPr id="46" name="Elbow Connector 45">
+                  <a:extLst>
+                    <a:ext uri="{FF2B5EF4-FFF2-40B4-BE49-F238E27FC236}">
+                      <a16:creationId xmlns:a16="http://schemas.microsoft.com/office/drawing/2014/main" id="{F920C7BE-1102-16D3-9DFA-83D11F2DC262}"/>
+                    </a:ext>
+                  </a:extLst>
+                </p:cNvPr>
+                <p:cNvCxnSpPr>
+                  <a:cxnSpLocks/>
+                  <a:stCxn id="14" idx="3"/>
+                  <a:endCxn id="23" idx="0"/>
+                </p:cNvCxnSpPr>
+                <p:nvPr/>
+              </p:nvCxnSpPr>
+              <p:spPr>
+                <a:xfrm>
+                  <a:off x="4361608" y="674002"/>
+                  <a:ext cx="948117" cy="1799870"/>
+                </a:xfrm>
+                <a:prstGeom prst="bentConnector2">
+                  <a:avLst/>
+                </a:prstGeom>
+                <a:ln>
+                  <a:solidFill>
+                    <a:schemeClr val="tx1"/>
+                  </a:solidFill>
+                  <a:tailEnd type="triangle"/>
+                </a:ln>
+              </p:spPr>
+              <p:style>
+                <a:lnRef idx="2">
+                  <a:schemeClr val="accent1"/>
+                </a:lnRef>
+                <a:fillRef idx="0">
+                  <a:schemeClr val="accent1"/>
+                </a:fillRef>
+                <a:effectRef idx="1">
+                  <a:schemeClr val="accent1"/>
+                </a:effectRef>
+                <a:fontRef idx="minor">
+                  <a:schemeClr val="tx1"/>
+                </a:fontRef>
+              </p:style>
+            </p:cxnSp>
+            <p:cxnSp>
+              <p:nvCxnSpPr>
+                <p:cNvPr id="49" name="Elbow Connector 48">
+                  <a:extLst>
+                    <a:ext uri="{FF2B5EF4-FFF2-40B4-BE49-F238E27FC236}">
+                      <a16:creationId xmlns:a16="http://schemas.microsoft.com/office/drawing/2014/main" id="{DACD6713-8D38-9DA2-0915-7DD957FA2AE9}"/>
+                    </a:ext>
+                  </a:extLst>
+                </p:cNvPr>
+                <p:cNvCxnSpPr>
+                  <a:cxnSpLocks/>
+                  <a:stCxn id="15" idx="3"/>
+                  <a:endCxn id="24" idx="1"/>
+                </p:cNvCxnSpPr>
+                <p:nvPr/>
+              </p:nvCxnSpPr>
+              <p:spPr>
+                <a:xfrm>
+                  <a:off x="4361608" y="1326412"/>
+                  <a:ext cx="497662" cy="1940053"/>
+                </a:xfrm>
+                <a:prstGeom prst="bentConnector3">
+                  <a:avLst>
+                    <a:gd name="adj1" fmla="val 50000"/>
+                  </a:avLst>
+                </a:prstGeom>
+                <a:ln>
+                  <a:solidFill>
+                    <a:schemeClr val="tx1"/>
+                  </a:solidFill>
+                  <a:tailEnd type="triangle"/>
+                </a:ln>
+              </p:spPr>
+              <p:style>
+                <a:lnRef idx="2">
+                  <a:schemeClr val="accent1"/>
+                </a:lnRef>
+                <a:fillRef idx="0">
+                  <a:schemeClr val="accent1"/>
+                </a:fillRef>
+                <a:effectRef idx="1">
+                  <a:schemeClr val="accent1"/>
+                </a:effectRef>
+                <a:fontRef idx="minor">
+                  <a:schemeClr val="tx1"/>
+                </a:fontRef>
+              </p:style>
+            </p:cxnSp>
+            <p:cxnSp>
+              <p:nvCxnSpPr>
+                <p:cNvPr id="52" name="Elbow Connector 51">
+                  <a:extLst>
+                    <a:ext uri="{FF2B5EF4-FFF2-40B4-BE49-F238E27FC236}">
+                      <a16:creationId xmlns:a16="http://schemas.microsoft.com/office/drawing/2014/main" id="{1E9836E4-94A2-3862-1B86-12877F90E611}"/>
+                    </a:ext>
+                  </a:extLst>
+                </p:cNvPr>
+                <p:cNvCxnSpPr>
+                  <a:cxnSpLocks/>
+                  <a:stCxn id="16" idx="2"/>
+                  <a:endCxn id="25" idx="1"/>
+                </p:cNvCxnSpPr>
+                <p:nvPr/>
+              </p:nvCxnSpPr>
+              <p:spPr>
+                <a:xfrm rot="16200000" flipH="1">
+                  <a:off x="3485275" y="2540585"/>
+                  <a:ext cx="1799873" cy="948117"/>
+                </a:xfrm>
+                <a:prstGeom prst="bentConnector2">
+                  <a:avLst/>
+                </a:prstGeom>
+                <a:ln>
+                  <a:solidFill>
+                    <a:schemeClr val="tx1"/>
+                  </a:solidFill>
+                  <a:tailEnd type="triangle"/>
+                </a:ln>
+              </p:spPr>
+              <p:style>
+                <a:lnRef idx="2">
+                  <a:schemeClr val="accent1"/>
+                </a:lnRef>
+                <a:fillRef idx="0">
+                  <a:schemeClr val="accent1"/>
+                </a:fillRef>
+                <a:effectRef idx="1">
+                  <a:schemeClr val="accent1"/>
+                </a:effectRef>
+                <a:fontRef idx="minor">
+                  <a:schemeClr val="tx1"/>
+                </a:fontRef>
+              </p:style>
+            </p:cxnSp>
+            <p:cxnSp>
+              <p:nvCxnSpPr>
+                <p:cNvPr id="57" name="Elbow Connector 56">
+                  <a:extLst>
+                    <a:ext uri="{FF2B5EF4-FFF2-40B4-BE49-F238E27FC236}">
+                      <a16:creationId xmlns:a16="http://schemas.microsoft.com/office/drawing/2014/main" id="{83E5BD54-48B2-CB3C-AA2C-041D708E0CFB}"/>
+                    </a:ext>
+                  </a:extLst>
+                </p:cNvPr>
+                <p:cNvCxnSpPr>
+                  <a:cxnSpLocks/>
+                  <a:stCxn id="23" idx="3"/>
+                  <a:endCxn id="28" idx="0"/>
+                </p:cNvCxnSpPr>
+                <p:nvPr/>
+              </p:nvCxnSpPr>
+              <p:spPr>
+                <a:xfrm>
+                  <a:off x="5760180" y="2618349"/>
+                  <a:ext cx="948120" cy="1799871"/>
+                </a:xfrm>
+                <a:prstGeom prst="bentConnector2">
+                  <a:avLst/>
+                </a:prstGeom>
+                <a:ln>
+                  <a:solidFill>
+                    <a:schemeClr val="tx1"/>
+                  </a:solidFill>
+                  <a:tailEnd type="triangle"/>
+                </a:ln>
+              </p:spPr>
+              <p:style>
+                <a:lnRef idx="2">
+                  <a:schemeClr val="accent1"/>
+                </a:lnRef>
+                <a:fillRef idx="0">
+                  <a:schemeClr val="accent1"/>
+                </a:fillRef>
+                <a:effectRef idx="1">
+                  <a:schemeClr val="accent1"/>
+                </a:effectRef>
+                <a:fontRef idx="minor">
+                  <a:schemeClr val="tx1"/>
+                </a:fontRef>
+              </p:style>
+            </p:cxnSp>
+            <p:cxnSp>
+              <p:nvCxnSpPr>
+                <p:cNvPr id="60" name="Elbow Connector 59">
+                  <a:extLst>
+                    <a:ext uri="{FF2B5EF4-FFF2-40B4-BE49-F238E27FC236}">
+                      <a16:creationId xmlns:a16="http://schemas.microsoft.com/office/drawing/2014/main" id="{7C44DC5F-4F77-B70E-6E6C-CA832FA60458}"/>
+                    </a:ext>
+                  </a:extLst>
+                </p:cNvPr>
+                <p:cNvCxnSpPr>
+                  <a:cxnSpLocks/>
+                  <a:stCxn id="24" idx="3"/>
+                  <a:endCxn id="29" idx="1"/>
+                </p:cNvCxnSpPr>
+                <p:nvPr/>
+              </p:nvCxnSpPr>
+              <p:spPr>
+                <a:xfrm>
+                  <a:off x="5760180" y="3266465"/>
+                  <a:ext cx="497665" cy="1940391"/>
+                </a:xfrm>
+                <a:prstGeom prst="bentConnector3">
+                  <a:avLst>
+                    <a:gd name="adj1" fmla="val 50000"/>
+                  </a:avLst>
+                </a:prstGeom>
+                <a:ln>
+                  <a:solidFill>
+                    <a:schemeClr val="tx1"/>
+                  </a:solidFill>
+                  <a:tailEnd type="triangle"/>
+                </a:ln>
+              </p:spPr>
+              <p:style>
+                <a:lnRef idx="2">
+                  <a:schemeClr val="accent1"/>
+                </a:lnRef>
+                <a:fillRef idx="0">
+                  <a:schemeClr val="accent1"/>
+                </a:fillRef>
+                <a:effectRef idx="1">
+                  <a:schemeClr val="accent1"/>
+                </a:effectRef>
+                <a:fontRef idx="minor">
+                  <a:schemeClr val="tx1"/>
+                </a:fontRef>
+              </p:style>
+            </p:cxnSp>
+            <p:cxnSp>
+              <p:nvCxnSpPr>
+                <p:cNvPr id="63" name="Elbow Connector 62">
+                  <a:extLst>
+                    <a:ext uri="{FF2B5EF4-FFF2-40B4-BE49-F238E27FC236}">
+                      <a16:creationId xmlns:a16="http://schemas.microsoft.com/office/drawing/2014/main" id="{AA51F41B-758A-4AA5-DC1E-F5F4C83FD856}"/>
+                    </a:ext>
+                  </a:extLst>
+                </p:cNvPr>
+                <p:cNvCxnSpPr>
+                  <a:cxnSpLocks/>
+                  <a:stCxn id="25" idx="2"/>
+                  <a:endCxn id="30" idx="1"/>
+                </p:cNvCxnSpPr>
+                <p:nvPr/>
+              </p:nvCxnSpPr>
+              <p:spPr>
+                <a:xfrm rot="16200000" flipH="1">
+                  <a:off x="4883848" y="4484934"/>
+                  <a:ext cx="1799874" cy="948120"/>
+                </a:xfrm>
+                <a:prstGeom prst="bentConnector2">
+                  <a:avLst/>
+                </a:prstGeom>
+                <a:ln>
+                  <a:solidFill>
+                    <a:schemeClr val="tx1"/>
+                  </a:solidFill>
+                  <a:tailEnd type="triangle"/>
+                </a:ln>
+              </p:spPr>
+              <p:style>
+                <a:lnRef idx="2">
+                  <a:schemeClr val="accent1"/>
+                </a:lnRef>
+                <a:fillRef idx="0">
+                  <a:schemeClr val="accent1"/>
+                </a:fillRef>
+                <a:effectRef idx="1">
+                  <a:schemeClr val="accent1"/>
+                </a:effectRef>
+                <a:fontRef idx="minor">
+                  <a:schemeClr val="tx1"/>
+                </a:fontRef>
+              </p:style>
+            </p:cxnSp>
+            <p:sp>
+              <p:nvSpPr>
+                <p:cNvPr id="1027" name="TextBox 1026">
+                  <a:extLst>
+                    <a:ext uri="{FF2B5EF4-FFF2-40B4-BE49-F238E27FC236}">
+                      <a16:creationId xmlns:a16="http://schemas.microsoft.com/office/drawing/2014/main" id="{321D17E0-3413-A2EA-3348-5A9DA062E962}"/>
+                    </a:ext>
+                  </a:extLst>
+                </p:cNvPr>
+                <p:cNvSpPr txBox="1"/>
+                <p:nvPr/>
+              </p:nvSpPr>
+              <p:spPr>
+                <a:xfrm>
+                  <a:off x="4594369" y="279501"/>
+                  <a:ext cx="1430713" cy="400110"/>
+                </a:xfrm>
+                <a:prstGeom prst="rect">
+                  <a:avLst/>
+                </a:prstGeom>
+                <a:noFill/>
+              </p:spPr>
+              <p:txBody>
+                <a:bodyPr wrap="none" rtlCol="0">
+                  <a:spAutoFit/>
+                </a:bodyPr>
+                <a:lstStyle/>
+                <a:p>
+                  <a:r>
+                    <a:rPr lang="en-US" sz="2000" b="1" dirty="0"/>
+                    <a:t>Preclinical</a:t>
+                  </a:r>
+                </a:p>
+              </p:txBody>
+            </p:sp>
+          </p:grpSp>
+          <p:grpSp>
+            <p:nvGrpSpPr>
+              <p:cNvPr id="1102" name="Group 1101">
+                <a:extLst>
+                  <a:ext uri="{FF2B5EF4-FFF2-40B4-BE49-F238E27FC236}">
+                    <a16:creationId xmlns:a16="http://schemas.microsoft.com/office/drawing/2014/main" id="{34F3BBED-925B-EF3D-02D3-6F5098E042E8}"/>
+                  </a:ext>
+                </a:extLst>
+              </p:cNvPr>
+              <p:cNvGrpSpPr/>
+              <p:nvPr/>
+            </p:nvGrpSpPr>
+            <p:grpSpPr>
+              <a:xfrm>
+                <a:off x="-6067958" y="-1270484"/>
+                <a:ext cx="900910" cy="5473883"/>
+                <a:chOff x="9161536" y="529524"/>
+                <a:chExt cx="900910" cy="5473883"/>
+              </a:xfrm>
+            </p:grpSpPr>
+            <p:sp>
+              <p:nvSpPr>
+                <p:cNvPr id="1037" name="Rounded Rectangle 1036">
+                  <a:extLst>
+                    <a:ext uri="{FF2B5EF4-FFF2-40B4-BE49-F238E27FC236}">
+                      <a16:creationId xmlns:a16="http://schemas.microsoft.com/office/drawing/2014/main" id="{C009050B-69C0-816A-BA96-5DD2C0A5DBAF}"/>
+                    </a:ext>
+                  </a:extLst>
+                </p:cNvPr>
+                <p:cNvSpPr/>
+                <p:nvPr/>
+              </p:nvSpPr>
+              <p:spPr>
+                <a:xfrm>
+                  <a:off x="9161536" y="529524"/>
+                  <a:ext cx="900910" cy="288953"/>
+                </a:xfrm>
+                <a:prstGeom prst="roundRect">
+                  <a:avLst/>
+                </a:prstGeom>
+                <a:noFill/>
+              </p:spPr>
+              <p:style>
+                <a:lnRef idx="2">
+                  <a:schemeClr val="accent1">
+                    <a:shade val="15000"/>
+                  </a:schemeClr>
+                </a:lnRef>
+                <a:fillRef idx="1">
+                  <a:schemeClr val="accent1"/>
+                </a:fillRef>
+                <a:effectRef idx="0">
+                  <a:schemeClr val="accent1"/>
+                </a:effectRef>
+                <a:fontRef idx="minor">
+                  <a:schemeClr val="lt1"/>
+                </a:fontRef>
+              </p:style>
+              <p:txBody>
+                <a:bodyPr rtlCol="0" anchor="ctr"/>
+                <a:lstStyle/>
+                <a:p>
+                  <a:pPr algn="ctr"/>
+                  <a:r>
+                    <a:rPr lang="en-US" sz="1600" dirty="0">
+                      <a:solidFill>
+                        <a:sysClr val="windowText" lastClr="000000"/>
+                      </a:solidFill>
+                    </a:rPr>
+                    <a:t>T1, G&lt;7</a:t>
+                  </a:r>
+                </a:p>
+              </p:txBody>
+            </p:sp>
+            <p:sp>
+              <p:nvSpPr>
+                <p:cNvPr id="1038" name="Rounded Rectangle 1037">
+                  <a:extLst>
+                    <a:ext uri="{FF2B5EF4-FFF2-40B4-BE49-F238E27FC236}">
+                      <a16:creationId xmlns:a16="http://schemas.microsoft.com/office/drawing/2014/main" id="{7DB59CBF-BE49-FDC2-C1BF-0695D7E25B6B}"/>
+                    </a:ext>
+                  </a:extLst>
+                </p:cNvPr>
+                <p:cNvSpPr/>
+                <p:nvPr/>
+              </p:nvSpPr>
+              <p:spPr>
+                <a:xfrm>
+                  <a:off x="9161536" y="1177640"/>
+                  <a:ext cx="900910" cy="288953"/>
+                </a:xfrm>
+                <a:prstGeom prst="roundRect">
+                  <a:avLst/>
+                </a:prstGeom>
+                <a:noFill/>
+              </p:spPr>
+              <p:style>
+                <a:lnRef idx="2">
+                  <a:schemeClr val="accent1">
+                    <a:shade val="15000"/>
+                  </a:schemeClr>
+                </a:lnRef>
+                <a:fillRef idx="1">
+                  <a:schemeClr val="accent1"/>
+                </a:fillRef>
+                <a:effectRef idx="0">
+                  <a:schemeClr val="accent1"/>
+                </a:effectRef>
+                <a:fontRef idx="minor">
+                  <a:schemeClr val="lt1"/>
+                </a:fontRef>
+              </p:style>
+              <p:txBody>
+                <a:bodyPr rtlCol="0" anchor="ctr"/>
+                <a:lstStyle/>
+                <a:p>
+                  <a:pPr algn="ctr"/>
+                  <a:r>
+                    <a:rPr lang="en-US" sz="1600" dirty="0">
+                      <a:solidFill>
+                        <a:sysClr val="windowText" lastClr="000000"/>
+                      </a:solidFill>
+                    </a:rPr>
+                    <a:t>T1, G=7</a:t>
+                  </a:r>
+                </a:p>
+              </p:txBody>
+            </p:sp>
+            <p:sp>
+              <p:nvSpPr>
+                <p:cNvPr id="1039" name="Rounded Rectangle 1038">
+                  <a:extLst>
+                    <a:ext uri="{FF2B5EF4-FFF2-40B4-BE49-F238E27FC236}">
+                      <a16:creationId xmlns:a16="http://schemas.microsoft.com/office/drawing/2014/main" id="{95C55E63-9B89-DA5C-3AE7-597FB50B4EE8}"/>
+                    </a:ext>
+                  </a:extLst>
+                </p:cNvPr>
+                <p:cNvSpPr/>
+                <p:nvPr/>
+              </p:nvSpPr>
+              <p:spPr>
+                <a:xfrm>
+                  <a:off x="9161536" y="1825756"/>
+                  <a:ext cx="900910" cy="288953"/>
+                </a:xfrm>
+                <a:prstGeom prst="roundRect">
+                  <a:avLst/>
+                </a:prstGeom>
+                <a:noFill/>
+              </p:spPr>
+              <p:style>
+                <a:lnRef idx="2">
+                  <a:schemeClr val="accent1">
+                    <a:shade val="15000"/>
+                  </a:schemeClr>
+                </a:lnRef>
+                <a:fillRef idx="1">
+                  <a:schemeClr val="accent1"/>
+                </a:fillRef>
+                <a:effectRef idx="0">
+                  <a:schemeClr val="accent1"/>
+                </a:effectRef>
+                <a:fontRef idx="minor">
+                  <a:schemeClr val="lt1"/>
+                </a:fontRef>
+              </p:style>
+              <p:txBody>
+                <a:bodyPr rtlCol="0" anchor="ctr"/>
+                <a:lstStyle/>
+                <a:p>
+                  <a:pPr algn="ctr"/>
+                  <a:r>
+                    <a:rPr lang="en-US" sz="1600" dirty="0">
+                      <a:solidFill>
+                        <a:sysClr val="windowText" lastClr="000000"/>
+                      </a:solidFill>
+                    </a:rPr>
+                    <a:t>T1, G&gt;7</a:t>
+                  </a:r>
+                </a:p>
+              </p:txBody>
+            </p:sp>
+            <p:sp>
+              <p:nvSpPr>
+                <p:cNvPr id="1043" name="Rounded Rectangle 1042">
+                  <a:extLst>
+                    <a:ext uri="{FF2B5EF4-FFF2-40B4-BE49-F238E27FC236}">
+                      <a16:creationId xmlns:a16="http://schemas.microsoft.com/office/drawing/2014/main" id="{0B7CFFB8-42AA-0D46-9EC5-B67D1F6B768B}"/>
+                    </a:ext>
+                  </a:extLst>
+                </p:cNvPr>
+                <p:cNvSpPr/>
+                <p:nvPr/>
+              </p:nvSpPr>
+              <p:spPr>
+                <a:xfrm>
+                  <a:off x="9161536" y="2473872"/>
+                  <a:ext cx="900910" cy="288953"/>
+                </a:xfrm>
+                <a:prstGeom prst="roundRect">
+                  <a:avLst/>
+                </a:prstGeom>
+                <a:noFill/>
+              </p:spPr>
+              <p:style>
+                <a:lnRef idx="2">
+                  <a:schemeClr val="accent1">
+                    <a:shade val="15000"/>
+                  </a:schemeClr>
+                </a:lnRef>
+                <a:fillRef idx="1">
+                  <a:schemeClr val="accent1"/>
+                </a:fillRef>
+                <a:effectRef idx="0">
+                  <a:schemeClr val="accent1"/>
+                </a:effectRef>
+                <a:fontRef idx="minor">
+                  <a:schemeClr val="lt1"/>
+                </a:fontRef>
+              </p:style>
+              <p:txBody>
+                <a:bodyPr rtlCol="0" anchor="ctr"/>
+                <a:lstStyle/>
+                <a:p>
+                  <a:pPr algn="ctr"/>
+                  <a:r>
+                    <a:rPr lang="en-US" sz="1600" dirty="0">
+                      <a:solidFill>
+                        <a:sysClr val="windowText" lastClr="000000"/>
+                      </a:solidFill>
+                    </a:rPr>
+                    <a:t>T2, G&lt;7</a:t>
+                  </a:r>
+                </a:p>
+              </p:txBody>
+            </p:sp>
+            <p:sp>
+              <p:nvSpPr>
+                <p:cNvPr id="1044" name="Rounded Rectangle 1043">
+                  <a:extLst>
+                    <a:ext uri="{FF2B5EF4-FFF2-40B4-BE49-F238E27FC236}">
+                      <a16:creationId xmlns:a16="http://schemas.microsoft.com/office/drawing/2014/main" id="{96FB4131-9C86-37B1-5AFB-D671494908C1}"/>
+                    </a:ext>
+                  </a:extLst>
+                </p:cNvPr>
+                <p:cNvSpPr/>
+                <p:nvPr/>
+              </p:nvSpPr>
+              <p:spPr>
+                <a:xfrm>
+                  <a:off x="9161536" y="3121988"/>
+                  <a:ext cx="900910" cy="288953"/>
+                </a:xfrm>
+                <a:prstGeom prst="roundRect">
+                  <a:avLst/>
+                </a:prstGeom>
+                <a:noFill/>
+              </p:spPr>
+              <p:style>
+                <a:lnRef idx="2">
+                  <a:schemeClr val="accent1">
+                    <a:shade val="15000"/>
+                  </a:schemeClr>
+                </a:lnRef>
+                <a:fillRef idx="1">
+                  <a:schemeClr val="accent1"/>
+                </a:fillRef>
+                <a:effectRef idx="0">
+                  <a:schemeClr val="accent1"/>
+                </a:effectRef>
+                <a:fontRef idx="minor">
+                  <a:schemeClr val="lt1"/>
+                </a:fontRef>
+              </p:style>
+              <p:txBody>
+                <a:bodyPr rtlCol="0" anchor="ctr"/>
+                <a:lstStyle/>
+                <a:p>
+                  <a:pPr algn="ctr"/>
+                  <a:r>
+                    <a:rPr lang="en-US" sz="1600" dirty="0">
+                      <a:solidFill>
+                        <a:sysClr val="windowText" lastClr="000000"/>
+                      </a:solidFill>
+                    </a:rPr>
+                    <a:t>T2, G=7</a:t>
+                  </a:r>
+                </a:p>
+              </p:txBody>
+            </p:sp>
+            <p:sp>
+              <p:nvSpPr>
+                <p:cNvPr id="1045" name="Rounded Rectangle 1044">
+                  <a:extLst>
+                    <a:ext uri="{FF2B5EF4-FFF2-40B4-BE49-F238E27FC236}">
+                      <a16:creationId xmlns:a16="http://schemas.microsoft.com/office/drawing/2014/main" id="{43989607-87C0-DCEB-B0FE-DC7C8D63EBEB}"/>
+                    </a:ext>
+                  </a:extLst>
+                </p:cNvPr>
+                <p:cNvSpPr/>
+                <p:nvPr/>
+              </p:nvSpPr>
+              <p:spPr>
+                <a:xfrm>
+                  <a:off x="9161536" y="3770104"/>
+                  <a:ext cx="900910" cy="288953"/>
+                </a:xfrm>
+                <a:prstGeom prst="roundRect">
+                  <a:avLst/>
+                </a:prstGeom>
+                <a:noFill/>
+              </p:spPr>
+              <p:style>
+                <a:lnRef idx="2">
+                  <a:schemeClr val="accent1">
+                    <a:shade val="15000"/>
+                  </a:schemeClr>
+                </a:lnRef>
+                <a:fillRef idx="1">
+                  <a:schemeClr val="accent1"/>
+                </a:fillRef>
+                <a:effectRef idx="0">
+                  <a:schemeClr val="accent1"/>
+                </a:effectRef>
+                <a:fontRef idx="minor">
+                  <a:schemeClr val="lt1"/>
+                </a:fontRef>
+              </p:style>
+              <p:txBody>
+                <a:bodyPr rtlCol="0" anchor="ctr"/>
+                <a:lstStyle/>
+                <a:p>
+                  <a:pPr algn="ctr"/>
+                  <a:r>
+                    <a:rPr lang="en-US" sz="1600" dirty="0">
+                      <a:solidFill>
+                        <a:sysClr val="windowText" lastClr="000000"/>
+                      </a:solidFill>
+                    </a:rPr>
+                    <a:t>T2, G&gt;7</a:t>
+                  </a:r>
+                </a:p>
+              </p:txBody>
+            </p:sp>
+            <p:sp>
+              <p:nvSpPr>
+                <p:cNvPr id="1049" name="Rounded Rectangle 1048">
+                  <a:extLst>
+                    <a:ext uri="{FF2B5EF4-FFF2-40B4-BE49-F238E27FC236}">
+                      <a16:creationId xmlns:a16="http://schemas.microsoft.com/office/drawing/2014/main" id="{5355D0FE-05C4-022A-C9C7-6FBCBF71DEDC}"/>
+                    </a:ext>
+                  </a:extLst>
+                </p:cNvPr>
+                <p:cNvSpPr/>
+                <p:nvPr/>
+              </p:nvSpPr>
+              <p:spPr>
+                <a:xfrm>
+                  <a:off x="9161536" y="4418220"/>
+                  <a:ext cx="900910" cy="288953"/>
+                </a:xfrm>
+                <a:prstGeom prst="roundRect">
+                  <a:avLst/>
+                </a:prstGeom>
+                <a:noFill/>
+              </p:spPr>
+              <p:style>
+                <a:lnRef idx="2">
+                  <a:schemeClr val="accent1">
+                    <a:shade val="15000"/>
+                  </a:schemeClr>
+                </a:lnRef>
+                <a:fillRef idx="1">
+                  <a:schemeClr val="accent1"/>
+                </a:fillRef>
+                <a:effectRef idx="0">
+                  <a:schemeClr val="accent1"/>
+                </a:effectRef>
+                <a:fontRef idx="minor">
+                  <a:schemeClr val="lt1"/>
+                </a:fontRef>
+              </p:style>
+              <p:txBody>
+                <a:bodyPr rtlCol="0" anchor="ctr"/>
+                <a:lstStyle/>
+                <a:p>
+                  <a:pPr algn="ctr"/>
+                  <a:r>
+                    <a:rPr lang="en-US" sz="1600" dirty="0">
+                      <a:solidFill>
+                        <a:sysClr val="windowText" lastClr="000000"/>
+                      </a:solidFill>
+                    </a:rPr>
+                    <a:t>T3, G&lt;7</a:t>
+                  </a:r>
+                </a:p>
+              </p:txBody>
+            </p:sp>
+            <p:sp>
+              <p:nvSpPr>
+                <p:cNvPr id="1050" name="Rounded Rectangle 1049">
+                  <a:extLst>
+                    <a:ext uri="{FF2B5EF4-FFF2-40B4-BE49-F238E27FC236}">
+                      <a16:creationId xmlns:a16="http://schemas.microsoft.com/office/drawing/2014/main" id="{70AE9B6D-27A7-AD37-41F4-3FF503845635}"/>
+                    </a:ext>
+                  </a:extLst>
+                </p:cNvPr>
+                <p:cNvSpPr/>
+                <p:nvPr/>
+              </p:nvSpPr>
+              <p:spPr>
+                <a:xfrm>
+                  <a:off x="9161536" y="5066336"/>
+                  <a:ext cx="900910" cy="288953"/>
+                </a:xfrm>
+                <a:prstGeom prst="roundRect">
+                  <a:avLst/>
+                </a:prstGeom>
+                <a:noFill/>
+              </p:spPr>
+              <p:style>
+                <a:lnRef idx="2">
+                  <a:schemeClr val="accent1">
+                    <a:shade val="15000"/>
+                  </a:schemeClr>
+                </a:lnRef>
+                <a:fillRef idx="1">
+                  <a:schemeClr val="accent1"/>
+                </a:fillRef>
+                <a:effectRef idx="0">
+                  <a:schemeClr val="accent1"/>
+                </a:effectRef>
+                <a:fontRef idx="minor">
+                  <a:schemeClr val="lt1"/>
+                </a:fontRef>
+              </p:style>
+              <p:txBody>
+                <a:bodyPr rtlCol="0" anchor="ctr"/>
+                <a:lstStyle/>
+                <a:p>
+                  <a:pPr algn="ctr"/>
+                  <a:r>
+                    <a:rPr lang="en-US" sz="1600" dirty="0">
+                      <a:solidFill>
+                        <a:sysClr val="windowText" lastClr="000000"/>
+                      </a:solidFill>
+                    </a:rPr>
+                    <a:t>T3, G=7</a:t>
+                  </a:r>
+                </a:p>
+              </p:txBody>
+            </p:sp>
+            <p:sp>
+              <p:nvSpPr>
+                <p:cNvPr id="1051" name="Rounded Rectangle 1050">
+                  <a:extLst>
+                    <a:ext uri="{FF2B5EF4-FFF2-40B4-BE49-F238E27FC236}">
+                      <a16:creationId xmlns:a16="http://schemas.microsoft.com/office/drawing/2014/main" id="{DFDEB3CF-DABE-7333-AABE-8045E522A06A}"/>
+                    </a:ext>
+                  </a:extLst>
+                </p:cNvPr>
+                <p:cNvSpPr/>
+                <p:nvPr/>
+              </p:nvSpPr>
+              <p:spPr>
+                <a:xfrm>
+                  <a:off x="9161536" y="5714454"/>
+                  <a:ext cx="900910" cy="288953"/>
+                </a:xfrm>
+                <a:prstGeom prst="roundRect">
+                  <a:avLst/>
+                </a:prstGeom>
+                <a:noFill/>
+              </p:spPr>
+              <p:style>
+                <a:lnRef idx="2">
+                  <a:schemeClr val="accent1">
+                    <a:shade val="15000"/>
+                  </a:schemeClr>
+                </a:lnRef>
+                <a:fillRef idx="1">
+                  <a:schemeClr val="accent1"/>
+                </a:fillRef>
+                <a:effectRef idx="0">
+                  <a:schemeClr val="accent1"/>
+                </a:effectRef>
+                <a:fontRef idx="minor">
+                  <a:schemeClr val="lt1"/>
+                </a:fontRef>
+              </p:style>
+              <p:txBody>
+                <a:bodyPr rtlCol="0" anchor="ctr"/>
+                <a:lstStyle/>
+                <a:p>
+                  <a:pPr algn="ctr"/>
+                  <a:r>
+                    <a:rPr lang="en-US" sz="1600" dirty="0">
+                      <a:solidFill>
+                        <a:sysClr val="windowText" lastClr="000000"/>
+                      </a:solidFill>
+                    </a:rPr>
+                    <a:t>T3, G&gt;7</a:t>
+                  </a:r>
+                </a:p>
+              </p:txBody>
+            </p:sp>
+          </p:grpSp>
+          <p:sp>
+            <p:nvSpPr>
+              <p:cNvPr id="1028" name="Rounded Rectangle 1027">
+                <a:extLst>
+                  <a:ext uri="{FF2B5EF4-FFF2-40B4-BE49-F238E27FC236}">
+                    <a16:creationId xmlns:a16="http://schemas.microsoft.com/office/drawing/2014/main" id="{53FF5D0F-BDE1-679D-6799-AAC8F1E54077}"/>
+                  </a:ext>
+                </a:extLst>
+              </p:cNvPr>
+              <p:cNvSpPr/>
+              <p:nvPr/>
+            </p:nvSpPr>
+            <p:spPr>
+              <a:xfrm rot="5400000">
+                <a:off x="-9671802" y="1223192"/>
+                <a:ext cx="5905146" cy="486528"/>
+              </a:xfrm>
+              <a:prstGeom prst="roundRect">
+                <a:avLst>
+                  <a:gd name="adj" fmla="val 22916"/>
+                </a:avLst>
+              </a:prstGeom>
+              <a:solidFill>
+                <a:schemeClr val="bg1"/>
+              </a:solidFill>
+            </p:spPr>
+            <p:style>
+              <a:lnRef idx="2">
+                <a:schemeClr val="accent1">
+                  <a:shade val="15000"/>
+                </a:schemeClr>
+              </a:lnRef>
+              <a:fillRef idx="1">
+                <a:schemeClr val="accent1"/>
+              </a:fillRef>
+              <a:effectRef idx="0">
+                <a:schemeClr val="accent1"/>
+              </a:effectRef>
+              <a:fontRef idx="minor">
+                <a:schemeClr val="lt1"/>
+              </a:fontRef>
+            </p:style>
+            <p:txBody>
+              <a:bodyPr rtlCol="0" anchor="ctr"/>
+              <a:lstStyle/>
+              <a:p>
+                <a:pPr algn="ctr"/>
+                <a:r>
+                  <a:rPr lang="en-US" sz="2000" b="1" dirty="0">
+                    <a:solidFill>
+                      <a:sysClr val="windowText" lastClr="000000"/>
+                    </a:solidFill>
+                  </a:rPr>
+                  <a:t>Clinical Diagnosis</a:t>
+                </a:r>
+              </a:p>
+            </p:txBody>
+          </p:sp>
+          <p:cxnSp>
+            <p:nvCxnSpPr>
+              <p:cNvPr id="1107" name="Elbow Connector 1106">
+                <a:extLst>
+                  <a:ext uri="{FF2B5EF4-FFF2-40B4-BE49-F238E27FC236}">
+                    <a16:creationId xmlns:a16="http://schemas.microsoft.com/office/drawing/2014/main" id="{A860B8EE-DD92-8B56-F265-B7B49B37F408}"/>
+                  </a:ext>
+                </a:extLst>
+              </p:cNvPr>
+              <p:cNvCxnSpPr>
+                <a:cxnSpLocks/>
+                <a:stCxn id="1037" idx="3"/>
+                <a:endCxn id="1106" idx="1"/>
+              </p:cNvCxnSpPr>
+              <p:nvPr/>
+            </p:nvCxnSpPr>
+            <p:spPr>
+              <a:xfrm>
+                <a:off x="-5167048" y="-1126007"/>
+                <a:ext cx="408007" cy="2591911"/>
+              </a:xfrm>
+              <a:prstGeom prst="bentConnector3">
+                <a:avLst>
+                  <a:gd name="adj1" fmla="val 50000"/>
+                </a:avLst>
+              </a:prstGeom>
+              <a:ln>
+                <a:solidFill>
+                  <a:schemeClr val="tx1"/>
+                </a:solidFill>
+                <a:tailEnd type="triangle"/>
+              </a:ln>
+            </p:spPr>
+            <p:style>
+              <a:lnRef idx="2">
+                <a:schemeClr val="accent1"/>
+              </a:lnRef>
+              <a:fillRef idx="0">
+                <a:schemeClr val="accent1"/>
+              </a:fillRef>
+              <a:effectRef idx="1">
+                <a:schemeClr val="accent1"/>
+              </a:effectRef>
+              <a:fontRef idx="minor">
+                <a:schemeClr val="tx1"/>
+              </a:fontRef>
+            </p:style>
+          </p:cxnSp>
+          <p:cxnSp>
+            <p:nvCxnSpPr>
+              <p:cNvPr id="1110" name="Elbow Connector 1109">
+                <a:extLst>
+                  <a:ext uri="{FF2B5EF4-FFF2-40B4-BE49-F238E27FC236}">
+                    <a16:creationId xmlns:a16="http://schemas.microsoft.com/office/drawing/2014/main" id="{413E9ACE-C86F-BC6B-9A83-AA58338D2047}"/>
+                  </a:ext>
+                </a:extLst>
+              </p:cNvPr>
+              <p:cNvCxnSpPr>
+                <a:cxnSpLocks/>
+                <a:stCxn id="1038" idx="3"/>
+                <a:endCxn id="1106" idx="1"/>
+              </p:cNvCxnSpPr>
+              <p:nvPr/>
+            </p:nvCxnSpPr>
+            <p:spPr>
+              <a:xfrm>
+                <a:off x="-5167048" y="-477891"/>
+                <a:ext cx="408007" cy="1943795"/>
+              </a:xfrm>
+              <a:prstGeom prst="bentConnector3">
+                <a:avLst>
+                  <a:gd name="adj1" fmla="val 50000"/>
+                </a:avLst>
+              </a:prstGeom>
+              <a:ln>
+                <a:solidFill>
+                  <a:schemeClr val="tx1"/>
+                </a:solidFill>
+                <a:tailEnd type="triangle"/>
+              </a:ln>
+            </p:spPr>
+            <p:style>
+              <a:lnRef idx="2">
+                <a:schemeClr val="accent1"/>
+              </a:lnRef>
+              <a:fillRef idx="0">
+                <a:schemeClr val="accent1"/>
+              </a:fillRef>
+              <a:effectRef idx="1">
+                <a:schemeClr val="accent1"/>
+              </a:effectRef>
+              <a:fontRef idx="minor">
+                <a:schemeClr val="tx1"/>
+              </a:fontRef>
+            </p:style>
+          </p:cxnSp>
+          <p:cxnSp>
+            <p:nvCxnSpPr>
+              <p:cNvPr id="1113" name="Elbow Connector 1112">
+                <a:extLst>
+                  <a:ext uri="{FF2B5EF4-FFF2-40B4-BE49-F238E27FC236}">
+                    <a16:creationId xmlns:a16="http://schemas.microsoft.com/office/drawing/2014/main" id="{386B2FF2-BA38-D63D-15D5-77C38FA348D9}"/>
+                  </a:ext>
+                </a:extLst>
+              </p:cNvPr>
+              <p:cNvCxnSpPr>
+                <a:cxnSpLocks/>
+                <a:stCxn id="1039" idx="3"/>
+                <a:endCxn id="1106" idx="1"/>
+              </p:cNvCxnSpPr>
+              <p:nvPr/>
+            </p:nvCxnSpPr>
+            <p:spPr>
+              <a:xfrm>
+                <a:off x="-5167048" y="170225"/>
+                <a:ext cx="408007" cy="1295679"/>
+              </a:xfrm>
+              <a:prstGeom prst="bentConnector3">
+                <a:avLst>
+                  <a:gd name="adj1" fmla="val 50000"/>
+                </a:avLst>
+              </a:prstGeom>
+              <a:ln>
+                <a:solidFill>
+                  <a:schemeClr val="tx1"/>
+                </a:solidFill>
+                <a:tailEnd type="triangle"/>
+              </a:ln>
+            </p:spPr>
+            <p:style>
+              <a:lnRef idx="2">
+                <a:schemeClr val="accent1"/>
+              </a:lnRef>
+              <a:fillRef idx="0">
+                <a:schemeClr val="accent1"/>
+              </a:fillRef>
+              <a:effectRef idx="1">
+                <a:schemeClr val="accent1"/>
+              </a:effectRef>
+              <a:fontRef idx="minor">
+                <a:schemeClr val="tx1"/>
+              </a:fontRef>
+            </p:style>
+          </p:cxnSp>
+          <p:cxnSp>
+            <p:nvCxnSpPr>
+              <p:cNvPr id="1116" name="Elbow Connector 1115">
+                <a:extLst>
+                  <a:ext uri="{FF2B5EF4-FFF2-40B4-BE49-F238E27FC236}">
+                    <a16:creationId xmlns:a16="http://schemas.microsoft.com/office/drawing/2014/main" id="{0874327B-EA1C-8569-928F-B0F4A9F888EB}"/>
+                  </a:ext>
+                </a:extLst>
+              </p:cNvPr>
+              <p:cNvCxnSpPr>
+                <a:cxnSpLocks/>
+                <a:stCxn id="1043" idx="3"/>
+                <a:endCxn id="1106" idx="1"/>
+              </p:cNvCxnSpPr>
+              <p:nvPr/>
+            </p:nvCxnSpPr>
+            <p:spPr>
+              <a:xfrm>
+                <a:off x="-5167048" y="818341"/>
+                <a:ext cx="408007" cy="647563"/>
+              </a:xfrm>
+              <a:prstGeom prst="bentConnector3">
+                <a:avLst>
+                  <a:gd name="adj1" fmla="val 50000"/>
+                </a:avLst>
+              </a:prstGeom>
+              <a:ln>
+                <a:solidFill>
+                  <a:schemeClr val="tx1"/>
+                </a:solidFill>
+                <a:tailEnd type="triangle"/>
+              </a:ln>
+            </p:spPr>
+            <p:style>
+              <a:lnRef idx="2">
+                <a:schemeClr val="accent1"/>
+              </a:lnRef>
+              <a:fillRef idx="0">
+                <a:schemeClr val="accent1"/>
+              </a:fillRef>
+              <a:effectRef idx="1">
+                <a:schemeClr val="accent1"/>
+              </a:effectRef>
+              <a:fontRef idx="minor">
+                <a:schemeClr val="tx1"/>
+              </a:fontRef>
+            </p:style>
+          </p:cxnSp>
+          <p:cxnSp>
+            <p:nvCxnSpPr>
+              <p:cNvPr id="1119" name="Elbow Connector 1118">
+                <a:extLst>
+                  <a:ext uri="{FF2B5EF4-FFF2-40B4-BE49-F238E27FC236}">
+                    <a16:creationId xmlns:a16="http://schemas.microsoft.com/office/drawing/2014/main" id="{F1E528E4-EDE9-53B0-4706-F0CE897E5FFC}"/>
+                  </a:ext>
+                </a:extLst>
+              </p:cNvPr>
+              <p:cNvCxnSpPr>
+                <a:cxnSpLocks/>
+                <a:stCxn id="1044" idx="3"/>
+                <a:endCxn id="1106" idx="1"/>
+              </p:cNvCxnSpPr>
+              <p:nvPr/>
+            </p:nvCxnSpPr>
+            <p:spPr>
+              <a:xfrm flipV="1">
+                <a:off x="-5167048" y="1465904"/>
+                <a:ext cx="408007" cy="553"/>
+              </a:xfrm>
+              <a:prstGeom prst="bentConnector3">
+                <a:avLst>
+                  <a:gd name="adj1" fmla="val 50000"/>
+                </a:avLst>
+              </a:prstGeom>
+              <a:ln>
+                <a:solidFill>
+                  <a:schemeClr val="tx1"/>
+                </a:solidFill>
+                <a:tailEnd type="triangle"/>
+              </a:ln>
+            </p:spPr>
+            <p:style>
+              <a:lnRef idx="2">
+                <a:schemeClr val="accent1"/>
+              </a:lnRef>
+              <a:fillRef idx="0">
+                <a:schemeClr val="accent1"/>
+              </a:fillRef>
+              <a:effectRef idx="1">
+                <a:schemeClr val="accent1"/>
+              </a:effectRef>
+              <a:fontRef idx="minor">
+                <a:schemeClr val="tx1"/>
+              </a:fontRef>
+            </p:style>
+          </p:cxnSp>
+          <p:cxnSp>
+            <p:nvCxnSpPr>
+              <p:cNvPr id="1137" name="Elbow Connector 1136">
+                <a:extLst>
+                  <a:ext uri="{FF2B5EF4-FFF2-40B4-BE49-F238E27FC236}">
+                    <a16:creationId xmlns:a16="http://schemas.microsoft.com/office/drawing/2014/main" id="{E1145BE2-699F-28AC-1786-DC7CDB055AC8}"/>
+                  </a:ext>
+                </a:extLst>
+              </p:cNvPr>
+              <p:cNvCxnSpPr>
+                <a:cxnSpLocks/>
+                <a:stCxn id="1045" idx="3"/>
+                <a:endCxn id="1106" idx="1"/>
+              </p:cNvCxnSpPr>
+              <p:nvPr/>
+            </p:nvCxnSpPr>
+            <p:spPr>
+              <a:xfrm flipV="1">
+                <a:off x="-5167048" y="1465904"/>
+                <a:ext cx="408007" cy="648669"/>
+              </a:xfrm>
+              <a:prstGeom prst="bentConnector3">
+                <a:avLst>
+                  <a:gd name="adj1" fmla="val 50000"/>
+                </a:avLst>
+              </a:prstGeom>
+              <a:ln>
+                <a:solidFill>
+                  <a:schemeClr val="tx1"/>
+                </a:solidFill>
+                <a:tailEnd type="triangle"/>
+              </a:ln>
+            </p:spPr>
+            <p:style>
+              <a:lnRef idx="2">
+                <a:schemeClr val="accent1"/>
+              </a:lnRef>
+              <a:fillRef idx="0">
+                <a:schemeClr val="accent1"/>
+              </a:fillRef>
+              <a:effectRef idx="1">
+                <a:schemeClr val="accent1"/>
+              </a:effectRef>
+              <a:fontRef idx="minor">
+                <a:schemeClr val="tx1"/>
+              </a:fontRef>
+            </p:style>
+          </p:cxnSp>
+          <p:cxnSp>
+            <p:nvCxnSpPr>
+              <p:cNvPr id="1140" name="Elbow Connector 1139">
+                <a:extLst>
+                  <a:ext uri="{FF2B5EF4-FFF2-40B4-BE49-F238E27FC236}">
+                    <a16:creationId xmlns:a16="http://schemas.microsoft.com/office/drawing/2014/main" id="{9FF8A57F-E5BC-BB1F-70B9-00F550F8B429}"/>
+                  </a:ext>
+                </a:extLst>
+              </p:cNvPr>
+              <p:cNvCxnSpPr>
+                <a:cxnSpLocks/>
+                <a:stCxn id="1049" idx="3"/>
+                <a:endCxn id="1106" idx="1"/>
+              </p:cNvCxnSpPr>
+              <p:nvPr/>
+            </p:nvCxnSpPr>
+            <p:spPr>
+              <a:xfrm flipV="1">
+                <a:off x="-5167048" y="1465904"/>
+                <a:ext cx="408007" cy="1296785"/>
+              </a:xfrm>
+              <a:prstGeom prst="bentConnector3">
+                <a:avLst>
+                  <a:gd name="adj1" fmla="val 50000"/>
+                </a:avLst>
+              </a:prstGeom>
+              <a:ln>
+                <a:solidFill>
+                  <a:schemeClr val="tx1"/>
+                </a:solidFill>
+                <a:tailEnd type="triangle"/>
+              </a:ln>
+            </p:spPr>
+            <p:style>
+              <a:lnRef idx="2">
+                <a:schemeClr val="accent1"/>
+              </a:lnRef>
+              <a:fillRef idx="0">
+                <a:schemeClr val="accent1"/>
+              </a:fillRef>
+              <a:effectRef idx="1">
+                <a:schemeClr val="accent1"/>
+              </a:effectRef>
+              <a:fontRef idx="minor">
+                <a:schemeClr val="tx1"/>
+              </a:fontRef>
+            </p:style>
+          </p:cxnSp>
+          <p:cxnSp>
+            <p:nvCxnSpPr>
+              <p:cNvPr id="1143" name="Elbow Connector 1142">
+                <a:extLst>
+                  <a:ext uri="{FF2B5EF4-FFF2-40B4-BE49-F238E27FC236}">
+                    <a16:creationId xmlns:a16="http://schemas.microsoft.com/office/drawing/2014/main" id="{EC5FFB55-28B0-F630-5B9E-773AB623AD5D}"/>
+                  </a:ext>
+                </a:extLst>
+              </p:cNvPr>
+              <p:cNvCxnSpPr>
+                <a:cxnSpLocks/>
+                <a:stCxn id="1050" idx="3"/>
+                <a:endCxn id="1106" idx="1"/>
+              </p:cNvCxnSpPr>
+              <p:nvPr/>
+            </p:nvCxnSpPr>
+            <p:spPr>
+              <a:xfrm flipV="1">
+                <a:off x="-5167048" y="1465904"/>
+                <a:ext cx="408007" cy="1944901"/>
+              </a:xfrm>
+              <a:prstGeom prst="bentConnector3">
+                <a:avLst>
+                  <a:gd name="adj1" fmla="val 50000"/>
+                </a:avLst>
+              </a:prstGeom>
+              <a:ln>
+                <a:solidFill>
+                  <a:schemeClr val="tx1"/>
+                </a:solidFill>
+                <a:tailEnd type="triangle"/>
+              </a:ln>
+            </p:spPr>
+            <p:style>
+              <a:lnRef idx="2">
+                <a:schemeClr val="accent1"/>
+              </a:lnRef>
+              <a:fillRef idx="0">
+                <a:schemeClr val="accent1"/>
+              </a:fillRef>
+              <a:effectRef idx="1">
+                <a:schemeClr val="accent1"/>
+              </a:effectRef>
+              <a:fontRef idx="minor">
+                <a:schemeClr val="tx1"/>
+              </a:fontRef>
+            </p:style>
+          </p:cxnSp>
+          <p:cxnSp>
+            <p:nvCxnSpPr>
+              <p:cNvPr id="1146" name="Elbow Connector 1145">
+                <a:extLst>
+                  <a:ext uri="{FF2B5EF4-FFF2-40B4-BE49-F238E27FC236}">
+                    <a16:creationId xmlns:a16="http://schemas.microsoft.com/office/drawing/2014/main" id="{17448D2F-8216-5E02-17C1-6FBE43ACED7B}"/>
+                  </a:ext>
+                </a:extLst>
+              </p:cNvPr>
+              <p:cNvCxnSpPr>
+                <a:cxnSpLocks/>
+                <a:stCxn id="1051" idx="3"/>
+                <a:endCxn id="1106" idx="1"/>
+              </p:cNvCxnSpPr>
+              <p:nvPr/>
+            </p:nvCxnSpPr>
+            <p:spPr>
+              <a:xfrm flipV="1">
+                <a:off x="-5167048" y="1465904"/>
+                <a:ext cx="408007" cy="2593019"/>
+              </a:xfrm>
+              <a:prstGeom prst="bentConnector3">
+                <a:avLst>
+                  <a:gd name="adj1" fmla="val 50000"/>
+                </a:avLst>
+              </a:prstGeom>
+              <a:ln>
+                <a:solidFill>
+                  <a:schemeClr val="tx1"/>
+                </a:solidFill>
+                <a:tailEnd type="triangle"/>
+              </a:ln>
+            </p:spPr>
+            <p:style>
+              <a:lnRef idx="2">
+                <a:schemeClr val="accent1"/>
+              </a:lnRef>
+              <a:fillRef idx="0">
+                <a:schemeClr val="accent1"/>
+              </a:fillRef>
+              <a:effectRef idx="1">
+                <a:schemeClr val="accent1"/>
+              </a:effectRef>
+              <a:fontRef idx="minor">
+                <a:schemeClr val="tx1"/>
+              </a:fontRef>
+            </p:style>
+          </p:cxnSp>
+          <p:sp>
+            <p:nvSpPr>
+              <p:cNvPr id="1153" name="TextBox 1152">
+                <a:extLst>
+                  <a:ext uri="{FF2B5EF4-FFF2-40B4-BE49-F238E27FC236}">
+                    <a16:creationId xmlns:a16="http://schemas.microsoft.com/office/drawing/2014/main" id="{E5BE43EB-0432-A10E-26AB-ADA02AC347D1}"/>
+                  </a:ext>
+                </a:extLst>
+              </p:cNvPr>
+              <p:cNvSpPr txBox="1"/>
+              <p:nvPr/>
+            </p:nvSpPr>
+            <p:spPr>
+              <a:xfrm>
+                <a:off x="-14982146" y="-2058958"/>
+                <a:ext cx="3938001" cy="523220"/>
+              </a:xfrm>
+              <a:prstGeom prst="rect">
+                <a:avLst/>
+              </a:prstGeom>
+              <a:noFill/>
+            </p:spPr>
+            <p:txBody>
+              <a:bodyPr wrap="none" rtlCol="0">
+                <a:spAutoFit/>
+              </a:bodyPr>
+              <a:lstStyle/>
+              <a:p>
+                <a:r>
+                  <a:rPr lang="en-US" sz="2800" b="1" dirty="0"/>
+                  <a:t>a. DEMOS-MISCAN-Pro</a:t>
+                </a:r>
+              </a:p>
+            </p:txBody>
+          </p:sp>
+          <p:grpSp>
+            <p:nvGrpSpPr>
+              <p:cNvPr id="1155" name="Group 1154">
+                <a:extLst>
+                  <a:ext uri="{FF2B5EF4-FFF2-40B4-BE49-F238E27FC236}">
+                    <a16:creationId xmlns:a16="http://schemas.microsoft.com/office/drawing/2014/main" id="{446BCDB7-F0F7-8287-7DE8-094301419A0E}"/>
+                  </a:ext>
+                </a:extLst>
+              </p:cNvPr>
+              <p:cNvGrpSpPr/>
+              <p:nvPr/>
+            </p:nvGrpSpPr>
+            <p:grpSpPr>
+              <a:xfrm>
+                <a:off x="-15013297" y="4515033"/>
+                <a:ext cx="11554392" cy="6676493"/>
+                <a:chOff x="390764" y="51853"/>
+                <a:chExt cx="11554392" cy="6676493"/>
+              </a:xfrm>
+            </p:grpSpPr>
+            <p:sp>
+              <p:nvSpPr>
+                <p:cNvPr id="1156" name="Rounded Rectangle 1155">
+                  <a:extLst>
+                    <a:ext uri="{FF2B5EF4-FFF2-40B4-BE49-F238E27FC236}">
+                      <a16:creationId xmlns:a16="http://schemas.microsoft.com/office/drawing/2014/main" id="{758D52D7-4ACB-CCBF-AADB-80E7666EF100}"/>
+                    </a:ext>
+                  </a:extLst>
+                </p:cNvPr>
+                <p:cNvSpPr/>
+                <p:nvPr/>
+              </p:nvSpPr>
+              <p:spPr>
+                <a:xfrm>
+                  <a:off x="390764" y="51853"/>
+                  <a:ext cx="11554392" cy="6676493"/>
+                </a:xfrm>
+                <a:prstGeom prst="roundRect">
+                  <a:avLst>
+                    <a:gd name="adj" fmla="val 0"/>
+                  </a:avLst>
+                </a:prstGeom>
+                <a:solidFill>
+                  <a:schemeClr val="bg1"/>
+                </a:solidFill>
+                <a:ln>
+                  <a:noFill/>
+                </a:ln>
+              </p:spPr>
+              <p:style>
+                <a:lnRef idx="2">
+                  <a:schemeClr val="accent1">
+                    <a:shade val="15000"/>
+                  </a:schemeClr>
+                </a:lnRef>
+                <a:fillRef idx="1">
+                  <a:schemeClr val="accent1"/>
+                </a:fillRef>
+                <a:effectRef idx="0">
+                  <a:schemeClr val="accent1"/>
+                </a:effectRef>
+                <a:fontRef idx="minor">
+                  <a:schemeClr val="lt1"/>
+                </a:fontRef>
+              </p:style>
+              <p:txBody>
+                <a:bodyPr rtlCol="0" anchor="ctr"/>
+                <a:lstStyle/>
+                <a:p>
+                  <a:pPr algn="ctr"/>
+                  <a:endParaRPr lang="en-US" sz="1600" dirty="0">
+                    <a:solidFill>
+                      <a:sysClr val="windowText" lastClr="000000"/>
+                    </a:solidFill>
+                  </a:endParaRPr>
+                </a:p>
+              </p:txBody>
+            </p:sp>
+            <p:sp>
+              <p:nvSpPr>
+                <p:cNvPr id="1158" name="Rounded Rectangle 1157">
+                  <a:extLst>
+                    <a:ext uri="{FF2B5EF4-FFF2-40B4-BE49-F238E27FC236}">
+                      <a16:creationId xmlns:a16="http://schemas.microsoft.com/office/drawing/2014/main" id="{E1593A46-D299-FE27-AFB1-85FA0826F8DE}"/>
+                    </a:ext>
+                  </a:extLst>
+                </p:cNvPr>
+                <p:cNvSpPr/>
+                <p:nvPr/>
+              </p:nvSpPr>
+              <p:spPr>
+                <a:xfrm>
+                  <a:off x="579720" y="3105927"/>
+                  <a:ext cx="1223075" cy="563831"/>
+                </a:xfrm>
+                <a:prstGeom prst="roundRect">
+                  <a:avLst>
+                    <a:gd name="adj" fmla="val 22916"/>
+                  </a:avLst>
+                </a:prstGeom>
+                <a:solidFill>
+                  <a:schemeClr val="bg1"/>
+                </a:solidFill>
+              </p:spPr>
+              <p:style>
+                <a:lnRef idx="2">
+                  <a:schemeClr val="accent1">
+                    <a:shade val="15000"/>
+                  </a:schemeClr>
+                </a:lnRef>
+                <a:fillRef idx="1">
+                  <a:schemeClr val="accent1"/>
+                </a:fillRef>
+                <a:effectRef idx="0">
+                  <a:schemeClr val="accent1"/>
+                </a:effectRef>
+                <a:fontRef idx="minor">
+                  <a:schemeClr val="lt1"/>
+                </a:fontRef>
+              </p:style>
+              <p:txBody>
+                <a:bodyPr rtlCol="0" anchor="ctr"/>
+                <a:lstStyle/>
+                <a:p>
+                  <a:pPr algn="ctr"/>
+                  <a:r>
+                    <a:rPr lang="en-US" dirty="0">
+                      <a:solidFill>
+                        <a:sysClr val="windowText" lastClr="000000"/>
+                      </a:solidFill>
+                    </a:rPr>
+                    <a:t>Eligible individual</a:t>
+                  </a:r>
+                </a:p>
+              </p:txBody>
+            </p:sp>
+            <p:sp>
+              <p:nvSpPr>
+                <p:cNvPr id="1159" name="Rounded Rectangle 1158">
+                  <a:extLst>
+                    <a:ext uri="{FF2B5EF4-FFF2-40B4-BE49-F238E27FC236}">
+                      <a16:creationId xmlns:a16="http://schemas.microsoft.com/office/drawing/2014/main" id="{3FE3C39F-36CF-69B5-CE6B-DAF693CA904D}"/>
+                    </a:ext>
+                  </a:extLst>
+                </p:cNvPr>
+                <p:cNvSpPr/>
+                <p:nvPr/>
+              </p:nvSpPr>
+              <p:spPr>
+                <a:xfrm>
+                  <a:off x="3788680" y="1426277"/>
+                  <a:ext cx="1323286" cy="563831"/>
+                </a:xfrm>
+                <a:prstGeom prst="roundRect">
+                  <a:avLst>
+                    <a:gd name="adj" fmla="val 22916"/>
+                  </a:avLst>
+                </a:prstGeom>
+                <a:solidFill>
+                  <a:schemeClr val="bg1"/>
+                </a:solidFill>
+              </p:spPr>
+              <p:style>
+                <a:lnRef idx="2">
+                  <a:schemeClr val="accent1">
+                    <a:shade val="15000"/>
+                  </a:schemeClr>
+                </a:lnRef>
+                <a:fillRef idx="1">
+                  <a:schemeClr val="accent1"/>
+                </a:fillRef>
+                <a:effectRef idx="0">
+                  <a:schemeClr val="accent1"/>
+                </a:effectRef>
+                <a:fontRef idx="minor">
+                  <a:schemeClr val="lt1"/>
+                </a:fontRef>
+              </p:style>
+              <p:txBody>
+                <a:bodyPr rtlCol="0" anchor="ctr"/>
+                <a:lstStyle/>
+                <a:p>
+                  <a:pPr algn="ctr"/>
+                  <a:r>
+                    <a:rPr lang="en-US" dirty="0">
+                      <a:solidFill>
+                        <a:sysClr val="windowText" lastClr="000000"/>
+                      </a:solidFill>
+                    </a:rPr>
+                    <a:t>PRS </a:t>
+                  </a:r>
+                </a:p>
+                <a:p>
+                  <a:pPr algn="ctr"/>
+                  <a:r>
+                    <a:rPr lang="en-US" dirty="0">
+                      <a:solidFill>
+                        <a:sysClr val="windowText" lastClr="000000"/>
+                      </a:solidFill>
+                    </a:rPr>
+                    <a:t>&gt; decile 8?</a:t>
+                  </a:r>
+                </a:p>
+              </p:txBody>
+            </p:sp>
+            <p:sp>
+              <p:nvSpPr>
+                <p:cNvPr id="1160" name="Rounded Rectangle 1159">
+                  <a:extLst>
+                    <a:ext uri="{FF2B5EF4-FFF2-40B4-BE49-F238E27FC236}">
+                      <a16:creationId xmlns:a16="http://schemas.microsoft.com/office/drawing/2014/main" id="{EFF06AA6-E2D7-A1E1-2A09-EAA2F6CEA4A4}"/>
+                    </a:ext>
+                  </a:extLst>
+                </p:cNvPr>
+                <p:cNvSpPr/>
+                <p:nvPr/>
+              </p:nvSpPr>
+              <p:spPr>
+                <a:xfrm>
+                  <a:off x="2105860" y="3105928"/>
+                  <a:ext cx="1223075" cy="563831"/>
+                </a:xfrm>
+                <a:prstGeom prst="roundRect">
+                  <a:avLst>
+                    <a:gd name="adj" fmla="val 22916"/>
+                  </a:avLst>
+                </a:prstGeom>
+                <a:solidFill>
+                  <a:schemeClr val="bg1"/>
+                </a:solidFill>
+              </p:spPr>
+              <p:style>
+                <a:lnRef idx="2">
+                  <a:schemeClr val="accent1">
+                    <a:shade val="15000"/>
+                  </a:schemeClr>
+                </a:lnRef>
+                <a:fillRef idx="1">
+                  <a:schemeClr val="accent1"/>
+                </a:fillRef>
+                <a:effectRef idx="0">
+                  <a:schemeClr val="accent1"/>
+                </a:effectRef>
+                <a:fontRef idx="minor">
+                  <a:schemeClr val="lt1"/>
+                </a:fontRef>
+              </p:style>
+              <p:txBody>
+                <a:bodyPr rtlCol="0" anchor="ctr"/>
+                <a:lstStyle/>
+                <a:p>
+                  <a:pPr algn="ctr"/>
+                  <a:r>
+                    <a:rPr lang="en-US" dirty="0">
+                      <a:solidFill>
+                        <a:sysClr val="windowText" lastClr="000000"/>
+                      </a:solidFill>
+                    </a:rPr>
+                    <a:t>PSA </a:t>
+                  </a:r>
+                </a:p>
+                <a:p>
+                  <a:pPr algn="ctr"/>
+                  <a:r>
+                    <a:rPr lang="en-US" dirty="0">
+                      <a:solidFill>
+                        <a:sysClr val="windowText" lastClr="000000"/>
+                      </a:solidFill>
+                    </a:rPr>
+                    <a:t>positive?</a:t>
+                  </a:r>
+                </a:p>
+              </p:txBody>
+            </p:sp>
+            <p:sp>
+              <p:nvSpPr>
+                <p:cNvPr id="1161" name="Rounded Rectangle 1160">
+                  <a:extLst>
+                    <a:ext uri="{FF2B5EF4-FFF2-40B4-BE49-F238E27FC236}">
+                      <a16:creationId xmlns:a16="http://schemas.microsoft.com/office/drawing/2014/main" id="{4DAC6A2E-3653-0D14-07FA-2BCE4A287932}"/>
+                    </a:ext>
+                  </a:extLst>
+                </p:cNvPr>
+                <p:cNvSpPr/>
+                <p:nvPr/>
+              </p:nvSpPr>
+              <p:spPr>
+                <a:xfrm>
+                  <a:off x="3788680" y="4867892"/>
+                  <a:ext cx="1323286" cy="563831"/>
+                </a:xfrm>
+                <a:prstGeom prst="roundRect">
+                  <a:avLst>
+                    <a:gd name="adj" fmla="val 22916"/>
+                  </a:avLst>
+                </a:prstGeom>
+                <a:solidFill>
+                  <a:schemeClr val="bg1"/>
+                </a:solidFill>
+              </p:spPr>
+              <p:style>
+                <a:lnRef idx="2">
+                  <a:schemeClr val="accent1">
+                    <a:shade val="15000"/>
+                  </a:schemeClr>
+                </a:lnRef>
+                <a:fillRef idx="1">
+                  <a:schemeClr val="accent1"/>
+                </a:fillRef>
+                <a:effectRef idx="0">
+                  <a:schemeClr val="accent1"/>
+                </a:effectRef>
+                <a:fontRef idx="minor">
+                  <a:schemeClr val="lt1"/>
+                </a:fontRef>
+              </p:style>
+              <p:txBody>
+                <a:bodyPr rtlCol="0" anchor="ctr"/>
+                <a:lstStyle/>
+                <a:p>
+                  <a:pPr algn="ctr"/>
+                  <a:r>
+                    <a:rPr lang="en-US" dirty="0">
+                      <a:solidFill>
+                        <a:sysClr val="windowText" lastClr="000000"/>
+                      </a:solidFill>
+                    </a:rPr>
+                    <a:t>PRS </a:t>
+                  </a:r>
+                </a:p>
+                <a:p>
+                  <a:pPr algn="ctr"/>
+                  <a:r>
+                    <a:rPr lang="en-US" dirty="0">
+                      <a:solidFill>
+                        <a:sysClr val="windowText" lastClr="000000"/>
+                      </a:solidFill>
+                    </a:rPr>
+                    <a:t>&gt; decile 8?</a:t>
+                  </a:r>
+                </a:p>
+              </p:txBody>
+            </p:sp>
+            <p:sp>
+              <p:nvSpPr>
+                <p:cNvPr id="1162" name="Rounded Rectangle 1161">
+                  <a:extLst>
+                    <a:ext uri="{FF2B5EF4-FFF2-40B4-BE49-F238E27FC236}">
+                      <a16:creationId xmlns:a16="http://schemas.microsoft.com/office/drawing/2014/main" id="{1441C8B5-47AF-C080-E1B6-415C0BA29F1F}"/>
+                    </a:ext>
+                  </a:extLst>
+                </p:cNvPr>
+                <p:cNvSpPr/>
+                <p:nvPr/>
+              </p:nvSpPr>
+              <p:spPr>
+                <a:xfrm>
+                  <a:off x="5431804" y="862446"/>
+                  <a:ext cx="1323286" cy="563831"/>
+                </a:xfrm>
+                <a:prstGeom prst="roundRect">
+                  <a:avLst>
+                    <a:gd name="adj" fmla="val 22916"/>
+                  </a:avLst>
+                </a:prstGeom>
+                <a:solidFill>
+                  <a:schemeClr val="bg1"/>
+                </a:solidFill>
+              </p:spPr>
+              <p:style>
+                <a:lnRef idx="2">
+                  <a:schemeClr val="accent1">
+                    <a:shade val="15000"/>
+                  </a:schemeClr>
+                </a:lnRef>
+                <a:fillRef idx="1">
+                  <a:schemeClr val="accent1"/>
+                </a:fillRef>
+                <a:effectRef idx="0">
+                  <a:schemeClr val="accent1"/>
+                </a:effectRef>
+                <a:fontRef idx="minor">
+                  <a:schemeClr val="lt1"/>
+                </a:fontRef>
+              </p:style>
+              <p:txBody>
+                <a:bodyPr rtlCol="0" anchor="ctr"/>
+                <a:lstStyle/>
+                <a:p>
+                  <a:pPr algn="ctr"/>
+                  <a:r>
+                    <a:rPr lang="en-US" dirty="0">
+                      <a:solidFill>
+                        <a:sysClr val="windowText" lastClr="000000"/>
+                      </a:solidFill>
+                    </a:rPr>
+                    <a:t>Diagnosed</a:t>
+                  </a:r>
+                </a:p>
+              </p:txBody>
+            </p:sp>
+            <p:sp>
+              <p:nvSpPr>
+                <p:cNvPr id="1163" name="Rounded Rectangle 1162">
+                  <a:extLst>
+                    <a:ext uri="{FF2B5EF4-FFF2-40B4-BE49-F238E27FC236}">
+                      <a16:creationId xmlns:a16="http://schemas.microsoft.com/office/drawing/2014/main" id="{9E4682A2-798A-0213-439F-D9A4A6F34E7E}"/>
+                    </a:ext>
+                  </a:extLst>
+                </p:cNvPr>
+                <p:cNvSpPr/>
+                <p:nvPr/>
+              </p:nvSpPr>
+              <p:spPr>
+                <a:xfrm>
+                  <a:off x="5431804" y="1990108"/>
+                  <a:ext cx="1323286" cy="563831"/>
+                </a:xfrm>
+                <a:prstGeom prst="roundRect">
+                  <a:avLst>
+                    <a:gd name="adj" fmla="val 22916"/>
+                  </a:avLst>
+                </a:prstGeom>
+                <a:solidFill>
+                  <a:schemeClr val="bg1"/>
+                </a:solidFill>
+              </p:spPr>
+              <p:style>
+                <a:lnRef idx="2">
+                  <a:schemeClr val="accent1">
+                    <a:shade val="15000"/>
+                  </a:schemeClr>
+                </a:lnRef>
+                <a:fillRef idx="1">
+                  <a:schemeClr val="accent1"/>
+                </a:fillRef>
+                <a:effectRef idx="0">
+                  <a:schemeClr val="accent1"/>
+                </a:effectRef>
+                <a:fontRef idx="minor">
+                  <a:schemeClr val="lt1"/>
+                </a:fontRef>
+              </p:style>
+              <p:txBody>
+                <a:bodyPr rtlCol="0" anchor="ctr"/>
+                <a:lstStyle/>
+                <a:p>
+                  <a:pPr algn="ctr"/>
+                  <a:r>
+                    <a:rPr lang="en-US" dirty="0">
+                      <a:solidFill>
+                        <a:sysClr val="windowText" lastClr="000000"/>
+                      </a:solidFill>
+                    </a:rPr>
+                    <a:t>Repeat PSA once</a:t>
+                  </a:r>
+                </a:p>
+              </p:txBody>
+            </p:sp>
+            <p:sp>
+              <p:nvSpPr>
+                <p:cNvPr id="1164" name="Rounded Rectangle 1163">
+                  <a:extLst>
+                    <a:ext uri="{FF2B5EF4-FFF2-40B4-BE49-F238E27FC236}">
+                      <a16:creationId xmlns:a16="http://schemas.microsoft.com/office/drawing/2014/main" id="{D383CDBF-426B-A621-051F-1726EC7E502D}"/>
+                    </a:ext>
+                  </a:extLst>
+                </p:cNvPr>
+                <p:cNvSpPr/>
+                <p:nvPr/>
+              </p:nvSpPr>
+              <p:spPr>
+                <a:xfrm>
+                  <a:off x="5431804" y="4300864"/>
+                  <a:ext cx="1323286" cy="563831"/>
+                </a:xfrm>
+                <a:prstGeom prst="roundRect">
+                  <a:avLst>
+                    <a:gd name="adj" fmla="val 22916"/>
+                  </a:avLst>
+                </a:prstGeom>
+                <a:solidFill>
+                  <a:schemeClr val="bg1"/>
+                </a:solidFill>
+              </p:spPr>
+              <p:style>
+                <a:lnRef idx="2">
+                  <a:schemeClr val="accent1">
+                    <a:shade val="15000"/>
+                  </a:schemeClr>
+                </a:lnRef>
+                <a:fillRef idx="1">
+                  <a:schemeClr val="accent1"/>
+                </a:fillRef>
+                <a:effectRef idx="0">
+                  <a:schemeClr val="accent1"/>
+                </a:effectRef>
+                <a:fontRef idx="minor">
+                  <a:schemeClr val="lt1"/>
+                </a:fontRef>
+              </p:style>
+              <p:txBody>
+                <a:bodyPr rtlCol="0" anchor="ctr"/>
+                <a:lstStyle/>
+                <a:p>
+                  <a:pPr algn="ctr"/>
+                  <a:r>
+                    <a:rPr lang="en-US" dirty="0">
+                      <a:solidFill>
+                        <a:sysClr val="windowText" lastClr="000000"/>
+                      </a:solidFill>
+                    </a:rPr>
+                    <a:t>Repeat PSA once</a:t>
+                  </a:r>
+                </a:p>
+              </p:txBody>
+            </p:sp>
+            <p:sp>
+              <p:nvSpPr>
+                <p:cNvPr id="1165" name="Rounded Rectangle 1164">
+                  <a:extLst>
+                    <a:ext uri="{FF2B5EF4-FFF2-40B4-BE49-F238E27FC236}">
+                      <a16:creationId xmlns:a16="http://schemas.microsoft.com/office/drawing/2014/main" id="{A90D18C8-E124-74D6-8238-870A41EEDF04}"/>
+                    </a:ext>
+                  </a:extLst>
+                </p:cNvPr>
+                <p:cNvSpPr/>
+                <p:nvPr/>
+              </p:nvSpPr>
+              <p:spPr>
+                <a:xfrm>
+                  <a:off x="5431804" y="5431723"/>
+                  <a:ext cx="1323286" cy="563831"/>
+                </a:xfrm>
+                <a:prstGeom prst="roundRect">
+                  <a:avLst>
+                    <a:gd name="adj" fmla="val 22916"/>
+                  </a:avLst>
+                </a:prstGeom>
+                <a:solidFill>
+                  <a:schemeClr val="bg1"/>
+                </a:solidFill>
+              </p:spPr>
+              <p:style>
+                <a:lnRef idx="2">
+                  <a:schemeClr val="accent1">
+                    <a:shade val="15000"/>
+                  </a:schemeClr>
+                </a:lnRef>
+                <a:fillRef idx="1">
+                  <a:schemeClr val="accent1"/>
+                </a:fillRef>
+                <a:effectRef idx="0">
+                  <a:schemeClr val="accent1"/>
+                </a:effectRef>
+                <a:fontRef idx="minor">
+                  <a:schemeClr val="lt1"/>
+                </a:fontRef>
+              </p:style>
+              <p:txBody>
+                <a:bodyPr rtlCol="0" anchor="ctr"/>
+                <a:lstStyle/>
+                <a:p>
+                  <a:pPr algn="ctr"/>
+                  <a:r>
+                    <a:rPr lang="en-US" dirty="0">
+                      <a:solidFill>
+                        <a:sysClr val="windowText" lastClr="000000"/>
+                      </a:solidFill>
+                    </a:rPr>
+                    <a:t>Not Diagnosed</a:t>
+                  </a:r>
+                </a:p>
+              </p:txBody>
+            </p:sp>
+            <p:sp>
+              <p:nvSpPr>
+                <p:cNvPr id="1166" name="Rounded Rectangle 1165">
+                  <a:extLst>
+                    <a:ext uri="{FF2B5EF4-FFF2-40B4-BE49-F238E27FC236}">
+                      <a16:creationId xmlns:a16="http://schemas.microsoft.com/office/drawing/2014/main" id="{826BE5ED-0077-818D-A963-8CED3F5758AF}"/>
+                    </a:ext>
+                  </a:extLst>
+                </p:cNvPr>
+                <p:cNvSpPr/>
+                <p:nvPr/>
+              </p:nvSpPr>
+              <p:spPr>
+                <a:xfrm>
+                  <a:off x="7167341" y="1426277"/>
+                  <a:ext cx="1323286" cy="563831"/>
+                </a:xfrm>
+                <a:prstGeom prst="roundRect">
+                  <a:avLst>
+                    <a:gd name="adj" fmla="val 22916"/>
+                  </a:avLst>
+                </a:prstGeom>
+                <a:solidFill>
+                  <a:schemeClr val="bg1"/>
+                </a:solidFill>
+              </p:spPr>
+              <p:style>
+                <a:lnRef idx="2">
+                  <a:schemeClr val="accent1">
+                    <a:shade val="15000"/>
+                  </a:schemeClr>
+                </a:lnRef>
+                <a:fillRef idx="1">
+                  <a:schemeClr val="accent1"/>
+                </a:fillRef>
+                <a:effectRef idx="0">
+                  <a:schemeClr val="accent1"/>
+                </a:effectRef>
+                <a:fontRef idx="minor">
+                  <a:schemeClr val="lt1"/>
+                </a:fontRef>
+              </p:style>
+              <p:txBody>
+                <a:bodyPr rtlCol="0" anchor="ctr"/>
+                <a:lstStyle/>
+                <a:p>
+                  <a:pPr algn="ctr"/>
+                  <a:r>
+                    <a:rPr lang="en-US" dirty="0">
+                      <a:solidFill>
+                        <a:sysClr val="windowText" lastClr="000000"/>
+                      </a:solidFill>
+                    </a:rPr>
+                    <a:t>Diagnosed</a:t>
+                  </a:r>
+                </a:p>
+              </p:txBody>
+            </p:sp>
+            <p:sp>
+              <p:nvSpPr>
+                <p:cNvPr id="1167" name="Rounded Rectangle 1166">
+                  <a:extLst>
+                    <a:ext uri="{FF2B5EF4-FFF2-40B4-BE49-F238E27FC236}">
+                      <a16:creationId xmlns:a16="http://schemas.microsoft.com/office/drawing/2014/main" id="{691F0876-A2D1-9EA7-3CAB-190A174D0955}"/>
+                    </a:ext>
+                  </a:extLst>
+                </p:cNvPr>
+                <p:cNvSpPr/>
+                <p:nvPr/>
+              </p:nvSpPr>
+              <p:spPr>
+                <a:xfrm>
+                  <a:off x="7167341" y="2553938"/>
+                  <a:ext cx="1323286" cy="563831"/>
+                </a:xfrm>
+                <a:prstGeom prst="roundRect">
+                  <a:avLst>
+                    <a:gd name="adj" fmla="val 22916"/>
+                  </a:avLst>
+                </a:prstGeom>
+                <a:solidFill>
+                  <a:schemeClr val="bg1"/>
+                </a:solidFill>
+              </p:spPr>
+              <p:style>
+                <a:lnRef idx="2">
+                  <a:schemeClr val="accent1">
+                    <a:shade val="15000"/>
+                  </a:schemeClr>
+                </a:lnRef>
+                <a:fillRef idx="1">
+                  <a:schemeClr val="accent1"/>
+                </a:fillRef>
+                <a:effectRef idx="0">
+                  <a:schemeClr val="accent1"/>
+                </a:effectRef>
+                <a:fontRef idx="minor">
+                  <a:schemeClr val="lt1"/>
+                </a:fontRef>
+              </p:style>
+              <p:txBody>
+                <a:bodyPr rtlCol="0" anchor="ctr"/>
+                <a:lstStyle/>
+                <a:p>
+                  <a:pPr algn="ctr"/>
+                  <a:r>
+                    <a:rPr lang="en-US" dirty="0">
+                      <a:solidFill>
+                        <a:sysClr val="windowText" lastClr="000000"/>
+                      </a:solidFill>
+                    </a:rPr>
+                    <a:t>Not Diagnosed</a:t>
+                  </a:r>
+                </a:p>
+              </p:txBody>
+            </p:sp>
+            <p:sp>
+              <p:nvSpPr>
+                <p:cNvPr id="1168" name="Rounded Rectangle 1167">
+                  <a:extLst>
+                    <a:ext uri="{FF2B5EF4-FFF2-40B4-BE49-F238E27FC236}">
+                      <a16:creationId xmlns:a16="http://schemas.microsoft.com/office/drawing/2014/main" id="{B04112D1-0F75-C3DC-C79C-2E30873F58E1}"/>
+                    </a:ext>
+                  </a:extLst>
+                </p:cNvPr>
+                <p:cNvSpPr/>
+                <p:nvPr/>
+              </p:nvSpPr>
+              <p:spPr>
+                <a:xfrm>
+                  <a:off x="7167341" y="3737033"/>
+                  <a:ext cx="1323286" cy="563831"/>
+                </a:xfrm>
+                <a:prstGeom prst="roundRect">
+                  <a:avLst>
+                    <a:gd name="adj" fmla="val 22916"/>
+                  </a:avLst>
+                </a:prstGeom>
+                <a:solidFill>
+                  <a:schemeClr val="bg1"/>
+                </a:solidFill>
+              </p:spPr>
+              <p:style>
+                <a:lnRef idx="2">
+                  <a:schemeClr val="accent1">
+                    <a:shade val="15000"/>
+                  </a:schemeClr>
+                </a:lnRef>
+                <a:fillRef idx="1">
+                  <a:schemeClr val="accent1"/>
+                </a:fillRef>
+                <a:effectRef idx="0">
+                  <a:schemeClr val="accent1"/>
+                </a:effectRef>
+                <a:fontRef idx="minor">
+                  <a:schemeClr val="lt1"/>
+                </a:fontRef>
+              </p:style>
+              <p:txBody>
+                <a:bodyPr rtlCol="0" anchor="ctr"/>
+                <a:lstStyle/>
+                <a:p>
+                  <a:pPr algn="ctr"/>
+                  <a:r>
+                    <a:rPr lang="en-US" dirty="0">
+                      <a:solidFill>
+                        <a:sysClr val="windowText" lastClr="000000"/>
+                      </a:solidFill>
+                    </a:rPr>
+                    <a:t>Diagnosed</a:t>
+                  </a:r>
+                </a:p>
+              </p:txBody>
+            </p:sp>
+            <p:sp>
+              <p:nvSpPr>
+                <p:cNvPr id="1169" name="Rounded Rectangle 1168">
+                  <a:extLst>
+                    <a:ext uri="{FF2B5EF4-FFF2-40B4-BE49-F238E27FC236}">
+                      <a16:creationId xmlns:a16="http://schemas.microsoft.com/office/drawing/2014/main" id="{A10C22F1-D0D5-9CE5-B7EA-656959F1A679}"/>
+                    </a:ext>
+                  </a:extLst>
+                </p:cNvPr>
+                <p:cNvSpPr/>
+                <p:nvPr/>
+              </p:nvSpPr>
+              <p:spPr>
+                <a:xfrm>
+                  <a:off x="7167341" y="4864694"/>
+                  <a:ext cx="1323286" cy="563831"/>
+                </a:xfrm>
+                <a:prstGeom prst="roundRect">
+                  <a:avLst>
+                    <a:gd name="adj" fmla="val 22916"/>
+                  </a:avLst>
+                </a:prstGeom>
+                <a:solidFill>
+                  <a:schemeClr val="bg1"/>
+                </a:solidFill>
+              </p:spPr>
+              <p:style>
+                <a:lnRef idx="2">
+                  <a:schemeClr val="accent1">
+                    <a:shade val="15000"/>
+                  </a:schemeClr>
+                </a:lnRef>
+                <a:fillRef idx="1">
+                  <a:schemeClr val="accent1"/>
+                </a:fillRef>
+                <a:effectRef idx="0">
+                  <a:schemeClr val="accent1"/>
+                </a:effectRef>
+                <a:fontRef idx="minor">
+                  <a:schemeClr val="lt1"/>
+                </a:fontRef>
+              </p:style>
+              <p:txBody>
+                <a:bodyPr rtlCol="0" anchor="ctr"/>
+                <a:lstStyle/>
+                <a:p>
+                  <a:pPr algn="ctr"/>
+                  <a:r>
+                    <a:rPr lang="en-US" dirty="0">
+                      <a:solidFill>
+                        <a:sysClr val="windowText" lastClr="000000"/>
+                      </a:solidFill>
+                    </a:rPr>
+                    <a:t>Not Diagnosed</a:t>
+                  </a:r>
+                </a:p>
+              </p:txBody>
+            </p:sp>
+            <p:cxnSp>
+              <p:nvCxnSpPr>
+                <p:cNvPr id="1170" name="Straight Arrow Connector 1169">
+                  <a:extLst>
+                    <a:ext uri="{FF2B5EF4-FFF2-40B4-BE49-F238E27FC236}">
+                      <a16:creationId xmlns:a16="http://schemas.microsoft.com/office/drawing/2014/main" id="{F78B270C-4572-6A60-B086-2F103BECD3B9}"/>
+                    </a:ext>
+                  </a:extLst>
+                </p:cNvPr>
+                <p:cNvCxnSpPr>
+                  <a:cxnSpLocks/>
+                  <a:stCxn id="1158" idx="3"/>
+                  <a:endCxn id="1160" idx="1"/>
+                </p:cNvCxnSpPr>
+                <p:nvPr/>
+              </p:nvCxnSpPr>
+              <p:spPr>
+                <a:xfrm>
+                  <a:off x="1802795" y="3387843"/>
+                  <a:ext cx="303065" cy="1"/>
+                </a:xfrm>
+                <a:prstGeom prst="straightConnector1">
+                  <a:avLst/>
+                </a:prstGeom>
+                <a:ln>
+                  <a:solidFill>
+                    <a:schemeClr val="tx1"/>
+                  </a:solidFill>
+                  <a:tailEnd type="triangle"/>
+                </a:ln>
+              </p:spPr>
+              <p:style>
+                <a:lnRef idx="2">
+                  <a:schemeClr val="accent1"/>
+                </a:lnRef>
+                <a:fillRef idx="0">
+                  <a:schemeClr val="accent1"/>
+                </a:fillRef>
+                <a:effectRef idx="1">
+                  <a:schemeClr val="accent1"/>
+                </a:effectRef>
+                <a:fontRef idx="minor">
+                  <a:schemeClr val="tx1"/>
+                </a:fontRef>
+              </p:style>
+            </p:cxnSp>
+            <p:cxnSp>
+              <p:nvCxnSpPr>
+                <p:cNvPr id="1171" name="Straight Arrow Connector 1170">
+                  <a:extLst>
+                    <a:ext uri="{FF2B5EF4-FFF2-40B4-BE49-F238E27FC236}">
+                      <a16:creationId xmlns:a16="http://schemas.microsoft.com/office/drawing/2014/main" id="{F20BD97E-4F89-4E24-5EC8-FCBADE7E4CE0}"/>
+                    </a:ext>
+                  </a:extLst>
+                </p:cNvPr>
+                <p:cNvCxnSpPr>
+                  <a:cxnSpLocks/>
+                  <a:stCxn id="1160" idx="3"/>
+                  <a:endCxn id="1159" idx="1"/>
+                </p:cNvCxnSpPr>
+                <p:nvPr/>
+              </p:nvCxnSpPr>
+              <p:spPr>
+                <a:xfrm flipV="1">
+                  <a:off x="3328935" y="1708193"/>
+                  <a:ext cx="459745" cy="1679651"/>
+                </a:xfrm>
+                <a:prstGeom prst="straightConnector1">
+                  <a:avLst/>
+                </a:prstGeom>
+                <a:ln>
+                  <a:solidFill>
+                    <a:schemeClr val="tx1"/>
+                  </a:solidFill>
+                  <a:tailEnd type="triangle"/>
+                </a:ln>
+              </p:spPr>
+              <p:style>
+                <a:lnRef idx="2">
+                  <a:schemeClr val="accent1"/>
+                </a:lnRef>
+                <a:fillRef idx="0">
+                  <a:schemeClr val="accent1"/>
+                </a:fillRef>
+                <a:effectRef idx="1">
+                  <a:schemeClr val="accent1"/>
+                </a:effectRef>
+                <a:fontRef idx="minor">
+                  <a:schemeClr val="tx1"/>
+                </a:fontRef>
+              </p:style>
+            </p:cxnSp>
+            <p:cxnSp>
+              <p:nvCxnSpPr>
+                <p:cNvPr id="1172" name="Straight Arrow Connector 1171">
+                  <a:extLst>
+                    <a:ext uri="{FF2B5EF4-FFF2-40B4-BE49-F238E27FC236}">
+                      <a16:creationId xmlns:a16="http://schemas.microsoft.com/office/drawing/2014/main" id="{30F709E7-9BC8-16E1-2C9A-2ADA4AD2A25B}"/>
+                    </a:ext>
+                  </a:extLst>
+                </p:cNvPr>
+                <p:cNvCxnSpPr>
+                  <a:cxnSpLocks/>
+                  <a:stCxn id="1160" idx="3"/>
+                  <a:endCxn id="1161" idx="1"/>
+                </p:cNvCxnSpPr>
+                <p:nvPr/>
+              </p:nvCxnSpPr>
+              <p:spPr>
+                <a:xfrm>
+                  <a:off x="3328935" y="3387844"/>
+                  <a:ext cx="459745" cy="1761964"/>
+                </a:xfrm>
+                <a:prstGeom prst="straightConnector1">
+                  <a:avLst/>
+                </a:prstGeom>
+                <a:ln>
+                  <a:solidFill>
+                    <a:schemeClr val="tx1"/>
+                  </a:solidFill>
+                  <a:tailEnd type="triangle"/>
+                </a:ln>
+              </p:spPr>
+              <p:style>
+                <a:lnRef idx="2">
+                  <a:schemeClr val="accent1"/>
+                </a:lnRef>
+                <a:fillRef idx="0">
+                  <a:schemeClr val="accent1"/>
+                </a:fillRef>
+                <a:effectRef idx="1">
+                  <a:schemeClr val="accent1"/>
+                </a:effectRef>
+                <a:fontRef idx="minor">
+                  <a:schemeClr val="tx1"/>
+                </a:fontRef>
+              </p:style>
+            </p:cxnSp>
+            <p:cxnSp>
+              <p:nvCxnSpPr>
+                <p:cNvPr id="1173" name="Straight Arrow Connector 1172">
+                  <a:extLst>
+                    <a:ext uri="{FF2B5EF4-FFF2-40B4-BE49-F238E27FC236}">
+                      <a16:creationId xmlns:a16="http://schemas.microsoft.com/office/drawing/2014/main" id="{6ACEAEF5-5D65-1169-FBFD-D49BCAF0E067}"/>
+                    </a:ext>
+                  </a:extLst>
+                </p:cNvPr>
+                <p:cNvCxnSpPr>
+                  <a:cxnSpLocks/>
+                  <a:stCxn id="1159" idx="3"/>
+                  <a:endCxn id="1162" idx="1"/>
+                </p:cNvCxnSpPr>
+                <p:nvPr/>
+              </p:nvCxnSpPr>
+              <p:spPr>
+                <a:xfrm flipV="1">
+                  <a:off x="5111966" y="1144362"/>
+                  <a:ext cx="319838" cy="563831"/>
+                </a:xfrm>
+                <a:prstGeom prst="straightConnector1">
+                  <a:avLst/>
+                </a:prstGeom>
+                <a:ln>
+                  <a:solidFill>
+                    <a:schemeClr val="tx1"/>
+                  </a:solidFill>
+                  <a:tailEnd type="triangle"/>
+                </a:ln>
+              </p:spPr>
+              <p:style>
+                <a:lnRef idx="2">
+                  <a:schemeClr val="accent1"/>
+                </a:lnRef>
+                <a:fillRef idx="0">
+                  <a:schemeClr val="accent1"/>
+                </a:fillRef>
+                <a:effectRef idx="1">
+                  <a:schemeClr val="accent1"/>
+                </a:effectRef>
+                <a:fontRef idx="minor">
+                  <a:schemeClr val="tx1"/>
+                </a:fontRef>
+              </p:style>
+            </p:cxnSp>
+            <p:cxnSp>
+              <p:nvCxnSpPr>
+                <p:cNvPr id="1174" name="Straight Arrow Connector 1173">
+                  <a:extLst>
+                    <a:ext uri="{FF2B5EF4-FFF2-40B4-BE49-F238E27FC236}">
+                      <a16:creationId xmlns:a16="http://schemas.microsoft.com/office/drawing/2014/main" id="{B07F4C5C-6B1A-46AA-E856-3332827A4D53}"/>
+                    </a:ext>
+                  </a:extLst>
+                </p:cNvPr>
+                <p:cNvCxnSpPr>
+                  <a:cxnSpLocks/>
+                  <a:stCxn id="1159" idx="3"/>
+                  <a:endCxn id="1163" idx="1"/>
+                </p:cNvCxnSpPr>
+                <p:nvPr/>
+              </p:nvCxnSpPr>
+              <p:spPr>
+                <a:xfrm>
+                  <a:off x="5111966" y="1708193"/>
+                  <a:ext cx="319838" cy="563831"/>
+                </a:xfrm>
+                <a:prstGeom prst="straightConnector1">
+                  <a:avLst/>
+                </a:prstGeom>
+                <a:ln>
+                  <a:solidFill>
+                    <a:schemeClr val="tx1"/>
+                  </a:solidFill>
+                  <a:tailEnd type="triangle"/>
+                </a:ln>
+              </p:spPr>
+              <p:style>
+                <a:lnRef idx="2">
+                  <a:schemeClr val="accent1"/>
+                </a:lnRef>
+                <a:fillRef idx="0">
+                  <a:schemeClr val="accent1"/>
+                </a:fillRef>
+                <a:effectRef idx="1">
+                  <a:schemeClr val="accent1"/>
+                </a:effectRef>
+                <a:fontRef idx="minor">
+                  <a:schemeClr val="tx1"/>
+                </a:fontRef>
+              </p:style>
+            </p:cxnSp>
+            <p:cxnSp>
+              <p:nvCxnSpPr>
+                <p:cNvPr id="1175" name="Straight Arrow Connector 1174">
+                  <a:extLst>
+                    <a:ext uri="{FF2B5EF4-FFF2-40B4-BE49-F238E27FC236}">
+                      <a16:creationId xmlns:a16="http://schemas.microsoft.com/office/drawing/2014/main" id="{78F66652-AF20-1848-7866-FCCB6DF9B6F5}"/>
+                    </a:ext>
+                  </a:extLst>
+                </p:cNvPr>
+                <p:cNvCxnSpPr>
+                  <a:cxnSpLocks/>
+                  <a:stCxn id="1161" idx="3"/>
+                  <a:endCxn id="1164" idx="1"/>
+                </p:cNvCxnSpPr>
+                <p:nvPr/>
+              </p:nvCxnSpPr>
+              <p:spPr>
+                <a:xfrm flipV="1">
+                  <a:off x="5111966" y="4582780"/>
+                  <a:ext cx="319838" cy="567028"/>
+                </a:xfrm>
+                <a:prstGeom prst="straightConnector1">
+                  <a:avLst/>
+                </a:prstGeom>
+                <a:ln>
+                  <a:solidFill>
+                    <a:schemeClr val="tx1"/>
+                  </a:solidFill>
+                  <a:tailEnd type="triangle"/>
+                </a:ln>
+              </p:spPr>
+              <p:style>
+                <a:lnRef idx="2">
+                  <a:schemeClr val="accent1"/>
+                </a:lnRef>
+                <a:fillRef idx="0">
+                  <a:schemeClr val="accent1"/>
+                </a:fillRef>
+                <a:effectRef idx="1">
+                  <a:schemeClr val="accent1"/>
+                </a:effectRef>
+                <a:fontRef idx="minor">
+                  <a:schemeClr val="tx1"/>
+                </a:fontRef>
+              </p:style>
+            </p:cxnSp>
+            <p:cxnSp>
+              <p:nvCxnSpPr>
+                <p:cNvPr id="1176" name="Straight Arrow Connector 1175">
+                  <a:extLst>
+                    <a:ext uri="{FF2B5EF4-FFF2-40B4-BE49-F238E27FC236}">
+                      <a16:creationId xmlns:a16="http://schemas.microsoft.com/office/drawing/2014/main" id="{8991C908-1202-8D72-5F95-2D12BD730565}"/>
+                    </a:ext>
+                  </a:extLst>
+                </p:cNvPr>
+                <p:cNvCxnSpPr>
+                  <a:cxnSpLocks/>
+                  <a:stCxn id="1161" idx="3"/>
+                  <a:endCxn id="1165" idx="1"/>
+                </p:cNvCxnSpPr>
+                <p:nvPr/>
+              </p:nvCxnSpPr>
+              <p:spPr>
+                <a:xfrm>
+                  <a:off x="5111966" y="5149808"/>
+                  <a:ext cx="319838" cy="563831"/>
+                </a:xfrm>
+                <a:prstGeom prst="straightConnector1">
+                  <a:avLst/>
+                </a:prstGeom>
+                <a:ln>
+                  <a:solidFill>
+                    <a:schemeClr val="tx1"/>
+                  </a:solidFill>
+                  <a:tailEnd type="triangle"/>
+                </a:ln>
+              </p:spPr>
+              <p:style>
+                <a:lnRef idx="2">
+                  <a:schemeClr val="accent1"/>
+                </a:lnRef>
+                <a:fillRef idx="0">
+                  <a:schemeClr val="accent1"/>
+                </a:fillRef>
+                <a:effectRef idx="1">
+                  <a:schemeClr val="accent1"/>
+                </a:effectRef>
+                <a:fontRef idx="minor">
+                  <a:schemeClr val="tx1"/>
+                </a:fontRef>
+              </p:style>
+            </p:cxnSp>
+            <p:cxnSp>
+              <p:nvCxnSpPr>
+                <p:cNvPr id="1177" name="Straight Arrow Connector 1176">
+                  <a:extLst>
+                    <a:ext uri="{FF2B5EF4-FFF2-40B4-BE49-F238E27FC236}">
+                      <a16:creationId xmlns:a16="http://schemas.microsoft.com/office/drawing/2014/main" id="{DA8EF61A-EF7A-3960-00F1-451E7B3D3D9E}"/>
+                    </a:ext>
+                  </a:extLst>
+                </p:cNvPr>
+                <p:cNvCxnSpPr>
+                  <a:cxnSpLocks/>
+                  <a:stCxn id="1163" idx="3"/>
+                  <a:endCxn id="1166" idx="1"/>
+                </p:cNvCxnSpPr>
+                <p:nvPr/>
+              </p:nvCxnSpPr>
+              <p:spPr>
+                <a:xfrm flipV="1">
+                  <a:off x="6755090" y="1708193"/>
+                  <a:ext cx="412251" cy="563831"/>
+                </a:xfrm>
+                <a:prstGeom prst="straightConnector1">
+                  <a:avLst/>
+                </a:prstGeom>
+                <a:ln>
+                  <a:solidFill>
+                    <a:schemeClr val="tx1"/>
+                  </a:solidFill>
+                  <a:tailEnd type="triangle"/>
+                </a:ln>
+              </p:spPr>
+              <p:style>
+                <a:lnRef idx="2">
+                  <a:schemeClr val="accent1"/>
+                </a:lnRef>
+                <a:fillRef idx="0">
+                  <a:schemeClr val="accent1"/>
+                </a:fillRef>
+                <a:effectRef idx="1">
+                  <a:schemeClr val="accent1"/>
+                </a:effectRef>
+                <a:fontRef idx="minor">
+                  <a:schemeClr val="tx1"/>
+                </a:fontRef>
+              </p:style>
+            </p:cxnSp>
+            <p:cxnSp>
+              <p:nvCxnSpPr>
+                <p:cNvPr id="1178" name="Straight Arrow Connector 1177">
+                  <a:extLst>
+                    <a:ext uri="{FF2B5EF4-FFF2-40B4-BE49-F238E27FC236}">
+                      <a16:creationId xmlns:a16="http://schemas.microsoft.com/office/drawing/2014/main" id="{18593282-1B81-1277-E60A-DEBED271224A}"/>
+                    </a:ext>
+                  </a:extLst>
+                </p:cNvPr>
+                <p:cNvCxnSpPr>
+                  <a:cxnSpLocks/>
+                  <a:stCxn id="1163" idx="3"/>
+                  <a:endCxn id="1167" idx="1"/>
+                </p:cNvCxnSpPr>
+                <p:nvPr/>
+              </p:nvCxnSpPr>
+              <p:spPr>
+                <a:xfrm>
+                  <a:off x="6755090" y="2272024"/>
+                  <a:ext cx="412251" cy="563830"/>
+                </a:xfrm>
+                <a:prstGeom prst="straightConnector1">
+                  <a:avLst/>
+                </a:prstGeom>
+                <a:ln>
+                  <a:solidFill>
+                    <a:schemeClr val="tx1"/>
+                  </a:solidFill>
+                  <a:tailEnd type="triangle"/>
+                </a:ln>
+              </p:spPr>
+              <p:style>
+                <a:lnRef idx="2">
+                  <a:schemeClr val="accent1"/>
+                </a:lnRef>
+                <a:fillRef idx="0">
+                  <a:schemeClr val="accent1"/>
+                </a:fillRef>
+                <a:effectRef idx="1">
+                  <a:schemeClr val="accent1"/>
+                </a:effectRef>
+                <a:fontRef idx="minor">
+                  <a:schemeClr val="tx1"/>
+                </a:fontRef>
+              </p:style>
+            </p:cxnSp>
+            <p:cxnSp>
+              <p:nvCxnSpPr>
+                <p:cNvPr id="1179" name="Straight Arrow Connector 1178">
+                  <a:extLst>
+                    <a:ext uri="{FF2B5EF4-FFF2-40B4-BE49-F238E27FC236}">
+                      <a16:creationId xmlns:a16="http://schemas.microsoft.com/office/drawing/2014/main" id="{7E441A0A-1051-F7A3-2CA2-C43398E4B9D5}"/>
+                    </a:ext>
+                  </a:extLst>
+                </p:cNvPr>
+                <p:cNvCxnSpPr>
+                  <a:cxnSpLocks/>
+                  <a:stCxn id="1164" idx="3"/>
+                  <a:endCxn id="1168" idx="1"/>
+                </p:cNvCxnSpPr>
+                <p:nvPr/>
+              </p:nvCxnSpPr>
+              <p:spPr>
+                <a:xfrm flipV="1">
+                  <a:off x="6755090" y="4018949"/>
+                  <a:ext cx="412251" cy="563831"/>
+                </a:xfrm>
+                <a:prstGeom prst="straightConnector1">
+                  <a:avLst/>
+                </a:prstGeom>
+                <a:ln>
+                  <a:solidFill>
+                    <a:schemeClr val="tx1"/>
+                  </a:solidFill>
+                  <a:tailEnd type="triangle"/>
+                </a:ln>
+              </p:spPr>
+              <p:style>
+                <a:lnRef idx="2">
+                  <a:schemeClr val="accent1"/>
+                </a:lnRef>
+                <a:fillRef idx="0">
+                  <a:schemeClr val="accent1"/>
+                </a:fillRef>
+                <a:effectRef idx="1">
+                  <a:schemeClr val="accent1"/>
+                </a:effectRef>
+                <a:fontRef idx="minor">
+                  <a:schemeClr val="tx1"/>
+                </a:fontRef>
+              </p:style>
+            </p:cxnSp>
+            <p:cxnSp>
+              <p:nvCxnSpPr>
+                <p:cNvPr id="1180" name="Straight Arrow Connector 1179">
+                  <a:extLst>
+                    <a:ext uri="{FF2B5EF4-FFF2-40B4-BE49-F238E27FC236}">
+                      <a16:creationId xmlns:a16="http://schemas.microsoft.com/office/drawing/2014/main" id="{6E3B7BFD-57FD-0B65-272F-9B41851E578E}"/>
+                    </a:ext>
+                  </a:extLst>
+                </p:cNvPr>
+                <p:cNvCxnSpPr>
+                  <a:cxnSpLocks/>
+                  <a:stCxn id="1164" idx="3"/>
+                  <a:endCxn id="1169" idx="1"/>
+                </p:cNvCxnSpPr>
+                <p:nvPr/>
+              </p:nvCxnSpPr>
+              <p:spPr>
+                <a:xfrm>
+                  <a:off x="6755090" y="4582780"/>
+                  <a:ext cx="412251" cy="563830"/>
+                </a:xfrm>
+                <a:prstGeom prst="straightConnector1">
+                  <a:avLst/>
+                </a:prstGeom>
+                <a:ln>
+                  <a:solidFill>
+                    <a:schemeClr val="tx1"/>
+                  </a:solidFill>
+                  <a:tailEnd type="triangle"/>
+                </a:ln>
+              </p:spPr>
+              <p:style>
+                <a:lnRef idx="2">
+                  <a:schemeClr val="accent1"/>
+                </a:lnRef>
+                <a:fillRef idx="0">
+                  <a:schemeClr val="accent1"/>
+                </a:fillRef>
+                <a:effectRef idx="1">
+                  <a:schemeClr val="accent1"/>
+                </a:effectRef>
+                <a:fontRef idx="minor">
+                  <a:schemeClr val="tx1"/>
+                </a:fontRef>
+              </p:style>
+            </p:cxnSp>
+            <p:sp>
+              <p:nvSpPr>
+                <p:cNvPr id="1181" name="Rounded Rectangle 1180">
+                  <a:extLst>
+                    <a:ext uri="{FF2B5EF4-FFF2-40B4-BE49-F238E27FC236}">
+                      <a16:creationId xmlns:a16="http://schemas.microsoft.com/office/drawing/2014/main" id="{614F5070-7F2A-1F59-97C9-D01B8C4F9F89}"/>
+                    </a:ext>
+                  </a:extLst>
+                </p:cNvPr>
+                <p:cNvSpPr/>
+                <p:nvPr/>
+              </p:nvSpPr>
+              <p:spPr>
+                <a:xfrm>
+                  <a:off x="8863603" y="3151986"/>
+                  <a:ext cx="1413153" cy="563831"/>
+                </a:xfrm>
+                <a:prstGeom prst="roundRect">
+                  <a:avLst>
+                    <a:gd name="adj" fmla="val 22916"/>
+                  </a:avLst>
+                </a:prstGeom>
+                <a:solidFill>
+                  <a:schemeClr val="bg1"/>
+                </a:solidFill>
+              </p:spPr>
+              <p:style>
+                <a:lnRef idx="2">
+                  <a:schemeClr val="accent1">
+                    <a:shade val="15000"/>
+                  </a:schemeClr>
+                </a:lnRef>
+                <a:fillRef idx="1">
+                  <a:schemeClr val="accent1"/>
+                </a:fillRef>
+                <a:effectRef idx="0">
+                  <a:schemeClr val="accent1"/>
+                </a:effectRef>
+                <a:fontRef idx="minor">
+                  <a:schemeClr val="lt1"/>
+                </a:fontRef>
+              </p:style>
+              <p:txBody>
+                <a:bodyPr rtlCol="0" anchor="ctr"/>
+                <a:lstStyle/>
+                <a:p>
+                  <a:pPr algn="ctr"/>
+                  <a:r>
+                    <a:rPr lang="en-US" dirty="0">
+                      <a:solidFill>
+                        <a:sysClr val="windowText" lastClr="000000"/>
+                      </a:solidFill>
+                    </a:rPr>
+                    <a:t>MRI/biopsy</a:t>
+                  </a:r>
+                </a:p>
+              </p:txBody>
+            </p:sp>
+            <p:cxnSp>
+              <p:nvCxnSpPr>
+                <p:cNvPr id="1182" name="Elbow Connector 1181">
+                  <a:extLst>
+                    <a:ext uri="{FF2B5EF4-FFF2-40B4-BE49-F238E27FC236}">
+                      <a16:creationId xmlns:a16="http://schemas.microsoft.com/office/drawing/2014/main" id="{66250E28-7C3E-21A3-7A12-D11AE0A29641}"/>
+                    </a:ext>
+                  </a:extLst>
+                </p:cNvPr>
+                <p:cNvCxnSpPr>
+                  <a:cxnSpLocks/>
+                  <a:stCxn id="1162" idx="3"/>
+                  <a:endCxn id="1181" idx="0"/>
+                </p:cNvCxnSpPr>
+                <p:nvPr/>
+              </p:nvCxnSpPr>
+              <p:spPr>
+                <a:xfrm>
+                  <a:off x="6755090" y="1144362"/>
+                  <a:ext cx="2815090" cy="2007624"/>
+                </a:xfrm>
+                <a:prstGeom prst="bentConnector2">
+                  <a:avLst/>
+                </a:prstGeom>
+                <a:ln>
+                  <a:solidFill>
+                    <a:schemeClr val="tx1"/>
+                  </a:solidFill>
+                  <a:tailEnd type="triangle"/>
+                </a:ln>
+              </p:spPr>
+              <p:style>
+                <a:lnRef idx="2">
+                  <a:schemeClr val="accent1"/>
+                </a:lnRef>
+                <a:fillRef idx="0">
+                  <a:schemeClr val="accent1"/>
+                </a:fillRef>
+                <a:effectRef idx="1">
+                  <a:schemeClr val="accent1"/>
+                </a:effectRef>
+                <a:fontRef idx="minor">
+                  <a:schemeClr val="tx1"/>
+                </a:fontRef>
+              </p:style>
+            </p:cxnSp>
+            <p:cxnSp>
+              <p:nvCxnSpPr>
+                <p:cNvPr id="1183" name="Elbow Connector 1182">
+                  <a:extLst>
+                    <a:ext uri="{FF2B5EF4-FFF2-40B4-BE49-F238E27FC236}">
+                      <a16:creationId xmlns:a16="http://schemas.microsoft.com/office/drawing/2014/main" id="{9EE637EC-4637-A5EF-9EC4-E85C3C7CC0F6}"/>
+                    </a:ext>
+                  </a:extLst>
+                </p:cNvPr>
+                <p:cNvCxnSpPr>
+                  <a:cxnSpLocks/>
+                  <a:stCxn id="1166" idx="3"/>
+                  <a:endCxn id="1181" idx="0"/>
+                </p:cNvCxnSpPr>
+                <p:nvPr/>
+              </p:nvCxnSpPr>
+              <p:spPr>
+                <a:xfrm>
+                  <a:off x="8490627" y="1708193"/>
+                  <a:ext cx="1079553" cy="1443793"/>
+                </a:xfrm>
+                <a:prstGeom prst="bentConnector2">
+                  <a:avLst/>
+                </a:prstGeom>
+                <a:ln>
+                  <a:solidFill>
+                    <a:schemeClr val="tx1"/>
+                  </a:solidFill>
+                  <a:tailEnd type="triangle"/>
+                </a:ln>
+              </p:spPr>
+              <p:style>
+                <a:lnRef idx="2">
+                  <a:schemeClr val="accent1"/>
+                </a:lnRef>
+                <a:fillRef idx="0">
+                  <a:schemeClr val="accent1"/>
+                </a:fillRef>
+                <a:effectRef idx="1">
+                  <a:schemeClr val="accent1"/>
+                </a:effectRef>
+                <a:fontRef idx="minor">
+                  <a:schemeClr val="tx1"/>
+                </a:fontRef>
+              </p:style>
+            </p:cxnSp>
+            <p:cxnSp>
+              <p:nvCxnSpPr>
+                <p:cNvPr id="1184" name="Elbow Connector 1183">
+                  <a:extLst>
+                    <a:ext uri="{FF2B5EF4-FFF2-40B4-BE49-F238E27FC236}">
+                      <a16:creationId xmlns:a16="http://schemas.microsoft.com/office/drawing/2014/main" id="{68E3B436-3924-720B-EE46-AF90610DE1C9}"/>
+                    </a:ext>
+                  </a:extLst>
+                </p:cNvPr>
+                <p:cNvCxnSpPr>
+                  <a:cxnSpLocks/>
+                  <a:stCxn id="1168" idx="3"/>
+                  <a:endCxn id="1181" idx="2"/>
+                </p:cNvCxnSpPr>
+                <p:nvPr/>
+              </p:nvCxnSpPr>
+              <p:spPr>
+                <a:xfrm flipV="1">
+                  <a:off x="8490627" y="3715817"/>
+                  <a:ext cx="1079553" cy="303132"/>
+                </a:xfrm>
+                <a:prstGeom prst="bentConnector2">
+                  <a:avLst/>
+                </a:prstGeom>
+                <a:ln>
+                  <a:solidFill>
+                    <a:schemeClr val="tx1"/>
+                  </a:solidFill>
+                  <a:tailEnd type="triangle"/>
+                </a:ln>
+              </p:spPr>
+              <p:style>
+                <a:lnRef idx="2">
+                  <a:schemeClr val="accent1"/>
+                </a:lnRef>
+                <a:fillRef idx="0">
+                  <a:schemeClr val="accent1"/>
+                </a:fillRef>
+                <a:effectRef idx="1">
+                  <a:schemeClr val="accent1"/>
+                </a:effectRef>
+                <a:fontRef idx="minor">
+                  <a:schemeClr val="tx1"/>
+                </a:fontRef>
+              </p:style>
+            </p:cxnSp>
+            <p:sp>
+              <p:nvSpPr>
+                <p:cNvPr id="1185" name="Rounded Rectangle 1184">
+                  <a:extLst>
+                    <a:ext uri="{FF2B5EF4-FFF2-40B4-BE49-F238E27FC236}">
+                      <a16:creationId xmlns:a16="http://schemas.microsoft.com/office/drawing/2014/main" id="{AC6659B1-0539-79D7-AD53-C41E6C8DB1F1}"/>
+                    </a:ext>
+                  </a:extLst>
+                </p:cNvPr>
+                <p:cNvSpPr/>
+                <p:nvPr/>
+              </p:nvSpPr>
+              <p:spPr>
+                <a:xfrm>
+                  <a:off x="10426534" y="3151986"/>
+                  <a:ext cx="1413153" cy="563831"/>
+                </a:xfrm>
+                <a:prstGeom prst="roundRect">
+                  <a:avLst>
+                    <a:gd name="adj" fmla="val 22916"/>
+                  </a:avLst>
+                </a:prstGeom>
+                <a:solidFill>
+                  <a:schemeClr val="bg1"/>
+                </a:solidFill>
+              </p:spPr>
+              <p:style>
+                <a:lnRef idx="2">
+                  <a:schemeClr val="accent1">
+                    <a:shade val="15000"/>
+                  </a:schemeClr>
+                </a:lnRef>
+                <a:fillRef idx="1">
+                  <a:schemeClr val="accent1"/>
+                </a:fillRef>
+                <a:effectRef idx="0">
+                  <a:schemeClr val="accent1"/>
+                </a:effectRef>
+                <a:fontRef idx="minor">
+                  <a:schemeClr val="lt1"/>
+                </a:fontRef>
+              </p:style>
+              <p:txBody>
+                <a:bodyPr rtlCol="0" anchor="ctr"/>
+                <a:lstStyle/>
+                <a:p>
+                  <a:pPr algn="ctr"/>
+                  <a:r>
+                    <a:rPr lang="en-US" dirty="0">
+                      <a:solidFill>
+                        <a:sysClr val="windowText" lastClr="000000"/>
+                      </a:solidFill>
+                    </a:rPr>
+                    <a:t>False</a:t>
+                  </a:r>
+                </a:p>
+                <a:p>
+                  <a:pPr algn="ctr"/>
+                  <a:r>
+                    <a:rPr lang="en-US" dirty="0">
+                      <a:solidFill>
+                        <a:sysClr val="windowText" lastClr="000000"/>
+                      </a:solidFill>
+                    </a:rPr>
+                    <a:t>Positive?</a:t>
+                  </a:r>
+                </a:p>
+              </p:txBody>
+            </p:sp>
+            <p:cxnSp>
+              <p:nvCxnSpPr>
+                <p:cNvPr id="1186" name="Straight Arrow Connector 1185">
+                  <a:extLst>
+                    <a:ext uri="{FF2B5EF4-FFF2-40B4-BE49-F238E27FC236}">
+                      <a16:creationId xmlns:a16="http://schemas.microsoft.com/office/drawing/2014/main" id="{AA857D9F-66BC-A641-3D2C-2A9D09A8F836}"/>
+                    </a:ext>
+                  </a:extLst>
+                </p:cNvPr>
+                <p:cNvCxnSpPr>
+                  <a:cxnSpLocks/>
+                  <a:stCxn id="1181" idx="3"/>
+                  <a:endCxn id="1185" idx="1"/>
+                </p:cNvCxnSpPr>
+                <p:nvPr/>
+              </p:nvCxnSpPr>
+              <p:spPr>
+                <a:xfrm>
+                  <a:off x="10276756" y="3433902"/>
+                  <a:ext cx="149778" cy="0"/>
+                </a:xfrm>
+                <a:prstGeom prst="straightConnector1">
+                  <a:avLst/>
+                </a:prstGeom>
+                <a:ln>
+                  <a:solidFill>
+                    <a:schemeClr val="tx1"/>
+                  </a:solidFill>
+                  <a:tailEnd type="triangle"/>
+                </a:ln>
+              </p:spPr>
+              <p:style>
+                <a:lnRef idx="2">
+                  <a:schemeClr val="accent1"/>
+                </a:lnRef>
+                <a:fillRef idx="0">
+                  <a:schemeClr val="accent1"/>
+                </a:fillRef>
+                <a:effectRef idx="1">
+                  <a:schemeClr val="accent1"/>
+                </a:effectRef>
+                <a:fontRef idx="minor">
+                  <a:schemeClr val="tx1"/>
+                </a:fontRef>
+              </p:style>
+            </p:cxnSp>
+            <p:sp>
+              <p:nvSpPr>
+                <p:cNvPr id="1187" name="Rounded Rectangle 1186">
+                  <a:extLst>
+                    <a:ext uri="{FF2B5EF4-FFF2-40B4-BE49-F238E27FC236}">
+                      <a16:creationId xmlns:a16="http://schemas.microsoft.com/office/drawing/2014/main" id="{6E3F2EF3-490D-B716-D1FF-5BD738A6A5DF}"/>
+                    </a:ext>
+                  </a:extLst>
+                </p:cNvPr>
+                <p:cNvSpPr/>
+                <p:nvPr/>
+              </p:nvSpPr>
+              <p:spPr>
+                <a:xfrm>
+                  <a:off x="10426533" y="1584343"/>
+                  <a:ext cx="1413153" cy="563831"/>
+                </a:xfrm>
+                <a:prstGeom prst="roundRect">
+                  <a:avLst>
+                    <a:gd name="adj" fmla="val 22916"/>
+                  </a:avLst>
+                </a:prstGeom>
+                <a:solidFill>
+                  <a:schemeClr val="bg1"/>
+                </a:solidFill>
+              </p:spPr>
+              <p:style>
+                <a:lnRef idx="2">
+                  <a:schemeClr val="accent1">
+                    <a:shade val="15000"/>
+                  </a:schemeClr>
+                </a:lnRef>
+                <a:fillRef idx="1">
+                  <a:schemeClr val="accent1"/>
+                </a:fillRef>
+                <a:effectRef idx="0">
+                  <a:schemeClr val="accent1"/>
+                </a:effectRef>
+                <a:fontRef idx="minor">
+                  <a:schemeClr val="lt1"/>
+                </a:fontRef>
+              </p:style>
+              <p:txBody>
+                <a:bodyPr rtlCol="0" anchor="ctr"/>
+                <a:lstStyle/>
+                <a:p>
+                  <a:pPr algn="ctr"/>
+                  <a:r>
+                    <a:rPr lang="en-US" dirty="0">
+                      <a:solidFill>
+                        <a:sysClr val="windowText" lastClr="000000"/>
+                      </a:solidFill>
+                    </a:rPr>
+                    <a:t>Treatment</a:t>
+                  </a:r>
+                </a:p>
+              </p:txBody>
+            </p:sp>
+            <p:sp>
+              <p:nvSpPr>
+                <p:cNvPr id="1188" name="Rounded Rectangle 1187">
+                  <a:extLst>
+                    <a:ext uri="{FF2B5EF4-FFF2-40B4-BE49-F238E27FC236}">
+                      <a16:creationId xmlns:a16="http://schemas.microsoft.com/office/drawing/2014/main" id="{0A669927-82A9-F13E-13D6-734A4D6123D4}"/>
+                    </a:ext>
+                  </a:extLst>
+                </p:cNvPr>
+                <p:cNvSpPr/>
+                <p:nvPr/>
+              </p:nvSpPr>
+              <p:spPr>
+                <a:xfrm>
+                  <a:off x="10426533" y="4799209"/>
+                  <a:ext cx="1413153" cy="563831"/>
+                </a:xfrm>
+                <a:prstGeom prst="roundRect">
+                  <a:avLst>
+                    <a:gd name="adj" fmla="val 22916"/>
+                  </a:avLst>
+                </a:prstGeom>
+                <a:solidFill>
+                  <a:schemeClr val="bg1"/>
+                </a:solidFill>
+              </p:spPr>
+              <p:style>
+                <a:lnRef idx="2">
+                  <a:schemeClr val="accent1">
+                    <a:shade val="15000"/>
+                  </a:schemeClr>
+                </a:lnRef>
+                <a:fillRef idx="1">
+                  <a:schemeClr val="accent1"/>
+                </a:fillRef>
+                <a:effectRef idx="0">
+                  <a:schemeClr val="accent1"/>
+                </a:effectRef>
+                <a:fontRef idx="minor">
+                  <a:schemeClr val="lt1"/>
+                </a:fontRef>
+              </p:style>
+              <p:txBody>
+                <a:bodyPr rtlCol="0" anchor="ctr"/>
+                <a:lstStyle/>
+                <a:p>
+                  <a:pPr algn="ctr"/>
+                  <a:r>
+                    <a:rPr lang="en-US" dirty="0">
+                      <a:solidFill>
+                        <a:sysClr val="windowText" lastClr="000000"/>
+                      </a:solidFill>
+                    </a:rPr>
+                    <a:t>Back to normal</a:t>
+                  </a:r>
+                </a:p>
+              </p:txBody>
+            </p:sp>
+            <p:cxnSp>
+              <p:nvCxnSpPr>
+                <p:cNvPr id="1189" name="Straight Arrow Connector 1188">
+                  <a:extLst>
+                    <a:ext uri="{FF2B5EF4-FFF2-40B4-BE49-F238E27FC236}">
+                      <a16:creationId xmlns:a16="http://schemas.microsoft.com/office/drawing/2014/main" id="{E67B8E89-ECDC-E9B3-AE92-4299125A5179}"/>
+                    </a:ext>
+                  </a:extLst>
+                </p:cNvPr>
+                <p:cNvCxnSpPr>
+                  <a:cxnSpLocks/>
+                  <a:stCxn id="1185" idx="0"/>
+                  <a:endCxn id="1187" idx="2"/>
+                </p:cNvCxnSpPr>
+                <p:nvPr/>
+              </p:nvCxnSpPr>
+              <p:spPr>
+                <a:xfrm flipH="1" flipV="1">
+                  <a:off x="11133110" y="2148174"/>
+                  <a:ext cx="1" cy="1003812"/>
+                </a:xfrm>
+                <a:prstGeom prst="straightConnector1">
+                  <a:avLst/>
+                </a:prstGeom>
+                <a:ln>
+                  <a:solidFill>
+                    <a:schemeClr val="tx1"/>
+                  </a:solidFill>
+                  <a:tailEnd type="triangle"/>
+                </a:ln>
+              </p:spPr>
+              <p:style>
+                <a:lnRef idx="2">
+                  <a:schemeClr val="accent1"/>
+                </a:lnRef>
+                <a:fillRef idx="0">
+                  <a:schemeClr val="accent1"/>
+                </a:fillRef>
+                <a:effectRef idx="1">
+                  <a:schemeClr val="accent1"/>
+                </a:effectRef>
+                <a:fontRef idx="minor">
+                  <a:schemeClr val="tx1"/>
+                </a:fontRef>
+              </p:style>
+            </p:cxnSp>
+            <p:cxnSp>
+              <p:nvCxnSpPr>
+                <p:cNvPr id="1190" name="Straight Arrow Connector 1189">
+                  <a:extLst>
+                    <a:ext uri="{FF2B5EF4-FFF2-40B4-BE49-F238E27FC236}">
+                      <a16:creationId xmlns:a16="http://schemas.microsoft.com/office/drawing/2014/main" id="{C774FB62-3943-2270-EB3B-985937BFD7CA}"/>
+                    </a:ext>
+                  </a:extLst>
+                </p:cNvPr>
+                <p:cNvCxnSpPr>
+                  <a:cxnSpLocks/>
+                  <a:stCxn id="1185" idx="2"/>
+                  <a:endCxn id="1188" idx="0"/>
+                </p:cNvCxnSpPr>
+                <p:nvPr/>
+              </p:nvCxnSpPr>
+              <p:spPr>
+                <a:xfrm flipH="1">
+                  <a:off x="11133110" y="3715817"/>
+                  <a:ext cx="1" cy="1083392"/>
+                </a:xfrm>
+                <a:prstGeom prst="straightConnector1">
+                  <a:avLst/>
+                </a:prstGeom>
+                <a:ln>
+                  <a:solidFill>
+                    <a:schemeClr val="tx1"/>
+                  </a:solidFill>
+                  <a:tailEnd type="triangle"/>
+                </a:ln>
+              </p:spPr>
+              <p:style>
+                <a:lnRef idx="2">
+                  <a:schemeClr val="accent1"/>
+                </a:lnRef>
+                <a:fillRef idx="0">
+                  <a:schemeClr val="accent1"/>
+                </a:fillRef>
+                <a:effectRef idx="1">
+                  <a:schemeClr val="accent1"/>
+                </a:effectRef>
+                <a:fontRef idx="minor">
+                  <a:schemeClr val="tx1"/>
+                </a:fontRef>
+              </p:style>
+            </p:cxnSp>
+            <p:sp>
+              <p:nvSpPr>
+                <p:cNvPr id="1191" name="TextBox 1190">
+                  <a:extLst>
+                    <a:ext uri="{FF2B5EF4-FFF2-40B4-BE49-F238E27FC236}">
+                      <a16:creationId xmlns:a16="http://schemas.microsoft.com/office/drawing/2014/main" id="{3B22F994-02D3-7B5A-C14C-B31D7664133D}"/>
+                    </a:ext>
+                  </a:extLst>
+                </p:cNvPr>
+                <p:cNvSpPr txBox="1"/>
+                <p:nvPr/>
+              </p:nvSpPr>
+              <p:spPr>
+                <a:xfrm>
+                  <a:off x="3269945" y="2280748"/>
+                  <a:ext cx="288862" cy="369332"/>
+                </a:xfrm>
+                <a:prstGeom prst="rect">
+                  <a:avLst/>
+                </a:prstGeom>
+                <a:noFill/>
+              </p:spPr>
+              <p:txBody>
+                <a:bodyPr wrap="none" rtlCol="0">
+                  <a:spAutoFit/>
+                </a:bodyPr>
+                <a:lstStyle/>
+                <a:p>
+                  <a:r>
+                    <a:rPr lang="en-US" dirty="0"/>
+                    <a:t>y</a:t>
+                  </a:r>
+                </a:p>
+              </p:txBody>
+            </p:sp>
+            <p:sp>
+              <p:nvSpPr>
+                <p:cNvPr id="1192" name="TextBox 1191">
+                  <a:extLst>
+                    <a:ext uri="{FF2B5EF4-FFF2-40B4-BE49-F238E27FC236}">
+                      <a16:creationId xmlns:a16="http://schemas.microsoft.com/office/drawing/2014/main" id="{60A08D4B-C179-3764-FBBC-A26529B83608}"/>
+                    </a:ext>
+                  </a:extLst>
+                </p:cNvPr>
+                <p:cNvSpPr txBox="1"/>
+                <p:nvPr/>
+              </p:nvSpPr>
+              <p:spPr>
+                <a:xfrm>
+                  <a:off x="3269945" y="4116198"/>
+                  <a:ext cx="311304" cy="369332"/>
+                </a:xfrm>
+                <a:prstGeom prst="rect">
+                  <a:avLst/>
+                </a:prstGeom>
+                <a:noFill/>
+              </p:spPr>
+              <p:txBody>
+                <a:bodyPr wrap="none" rtlCol="0">
+                  <a:spAutoFit/>
+                </a:bodyPr>
+                <a:lstStyle/>
+                <a:p>
+                  <a:r>
+                    <a:rPr lang="en-US" dirty="0"/>
+                    <a:t>n</a:t>
+                  </a:r>
+                </a:p>
+              </p:txBody>
+            </p:sp>
+            <p:sp>
+              <p:nvSpPr>
+                <p:cNvPr id="1193" name="TextBox 1192">
+                  <a:extLst>
+                    <a:ext uri="{FF2B5EF4-FFF2-40B4-BE49-F238E27FC236}">
+                      <a16:creationId xmlns:a16="http://schemas.microsoft.com/office/drawing/2014/main" id="{AD974981-8E43-6212-040E-9FDB91EAF162}"/>
+                    </a:ext>
+                  </a:extLst>
+                </p:cNvPr>
+                <p:cNvSpPr txBox="1"/>
+                <p:nvPr/>
+              </p:nvSpPr>
+              <p:spPr>
+                <a:xfrm>
+                  <a:off x="5059678" y="1144361"/>
+                  <a:ext cx="288862" cy="369332"/>
+                </a:xfrm>
+                <a:prstGeom prst="rect">
+                  <a:avLst/>
+                </a:prstGeom>
+                <a:noFill/>
+              </p:spPr>
+              <p:txBody>
+                <a:bodyPr wrap="none" rtlCol="0">
+                  <a:spAutoFit/>
+                </a:bodyPr>
+                <a:lstStyle/>
+                <a:p>
+                  <a:r>
+                    <a:rPr lang="en-US" dirty="0"/>
+                    <a:t>y</a:t>
+                  </a:r>
+                </a:p>
+              </p:txBody>
+            </p:sp>
+            <p:sp>
+              <p:nvSpPr>
+                <p:cNvPr id="1194" name="TextBox 1193">
+                  <a:extLst>
+                    <a:ext uri="{FF2B5EF4-FFF2-40B4-BE49-F238E27FC236}">
+                      <a16:creationId xmlns:a16="http://schemas.microsoft.com/office/drawing/2014/main" id="{B15A047E-4417-1A63-C078-7708D0570EC8}"/>
+                    </a:ext>
+                  </a:extLst>
+                </p:cNvPr>
+                <p:cNvSpPr txBox="1"/>
+                <p:nvPr/>
+              </p:nvSpPr>
+              <p:spPr>
+                <a:xfrm>
+                  <a:off x="5046279" y="1917771"/>
+                  <a:ext cx="311304" cy="369332"/>
+                </a:xfrm>
+                <a:prstGeom prst="rect">
+                  <a:avLst/>
+                </a:prstGeom>
+                <a:noFill/>
+              </p:spPr>
+              <p:txBody>
+                <a:bodyPr wrap="none" rtlCol="0">
+                  <a:spAutoFit/>
+                </a:bodyPr>
+                <a:lstStyle/>
+                <a:p>
+                  <a:r>
+                    <a:rPr lang="en-US" dirty="0"/>
+                    <a:t>n</a:t>
+                  </a:r>
+                </a:p>
+              </p:txBody>
+            </p:sp>
+            <p:sp>
+              <p:nvSpPr>
+                <p:cNvPr id="1195" name="TextBox 1194">
+                  <a:extLst>
+                    <a:ext uri="{FF2B5EF4-FFF2-40B4-BE49-F238E27FC236}">
+                      <a16:creationId xmlns:a16="http://schemas.microsoft.com/office/drawing/2014/main" id="{86C12D9E-4ABF-0688-B809-CE3A9F6AEAF1}"/>
+                    </a:ext>
+                  </a:extLst>
+                </p:cNvPr>
+                <p:cNvSpPr txBox="1"/>
+                <p:nvPr/>
+              </p:nvSpPr>
+              <p:spPr>
+                <a:xfrm>
+                  <a:off x="5049426" y="4570898"/>
+                  <a:ext cx="288862" cy="369332"/>
+                </a:xfrm>
+                <a:prstGeom prst="rect">
+                  <a:avLst/>
+                </a:prstGeom>
+                <a:noFill/>
+              </p:spPr>
+              <p:txBody>
+                <a:bodyPr wrap="none" rtlCol="0">
+                  <a:spAutoFit/>
+                </a:bodyPr>
+                <a:lstStyle/>
+                <a:p>
+                  <a:r>
+                    <a:rPr lang="en-US" dirty="0"/>
+                    <a:t>y</a:t>
+                  </a:r>
+                </a:p>
+              </p:txBody>
+            </p:sp>
+            <p:sp>
+              <p:nvSpPr>
+                <p:cNvPr id="1196" name="TextBox 1195">
+                  <a:extLst>
+                    <a:ext uri="{FF2B5EF4-FFF2-40B4-BE49-F238E27FC236}">
+                      <a16:creationId xmlns:a16="http://schemas.microsoft.com/office/drawing/2014/main" id="{81618C8E-E892-1B4F-90BC-45A7EC361CD1}"/>
+                    </a:ext>
+                  </a:extLst>
+                </p:cNvPr>
+                <p:cNvSpPr txBox="1"/>
+                <p:nvPr/>
+              </p:nvSpPr>
+              <p:spPr>
+                <a:xfrm>
+                  <a:off x="5036027" y="5344308"/>
+                  <a:ext cx="311304" cy="369332"/>
+                </a:xfrm>
+                <a:prstGeom prst="rect">
+                  <a:avLst/>
+                </a:prstGeom>
+                <a:noFill/>
+              </p:spPr>
+              <p:txBody>
+                <a:bodyPr wrap="none" rtlCol="0">
+                  <a:spAutoFit/>
+                </a:bodyPr>
+                <a:lstStyle/>
+                <a:p>
+                  <a:r>
+                    <a:rPr lang="en-US" dirty="0"/>
+                    <a:t>n</a:t>
+                  </a:r>
+                </a:p>
+              </p:txBody>
+            </p:sp>
+            <p:sp>
+              <p:nvSpPr>
+                <p:cNvPr id="1197" name="TextBox 1196">
+                  <a:extLst>
+                    <a:ext uri="{FF2B5EF4-FFF2-40B4-BE49-F238E27FC236}">
+                      <a16:creationId xmlns:a16="http://schemas.microsoft.com/office/drawing/2014/main" id="{686064FB-DE64-DA09-34C2-9C7723264A76}"/>
+                    </a:ext>
+                  </a:extLst>
+                </p:cNvPr>
+                <p:cNvSpPr txBox="1"/>
+                <p:nvPr/>
+              </p:nvSpPr>
+              <p:spPr>
+                <a:xfrm>
+                  <a:off x="6768489" y="1693112"/>
+                  <a:ext cx="288862" cy="369332"/>
+                </a:xfrm>
+                <a:prstGeom prst="rect">
+                  <a:avLst/>
+                </a:prstGeom>
+                <a:noFill/>
+              </p:spPr>
+              <p:txBody>
+                <a:bodyPr wrap="none" rtlCol="0">
+                  <a:spAutoFit/>
+                </a:bodyPr>
+                <a:lstStyle/>
+                <a:p>
+                  <a:r>
+                    <a:rPr lang="en-US" dirty="0"/>
+                    <a:t>y</a:t>
+                  </a:r>
+                </a:p>
+              </p:txBody>
+            </p:sp>
+            <p:sp>
+              <p:nvSpPr>
+                <p:cNvPr id="1198" name="TextBox 1197">
+                  <a:extLst>
+                    <a:ext uri="{FF2B5EF4-FFF2-40B4-BE49-F238E27FC236}">
+                      <a16:creationId xmlns:a16="http://schemas.microsoft.com/office/drawing/2014/main" id="{C6BA19C4-AD65-12E3-819B-AE1E46819BA5}"/>
+                    </a:ext>
+                  </a:extLst>
+                </p:cNvPr>
+                <p:cNvSpPr txBox="1"/>
+                <p:nvPr/>
+              </p:nvSpPr>
+              <p:spPr>
+                <a:xfrm>
+                  <a:off x="6755090" y="2466522"/>
+                  <a:ext cx="311304" cy="369332"/>
+                </a:xfrm>
+                <a:prstGeom prst="rect">
+                  <a:avLst/>
+                </a:prstGeom>
+                <a:noFill/>
+              </p:spPr>
+              <p:txBody>
+                <a:bodyPr wrap="none" rtlCol="0">
+                  <a:spAutoFit/>
+                </a:bodyPr>
+                <a:lstStyle/>
+                <a:p>
+                  <a:r>
+                    <a:rPr lang="en-US" dirty="0"/>
+                    <a:t>n</a:t>
+                  </a:r>
+                </a:p>
+              </p:txBody>
+            </p:sp>
+            <p:sp>
+              <p:nvSpPr>
+                <p:cNvPr id="1199" name="TextBox 1198">
+                  <a:extLst>
+                    <a:ext uri="{FF2B5EF4-FFF2-40B4-BE49-F238E27FC236}">
+                      <a16:creationId xmlns:a16="http://schemas.microsoft.com/office/drawing/2014/main" id="{1306FC28-D1C6-B48E-3F82-3DC60BDAF242}"/>
+                    </a:ext>
+                  </a:extLst>
+                </p:cNvPr>
+                <p:cNvSpPr txBox="1"/>
+                <p:nvPr/>
+              </p:nvSpPr>
+              <p:spPr>
+                <a:xfrm>
+                  <a:off x="6768489" y="4003868"/>
+                  <a:ext cx="288862" cy="369332"/>
+                </a:xfrm>
+                <a:prstGeom prst="rect">
+                  <a:avLst/>
+                </a:prstGeom>
+                <a:noFill/>
+              </p:spPr>
+              <p:txBody>
+                <a:bodyPr wrap="none" rtlCol="0">
+                  <a:spAutoFit/>
+                </a:bodyPr>
+                <a:lstStyle/>
+                <a:p>
+                  <a:r>
+                    <a:rPr lang="en-US" dirty="0"/>
+                    <a:t>y</a:t>
+                  </a:r>
+                </a:p>
+              </p:txBody>
+            </p:sp>
+            <p:sp>
+              <p:nvSpPr>
+                <p:cNvPr id="1200" name="TextBox 1199">
+                  <a:extLst>
+                    <a:ext uri="{FF2B5EF4-FFF2-40B4-BE49-F238E27FC236}">
+                      <a16:creationId xmlns:a16="http://schemas.microsoft.com/office/drawing/2014/main" id="{651F4D01-CE49-84AA-323B-D4628FAB6DDA}"/>
+                    </a:ext>
+                  </a:extLst>
+                </p:cNvPr>
+                <p:cNvSpPr txBox="1"/>
+                <p:nvPr/>
+              </p:nvSpPr>
+              <p:spPr>
+                <a:xfrm>
+                  <a:off x="6755090" y="4777278"/>
+                  <a:ext cx="311304" cy="369332"/>
+                </a:xfrm>
+                <a:prstGeom prst="rect">
+                  <a:avLst/>
+                </a:prstGeom>
+                <a:noFill/>
+              </p:spPr>
+              <p:txBody>
+                <a:bodyPr wrap="none" rtlCol="0">
+                  <a:spAutoFit/>
+                </a:bodyPr>
+                <a:lstStyle/>
+                <a:p>
+                  <a:r>
+                    <a:rPr lang="en-US" dirty="0"/>
+                    <a:t>n</a:t>
+                  </a:r>
+                </a:p>
+              </p:txBody>
+            </p:sp>
+            <p:sp>
+              <p:nvSpPr>
+                <p:cNvPr id="1201" name="TextBox 1200">
+                  <a:extLst>
+                    <a:ext uri="{FF2B5EF4-FFF2-40B4-BE49-F238E27FC236}">
+                      <a16:creationId xmlns:a16="http://schemas.microsoft.com/office/drawing/2014/main" id="{C48B4D52-4A62-FA8C-3619-13E313E0A02D}"/>
+                    </a:ext>
+                  </a:extLst>
+                </p:cNvPr>
+                <p:cNvSpPr txBox="1"/>
+                <p:nvPr/>
+              </p:nvSpPr>
+              <p:spPr>
+                <a:xfrm>
+                  <a:off x="10833027" y="2466522"/>
+                  <a:ext cx="288862" cy="369332"/>
+                </a:xfrm>
+                <a:prstGeom prst="rect">
+                  <a:avLst/>
+                </a:prstGeom>
+                <a:noFill/>
+              </p:spPr>
+              <p:txBody>
+                <a:bodyPr wrap="none" rtlCol="0">
+                  <a:spAutoFit/>
+                </a:bodyPr>
+                <a:lstStyle/>
+                <a:p>
+                  <a:r>
+                    <a:rPr lang="en-US" dirty="0"/>
+                    <a:t>y</a:t>
+                  </a:r>
+                </a:p>
+              </p:txBody>
+            </p:sp>
+            <p:sp>
+              <p:nvSpPr>
+                <p:cNvPr id="1202" name="TextBox 1201">
+                  <a:extLst>
+                    <a:ext uri="{FF2B5EF4-FFF2-40B4-BE49-F238E27FC236}">
+                      <a16:creationId xmlns:a16="http://schemas.microsoft.com/office/drawing/2014/main" id="{CA1DE122-6DF4-2F45-A812-88312DFA3977}"/>
+                    </a:ext>
+                  </a:extLst>
+                </p:cNvPr>
+                <p:cNvSpPr txBox="1"/>
+                <p:nvPr/>
+              </p:nvSpPr>
+              <p:spPr>
+                <a:xfrm>
+                  <a:off x="10819628" y="4058074"/>
+                  <a:ext cx="311304" cy="369332"/>
+                </a:xfrm>
+                <a:prstGeom prst="rect">
+                  <a:avLst/>
+                </a:prstGeom>
+                <a:noFill/>
+              </p:spPr>
+              <p:txBody>
+                <a:bodyPr wrap="none" rtlCol="0">
+                  <a:spAutoFit/>
+                </a:bodyPr>
+                <a:lstStyle/>
+                <a:p>
+                  <a:r>
+                    <a:rPr lang="en-US" dirty="0"/>
+                    <a:t>n</a:t>
+                  </a:r>
+                </a:p>
+              </p:txBody>
+            </p:sp>
+            <p:sp>
+              <p:nvSpPr>
+                <p:cNvPr id="1157" name="TextBox 1156">
+                  <a:extLst>
+                    <a:ext uri="{FF2B5EF4-FFF2-40B4-BE49-F238E27FC236}">
+                      <a16:creationId xmlns:a16="http://schemas.microsoft.com/office/drawing/2014/main" id="{06162661-32BC-0E8B-3BB4-E696768564B1}"/>
+                    </a:ext>
+                  </a:extLst>
+                </p:cNvPr>
+                <p:cNvSpPr txBox="1"/>
+                <p:nvPr/>
+              </p:nvSpPr>
+              <p:spPr>
+                <a:xfrm>
+                  <a:off x="452663" y="150483"/>
+                  <a:ext cx="2207464" cy="523220"/>
+                </a:xfrm>
+                <a:prstGeom prst="rect">
+                  <a:avLst/>
+                </a:prstGeom>
+                <a:solidFill>
+                  <a:schemeClr val="bg1"/>
+                </a:solidFill>
+                <a:ln>
+                  <a:solidFill>
+                    <a:schemeClr val="bg1"/>
+                  </a:solidFill>
+                </a:ln>
+              </p:spPr>
+              <p:txBody>
+                <a:bodyPr wrap="none" rtlCol="0">
+                  <a:spAutoFit/>
+                </a:bodyPr>
+                <a:lstStyle/>
+                <a:p>
+                  <a:r>
+                    <a:rPr lang="en-US" sz="2800" b="1" dirty="0"/>
+                    <a:t>b. Screening</a:t>
+                  </a:r>
+                </a:p>
+              </p:txBody>
+            </p:sp>
+          </p:grpSp>
+          <p:cxnSp>
+            <p:nvCxnSpPr>
+              <p:cNvPr id="1210" name="Elbow Connector 1209">
+                <a:extLst>
+                  <a:ext uri="{FF2B5EF4-FFF2-40B4-BE49-F238E27FC236}">
+                    <a16:creationId xmlns:a16="http://schemas.microsoft.com/office/drawing/2014/main" id="{A41EFFF8-8644-0FFB-D98C-AAD64EBA8738}"/>
+                  </a:ext>
+                </a:extLst>
+              </p:cNvPr>
+              <p:cNvCxnSpPr>
+                <a:stCxn id="16" idx="2"/>
+                <a:endCxn id="1158" idx="0"/>
+              </p:cNvCxnSpPr>
+              <p:nvPr/>
+            </p:nvCxnSpPr>
+            <p:spPr>
+              <a:xfrm rot="5400000">
+                <a:off x="-16161336" y="2263234"/>
+                <a:ext cx="7254407" cy="3357339"/>
+              </a:xfrm>
+              <a:prstGeom prst="bentConnector3">
+                <a:avLst>
+                  <a:gd name="adj1" fmla="val 68011"/>
+                </a:avLst>
+              </a:prstGeom>
+              <a:ln>
+                <a:solidFill>
+                  <a:schemeClr val="tx1"/>
+                </a:solidFill>
+                <a:prstDash val="dash"/>
+                <a:tailEnd type="triangle"/>
+              </a:ln>
+            </p:spPr>
+            <p:style>
+              <a:lnRef idx="2">
+                <a:schemeClr val="accent1"/>
+              </a:lnRef>
+              <a:fillRef idx="0">
+                <a:schemeClr val="accent1"/>
+              </a:fillRef>
+              <a:effectRef idx="1">
+                <a:schemeClr val="accent1"/>
+              </a:effectRef>
+              <a:fontRef idx="minor">
+                <a:schemeClr val="tx1"/>
+              </a:fontRef>
+            </p:style>
+          </p:cxnSp>
+          <p:cxnSp>
+            <p:nvCxnSpPr>
+              <p:cNvPr id="1212" name="Elbow Connector 1211">
+                <a:extLst>
+                  <a:ext uri="{FF2B5EF4-FFF2-40B4-BE49-F238E27FC236}">
+                    <a16:creationId xmlns:a16="http://schemas.microsoft.com/office/drawing/2014/main" id="{FE17F011-0C88-224E-86D5-D80445914A43}"/>
+                  </a:ext>
+                </a:extLst>
+              </p:cNvPr>
+              <p:cNvCxnSpPr>
+                <a:cxnSpLocks/>
+                <a:stCxn id="25" idx="2"/>
+                <a:endCxn id="1158" idx="0"/>
+              </p:cNvCxnSpPr>
+              <p:nvPr/>
+            </p:nvCxnSpPr>
+            <p:spPr>
+              <a:xfrm rot="5400000">
+                <a:off x="-14489876" y="2536123"/>
+                <a:ext cx="5310058" cy="4755911"/>
+              </a:xfrm>
+              <a:prstGeom prst="bentConnector3">
+                <a:avLst>
+                  <a:gd name="adj1" fmla="val 56344"/>
+                </a:avLst>
+              </a:prstGeom>
+              <a:ln>
+                <a:solidFill>
+                  <a:schemeClr val="tx1"/>
+                </a:solidFill>
+                <a:prstDash val="dash"/>
+                <a:tailEnd type="triangle"/>
+              </a:ln>
+            </p:spPr>
+            <p:style>
+              <a:lnRef idx="2">
+                <a:schemeClr val="accent1"/>
+              </a:lnRef>
+              <a:fillRef idx="0">
+                <a:schemeClr val="accent1"/>
+              </a:fillRef>
+              <a:effectRef idx="1">
+                <a:schemeClr val="accent1"/>
+              </a:effectRef>
+              <a:fontRef idx="minor">
+                <a:schemeClr val="tx1"/>
+              </a:fontRef>
+            </p:style>
+          </p:cxnSp>
+          <p:cxnSp>
+            <p:nvCxnSpPr>
+              <p:cNvPr id="1215" name="Elbow Connector 1214">
+                <a:extLst>
+                  <a:ext uri="{FF2B5EF4-FFF2-40B4-BE49-F238E27FC236}">
+                    <a16:creationId xmlns:a16="http://schemas.microsoft.com/office/drawing/2014/main" id="{E655F0B4-9C70-4902-7904-5AA8E95F9E4E}"/>
+                  </a:ext>
+                </a:extLst>
+              </p:cNvPr>
+              <p:cNvCxnSpPr>
+                <a:cxnSpLocks/>
+                <a:stCxn id="30" idx="2"/>
+                <a:endCxn id="1158" idx="0"/>
+              </p:cNvCxnSpPr>
+              <p:nvPr/>
+            </p:nvCxnSpPr>
+            <p:spPr>
+              <a:xfrm rot="5400000">
+                <a:off x="-12818414" y="2809010"/>
+                <a:ext cx="3365708" cy="6154486"/>
+              </a:xfrm>
+              <a:prstGeom prst="bentConnector3">
+                <a:avLst>
+                  <a:gd name="adj1" fmla="val 31159"/>
+                </a:avLst>
+              </a:prstGeom>
+              <a:ln>
+                <a:solidFill>
+                  <a:schemeClr val="tx1"/>
+                </a:solidFill>
+                <a:prstDash val="dash"/>
+                <a:tailEnd type="triangle"/>
+              </a:ln>
+            </p:spPr>
+            <p:style>
+              <a:lnRef idx="2">
+                <a:schemeClr val="accent1"/>
+              </a:lnRef>
+              <a:fillRef idx="0">
+                <a:schemeClr val="accent1"/>
+              </a:fillRef>
+              <a:effectRef idx="1">
+                <a:schemeClr val="accent1"/>
+              </a:effectRef>
+              <a:fontRef idx="minor">
+                <a:schemeClr val="tx1"/>
+              </a:fontRef>
+            </p:style>
+          </p:cxnSp>
+          <p:cxnSp>
+            <p:nvCxnSpPr>
+              <p:cNvPr id="1223" name="Elbow Connector 1222">
+                <a:extLst>
+                  <a:ext uri="{FF2B5EF4-FFF2-40B4-BE49-F238E27FC236}">
+                    <a16:creationId xmlns:a16="http://schemas.microsoft.com/office/drawing/2014/main" id="{916926D5-0CFF-9267-C0F7-A6A3A4690352}"/>
+                  </a:ext>
+                </a:extLst>
+              </p:cNvPr>
+              <p:cNvCxnSpPr>
+                <a:cxnSpLocks/>
+                <a:endCxn id="1158" idx="0"/>
+              </p:cNvCxnSpPr>
+              <p:nvPr/>
+            </p:nvCxnSpPr>
+            <p:spPr>
+              <a:xfrm rot="5400000">
+                <a:off x="-16317657" y="4769450"/>
+                <a:ext cx="4904512" cy="694803"/>
+              </a:xfrm>
+              <a:prstGeom prst="bentConnector3">
+                <a:avLst>
+                  <a:gd name="adj1" fmla="val 52636"/>
+                </a:avLst>
+              </a:prstGeom>
+              <a:ln>
+                <a:solidFill>
+                  <a:schemeClr val="tx1"/>
+                </a:solidFill>
+                <a:prstDash val="dash"/>
+                <a:tailEnd type="triangle"/>
+              </a:ln>
+            </p:spPr>
+            <p:style>
+              <a:lnRef idx="2">
+                <a:schemeClr val="accent1"/>
+              </a:lnRef>
+              <a:fillRef idx="0">
+                <a:schemeClr val="accent1"/>
+              </a:fillRef>
+              <a:effectRef idx="1">
+                <a:schemeClr val="accent1"/>
+              </a:effectRef>
+              <a:fontRef idx="minor">
+                <a:schemeClr val="tx1"/>
+              </a:fontRef>
+            </p:style>
+          </p:cxnSp>
+          <p:cxnSp>
+            <p:nvCxnSpPr>
+              <p:cNvPr id="1248" name="Straight Arrow Connector 1247">
+                <a:extLst>
+                  <a:ext uri="{FF2B5EF4-FFF2-40B4-BE49-F238E27FC236}">
+                    <a16:creationId xmlns:a16="http://schemas.microsoft.com/office/drawing/2014/main" id="{306D393D-B040-A8C5-A507-1D0F498D1831}"/>
+                  </a:ext>
+                </a:extLst>
+              </p:cNvPr>
+              <p:cNvCxnSpPr>
+                <a:cxnSpLocks/>
+                <a:stCxn id="1187" idx="0"/>
+                <a:endCxn id="1106" idx="2"/>
+              </p:cNvCxnSpPr>
+              <p:nvPr/>
+            </p:nvCxnSpPr>
+            <p:spPr>
+              <a:xfrm flipH="1" flipV="1">
+                <a:off x="-4273129" y="1590186"/>
+                <a:ext cx="2178" cy="4457337"/>
+              </a:xfrm>
+              <a:prstGeom prst="straightConnector1">
+                <a:avLst/>
+              </a:prstGeom>
+              <a:ln>
+                <a:solidFill>
+                  <a:schemeClr val="tx1"/>
+                </a:solidFill>
+                <a:tailEnd type="triangle"/>
+              </a:ln>
+            </p:spPr>
+            <p:style>
+              <a:lnRef idx="2">
+                <a:schemeClr val="accent1"/>
+              </a:lnRef>
+              <a:fillRef idx="0">
+                <a:schemeClr val="accent1"/>
+              </a:fillRef>
+              <a:effectRef idx="1">
+                <a:schemeClr val="accent1"/>
+              </a:effectRef>
+              <a:fontRef idx="minor">
+                <a:schemeClr val="tx1"/>
+              </a:fontRef>
+            </p:style>
+          </p:cxnSp>
+          <p:cxnSp>
+            <p:nvCxnSpPr>
+              <p:cNvPr id="1254" name="Elbow Connector 1253">
+                <a:extLst>
+                  <a:ext uri="{FF2B5EF4-FFF2-40B4-BE49-F238E27FC236}">
+                    <a16:creationId xmlns:a16="http://schemas.microsoft.com/office/drawing/2014/main" id="{DE9B0226-BEDD-0163-6946-8B1F6EEECAAF}"/>
+                  </a:ext>
+                </a:extLst>
+              </p:cNvPr>
+              <p:cNvCxnSpPr>
+                <a:cxnSpLocks/>
+                <a:stCxn id="1188" idx="2"/>
+                <a:endCxn id="4" idx="1"/>
+              </p:cNvCxnSpPr>
+              <p:nvPr/>
+            </p:nvCxnSpPr>
+            <p:spPr>
+              <a:xfrm rot="5400000" flipH="1">
+                <a:off x="-13238372" y="858800"/>
+                <a:ext cx="7532881" cy="10401960"/>
+              </a:xfrm>
+              <a:prstGeom prst="bentConnector4">
+                <a:avLst>
+                  <a:gd name="adj1" fmla="val -11340"/>
+                  <a:gd name="adj2" fmla="val 102536"/>
+                </a:avLst>
+              </a:prstGeom>
+              <a:ln>
+                <a:solidFill>
+                  <a:schemeClr val="tx1"/>
+                </a:solidFill>
+                <a:prstDash val="solid"/>
+                <a:tailEnd type="triangle"/>
+              </a:ln>
+            </p:spPr>
+            <p:style>
+              <a:lnRef idx="2">
+                <a:schemeClr val="accent1"/>
+              </a:lnRef>
+              <a:fillRef idx="0">
+                <a:schemeClr val="accent1"/>
+              </a:fillRef>
+              <a:effectRef idx="1">
+                <a:schemeClr val="accent1"/>
+              </a:effectRef>
+              <a:fontRef idx="minor">
+                <a:schemeClr val="tx1"/>
+              </a:fontRef>
+            </p:style>
+          </p:cxnSp>
+        </p:grpSp>
+        <p:cxnSp>
+          <p:nvCxnSpPr>
+            <p:cNvPr id="5" name="Elbow Connector 4">
+              <a:extLst>
+                <a:ext uri="{FF2B5EF4-FFF2-40B4-BE49-F238E27FC236}">
+                  <a16:creationId xmlns:a16="http://schemas.microsoft.com/office/drawing/2014/main" id="{2F51573A-CBB4-E309-05F2-5B3F7677C899}"/>
+                </a:ext>
+              </a:extLst>
+            </p:cNvPr>
+            <p:cNvCxnSpPr>
+              <a:cxnSpLocks/>
+              <a:stCxn id="4" idx="3"/>
+              <a:endCxn id="15" idx="1"/>
+            </p:cNvCxnSpPr>
+            <p:nvPr/>
+          </p:nvCxnSpPr>
+          <p:spPr>
+            <a:xfrm flipV="1">
+              <a:off x="3012103" y="-4383789"/>
+              <a:ext cx="695275" cy="2766935"/>
+            </a:xfrm>
+            <a:prstGeom prst="bentConnector3">
+              <a:avLst>
+                <a:gd name="adj1" fmla="val 24949"/>
+              </a:avLst>
+            </a:prstGeom>
+            <a:ln>
+              <a:solidFill>
+                <a:schemeClr val="tx1"/>
+              </a:solidFill>
+              <a:tailEnd type="triangle"/>
+            </a:ln>
+          </p:spPr>
+          <p:style>
+            <a:lnRef idx="2">
+              <a:schemeClr val="accent1"/>
+            </a:lnRef>
+            <a:fillRef idx="0">
+              <a:schemeClr val="accent1"/>
+            </a:fillRef>
+            <a:effectRef idx="1">
+              <a:schemeClr val="accent1"/>
+            </a:effectRef>
+            <a:fontRef idx="minor">
+              <a:schemeClr val="tx1"/>
+            </a:fontRef>
+          </p:style>
+        </p:cxnSp>
+      </p:grpSp>
+    </p:spTree>
+    <p:extLst>
+      <p:ext uri="{BB962C8B-B14F-4D97-AF65-F5344CB8AC3E}">
+        <p14:creationId xmlns:p14="http://schemas.microsoft.com/office/powerpoint/2010/main" val="1702950166"/>
+      </p:ext>
+    </p:extLst>
+  </p:cSld>
+  <p:clrMapOvr>
+    <a:masterClrMapping/>
+  </p:clrMapOvr>
+</p:sld>
+</file>
+
+<file path=ppt/slides/slide8.xml><?xml version="1.0" encoding="utf-8"?>
+<p:sld xmlns:a="http://schemas.openxmlformats.org/drawingml/2006/main" xmlns:r="http://schemas.openxmlformats.org/officeDocument/2006/relationships" xmlns:p="http://schemas.openxmlformats.org/presentationml/2006/main">
+  <p:cSld>
+    <p:spTree>
+      <p:nvGrpSpPr>
+        <p:cNvPr id="1" name="">
+          <a:extLst>
+            <a:ext uri="{FF2B5EF4-FFF2-40B4-BE49-F238E27FC236}">
+              <a16:creationId xmlns:a16="http://schemas.microsoft.com/office/drawing/2014/main" id="{F67DDAF0-3664-B430-FFE0-2ECD74A54F3F}"/>
+            </a:ext>
+          </a:extLst>
+        </p:cNvPr>
+        <p:cNvGrpSpPr/>
+        <p:nvPr/>
+      </p:nvGrpSpPr>
+      <p:grpSpPr>
+        <a:xfrm>
+          <a:off x="0" y="0"/>
+          <a:ext cx="0" cy="0"/>
+          <a:chOff x="0" y="0"/>
+          <a:chExt cx="0" cy="0"/>
+        </a:xfrm>
+      </p:grpSpPr>
+      <p:grpSp>
+        <p:nvGrpSpPr>
+          <p:cNvPr id="1131" name="Group 1130">
+            <a:extLst>
+              <a:ext uri="{FF2B5EF4-FFF2-40B4-BE49-F238E27FC236}">
+                <a16:creationId xmlns:a16="http://schemas.microsoft.com/office/drawing/2014/main" id="{E32EACB2-97DA-EFF6-22DF-12F8C336C514}"/>
+              </a:ext>
+            </a:extLst>
+          </p:cNvPr>
+          <p:cNvGrpSpPr/>
+          <p:nvPr/>
+        </p:nvGrpSpPr>
+        <p:grpSpPr>
+          <a:xfrm>
+            <a:off x="428342" y="51853"/>
+            <a:ext cx="11554392" cy="6676493"/>
+            <a:chOff x="428342" y="51853"/>
+            <a:chExt cx="11554392" cy="6676493"/>
+          </a:xfrm>
+        </p:grpSpPr>
+        <p:sp>
+          <p:nvSpPr>
+            <p:cNvPr id="1152" name="Rounded Rectangle 1151">
+              <a:extLst>
+                <a:ext uri="{FF2B5EF4-FFF2-40B4-BE49-F238E27FC236}">
+                  <a16:creationId xmlns:a16="http://schemas.microsoft.com/office/drawing/2014/main" id="{79BE99B3-BFC0-F61B-8E84-33A6B528C17E}"/>
+                </a:ext>
+              </a:extLst>
+            </p:cNvPr>
+            <p:cNvSpPr/>
+            <p:nvPr/>
+          </p:nvSpPr>
+          <p:spPr>
+            <a:xfrm>
+              <a:off x="428342" y="51853"/>
+              <a:ext cx="11554392" cy="6676493"/>
+            </a:xfrm>
+            <a:prstGeom prst="roundRect">
+              <a:avLst>
+                <a:gd name="adj" fmla="val 5023"/>
+              </a:avLst>
+            </a:prstGeom>
+            <a:solidFill>
+              <a:schemeClr val="bg1"/>
+            </a:solidFill>
+          </p:spPr>
+          <p:style>
+            <a:lnRef idx="2">
+              <a:schemeClr val="accent1">
+                <a:shade val="15000"/>
+              </a:schemeClr>
+            </a:lnRef>
+            <a:fillRef idx="1">
+              <a:schemeClr val="accent1"/>
+            </a:fillRef>
+            <a:effectRef idx="0">
+              <a:schemeClr val="accent1"/>
+            </a:effectRef>
+            <a:fontRef idx="minor">
+              <a:schemeClr val="lt1"/>
+            </a:fontRef>
+          </p:style>
+          <p:txBody>
+            <a:bodyPr rtlCol="0" anchor="ctr"/>
+            <a:lstStyle/>
+            <a:p>
+              <a:pPr algn="ctr"/>
+              <a:endParaRPr lang="en-US" sz="1600" dirty="0">
+                <a:solidFill>
+                  <a:sysClr val="windowText" lastClr="000000"/>
+                </a:solidFill>
+              </a:endParaRPr>
+            </a:p>
+          </p:txBody>
+        </p:sp>
+        <p:sp>
+          <p:nvSpPr>
+            <p:cNvPr id="1153" name="TextBox 1152">
+              <a:extLst>
+                <a:ext uri="{FF2B5EF4-FFF2-40B4-BE49-F238E27FC236}">
+                  <a16:creationId xmlns:a16="http://schemas.microsoft.com/office/drawing/2014/main" id="{A9BDF799-C2BA-878E-ACBD-54A70D0187EA}"/>
+                </a:ext>
+              </a:extLst>
+            </p:cNvPr>
+            <p:cNvSpPr txBox="1"/>
+            <p:nvPr/>
+          </p:nvSpPr>
+          <p:spPr>
+            <a:xfrm>
+              <a:off x="527819" y="150483"/>
+              <a:ext cx="1823704" cy="523220"/>
+            </a:xfrm>
+            <a:prstGeom prst="rect">
+              <a:avLst/>
+            </a:prstGeom>
+            <a:noFill/>
+          </p:spPr>
+          <p:txBody>
+            <a:bodyPr wrap="none" rtlCol="0">
+              <a:spAutoFit/>
+            </a:bodyPr>
+            <a:lstStyle/>
+            <a:p>
+              <a:r>
+                <a:rPr lang="en-US" sz="2800" b="1" dirty="0"/>
+                <a:t>Screening</a:t>
+              </a:r>
+            </a:p>
+          </p:txBody>
+        </p:sp>
+        <p:sp>
+          <p:nvSpPr>
+            <p:cNvPr id="9" name="Rounded Rectangle 8">
+              <a:extLst>
+                <a:ext uri="{FF2B5EF4-FFF2-40B4-BE49-F238E27FC236}">
+                  <a16:creationId xmlns:a16="http://schemas.microsoft.com/office/drawing/2014/main" id="{6DEAE009-70CC-AB47-4E63-1F97EF2678D5}"/>
+                </a:ext>
+              </a:extLst>
+            </p:cNvPr>
+            <p:cNvSpPr/>
+            <p:nvPr/>
+          </p:nvSpPr>
+          <p:spPr>
+            <a:xfrm>
+              <a:off x="579720" y="3105927"/>
+              <a:ext cx="1223075" cy="563831"/>
+            </a:xfrm>
+            <a:prstGeom prst="roundRect">
+              <a:avLst>
+                <a:gd name="adj" fmla="val 22916"/>
+              </a:avLst>
+            </a:prstGeom>
+            <a:solidFill>
+              <a:schemeClr val="bg1"/>
+            </a:solidFill>
+          </p:spPr>
+          <p:style>
+            <a:lnRef idx="2">
+              <a:schemeClr val="accent1">
+                <a:shade val="15000"/>
+              </a:schemeClr>
+            </a:lnRef>
+            <a:fillRef idx="1">
+              <a:schemeClr val="accent1"/>
+            </a:fillRef>
+            <a:effectRef idx="0">
+              <a:schemeClr val="accent1"/>
+            </a:effectRef>
+            <a:fontRef idx="minor">
+              <a:schemeClr val="lt1"/>
+            </a:fontRef>
+          </p:style>
+          <p:txBody>
+            <a:bodyPr rtlCol="0" anchor="ctr"/>
+            <a:lstStyle/>
+            <a:p>
+              <a:pPr algn="ctr"/>
+              <a:r>
+                <a:rPr lang="en-US" dirty="0">
+                  <a:solidFill>
+                    <a:sysClr val="windowText" lastClr="000000"/>
+                  </a:solidFill>
+                </a:rPr>
+                <a:t>Eligible individual</a:t>
+              </a:r>
+            </a:p>
+          </p:txBody>
+        </p:sp>
+        <p:sp>
+          <p:nvSpPr>
+            <p:cNvPr id="11" name="Rounded Rectangle 10">
+              <a:extLst>
+                <a:ext uri="{FF2B5EF4-FFF2-40B4-BE49-F238E27FC236}">
+                  <a16:creationId xmlns:a16="http://schemas.microsoft.com/office/drawing/2014/main" id="{149A0723-AA91-C6BD-7268-B29D9FF203B8}"/>
+                </a:ext>
+              </a:extLst>
+            </p:cNvPr>
+            <p:cNvSpPr/>
+            <p:nvPr/>
+          </p:nvSpPr>
+          <p:spPr>
+            <a:xfrm>
+              <a:off x="3788680" y="1426277"/>
+              <a:ext cx="1323286" cy="563831"/>
+            </a:xfrm>
+            <a:prstGeom prst="roundRect">
+              <a:avLst>
+                <a:gd name="adj" fmla="val 22916"/>
+              </a:avLst>
+            </a:prstGeom>
+            <a:solidFill>
+              <a:schemeClr val="bg1"/>
+            </a:solidFill>
+          </p:spPr>
+          <p:style>
+            <a:lnRef idx="2">
+              <a:schemeClr val="accent1">
+                <a:shade val="15000"/>
+              </a:schemeClr>
+            </a:lnRef>
+            <a:fillRef idx="1">
+              <a:schemeClr val="accent1"/>
+            </a:fillRef>
+            <a:effectRef idx="0">
+              <a:schemeClr val="accent1"/>
+            </a:effectRef>
+            <a:fontRef idx="minor">
+              <a:schemeClr val="lt1"/>
+            </a:fontRef>
+          </p:style>
+          <p:txBody>
+            <a:bodyPr rtlCol="0" anchor="ctr"/>
+            <a:lstStyle/>
+            <a:p>
+              <a:pPr algn="ctr"/>
+              <a:r>
+                <a:rPr lang="en-US" dirty="0">
+                  <a:solidFill>
+                    <a:sysClr val="windowText" lastClr="000000"/>
+                  </a:solidFill>
+                </a:rPr>
+                <a:t>PRS </a:t>
+              </a:r>
+            </a:p>
+            <a:p>
+              <a:pPr algn="ctr"/>
+              <a:r>
+                <a:rPr lang="en-US" dirty="0">
+                  <a:solidFill>
+                    <a:sysClr val="windowText" lastClr="000000"/>
+                  </a:solidFill>
+                </a:rPr>
+                <a:t>&gt; decile 8?</a:t>
+              </a:r>
+            </a:p>
+          </p:txBody>
+        </p:sp>
+        <p:sp>
+          <p:nvSpPr>
+            <p:cNvPr id="18" name="Rounded Rectangle 17">
+              <a:extLst>
+                <a:ext uri="{FF2B5EF4-FFF2-40B4-BE49-F238E27FC236}">
+                  <a16:creationId xmlns:a16="http://schemas.microsoft.com/office/drawing/2014/main" id="{2403301C-8262-1596-45F5-61BAE4A360C4}"/>
+                </a:ext>
+              </a:extLst>
+            </p:cNvPr>
+            <p:cNvSpPr/>
+            <p:nvPr/>
+          </p:nvSpPr>
+          <p:spPr>
+            <a:xfrm>
+              <a:off x="2105860" y="3105928"/>
+              <a:ext cx="1223075" cy="563831"/>
+            </a:xfrm>
+            <a:prstGeom prst="roundRect">
+              <a:avLst>
+                <a:gd name="adj" fmla="val 22916"/>
+              </a:avLst>
+            </a:prstGeom>
+            <a:solidFill>
+              <a:schemeClr val="bg1"/>
+            </a:solidFill>
+          </p:spPr>
+          <p:style>
+            <a:lnRef idx="2">
+              <a:schemeClr val="accent1">
+                <a:shade val="15000"/>
+              </a:schemeClr>
+            </a:lnRef>
+            <a:fillRef idx="1">
+              <a:schemeClr val="accent1"/>
+            </a:fillRef>
+            <a:effectRef idx="0">
+              <a:schemeClr val="accent1"/>
+            </a:effectRef>
+            <a:fontRef idx="minor">
+              <a:schemeClr val="lt1"/>
+            </a:fontRef>
+          </p:style>
+          <p:txBody>
+            <a:bodyPr rtlCol="0" anchor="ctr"/>
+            <a:lstStyle/>
+            <a:p>
+              <a:pPr algn="ctr"/>
+              <a:r>
+                <a:rPr lang="en-US" dirty="0">
+                  <a:solidFill>
+                    <a:sysClr val="windowText" lastClr="000000"/>
+                  </a:solidFill>
+                </a:rPr>
+                <a:t>PSA </a:t>
+              </a:r>
+            </a:p>
+            <a:p>
+              <a:pPr algn="ctr"/>
+              <a:r>
+                <a:rPr lang="en-US" dirty="0">
+                  <a:solidFill>
+                    <a:sysClr val="windowText" lastClr="000000"/>
+                  </a:solidFill>
+                </a:rPr>
+                <a:t>positive?</a:t>
+              </a:r>
+            </a:p>
+          </p:txBody>
+        </p:sp>
+        <p:sp>
+          <p:nvSpPr>
+            <p:cNvPr id="19" name="Rounded Rectangle 18">
+              <a:extLst>
+                <a:ext uri="{FF2B5EF4-FFF2-40B4-BE49-F238E27FC236}">
+                  <a16:creationId xmlns:a16="http://schemas.microsoft.com/office/drawing/2014/main" id="{29CEF5F7-037B-21B9-D3E3-88A3C1C8E8F2}"/>
+                </a:ext>
+              </a:extLst>
+            </p:cNvPr>
+            <p:cNvSpPr/>
+            <p:nvPr/>
+          </p:nvSpPr>
+          <p:spPr>
+            <a:xfrm>
+              <a:off x="3788680" y="4867892"/>
+              <a:ext cx="1323286" cy="563831"/>
+            </a:xfrm>
+            <a:prstGeom prst="roundRect">
+              <a:avLst>
+                <a:gd name="adj" fmla="val 22916"/>
+              </a:avLst>
+            </a:prstGeom>
+            <a:solidFill>
+              <a:schemeClr val="bg1"/>
+            </a:solidFill>
+          </p:spPr>
+          <p:style>
+            <a:lnRef idx="2">
+              <a:schemeClr val="accent1">
+                <a:shade val="15000"/>
+              </a:schemeClr>
+            </a:lnRef>
+            <a:fillRef idx="1">
+              <a:schemeClr val="accent1"/>
+            </a:fillRef>
+            <a:effectRef idx="0">
+              <a:schemeClr val="accent1"/>
+            </a:effectRef>
+            <a:fontRef idx="minor">
+              <a:schemeClr val="lt1"/>
+            </a:fontRef>
+          </p:style>
+          <p:txBody>
+            <a:bodyPr rtlCol="0" anchor="ctr"/>
+            <a:lstStyle/>
+            <a:p>
+              <a:pPr algn="ctr"/>
+              <a:r>
+                <a:rPr lang="en-US" dirty="0">
+                  <a:solidFill>
+                    <a:sysClr val="windowText" lastClr="000000"/>
+                  </a:solidFill>
+                </a:rPr>
+                <a:t>PRS </a:t>
+              </a:r>
+            </a:p>
+            <a:p>
+              <a:pPr algn="ctr"/>
+              <a:r>
+                <a:rPr lang="en-US" dirty="0">
+                  <a:solidFill>
+                    <a:sysClr val="windowText" lastClr="000000"/>
+                  </a:solidFill>
+                </a:rPr>
+                <a:t>&gt; decile 8?</a:t>
+              </a:r>
+            </a:p>
+          </p:txBody>
+        </p:sp>
+        <p:sp>
+          <p:nvSpPr>
+            <p:cNvPr id="21" name="Rounded Rectangle 20">
+              <a:extLst>
+                <a:ext uri="{FF2B5EF4-FFF2-40B4-BE49-F238E27FC236}">
+                  <a16:creationId xmlns:a16="http://schemas.microsoft.com/office/drawing/2014/main" id="{39611935-4A17-141B-BCF8-AD6003FD0C02}"/>
+                </a:ext>
+              </a:extLst>
+            </p:cNvPr>
+            <p:cNvSpPr/>
+            <p:nvPr/>
+          </p:nvSpPr>
+          <p:spPr>
+            <a:xfrm>
+              <a:off x="5431804" y="862446"/>
+              <a:ext cx="1323286" cy="563831"/>
+            </a:xfrm>
+            <a:prstGeom prst="roundRect">
+              <a:avLst>
+                <a:gd name="adj" fmla="val 22916"/>
+              </a:avLst>
+            </a:prstGeom>
+            <a:solidFill>
+              <a:schemeClr val="bg1"/>
+            </a:solidFill>
+          </p:spPr>
+          <p:style>
+            <a:lnRef idx="2">
+              <a:schemeClr val="accent1">
+                <a:shade val="15000"/>
+              </a:schemeClr>
+            </a:lnRef>
+            <a:fillRef idx="1">
+              <a:schemeClr val="accent1"/>
+            </a:fillRef>
+            <a:effectRef idx="0">
+              <a:schemeClr val="accent1"/>
+            </a:effectRef>
+            <a:fontRef idx="minor">
+              <a:schemeClr val="lt1"/>
+            </a:fontRef>
+          </p:style>
+          <p:txBody>
+            <a:bodyPr rtlCol="0" anchor="ctr"/>
+            <a:lstStyle/>
+            <a:p>
+              <a:pPr algn="ctr"/>
+              <a:r>
+                <a:rPr lang="en-US" dirty="0">
+                  <a:solidFill>
+                    <a:sysClr val="windowText" lastClr="000000"/>
+                  </a:solidFill>
+                </a:rPr>
+                <a:t>Diagnosed</a:t>
+              </a:r>
+            </a:p>
+          </p:txBody>
+        </p:sp>
+        <p:sp>
+          <p:nvSpPr>
+            <p:cNvPr id="22" name="Rounded Rectangle 21">
+              <a:extLst>
+                <a:ext uri="{FF2B5EF4-FFF2-40B4-BE49-F238E27FC236}">
+                  <a16:creationId xmlns:a16="http://schemas.microsoft.com/office/drawing/2014/main" id="{C9A1048D-78DE-88B4-5B67-B8172872BEB0}"/>
+                </a:ext>
+              </a:extLst>
+            </p:cNvPr>
+            <p:cNvSpPr/>
+            <p:nvPr/>
+          </p:nvSpPr>
+          <p:spPr>
+            <a:xfrm>
+              <a:off x="5431804" y="1990108"/>
+              <a:ext cx="1323286" cy="563831"/>
+            </a:xfrm>
+            <a:prstGeom prst="roundRect">
+              <a:avLst>
+                <a:gd name="adj" fmla="val 22916"/>
+              </a:avLst>
+            </a:prstGeom>
+            <a:solidFill>
+              <a:schemeClr val="bg1"/>
+            </a:solidFill>
+          </p:spPr>
+          <p:style>
+            <a:lnRef idx="2">
+              <a:schemeClr val="accent1">
+                <a:shade val="15000"/>
+              </a:schemeClr>
+            </a:lnRef>
+            <a:fillRef idx="1">
+              <a:schemeClr val="accent1"/>
+            </a:fillRef>
+            <a:effectRef idx="0">
+              <a:schemeClr val="accent1"/>
+            </a:effectRef>
+            <a:fontRef idx="minor">
+              <a:schemeClr val="lt1"/>
+            </a:fontRef>
+          </p:style>
+          <p:txBody>
+            <a:bodyPr rtlCol="0" anchor="ctr"/>
+            <a:lstStyle/>
+            <a:p>
+              <a:pPr algn="ctr"/>
+              <a:r>
+                <a:rPr lang="en-US" dirty="0">
+                  <a:solidFill>
+                    <a:sysClr val="windowText" lastClr="000000"/>
+                  </a:solidFill>
+                </a:rPr>
+                <a:t>Repeat PSA once</a:t>
+              </a:r>
+            </a:p>
+          </p:txBody>
+        </p:sp>
+        <p:sp>
+          <p:nvSpPr>
+            <p:cNvPr id="36" name="Rounded Rectangle 35">
+              <a:extLst>
+                <a:ext uri="{FF2B5EF4-FFF2-40B4-BE49-F238E27FC236}">
+                  <a16:creationId xmlns:a16="http://schemas.microsoft.com/office/drawing/2014/main" id="{801B9546-5B51-7A74-ABF4-DE2DD23BC502}"/>
+                </a:ext>
+              </a:extLst>
+            </p:cNvPr>
+            <p:cNvSpPr/>
+            <p:nvPr/>
+          </p:nvSpPr>
+          <p:spPr>
+            <a:xfrm>
+              <a:off x="5431804" y="4300864"/>
+              <a:ext cx="1323286" cy="563831"/>
+            </a:xfrm>
+            <a:prstGeom prst="roundRect">
+              <a:avLst>
+                <a:gd name="adj" fmla="val 22916"/>
+              </a:avLst>
+            </a:prstGeom>
+            <a:solidFill>
+              <a:schemeClr val="bg1"/>
+            </a:solidFill>
+          </p:spPr>
+          <p:style>
+            <a:lnRef idx="2">
+              <a:schemeClr val="accent1">
+                <a:shade val="15000"/>
+              </a:schemeClr>
+            </a:lnRef>
+            <a:fillRef idx="1">
+              <a:schemeClr val="accent1"/>
+            </a:fillRef>
+            <a:effectRef idx="0">
+              <a:schemeClr val="accent1"/>
+            </a:effectRef>
+            <a:fontRef idx="minor">
+              <a:schemeClr val="lt1"/>
+            </a:fontRef>
+          </p:style>
+          <p:txBody>
+            <a:bodyPr rtlCol="0" anchor="ctr"/>
+            <a:lstStyle/>
+            <a:p>
+              <a:pPr algn="ctr"/>
+              <a:r>
+                <a:rPr lang="en-US" dirty="0">
+                  <a:solidFill>
+                    <a:sysClr val="windowText" lastClr="000000"/>
+                  </a:solidFill>
+                </a:rPr>
+                <a:t>Repeat PSA once</a:t>
+              </a:r>
+            </a:p>
+          </p:txBody>
+        </p:sp>
+        <p:sp>
+          <p:nvSpPr>
+            <p:cNvPr id="38" name="Rounded Rectangle 37">
+              <a:extLst>
+                <a:ext uri="{FF2B5EF4-FFF2-40B4-BE49-F238E27FC236}">
+                  <a16:creationId xmlns:a16="http://schemas.microsoft.com/office/drawing/2014/main" id="{B3CCFB4A-5D60-211A-D3BA-194821258BF0}"/>
+                </a:ext>
+              </a:extLst>
+            </p:cNvPr>
+            <p:cNvSpPr/>
+            <p:nvPr/>
+          </p:nvSpPr>
+          <p:spPr>
+            <a:xfrm>
+              <a:off x="5431804" y="5431723"/>
+              <a:ext cx="1323286" cy="563831"/>
+            </a:xfrm>
+            <a:prstGeom prst="roundRect">
+              <a:avLst>
+                <a:gd name="adj" fmla="val 22916"/>
+              </a:avLst>
+            </a:prstGeom>
+            <a:solidFill>
+              <a:schemeClr val="bg1"/>
+            </a:solidFill>
+          </p:spPr>
+          <p:style>
+            <a:lnRef idx="2">
+              <a:schemeClr val="accent1">
+                <a:shade val="15000"/>
+              </a:schemeClr>
+            </a:lnRef>
+            <a:fillRef idx="1">
+              <a:schemeClr val="accent1"/>
+            </a:fillRef>
+            <a:effectRef idx="0">
+              <a:schemeClr val="accent1"/>
+            </a:effectRef>
+            <a:fontRef idx="minor">
+              <a:schemeClr val="lt1"/>
+            </a:fontRef>
+          </p:style>
+          <p:txBody>
+            <a:bodyPr rtlCol="0" anchor="ctr"/>
+            <a:lstStyle/>
+            <a:p>
+              <a:pPr algn="ctr"/>
+              <a:r>
+                <a:rPr lang="en-US" dirty="0">
+                  <a:solidFill>
+                    <a:sysClr val="windowText" lastClr="000000"/>
+                  </a:solidFill>
+                </a:rPr>
+                <a:t>Not Diagnosed</a:t>
+              </a:r>
+            </a:p>
+          </p:txBody>
+        </p:sp>
+        <p:sp>
+          <p:nvSpPr>
+            <p:cNvPr id="40" name="Rounded Rectangle 39">
+              <a:extLst>
+                <a:ext uri="{FF2B5EF4-FFF2-40B4-BE49-F238E27FC236}">
+                  <a16:creationId xmlns:a16="http://schemas.microsoft.com/office/drawing/2014/main" id="{9DCC7C9B-A7E7-8489-7BDF-C270F6D421CB}"/>
+                </a:ext>
+              </a:extLst>
+            </p:cNvPr>
+            <p:cNvSpPr/>
+            <p:nvPr/>
+          </p:nvSpPr>
+          <p:spPr>
+            <a:xfrm>
+              <a:off x="7167341" y="1426277"/>
+              <a:ext cx="1323286" cy="563831"/>
+            </a:xfrm>
+            <a:prstGeom prst="roundRect">
+              <a:avLst>
+                <a:gd name="adj" fmla="val 22916"/>
+              </a:avLst>
+            </a:prstGeom>
+            <a:solidFill>
+              <a:schemeClr val="bg1"/>
+            </a:solidFill>
+          </p:spPr>
+          <p:style>
+            <a:lnRef idx="2">
+              <a:schemeClr val="accent1">
+                <a:shade val="15000"/>
+              </a:schemeClr>
+            </a:lnRef>
+            <a:fillRef idx="1">
+              <a:schemeClr val="accent1"/>
+            </a:fillRef>
+            <a:effectRef idx="0">
+              <a:schemeClr val="accent1"/>
+            </a:effectRef>
+            <a:fontRef idx="minor">
+              <a:schemeClr val="lt1"/>
+            </a:fontRef>
+          </p:style>
+          <p:txBody>
+            <a:bodyPr rtlCol="0" anchor="ctr"/>
+            <a:lstStyle/>
+            <a:p>
+              <a:pPr algn="ctr"/>
+              <a:r>
+                <a:rPr lang="en-US" dirty="0">
+                  <a:solidFill>
+                    <a:sysClr val="windowText" lastClr="000000"/>
+                  </a:solidFill>
+                </a:rPr>
+                <a:t>Diagnosed</a:t>
+              </a:r>
+            </a:p>
+          </p:txBody>
+        </p:sp>
+        <p:sp>
+          <p:nvSpPr>
+            <p:cNvPr id="41" name="Rounded Rectangle 40">
+              <a:extLst>
+                <a:ext uri="{FF2B5EF4-FFF2-40B4-BE49-F238E27FC236}">
+                  <a16:creationId xmlns:a16="http://schemas.microsoft.com/office/drawing/2014/main" id="{F3BB959A-27C8-AFEE-D507-EE007466DDD8}"/>
+                </a:ext>
+              </a:extLst>
+            </p:cNvPr>
+            <p:cNvSpPr/>
+            <p:nvPr/>
+          </p:nvSpPr>
+          <p:spPr>
+            <a:xfrm>
+              <a:off x="7167341" y="2553938"/>
+              <a:ext cx="1323286" cy="563831"/>
+            </a:xfrm>
+            <a:prstGeom prst="roundRect">
+              <a:avLst>
+                <a:gd name="adj" fmla="val 22916"/>
+              </a:avLst>
+            </a:prstGeom>
+            <a:solidFill>
+              <a:schemeClr val="bg1"/>
+            </a:solidFill>
+          </p:spPr>
+          <p:style>
+            <a:lnRef idx="2">
+              <a:schemeClr val="accent1">
+                <a:shade val="15000"/>
+              </a:schemeClr>
+            </a:lnRef>
+            <a:fillRef idx="1">
+              <a:schemeClr val="accent1"/>
+            </a:fillRef>
+            <a:effectRef idx="0">
+              <a:schemeClr val="accent1"/>
+            </a:effectRef>
+            <a:fontRef idx="minor">
+              <a:schemeClr val="lt1"/>
+            </a:fontRef>
+          </p:style>
+          <p:txBody>
+            <a:bodyPr rtlCol="0" anchor="ctr"/>
+            <a:lstStyle/>
+            <a:p>
+              <a:pPr algn="ctr"/>
+              <a:r>
+                <a:rPr lang="en-US" dirty="0">
+                  <a:solidFill>
+                    <a:sysClr val="windowText" lastClr="000000"/>
+                  </a:solidFill>
+                </a:rPr>
+                <a:t>Not Diagnosed</a:t>
+              </a:r>
+            </a:p>
+          </p:txBody>
+        </p:sp>
+        <p:sp>
+          <p:nvSpPr>
+            <p:cNvPr id="42" name="Rounded Rectangle 41">
+              <a:extLst>
+                <a:ext uri="{FF2B5EF4-FFF2-40B4-BE49-F238E27FC236}">
+                  <a16:creationId xmlns:a16="http://schemas.microsoft.com/office/drawing/2014/main" id="{B1BEAACC-99C4-FFEB-43E7-3002044AB498}"/>
+                </a:ext>
+              </a:extLst>
+            </p:cNvPr>
+            <p:cNvSpPr/>
+            <p:nvPr/>
+          </p:nvSpPr>
+          <p:spPr>
+            <a:xfrm>
+              <a:off x="7167341" y="3737033"/>
+              <a:ext cx="1323286" cy="563831"/>
+            </a:xfrm>
+            <a:prstGeom prst="roundRect">
+              <a:avLst>
+                <a:gd name="adj" fmla="val 22916"/>
+              </a:avLst>
+            </a:prstGeom>
+            <a:solidFill>
+              <a:schemeClr val="bg1"/>
+            </a:solidFill>
+          </p:spPr>
+          <p:style>
+            <a:lnRef idx="2">
+              <a:schemeClr val="accent1">
+                <a:shade val="15000"/>
+              </a:schemeClr>
+            </a:lnRef>
+            <a:fillRef idx="1">
+              <a:schemeClr val="accent1"/>
+            </a:fillRef>
+            <a:effectRef idx="0">
+              <a:schemeClr val="accent1"/>
+            </a:effectRef>
+            <a:fontRef idx="minor">
+              <a:schemeClr val="lt1"/>
+            </a:fontRef>
+          </p:style>
+          <p:txBody>
+            <a:bodyPr rtlCol="0" anchor="ctr"/>
+            <a:lstStyle/>
+            <a:p>
+              <a:pPr algn="ctr"/>
+              <a:r>
+                <a:rPr lang="en-US" dirty="0">
+                  <a:solidFill>
+                    <a:sysClr val="windowText" lastClr="000000"/>
+                  </a:solidFill>
+                </a:rPr>
+                <a:t>Diagnosed</a:t>
+              </a:r>
+            </a:p>
+          </p:txBody>
+        </p:sp>
+        <p:sp>
+          <p:nvSpPr>
+            <p:cNvPr id="43" name="Rounded Rectangle 42">
+              <a:extLst>
+                <a:ext uri="{FF2B5EF4-FFF2-40B4-BE49-F238E27FC236}">
+                  <a16:creationId xmlns:a16="http://schemas.microsoft.com/office/drawing/2014/main" id="{62EACE85-2818-B01F-6571-261FD78AFEFD}"/>
+                </a:ext>
+              </a:extLst>
+            </p:cNvPr>
+            <p:cNvSpPr/>
+            <p:nvPr/>
+          </p:nvSpPr>
+          <p:spPr>
+            <a:xfrm>
+              <a:off x="7167341" y="4864694"/>
+              <a:ext cx="1323286" cy="563831"/>
+            </a:xfrm>
+            <a:prstGeom prst="roundRect">
+              <a:avLst>
+                <a:gd name="adj" fmla="val 22916"/>
+              </a:avLst>
+            </a:prstGeom>
+            <a:solidFill>
+              <a:schemeClr val="bg1"/>
+            </a:solidFill>
+          </p:spPr>
+          <p:style>
+            <a:lnRef idx="2">
+              <a:schemeClr val="accent1">
+                <a:shade val="15000"/>
+              </a:schemeClr>
+            </a:lnRef>
+            <a:fillRef idx="1">
+              <a:schemeClr val="accent1"/>
+            </a:fillRef>
+            <a:effectRef idx="0">
+              <a:schemeClr val="accent1"/>
+            </a:effectRef>
+            <a:fontRef idx="minor">
+              <a:schemeClr val="lt1"/>
+            </a:fontRef>
+          </p:style>
+          <p:txBody>
+            <a:bodyPr rtlCol="0" anchor="ctr"/>
+            <a:lstStyle/>
+            <a:p>
+              <a:pPr algn="ctr"/>
+              <a:r>
+                <a:rPr lang="en-US" dirty="0">
+                  <a:solidFill>
+                    <a:sysClr val="windowText" lastClr="000000"/>
+                  </a:solidFill>
+                </a:rPr>
+                <a:t>Not Diagnosed</a:t>
+              </a:r>
+            </a:p>
+          </p:txBody>
+        </p:sp>
+        <p:cxnSp>
+          <p:nvCxnSpPr>
+            <p:cNvPr id="45" name="Straight Arrow Connector 44">
+              <a:extLst>
+                <a:ext uri="{FF2B5EF4-FFF2-40B4-BE49-F238E27FC236}">
+                  <a16:creationId xmlns:a16="http://schemas.microsoft.com/office/drawing/2014/main" id="{417AB575-55A8-AF92-6E37-80A11A402897}"/>
+                </a:ext>
+              </a:extLst>
+            </p:cNvPr>
+            <p:cNvCxnSpPr>
+              <a:cxnSpLocks/>
+              <a:stCxn id="9" idx="3"/>
+              <a:endCxn id="18" idx="1"/>
+            </p:cNvCxnSpPr>
+            <p:nvPr/>
+          </p:nvCxnSpPr>
+          <p:spPr>
+            <a:xfrm>
+              <a:off x="1802795" y="3387843"/>
+              <a:ext cx="303065" cy="1"/>
+            </a:xfrm>
+            <a:prstGeom prst="straightConnector1">
+              <a:avLst/>
+            </a:prstGeom>
+            <a:ln>
+              <a:solidFill>
+                <a:schemeClr val="tx1"/>
+              </a:solidFill>
+              <a:tailEnd type="triangle"/>
+            </a:ln>
+          </p:spPr>
+          <p:style>
+            <a:lnRef idx="2">
+              <a:schemeClr val="accent1"/>
+            </a:lnRef>
+            <a:fillRef idx="0">
+              <a:schemeClr val="accent1"/>
+            </a:fillRef>
+            <a:effectRef idx="1">
+              <a:schemeClr val="accent1"/>
+            </a:effectRef>
+            <a:fontRef idx="minor">
+              <a:schemeClr val="tx1"/>
+            </a:fontRef>
+          </p:style>
+        </p:cxnSp>
+        <p:cxnSp>
+          <p:nvCxnSpPr>
+            <p:cNvPr id="50" name="Straight Arrow Connector 49">
+              <a:extLst>
+                <a:ext uri="{FF2B5EF4-FFF2-40B4-BE49-F238E27FC236}">
+                  <a16:creationId xmlns:a16="http://schemas.microsoft.com/office/drawing/2014/main" id="{3C474B47-8997-276A-F9E2-6EF1F8CFAAB9}"/>
+                </a:ext>
+              </a:extLst>
+            </p:cNvPr>
+            <p:cNvCxnSpPr>
+              <a:cxnSpLocks/>
+              <a:stCxn id="18" idx="3"/>
+              <a:endCxn id="11" idx="1"/>
+            </p:cNvCxnSpPr>
+            <p:nvPr/>
+          </p:nvCxnSpPr>
+          <p:spPr>
+            <a:xfrm flipV="1">
+              <a:off x="3328935" y="1708193"/>
+              <a:ext cx="459745" cy="1679651"/>
+            </a:xfrm>
+            <a:prstGeom prst="straightConnector1">
+              <a:avLst/>
+            </a:prstGeom>
+            <a:ln>
+              <a:solidFill>
+                <a:schemeClr val="tx1"/>
+              </a:solidFill>
+              <a:tailEnd type="triangle"/>
+            </a:ln>
+          </p:spPr>
+          <p:style>
+            <a:lnRef idx="2">
+              <a:schemeClr val="accent1"/>
+            </a:lnRef>
+            <a:fillRef idx="0">
+              <a:schemeClr val="accent1"/>
+            </a:fillRef>
+            <a:effectRef idx="1">
+              <a:schemeClr val="accent1"/>
+            </a:effectRef>
+            <a:fontRef idx="minor">
+              <a:schemeClr val="tx1"/>
+            </a:fontRef>
+          </p:style>
+        </p:cxnSp>
+        <p:cxnSp>
+          <p:nvCxnSpPr>
+            <p:cNvPr id="54" name="Straight Arrow Connector 53">
+              <a:extLst>
+                <a:ext uri="{FF2B5EF4-FFF2-40B4-BE49-F238E27FC236}">
+                  <a16:creationId xmlns:a16="http://schemas.microsoft.com/office/drawing/2014/main" id="{F694FB7C-F515-69BF-933C-545B1E4A3413}"/>
+                </a:ext>
+              </a:extLst>
+            </p:cNvPr>
+            <p:cNvCxnSpPr>
+              <a:cxnSpLocks/>
+              <a:stCxn id="18" idx="3"/>
+              <a:endCxn id="19" idx="1"/>
+            </p:cNvCxnSpPr>
+            <p:nvPr/>
+          </p:nvCxnSpPr>
+          <p:spPr>
+            <a:xfrm>
+              <a:off x="3328935" y="3387844"/>
+              <a:ext cx="459745" cy="1761964"/>
+            </a:xfrm>
+            <a:prstGeom prst="straightConnector1">
+              <a:avLst/>
+            </a:prstGeom>
+            <a:ln>
+              <a:solidFill>
+                <a:schemeClr val="tx1"/>
+              </a:solidFill>
+              <a:tailEnd type="triangle"/>
+            </a:ln>
+          </p:spPr>
+          <p:style>
+            <a:lnRef idx="2">
+              <a:schemeClr val="accent1"/>
+            </a:lnRef>
+            <a:fillRef idx="0">
+              <a:schemeClr val="accent1"/>
+            </a:fillRef>
+            <a:effectRef idx="1">
+              <a:schemeClr val="accent1"/>
+            </a:effectRef>
+            <a:fontRef idx="minor">
+              <a:schemeClr val="tx1"/>
+            </a:fontRef>
+          </p:style>
+        </p:cxnSp>
+        <p:cxnSp>
+          <p:nvCxnSpPr>
+            <p:cNvPr id="58" name="Straight Arrow Connector 57">
+              <a:extLst>
+                <a:ext uri="{FF2B5EF4-FFF2-40B4-BE49-F238E27FC236}">
+                  <a16:creationId xmlns:a16="http://schemas.microsoft.com/office/drawing/2014/main" id="{6003DD7F-A0B5-A7F2-8857-BFD2D64D1E04}"/>
+                </a:ext>
+              </a:extLst>
+            </p:cNvPr>
+            <p:cNvCxnSpPr>
+              <a:cxnSpLocks/>
+              <a:stCxn id="11" idx="3"/>
+              <a:endCxn id="21" idx="1"/>
+            </p:cNvCxnSpPr>
+            <p:nvPr/>
+          </p:nvCxnSpPr>
+          <p:spPr>
+            <a:xfrm flipV="1">
+              <a:off x="5111966" y="1144362"/>
+              <a:ext cx="319838" cy="563831"/>
+            </a:xfrm>
+            <a:prstGeom prst="straightConnector1">
+              <a:avLst/>
+            </a:prstGeom>
+            <a:ln>
+              <a:solidFill>
+                <a:schemeClr val="tx1"/>
+              </a:solidFill>
+              <a:tailEnd type="triangle"/>
+            </a:ln>
+          </p:spPr>
+          <p:style>
+            <a:lnRef idx="2">
+              <a:schemeClr val="accent1"/>
+            </a:lnRef>
+            <a:fillRef idx="0">
+              <a:schemeClr val="accent1"/>
+            </a:fillRef>
+            <a:effectRef idx="1">
+              <a:schemeClr val="accent1"/>
+            </a:effectRef>
+            <a:fontRef idx="minor">
+              <a:schemeClr val="tx1"/>
+            </a:fontRef>
+          </p:style>
+        </p:cxnSp>
+        <p:cxnSp>
+          <p:nvCxnSpPr>
+            <p:cNvPr id="62" name="Straight Arrow Connector 61">
+              <a:extLst>
+                <a:ext uri="{FF2B5EF4-FFF2-40B4-BE49-F238E27FC236}">
+                  <a16:creationId xmlns:a16="http://schemas.microsoft.com/office/drawing/2014/main" id="{9DF5E9BE-EEE3-B3DF-476E-677F2898F183}"/>
+                </a:ext>
+              </a:extLst>
+            </p:cNvPr>
+            <p:cNvCxnSpPr>
+              <a:cxnSpLocks/>
+              <a:stCxn id="11" idx="3"/>
+              <a:endCxn id="22" idx="1"/>
+            </p:cNvCxnSpPr>
+            <p:nvPr/>
+          </p:nvCxnSpPr>
+          <p:spPr>
+            <a:xfrm>
+              <a:off x="5111966" y="1708193"/>
+              <a:ext cx="319838" cy="563831"/>
+            </a:xfrm>
+            <a:prstGeom prst="straightConnector1">
+              <a:avLst/>
+            </a:prstGeom>
+            <a:ln>
+              <a:solidFill>
+                <a:schemeClr val="tx1"/>
+              </a:solidFill>
+              <a:tailEnd type="triangle"/>
+            </a:ln>
+          </p:spPr>
+          <p:style>
+            <a:lnRef idx="2">
+              <a:schemeClr val="accent1"/>
+            </a:lnRef>
+            <a:fillRef idx="0">
+              <a:schemeClr val="accent1"/>
+            </a:fillRef>
+            <a:effectRef idx="1">
+              <a:schemeClr val="accent1"/>
+            </a:effectRef>
+            <a:fontRef idx="minor">
+              <a:schemeClr val="tx1"/>
+            </a:fontRef>
+          </p:style>
+        </p:cxnSp>
+        <p:cxnSp>
+          <p:nvCxnSpPr>
+            <p:cNvPr id="1026" name="Straight Arrow Connector 1025">
+              <a:extLst>
+                <a:ext uri="{FF2B5EF4-FFF2-40B4-BE49-F238E27FC236}">
+                  <a16:creationId xmlns:a16="http://schemas.microsoft.com/office/drawing/2014/main" id="{1F0FF8CA-68A3-0E94-ECFA-D410A368A3E6}"/>
+                </a:ext>
+              </a:extLst>
+            </p:cNvPr>
+            <p:cNvCxnSpPr>
+              <a:cxnSpLocks/>
+              <a:stCxn id="19" idx="3"/>
+              <a:endCxn id="36" idx="1"/>
+            </p:cNvCxnSpPr>
+            <p:nvPr/>
+          </p:nvCxnSpPr>
+          <p:spPr>
+            <a:xfrm flipV="1">
+              <a:off x="5111966" y="4582780"/>
+              <a:ext cx="319838" cy="567028"/>
+            </a:xfrm>
+            <a:prstGeom prst="straightConnector1">
+              <a:avLst/>
+            </a:prstGeom>
+            <a:ln>
+              <a:solidFill>
+                <a:schemeClr val="tx1"/>
+              </a:solidFill>
+              <a:tailEnd type="triangle"/>
+            </a:ln>
+          </p:spPr>
+          <p:style>
+            <a:lnRef idx="2">
+              <a:schemeClr val="accent1"/>
+            </a:lnRef>
+            <a:fillRef idx="0">
+              <a:schemeClr val="accent1"/>
+            </a:fillRef>
+            <a:effectRef idx="1">
+              <a:schemeClr val="accent1"/>
+            </a:effectRef>
+            <a:fontRef idx="minor">
+              <a:schemeClr val="tx1"/>
+            </a:fontRef>
+          </p:style>
+        </p:cxnSp>
+        <p:cxnSp>
+          <p:nvCxnSpPr>
+            <p:cNvPr id="1032" name="Straight Arrow Connector 1031">
+              <a:extLst>
+                <a:ext uri="{FF2B5EF4-FFF2-40B4-BE49-F238E27FC236}">
+                  <a16:creationId xmlns:a16="http://schemas.microsoft.com/office/drawing/2014/main" id="{B3ED7C0A-39E5-82C3-F5FB-180056B75B98}"/>
+                </a:ext>
+              </a:extLst>
+            </p:cNvPr>
+            <p:cNvCxnSpPr>
+              <a:cxnSpLocks/>
+              <a:stCxn id="19" idx="3"/>
+              <a:endCxn id="38" idx="1"/>
+            </p:cNvCxnSpPr>
+            <p:nvPr/>
+          </p:nvCxnSpPr>
+          <p:spPr>
+            <a:xfrm>
+              <a:off x="5111966" y="5149808"/>
+              <a:ext cx="319838" cy="563831"/>
+            </a:xfrm>
+            <a:prstGeom prst="straightConnector1">
+              <a:avLst/>
+            </a:prstGeom>
+            <a:ln>
+              <a:solidFill>
+                <a:schemeClr val="tx1"/>
+              </a:solidFill>
+              <a:tailEnd type="triangle"/>
+            </a:ln>
+          </p:spPr>
+          <p:style>
+            <a:lnRef idx="2">
+              <a:schemeClr val="accent1"/>
+            </a:lnRef>
+            <a:fillRef idx="0">
+              <a:schemeClr val="accent1"/>
+            </a:fillRef>
+            <a:effectRef idx="1">
+              <a:schemeClr val="accent1"/>
+            </a:effectRef>
+            <a:fontRef idx="minor">
+              <a:schemeClr val="tx1"/>
+            </a:fontRef>
+          </p:style>
+        </p:cxnSp>
+        <p:cxnSp>
+          <p:nvCxnSpPr>
+            <p:cNvPr id="1035" name="Straight Arrow Connector 1034">
+              <a:extLst>
+                <a:ext uri="{FF2B5EF4-FFF2-40B4-BE49-F238E27FC236}">
+                  <a16:creationId xmlns:a16="http://schemas.microsoft.com/office/drawing/2014/main" id="{DDCC49CB-B150-C03A-395B-218F124159EC}"/>
+                </a:ext>
+              </a:extLst>
+            </p:cNvPr>
+            <p:cNvCxnSpPr>
+              <a:cxnSpLocks/>
+              <a:stCxn id="22" idx="3"/>
+              <a:endCxn id="40" idx="1"/>
+            </p:cNvCxnSpPr>
+            <p:nvPr/>
+          </p:nvCxnSpPr>
+          <p:spPr>
+            <a:xfrm flipV="1">
+              <a:off x="6755090" y="1708193"/>
+              <a:ext cx="412251" cy="563831"/>
+            </a:xfrm>
+            <a:prstGeom prst="straightConnector1">
+              <a:avLst/>
+            </a:prstGeom>
+            <a:ln>
+              <a:solidFill>
+                <a:schemeClr val="tx1"/>
+              </a:solidFill>
+              <a:tailEnd type="triangle"/>
+            </a:ln>
+          </p:spPr>
+          <p:style>
+            <a:lnRef idx="2">
+              <a:schemeClr val="accent1"/>
+            </a:lnRef>
+            <a:fillRef idx="0">
+              <a:schemeClr val="accent1"/>
+            </a:fillRef>
+            <a:effectRef idx="1">
+              <a:schemeClr val="accent1"/>
+            </a:effectRef>
+            <a:fontRef idx="minor">
+              <a:schemeClr val="tx1"/>
+            </a:fontRef>
+          </p:style>
+        </p:cxnSp>
+        <p:cxnSp>
+          <p:nvCxnSpPr>
+            <p:cNvPr id="1041" name="Straight Arrow Connector 1040">
+              <a:extLst>
+                <a:ext uri="{FF2B5EF4-FFF2-40B4-BE49-F238E27FC236}">
+                  <a16:creationId xmlns:a16="http://schemas.microsoft.com/office/drawing/2014/main" id="{8A96BEE3-1BB5-8A59-C386-ABAB02F20B02}"/>
+                </a:ext>
+              </a:extLst>
+            </p:cNvPr>
+            <p:cNvCxnSpPr>
+              <a:cxnSpLocks/>
+              <a:stCxn id="22" idx="3"/>
+              <a:endCxn id="41" idx="1"/>
+            </p:cNvCxnSpPr>
+            <p:nvPr/>
+          </p:nvCxnSpPr>
+          <p:spPr>
+            <a:xfrm>
+              <a:off x="6755090" y="2272024"/>
+              <a:ext cx="412251" cy="563830"/>
+            </a:xfrm>
+            <a:prstGeom prst="straightConnector1">
+              <a:avLst/>
+            </a:prstGeom>
+            <a:ln>
+              <a:solidFill>
+                <a:schemeClr val="tx1"/>
+              </a:solidFill>
+              <a:tailEnd type="triangle"/>
+            </a:ln>
+          </p:spPr>
+          <p:style>
+            <a:lnRef idx="2">
+              <a:schemeClr val="accent1"/>
+            </a:lnRef>
+            <a:fillRef idx="0">
+              <a:schemeClr val="accent1"/>
+            </a:fillRef>
+            <a:effectRef idx="1">
+              <a:schemeClr val="accent1"/>
+            </a:effectRef>
+            <a:fontRef idx="minor">
+              <a:schemeClr val="tx1"/>
+            </a:fontRef>
+          </p:style>
+        </p:cxnSp>
+        <p:cxnSp>
+          <p:nvCxnSpPr>
+            <p:cNvPr id="1047" name="Straight Arrow Connector 1046">
+              <a:extLst>
+                <a:ext uri="{FF2B5EF4-FFF2-40B4-BE49-F238E27FC236}">
+                  <a16:creationId xmlns:a16="http://schemas.microsoft.com/office/drawing/2014/main" id="{01B76963-0F6B-054D-F367-97EDE66966BE}"/>
+                </a:ext>
+              </a:extLst>
+            </p:cNvPr>
+            <p:cNvCxnSpPr>
+              <a:cxnSpLocks/>
+              <a:stCxn id="36" idx="3"/>
+              <a:endCxn id="42" idx="1"/>
+            </p:cNvCxnSpPr>
+            <p:nvPr/>
+          </p:nvCxnSpPr>
+          <p:spPr>
+            <a:xfrm flipV="1">
+              <a:off x="6755090" y="4018949"/>
+              <a:ext cx="412251" cy="563831"/>
+            </a:xfrm>
+            <a:prstGeom prst="straightConnector1">
+              <a:avLst/>
+            </a:prstGeom>
+            <a:ln>
+              <a:solidFill>
+                <a:schemeClr val="tx1"/>
+              </a:solidFill>
+              <a:tailEnd type="triangle"/>
+            </a:ln>
+          </p:spPr>
+          <p:style>
+            <a:lnRef idx="2">
+              <a:schemeClr val="accent1"/>
+            </a:lnRef>
+            <a:fillRef idx="0">
+              <a:schemeClr val="accent1"/>
+            </a:fillRef>
+            <a:effectRef idx="1">
+              <a:schemeClr val="accent1"/>
+            </a:effectRef>
+            <a:fontRef idx="minor">
+              <a:schemeClr val="tx1"/>
+            </a:fontRef>
+          </p:style>
+        </p:cxnSp>
+        <p:cxnSp>
+          <p:nvCxnSpPr>
+            <p:cNvPr id="1053" name="Straight Arrow Connector 1052">
+              <a:extLst>
+                <a:ext uri="{FF2B5EF4-FFF2-40B4-BE49-F238E27FC236}">
+                  <a16:creationId xmlns:a16="http://schemas.microsoft.com/office/drawing/2014/main" id="{C370E245-7959-2CF1-E665-007DC63A5DB6}"/>
+                </a:ext>
+              </a:extLst>
+            </p:cNvPr>
+            <p:cNvCxnSpPr>
+              <a:cxnSpLocks/>
+              <a:stCxn id="36" idx="3"/>
+              <a:endCxn id="43" idx="1"/>
+            </p:cNvCxnSpPr>
+            <p:nvPr/>
+          </p:nvCxnSpPr>
+          <p:spPr>
+            <a:xfrm>
+              <a:off x="6755090" y="4582780"/>
+              <a:ext cx="412251" cy="563830"/>
+            </a:xfrm>
+            <a:prstGeom prst="straightConnector1">
+              <a:avLst/>
+            </a:prstGeom>
+            <a:ln>
+              <a:solidFill>
+                <a:schemeClr val="tx1"/>
+              </a:solidFill>
+              <a:tailEnd type="triangle"/>
+            </a:ln>
+          </p:spPr>
+          <p:style>
+            <a:lnRef idx="2">
+              <a:schemeClr val="accent1"/>
+            </a:lnRef>
+            <a:fillRef idx="0">
+              <a:schemeClr val="accent1"/>
+            </a:fillRef>
+            <a:effectRef idx="1">
+              <a:schemeClr val="accent1"/>
+            </a:effectRef>
+            <a:fontRef idx="minor">
+              <a:schemeClr val="tx1"/>
+            </a:fontRef>
+          </p:style>
+        </p:cxnSp>
+        <p:sp>
+          <p:nvSpPr>
+            <p:cNvPr id="1060" name="Rounded Rectangle 1059">
+              <a:extLst>
+                <a:ext uri="{FF2B5EF4-FFF2-40B4-BE49-F238E27FC236}">
+                  <a16:creationId xmlns:a16="http://schemas.microsoft.com/office/drawing/2014/main" id="{94EA5C3E-2F25-1145-1F3E-91AEE1800394}"/>
+                </a:ext>
+              </a:extLst>
+            </p:cNvPr>
+            <p:cNvSpPr/>
+            <p:nvPr/>
+          </p:nvSpPr>
+          <p:spPr>
+            <a:xfrm>
+              <a:off x="8863603" y="3151986"/>
+              <a:ext cx="1413153" cy="563831"/>
+            </a:xfrm>
+            <a:prstGeom prst="roundRect">
+              <a:avLst>
+                <a:gd name="adj" fmla="val 22916"/>
+              </a:avLst>
+            </a:prstGeom>
+            <a:solidFill>
+              <a:schemeClr val="bg1"/>
+            </a:solidFill>
+          </p:spPr>
+          <p:style>
+            <a:lnRef idx="2">
+              <a:schemeClr val="accent1">
+                <a:shade val="15000"/>
+              </a:schemeClr>
+            </a:lnRef>
+            <a:fillRef idx="1">
+              <a:schemeClr val="accent1"/>
+            </a:fillRef>
+            <a:effectRef idx="0">
+              <a:schemeClr val="accent1"/>
+            </a:effectRef>
+            <a:fontRef idx="minor">
+              <a:schemeClr val="lt1"/>
+            </a:fontRef>
+          </p:style>
+          <p:txBody>
+            <a:bodyPr rtlCol="0" anchor="ctr"/>
+            <a:lstStyle/>
+            <a:p>
+              <a:pPr algn="ctr"/>
+              <a:r>
+                <a:rPr lang="en-US" dirty="0">
+                  <a:solidFill>
+                    <a:sysClr val="windowText" lastClr="000000"/>
+                  </a:solidFill>
+                </a:rPr>
+                <a:t>MRI/biopsy</a:t>
+              </a:r>
+            </a:p>
+          </p:txBody>
+        </p:sp>
+        <p:cxnSp>
+          <p:nvCxnSpPr>
+            <p:cNvPr id="1069" name="Elbow Connector 1068">
+              <a:extLst>
+                <a:ext uri="{FF2B5EF4-FFF2-40B4-BE49-F238E27FC236}">
+                  <a16:creationId xmlns:a16="http://schemas.microsoft.com/office/drawing/2014/main" id="{2DCBF706-BA98-841F-3C72-D916DBCE93B9}"/>
+                </a:ext>
+              </a:extLst>
+            </p:cNvPr>
+            <p:cNvCxnSpPr>
+              <a:cxnSpLocks/>
+              <a:stCxn id="21" idx="3"/>
+              <a:endCxn id="1060" idx="0"/>
+            </p:cNvCxnSpPr>
+            <p:nvPr/>
+          </p:nvCxnSpPr>
+          <p:spPr>
+            <a:xfrm>
+              <a:off x="6755090" y="1144362"/>
+              <a:ext cx="2815090" cy="2007624"/>
+            </a:xfrm>
+            <a:prstGeom prst="bentConnector2">
+              <a:avLst/>
+            </a:prstGeom>
+            <a:ln>
+              <a:solidFill>
+                <a:schemeClr val="tx1"/>
+              </a:solidFill>
+              <a:tailEnd type="triangle"/>
+            </a:ln>
+          </p:spPr>
+          <p:style>
+            <a:lnRef idx="2">
+              <a:schemeClr val="accent1"/>
+            </a:lnRef>
+            <a:fillRef idx="0">
+              <a:schemeClr val="accent1"/>
+            </a:fillRef>
+            <a:effectRef idx="1">
+              <a:schemeClr val="accent1"/>
+            </a:effectRef>
+            <a:fontRef idx="minor">
+              <a:schemeClr val="tx1"/>
+            </a:fontRef>
+          </p:style>
+        </p:cxnSp>
+        <p:cxnSp>
+          <p:nvCxnSpPr>
+            <p:cNvPr id="1070" name="Elbow Connector 1069">
+              <a:extLst>
+                <a:ext uri="{FF2B5EF4-FFF2-40B4-BE49-F238E27FC236}">
+                  <a16:creationId xmlns:a16="http://schemas.microsoft.com/office/drawing/2014/main" id="{A0C13CAF-39C4-FF61-50EF-9E304F491EB4}"/>
+                </a:ext>
+              </a:extLst>
+            </p:cNvPr>
+            <p:cNvCxnSpPr>
+              <a:cxnSpLocks/>
+              <a:stCxn id="40" idx="3"/>
+              <a:endCxn id="1060" idx="0"/>
+            </p:cNvCxnSpPr>
+            <p:nvPr/>
+          </p:nvCxnSpPr>
+          <p:spPr>
+            <a:xfrm>
+              <a:off x="8490627" y="1708193"/>
+              <a:ext cx="1079553" cy="1443793"/>
+            </a:xfrm>
+            <a:prstGeom prst="bentConnector2">
+              <a:avLst/>
+            </a:prstGeom>
+            <a:ln>
+              <a:solidFill>
+                <a:schemeClr val="tx1"/>
+              </a:solidFill>
+              <a:tailEnd type="triangle"/>
+            </a:ln>
+          </p:spPr>
+          <p:style>
+            <a:lnRef idx="2">
+              <a:schemeClr val="accent1"/>
+            </a:lnRef>
+            <a:fillRef idx="0">
+              <a:schemeClr val="accent1"/>
+            </a:fillRef>
+            <a:effectRef idx="1">
+              <a:schemeClr val="accent1"/>
+            </a:effectRef>
+            <a:fontRef idx="minor">
+              <a:schemeClr val="tx1"/>
+            </a:fontRef>
+          </p:style>
+        </p:cxnSp>
+        <p:cxnSp>
+          <p:nvCxnSpPr>
+            <p:cNvPr id="1073" name="Elbow Connector 1072">
+              <a:extLst>
+                <a:ext uri="{FF2B5EF4-FFF2-40B4-BE49-F238E27FC236}">
+                  <a16:creationId xmlns:a16="http://schemas.microsoft.com/office/drawing/2014/main" id="{77D300D5-617B-2BE3-BB4A-7F331B4EBDC0}"/>
+                </a:ext>
+              </a:extLst>
+            </p:cNvPr>
+            <p:cNvCxnSpPr>
+              <a:cxnSpLocks/>
+              <a:stCxn id="42" idx="3"/>
+              <a:endCxn id="1060" idx="2"/>
+            </p:cNvCxnSpPr>
+            <p:nvPr/>
+          </p:nvCxnSpPr>
+          <p:spPr>
+            <a:xfrm flipV="1">
+              <a:off x="8490627" y="3715817"/>
+              <a:ext cx="1079553" cy="303132"/>
+            </a:xfrm>
+            <a:prstGeom prst="bentConnector2">
+              <a:avLst/>
+            </a:prstGeom>
+            <a:ln>
+              <a:solidFill>
+                <a:schemeClr val="tx1"/>
+              </a:solidFill>
+              <a:tailEnd type="triangle"/>
+            </a:ln>
+          </p:spPr>
+          <p:style>
+            <a:lnRef idx="2">
+              <a:schemeClr val="accent1"/>
+            </a:lnRef>
+            <a:fillRef idx="0">
+              <a:schemeClr val="accent1"/>
+            </a:fillRef>
+            <a:effectRef idx="1">
+              <a:schemeClr val="accent1"/>
+            </a:effectRef>
+            <a:fontRef idx="minor">
+              <a:schemeClr val="tx1"/>
+            </a:fontRef>
+          </p:style>
+        </p:cxnSp>
+        <p:sp>
+          <p:nvSpPr>
+            <p:cNvPr id="1079" name="Rounded Rectangle 1078">
+              <a:extLst>
+                <a:ext uri="{FF2B5EF4-FFF2-40B4-BE49-F238E27FC236}">
+                  <a16:creationId xmlns:a16="http://schemas.microsoft.com/office/drawing/2014/main" id="{BF148B6A-BE9C-6DE8-723D-2A7917C050CC}"/>
+                </a:ext>
+              </a:extLst>
+            </p:cNvPr>
+            <p:cNvSpPr/>
+            <p:nvPr/>
+          </p:nvSpPr>
+          <p:spPr>
+            <a:xfrm>
+              <a:off x="10464112" y="3151986"/>
+              <a:ext cx="1413153" cy="563831"/>
+            </a:xfrm>
+            <a:prstGeom prst="roundRect">
+              <a:avLst>
+                <a:gd name="adj" fmla="val 22916"/>
+              </a:avLst>
+            </a:prstGeom>
+            <a:solidFill>
+              <a:schemeClr val="bg1"/>
+            </a:solidFill>
+          </p:spPr>
+          <p:style>
+            <a:lnRef idx="2">
+              <a:schemeClr val="accent1">
+                <a:shade val="15000"/>
+              </a:schemeClr>
+            </a:lnRef>
+            <a:fillRef idx="1">
+              <a:schemeClr val="accent1"/>
+            </a:fillRef>
+            <a:effectRef idx="0">
+              <a:schemeClr val="accent1"/>
+            </a:effectRef>
+            <a:fontRef idx="minor">
+              <a:schemeClr val="lt1"/>
+            </a:fontRef>
+          </p:style>
+          <p:txBody>
+            <a:bodyPr rtlCol="0" anchor="ctr"/>
+            <a:lstStyle/>
+            <a:p>
+              <a:pPr algn="ctr"/>
+              <a:r>
+                <a:rPr lang="en-US" dirty="0">
+                  <a:solidFill>
+                    <a:sysClr val="windowText" lastClr="000000"/>
+                  </a:solidFill>
+                </a:rPr>
+                <a:t>False</a:t>
+              </a:r>
+            </a:p>
+            <a:p>
+              <a:pPr algn="ctr"/>
+              <a:r>
+                <a:rPr lang="en-US" dirty="0">
+                  <a:solidFill>
+                    <a:sysClr val="windowText" lastClr="000000"/>
+                  </a:solidFill>
+                </a:rPr>
+                <a:t>Positive?</a:t>
+              </a:r>
+            </a:p>
+          </p:txBody>
+        </p:sp>
+        <p:cxnSp>
+          <p:nvCxnSpPr>
+            <p:cNvPr id="1080" name="Straight Arrow Connector 1079">
+              <a:extLst>
+                <a:ext uri="{FF2B5EF4-FFF2-40B4-BE49-F238E27FC236}">
+                  <a16:creationId xmlns:a16="http://schemas.microsoft.com/office/drawing/2014/main" id="{52A9C17F-F700-2159-F7E8-C0FDECDBDA92}"/>
+                </a:ext>
+              </a:extLst>
+            </p:cNvPr>
+            <p:cNvCxnSpPr>
+              <a:cxnSpLocks/>
+              <a:stCxn id="1060" idx="3"/>
+              <a:endCxn id="1079" idx="1"/>
+            </p:cNvCxnSpPr>
+            <p:nvPr/>
+          </p:nvCxnSpPr>
+          <p:spPr>
+            <a:xfrm>
+              <a:off x="10276756" y="3433902"/>
+              <a:ext cx="187356" cy="0"/>
+            </a:xfrm>
+            <a:prstGeom prst="straightConnector1">
+              <a:avLst/>
+            </a:prstGeom>
+            <a:ln>
+              <a:solidFill>
+                <a:schemeClr val="tx1"/>
+              </a:solidFill>
+              <a:tailEnd type="triangle"/>
+            </a:ln>
+          </p:spPr>
+          <p:style>
+            <a:lnRef idx="2">
+              <a:schemeClr val="accent1"/>
+            </a:lnRef>
+            <a:fillRef idx="0">
+              <a:schemeClr val="accent1"/>
+            </a:fillRef>
+            <a:effectRef idx="1">
+              <a:schemeClr val="accent1"/>
+            </a:effectRef>
+            <a:fontRef idx="minor">
+              <a:schemeClr val="tx1"/>
+            </a:fontRef>
+          </p:style>
+        </p:cxnSp>
+        <p:sp>
+          <p:nvSpPr>
+            <p:cNvPr id="1085" name="Rounded Rectangle 1084">
+              <a:extLst>
+                <a:ext uri="{FF2B5EF4-FFF2-40B4-BE49-F238E27FC236}">
+                  <a16:creationId xmlns:a16="http://schemas.microsoft.com/office/drawing/2014/main" id="{40DC5F1C-FD78-06B1-86B7-72E4D01A47E7}"/>
+                </a:ext>
+              </a:extLst>
+            </p:cNvPr>
+            <p:cNvSpPr/>
+            <p:nvPr/>
+          </p:nvSpPr>
+          <p:spPr>
+            <a:xfrm>
+              <a:off x="10464111" y="1584343"/>
+              <a:ext cx="1413153" cy="563831"/>
+            </a:xfrm>
+            <a:prstGeom prst="roundRect">
+              <a:avLst>
+                <a:gd name="adj" fmla="val 22916"/>
+              </a:avLst>
+            </a:prstGeom>
+            <a:solidFill>
+              <a:schemeClr val="bg1"/>
+            </a:solidFill>
+          </p:spPr>
+          <p:style>
+            <a:lnRef idx="2">
+              <a:schemeClr val="accent1">
+                <a:shade val="15000"/>
+              </a:schemeClr>
+            </a:lnRef>
+            <a:fillRef idx="1">
+              <a:schemeClr val="accent1"/>
+            </a:fillRef>
+            <a:effectRef idx="0">
+              <a:schemeClr val="accent1"/>
+            </a:effectRef>
+            <a:fontRef idx="minor">
+              <a:schemeClr val="lt1"/>
+            </a:fontRef>
+          </p:style>
+          <p:txBody>
+            <a:bodyPr rtlCol="0" anchor="ctr"/>
+            <a:lstStyle/>
+            <a:p>
+              <a:pPr algn="ctr"/>
+              <a:r>
+                <a:rPr lang="en-US" dirty="0">
+                  <a:solidFill>
+                    <a:sysClr val="windowText" lastClr="000000"/>
+                  </a:solidFill>
+                </a:rPr>
+                <a:t>Treatment</a:t>
+              </a:r>
+            </a:p>
+          </p:txBody>
+        </p:sp>
+        <p:sp>
+          <p:nvSpPr>
+            <p:cNvPr id="1086" name="Rounded Rectangle 1085">
+              <a:extLst>
+                <a:ext uri="{FF2B5EF4-FFF2-40B4-BE49-F238E27FC236}">
+                  <a16:creationId xmlns:a16="http://schemas.microsoft.com/office/drawing/2014/main" id="{30921AB3-9591-33F0-8D10-F57FB224C9A5}"/>
+                </a:ext>
+              </a:extLst>
+            </p:cNvPr>
+            <p:cNvSpPr/>
+            <p:nvPr/>
+          </p:nvSpPr>
+          <p:spPr>
+            <a:xfrm>
+              <a:off x="10464111" y="4799209"/>
+              <a:ext cx="1413153" cy="563831"/>
+            </a:xfrm>
+            <a:prstGeom prst="roundRect">
+              <a:avLst>
+                <a:gd name="adj" fmla="val 22916"/>
+              </a:avLst>
+            </a:prstGeom>
+            <a:solidFill>
+              <a:schemeClr val="bg1"/>
+            </a:solidFill>
+          </p:spPr>
+          <p:style>
+            <a:lnRef idx="2">
+              <a:schemeClr val="accent1">
+                <a:shade val="15000"/>
+              </a:schemeClr>
+            </a:lnRef>
+            <a:fillRef idx="1">
+              <a:schemeClr val="accent1"/>
+            </a:fillRef>
+            <a:effectRef idx="0">
+              <a:schemeClr val="accent1"/>
+            </a:effectRef>
+            <a:fontRef idx="minor">
+              <a:schemeClr val="lt1"/>
+            </a:fontRef>
+          </p:style>
+          <p:txBody>
+            <a:bodyPr rtlCol="0" anchor="ctr"/>
+            <a:lstStyle/>
+            <a:p>
+              <a:pPr algn="ctr"/>
+              <a:r>
+                <a:rPr lang="en-US" dirty="0">
+                  <a:solidFill>
+                    <a:sysClr val="windowText" lastClr="000000"/>
+                  </a:solidFill>
+                </a:rPr>
+                <a:t>Back to normal</a:t>
+              </a:r>
+            </a:p>
+          </p:txBody>
+        </p:sp>
+        <p:cxnSp>
+          <p:nvCxnSpPr>
+            <p:cNvPr id="1088" name="Straight Arrow Connector 1087">
+              <a:extLst>
+                <a:ext uri="{FF2B5EF4-FFF2-40B4-BE49-F238E27FC236}">
+                  <a16:creationId xmlns:a16="http://schemas.microsoft.com/office/drawing/2014/main" id="{5CB2BDAF-BF7F-7C24-28C4-384F6A9C7E4E}"/>
+                </a:ext>
+              </a:extLst>
+            </p:cNvPr>
+            <p:cNvCxnSpPr>
+              <a:cxnSpLocks/>
+              <a:stCxn id="1079" idx="0"/>
+              <a:endCxn id="1085" idx="2"/>
+            </p:cNvCxnSpPr>
+            <p:nvPr/>
+          </p:nvCxnSpPr>
+          <p:spPr>
+            <a:xfrm flipH="1" flipV="1">
+              <a:off x="11170688" y="2148174"/>
+              <a:ext cx="1" cy="1003812"/>
+            </a:xfrm>
+            <a:prstGeom prst="straightConnector1">
+              <a:avLst/>
+            </a:prstGeom>
+            <a:ln>
+              <a:solidFill>
+                <a:schemeClr val="tx1"/>
+              </a:solidFill>
+              <a:tailEnd type="triangle"/>
+            </a:ln>
+          </p:spPr>
+          <p:style>
+            <a:lnRef idx="2">
+              <a:schemeClr val="accent1"/>
+            </a:lnRef>
+            <a:fillRef idx="0">
+              <a:schemeClr val="accent1"/>
+            </a:fillRef>
+            <a:effectRef idx="1">
+              <a:schemeClr val="accent1"/>
+            </a:effectRef>
+            <a:fontRef idx="minor">
+              <a:schemeClr val="tx1"/>
+            </a:fontRef>
+          </p:style>
+        </p:cxnSp>
+        <p:cxnSp>
+          <p:nvCxnSpPr>
+            <p:cNvPr id="1092" name="Straight Arrow Connector 1091">
+              <a:extLst>
+                <a:ext uri="{FF2B5EF4-FFF2-40B4-BE49-F238E27FC236}">
+                  <a16:creationId xmlns:a16="http://schemas.microsoft.com/office/drawing/2014/main" id="{69F90FB0-3558-F5E9-0D6C-04A79A23C05A}"/>
+                </a:ext>
+              </a:extLst>
+            </p:cNvPr>
+            <p:cNvCxnSpPr>
+              <a:cxnSpLocks/>
+              <a:stCxn id="1079" idx="2"/>
+              <a:endCxn id="1086" idx="0"/>
+            </p:cNvCxnSpPr>
+            <p:nvPr/>
+          </p:nvCxnSpPr>
+          <p:spPr>
+            <a:xfrm flipH="1">
+              <a:off x="11170688" y="3715817"/>
+              <a:ext cx="1" cy="1083392"/>
+            </a:xfrm>
+            <a:prstGeom prst="straightConnector1">
+              <a:avLst/>
+            </a:prstGeom>
+            <a:ln>
+              <a:solidFill>
+                <a:schemeClr val="tx1"/>
+              </a:solidFill>
+              <a:tailEnd type="triangle"/>
+            </a:ln>
+          </p:spPr>
+          <p:style>
+            <a:lnRef idx="2">
+              <a:schemeClr val="accent1"/>
+            </a:lnRef>
+            <a:fillRef idx="0">
+              <a:schemeClr val="accent1"/>
+            </a:fillRef>
+            <a:effectRef idx="1">
+              <a:schemeClr val="accent1"/>
+            </a:effectRef>
+            <a:fontRef idx="minor">
+              <a:schemeClr val="tx1"/>
+            </a:fontRef>
+          </p:style>
+        </p:cxnSp>
+        <p:sp>
+          <p:nvSpPr>
+            <p:cNvPr id="1114" name="TextBox 1113">
+              <a:extLst>
+                <a:ext uri="{FF2B5EF4-FFF2-40B4-BE49-F238E27FC236}">
+                  <a16:creationId xmlns:a16="http://schemas.microsoft.com/office/drawing/2014/main" id="{71060435-B518-4B7E-3746-459971143568}"/>
+                </a:ext>
+              </a:extLst>
+            </p:cNvPr>
+            <p:cNvSpPr txBox="1"/>
+            <p:nvPr/>
+          </p:nvSpPr>
+          <p:spPr>
+            <a:xfrm>
+              <a:off x="3269945" y="2280748"/>
+              <a:ext cx="288862" cy="369332"/>
+            </a:xfrm>
+            <a:prstGeom prst="rect">
+              <a:avLst/>
+            </a:prstGeom>
+            <a:noFill/>
+          </p:spPr>
+          <p:txBody>
+            <a:bodyPr wrap="none" rtlCol="0">
+              <a:spAutoFit/>
+            </a:bodyPr>
+            <a:lstStyle/>
+            <a:p>
+              <a:r>
+                <a:rPr lang="en-US" dirty="0"/>
+                <a:t>y</a:t>
+              </a:r>
+            </a:p>
+          </p:txBody>
+        </p:sp>
+        <p:sp>
+          <p:nvSpPr>
+            <p:cNvPr id="1118" name="TextBox 1117">
+              <a:extLst>
+                <a:ext uri="{FF2B5EF4-FFF2-40B4-BE49-F238E27FC236}">
+                  <a16:creationId xmlns:a16="http://schemas.microsoft.com/office/drawing/2014/main" id="{4BFA3C07-2F6F-44B3-89E7-1CC73F160EEA}"/>
+                </a:ext>
+              </a:extLst>
+            </p:cNvPr>
+            <p:cNvSpPr txBox="1"/>
+            <p:nvPr/>
+          </p:nvSpPr>
+          <p:spPr>
+            <a:xfrm>
+              <a:off x="3269945" y="4116198"/>
+              <a:ext cx="311304" cy="369332"/>
+            </a:xfrm>
+            <a:prstGeom prst="rect">
+              <a:avLst/>
+            </a:prstGeom>
+            <a:noFill/>
+          </p:spPr>
+          <p:txBody>
+            <a:bodyPr wrap="none" rtlCol="0">
+              <a:spAutoFit/>
+            </a:bodyPr>
+            <a:lstStyle/>
+            <a:p>
+              <a:r>
+                <a:rPr lang="en-US" dirty="0"/>
+                <a:t>n</a:t>
+              </a:r>
+            </a:p>
+          </p:txBody>
+        </p:sp>
+        <p:sp>
+          <p:nvSpPr>
+            <p:cNvPr id="1120" name="TextBox 1119">
+              <a:extLst>
+                <a:ext uri="{FF2B5EF4-FFF2-40B4-BE49-F238E27FC236}">
+                  <a16:creationId xmlns:a16="http://schemas.microsoft.com/office/drawing/2014/main" id="{4833628F-7A0A-B505-6585-475B87D144D6}"/>
+                </a:ext>
+              </a:extLst>
+            </p:cNvPr>
+            <p:cNvSpPr txBox="1"/>
+            <p:nvPr/>
+          </p:nvSpPr>
+          <p:spPr>
+            <a:xfrm>
+              <a:off x="5059678" y="1144361"/>
+              <a:ext cx="288862" cy="369332"/>
+            </a:xfrm>
+            <a:prstGeom prst="rect">
+              <a:avLst/>
+            </a:prstGeom>
+            <a:noFill/>
+          </p:spPr>
+          <p:txBody>
+            <a:bodyPr wrap="none" rtlCol="0">
+              <a:spAutoFit/>
+            </a:bodyPr>
+            <a:lstStyle/>
+            <a:p>
+              <a:r>
+                <a:rPr lang="en-US" dirty="0"/>
+                <a:t>y</a:t>
+              </a:r>
+            </a:p>
+          </p:txBody>
+        </p:sp>
+        <p:sp>
+          <p:nvSpPr>
+            <p:cNvPr id="1121" name="TextBox 1120">
+              <a:extLst>
+                <a:ext uri="{FF2B5EF4-FFF2-40B4-BE49-F238E27FC236}">
+                  <a16:creationId xmlns:a16="http://schemas.microsoft.com/office/drawing/2014/main" id="{7B05FBCE-7D5D-A546-EFD4-A6C754E50481}"/>
+                </a:ext>
+              </a:extLst>
+            </p:cNvPr>
+            <p:cNvSpPr txBox="1"/>
+            <p:nvPr/>
+          </p:nvSpPr>
+          <p:spPr>
+            <a:xfrm>
+              <a:off x="5046279" y="1917771"/>
+              <a:ext cx="311304" cy="369332"/>
+            </a:xfrm>
+            <a:prstGeom prst="rect">
+              <a:avLst/>
+            </a:prstGeom>
+            <a:noFill/>
+          </p:spPr>
+          <p:txBody>
+            <a:bodyPr wrap="none" rtlCol="0">
+              <a:spAutoFit/>
+            </a:bodyPr>
+            <a:lstStyle/>
+            <a:p>
+              <a:r>
+                <a:rPr lang="en-US" dirty="0"/>
+                <a:t>n</a:t>
+              </a:r>
+            </a:p>
+          </p:txBody>
+        </p:sp>
+        <p:sp>
+          <p:nvSpPr>
+            <p:cNvPr id="1122" name="TextBox 1121">
+              <a:extLst>
+                <a:ext uri="{FF2B5EF4-FFF2-40B4-BE49-F238E27FC236}">
+                  <a16:creationId xmlns:a16="http://schemas.microsoft.com/office/drawing/2014/main" id="{221CB997-C6DF-055A-6A41-4704190935F2}"/>
+                </a:ext>
+              </a:extLst>
+            </p:cNvPr>
+            <p:cNvSpPr txBox="1"/>
+            <p:nvPr/>
+          </p:nvSpPr>
+          <p:spPr>
+            <a:xfrm>
+              <a:off x="5049426" y="4570898"/>
+              <a:ext cx="288862" cy="369332"/>
+            </a:xfrm>
+            <a:prstGeom prst="rect">
+              <a:avLst/>
+            </a:prstGeom>
+            <a:noFill/>
+          </p:spPr>
+          <p:txBody>
+            <a:bodyPr wrap="none" rtlCol="0">
+              <a:spAutoFit/>
+            </a:bodyPr>
+            <a:lstStyle/>
+            <a:p>
+              <a:r>
+                <a:rPr lang="en-US" dirty="0"/>
+                <a:t>y</a:t>
+              </a:r>
+            </a:p>
+          </p:txBody>
+        </p:sp>
+        <p:sp>
+          <p:nvSpPr>
+            <p:cNvPr id="1123" name="TextBox 1122">
+              <a:extLst>
+                <a:ext uri="{FF2B5EF4-FFF2-40B4-BE49-F238E27FC236}">
+                  <a16:creationId xmlns:a16="http://schemas.microsoft.com/office/drawing/2014/main" id="{64A6E42F-42E7-8E75-C3A5-AF50BD1B8A75}"/>
+                </a:ext>
+              </a:extLst>
+            </p:cNvPr>
+            <p:cNvSpPr txBox="1"/>
+            <p:nvPr/>
+          </p:nvSpPr>
+          <p:spPr>
+            <a:xfrm>
+              <a:off x="5036027" y="5344308"/>
+              <a:ext cx="311304" cy="369332"/>
+            </a:xfrm>
+            <a:prstGeom prst="rect">
+              <a:avLst/>
+            </a:prstGeom>
+            <a:noFill/>
+          </p:spPr>
+          <p:txBody>
+            <a:bodyPr wrap="none" rtlCol="0">
+              <a:spAutoFit/>
+            </a:bodyPr>
+            <a:lstStyle/>
+            <a:p>
+              <a:r>
+                <a:rPr lang="en-US" dirty="0"/>
+                <a:t>n</a:t>
+              </a:r>
+            </a:p>
+          </p:txBody>
+        </p:sp>
+        <p:sp>
+          <p:nvSpPr>
+            <p:cNvPr id="1124" name="TextBox 1123">
+              <a:extLst>
+                <a:ext uri="{FF2B5EF4-FFF2-40B4-BE49-F238E27FC236}">
+                  <a16:creationId xmlns:a16="http://schemas.microsoft.com/office/drawing/2014/main" id="{328BD43A-128F-C8A0-37F0-17DFC0BBEECA}"/>
+                </a:ext>
+              </a:extLst>
+            </p:cNvPr>
+            <p:cNvSpPr txBox="1"/>
+            <p:nvPr/>
+          </p:nvSpPr>
+          <p:spPr>
+            <a:xfrm>
+              <a:off x="6768489" y="1693112"/>
+              <a:ext cx="288862" cy="369332"/>
+            </a:xfrm>
+            <a:prstGeom prst="rect">
+              <a:avLst/>
+            </a:prstGeom>
+            <a:noFill/>
+          </p:spPr>
+          <p:txBody>
+            <a:bodyPr wrap="none" rtlCol="0">
+              <a:spAutoFit/>
+            </a:bodyPr>
+            <a:lstStyle/>
+            <a:p>
+              <a:r>
+                <a:rPr lang="en-US" dirty="0"/>
+                <a:t>y</a:t>
+              </a:r>
+            </a:p>
+          </p:txBody>
+        </p:sp>
+        <p:sp>
+          <p:nvSpPr>
+            <p:cNvPr id="1125" name="TextBox 1124">
+              <a:extLst>
+                <a:ext uri="{FF2B5EF4-FFF2-40B4-BE49-F238E27FC236}">
+                  <a16:creationId xmlns:a16="http://schemas.microsoft.com/office/drawing/2014/main" id="{FAC88A37-7BF7-E278-A4D4-57A15FBB0069}"/>
+                </a:ext>
+              </a:extLst>
+            </p:cNvPr>
+            <p:cNvSpPr txBox="1"/>
+            <p:nvPr/>
+          </p:nvSpPr>
+          <p:spPr>
+            <a:xfrm>
+              <a:off x="6755090" y="2466522"/>
+              <a:ext cx="311304" cy="369332"/>
+            </a:xfrm>
+            <a:prstGeom prst="rect">
+              <a:avLst/>
+            </a:prstGeom>
+            <a:noFill/>
+          </p:spPr>
+          <p:txBody>
+            <a:bodyPr wrap="none" rtlCol="0">
+              <a:spAutoFit/>
+            </a:bodyPr>
+            <a:lstStyle/>
+            <a:p>
+              <a:r>
+                <a:rPr lang="en-US" dirty="0"/>
+                <a:t>n</a:t>
+              </a:r>
+            </a:p>
+          </p:txBody>
+        </p:sp>
+        <p:sp>
+          <p:nvSpPr>
+            <p:cNvPr id="1126" name="TextBox 1125">
+              <a:extLst>
+                <a:ext uri="{FF2B5EF4-FFF2-40B4-BE49-F238E27FC236}">
+                  <a16:creationId xmlns:a16="http://schemas.microsoft.com/office/drawing/2014/main" id="{A463194D-E224-C2DA-1DA0-E5F6B8ABBCBE}"/>
+                </a:ext>
+              </a:extLst>
+            </p:cNvPr>
+            <p:cNvSpPr txBox="1"/>
+            <p:nvPr/>
+          </p:nvSpPr>
+          <p:spPr>
+            <a:xfrm>
+              <a:off x="6768489" y="4003868"/>
+              <a:ext cx="288862" cy="369332"/>
+            </a:xfrm>
+            <a:prstGeom prst="rect">
+              <a:avLst/>
+            </a:prstGeom>
+            <a:noFill/>
+          </p:spPr>
+          <p:txBody>
+            <a:bodyPr wrap="none" rtlCol="0">
+              <a:spAutoFit/>
+            </a:bodyPr>
+            <a:lstStyle/>
+            <a:p>
+              <a:r>
+                <a:rPr lang="en-US" dirty="0"/>
+                <a:t>y</a:t>
+              </a:r>
+            </a:p>
+          </p:txBody>
+        </p:sp>
+        <p:sp>
+          <p:nvSpPr>
+            <p:cNvPr id="1127" name="TextBox 1126">
+              <a:extLst>
+                <a:ext uri="{FF2B5EF4-FFF2-40B4-BE49-F238E27FC236}">
+                  <a16:creationId xmlns:a16="http://schemas.microsoft.com/office/drawing/2014/main" id="{D6C39765-1ADA-BD93-D435-EE9961A2E574}"/>
+                </a:ext>
+              </a:extLst>
+            </p:cNvPr>
+            <p:cNvSpPr txBox="1"/>
+            <p:nvPr/>
+          </p:nvSpPr>
+          <p:spPr>
+            <a:xfrm>
+              <a:off x="6755090" y="4777278"/>
+              <a:ext cx="311304" cy="369332"/>
+            </a:xfrm>
+            <a:prstGeom prst="rect">
+              <a:avLst/>
+            </a:prstGeom>
+            <a:noFill/>
+          </p:spPr>
+          <p:txBody>
+            <a:bodyPr wrap="none" rtlCol="0">
+              <a:spAutoFit/>
+            </a:bodyPr>
+            <a:lstStyle/>
+            <a:p>
+              <a:r>
+                <a:rPr lang="en-US" dirty="0"/>
+                <a:t>n</a:t>
+              </a:r>
+            </a:p>
+          </p:txBody>
+        </p:sp>
+        <p:sp>
+          <p:nvSpPr>
+            <p:cNvPr id="1128" name="TextBox 1127">
+              <a:extLst>
+                <a:ext uri="{FF2B5EF4-FFF2-40B4-BE49-F238E27FC236}">
+                  <a16:creationId xmlns:a16="http://schemas.microsoft.com/office/drawing/2014/main" id="{30C91623-6ACD-F38F-057B-CAE10A583CB0}"/>
+                </a:ext>
+              </a:extLst>
+            </p:cNvPr>
+            <p:cNvSpPr txBox="1"/>
+            <p:nvPr/>
+          </p:nvSpPr>
+          <p:spPr>
+            <a:xfrm>
+              <a:off x="10870605" y="2466522"/>
+              <a:ext cx="288862" cy="369332"/>
+            </a:xfrm>
+            <a:prstGeom prst="rect">
+              <a:avLst/>
+            </a:prstGeom>
+            <a:noFill/>
+          </p:spPr>
+          <p:txBody>
+            <a:bodyPr wrap="none" rtlCol="0">
+              <a:spAutoFit/>
+            </a:bodyPr>
+            <a:lstStyle/>
+            <a:p>
+              <a:r>
+                <a:rPr lang="en-US" dirty="0"/>
+                <a:t>y</a:t>
+              </a:r>
+            </a:p>
+          </p:txBody>
+        </p:sp>
+        <p:sp>
+          <p:nvSpPr>
+            <p:cNvPr id="1129" name="TextBox 1128">
+              <a:extLst>
+                <a:ext uri="{FF2B5EF4-FFF2-40B4-BE49-F238E27FC236}">
+                  <a16:creationId xmlns:a16="http://schemas.microsoft.com/office/drawing/2014/main" id="{8F5C653C-45E3-1BAF-ADFA-212D3B740A59}"/>
+                </a:ext>
+              </a:extLst>
+            </p:cNvPr>
+            <p:cNvSpPr txBox="1"/>
+            <p:nvPr/>
+          </p:nvSpPr>
+          <p:spPr>
+            <a:xfrm>
+              <a:off x="10857206" y="4058074"/>
+              <a:ext cx="311304" cy="369332"/>
+            </a:xfrm>
+            <a:prstGeom prst="rect">
+              <a:avLst/>
+            </a:prstGeom>
+            <a:noFill/>
+          </p:spPr>
+          <p:txBody>
+            <a:bodyPr wrap="none" rtlCol="0">
+              <a:spAutoFit/>
+            </a:bodyPr>
+            <a:lstStyle/>
+            <a:p>
+              <a:r>
+                <a:rPr lang="en-US" dirty="0"/>
+                <a:t>n</a:t>
+              </a:r>
+            </a:p>
+          </p:txBody>
+        </p:sp>
+      </p:grpSp>
+    </p:spTree>
+    <p:extLst>
+      <p:ext uri="{BB962C8B-B14F-4D97-AF65-F5344CB8AC3E}">
+        <p14:creationId xmlns:p14="http://schemas.microsoft.com/office/powerpoint/2010/main" val="3700082280"/>
+      </p:ext>
+    </p:extLst>
+  </p:cSld>
+  <p:clrMapOvr>
+    <a:masterClrMapping/>
+  </p:clrMapOvr>
+</p:sld>
+</file>
+
 <file path=ppt/theme/theme1.xml><?xml version="1.0" encoding="utf-8"?>
 <a:theme xmlns:a="http://schemas.openxmlformats.org/drawingml/2006/main" name="Office Theme">
   <a:themeElements>

--- a/Model schematic.pptx
+++ b/Model schematic.pptx
@@ -13,6 +13,7 @@
     <p:sldId id="261" r:id="rId7"/>
     <p:sldId id="262" r:id="rId8"/>
     <p:sldId id="263" r:id="rId9"/>
+    <p:sldId id="264" r:id="rId10"/>
   </p:sldIdLst>
   <p:sldSz cx="12192000" cy="6858000"/>
   <p:notesSz cx="6858000" cy="9144000"/>
@@ -266,7 +267,7 @@
           <a:p>
             <a:fld id="{4ACD6CCD-50EB-0843-8C90-55A06B658EEA}" type="datetimeFigureOut">
               <a:rPr lang="en-US" smtClean="0"/>
-              <a:t>5/15/26</a:t>
+              <a:t>5/27/26</a:t>
             </a:fld>
             <a:endParaRPr lang="en-US"/>
           </a:p>
@@ -464,7 +465,7 @@
           <a:p>
             <a:fld id="{4ACD6CCD-50EB-0843-8C90-55A06B658EEA}" type="datetimeFigureOut">
               <a:rPr lang="en-US" smtClean="0"/>
-              <a:t>5/15/26</a:t>
+              <a:t>5/27/26</a:t>
             </a:fld>
             <a:endParaRPr lang="en-US"/>
           </a:p>
@@ -672,7 +673,7 @@
           <a:p>
             <a:fld id="{4ACD6CCD-50EB-0843-8C90-55A06B658EEA}" type="datetimeFigureOut">
               <a:rPr lang="en-US" smtClean="0"/>
-              <a:t>5/15/26</a:t>
+              <a:t>5/27/26</a:t>
             </a:fld>
             <a:endParaRPr lang="en-US"/>
           </a:p>
@@ -870,7 +871,7 @@
           <a:p>
             <a:fld id="{4ACD6CCD-50EB-0843-8C90-55A06B658EEA}" type="datetimeFigureOut">
               <a:rPr lang="en-US" smtClean="0"/>
-              <a:t>5/15/26</a:t>
+              <a:t>5/27/26</a:t>
             </a:fld>
             <a:endParaRPr lang="en-US"/>
           </a:p>
@@ -1145,7 +1146,7 @@
           <a:p>
             <a:fld id="{4ACD6CCD-50EB-0843-8C90-55A06B658EEA}" type="datetimeFigureOut">
               <a:rPr lang="en-US" smtClean="0"/>
-              <a:t>5/15/26</a:t>
+              <a:t>5/27/26</a:t>
             </a:fld>
             <a:endParaRPr lang="en-US"/>
           </a:p>
@@ -1410,7 +1411,7 @@
           <a:p>
             <a:fld id="{4ACD6CCD-50EB-0843-8C90-55A06B658EEA}" type="datetimeFigureOut">
               <a:rPr lang="en-US" smtClean="0"/>
-              <a:t>5/15/26</a:t>
+              <a:t>5/27/26</a:t>
             </a:fld>
             <a:endParaRPr lang="en-US"/>
           </a:p>
@@ -1822,7 +1823,7 @@
           <a:p>
             <a:fld id="{4ACD6CCD-50EB-0843-8C90-55A06B658EEA}" type="datetimeFigureOut">
               <a:rPr lang="en-US" smtClean="0"/>
-              <a:t>5/15/26</a:t>
+              <a:t>5/27/26</a:t>
             </a:fld>
             <a:endParaRPr lang="en-US"/>
           </a:p>
@@ -1963,7 +1964,7 @@
           <a:p>
             <a:fld id="{4ACD6CCD-50EB-0843-8C90-55A06B658EEA}" type="datetimeFigureOut">
               <a:rPr lang="en-US" smtClean="0"/>
-              <a:t>5/15/26</a:t>
+              <a:t>5/27/26</a:t>
             </a:fld>
             <a:endParaRPr lang="en-US"/>
           </a:p>
@@ -2076,7 +2077,7 @@
           <a:p>
             <a:fld id="{4ACD6CCD-50EB-0843-8C90-55A06B658EEA}" type="datetimeFigureOut">
               <a:rPr lang="en-US" smtClean="0"/>
-              <a:t>5/15/26</a:t>
+              <a:t>5/27/26</a:t>
             </a:fld>
             <a:endParaRPr lang="en-US"/>
           </a:p>
@@ -2387,7 +2388,7 @@
           <a:p>
             <a:fld id="{4ACD6CCD-50EB-0843-8C90-55A06B658EEA}" type="datetimeFigureOut">
               <a:rPr lang="en-US" smtClean="0"/>
-              <a:t>5/15/26</a:t>
+              <a:t>5/27/26</a:t>
             </a:fld>
             <a:endParaRPr lang="en-US"/>
           </a:p>
@@ -2675,7 +2676,7 @@
           <a:p>
             <a:fld id="{4ACD6CCD-50EB-0843-8C90-55A06B658EEA}" type="datetimeFigureOut">
               <a:rPr lang="en-US" smtClean="0"/>
-              <a:t>5/15/26</a:t>
+              <a:t>5/27/26</a:t>
             </a:fld>
             <a:endParaRPr lang="en-US"/>
           </a:p>
@@ -2916,7 +2917,7 @@
           <a:p>
             <a:fld id="{4ACD6CCD-50EB-0843-8C90-55A06B658EEA}" type="datetimeFigureOut">
               <a:rPr lang="en-US" smtClean="0"/>
-              <a:t>5/15/26</a:t>
+              <a:t>5/27/26</a:t>
             </a:fld>
             <a:endParaRPr lang="en-US"/>
           </a:p>
@@ -14749,7 +14750,7 @@
                         <a:sysClr val="windowText" lastClr="000000"/>
                       </a:solidFill>
                     </a:rPr>
-                    <a:t>&gt; decile 8?</a:t>
+                    <a:t>Top 20%?</a:t>
                   </a:r>
                 </a:p>
               </p:txBody>
@@ -14887,7 +14888,7 @@
                         <a:sysClr val="windowText" lastClr="000000"/>
                       </a:solidFill>
                     </a:rPr>
-                    <a:t>&gt; decile 8?</a:t>
+                    <a:t>Top 20%?</a:t>
                   </a:r>
                 </a:p>
               </p:txBody>
@@ -19518,6 +19519,117 @@
 </p:sld>
 </file>
 
+<file path=ppt/slides/slide9.xml><?xml version="1.0" encoding="utf-8"?>
+<p:sld xmlns:a="http://schemas.openxmlformats.org/drawingml/2006/main" xmlns:r="http://schemas.openxmlformats.org/officeDocument/2006/relationships" xmlns:p="http://schemas.openxmlformats.org/presentationml/2006/main">
+  <p:cSld>
+    <p:spTree>
+      <p:nvGrpSpPr>
+        <p:cNvPr id="1" name=""/>
+        <p:cNvGrpSpPr/>
+        <p:nvPr/>
+      </p:nvGrpSpPr>
+      <p:grpSpPr>
+        <a:xfrm>
+          <a:off x="0" y="0"/>
+          <a:ext cx="0" cy="0"/>
+          <a:chOff x="0" y="0"/>
+          <a:chExt cx="0" cy="0"/>
+        </a:xfrm>
+      </p:grpSpPr>
+      <p:grpSp>
+        <p:nvGrpSpPr>
+          <p:cNvPr id="8" name="Group 7">
+            <a:extLst>
+              <a:ext uri="{FF2B5EF4-FFF2-40B4-BE49-F238E27FC236}">
+                <a16:creationId xmlns:a16="http://schemas.microsoft.com/office/drawing/2014/main" id="{CC536D31-D224-9EB9-AC79-16490177FCCC}"/>
+              </a:ext>
+            </a:extLst>
+          </p:cNvPr>
+          <p:cNvGrpSpPr/>
+          <p:nvPr/>
+        </p:nvGrpSpPr>
+        <p:grpSpPr>
+          <a:xfrm>
+            <a:off x="2539049" y="1316821"/>
+            <a:ext cx="8338336" cy="3695154"/>
+            <a:chOff x="606881" y="1379622"/>
+            <a:chExt cx="10672701" cy="4729633"/>
+          </a:xfrm>
+        </p:grpSpPr>
+        <p:pic>
+          <p:nvPicPr>
+            <p:cNvPr id="7" name="Picture 6" descr="A graph of different colored lines&#10;&#10;AI-generated content may be incorrect.">
+              <a:extLst>
+                <a:ext uri="{FF2B5EF4-FFF2-40B4-BE49-F238E27FC236}">
+                  <a16:creationId xmlns:a16="http://schemas.microsoft.com/office/drawing/2014/main" id="{A10BDA37-34E6-6FBA-C991-849AE6333BBB}"/>
+                </a:ext>
+              </a:extLst>
+            </p:cNvPr>
+            <p:cNvPicPr>
+              <a:picLocks noChangeAspect="1"/>
+            </p:cNvPicPr>
+            <p:nvPr/>
+          </p:nvPicPr>
+          <p:blipFill>
+            <a:blip r:embed="rId2"/>
+            <a:stretch>
+              <a:fillRect/>
+            </a:stretch>
+          </p:blipFill>
+          <p:spPr>
+            <a:xfrm>
+              <a:off x="606881" y="1379622"/>
+              <a:ext cx="5916219" cy="4729633"/>
+            </a:xfrm>
+            <a:prstGeom prst="rect">
+              <a:avLst/>
+            </a:prstGeom>
+          </p:spPr>
+        </p:pic>
+        <p:pic>
+          <p:nvPicPr>
+            <p:cNvPr id="5" name="Picture 4" descr="A graph of age-related events&#10;&#10;AI-generated content may be incorrect.">
+              <a:extLst>
+                <a:ext uri="{FF2B5EF4-FFF2-40B4-BE49-F238E27FC236}">
+                  <a16:creationId xmlns:a16="http://schemas.microsoft.com/office/drawing/2014/main" id="{FA5E2F83-0E51-41F2-80A1-B78988858499}"/>
+                </a:ext>
+              </a:extLst>
+            </p:cNvPr>
+            <p:cNvPicPr>
+              <a:picLocks noChangeAspect="1"/>
+            </p:cNvPicPr>
+            <p:nvPr/>
+          </p:nvPicPr>
+          <p:blipFill>
+            <a:blip r:embed="rId3"/>
+            <a:stretch>
+              <a:fillRect/>
+            </a:stretch>
+          </p:blipFill>
+          <p:spPr>
+            <a:xfrm>
+              <a:off x="5363363" y="1379622"/>
+              <a:ext cx="5916219" cy="4729633"/>
+            </a:xfrm>
+            <a:prstGeom prst="rect">
+              <a:avLst/>
+            </a:prstGeom>
+          </p:spPr>
+        </p:pic>
+      </p:grpSp>
+    </p:spTree>
+    <p:extLst>
+      <p:ext uri="{BB962C8B-B14F-4D97-AF65-F5344CB8AC3E}">
+        <p14:creationId xmlns:p14="http://schemas.microsoft.com/office/powerpoint/2010/main" val="3578317271"/>
+      </p:ext>
+    </p:extLst>
+  </p:cSld>
+  <p:clrMapOvr>
+    <a:masterClrMapping/>
+  </p:clrMapOvr>
+</p:sld>
+</file>
+
 <file path=ppt/theme/theme1.xml><?xml version="1.0" encoding="utf-8"?>
 <a:theme xmlns:a="http://schemas.openxmlformats.org/drawingml/2006/main" name="Office Theme">
   <a:themeElements>

--- a/Model schematic.pptx
+++ b/Model schematic.pptx
@@ -14,6 +14,7 @@
     <p:sldId id="262" r:id="rId8"/>
     <p:sldId id="263" r:id="rId9"/>
     <p:sldId id="264" r:id="rId10"/>
+    <p:sldId id="265" r:id="rId11"/>
   </p:sldIdLst>
   <p:sldSz cx="12192000" cy="6858000"/>
   <p:notesSz cx="6858000" cy="9144000"/>
@@ -267,7 +268,7 @@
           <a:p>
             <a:fld id="{4ACD6CCD-50EB-0843-8C90-55A06B658EEA}" type="datetimeFigureOut">
               <a:rPr lang="en-US" smtClean="0"/>
-              <a:t>5/27/26</a:t>
+              <a:t>8/22/26</a:t>
             </a:fld>
             <a:endParaRPr lang="en-US"/>
           </a:p>
@@ -465,7 +466,7 @@
           <a:p>
             <a:fld id="{4ACD6CCD-50EB-0843-8C90-55A06B658EEA}" type="datetimeFigureOut">
               <a:rPr lang="en-US" smtClean="0"/>
-              <a:t>5/27/26</a:t>
+              <a:t>8/22/26</a:t>
             </a:fld>
             <a:endParaRPr lang="en-US"/>
           </a:p>
@@ -673,7 +674,7 @@
           <a:p>
             <a:fld id="{4ACD6CCD-50EB-0843-8C90-55A06B658EEA}" type="datetimeFigureOut">
               <a:rPr lang="en-US" smtClean="0"/>
-              <a:t>5/27/26</a:t>
+              <a:t>8/22/26</a:t>
             </a:fld>
             <a:endParaRPr lang="en-US"/>
           </a:p>
@@ -871,7 +872,7 @@
           <a:p>
             <a:fld id="{4ACD6CCD-50EB-0843-8C90-55A06B658EEA}" type="datetimeFigureOut">
               <a:rPr lang="en-US" smtClean="0"/>
-              <a:t>5/27/26</a:t>
+              <a:t>8/22/26</a:t>
             </a:fld>
             <a:endParaRPr lang="en-US"/>
           </a:p>
@@ -1146,7 +1147,7 @@
           <a:p>
             <a:fld id="{4ACD6CCD-50EB-0843-8C90-55A06B658EEA}" type="datetimeFigureOut">
               <a:rPr lang="en-US" smtClean="0"/>
-              <a:t>5/27/26</a:t>
+              <a:t>8/22/26</a:t>
             </a:fld>
             <a:endParaRPr lang="en-US"/>
           </a:p>
@@ -1411,7 +1412,7 @@
           <a:p>
             <a:fld id="{4ACD6CCD-50EB-0843-8C90-55A06B658EEA}" type="datetimeFigureOut">
               <a:rPr lang="en-US" smtClean="0"/>
-              <a:t>5/27/26</a:t>
+              <a:t>8/22/26</a:t>
             </a:fld>
             <a:endParaRPr lang="en-US"/>
           </a:p>
@@ -1823,7 +1824,7 @@
           <a:p>
             <a:fld id="{4ACD6CCD-50EB-0843-8C90-55A06B658EEA}" type="datetimeFigureOut">
               <a:rPr lang="en-US" smtClean="0"/>
-              <a:t>5/27/26</a:t>
+              <a:t>8/22/26</a:t>
             </a:fld>
             <a:endParaRPr lang="en-US"/>
           </a:p>
@@ -1964,7 +1965,7 @@
           <a:p>
             <a:fld id="{4ACD6CCD-50EB-0843-8C90-55A06B658EEA}" type="datetimeFigureOut">
               <a:rPr lang="en-US" smtClean="0"/>
-              <a:t>5/27/26</a:t>
+              <a:t>8/22/26</a:t>
             </a:fld>
             <a:endParaRPr lang="en-US"/>
           </a:p>
@@ -2077,7 +2078,7 @@
           <a:p>
             <a:fld id="{4ACD6CCD-50EB-0843-8C90-55A06B658EEA}" type="datetimeFigureOut">
               <a:rPr lang="en-US" smtClean="0"/>
-              <a:t>5/27/26</a:t>
+              <a:t>8/22/26</a:t>
             </a:fld>
             <a:endParaRPr lang="en-US"/>
           </a:p>
@@ -2388,7 +2389,7 @@
           <a:p>
             <a:fld id="{4ACD6CCD-50EB-0843-8C90-55A06B658EEA}" type="datetimeFigureOut">
               <a:rPr lang="en-US" smtClean="0"/>
-              <a:t>5/27/26</a:t>
+              <a:t>8/22/26</a:t>
             </a:fld>
             <a:endParaRPr lang="en-US"/>
           </a:p>
@@ -2676,7 +2677,7 @@
           <a:p>
             <a:fld id="{4ACD6CCD-50EB-0843-8C90-55A06B658EEA}" type="datetimeFigureOut">
               <a:rPr lang="en-US" smtClean="0"/>
-              <a:t>5/27/26</a:t>
+              <a:t>8/22/26</a:t>
             </a:fld>
             <a:endParaRPr lang="en-US"/>
           </a:p>
@@ -2917,7 +2918,7 @@
           <a:p>
             <a:fld id="{4ACD6CCD-50EB-0843-8C90-55A06B658EEA}" type="datetimeFigureOut">
               <a:rPr lang="en-US" smtClean="0"/>
-              <a:t>5/27/26</a:t>
+              <a:t>8/22/26</a:t>
             </a:fld>
             <a:endParaRPr lang="en-US"/>
           </a:p>
@@ -3334,12 +3335,117 @@
           <a:chExt cx="0" cy="0"/>
         </a:xfrm>
       </p:grpSpPr>
+      <p:sp>
+        <p:nvSpPr>
+          <p:cNvPr id="51" name="TextBox 50">
+            <a:extLst>
+              <a:ext uri="{FF2B5EF4-FFF2-40B4-BE49-F238E27FC236}">
+                <a16:creationId xmlns:a16="http://schemas.microsoft.com/office/drawing/2014/main" id="{1A7A4915-91AE-B290-8566-B5E8330B2316}"/>
+              </a:ext>
+            </a:extLst>
+          </p:cNvPr>
+          <p:cNvSpPr txBox="1"/>
+          <p:nvPr/>
+        </p:nvSpPr>
+        <p:spPr>
+          <a:xfrm>
+            <a:off x="1930341" y="551441"/>
+            <a:ext cx="2938818" cy="400110"/>
+          </a:xfrm>
+          <a:prstGeom prst="rect">
+            <a:avLst/>
+          </a:prstGeom>
+          <a:noFill/>
+        </p:spPr>
+        <p:txBody>
+          <a:bodyPr wrap="none" rtlCol="0">
+            <a:spAutoFit/>
+          </a:bodyPr>
+          <a:lstStyle/>
+          <a:p>
+            <a:r>
+              <a:rPr lang="en-US" sz="2000" b="1" dirty="0"/>
+              <a:t>Incarceration dynamics</a:t>
+            </a:r>
+          </a:p>
+        </p:txBody>
+      </p:sp>
+      <p:sp>
+        <p:nvSpPr>
+          <p:cNvPr id="22" name="TextBox 21">
+            <a:extLst>
+              <a:ext uri="{FF2B5EF4-FFF2-40B4-BE49-F238E27FC236}">
+                <a16:creationId xmlns:a16="http://schemas.microsoft.com/office/drawing/2014/main" id="{85A9343D-C0C3-CEA6-25FC-FE5C6314916E}"/>
+              </a:ext>
+            </a:extLst>
+          </p:cNvPr>
+          <p:cNvSpPr txBox="1"/>
+          <p:nvPr/>
+        </p:nvSpPr>
+        <p:spPr>
+          <a:xfrm>
+            <a:off x="6818879" y="555026"/>
+            <a:ext cx="4567084" cy="400110"/>
+          </a:xfrm>
+          <a:prstGeom prst="rect">
+            <a:avLst/>
+          </a:prstGeom>
+          <a:noFill/>
+        </p:spPr>
+        <p:txBody>
+          <a:bodyPr wrap="none" rtlCol="0">
+            <a:spAutoFit/>
+          </a:bodyPr>
+          <a:lstStyle/>
+          <a:p>
+            <a:r>
+              <a:rPr lang="en-US" sz="2000" b="1" dirty="0"/>
+              <a:t>HCV transmission dynamics for PWID</a:t>
+            </a:r>
+          </a:p>
+        </p:txBody>
+      </p:sp>
+      <p:sp>
+        <p:nvSpPr>
+          <p:cNvPr id="23" name="TextBox 22">
+            <a:extLst>
+              <a:ext uri="{FF2B5EF4-FFF2-40B4-BE49-F238E27FC236}">
+                <a16:creationId xmlns:a16="http://schemas.microsoft.com/office/drawing/2014/main" id="{45EA3E0A-575A-3D2A-F08A-D85697F47EBF}"/>
+              </a:ext>
+            </a:extLst>
+          </p:cNvPr>
+          <p:cNvSpPr txBox="1"/>
+          <p:nvPr/>
+        </p:nvSpPr>
+        <p:spPr>
+          <a:xfrm>
+            <a:off x="4520216" y="4357401"/>
+            <a:ext cx="3151568" cy="400110"/>
+          </a:xfrm>
+          <a:prstGeom prst="rect">
+            <a:avLst/>
+          </a:prstGeom>
+          <a:noFill/>
+        </p:spPr>
+        <p:txBody>
+          <a:bodyPr wrap="none" rtlCol="0">
+            <a:spAutoFit/>
+          </a:bodyPr>
+          <a:lstStyle/>
+          <a:p>
+            <a:r>
+              <a:rPr lang="en-US" sz="2000" b="1" dirty="0"/>
+              <a:t>Liver disease progression</a:t>
+            </a:r>
+          </a:p>
+        </p:txBody>
+      </p:sp>
       <p:grpSp>
         <p:nvGrpSpPr>
-          <p:cNvPr id="82" name="Group 81">
+          <p:cNvPr id="24" name="Group 23">
             <a:extLst>
               <a:ext uri="{FF2B5EF4-FFF2-40B4-BE49-F238E27FC236}">
-                <a16:creationId xmlns:a16="http://schemas.microsoft.com/office/drawing/2014/main" id="{EEE0C784-755A-90B5-EA20-F9DDAA2B54FC}"/>
+                <a16:creationId xmlns:a16="http://schemas.microsoft.com/office/drawing/2014/main" id="{843503F6-D4F8-E837-9DE0-4A53E598C1DA}"/>
               </a:ext>
             </a:extLst>
           </p:cNvPr>
@@ -3348,1521 +3454,295 @@
         </p:nvGrpSpPr>
         <p:grpSpPr>
           <a:xfrm>
-            <a:off x="154382" y="551441"/>
-            <a:ext cx="11622286" cy="5681106"/>
-            <a:chOff x="154382" y="551441"/>
-            <a:chExt cx="11622286" cy="5681106"/>
+            <a:off x="323101" y="5172746"/>
+            <a:ext cx="11213111" cy="601347"/>
+            <a:chOff x="242011" y="2431357"/>
+            <a:chExt cx="11213111" cy="601347"/>
           </a:xfrm>
         </p:grpSpPr>
-        <p:grpSp>
-          <p:nvGrpSpPr>
-            <p:cNvPr id="41" name="Group 40">
+        <p:sp>
+          <p:nvSpPr>
+            <p:cNvPr id="25" name="Rounded Rectangle 24">
               <a:extLst>
                 <a:ext uri="{FF2B5EF4-FFF2-40B4-BE49-F238E27FC236}">
-                  <a16:creationId xmlns:a16="http://schemas.microsoft.com/office/drawing/2014/main" id="{88018857-26DE-FCDE-16C5-122BADD43C58}"/>
+                  <a16:creationId xmlns:a16="http://schemas.microsoft.com/office/drawing/2014/main" id="{05B3D97F-CA06-D52E-2F06-CB2AF7E48FF9}"/>
                 </a:ext>
               </a:extLst>
             </p:cNvPr>
-            <p:cNvGrpSpPr/>
-            <p:nvPr/>
-          </p:nvGrpSpPr>
-          <p:grpSpPr>
-            <a:xfrm>
-              <a:off x="154382" y="989598"/>
-              <a:ext cx="6391759" cy="2469203"/>
-              <a:chOff x="1471519" y="219121"/>
-              <a:chExt cx="6391759" cy="2469203"/>
-            </a:xfrm>
-          </p:grpSpPr>
-          <p:sp>
-            <p:nvSpPr>
-              <p:cNvPr id="5" name="Rounded Rectangle 4">
-                <a:extLst>
-                  <a:ext uri="{FF2B5EF4-FFF2-40B4-BE49-F238E27FC236}">
-                    <a16:creationId xmlns:a16="http://schemas.microsoft.com/office/drawing/2014/main" id="{FD653E7B-EDD0-77AE-51CE-8AA6112E426E}"/>
-                  </a:ext>
-                </a:extLst>
-              </p:cNvPr>
-              <p:cNvSpPr/>
-              <p:nvPr/>
-            </p:nvSpPr>
-            <p:spPr>
-              <a:xfrm>
-                <a:off x="1471519" y="896233"/>
-                <a:ext cx="1430921" cy="932566"/>
-              </a:xfrm>
-              <a:prstGeom prst="roundRect">
-                <a:avLst/>
-              </a:prstGeom>
-              <a:noFill/>
-            </p:spPr>
-            <p:style>
-              <a:lnRef idx="2">
-                <a:schemeClr val="accent1">
-                  <a:shade val="15000"/>
-                </a:schemeClr>
-              </a:lnRef>
-              <a:fillRef idx="1">
-                <a:schemeClr val="accent1"/>
-              </a:fillRef>
-              <a:effectRef idx="0">
-                <a:schemeClr val="accent1"/>
-              </a:effectRef>
-              <a:fontRef idx="minor">
-                <a:schemeClr val="lt1"/>
-              </a:fontRef>
-            </p:style>
-            <p:txBody>
-              <a:bodyPr rtlCol="0" anchor="ctr"/>
-              <a:lstStyle/>
-              <a:p>
-                <a:pPr algn="ctr"/>
-                <a:r>
-                  <a:rPr lang="en-US" sz="1600" dirty="0">
-                    <a:solidFill>
-                      <a:schemeClr val="tx1"/>
-                    </a:solidFill>
-                  </a:rPr>
-                  <a:t>Never Incarcerated PWID (D)</a:t>
-                </a:r>
-              </a:p>
-            </p:txBody>
-          </p:sp>
-          <p:sp>
-            <p:nvSpPr>
-              <p:cNvPr id="6" name="Rounded Rectangle 5">
-                <a:extLst>
-                  <a:ext uri="{FF2B5EF4-FFF2-40B4-BE49-F238E27FC236}">
-                    <a16:creationId xmlns:a16="http://schemas.microsoft.com/office/drawing/2014/main" id="{819844E7-9540-E3AC-BF93-3910B9C71C1B}"/>
-                  </a:ext>
-                </a:extLst>
-              </p:cNvPr>
-              <p:cNvSpPr/>
-              <p:nvPr/>
-            </p:nvSpPr>
-            <p:spPr>
-              <a:xfrm>
-                <a:off x="4001427" y="896233"/>
-                <a:ext cx="1430921" cy="932566"/>
-              </a:xfrm>
-              <a:prstGeom prst="roundRect">
-                <a:avLst/>
-              </a:prstGeom>
-              <a:noFill/>
-            </p:spPr>
-            <p:style>
-              <a:lnRef idx="2">
-                <a:schemeClr val="accent1">
-                  <a:shade val="15000"/>
-                </a:schemeClr>
-              </a:lnRef>
-              <a:fillRef idx="1">
-                <a:schemeClr val="accent1"/>
-              </a:fillRef>
-              <a:effectRef idx="0">
-                <a:schemeClr val="accent1"/>
-              </a:effectRef>
-              <a:fontRef idx="minor">
-                <a:schemeClr val="lt1"/>
-              </a:fontRef>
-            </p:style>
-            <p:txBody>
-              <a:bodyPr rtlCol="0" anchor="ctr"/>
-              <a:lstStyle/>
-              <a:p>
-                <a:pPr algn="ctr"/>
-                <a:r>
-                  <a:rPr lang="en-US" sz="1600" dirty="0">
-                    <a:solidFill>
-                      <a:schemeClr val="tx1"/>
-                    </a:solidFill>
-                  </a:rPr>
-                  <a:t>Currently Incarcerated Ex-PWID (J)</a:t>
-                </a:r>
-              </a:p>
-            </p:txBody>
-          </p:sp>
-          <p:sp>
-            <p:nvSpPr>
-              <p:cNvPr id="7" name="Rounded Rectangle 6">
-                <a:extLst>
-                  <a:ext uri="{FF2B5EF4-FFF2-40B4-BE49-F238E27FC236}">
-                    <a16:creationId xmlns:a16="http://schemas.microsoft.com/office/drawing/2014/main" id="{041BFD32-1EFE-6BC5-FF1F-6A4D9B19CCF2}"/>
-                  </a:ext>
-                </a:extLst>
-              </p:cNvPr>
-              <p:cNvSpPr/>
-              <p:nvPr/>
-            </p:nvSpPr>
-            <p:spPr>
-              <a:xfrm>
-                <a:off x="6432357" y="219121"/>
-                <a:ext cx="1430921" cy="932566"/>
-              </a:xfrm>
-              <a:prstGeom prst="roundRect">
-                <a:avLst/>
-              </a:prstGeom>
-              <a:noFill/>
-            </p:spPr>
-            <p:style>
-              <a:lnRef idx="2">
-                <a:schemeClr val="accent1">
-                  <a:shade val="15000"/>
-                </a:schemeClr>
-              </a:lnRef>
-              <a:fillRef idx="1">
-                <a:schemeClr val="accent1"/>
-              </a:fillRef>
-              <a:effectRef idx="0">
-                <a:schemeClr val="accent1"/>
-              </a:effectRef>
-              <a:fontRef idx="minor">
-                <a:schemeClr val="lt1"/>
-              </a:fontRef>
-            </p:style>
-            <p:txBody>
-              <a:bodyPr rtlCol="0" anchor="ctr"/>
-              <a:lstStyle/>
-              <a:p>
-                <a:pPr algn="ctr"/>
-                <a:r>
-                  <a:rPr lang="en-US" sz="1600" dirty="0">
-                    <a:solidFill>
-                      <a:schemeClr val="tx1"/>
-                    </a:solidFill>
-                  </a:rPr>
-                  <a:t>Formerly Incarcerated PWID (F)</a:t>
-                </a:r>
-              </a:p>
-            </p:txBody>
-          </p:sp>
-          <p:sp>
-            <p:nvSpPr>
-              <p:cNvPr id="10" name="Rounded Rectangle 9">
-                <a:extLst>
-                  <a:ext uri="{FF2B5EF4-FFF2-40B4-BE49-F238E27FC236}">
-                    <a16:creationId xmlns:a16="http://schemas.microsoft.com/office/drawing/2014/main" id="{FCA5B2CD-C485-3480-BC8E-46542ED96A56}"/>
-                  </a:ext>
-                </a:extLst>
-              </p:cNvPr>
-              <p:cNvSpPr/>
-              <p:nvPr/>
-            </p:nvSpPr>
-            <p:spPr>
-              <a:xfrm>
-                <a:off x="6432357" y="1755758"/>
-                <a:ext cx="1430921" cy="932566"/>
-              </a:xfrm>
-              <a:prstGeom prst="roundRect">
-                <a:avLst/>
-              </a:prstGeom>
-              <a:noFill/>
-            </p:spPr>
-            <p:style>
-              <a:lnRef idx="2">
-                <a:schemeClr val="accent1">
-                  <a:shade val="15000"/>
-                </a:schemeClr>
-              </a:lnRef>
-              <a:fillRef idx="1">
-                <a:schemeClr val="accent1"/>
-              </a:fillRef>
-              <a:effectRef idx="0">
-                <a:schemeClr val="accent1"/>
-              </a:effectRef>
-              <a:fontRef idx="minor">
-                <a:schemeClr val="lt1"/>
-              </a:fontRef>
-            </p:style>
-            <p:txBody>
-              <a:bodyPr rtlCol="0" anchor="ctr"/>
-              <a:lstStyle/>
-              <a:p>
-                <a:pPr algn="ctr"/>
-                <a:r>
-                  <a:rPr lang="en-US" dirty="0">
-                    <a:solidFill>
-                      <a:schemeClr val="tx1"/>
-                    </a:solidFill>
-                  </a:rPr>
-                  <a:t>Ex-PWID (X)</a:t>
-                </a:r>
-              </a:p>
-            </p:txBody>
-          </p:sp>
-          <p:cxnSp>
-            <p:nvCxnSpPr>
-              <p:cNvPr id="12" name="Straight Arrow Connector 11">
-                <a:extLst>
-                  <a:ext uri="{FF2B5EF4-FFF2-40B4-BE49-F238E27FC236}">
-                    <a16:creationId xmlns:a16="http://schemas.microsoft.com/office/drawing/2014/main" id="{4A8A19BD-FD31-2903-FC14-E9F33F686746}"/>
-                  </a:ext>
-                </a:extLst>
-              </p:cNvPr>
-              <p:cNvCxnSpPr>
-                <a:cxnSpLocks/>
-                <a:stCxn id="5" idx="3"/>
-                <a:endCxn id="6" idx="1"/>
-              </p:cNvCxnSpPr>
-              <p:nvPr/>
-            </p:nvCxnSpPr>
-            <p:spPr>
-              <a:xfrm>
-                <a:off x="2902440" y="1362516"/>
-                <a:ext cx="1098987" cy="0"/>
-              </a:xfrm>
-              <a:prstGeom prst="straightConnector1">
-                <a:avLst/>
-              </a:prstGeom>
-              <a:ln>
-                <a:tailEnd type="triangle"/>
-              </a:ln>
-            </p:spPr>
-            <p:style>
-              <a:lnRef idx="2">
-                <a:schemeClr val="dk1"/>
-              </a:lnRef>
-              <a:fillRef idx="0">
-                <a:schemeClr val="dk1"/>
-              </a:fillRef>
-              <a:effectRef idx="1">
-                <a:schemeClr val="dk1"/>
-              </a:effectRef>
-              <a:fontRef idx="minor">
-                <a:schemeClr val="tx1"/>
-              </a:fontRef>
-            </p:style>
-          </p:cxnSp>
-          <p:cxnSp>
-            <p:nvCxnSpPr>
-              <p:cNvPr id="13" name="Straight Arrow Connector 12">
-                <a:extLst>
-                  <a:ext uri="{FF2B5EF4-FFF2-40B4-BE49-F238E27FC236}">
-                    <a16:creationId xmlns:a16="http://schemas.microsoft.com/office/drawing/2014/main" id="{079607AF-73EA-1DCF-9A03-259F107FFF77}"/>
-                  </a:ext>
-                </a:extLst>
-              </p:cNvPr>
-              <p:cNvCxnSpPr>
-                <a:cxnSpLocks/>
-                <a:stCxn id="6" idx="3"/>
-                <a:endCxn id="7" idx="1"/>
-              </p:cNvCxnSpPr>
-              <p:nvPr/>
-            </p:nvCxnSpPr>
-            <p:spPr>
-              <a:xfrm flipV="1">
-                <a:off x="5432348" y="685404"/>
-                <a:ext cx="1000009" cy="677112"/>
-              </a:xfrm>
-              <a:prstGeom prst="straightConnector1">
-                <a:avLst/>
-              </a:prstGeom>
-              <a:ln>
-                <a:tailEnd type="triangle"/>
-              </a:ln>
-            </p:spPr>
-            <p:style>
-              <a:lnRef idx="2">
-                <a:schemeClr val="dk1"/>
-              </a:lnRef>
-              <a:fillRef idx="0">
-                <a:schemeClr val="dk1"/>
-              </a:fillRef>
-              <a:effectRef idx="1">
-                <a:schemeClr val="dk1"/>
-              </a:effectRef>
-              <a:fontRef idx="minor">
-                <a:schemeClr val="tx1"/>
-              </a:fontRef>
-            </p:style>
-          </p:cxnSp>
-          <p:cxnSp>
-            <p:nvCxnSpPr>
-              <p:cNvPr id="35" name="Straight Arrow Connector 34">
-                <a:extLst>
-                  <a:ext uri="{FF2B5EF4-FFF2-40B4-BE49-F238E27FC236}">
-                    <a16:creationId xmlns:a16="http://schemas.microsoft.com/office/drawing/2014/main" id="{8C838BB7-DAE8-D83C-8D39-C00317912B10}"/>
-                  </a:ext>
-                </a:extLst>
-              </p:cNvPr>
-              <p:cNvCxnSpPr>
-                <a:cxnSpLocks/>
-              </p:cNvCxnSpPr>
-              <p:nvPr/>
-            </p:nvCxnSpPr>
-            <p:spPr>
-              <a:xfrm flipH="1">
-                <a:off x="5430985" y="501697"/>
-                <a:ext cx="996978" cy="633788"/>
-              </a:xfrm>
-              <a:prstGeom prst="straightConnector1">
-                <a:avLst/>
-              </a:prstGeom>
-              <a:ln>
-                <a:tailEnd type="triangle"/>
-              </a:ln>
-            </p:spPr>
-            <p:style>
-              <a:lnRef idx="2">
-                <a:schemeClr val="dk1"/>
-              </a:lnRef>
-              <a:fillRef idx="0">
-                <a:schemeClr val="dk1"/>
-              </a:fillRef>
-              <a:effectRef idx="1">
-                <a:schemeClr val="dk1"/>
-              </a:effectRef>
-              <a:fontRef idx="minor">
-                <a:schemeClr val="tx1"/>
-              </a:fontRef>
-            </p:style>
-          </p:cxnSp>
-          <p:cxnSp>
-            <p:nvCxnSpPr>
-              <p:cNvPr id="36" name="Straight Arrow Connector 35">
-                <a:extLst>
-                  <a:ext uri="{FF2B5EF4-FFF2-40B4-BE49-F238E27FC236}">
-                    <a16:creationId xmlns:a16="http://schemas.microsoft.com/office/drawing/2014/main" id="{F794D6F8-8451-89C2-B0EA-BAE3EF66BC1F}"/>
-                  </a:ext>
-                </a:extLst>
-              </p:cNvPr>
-              <p:cNvCxnSpPr>
-                <a:cxnSpLocks/>
-                <a:stCxn id="6" idx="3"/>
-                <a:endCxn id="10" idx="1"/>
-              </p:cNvCxnSpPr>
-              <p:nvPr/>
-            </p:nvCxnSpPr>
-            <p:spPr>
-              <a:xfrm>
-                <a:off x="5432348" y="1362516"/>
-                <a:ext cx="1000009" cy="859525"/>
-              </a:xfrm>
-              <a:prstGeom prst="straightConnector1">
-                <a:avLst/>
-              </a:prstGeom>
-              <a:ln>
-                <a:tailEnd type="triangle"/>
-              </a:ln>
-            </p:spPr>
-            <p:style>
-              <a:lnRef idx="2">
-                <a:schemeClr val="dk1"/>
-              </a:lnRef>
-              <a:fillRef idx="0">
-                <a:schemeClr val="dk1"/>
-              </a:fillRef>
-              <a:effectRef idx="1">
-                <a:schemeClr val="dk1"/>
-              </a:effectRef>
-              <a:fontRef idx="minor">
-                <a:schemeClr val="tx1"/>
-              </a:fontRef>
-            </p:style>
-          </p:cxnSp>
-        </p:grpSp>
-        <p:sp>
-          <p:nvSpPr>
-            <p:cNvPr id="51" name="TextBox 50">
-              <a:extLst>
-                <a:ext uri="{FF2B5EF4-FFF2-40B4-BE49-F238E27FC236}">
-                  <a16:creationId xmlns:a16="http://schemas.microsoft.com/office/drawing/2014/main" id="{1A7A4915-91AE-B290-8566-B5E8330B2316}"/>
-                </a:ext>
-              </a:extLst>
-            </p:cNvPr>
-            <p:cNvSpPr txBox="1"/>
+            <p:cNvSpPr/>
             <p:nvPr/>
           </p:nvSpPr>
           <p:spPr>
             <a:xfrm>
-              <a:off x="1930341" y="551441"/>
-              <a:ext cx="2938818" cy="400110"/>
+              <a:off x="242011" y="2437706"/>
+              <a:ext cx="2195226" cy="594998"/>
             </a:xfrm>
-            <a:prstGeom prst="rect">
+            <a:prstGeom prst="roundRect">
               <a:avLst/>
             </a:prstGeom>
             <a:noFill/>
           </p:spPr>
+          <p:style>
+            <a:lnRef idx="2">
+              <a:schemeClr val="accent1">
+                <a:shade val="15000"/>
+              </a:schemeClr>
+            </a:lnRef>
+            <a:fillRef idx="1">
+              <a:schemeClr val="accent1"/>
+            </a:fillRef>
+            <a:effectRef idx="0">
+              <a:schemeClr val="accent1"/>
+            </a:effectRef>
+            <a:fontRef idx="minor">
+              <a:schemeClr val="lt1"/>
+            </a:fontRef>
+          </p:style>
           <p:txBody>
-            <a:bodyPr wrap="none" rtlCol="0">
-              <a:spAutoFit/>
-            </a:bodyPr>
+            <a:bodyPr tIns="0" rtlCol="0" anchor="ctr"/>
             <a:lstStyle/>
             <a:p>
+              <a:pPr algn="ctr"/>
               <a:r>
-                <a:rPr lang="en-US" sz="2000" b="1" dirty="0"/>
-                <a:t>Incarceration dynamics</a:t>
-              </a:r>
-            </a:p>
-          </p:txBody>
-        </p:sp>
-        <p:grpSp>
-          <p:nvGrpSpPr>
-            <p:cNvPr id="3" name="Group 2">
-              <a:extLst>
-                <a:ext uri="{FF2B5EF4-FFF2-40B4-BE49-F238E27FC236}">
-                  <a16:creationId xmlns:a16="http://schemas.microsoft.com/office/drawing/2014/main" id="{2E99952C-232C-1372-ACF4-7AD2D0E52102}"/>
-                </a:ext>
-              </a:extLst>
-            </p:cNvPr>
-            <p:cNvGrpSpPr/>
-            <p:nvPr/>
-          </p:nvGrpSpPr>
-          <p:grpSpPr>
-            <a:xfrm>
-              <a:off x="7261640" y="1171936"/>
-              <a:ext cx="4023360" cy="2507194"/>
-              <a:chOff x="1153742" y="1174785"/>
-              <a:chExt cx="3680629" cy="2293619"/>
-            </a:xfrm>
-          </p:grpSpPr>
-          <p:sp>
-            <p:nvSpPr>
-              <p:cNvPr id="4" name="Rounded Rectangle 3">
-                <a:extLst>
-                  <a:ext uri="{FF2B5EF4-FFF2-40B4-BE49-F238E27FC236}">
-                    <a16:creationId xmlns:a16="http://schemas.microsoft.com/office/drawing/2014/main" id="{7E225726-A6F1-6D67-BCB6-C499E3EA06A9}"/>
-                  </a:ext>
-                </a:extLst>
-              </p:cNvPr>
-              <p:cNvSpPr/>
-              <p:nvPr/>
-            </p:nvSpPr>
-            <p:spPr>
-              <a:xfrm>
-                <a:off x="2157927" y="1174785"/>
-                <a:ext cx="1683974" cy="478651"/>
-              </a:xfrm>
-              <a:prstGeom prst="roundRect">
-                <a:avLst/>
-              </a:prstGeom>
-              <a:noFill/>
-            </p:spPr>
-            <p:style>
-              <a:lnRef idx="2">
-                <a:schemeClr val="accent1">
-                  <a:shade val="15000"/>
-                </a:schemeClr>
-              </a:lnRef>
-              <a:fillRef idx="1">
-                <a:schemeClr val="accent1"/>
-              </a:fillRef>
-              <a:effectRef idx="0">
-                <a:schemeClr val="accent1"/>
-              </a:effectRef>
-              <a:fontRef idx="minor">
-                <a:schemeClr val="lt1"/>
-              </a:fontRef>
-            </p:style>
-            <p:txBody>
-              <a:bodyPr rtlCol="0" anchor="ctr"/>
-              <a:lstStyle/>
-              <a:p>
-                <a:pPr algn="ctr"/>
-                <a:r>
-                  <a:rPr lang="en-US" sz="1600" dirty="0">
-                    <a:solidFill>
-                      <a:schemeClr val="tx1"/>
-                    </a:solidFill>
-                  </a:rPr>
-                  <a:t>Susceptible (u)</a:t>
-                </a:r>
-              </a:p>
-            </p:txBody>
-          </p:sp>
-          <p:cxnSp>
-            <p:nvCxnSpPr>
-              <p:cNvPr id="8" name="Straight Arrow Connector 7">
-                <a:extLst>
-                  <a:ext uri="{FF2B5EF4-FFF2-40B4-BE49-F238E27FC236}">
-                    <a16:creationId xmlns:a16="http://schemas.microsoft.com/office/drawing/2014/main" id="{AFE0E9AE-8B3B-4B64-9E86-979260D9A7C4}"/>
-                  </a:ext>
-                </a:extLst>
-              </p:cNvPr>
-              <p:cNvCxnSpPr>
-                <a:cxnSpLocks/>
-              </p:cNvCxnSpPr>
-              <p:nvPr/>
-            </p:nvCxnSpPr>
-            <p:spPr>
-              <a:xfrm>
-                <a:off x="2635613" y="1653436"/>
-                <a:ext cx="0" cy="414346"/>
-              </a:xfrm>
-              <a:prstGeom prst="straightConnector1">
-                <a:avLst/>
-              </a:prstGeom>
-              <a:ln>
-                <a:tailEnd type="triangle"/>
-              </a:ln>
-            </p:spPr>
-            <p:style>
-              <a:lnRef idx="2">
-                <a:schemeClr val="dk1"/>
-              </a:lnRef>
-              <a:fillRef idx="0">
-                <a:schemeClr val="dk1"/>
-              </a:fillRef>
-              <a:effectRef idx="1">
-                <a:schemeClr val="dk1"/>
-              </a:effectRef>
-              <a:fontRef idx="minor">
-                <a:schemeClr val="tx1"/>
-              </a:fontRef>
-            </p:style>
-          </p:cxnSp>
-          <p:sp>
-            <p:nvSpPr>
-              <p:cNvPr id="9" name="Rounded Rectangle 8">
-                <a:extLst>
-                  <a:ext uri="{FF2B5EF4-FFF2-40B4-BE49-F238E27FC236}">
-                    <a16:creationId xmlns:a16="http://schemas.microsoft.com/office/drawing/2014/main" id="{671973AD-3B69-E60E-92E7-411987B1CFD8}"/>
-                  </a:ext>
-                </a:extLst>
-              </p:cNvPr>
-              <p:cNvSpPr/>
-              <p:nvPr/>
-            </p:nvSpPr>
-            <p:spPr>
-              <a:xfrm>
-                <a:off x="2157926" y="2989753"/>
-                <a:ext cx="1683974" cy="478651"/>
-              </a:xfrm>
-              <a:prstGeom prst="roundRect">
-                <a:avLst/>
-              </a:prstGeom>
-              <a:noFill/>
-            </p:spPr>
-            <p:style>
-              <a:lnRef idx="2">
-                <a:schemeClr val="accent1">
-                  <a:shade val="15000"/>
-                </a:schemeClr>
-              </a:lnRef>
-              <a:fillRef idx="1">
-                <a:schemeClr val="accent1"/>
-              </a:fillRef>
-              <a:effectRef idx="0">
-                <a:schemeClr val="accent1"/>
-              </a:effectRef>
-              <a:fontRef idx="minor">
-                <a:schemeClr val="lt1"/>
-              </a:fontRef>
-            </p:style>
-            <p:txBody>
-              <a:bodyPr rtlCol="0" anchor="ctr"/>
-              <a:lstStyle/>
-              <a:p>
-                <a:pPr algn="ctr"/>
-                <a:r>
-                  <a:rPr lang="en-US" sz="1600" dirty="0">
-                    <a:solidFill>
-                      <a:schemeClr val="tx1"/>
-                    </a:solidFill>
-                  </a:rPr>
-                  <a:t>Chronic infection (c)</a:t>
-                </a:r>
-              </a:p>
-            </p:txBody>
-          </p:sp>
-          <p:sp>
-            <p:nvSpPr>
-              <p:cNvPr id="11" name="Rounded Rectangle 10">
-                <a:extLst>
-                  <a:ext uri="{FF2B5EF4-FFF2-40B4-BE49-F238E27FC236}">
-                    <a16:creationId xmlns:a16="http://schemas.microsoft.com/office/drawing/2014/main" id="{B29284CE-0C23-7E3C-4C55-21EA2100AB28}"/>
-                  </a:ext>
-                </a:extLst>
-              </p:cNvPr>
-              <p:cNvSpPr/>
-              <p:nvPr/>
-            </p:nvSpPr>
-            <p:spPr>
-              <a:xfrm>
-                <a:off x="1153742" y="2078074"/>
-                <a:ext cx="1683974" cy="478651"/>
-              </a:xfrm>
-              <a:prstGeom prst="roundRect">
-                <a:avLst/>
-              </a:prstGeom>
-              <a:noFill/>
-            </p:spPr>
-            <p:style>
-              <a:lnRef idx="2">
-                <a:schemeClr val="accent1">
-                  <a:shade val="15000"/>
-                </a:schemeClr>
-              </a:lnRef>
-              <a:fillRef idx="1">
-                <a:schemeClr val="accent1"/>
-              </a:fillRef>
-              <a:effectRef idx="0">
-                <a:schemeClr val="accent1"/>
-              </a:effectRef>
-              <a:fontRef idx="minor">
-                <a:schemeClr val="lt1"/>
-              </a:fontRef>
-            </p:style>
-            <p:txBody>
-              <a:bodyPr rtlCol="0" anchor="ctr"/>
-              <a:lstStyle/>
-              <a:p>
-                <a:pPr algn="ctr"/>
-                <a:r>
-                  <a:rPr lang="en-US" sz="1600" dirty="0">
-                    <a:solidFill>
-                      <a:schemeClr val="tx1"/>
-                    </a:solidFill>
-                  </a:rPr>
-                  <a:t>Acute infection (a)</a:t>
-                </a:r>
-              </a:p>
-            </p:txBody>
-          </p:sp>
-          <p:sp>
-            <p:nvSpPr>
-              <p:cNvPr id="14" name="Rounded Rectangle 13">
-                <a:extLst>
-                  <a:ext uri="{FF2B5EF4-FFF2-40B4-BE49-F238E27FC236}">
-                    <a16:creationId xmlns:a16="http://schemas.microsoft.com/office/drawing/2014/main" id="{C6DBEC1D-AC46-9640-0B7E-5A00B469A63A}"/>
-                  </a:ext>
-                </a:extLst>
-              </p:cNvPr>
-              <p:cNvSpPr/>
-              <p:nvPr/>
-            </p:nvSpPr>
-            <p:spPr>
-              <a:xfrm>
-                <a:off x="3150397" y="2078074"/>
-                <a:ext cx="1683974" cy="478651"/>
-              </a:xfrm>
-              <a:prstGeom prst="roundRect">
-                <a:avLst/>
-              </a:prstGeom>
-              <a:noFill/>
-            </p:spPr>
-            <p:style>
-              <a:lnRef idx="2">
-                <a:schemeClr val="accent1">
-                  <a:shade val="15000"/>
-                </a:schemeClr>
-              </a:lnRef>
-              <a:fillRef idx="1">
-                <a:schemeClr val="accent1"/>
-              </a:fillRef>
-              <a:effectRef idx="0">
-                <a:schemeClr val="accent1"/>
-              </a:effectRef>
-              <a:fontRef idx="minor">
-                <a:schemeClr val="lt1"/>
-              </a:fontRef>
-            </p:style>
-            <p:txBody>
-              <a:bodyPr rtlCol="0" anchor="ctr"/>
-              <a:lstStyle/>
-              <a:p>
-                <a:pPr algn="ctr"/>
-                <a:r>
-                  <a:rPr lang="en-US" sz="1600" dirty="0">
-                    <a:solidFill>
-                      <a:schemeClr val="tx1"/>
-                    </a:solidFill>
-                  </a:rPr>
-                  <a:t>Treatment (t)</a:t>
-                </a:r>
-              </a:p>
-            </p:txBody>
-          </p:sp>
-          <p:cxnSp>
-            <p:nvCxnSpPr>
-              <p:cNvPr id="15" name="Straight Arrow Connector 14">
-                <a:extLst>
-                  <a:ext uri="{FF2B5EF4-FFF2-40B4-BE49-F238E27FC236}">
-                    <a16:creationId xmlns:a16="http://schemas.microsoft.com/office/drawing/2014/main" id="{04E83AFE-8E72-B66F-FF9E-75B77009C1F7}"/>
-                  </a:ext>
-                </a:extLst>
-              </p:cNvPr>
-              <p:cNvCxnSpPr>
-                <a:cxnSpLocks/>
-              </p:cNvCxnSpPr>
-              <p:nvPr/>
-            </p:nvCxnSpPr>
-            <p:spPr>
-              <a:xfrm>
-                <a:off x="2635613" y="2556726"/>
-                <a:ext cx="0" cy="414346"/>
-              </a:xfrm>
-              <a:prstGeom prst="straightConnector1">
-                <a:avLst/>
-              </a:prstGeom>
-              <a:ln>
-                <a:tailEnd type="triangle"/>
-              </a:ln>
-            </p:spPr>
-            <p:style>
-              <a:lnRef idx="2">
-                <a:schemeClr val="dk1"/>
-              </a:lnRef>
-              <a:fillRef idx="0">
-                <a:schemeClr val="dk1"/>
-              </a:fillRef>
-              <a:effectRef idx="1">
-                <a:schemeClr val="dk1"/>
-              </a:effectRef>
-              <a:fontRef idx="minor">
-                <a:schemeClr val="tx1"/>
-              </a:fontRef>
-            </p:style>
-          </p:cxnSp>
-          <p:cxnSp>
-            <p:nvCxnSpPr>
-              <p:cNvPr id="16" name="Straight Arrow Connector 15">
-                <a:extLst>
-                  <a:ext uri="{FF2B5EF4-FFF2-40B4-BE49-F238E27FC236}">
-                    <a16:creationId xmlns:a16="http://schemas.microsoft.com/office/drawing/2014/main" id="{44DC0C02-EC2B-7159-5548-73B4ED77A98C}"/>
-                  </a:ext>
-                </a:extLst>
-              </p:cNvPr>
-              <p:cNvCxnSpPr/>
-              <p:nvPr/>
-            </p:nvCxnSpPr>
-            <p:spPr>
-              <a:xfrm flipV="1">
-                <a:off x="3339444" y="2550954"/>
-                <a:ext cx="0" cy="419622"/>
-              </a:xfrm>
-              <a:prstGeom prst="straightConnector1">
-                <a:avLst/>
-              </a:prstGeom>
-              <a:ln>
-                <a:tailEnd type="triangle"/>
-              </a:ln>
-            </p:spPr>
-            <p:style>
-              <a:lnRef idx="2">
-                <a:schemeClr val="dk1"/>
-              </a:lnRef>
-              <a:fillRef idx="0">
-                <a:schemeClr val="dk1"/>
-              </a:fillRef>
-              <a:effectRef idx="1">
-                <a:schemeClr val="dk1"/>
-              </a:effectRef>
-              <a:fontRef idx="minor">
-                <a:schemeClr val="tx1"/>
-              </a:fontRef>
-            </p:style>
-          </p:cxnSp>
-          <p:cxnSp>
-            <p:nvCxnSpPr>
-              <p:cNvPr id="17" name="Straight Arrow Connector 16">
-                <a:extLst>
-                  <a:ext uri="{FF2B5EF4-FFF2-40B4-BE49-F238E27FC236}">
-                    <a16:creationId xmlns:a16="http://schemas.microsoft.com/office/drawing/2014/main" id="{1F47FB46-22DA-3D6F-2D57-A85F37862FF1}"/>
-                  </a:ext>
-                </a:extLst>
-              </p:cNvPr>
-              <p:cNvCxnSpPr/>
-              <p:nvPr/>
-            </p:nvCxnSpPr>
-            <p:spPr>
-              <a:xfrm flipV="1">
-                <a:off x="3331617" y="1648160"/>
-                <a:ext cx="0" cy="419622"/>
-              </a:xfrm>
-              <a:prstGeom prst="straightConnector1">
-                <a:avLst/>
-              </a:prstGeom>
-              <a:ln>
-                <a:tailEnd type="triangle"/>
-              </a:ln>
-            </p:spPr>
-            <p:style>
-              <a:lnRef idx="2">
-                <a:schemeClr val="dk1"/>
-              </a:lnRef>
-              <a:fillRef idx="0">
-                <a:schemeClr val="dk1"/>
-              </a:fillRef>
-              <a:effectRef idx="1">
-                <a:schemeClr val="dk1"/>
-              </a:effectRef>
-              <a:fontRef idx="minor">
-                <a:schemeClr val="tx1"/>
-              </a:fontRef>
-            </p:style>
-          </p:cxnSp>
-          <p:cxnSp>
-            <p:nvCxnSpPr>
-              <p:cNvPr id="18" name="Straight Arrow Connector 17">
-                <a:extLst>
-                  <a:ext uri="{FF2B5EF4-FFF2-40B4-BE49-F238E27FC236}">
-                    <a16:creationId xmlns:a16="http://schemas.microsoft.com/office/drawing/2014/main" id="{32344DBA-33FA-E549-E100-990F4099E6A5}"/>
-                  </a:ext>
-                </a:extLst>
-              </p:cNvPr>
-              <p:cNvCxnSpPr/>
-              <p:nvPr/>
-            </p:nvCxnSpPr>
-            <p:spPr>
-              <a:xfrm flipV="1">
-                <a:off x="2487389" y="1648160"/>
-                <a:ext cx="0" cy="419622"/>
-              </a:xfrm>
-              <a:prstGeom prst="straightConnector1">
-                <a:avLst/>
-              </a:prstGeom>
-              <a:ln>
-                <a:tailEnd type="triangle"/>
-              </a:ln>
-            </p:spPr>
-            <p:style>
-              <a:lnRef idx="2">
-                <a:schemeClr val="dk1"/>
-              </a:lnRef>
-              <a:fillRef idx="0">
-                <a:schemeClr val="dk1"/>
-              </a:fillRef>
-              <a:effectRef idx="1">
-                <a:schemeClr val="dk1"/>
-              </a:effectRef>
-              <a:fontRef idx="minor">
-                <a:schemeClr val="tx1"/>
-              </a:fontRef>
-            </p:style>
-          </p:cxnSp>
-          <p:cxnSp>
-            <p:nvCxnSpPr>
-              <p:cNvPr id="19" name="Straight Arrow Connector 18">
-                <a:extLst>
-                  <a:ext uri="{FF2B5EF4-FFF2-40B4-BE49-F238E27FC236}">
-                    <a16:creationId xmlns:a16="http://schemas.microsoft.com/office/drawing/2014/main" id="{47F558B8-744D-69D0-172D-B7C44CA1AFDA}"/>
-                  </a:ext>
-                </a:extLst>
-              </p:cNvPr>
-              <p:cNvCxnSpPr/>
-              <p:nvPr/>
-            </p:nvCxnSpPr>
-            <p:spPr>
-              <a:xfrm flipV="1">
-                <a:off x="2485302" y="2550955"/>
-                <a:ext cx="0" cy="419622"/>
-              </a:xfrm>
-              <a:prstGeom prst="straightConnector1">
-                <a:avLst/>
-              </a:prstGeom>
-              <a:ln>
-                <a:tailEnd type="triangle"/>
-              </a:ln>
-            </p:spPr>
-            <p:style>
-              <a:lnRef idx="2">
-                <a:schemeClr val="dk1"/>
-              </a:lnRef>
-              <a:fillRef idx="0">
-                <a:schemeClr val="dk1"/>
-              </a:fillRef>
-              <a:effectRef idx="1">
-                <a:schemeClr val="dk1"/>
-              </a:effectRef>
-              <a:fontRef idx="minor">
-                <a:schemeClr val="tx1"/>
-              </a:fontRef>
-            </p:style>
-          </p:cxnSp>
-          <p:cxnSp>
-            <p:nvCxnSpPr>
-              <p:cNvPr id="20" name="Straight Arrow Connector 19">
-                <a:extLst>
-                  <a:ext uri="{FF2B5EF4-FFF2-40B4-BE49-F238E27FC236}">
-                    <a16:creationId xmlns:a16="http://schemas.microsoft.com/office/drawing/2014/main" id="{484BD589-BA71-27C4-F62C-799E9B138EFC}"/>
-                  </a:ext>
-                </a:extLst>
-              </p:cNvPr>
-              <p:cNvCxnSpPr>
-                <a:cxnSpLocks/>
-              </p:cNvCxnSpPr>
-              <p:nvPr/>
-            </p:nvCxnSpPr>
-            <p:spPr>
-              <a:xfrm>
-                <a:off x="3490279" y="1659643"/>
-                <a:ext cx="0" cy="414346"/>
-              </a:xfrm>
-              <a:prstGeom prst="straightConnector1">
-                <a:avLst/>
-              </a:prstGeom>
-              <a:ln>
-                <a:tailEnd type="triangle"/>
-              </a:ln>
-            </p:spPr>
-            <p:style>
-              <a:lnRef idx="2">
-                <a:schemeClr val="dk1"/>
-              </a:lnRef>
-              <a:fillRef idx="0">
-                <a:schemeClr val="dk1"/>
-              </a:fillRef>
-              <a:effectRef idx="1">
-                <a:schemeClr val="dk1"/>
-              </a:effectRef>
-              <a:fontRef idx="minor">
-                <a:schemeClr val="tx1"/>
-              </a:fontRef>
-            </p:style>
-          </p:cxnSp>
-          <p:cxnSp>
-            <p:nvCxnSpPr>
-              <p:cNvPr id="21" name="Straight Arrow Connector 20">
-                <a:extLst>
-                  <a:ext uri="{FF2B5EF4-FFF2-40B4-BE49-F238E27FC236}">
-                    <a16:creationId xmlns:a16="http://schemas.microsoft.com/office/drawing/2014/main" id="{AA952A83-627E-B522-41E0-D71BE494F49E}"/>
-                  </a:ext>
-                </a:extLst>
-              </p:cNvPr>
-              <p:cNvCxnSpPr>
-                <a:cxnSpLocks/>
-              </p:cNvCxnSpPr>
-              <p:nvPr/>
-            </p:nvCxnSpPr>
-            <p:spPr>
-              <a:xfrm>
-                <a:off x="3498107" y="2556231"/>
-                <a:ext cx="0" cy="414346"/>
-              </a:xfrm>
-              <a:prstGeom prst="straightConnector1">
-                <a:avLst/>
-              </a:prstGeom>
-              <a:ln>
-                <a:tailEnd type="triangle"/>
-              </a:ln>
-            </p:spPr>
-            <p:style>
-              <a:lnRef idx="2">
-                <a:schemeClr val="dk1"/>
-              </a:lnRef>
-              <a:fillRef idx="0">
-                <a:schemeClr val="dk1"/>
-              </a:fillRef>
-              <a:effectRef idx="1">
-                <a:schemeClr val="dk1"/>
-              </a:effectRef>
-              <a:fontRef idx="minor">
-                <a:schemeClr val="tx1"/>
-              </a:fontRef>
-            </p:style>
-          </p:cxnSp>
-        </p:grpSp>
-        <p:sp>
-          <p:nvSpPr>
-            <p:cNvPr id="22" name="TextBox 21">
-              <a:extLst>
-                <a:ext uri="{FF2B5EF4-FFF2-40B4-BE49-F238E27FC236}">
-                  <a16:creationId xmlns:a16="http://schemas.microsoft.com/office/drawing/2014/main" id="{85A9343D-C0C3-CEA6-25FC-FE5C6314916E}"/>
-                </a:ext>
-              </a:extLst>
-            </p:cNvPr>
-            <p:cNvSpPr txBox="1"/>
-            <p:nvPr/>
-          </p:nvSpPr>
-          <p:spPr>
-            <a:xfrm>
-              <a:off x="6818879" y="555026"/>
-              <a:ext cx="4567084" cy="400110"/>
-            </a:xfrm>
-            <a:prstGeom prst="rect">
-              <a:avLst/>
-            </a:prstGeom>
-            <a:noFill/>
-          </p:spPr>
-          <p:txBody>
-            <a:bodyPr wrap="none" rtlCol="0">
-              <a:spAutoFit/>
-            </a:bodyPr>
-            <a:lstStyle/>
-            <a:p>
-              <a:r>
-                <a:rPr lang="en-US" sz="2000" b="1" dirty="0"/>
-                <a:t>HCV transmission dynamics for PWID</a:t>
+                <a:rPr lang="en-US" dirty="0">
+                  <a:solidFill>
+                    <a:schemeClr val="tx1"/>
+                  </a:solidFill>
+                </a:rPr>
+                <a:t>Non-Cirrhosis (NC)</a:t>
               </a:r>
             </a:p>
           </p:txBody>
         </p:sp>
         <p:sp>
           <p:nvSpPr>
-            <p:cNvPr id="23" name="TextBox 22">
+            <p:cNvPr id="26" name="Rounded Rectangle 25">
               <a:extLst>
                 <a:ext uri="{FF2B5EF4-FFF2-40B4-BE49-F238E27FC236}">
-                  <a16:creationId xmlns:a16="http://schemas.microsoft.com/office/drawing/2014/main" id="{45EA3E0A-575A-3D2A-F08A-D85697F47EBF}"/>
+                  <a16:creationId xmlns:a16="http://schemas.microsoft.com/office/drawing/2014/main" id="{5831B9D4-5FE6-83C2-40C5-02502F512605}"/>
                 </a:ext>
               </a:extLst>
             </p:cNvPr>
-            <p:cNvSpPr txBox="1"/>
+            <p:cNvSpPr/>
             <p:nvPr/>
           </p:nvSpPr>
           <p:spPr>
             <a:xfrm>
-              <a:off x="4520216" y="4357401"/>
-              <a:ext cx="3151568" cy="400110"/>
+              <a:off x="3247973" y="2437706"/>
+              <a:ext cx="2195226" cy="594998"/>
             </a:xfrm>
-            <a:prstGeom prst="rect">
+            <a:prstGeom prst="roundRect">
               <a:avLst/>
             </a:prstGeom>
             <a:noFill/>
           </p:spPr>
+          <p:style>
+            <a:lnRef idx="2">
+              <a:schemeClr val="accent1">
+                <a:shade val="15000"/>
+              </a:schemeClr>
+            </a:lnRef>
+            <a:fillRef idx="1">
+              <a:schemeClr val="accent1"/>
+            </a:fillRef>
+            <a:effectRef idx="0">
+              <a:schemeClr val="accent1"/>
+            </a:effectRef>
+            <a:fontRef idx="minor">
+              <a:schemeClr val="lt1"/>
+            </a:fontRef>
+          </p:style>
           <p:txBody>
-            <a:bodyPr wrap="none" rtlCol="0">
-              <a:spAutoFit/>
-            </a:bodyPr>
+            <a:bodyPr tIns="0" rtlCol="0" anchor="ctr"/>
             <a:lstStyle/>
             <a:p>
+              <a:pPr algn="ctr"/>
               <a:r>
-                <a:rPr lang="en-US" sz="2000" b="1" dirty="0"/>
-                <a:t>Liver disease progression</a:t>
+                <a:rPr lang="en-US" dirty="0">
+                  <a:solidFill>
+                    <a:schemeClr val="tx1"/>
+                  </a:solidFill>
+                </a:rPr>
+                <a:t>Compensated Cirrhosis (CC)</a:t>
               </a:r>
             </a:p>
           </p:txBody>
         </p:sp>
-        <p:grpSp>
-          <p:nvGrpSpPr>
-            <p:cNvPr id="24" name="Group 23">
+        <p:sp>
+          <p:nvSpPr>
+            <p:cNvPr id="27" name="Rounded Rectangle 26">
               <a:extLst>
                 <a:ext uri="{FF2B5EF4-FFF2-40B4-BE49-F238E27FC236}">
-                  <a16:creationId xmlns:a16="http://schemas.microsoft.com/office/drawing/2014/main" id="{843503F6-D4F8-E837-9DE0-4A53E598C1DA}"/>
+                  <a16:creationId xmlns:a16="http://schemas.microsoft.com/office/drawing/2014/main" id="{1077FA6D-8C49-4348-A870-91516F3B8983}"/>
                 </a:ext>
               </a:extLst>
             </p:cNvPr>
-            <p:cNvGrpSpPr/>
+            <p:cNvSpPr/>
             <p:nvPr/>
-          </p:nvGrpSpPr>
-          <p:grpSpPr>
+          </p:nvSpPr>
+          <p:spPr>
             <a:xfrm>
-              <a:off x="323101" y="5172746"/>
-              <a:ext cx="11213111" cy="601347"/>
-              <a:chOff x="242011" y="2431357"/>
-              <a:chExt cx="11213111" cy="601347"/>
+              <a:off x="6253935" y="2437706"/>
+              <a:ext cx="2195226" cy="594998"/>
             </a:xfrm>
-          </p:grpSpPr>
-          <p:sp>
-            <p:nvSpPr>
-              <p:cNvPr id="25" name="Rounded Rectangle 24">
-                <a:extLst>
-                  <a:ext uri="{FF2B5EF4-FFF2-40B4-BE49-F238E27FC236}">
-                    <a16:creationId xmlns:a16="http://schemas.microsoft.com/office/drawing/2014/main" id="{05B3D97F-CA06-D52E-2F06-CB2AF7E48FF9}"/>
-                  </a:ext>
-                </a:extLst>
-              </p:cNvPr>
-              <p:cNvSpPr/>
-              <p:nvPr/>
-            </p:nvSpPr>
-            <p:spPr>
-              <a:xfrm>
-                <a:off x="242011" y="2437706"/>
-                <a:ext cx="2195226" cy="594998"/>
-              </a:xfrm>
-              <a:prstGeom prst="roundRect">
-                <a:avLst/>
-              </a:prstGeom>
-              <a:noFill/>
-            </p:spPr>
-            <p:style>
-              <a:lnRef idx="2">
-                <a:schemeClr val="accent1">
-                  <a:shade val="15000"/>
-                </a:schemeClr>
-              </a:lnRef>
-              <a:fillRef idx="1">
-                <a:schemeClr val="accent1"/>
-              </a:fillRef>
-              <a:effectRef idx="0">
-                <a:schemeClr val="accent1"/>
-              </a:effectRef>
-              <a:fontRef idx="minor">
-                <a:schemeClr val="lt1"/>
-              </a:fontRef>
-            </p:style>
-            <p:txBody>
-              <a:bodyPr tIns="0" rtlCol="0" anchor="ctr"/>
-              <a:lstStyle/>
-              <a:p>
-                <a:pPr algn="ctr"/>
-                <a:r>
-                  <a:rPr lang="en-US" dirty="0">
-                    <a:solidFill>
-                      <a:schemeClr val="tx1"/>
-                    </a:solidFill>
-                  </a:rPr>
-                  <a:t>Non-Cirrhosis (NC)</a:t>
-                </a:r>
-              </a:p>
-            </p:txBody>
-          </p:sp>
-          <p:sp>
-            <p:nvSpPr>
-              <p:cNvPr id="26" name="Rounded Rectangle 25">
-                <a:extLst>
-                  <a:ext uri="{FF2B5EF4-FFF2-40B4-BE49-F238E27FC236}">
-                    <a16:creationId xmlns:a16="http://schemas.microsoft.com/office/drawing/2014/main" id="{5831B9D4-5FE6-83C2-40C5-02502F512605}"/>
-                  </a:ext>
-                </a:extLst>
-              </p:cNvPr>
-              <p:cNvSpPr/>
-              <p:nvPr/>
-            </p:nvSpPr>
-            <p:spPr>
-              <a:xfrm>
-                <a:off x="3247973" y="2437706"/>
-                <a:ext cx="2195226" cy="594998"/>
-              </a:xfrm>
-              <a:prstGeom prst="roundRect">
-                <a:avLst/>
-              </a:prstGeom>
-              <a:noFill/>
-            </p:spPr>
-            <p:style>
-              <a:lnRef idx="2">
-                <a:schemeClr val="accent1">
-                  <a:shade val="15000"/>
-                </a:schemeClr>
-              </a:lnRef>
-              <a:fillRef idx="1">
-                <a:schemeClr val="accent1"/>
-              </a:fillRef>
-              <a:effectRef idx="0">
-                <a:schemeClr val="accent1"/>
-              </a:effectRef>
-              <a:fontRef idx="minor">
-                <a:schemeClr val="lt1"/>
-              </a:fontRef>
-            </p:style>
-            <p:txBody>
-              <a:bodyPr tIns="0" rtlCol="0" anchor="ctr"/>
-              <a:lstStyle/>
-              <a:p>
-                <a:pPr algn="ctr"/>
-                <a:r>
-                  <a:rPr lang="en-US" dirty="0">
-                    <a:solidFill>
-                      <a:schemeClr val="tx1"/>
-                    </a:solidFill>
-                  </a:rPr>
-                  <a:t>Compensated Cirrhosis (CC)</a:t>
-                </a:r>
-              </a:p>
-            </p:txBody>
-          </p:sp>
-          <p:sp>
-            <p:nvSpPr>
-              <p:cNvPr id="27" name="Rounded Rectangle 26">
-                <a:extLst>
-                  <a:ext uri="{FF2B5EF4-FFF2-40B4-BE49-F238E27FC236}">
-                    <a16:creationId xmlns:a16="http://schemas.microsoft.com/office/drawing/2014/main" id="{1077FA6D-8C49-4348-A870-91516F3B8983}"/>
-                  </a:ext>
-                </a:extLst>
-              </p:cNvPr>
-              <p:cNvSpPr/>
-              <p:nvPr/>
-            </p:nvSpPr>
-            <p:spPr>
-              <a:xfrm>
-                <a:off x="6253935" y="2437706"/>
-                <a:ext cx="2195226" cy="594998"/>
-              </a:xfrm>
-              <a:prstGeom prst="roundRect">
-                <a:avLst/>
-              </a:prstGeom>
-              <a:noFill/>
-            </p:spPr>
-            <p:style>
-              <a:lnRef idx="2">
-                <a:schemeClr val="accent1">
-                  <a:shade val="15000"/>
-                </a:schemeClr>
-              </a:lnRef>
-              <a:fillRef idx="1">
-                <a:schemeClr val="accent1"/>
-              </a:fillRef>
-              <a:effectRef idx="0">
-                <a:schemeClr val="accent1"/>
-              </a:effectRef>
-              <a:fontRef idx="minor">
-                <a:schemeClr val="lt1"/>
-              </a:fontRef>
-            </p:style>
-            <p:txBody>
-              <a:bodyPr tIns="0" rtlCol="0" anchor="ctr"/>
-              <a:lstStyle/>
-              <a:p>
-                <a:pPr algn="ctr"/>
-                <a:r>
-                  <a:rPr lang="en-US" dirty="0">
-                    <a:solidFill>
-                      <a:schemeClr val="tx1"/>
-                    </a:solidFill>
-                  </a:rPr>
-                  <a:t>Decompensated Cirrhosis (DC)</a:t>
-                </a:r>
-              </a:p>
-            </p:txBody>
-          </p:sp>
-          <p:sp>
-            <p:nvSpPr>
-              <p:cNvPr id="28" name="Rounded Rectangle 27">
-                <a:extLst>
-                  <a:ext uri="{FF2B5EF4-FFF2-40B4-BE49-F238E27FC236}">
-                    <a16:creationId xmlns:a16="http://schemas.microsoft.com/office/drawing/2014/main" id="{CE5D6A7B-C6B2-406E-BA62-FE4216F8AED6}"/>
-                  </a:ext>
-                </a:extLst>
-              </p:cNvPr>
-              <p:cNvSpPr/>
-              <p:nvPr/>
-            </p:nvSpPr>
-            <p:spPr>
-              <a:xfrm>
-                <a:off x="9259896" y="2437706"/>
-                <a:ext cx="2195226" cy="594998"/>
-              </a:xfrm>
-              <a:prstGeom prst="roundRect">
-                <a:avLst/>
-              </a:prstGeom>
-              <a:noFill/>
-            </p:spPr>
-            <p:style>
-              <a:lnRef idx="2">
-                <a:schemeClr val="accent1">
-                  <a:shade val="15000"/>
-                </a:schemeClr>
-              </a:lnRef>
-              <a:fillRef idx="1">
-                <a:schemeClr val="accent1"/>
-              </a:fillRef>
-              <a:effectRef idx="0">
-                <a:schemeClr val="accent1"/>
-              </a:effectRef>
-              <a:fontRef idx="minor">
-                <a:schemeClr val="lt1"/>
-              </a:fontRef>
-            </p:style>
-            <p:txBody>
-              <a:bodyPr tIns="0" rtlCol="0" anchor="ctr"/>
-              <a:lstStyle/>
-              <a:p>
-                <a:pPr algn="ctr"/>
-                <a:r>
-                  <a:rPr lang="en-US" dirty="0">
-                    <a:solidFill>
-                      <a:schemeClr val="tx1"/>
-                    </a:solidFill>
-                  </a:rPr>
-                  <a:t>Hepatocellular Carcinoma (HCC)</a:t>
-                </a:r>
-              </a:p>
-            </p:txBody>
-          </p:sp>
-          <p:cxnSp>
-            <p:nvCxnSpPr>
-              <p:cNvPr id="29" name="Elbow Connector 28">
-                <a:extLst>
-                  <a:ext uri="{FF2B5EF4-FFF2-40B4-BE49-F238E27FC236}">
-                    <a16:creationId xmlns:a16="http://schemas.microsoft.com/office/drawing/2014/main" id="{2CA958DD-313B-96E5-43C3-7A5A8C6BC80E}"/>
-                  </a:ext>
-                </a:extLst>
-              </p:cNvPr>
-              <p:cNvCxnSpPr>
-                <a:cxnSpLocks/>
-                <a:stCxn id="26" idx="0"/>
-                <a:endCxn id="28" idx="0"/>
-              </p:cNvCxnSpPr>
-              <p:nvPr/>
-            </p:nvCxnSpPr>
-            <p:spPr>
-              <a:xfrm rot="5400000" flipH="1" flipV="1">
-                <a:off x="7351547" y="-568255"/>
-                <a:ext cx="12700" cy="6011923"/>
-              </a:xfrm>
-              <a:prstGeom prst="bentConnector3">
-                <a:avLst>
-                  <a:gd name="adj1" fmla="val 1800000"/>
-                </a:avLst>
-              </a:prstGeom>
-              <a:ln>
-                <a:prstDash val="sysDash"/>
-                <a:tailEnd type="triangle"/>
-              </a:ln>
-            </p:spPr>
-            <p:style>
-              <a:lnRef idx="2">
-                <a:schemeClr val="dk1"/>
-              </a:lnRef>
-              <a:fillRef idx="0">
-                <a:schemeClr val="dk1"/>
-              </a:fillRef>
-              <a:effectRef idx="1">
-                <a:schemeClr val="dk1"/>
-              </a:effectRef>
-              <a:fontRef idx="minor">
-                <a:schemeClr val="tx1"/>
-              </a:fontRef>
-            </p:style>
-          </p:cxnSp>
-          <p:cxnSp>
-            <p:nvCxnSpPr>
-              <p:cNvPr id="31" name="Straight Arrow Connector 30">
-                <a:extLst>
-                  <a:ext uri="{FF2B5EF4-FFF2-40B4-BE49-F238E27FC236}">
-                    <a16:creationId xmlns:a16="http://schemas.microsoft.com/office/drawing/2014/main" id="{786248E0-35F9-4438-CE3F-4D578DED2FD1}"/>
-                  </a:ext>
-                </a:extLst>
-              </p:cNvPr>
-              <p:cNvCxnSpPr>
-                <a:stCxn id="25" idx="3"/>
-                <a:endCxn id="26" idx="1"/>
-              </p:cNvCxnSpPr>
-              <p:nvPr/>
-            </p:nvCxnSpPr>
-            <p:spPr>
-              <a:xfrm>
-                <a:off x="2437237" y="2735205"/>
-                <a:ext cx="810736" cy="0"/>
-              </a:xfrm>
-              <a:prstGeom prst="straightConnector1">
-                <a:avLst/>
-              </a:prstGeom>
-              <a:ln>
-                <a:solidFill>
-                  <a:schemeClr val="tx1"/>
-                </a:solidFill>
-                <a:tailEnd type="triangle"/>
-              </a:ln>
-            </p:spPr>
-            <p:style>
-              <a:lnRef idx="2">
-                <a:schemeClr val="accent1"/>
-              </a:lnRef>
-              <a:fillRef idx="0">
-                <a:schemeClr val="accent1"/>
-              </a:fillRef>
-              <a:effectRef idx="1">
-                <a:schemeClr val="accent1"/>
-              </a:effectRef>
-              <a:fontRef idx="minor">
-                <a:schemeClr val="tx1"/>
-              </a:fontRef>
-            </p:style>
-          </p:cxnSp>
-          <p:cxnSp>
-            <p:nvCxnSpPr>
-              <p:cNvPr id="32" name="Straight Arrow Connector 31">
-                <a:extLst>
-                  <a:ext uri="{FF2B5EF4-FFF2-40B4-BE49-F238E27FC236}">
-                    <a16:creationId xmlns:a16="http://schemas.microsoft.com/office/drawing/2014/main" id="{1786ACE1-B0D6-D41B-0BE4-CEC898B78AA9}"/>
-                  </a:ext>
-                </a:extLst>
-              </p:cNvPr>
-              <p:cNvCxnSpPr>
-                <a:cxnSpLocks/>
-                <a:stCxn id="26" idx="3"/>
-                <a:endCxn id="27" idx="1"/>
-              </p:cNvCxnSpPr>
-              <p:nvPr/>
-            </p:nvCxnSpPr>
-            <p:spPr>
-              <a:xfrm>
-                <a:off x="5443199" y="2735205"/>
-                <a:ext cx="810736" cy="0"/>
-              </a:xfrm>
-              <a:prstGeom prst="straightConnector1">
-                <a:avLst/>
-              </a:prstGeom>
-              <a:ln>
-                <a:solidFill>
-                  <a:schemeClr val="tx1"/>
-                </a:solidFill>
-                <a:tailEnd type="triangle"/>
-              </a:ln>
-            </p:spPr>
-            <p:style>
-              <a:lnRef idx="2">
-                <a:schemeClr val="accent1"/>
-              </a:lnRef>
-              <a:fillRef idx="0">
-                <a:schemeClr val="accent1"/>
-              </a:fillRef>
-              <a:effectRef idx="1">
-                <a:schemeClr val="accent1"/>
-              </a:effectRef>
-              <a:fontRef idx="minor">
-                <a:schemeClr val="tx1"/>
-              </a:fontRef>
-            </p:style>
-          </p:cxnSp>
-          <p:cxnSp>
-            <p:nvCxnSpPr>
-              <p:cNvPr id="33" name="Straight Arrow Connector 32">
-                <a:extLst>
-                  <a:ext uri="{FF2B5EF4-FFF2-40B4-BE49-F238E27FC236}">
-                    <a16:creationId xmlns:a16="http://schemas.microsoft.com/office/drawing/2014/main" id="{591F550D-AFED-2E9D-E2E5-4C83B53D378E}"/>
-                  </a:ext>
-                </a:extLst>
-              </p:cNvPr>
-              <p:cNvCxnSpPr>
-                <a:cxnSpLocks/>
-                <a:stCxn id="27" idx="3"/>
-                <a:endCxn id="28" idx="1"/>
-              </p:cNvCxnSpPr>
-              <p:nvPr/>
-            </p:nvCxnSpPr>
-            <p:spPr>
-              <a:xfrm>
-                <a:off x="8449161" y="2735205"/>
-                <a:ext cx="810735" cy="0"/>
-              </a:xfrm>
-              <a:prstGeom prst="straightConnector1">
-                <a:avLst/>
-              </a:prstGeom>
-              <a:ln>
-                <a:solidFill>
-                  <a:schemeClr val="tx1"/>
-                </a:solidFill>
-                <a:tailEnd type="triangle"/>
-              </a:ln>
-            </p:spPr>
-            <p:style>
-              <a:lnRef idx="2">
-                <a:schemeClr val="accent1"/>
-              </a:lnRef>
-              <a:fillRef idx="0">
-                <a:schemeClr val="accent1"/>
-              </a:fillRef>
-              <a:effectRef idx="1">
-                <a:schemeClr val="accent1"/>
-              </a:effectRef>
-              <a:fontRef idx="minor">
-                <a:schemeClr val="tx1"/>
-              </a:fontRef>
-            </p:style>
-          </p:cxnSp>
-        </p:grpSp>
+            <a:prstGeom prst="roundRect">
+              <a:avLst/>
+            </a:prstGeom>
+            <a:noFill/>
+          </p:spPr>
+          <p:style>
+            <a:lnRef idx="2">
+              <a:schemeClr val="accent1">
+                <a:shade val="15000"/>
+              </a:schemeClr>
+            </a:lnRef>
+            <a:fillRef idx="1">
+              <a:schemeClr val="accent1"/>
+            </a:fillRef>
+            <a:effectRef idx="0">
+              <a:schemeClr val="accent1"/>
+            </a:effectRef>
+            <a:fontRef idx="minor">
+              <a:schemeClr val="lt1"/>
+            </a:fontRef>
+          </p:style>
+          <p:txBody>
+            <a:bodyPr tIns="0" rtlCol="0" anchor="ctr"/>
+            <a:lstStyle/>
+            <a:p>
+              <a:pPr algn="ctr"/>
+              <a:r>
+                <a:rPr lang="en-US" dirty="0">
+                  <a:solidFill>
+                    <a:schemeClr val="tx1"/>
+                  </a:solidFill>
+                </a:rPr>
+                <a:t>Decompensated Cirrhosis (DC)</a:t>
+              </a:r>
+            </a:p>
+          </p:txBody>
+        </p:sp>
+        <p:sp>
+          <p:nvSpPr>
+            <p:cNvPr id="28" name="Rounded Rectangle 27">
+              <a:extLst>
+                <a:ext uri="{FF2B5EF4-FFF2-40B4-BE49-F238E27FC236}">
+                  <a16:creationId xmlns:a16="http://schemas.microsoft.com/office/drawing/2014/main" id="{CE5D6A7B-C6B2-406E-BA62-FE4216F8AED6}"/>
+                </a:ext>
+              </a:extLst>
+            </p:cNvPr>
+            <p:cNvSpPr/>
+            <p:nvPr/>
+          </p:nvSpPr>
+          <p:spPr>
+            <a:xfrm>
+              <a:off x="9259896" y="2437706"/>
+              <a:ext cx="2195226" cy="594998"/>
+            </a:xfrm>
+            <a:prstGeom prst="roundRect">
+              <a:avLst/>
+            </a:prstGeom>
+            <a:noFill/>
+          </p:spPr>
+          <p:style>
+            <a:lnRef idx="2">
+              <a:schemeClr val="accent1">
+                <a:shade val="15000"/>
+              </a:schemeClr>
+            </a:lnRef>
+            <a:fillRef idx="1">
+              <a:schemeClr val="accent1"/>
+            </a:fillRef>
+            <a:effectRef idx="0">
+              <a:schemeClr val="accent1"/>
+            </a:effectRef>
+            <a:fontRef idx="minor">
+              <a:schemeClr val="lt1"/>
+            </a:fontRef>
+          </p:style>
+          <p:txBody>
+            <a:bodyPr tIns="0" rtlCol="0" anchor="ctr"/>
+            <a:lstStyle/>
+            <a:p>
+              <a:pPr algn="ctr"/>
+              <a:r>
+                <a:rPr lang="en-US" dirty="0">
+                  <a:solidFill>
+                    <a:schemeClr val="tx1"/>
+                  </a:solidFill>
+                </a:rPr>
+                <a:t>Hepatocellular Carcinoma (HCC)</a:t>
+              </a:r>
+            </a:p>
+          </p:txBody>
+        </p:sp>
         <p:cxnSp>
           <p:nvCxnSpPr>
-            <p:cNvPr id="37" name="Curved Connector 36">
+            <p:cNvPr id="29" name="Elbow Connector 28">
               <a:extLst>
                 <a:ext uri="{FF2B5EF4-FFF2-40B4-BE49-F238E27FC236}">
-                  <a16:creationId xmlns:a16="http://schemas.microsoft.com/office/drawing/2014/main" id="{E3E4E13A-AEB4-CCEC-5D33-01FA2FADE362}"/>
+                  <a16:creationId xmlns:a16="http://schemas.microsoft.com/office/drawing/2014/main" id="{2CA958DD-313B-96E5-43C3-7A5A8C6BC80E}"/>
                 </a:ext>
               </a:extLst>
             </p:cNvPr>
             <p:cNvCxnSpPr>
-              <a:stCxn id="5" idx="2"/>
+              <a:cxnSpLocks/>
+              <a:stCxn id="26" idx="0"/>
+              <a:endCxn id="28" idx="0"/>
             </p:cNvCxnSpPr>
             <p:nvPr/>
           </p:nvCxnSpPr>
           <p:spPr>
-            <a:xfrm rot="16200000" flipH="1">
-              <a:off x="893671" y="2575448"/>
-              <a:ext cx="308401" cy="356056"/>
+            <a:xfrm rot="5400000" flipH="1" flipV="1">
+              <a:off x="7351547" y="-568255"/>
+              <a:ext cx="12700" cy="6011923"/>
             </a:xfrm>
-            <a:prstGeom prst="curvedConnector2">
+            <a:prstGeom prst="bentConnector3">
+              <a:avLst>
+                <a:gd name="adj1" fmla="val 1800000"/>
+              </a:avLst>
+            </a:prstGeom>
+            <a:ln>
+              <a:prstDash val="sysDash"/>
+              <a:tailEnd type="triangle"/>
+            </a:ln>
+          </p:spPr>
+          <p:style>
+            <a:lnRef idx="2">
+              <a:schemeClr val="dk1"/>
+            </a:lnRef>
+            <a:fillRef idx="0">
+              <a:schemeClr val="dk1"/>
+            </a:fillRef>
+            <a:effectRef idx="1">
+              <a:schemeClr val="dk1"/>
+            </a:effectRef>
+            <a:fontRef idx="minor">
+              <a:schemeClr val="tx1"/>
+            </a:fontRef>
+          </p:style>
+        </p:cxnSp>
+        <p:cxnSp>
+          <p:nvCxnSpPr>
+            <p:cNvPr id="31" name="Straight Arrow Connector 30">
+              <a:extLst>
+                <a:ext uri="{FF2B5EF4-FFF2-40B4-BE49-F238E27FC236}">
+                  <a16:creationId xmlns:a16="http://schemas.microsoft.com/office/drawing/2014/main" id="{786248E0-35F9-4438-CE3F-4D578DED2FD1}"/>
+                </a:ext>
+              </a:extLst>
+            </p:cNvPr>
+            <p:cNvCxnSpPr>
+              <a:stCxn id="25" idx="3"/>
+              <a:endCxn id="26" idx="1"/>
+            </p:cNvCxnSpPr>
+            <p:nvPr/>
+          </p:nvCxnSpPr>
+          <p:spPr>
+            <a:xfrm>
+              <a:off x="2437237" y="2735205"/>
+              <a:ext cx="810736" cy="0"/>
+            </a:xfrm>
+            <a:prstGeom prst="straightConnector1">
               <a:avLst/>
             </a:prstGeom>
             <a:ln>
@@ -4889,22 +3769,26 @@
         </p:cxnSp>
         <p:cxnSp>
           <p:nvCxnSpPr>
-            <p:cNvPr id="45" name="Curved Connector 44">
+            <p:cNvPr id="32" name="Straight Arrow Connector 31">
               <a:extLst>
                 <a:ext uri="{FF2B5EF4-FFF2-40B4-BE49-F238E27FC236}">
-                  <a16:creationId xmlns:a16="http://schemas.microsoft.com/office/drawing/2014/main" id="{555B929E-F272-2CD0-E97A-76CB28472BF5}"/>
+                  <a16:creationId xmlns:a16="http://schemas.microsoft.com/office/drawing/2014/main" id="{1786ACE1-B0D6-D41B-0BE4-CEC898B78AA9}"/>
                 </a:ext>
               </a:extLst>
             </p:cNvPr>
-            <p:cNvCxnSpPr/>
+            <p:cNvCxnSpPr>
+              <a:cxnSpLocks/>
+              <a:stCxn id="26" idx="3"/>
+              <a:endCxn id="27" idx="1"/>
+            </p:cNvCxnSpPr>
             <p:nvPr/>
           </p:nvCxnSpPr>
           <p:spPr>
-            <a:xfrm rot="16200000" flipH="1">
-              <a:off x="3423578" y="2581091"/>
-              <a:ext cx="308401" cy="356056"/>
+            <a:xfrm>
+              <a:off x="5443199" y="2735205"/>
+              <a:ext cx="810736" cy="0"/>
             </a:xfrm>
-            <a:prstGeom prst="curvedConnector2">
+            <a:prstGeom prst="straightConnector1">
               <a:avLst/>
             </a:prstGeom>
             <a:ln>
@@ -4929,216 +3813,28 @@
             </a:fontRef>
           </p:style>
         </p:cxnSp>
-        <mc:AlternateContent xmlns:mc="http://schemas.openxmlformats.org/markup-compatibility/2006" xmlns:a14="http://schemas.microsoft.com/office/drawing/2010/main">
-          <mc:Choice Requires="a14">
-            <p:sp>
-              <p:nvSpPr>
-                <p:cNvPr id="59" name="TextBox 58">
-                  <a:extLst>
-                    <a:ext uri="{FF2B5EF4-FFF2-40B4-BE49-F238E27FC236}">
-                      <a16:creationId xmlns:a16="http://schemas.microsoft.com/office/drawing/2014/main" id="{624F6CE2-64D7-632D-7B99-1B66DBA306ED}"/>
-                    </a:ext>
-                  </a:extLst>
-                </p:cNvPr>
-                <p:cNvSpPr txBox="1"/>
-                <p:nvPr/>
-              </p:nvSpPr>
-              <p:spPr>
-                <a:xfrm>
-                  <a:off x="1145182" y="2717951"/>
-                  <a:ext cx="364010" cy="369332"/>
-                </a:xfrm>
-                <a:prstGeom prst="rect">
-                  <a:avLst/>
-                </a:prstGeom>
-                <a:noFill/>
-              </p:spPr>
-              <p:txBody>
-                <a:bodyPr wrap="none" rtlCol="0">
-                  <a:spAutoFit/>
-                </a:bodyPr>
-                <a:lstStyle/>
-                <a:p>
-                  <a:pPr/>
-                  <a14:m>
-                    <m:oMathPara xmlns:m="http://schemas.openxmlformats.org/officeDocument/2006/math">
-                      <m:oMathParaPr>
-                        <m:jc m:val="centerGroup"/>
-                      </m:oMathParaPr>
-                      <m:oMath xmlns:m="http://schemas.openxmlformats.org/officeDocument/2006/math">
-                        <m:r>
-                          <a:rPr lang="en-US" b="0" i="1" smtClean="0">
-                            <a:latin typeface="Cambria Math" panose="02040503050406030204" pitchFamily="18" charset="0"/>
-                          </a:rPr>
-                          <m:t>𝜇</m:t>
-                        </m:r>
-                      </m:oMath>
-                    </m:oMathPara>
-                  </a14:m>
-                  <a:endParaRPr lang="en-CN" dirty="0"/>
-                </a:p>
-              </p:txBody>
-            </p:sp>
-          </mc:Choice>
-          <mc:Fallback xmlns="">
-            <p:sp>
-              <p:nvSpPr>
-                <p:cNvPr id="59" name="TextBox 58">
-                  <a:extLst>
-                    <a:ext uri="{FF2B5EF4-FFF2-40B4-BE49-F238E27FC236}">
-                      <a16:creationId xmlns:a16="http://schemas.microsoft.com/office/drawing/2014/main" id="{624F6CE2-64D7-632D-7B99-1B66DBA306ED}"/>
-                    </a:ext>
-                  </a:extLst>
-                </p:cNvPr>
-                <p:cNvSpPr txBox="1">
-                  <a:spLocks noRot="1" noChangeAspect="1" noMove="1" noResize="1" noEditPoints="1" noAdjustHandles="1" noChangeArrowheads="1" noChangeShapeType="1" noTextEdit="1"/>
-                </p:cNvSpPr>
-                <p:nvPr/>
-              </p:nvSpPr>
-              <p:spPr>
-                <a:xfrm>
-                  <a:off x="1145182" y="2717951"/>
-                  <a:ext cx="364010" cy="369332"/>
-                </a:xfrm>
-                <a:prstGeom prst="rect">
-                  <a:avLst/>
-                </a:prstGeom>
-                <a:blipFill>
-                  <a:blip r:embed="rId2"/>
-                  <a:stretch>
-                    <a:fillRect b="-6897"/>
-                  </a:stretch>
-                </a:blipFill>
-              </p:spPr>
-              <p:txBody>
-                <a:bodyPr/>
-                <a:lstStyle/>
-                <a:p>
-                  <a:r>
-                    <a:rPr lang="en-CN">
-                      <a:noFill/>
-                    </a:rPr>
-                    <a:t> </a:t>
-                  </a:r>
-                </a:p>
-              </p:txBody>
-            </p:sp>
-          </mc:Fallback>
-        </mc:AlternateContent>
-        <mc:AlternateContent xmlns:mc="http://schemas.openxmlformats.org/markup-compatibility/2006" xmlns:a14="http://schemas.microsoft.com/office/drawing/2010/main">
-          <mc:Choice Requires="a14">
-            <p:sp>
-              <p:nvSpPr>
-                <p:cNvPr id="60" name="TextBox 59">
-                  <a:extLst>
-                    <a:ext uri="{FF2B5EF4-FFF2-40B4-BE49-F238E27FC236}">
-                      <a16:creationId xmlns:a16="http://schemas.microsoft.com/office/drawing/2014/main" id="{7890A67B-B2DC-60F1-9C35-1E4C1BC1DE55}"/>
-                    </a:ext>
-                  </a:extLst>
-                </p:cNvPr>
-                <p:cNvSpPr txBox="1"/>
-                <p:nvPr/>
-              </p:nvSpPr>
-              <p:spPr>
-                <a:xfrm>
-                  <a:off x="3682801" y="2717951"/>
-                  <a:ext cx="364010" cy="369332"/>
-                </a:xfrm>
-                <a:prstGeom prst="rect">
-                  <a:avLst/>
-                </a:prstGeom>
-                <a:noFill/>
-              </p:spPr>
-              <p:txBody>
-                <a:bodyPr wrap="none" rtlCol="0">
-                  <a:spAutoFit/>
-                </a:bodyPr>
-                <a:lstStyle/>
-                <a:p>
-                  <a:pPr/>
-                  <a14:m>
-                    <m:oMathPara xmlns:m="http://schemas.openxmlformats.org/officeDocument/2006/math">
-                      <m:oMathParaPr>
-                        <m:jc m:val="centerGroup"/>
-                      </m:oMathParaPr>
-                      <m:oMath xmlns:m="http://schemas.openxmlformats.org/officeDocument/2006/math">
-                        <m:r>
-                          <a:rPr lang="en-US" b="0" i="1" smtClean="0">
-                            <a:latin typeface="Cambria Math" panose="02040503050406030204" pitchFamily="18" charset="0"/>
-                          </a:rPr>
-                          <m:t>𝜇</m:t>
-                        </m:r>
-                      </m:oMath>
-                    </m:oMathPara>
-                  </a14:m>
-                  <a:endParaRPr lang="en-CN" dirty="0"/>
-                </a:p>
-              </p:txBody>
-            </p:sp>
-          </mc:Choice>
-          <mc:Fallback xmlns="">
-            <p:sp>
-              <p:nvSpPr>
-                <p:cNvPr id="60" name="TextBox 59">
-                  <a:extLst>
-                    <a:ext uri="{FF2B5EF4-FFF2-40B4-BE49-F238E27FC236}">
-                      <a16:creationId xmlns:a16="http://schemas.microsoft.com/office/drawing/2014/main" id="{7890A67B-B2DC-60F1-9C35-1E4C1BC1DE55}"/>
-                    </a:ext>
-                  </a:extLst>
-                </p:cNvPr>
-                <p:cNvSpPr txBox="1">
-                  <a:spLocks noRot="1" noChangeAspect="1" noMove="1" noResize="1" noEditPoints="1" noAdjustHandles="1" noChangeArrowheads="1" noChangeShapeType="1" noTextEdit="1"/>
-                </p:cNvSpPr>
-                <p:nvPr/>
-              </p:nvSpPr>
-              <p:spPr>
-                <a:xfrm>
-                  <a:off x="3682801" y="2717951"/>
-                  <a:ext cx="364010" cy="369332"/>
-                </a:xfrm>
-                <a:prstGeom prst="rect">
-                  <a:avLst/>
-                </a:prstGeom>
-                <a:blipFill>
-                  <a:blip r:embed="rId3"/>
-                  <a:stretch>
-                    <a:fillRect b="-6897"/>
-                  </a:stretch>
-                </a:blipFill>
-              </p:spPr>
-              <p:txBody>
-                <a:bodyPr/>
-                <a:lstStyle/>
-                <a:p>
-                  <a:r>
-                    <a:rPr lang="en-CN">
-                      <a:noFill/>
-                    </a:rPr>
-                    <a:t> </a:t>
-                  </a:r>
-                </a:p>
-              </p:txBody>
-            </p:sp>
-          </mc:Fallback>
-        </mc:AlternateContent>
         <p:cxnSp>
           <p:nvCxnSpPr>
-            <p:cNvPr id="61" name="Curved Connector 60">
+            <p:cNvPr id="33" name="Straight Arrow Connector 32">
               <a:extLst>
                 <a:ext uri="{FF2B5EF4-FFF2-40B4-BE49-F238E27FC236}">
-                  <a16:creationId xmlns:a16="http://schemas.microsoft.com/office/drawing/2014/main" id="{67EA703A-42AB-BC1F-A8B7-22E9D2E511B8}"/>
+                  <a16:creationId xmlns:a16="http://schemas.microsoft.com/office/drawing/2014/main" id="{591F550D-AFED-2E9D-E2E5-4C83B53D378E}"/>
                 </a:ext>
               </a:extLst>
             </p:cNvPr>
-            <p:cNvCxnSpPr/>
+            <p:cNvCxnSpPr>
+              <a:cxnSpLocks/>
+              <a:stCxn id="27" idx="3"/>
+              <a:endCxn id="28" idx="1"/>
+            </p:cNvCxnSpPr>
             <p:nvPr/>
           </p:nvCxnSpPr>
           <p:spPr>
-            <a:xfrm rot="16200000" flipH="1">
-              <a:off x="5859324" y="1900454"/>
-              <a:ext cx="308401" cy="356056"/>
+            <a:xfrm>
+              <a:off x="8449161" y="2735205"/>
+              <a:ext cx="810735" cy="0"/>
             </a:xfrm>
-            <a:prstGeom prst="curvedConnector2">
+            <a:prstGeom prst="straightConnector1">
               <a:avLst/>
             </a:prstGeom>
             <a:ln>
@@ -5163,387 +3859,697 @@
             </a:fontRef>
           </p:style>
         </p:cxnSp>
-        <mc:AlternateContent xmlns:mc="http://schemas.openxmlformats.org/markup-compatibility/2006" xmlns:a14="http://schemas.microsoft.com/office/drawing/2010/main">
-          <mc:Choice Requires="a14">
-            <p:sp>
-              <p:nvSpPr>
-                <p:cNvPr id="62" name="TextBox 61">
-                  <a:extLst>
-                    <a:ext uri="{FF2B5EF4-FFF2-40B4-BE49-F238E27FC236}">
-                      <a16:creationId xmlns:a16="http://schemas.microsoft.com/office/drawing/2014/main" id="{C150C858-2557-0C12-A7C3-51E0891B0ABD}"/>
-                    </a:ext>
-                  </a:extLst>
-                </p:cNvPr>
-                <p:cNvSpPr txBox="1"/>
-                <p:nvPr/>
-              </p:nvSpPr>
-              <p:spPr>
-                <a:xfrm>
-                  <a:off x="6110835" y="2042957"/>
-                  <a:ext cx="364010" cy="369332"/>
-                </a:xfrm>
-                <a:prstGeom prst="rect">
-                  <a:avLst/>
-                </a:prstGeom>
-                <a:noFill/>
-              </p:spPr>
-              <p:txBody>
-                <a:bodyPr wrap="none" rtlCol="0">
-                  <a:spAutoFit/>
-                </a:bodyPr>
-                <a:lstStyle/>
-                <a:p>
-                  <a:pPr/>
-                  <a14:m>
-                    <m:oMathPara xmlns:m="http://schemas.openxmlformats.org/officeDocument/2006/math">
-                      <m:oMathParaPr>
-                        <m:jc m:val="centerGroup"/>
-                      </m:oMathParaPr>
-                      <m:oMath xmlns:m="http://schemas.openxmlformats.org/officeDocument/2006/math">
-                        <m:r>
-                          <a:rPr lang="en-US" b="0" i="1" smtClean="0">
-                            <a:latin typeface="Cambria Math" panose="02040503050406030204" pitchFamily="18" charset="0"/>
-                          </a:rPr>
-                          <m:t>𝜇</m:t>
-                        </m:r>
-                      </m:oMath>
-                    </m:oMathPara>
-                  </a14:m>
-                  <a:endParaRPr lang="en-CN" dirty="0"/>
-                </a:p>
-              </p:txBody>
-            </p:sp>
-          </mc:Choice>
-          <mc:Fallback xmlns="">
-            <p:sp>
-              <p:nvSpPr>
-                <p:cNvPr id="62" name="TextBox 61">
-                  <a:extLst>
-                    <a:ext uri="{FF2B5EF4-FFF2-40B4-BE49-F238E27FC236}">
-                      <a16:creationId xmlns:a16="http://schemas.microsoft.com/office/drawing/2014/main" id="{C150C858-2557-0C12-A7C3-51E0891B0ABD}"/>
-                    </a:ext>
-                  </a:extLst>
-                </p:cNvPr>
-                <p:cNvSpPr txBox="1">
-                  <a:spLocks noRot="1" noChangeAspect="1" noMove="1" noResize="1" noEditPoints="1" noAdjustHandles="1" noChangeArrowheads="1" noChangeShapeType="1" noTextEdit="1"/>
-                </p:cNvSpPr>
-                <p:nvPr/>
-              </p:nvSpPr>
-              <p:spPr>
-                <a:xfrm>
-                  <a:off x="6110835" y="2042957"/>
-                  <a:ext cx="364010" cy="369332"/>
-                </a:xfrm>
-                <a:prstGeom prst="rect">
-                  <a:avLst/>
-                </a:prstGeom>
-                <a:blipFill>
-                  <a:blip r:embed="rId4"/>
-                  <a:stretch>
-                    <a:fillRect b="-3226"/>
-                  </a:stretch>
-                </a:blipFill>
-              </p:spPr>
-              <p:txBody>
-                <a:bodyPr/>
-                <a:lstStyle/>
-                <a:p>
-                  <a:r>
-                    <a:rPr lang="en-CN">
-                      <a:noFill/>
-                    </a:rPr>
-                    <a:t> </a:t>
-                  </a:r>
-                </a:p>
-              </p:txBody>
-            </p:sp>
-          </mc:Fallback>
-        </mc:AlternateContent>
+      </p:grpSp>
+      <p:cxnSp>
+        <p:nvCxnSpPr>
+          <p:cNvPr id="70" name="Curved Connector 69">
+            <a:extLst>
+              <a:ext uri="{FF2B5EF4-FFF2-40B4-BE49-F238E27FC236}">
+                <a16:creationId xmlns:a16="http://schemas.microsoft.com/office/drawing/2014/main" id="{2DA06626-387C-09E3-BA3A-B012FFDB05DE}"/>
+              </a:ext>
+            </a:extLst>
+          </p:cNvPr>
+          <p:cNvCxnSpPr>
+            <a:cxnSpLocks/>
+          </p:cNvCxnSpPr>
+          <p:nvPr/>
+        </p:nvCxnSpPr>
+        <p:spPr>
+          <a:xfrm rot="16200000" flipH="1">
+            <a:off x="7459291" y="5746335"/>
+            <a:ext cx="273788" cy="339422"/>
+          </a:xfrm>
+          <a:prstGeom prst="curvedConnector2">
+            <a:avLst/>
+          </a:prstGeom>
+          <a:ln>
+            <a:solidFill>
+              <a:schemeClr val="tx1"/>
+            </a:solidFill>
+            <a:tailEnd type="triangle"/>
+          </a:ln>
+        </p:spPr>
+        <p:style>
+          <a:lnRef idx="2">
+            <a:schemeClr val="accent1"/>
+          </a:lnRef>
+          <a:fillRef idx="0">
+            <a:schemeClr val="accent1"/>
+          </a:fillRef>
+          <a:effectRef idx="1">
+            <a:schemeClr val="accent1"/>
+          </a:effectRef>
+          <a:fontRef idx="minor">
+            <a:schemeClr val="tx1"/>
+          </a:fontRef>
+        </p:style>
+      </p:cxnSp>
+      <mc:AlternateContent xmlns:mc="http://schemas.openxmlformats.org/markup-compatibility/2006">
+        <mc:Choice xmlns:a14="http://schemas.microsoft.com/office/drawing/2010/main" Requires="a14">
+          <p:sp>
+            <p:nvSpPr>
+              <p:cNvPr id="71" name="TextBox 70">
+                <a:extLst>
+                  <a:ext uri="{FF2B5EF4-FFF2-40B4-BE49-F238E27FC236}">
+                    <a16:creationId xmlns:a16="http://schemas.microsoft.com/office/drawing/2014/main" id="{5D409464-2C46-8B96-26B0-D88D7D9238E1}"/>
+                  </a:ext>
+                </a:extLst>
+              </p:cNvPr>
+              <p:cNvSpPr txBox="1"/>
+              <p:nvPr/>
+            </p:nvSpPr>
+            <p:spPr>
+              <a:xfrm>
+                <a:off x="7685178" y="5863215"/>
+                <a:ext cx="985309" cy="369332"/>
+              </a:xfrm>
+              <a:prstGeom prst="rect">
+                <a:avLst/>
+              </a:prstGeom>
+              <a:noFill/>
+            </p:spPr>
+            <p:txBody>
+              <a:bodyPr wrap="square" rtlCol="0">
+                <a:spAutoFit/>
+              </a:bodyPr>
+              <a:lstStyle/>
+              <a:p>
+                <a:pPr/>
+                <a14:m>
+                  <m:oMathPara xmlns:m="http://schemas.openxmlformats.org/officeDocument/2006/math">
+                    <m:oMathParaPr>
+                      <m:jc m:val="centerGroup"/>
+                    </m:oMathParaPr>
+                    <m:oMath xmlns:m="http://schemas.openxmlformats.org/officeDocument/2006/math">
+                      <m:sSub>
+                        <m:sSubPr>
+                          <m:ctrlPr>
+                            <a:rPr lang="en-US" b="0" i="1" smtClean="0">
+                              <a:latin typeface="Cambria Math" panose="02040503050406030204" pitchFamily="18" charset="0"/>
+                            </a:rPr>
+                          </m:ctrlPr>
+                        </m:sSubPr>
+                        <m:e>
+                          <m:r>
+                            <a:rPr lang="en-US" b="0" i="1" smtClean="0">
+                              <a:latin typeface="Cambria Math" panose="02040503050406030204" pitchFamily="18" charset="0"/>
+                            </a:rPr>
+                            <m:t>𝜇</m:t>
+                          </m:r>
+                        </m:e>
+                        <m:sub>
+                          <m:r>
+                            <a:rPr lang="en-US" b="0" i="1" smtClean="0">
+                              <a:latin typeface="Cambria Math" panose="02040503050406030204" pitchFamily="18" charset="0"/>
+                            </a:rPr>
+                            <m:t>𝐷𝐶</m:t>
+                          </m:r>
+                        </m:sub>
+                      </m:sSub>
+                    </m:oMath>
+                  </m:oMathPara>
+                </a14:m>
+                <a:endParaRPr lang="en-CN" dirty="0"/>
+              </a:p>
+            </p:txBody>
+          </p:sp>
+        </mc:Choice>
+        <mc:Fallback>
+          <p:sp>
+            <p:nvSpPr>
+              <p:cNvPr id="71" name="TextBox 70">
+                <a:extLst>
+                  <a:ext uri="{FF2B5EF4-FFF2-40B4-BE49-F238E27FC236}">
+                    <a16:creationId xmlns:a16="http://schemas.microsoft.com/office/drawing/2014/main" id="{5D409464-2C46-8B96-26B0-D88D7D9238E1}"/>
+                  </a:ext>
+                </a:extLst>
+              </p:cNvPr>
+              <p:cNvSpPr txBox="1">
+                <a:spLocks noRot="1" noChangeAspect="1" noMove="1" noResize="1" noEditPoints="1" noAdjustHandles="1" noChangeArrowheads="1" noChangeShapeType="1" noTextEdit="1"/>
+              </p:cNvSpPr>
+              <p:nvPr/>
+            </p:nvSpPr>
+            <p:spPr>
+              <a:xfrm>
+                <a:off x="7685178" y="5863215"/>
+                <a:ext cx="985309" cy="369332"/>
+              </a:xfrm>
+              <a:prstGeom prst="rect">
+                <a:avLst/>
+              </a:prstGeom>
+              <a:blipFill>
+                <a:blip r:embed="rId2"/>
+                <a:stretch>
+                  <a:fillRect b="-6667"/>
+                </a:stretch>
+              </a:blipFill>
+            </p:spPr>
+            <p:txBody>
+              <a:bodyPr/>
+              <a:lstStyle/>
+              <a:p>
+                <a:r>
+                  <a:rPr lang="en-US">
+                    <a:noFill/>
+                  </a:rPr>
+                  <a:t> </a:t>
+                </a:r>
+              </a:p>
+            </p:txBody>
+          </p:sp>
+        </mc:Fallback>
+      </mc:AlternateContent>
+      <p:cxnSp>
+        <p:nvCxnSpPr>
+          <p:cNvPr id="72" name="Curved Connector 71">
+            <a:extLst>
+              <a:ext uri="{FF2B5EF4-FFF2-40B4-BE49-F238E27FC236}">
+                <a16:creationId xmlns:a16="http://schemas.microsoft.com/office/drawing/2014/main" id="{CF7AC566-439B-0BEA-4CAF-8263A3EF9023}"/>
+              </a:ext>
+            </a:extLst>
+          </p:cNvPr>
+          <p:cNvCxnSpPr>
+            <a:cxnSpLocks/>
+          </p:cNvCxnSpPr>
+          <p:nvPr/>
+        </p:nvCxnSpPr>
+        <p:spPr>
+          <a:xfrm rot="16200000" flipH="1">
+            <a:off x="10478673" y="5741276"/>
+            <a:ext cx="273788" cy="339422"/>
+          </a:xfrm>
+          <a:prstGeom prst="curvedConnector2">
+            <a:avLst/>
+          </a:prstGeom>
+          <a:ln>
+            <a:solidFill>
+              <a:schemeClr val="tx1"/>
+            </a:solidFill>
+            <a:tailEnd type="triangle"/>
+          </a:ln>
+        </p:spPr>
+        <p:style>
+          <a:lnRef idx="2">
+            <a:schemeClr val="accent1"/>
+          </a:lnRef>
+          <a:fillRef idx="0">
+            <a:schemeClr val="accent1"/>
+          </a:fillRef>
+          <a:effectRef idx="1">
+            <a:schemeClr val="accent1"/>
+          </a:effectRef>
+          <a:fontRef idx="minor">
+            <a:schemeClr val="tx1"/>
+          </a:fontRef>
+        </p:style>
+      </p:cxnSp>
+      <mc:AlternateContent xmlns:mc="http://schemas.openxmlformats.org/markup-compatibility/2006">
+        <mc:Choice xmlns:a14="http://schemas.microsoft.com/office/drawing/2010/main" Requires="a14">
+          <p:sp>
+            <p:nvSpPr>
+              <p:cNvPr id="73" name="TextBox 72">
+                <a:extLst>
+                  <a:ext uri="{FF2B5EF4-FFF2-40B4-BE49-F238E27FC236}">
+                    <a16:creationId xmlns:a16="http://schemas.microsoft.com/office/drawing/2014/main" id="{783980BE-DBC6-5F49-2385-8CA6FA4FF44E}"/>
+                  </a:ext>
+                </a:extLst>
+              </p:cNvPr>
+              <p:cNvSpPr txBox="1"/>
+              <p:nvPr/>
+            </p:nvSpPr>
+            <p:spPr>
+              <a:xfrm>
+                <a:off x="10704560" y="5858156"/>
+                <a:ext cx="1072108" cy="369332"/>
+              </a:xfrm>
+              <a:prstGeom prst="rect">
+                <a:avLst/>
+              </a:prstGeom>
+              <a:noFill/>
+            </p:spPr>
+            <p:txBody>
+              <a:bodyPr wrap="square" rtlCol="0">
+                <a:spAutoFit/>
+              </a:bodyPr>
+              <a:lstStyle/>
+              <a:p>
+                <a:pPr/>
+                <a14:m>
+                  <m:oMathPara xmlns:m="http://schemas.openxmlformats.org/officeDocument/2006/math">
+                    <m:oMathParaPr>
+                      <m:jc m:val="centerGroup"/>
+                    </m:oMathParaPr>
+                    <m:oMath xmlns:m="http://schemas.openxmlformats.org/officeDocument/2006/math">
+                      <m:sSub>
+                        <m:sSubPr>
+                          <m:ctrlPr>
+                            <a:rPr lang="en-US" b="0" i="1" smtClean="0">
+                              <a:latin typeface="Cambria Math" panose="02040503050406030204" pitchFamily="18" charset="0"/>
+                            </a:rPr>
+                          </m:ctrlPr>
+                        </m:sSubPr>
+                        <m:e>
+                          <m:r>
+                            <a:rPr lang="en-US" b="0" i="1" smtClean="0">
+                              <a:latin typeface="Cambria Math" panose="02040503050406030204" pitchFamily="18" charset="0"/>
+                            </a:rPr>
+                            <m:t>𝜇</m:t>
+                          </m:r>
+                        </m:e>
+                        <m:sub>
+                          <m:r>
+                            <a:rPr lang="en-US" b="0" i="1" smtClean="0">
+                              <a:latin typeface="Cambria Math" panose="02040503050406030204" pitchFamily="18" charset="0"/>
+                            </a:rPr>
+                            <m:t>𝐻𝐶𝐶</m:t>
+                          </m:r>
+                        </m:sub>
+                      </m:sSub>
+                    </m:oMath>
+                  </m:oMathPara>
+                </a14:m>
+                <a:endParaRPr lang="en-CN" dirty="0"/>
+              </a:p>
+            </p:txBody>
+          </p:sp>
+        </mc:Choice>
+        <mc:Fallback>
+          <p:sp>
+            <p:nvSpPr>
+              <p:cNvPr id="73" name="TextBox 72">
+                <a:extLst>
+                  <a:ext uri="{FF2B5EF4-FFF2-40B4-BE49-F238E27FC236}">
+                    <a16:creationId xmlns:a16="http://schemas.microsoft.com/office/drawing/2014/main" id="{783980BE-DBC6-5F49-2385-8CA6FA4FF44E}"/>
+                  </a:ext>
+                </a:extLst>
+              </p:cNvPr>
+              <p:cNvSpPr txBox="1">
+                <a:spLocks noRot="1" noChangeAspect="1" noMove="1" noResize="1" noEditPoints="1" noAdjustHandles="1" noChangeArrowheads="1" noChangeShapeType="1" noTextEdit="1"/>
+              </p:cNvSpPr>
+              <p:nvPr/>
+            </p:nvSpPr>
+            <p:spPr>
+              <a:xfrm>
+                <a:off x="10704560" y="5858156"/>
+                <a:ext cx="1072108" cy="369332"/>
+              </a:xfrm>
+              <a:prstGeom prst="rect">
+                <a:avLst/>
+              </a:prstGeom>
+              <a:blipFill>
+                <a:blip r:embed="rId3"/>
+                <a:stretch>
+                  <a:fillRect b="-6667"/>
+                </a:stretch>
+              </a:blipFill>
+            </p:spPr>
+            <p:txBody>
+              <a:bodyPr/>
+              <a:lstStyle/>
+              <a:p>
+                <a:r>
+                  <a:rPr lang="en-US">
+                    <a:noFill/>
+                  </a:rPr>
+                  <a:t> </a:t>
+                </a:r>
+              </a:p>
+            </p:txBody>
+          </p:sp>
+        </mc:Fallback>
+      </mc:AlternateContent>
+      <p:grpSp>
+        <p:nvGrpSpPr>
+          <p:cNvPr id="112" name="Group 111">
+            <a:extLst>
+              <a:ext uri="{FF2B5EF4-FFF2-40B4-BE49-F238E27FC236}">
+                <a16:creationId xmlns:a16="http://schemas.microsoft.com/office/drawing/2014/main" id="{26943030-4BAD-C002-0641-09328B95D2D4}"/>
+              </a:ext>
+            </a:extLst>
+          </p:cNvPr>
+          <p:cNvGrpSpPr/>
+          <p:nvPr/>
+        </p:nvGrpSpPr>
+        <p:grpSpPr>
+          <a:xfrm>
+            <a:off x="154382" y="968410"/>
+            <a:ext cx="6190382" cy="2944820"/>
+            <a:chOff x="154382" y="968410"/>
+            <a:chExt cx="6190382" cy="2944820"/>
+          </a:xfrm>
+        </p:grpSpPr>
         <p:cxnSp>
           <p:nvCxnSpPr>
-            <p:cNvPr id="63" name="Curved Connector 62">
+            <p:cNvPr id="83" name="Curved Connector 82">
               <a:extLst>
                 <a:ext uri="{FF2B5EF4-FFF2-40B4-BE49-F238E27FC236}">
-                  <a16:creationId xmlns:a16="http://schemas.microsoft.com/office/drawing/2014/main" id="{C4A6B5EA-E35A-C7C6-B65C-4DA07942472F}"/>
+                  <a16:creationId xmlns:a16="http://schemas.microsoft.com/office/drawing/2014/main" id="{1DB73787-2376-5F12-7D77-16B3C162A491}"/>
                 </a:ext>
               </a:extLst>
             </p:cNvPr>
-            <p:cNvCxnSpPr/>
+            <p:cNvCxnSpPr>
+              <a:stCxn id="7" idx="0"/>
+              <a:endCxn id="6" idx="0"/>
+            </p:cNvCxnSpPr>
             <p:nvPr/>
           </p:nvCxnSpPr>
           <p:spPr>
-            <a:xfrm rot="16200000" flipH="1">
-              <a:off x="5859324" y="3434792"/>
-              <a:ext cx="308401" cy="356056"/>
+            <a:xfrm rot="16200000" flipV="1">
+              <a:off x="4439439" y="476844"/>
+              <a:ext cx="12700" cy="2379731"/>
             </a:xfrm>
-            <a:prstGeom prst="curvedConnector2">
-              <a:avLst/>
+            <a:prstGeom prst="curvedConnector3">
+              <a:avLst>
+                <a:gd name="adj1" fmla="val 2860118"/>
+              </a:avLst>
             </a:prstGeom>
             <a:ln>
-              <a:solidFill>
-                <a:schemeClr val="tx1"/>
-              </a:solidFill>
               <a:tailEnd type="triangle"/>
             </a:ln>
           </p:spPr>
           <p:style>
             <a:lnRef idx="2">
-              <a:schemeClr val="accent1"/>
+              <a:schemeClr val="dk1"/>
             </a:lnRef>
             <a:fillRef idx="0">
-              <a:schemeClr val="accent1"/>
+              <a:schemeClr val="dk1"/>
             </a:fillRef>
             <a:effectRef idx="1">
-              <a:schemeClr val="accent1"/>
+              <a:schemeClr val="dk1"/>
             </a:effectRef>
             <a:fontRef idx="minor">
               <a:schemeClr val="tx1"/>
             </a:fontRef>
           </p:style>
         </p:cxnSp>
-        <mc:AlternateContent xmlns:mc="http://schemas.openxmlformats.org/markup-compatibility/2006" xmlns:a14="http://schemas.microsoft.com/office/drawing/2010/main">
-          <mc:Choice Requires="a14">
-            <p:sp>
-              <p:nvSpPr>
-                <p:cNvPr id="64" name="TextBox 63">
-                  <a:extLst>
-                    <a:ext uri="{FF2B5EF4-FFF2-40B4-BE49-F238E27FC236}">
-                      <a16:creationId xmlns:a16="http://schemas.microsoft.com/office/drawing/2014/main" id="{3583B2CB-97B3-D362-F473-9259FA781DF5}"/>
-                    </a:ext>
-                  </a:extLst>
-                </p:cNvPr>
-                <p:cNvSpPr txBox="1"/>
-                <p:nvPr/>
-              </p:nvSpPr>
-              <p:spPr>
-                <a:xfrm>
-                  <a:off x="6110835" y="3577295"/>
-                  <a:ext cx="364010" cy="369332"/>
-                </a:xfrm>
-                <a:prstGeom prst="rect">
-                  <a:avLst/>
-                </a:prstGeom>
-                <a:noFill/>
-              </p:spPr>
-              <p:txBody>
-                <a:bodyPr wrap="none" rtlCol="0">
-                  <a:spAutoFit/>
-                </a:bodyPr>
-                <a:lstStyle/>
-                <a:p>
-                  <a:pPr/>
-                  <a14:m>
-                    <m:oMathPara xmlns:m="http://schemas.openxmlformats.org/officeDocument/2006/math">
-                      <m:oMathParaPr>
-                        <m:jc m:val="centerGroup"/>
-                      </m:oMathParaPr>
-                      <m:oMath xmlns:m="http://schemas.openxmlformats.org/officeDocument/2006/math">
-                        <m:r>
-                          <a:rPr lang="en-US" b="0" i="1" smtClean="0">
-                            <a:latin typeface="Cambria Math" panose="02040503050406030204" pitchFamily="18" charset="0"/>
-                          </a:rPr>
-                          <m:t>𝜇</m:t>
-                        </m:r>
-                      </m:oMath>
-                    </m:oMathPara>
-                  </a14:m>
-                  <a:endParaRPr lang="en-CN" dirty="0"/>
-                </a:p>
-              </p:txBody>
-            </p:sp>
-          </mc:Choice>
-          <mc:Fallback xmlns="">
-            <p:sp>
-              <p:nvSpPr>
-                <p:cNvPr id="64" name="TextBox 63">
-                  <a:extLst>
-                    <a:ext uri="{FF2B5EF4-FFF2-40B4-BE49-F238E27FC236}">
-                      <a16:creationId xmlns:a16="http://schemas.microsoft.com/office/drawing/2014/main" id="{3583B2CB-97B3-D362-F473-9259FA781DF5}"/>
-                    </a:ext>
-                  </a:extLst>
-                </p:cNvPr>
-                <p:cNvSpPr txBox="1">
-                  <a:spLocks noRot="1" noChangeAspect="1" noMove="1" noResize="1" noEditPoints="1" noAdjustHandles="1" noChangeArrowheads="1" noChangeShapeType="1" noTextEdit="1"/>
-                </p:cNvSpPr>
-                <p:nvPr/>
-              </p:nvSpPr>
-              <p:spPr>
-                <a:xfrm>
-                  <a:off x="6110835" y="3577295"/>
-                  <a:ext cx="364010" cy="369332"/>
-                </a:xfrm>
-                <a:prstGeom prst="rect">
-                  <a:avLst/>
-                </a:prstGeom>
-                <a:blipFill>
-                  <a:blip r:embed="rId5"/>
-                  <a:stretch>
-                    <a:fillRect b="-6667"/>
-                  </a:stretch>
-                </a:blipFill>
-              </p:spPr>
-              <p:txBody>
-                <a:bodyPr/>
-                <a:lstStyle/>
-                <a:p>
-                  <a:r>
-                    <a:rPr lang="en-CN">
-                      <a:noFill/>
-                    </a:rPr>
-                    <a:t> </a:t>
-                  </a:r>
-                </a:p>
-              </p:txBody>
-            </p:sp>
-          </mc:Fallback>
-        </mc:AlternateContent>
+        <p:sp>
+          <p:nvSpPr>
+            <p:cNvPr id="5" name="Rounded Rectangle 4">
+              <a:extLst>
+                <a:ext uri="{FF2B5EF4-FFF2-40B4-BE49-F238E27FC236}">
+                  <a16:creationId xmlns:a16="http://schemas.microsoft.com/office/drawing/2014/main" id="{FD653E7B-EDD0-77AE-51CE-8AA6112E426E}"/>
+                </a:ext>
+              </a:extLst>
+            </p:cNvPr>
+            <p:cNvSpPr/>
+            <p:nvPr/>
+          </p:nvSpPr>
+          <p:spPr>
+            <a:xfrm>
+              <a:off x="154382" y="1666710"/>
+              <a:ext cx="1430921" cy="932566"/>
+            </a:xfrm>
+            <a:prstGeom prst="roundRect">
+              <a:avLst/>
+            </a:prstGeom>
+            <a:noFill/>
+          </p:spPr>
+          <p:style>
+            <a:lnRef idx="2">
+              <a:schemeClr val="accent1">
+                <a:shade val="15000"/>
+              </a:schemeClr>
+            </a:lnRef>
+            <a:fillRef idx="1">
+              <a:schemeClr val="accent1"/>
+            </a:fillRef>
+            <a:effectRef idx="0">
+              <a:schemeClr val="accent1"/>
+            </a:effectRef>
+            <a:fontRef idx="minor">
+              <a:schemeClr val="lt1"/>
+            </a:fontRef>
+          </p:style>
+          <p:txBody>
+            <a:bodyPr rtlCol="0" anchor="ctr"/>
+            <a:lstStyle/>
+            <a:p>
+              <a:pPr algn="ctr"/>
+              <a:r>
+                <a:rPr lang="en-US" sz="1600" dirty="0">
+                  <a:solidFill>
+                    <a:schemeClr val="tx1"/>
+                  </a:solidFill>
+                </a:rPr>
+                <a:t>Never Incarcerated PWID (D)</a:t>
+              </a:r>
+            </a:p>
+          </p:txBody>
+        </p:sp>
+        <p:sp>
+          <p:nvSpPr>
+            <p:cNvPr id="6" name="Rounded Rectangle 5">
+              <a:extLst>
+                <a:ext uri="{FF2B5EF4-FFF2-40B4-BE49-F238E27FC236}">
+                  <a16:creationId xmlns:a16="http://schemas.microsoft.com/office/drawing/2014/main" id="{819844E7-9540-E3AC-BF93-3910B9C71C1B}"/>
+                </a:ext>
+              </a:extLst>
+            </p:cNvPr>
+            <p:cNvSpPr/>
+            <p:nvPr/>
+          </p:nvSpPr>
+          <p:spPr>
+            <a:xfrm>
+              <a:off x="2534112" y="1666710"/>
+              <a:ext cx="1430921" cy="932566"/>
+            </a:xfrm>
+            <a:prstGeom prst="roundRect">
+              <a:avLst/>
+            </a:prstGeom>
+            <a:noFill/>
+          </p:spPr>
+          <p:style>
+            <a:lnRef idx="2">
+              <a:schemeClr val="accent1">
+                <a:shade val="15000"/>
+              </a:schemeClr>
+            </a:lnRef>
+            <a:fillRef idx="1">
+              <a:schemeClr val="accent1"/>
+            </a:fillRef>
+            <a:effectRef idx="0">
+              <a:schemeClr val="accent1"/>
+            </a:effectRef>
+            <a:fontRef idx="minor">
+              <a:schemeClr val="lt1"/>
+            </a:fontRef>
+          </p:style>
+          <p:txBody>
+            <a:bodyPr rtlCol="0" anchor="ctr"/>
+            <a:lstStyle/>
+            <a:p>
+              <a:pPr algn="ctr"/>
+              <a:r>
+                <a:rPr lang="en-US" sz="1600" dirty="0">
+                  <a:solidFill>
+                    <a:schemeClr val="tx1"/>
+                  </a:solidFill>
+                </a:rPr>
+                <a:t>Currently Incarcerated Ex-PWID (J)</a:t>
+              </a:r>
+            </a:p>
+          </p:txBody>
+        </p:sp>
+        <p:sp>
+          <p:nvSpPr>
+            <p:cNvPr id="7" name="Rounded Rectangle 6">
+              <a:extLst>
+                <a:ext uri="{FF2B5EF4-FFF2-40B4-BE49-F238E27FC236}">
+                  <a16:creationId xmlns:a16="http://schemas.microsoft.com/office/drawing/2014/main" id="{041BFD32-1EFE-6BC5-FF1F-6A4D9B19CCF2}"/>
+                </a:ext>
+              </a:extLst>
+            </p:cNvPr>
+            <p:cNvSpPr/>
+            <p:nvPr/>
+          </p:nvSpPr>
+          <p:spPr>
+            <a:xfrm>
+              <a:off x="4913843" y="1666710"/>
+              <a:ext cx="1430921" cy="932566"/>
+            </a:xfrm>
+            <a:prstGeom prst="roundRect">
+              <a:avLst/>
+            </a:prstGeom>
+            <a:noFill/>
+          </p:spPr>
+          <p:style>
+            <a:lnRef idx="2">
+              <a:schemeClr val="accent1">
+                <a:shade val="15000"/>
+              </a:schemeClr>
+            </a:lnRef>
+            <a:fillRef idx="1">
+              <a:schemeClr val="accent1"/>
+            </a:fillRef>
+            <a:effectRef idx="0">
+              <a:schemeClr val="accent1"/>
+            </a:effectRef>
+            <a:fontRef idx="minor">
+              <a:schemeClr val="lt1"/>
+            </a:fontRef>
+          </p:style>
+          <p:txBody>
+            <a:bodyPr rtlCol="0" anchor="ctr"/>
+            <a:lstStyle/>
+            <a:p>
+              <a:pPr algn="ctr"/>
+              <a:r>
+                <a:rPr lang="en-US" sz="1600" dirty="0">
+                  <a:solidFill>
+                    <a:schemeClr val="tx1"/>
+                  </a:solidFill>
+                </a:rPr>
+                <a:t>Formerly Incarcerated PWID (F)</a:t>
+              </a:r>
+            </a:p>
+          </p:txBody>
+        </p:sp>
+        <p:sp>
+          <p:nvSpPr>
+            <p:cNvPr id="10" name="Rounded Rectangle 9">
+              <a:extLst>
+                <a:ext uri="{FF2B5EF4-FFF2-40B4-BE49-F238E27FC236}">
+                  <a16:creationId xmlns:a16="http://schemas.microsoft.com/office/drawing/2014/main" id="{FCA5B2CD-C485-3480-BC8E-46542ED96A56}"/>
+                </a:ext>
+              </a:extLst>
+            </p:cNvPr>
+            <p:cNvSpPr/>
+            <p:nvPr/>
+          </p:nvSpPr>
+          <p:spPr>
+            <a:xfrm>
+              <a:off x="4913843" y="2980664"/>
+              <a:ext cx="1430921" cy="932566"/>
+            </a:xfrm>
+            <a:prstGeom prst="roundRect">
+              <a:avLst/>
+            </a:prstGeom>
+            <a:noFill/>
+          </p:spPr>
+          <p:style>
+            <a:lnRef idx="2">
+              <a:schemeClr val="accent1">
+                <a:shade val="15000"/>
+              </a:schemeClr>
+            </a:lnRef>
+            <a:fillRef idx="1">
+              <a:schemeClr val="accent1"/>
+            </a:fillRef>
+            <a:effectRef idx="0">
+              <a:schemeClr val="accent1"/>
+            </a:effectRef>
+            <a:fontRef idx="minor">
+              <a:schemeClr val="lt1"/>
+            </a:fontRef>
+          </p:style>
+          <p:txBody>
+            <a:bodyPr rtlCol="0" anchor="ctr"/>
+            <a:lstStyle/>
+            <a:p>
+              <a:pPr algn="ctr"/>
+              <a:r>
+                <a:rPr lang="en-US" dirty="0">
+                  <a:solidFill>
+                    <a:schemeClr val="tx1"/>
+                  </a:solidFill>
+                </a:rPr>
+                <a:t>Ex-PWID (X)</a:t>
+              </a:r>
+            </a:p>
+          </p:txBody>
+        </p:sp>
         <p:cxnSp>
           <p:nvCxnSpPr>
-            <p:cNvPr id="65" name="Curved Connector 64">
+            <p:cNvPr id="12" name="Straight Arrow Connector 11">
               <a:extLst>
                 <a:ext uri="{FF2B5EF4-FFF2-40B4-BE49-F238E27FC236}">
-                  <a16:creationId xmlns:a16="http://schemas.microsoft.com/office/drawing/2014/main" id="{C42FE247-1A73-33EF-C4AB-0B495F8E7744}"/>
+                  <a16:creationId xmlns:a16="http://schemas.microsoft.com/office/drawing/2014/main" id="{4A8A19BD-FD31-2903-FC14-E9F33F686746}"/>
                 </a:ext>
               </a:extLst>
             </p:cNvPr>
             <p:cNvCxnSpPr>
               <a:cxnSpLocks/>
-              <a:stCxn id="25" idx="2"/>
+              <a:stCxn id="5" idx="3"/>
+              <a:endCxn id="6" idx="1"/>
             </p:cNvCxnSpPr>
             <p:nvPr/>
           </p:nvCxnSpPr>
           <p:spPr>
-            <a:xfrm rot="16200000" flipH="1">
-              <a:off x="1453531" y="5741276"/>
-              <a:ext cx="273788" cy="339422"/>
+            <a:xfrm>
+              <a:off x="1585303" y="2132993"/>
+              <a:ext cx="948809" cy="0"/>
             </a:xfrm>
-            <a:prstGeom prst="curvedConnector2">
+            <a:prstGeom prst="straightConnector1">
               <a:avLst/>
             </a:prstGeom>
             <a:ln>
-              <a:solidFill>
-                <a:schemeClr val="tx1"/>
-              </a:solidFill>
               <a:tailEnd type="triangle"/>
             </a:ln>
           </p:spPr>
           <p:style>
             <a:lnRef idx="2">
-              <a:schemeClr val="accent1"/>
+              <a:schemeClr val="dk1"/>
             </a:lnRef>
             <a:fillRef idx="0">
-              <a:schemeClr val="accent1"/>
+              <a:schemeClr val="dk1"/>
             </a:fillRef>
             <a:effectRef idx="1">
-              <a:schemeClr val="accent1"/>
+              <a:schemeClr val="dk1"/>
             </a:effectRef>
             <a:fontRef idx="minor">
               <a:schemeClr val="tx1"/>
             </a:fontRef>
           </p:style>
         </p:cxnSp>
-        <mc:AlternateContent xmlns:mc="http://schemas.openxmlformats.org/markup-compatibility/2006" xmlns:a14="http://schemas.microsoft.com/office/drawing/2010/main">
-          <mc:Choice Requires="a14">
-            <p:sp>
-              <p:nvSpPr>
-                <p:cNvPr id="66" name="TextBox 65">
-                  <a:extLst>
-                    <a:ext uri="{FF2B5EF4-FFF2-40B4-BE49-F238E27FC236}">
-                      <a16:creationId xmlns:a16="http://schemas.microsoft.com/office/drawing/2014/main" id="{1596A452-07E1-6F1E-4008-C61039585127}"/>
-                    </a:ext>
-                  </a:extLst>
-                </p:cNvPr>
-                <p:cNvSpPr txBox="1"/>
-                <p:nvPr/>
-              </p:nvSpPr>
-              <p:spPr>
-                <a:xfrm>
-                  <a:off x="1679419" y="5858156"/>
-                  <a:ext cx="364010" cy="369332"/>
-                </a:xfrm>
-                <a:prstGeom prst="rect">
-                  <a:avLst/>
-                </a:prstGeom>
-                <a:noFill/>
-              </p:spPr>
-              <p:txBody>
-                <a:bodyPr wrap="square" rtlCol="0">
-                  <a:spAutoFit/>
-                </a:bodyPr>
-                <a:lstStyle/>
-                <a:p>
-                  <a:pPr/>
-                  <a14:m>
-                    <m:oMathPara xmlns:m="http://schemas.openxmlformats.org/officeDocument/2006/math">
-                      <m:oMathParaPr>
-                        <m:jc m:val="centerGroup"/>
-                      </m:oMathParaPr>
-                      <m:oMath xmlns:m="http://schemas.openxmlformats.org/officeDocument/2006/math">
-                        <m:r>
-                          <a:rPr lang="en-US" b="0" i="1" smtClean="0">
-                            <a:latin typeface="Cambria Math" panose="02040503050406030204" pitchFamily="18" charset="0"/>
-                          </a:rPr>
-                          <m:t>𝜇</m:t>
-                        </m:r>
-                      </m:oMath>
-                    </m:oMathPara>
-                  </a14:m>
-                  <a:endParaRPr lang="en-CN" dirty="0"/>
-                </a:p>
-              </p:txBody>
-            </p:sp>
-          </mc:Choice>
-          <mc:Fallback xmlns="">
-            <p:sp>
-              <p:nvSpPr>
-                <p:cNvPr id="66" name="TextBox 65">
-                  <a:extLst>
-                    <a:ext uri="{FF2B5EF4-FFF2-40B4-BE49-F238E27FC236}">
-                      <a16:creationId xmlns:a16="http://schemas.microsoft.com/office/drawing/2014/main" id="{1596A452-07E1-6F1E-4008-C61039585127}"/>
-                    </a:ext>
-                  </a:extLst>
-                </p:cNvPr>
-                <p:cNvSpPr txBox="1">
-                  <a:spLocks noRot="1" noChangeAspect="1" noMove="1" noResize="1" noEditPoints="1" noAdjustHandles="1" noChangeArrowheads="1" noChangeShapeType="1" noTextEdit="1"/>
-                </p:cNvSpPr>
-                <p:nvPr/>
-              </p:nvSpPr>
-              <p:spPr>
-                <a:xfrm>
-                  <a:off x="1679419" y="5858156"/>
-                  <a:ext cx="364010" cy="369332"/>
-                </a:xfrm>
-                <a:prstGeom prst="rect">
-                  <a:avLst/>
-                </a:prstGeom>
-                <a:blipFill>
-                  <a:blip r:embed="rId6"/>
-                  <a:stretch>
-                    <a:fillRect b="-6667"/>
-                  </a:stretch>
-                </a:blipFill>
-              </p:spPr>
-              <p:txBody>
-                <a:bodyPr/>
-                <a:lstStyle/>
-                <a:p>
-                  <a:r>
-                    <a:rPr lang="en-CN">
-                      <a:noFill/>
-                    </a:rPr>
-                    <a:t> </a:t>
-                  </a:r>
-                </a:p>
-              </p:txBody>
-            </p:sp>
-          </mc:Fallback>
-        </mc:AlternateContent>
         <p:cxnSp>
           <p:nvCxnSpPr>
-            <p:cNvPr id="68" name="Curved Connector 67">
+            <p:cNvPr id="13" name="Straight Arrow Connector 12">
               <a:extLst>
                 <a:ext uri="{FF2B5EF4-FFF2-40B4-BE49-F238E27FC236}">
-                  <a16:creationId xmlns:a16="http://schemas.microsoft.com/office/drawing/2014/main" id="{5C7AE58D-FF5F-A11C-5B52-D2DB3EB60A55}"/>
+                  <a16:creationId xmlns:a16="http://schemas.microsoft.com/office/drawing/2014/main" id="{079607AF-73EA-1DCF-9A03-259F107FFF77}"/>
+                </a:ext>
+              </a:extLst>
+            </p:cNvPr>
+            <p:cNvCxnSpPr>
+              <a:cxnSpLocks/>
+              <a:stCxn id="6" idx="3"/>
+              <a:endCxn id="7" idx="1"/>
+            </p:cNvCxnSpPr>
+            <p:nvPr/>
+          </p:nvCxnSpPr>
+          <p:spPr>
+            <a:xfrm>
+              <a:off x="3965033" y="2132993"/>
+              <a:ext cx="948810" cy="0"/>
+            </a:xfrm>
+            <a:prstGeom prst="straightConnector1">
+              <a:avLst/>
+            </a:prstGeom>
+            <a:ln>
+              <a:tailEnd type="triangle"/>
+            </a:ln>
+          </p:spPr>
+          <p:style>
+            <a:lnRef idx="2">
+              <a:schemeClr val="dk1"/>
+            </a:lnRef>
+            <a:fillRef idx="0">
+              <a:schemeClr val="dk1"/>
+            </a:fillRef>
+            <a:effectRef idx="1">
+              <a:schemeClr val="dk1"/>
+            </a:effectRef>
+            <a:fontRef idx="minor">
+              <a:schemeClr val="tx1"/>
+            </a:fontRef>
+          </p:style>
+        </p:cxnSp>
+        <p:cxnSp>
+          <p:nvCxnSpPr>
+            <p:cNvPr id="34" name="Straight Arrow Connector 33">
+              <a:extLst>
+                <a:ext uri="{FF2B5EF4-FFF2-40B4-BE49-F238E27FC236}">
+                  <a16:creationId xmlns:a16="http://schemas.microsoft.com/office/drawing/2014/main" id="{38D6D77E-E583-1156-DC1E-D29B1E76AA43}"/>
                 </a:ext>
               </a:extLst>
             </p:cNvPr>
@@ -5553,43 +4559,40 @@
             <p:nvPr/>
           </p:nvCxnSpPr>
           <p:spPr>
-            <a:xfrm rot="16200000" flipH="1">
-              <a:off x="4409166" y="5741276"/>
-              <a:ext cx="273788" cy="339422"/>
+            <a:xfrm>
+              <a:off x="869842" y="1433547"/>
+              <a:ext cx="1183" cy="220098"/>
             </a:xfrm>
-            <a:prstGeom prst="curvedConnector2">
+            <a:prstGeom prst="straightConnector1">
               <a:avLst/>
             </a:prstGeom>
             <a:ln>
-              <a:solidFill>
-                <a:schemeClr val="tx1"/>
-              </a:solidFill>
               <a:tailEnd type="triangle"/>
             </a:ln>
           </p:spPr>
           <p:style>
             <a:lnRef idx="2">
-              <a:schemeClr val="accent1"/>
+              <a:schemeClr val="dk1"/>
             </a:lnRef>
             <a:fillRef idx="0">
-              <a:schemeClr val="accent1"/>
+              <a:schemeClr val="dk1"/>
             </a:fillRef>
             <a:effectRef idx="1">
-              <a:schemeClr val="accent1"/>
+              <a:schemeClr val="dk1"/>
             </a:effectRef>
             <a:fontRef idx="minor">
               <a:schemeClr val="tx1"/>
             </a:fontRef>
           </p:style>
         </p:cxnSp>
-        <mc:AlternateContent xmlns:mc="http://schemas.openxmlformats.org/markup-compatibility/2006" xmlns:a14="http://schemas.microsoft.com/office/drawing/2010/main">
-          <mc:Choice Requires="a14">
+        <mc:AlternateContent xmlns:mc="http://schemas.openxmlformats.org/markup-compatibility/2006">
+          <mc:Choice xmlns:a14="http://schemas.microsoft.com/office/drawing/2010/main" Requires="a14">
             <p:sp>
               <p:nvSpPr>
-                <p:cNvPr id="69" name="TextBox 68">
+                <p:cNvPr id="40" name="TextBox 39">
                   <a:extLst>
                     <a:ext uri="{FF2B5EF4-FFF2-40B4-BE49-F238E27FC236}">
-                      <a16:creationId xmlns:a16="http://schemas.microsoft.com/office/drawing/2014/main" id="{726819B3-0C1E-A0D6-86F1-707AB232866A}"/>
+                      <a16:creationId xmlns:a16="http://schemas.microsoft.com/office/drawing/2014/main" id="{D4F78712-9DC4-F586-F7C7-D31B31234499}"/>
                     </a:ext>
                   </a:extLst>
                 </p:cNvPr>
@@ -5598,147 +4601,7 @@
               </p:nvSpPr>
               <p:spPr>
                 <a:xfrm>
-                  <a:off x="4635054" y="5858156"/>
-                  <a:ext cx="364010" cy="369332"/>
-                </a:xfrm>
-                <a:prstGeom prst="rect">
-                  <a:avLst/>
-                </a:prstGeom>
-                <a:noFill/>
-              </p:spPr>
-              <p:txBody>
-                <a:bodyPr wrap="square" rtlCol="0">
-                  <a:spAutoFit/>
-                </a:bodyPr>
-                <a:lstStyle/>
-                <a:p>
-                  <a:pPr/>
-                  <a14:m>
-                    <m:oMathPara xmlns:m="http://schemas.openxmlformats.org/officeDocument/2006/math">
-                      <m:oMathParaPr>
-                        <m:jc m:val="centerGroup"/>
-                      </m:oMathParaPr>
-                      <m:oMath xmlns:m="http://schemas.openxmlformats.org/officeDocument/2006/math">
-                        <m:r>
-                          <a:rPr lang="en-US" b="0" i="1" smtClean="0">
-                            <a:latin typeface="Cambria Math" panose="02040503050406030204" pitchFamily="18" charset="0"/>
-                          </a:rPr>
-                          <m:t>𝜇</m:t>
-                        </m:r>
-                      </m:oMath>
-                    </m:oMathPara>
-                  </a14:m>
-                  <a:endParaRPr lang="en-CN" dirty="0"/>
-                </a:p>
-              </p:txBody>
-            </p:sp>
-          </mc:Choice>
-          <mc:Fallback xmlns="">
-            <p:sp>
-              <p:nvSpPr>
-                <p:cNvPr id="69" name="TextBox 68">
-                  <a:extLst>
-                    <a:ext uri="{FF2B5EF4-FFF2-40B4-BE49-F238E27FC236}">
-                      <a16:creationId xmlns:a16="http://schemas.microsoft.com/office/drawing/2014/main" id="{726819B3-0C1E-A0D6-86F1-707AB232866A}"/>
-                    </a:ext>
-                  </a:extLst>
-                </p:cNvPr>
-                <p:cNvSpPr txBox="1">
-                  <a:spLocks noRot="1" noChangeAspect="1" noMove="1" noResize="1" noEditPoints="1" noAdjustHandles="1" noChangeArrowheads="1" noChangeShapeType="1" noTextEdit="1"/>
-                </p:cNvSpPr>
-                <p:nvPr/>
-              </p:nvSpPr>
-              <p:spPr>
-                <a:xfrm>
-                  <a:off x="4635054" y="5858156"/>
-                  <a:ext cx="364010" cy="369332"/>
-                </a:xfrm>
-                <a:prstGeom prst="rect">
-                  <a:avLst/>
-                </a:prstGeom>
-                <a:blipFill>
-                  <a:blip r:embed="rId7"/>
-                  <a:stretch>
-                    <a:fillRect b="-6667"/>
-                  </a:stretch>
-                </a:blipFill>
-              </p:spPr>
-              <p:txBody>
-                <a:bodyPr/>
-                <a:lstStyle/>
-                <a:p>
-                  <a:r>
-                    <a:rPr lang="en-CN">
-                      <a:noFill/>
-                    </a:rPr>
-                    <a:t> </a:t>
-                  </a:r>
-                </a:p>
-              </p:txBody>
-            </p:sp>
-          </mc:Fallback>
-        </mc:AlternateContent>
-        <p:cxnSp>
-          <p:nvCxnSpPr>
-            <p:cNvPr id="70" name="Curved Connector 69">
-              <a:extLst>
-                <a:ext uri="{FF2B5EF4-FFF2-40B4-BE49-F238E27FC236}">
-                  <a16:creationId xmlns:a16="http://schemas.microsoft.com/office/drawing/2014/main" id="{2DA06626-387C-09E3-BA3A-B012FFDB05DE}"/>
-                </a:ext>
-              </a:extLst>
-            </p:cNvPr>
-            <p:cNvCxnSpPr>
-              <a:cxnSpLocks/>
-            </p:cNvCxnSpPr>
-            <p:nvPr/>
-          </p:nvCxnSpPr>
-          <p:spPr>
-            <a:xfrm rot="16200000" flipH="1">
-              <a:off x="7459291" y="5746335"/>
-              <a:ext cx="273788" cy="339422"/>
-            </a:xfrm>
-            <a:prstGeom prst="curvedConnector2">
-              <a:avLst/>
-            </a:prstGeom>
-            <a:ln>
-              <a:solidFill>
-                <a:schemeClr val="tx1"/>
-              </a:solidFill>
-              <a:tailEnd type="triangle"/>
-            </a:ln>
-          </p:spPr>
-          <p:style>
-            <a:lnRef idx="2">
-              <a:schemeClr val="accent1"/>
-            </a:lnRef>
-            <a:fillRef idx="0">
-              <a:schemeClr val="accent1"/>
-            </a:fillRef>
-            <a:effectRef idx="1">
-              <a:schemeClr val="accent1"/>
-            </a:effectRef>
-            <a:fontRef idx="minor">
-              <a:schemeClr val="tx1"/>
-            </a:fontRef>
-          </p:style>
-        </p:cxnSp>
-        <mc:AlternateContent xmlns:mc="http://schemas.openxmlformats.org/markup-compatibility/2006" xmlns:a14="http://schemas.microsoft.com/office/drawing/2010/main">
-          <mc:Choice Requires="a14">
-            <p:sp>
-              <p:nvSpPr>
-                <p:cNvPr id="71" name="TextBox 70">
-                  <a:extLst>
-                    <a:ext uri="{FF2B5EF4-FFF2-40B4-BE49-F238E27FC236}">
-                      <a16:creationId xmlns:a16="http://schemas.microsoft.com/office/drawing/2014/main" id="{5D409464-2C46-8B96-26B0-D88D7D9238E1}"/>
-                    </a:ext>
-                  </a:extLst>
-                </p:cNvPr>
-                <p:cNvSpPr txBox="1"/>
-                <p:nvPr/>
-              </p:nvSpPr>
-              <p:spPr>
-                <a:xfrm>
-                  <a:off x="7685178" y="5863215"/>
+                  <a:off x="377187" y="1087508"/>
                   <a:ext cx="985309" cy="369332"/>
                 </a:xfrm>
                 <a:prstGeom prst="rect">
@@ -5759,18 +4622,6 @@
                         <m:jc m:val="centerGroup"/>
                       </m:oMathParaPr>
                       <m:oMath xmlns:m="http://schemas.openxmlformats.org/officeDocument/2006/math">
-                        <m:r>
-                          <a:rPr lang="en-US" i="1" smtClean="0">
-                            <a:latin typeface="Cambria Math" panose="02040503050406030204" pitchFamily="18" charset="0"/>
-                          </a:rPr>
-                          <m:t>𝜇</m:t>
-                        </m:r>
-                        <m:r>
-                          <a:rPr lang="en-US" b="0" i="1" smtClean="0">
-                            <a:latin typeface="Cambria Math" panose="02040503050406030204" pitchFamily="18" charset="0"/>
-                          </a:rPr>
-                          <m:t>+</m:t>
-                        </m:r>
                         <m:sSub>
                           <m:sSubPr>
                             <m:ctrlPr>
@@ -5784,7 +4635,7 @@
                               <a:rPr lang="en-US" b="0" i="1" smtClean="0">
                                 <a:latin typeface="Cambria Math" panose="02040503050406030204" pitchFamily="18" charset="0"/>
                               </a:rPr>
-                              <m:t>𝜇</m:t>
+                              <m:t>𝛽</m:t>
                             </m:r>
                           </m:e>
                           <m:sub>
@@ -5792,10 +4643,28 @@
                               <a:rPr lang="en-US" b="0" i="1" smtClean="0">
                                 <a:latin typeface="Cambria Math" panose="02040503050406030204" pitchFamily="18" charset="0"/>
                               </a:rPr>
-                              <m:t>𝐷𝐶</m:t>
+                              <m:t>𝑖</m:t>
                             </m:r>
                           </m:sub>
                         </m:sSub>
+                        <m:r>
+                          <a:rPr lang="en-US" b="0" i="1" smtClean="0">
+                            <a:latin typeface="Cambria Math" panose="02040503050406030204" pitchFamily="18" charset="0"/>
+                          </a:rPr>
+                          <m:t>(</m:t>
+                        </m:r>
+                        <m:r>
+                          <a:rPr lang="en-US" b="0" i="1" smtClean="0">
+                            <a:latin typeface="Cambria Math" panose="02040503050406030204" pitchFamily="18" charset="0"/>
+                          </a:rPr>
+                          <m:t>𝑡</m:t>
+                        </m:r>
+                        <m:r>
+                          <a:rPr lang="en-US" b="0" i="1" smtClean="0">
+                            <a:latin typeface="Cambria Math" panose="02040503050406030204" pitchFamily="18" charset="0"/>
+                          </a:rPr>
+                          <m:t>)</m:t>
+                        </m:r>
                       </m:oMath>
                     </m:oMathPara>
                   </a14:m>
@@ -5804,13 +4673,13 @@
               </p:txBody>
             </p:sp>
           </mc:Choice>
-          <mc:Fallback xmlns="">
+          <mc:Fallback>
             <p:sp>
               <p:nvSpPr>
-                <p:cNvPr id="71" name="TextBox 70">
+                <p:cNvPr id="40" name="TextBox 39">
                   <a:extLst>
                     <a:ext uri="{FF2B5EF4-FFF2-40B4-BE49-F238E27FC236}">
-                      <a16:creationId xmlns:a16="http://schemas.microsoft.com/office/drawing/2014/main" id="{5D409464-2C46-8B96-26B0-D88D7D9238E1}"/>
+                      <a16:creationId xmlns:a16="http://schemas.microsoft.com/office/drawing/2014/main" id="{D4F78712-9DC4-F586-F7C7-D31B31234499}"/>
                     </a:ext>
                   </a:extLst>
                 </p:cNvPr>
@@ -5821,16 +4690,16 @@
               </p:nvSpPr>
               <p:spPr>
                 <a:xfrm>
-                  <a:off x="7685178" y="5863215"/>
+                  <a:off x="377187" y="1087508"/>
                   <a:ext cx="985309" cy="369332"/>
                 </a:xfrm>
                 <a:prstGeom prst="rect">
                   <a:avLst/>
                 </a:prstGeom>
                 <a:blipFill>
-                  <a:blip r:embed="rId8"/>
+                  <a:blip r:embed="rId4"/>
                   <a:stretch>
-                    <a:fillRect b="-6667"/>
+                    <a:fillRect b="-16667"/>
                   </a:stretch>
                 </a:blipFill>
               </p:spPr>
@@ -5839,7 +4708,7 @@
                 <a:lstStyle/>
                 <a:p>
                   <a:r>
-                    <a:rPr lang="en-CN">
+                    <a:rPr lang="en-US">
                       <a:noFill/>
                     </a:rPr>
                     <a:t> </a:t>
@@ -5849,58 +4718,14 @@
             </p:sp>
           </mc:Fallback>
         </mc:AlternateContent>
-        <p:cxnSp>
-          <p:nvCxnSpPr>
-            <p:cNvPr id="72" name="Curved Connector 71">
-              <a:extLst>
-                <a:ext uri="{FF2B5EF4-FFF2-40B4-BE49-F238E27FC236}">
-                  <a16:creationId xmlns:a16="http://schemas.microsoft.com/office/drawing/2014/main" id="{CF7AC566-439B-0BEA-4CAF-8263A3EF9023}"/>
-                </a:ext>
-              </a:extLst>
-            </p:cNvPr>
-            <p:cNvCxnSpPr>
-              <a:cxnSpLocks/>
-            </p:cNvCxnSpPr>
-            <p:nvPr/>
-          </p:nvCxnSpPr>
-          <p:spPr>
-            <a:xfrm rot="16200000" flipH="1">
-              <a:off x="10478673" y="5741276"/>
-              <a:ext cx="273788" cy="339422"/>
-            </a:xfrm>
-            <a:prstGeom prst="curvedConnector2">
-              <a:avLst/>
-            </a:prstGeom>
-            <a:ln>
-              <a:solidFill>
-                <a:schemeClr val="tx1"/>
-              </a:solidFill>
-              <a:tailEnd type="triangle"/>
-            </a:ln>
-          </p:spPr>
-          <p:style>
-            <a:lnRef idx="2">
-              <a:schemeClr val="accent1"/>
-            </a:lnRef>
-            <a:fillRef idx="0">
-              <a:schemeClr val="accent1"/>
-            </a:fillRef>
-            <a:effectRef idx="1">
-              <a:schemeClr val="accent1"/>
-            </a:effectRef>
-            <a:fontRef idx="minor">
-              <a:schemeClr val="tx1"/>
-            </a:fontRef>
-          </p:style>
-        </p:cxnSp>
-        <mc:AlternateContent xmlns:mc="http://schemas.openxmlformats.org/markup-compatibility/2006" xmlns:a14="http://schemas.microsoft.com/office/drawing/2010/main">
-          <mc:Choice Requires="a14">
+        <mc:AlternateContent xmlns:mc="http://schemas.openxmlformats.org/markup-compatibility/2006">
+          <mc:Choice xmlns:a14="http://schemas.microsoft.com/office/drawing/2010/main" Requires="a14">
             <p:sp>
               <p:nvSpPr>
-                <p:cNvPr id="73" name="TextBox 72">
+                <p:cNvPr id="42" name="TextBox 41">
                   <a:extLst>
                     <a:ext uri="{FF2B5EF4-FFF2-40B4-BE49-F238E27FC236}">
-                      <a16:creationId xmlns:a16="http://schemas.microsoft.com/office/drawing/2014/main" id="{783980BE-DBC6-5F49-2385-8CA6FA4FF44E}"/>
+                      <a16:creationId xmlns:a16="http://schemas.microsoft.com/office/drawing/2014/main" id="{0FB207EF-8F19-3523-03C3-4C657BA3BDC7}"/>
                     </a:ext>
                   </a:extLst>
                 </p:cNvPr>
@@ -5909,8 +4734,8 @@
               </p:nvSpPr>
               <p:spPr>
                 <a:xfrm>
-                  <a:off x="10704560" y="5858156"/>
-                  <a:ext cx="1072108" cy="369332"/>
+                  <a:off x="1642142" y="1753209"/>
+                  <a:ext cx="985309" cy="381515"/>
                 </a:xfrm>
                 <a:prstGeom prst="rect">
                   <a:avLst/>
@@ -5930,18 +4755,6 @@
                         <m:jc m:val="centerGroup"/>
                       </m:oMathParaPr>
                       <m:oMath xmlns:m="http://schemas.openxmlformats.org/officeDocument/2006/math">
-                        <m:r>
-                          <a:rPr lang="en-US" b="0" i="1" smtClean="0">
-                            <a:latin typeface="Cambria Math" panose="02040503050406030204" pitchFamily="18" charset="0"/>
-                          </a:rPr>
-                          <m:t>𝜇</m:t>
-                        </m:r>
-                        <m:r>
-                          <a:rPr lang="en-US" b="0" i="1" smtClean="0">
-                            <a:latin typeface="Cambria Math" panose="02040503050406030204" pitchFamily="18" charset="0"/>
-                          </a:rPr>
-                          <m:t>+</m:t>
-                        </m:r>
                         <m:sSub>
                           <m:sSubPr>
                             <m:ctrlPr>
@@ -5955,7 +4768,7 @@
                               <a:rPr lang="en-US" b="0" i="1" smtClean="0">
                                 <a:latin typeface="Cambria Math" panose="02040503050406030204" pitchFamily="18" charset="0"/>
                               </a:rPr>
-                              <m:t>𝜇</m:t>
+                              <m:t>𝜆</m:t>
                             </m:r>
                           </m:e>
                           <m:sub>
@@ -5963,7 +4776,13 @@
                               <a:rPr lang="en-US" b="0" i="1" smtClean="0">
                                 <a:latin typeface="Cambria Math" panose="02040503050406030204" pitchFamily="18" charset="0"/>
                               </a:rPr>
-                              <m:t>𝐻𝐶𝐶</m:t>
+                              <m:t>1,</m:t>
+                            </m:r>
+                            <m:r>
+                              <a:rPr lang="en-US" b="0" i="1" smtClean="0">
+                                <a:latin typeface="Cambria Math" panose="02040503050406030204" pitchFamily="18" charset="0"/>
+                              </a:rPr>
+                              <m:t>𝑖</m:t>
                             </m:r>
                           </m:sub>
                         </m:sSub>
@@ -5975,13 +4794,13 @@
               </p:txBody>
             </p:sp>
           </mc:Choice>
-          <mc:Fallback xmlns="">
+          <mc:Fallback>
             <p:sp>
               <p:nvSpPr>
-                <p:cNvPr id="73" name="TextBox 72">
+                <p:cNvPr id="42" name="TextBox 41">
                   <a:extLst>
                     <a:ext uri="{FF2B5EF4-FFF2-40B4-BE49-F238E27FC236}">
-                      <a16:creationId xmlns:a16="http://schemas.microsoft.com/office/drawing/2014/main" id="{783980BE-DBC6-5F49-2385-8CA6FA4FF44E}"/>
+                      <a16:creationId xmlns:a16="http://schemas.microsoft.com/office/drawing/2014/main" id="{0FB207EF-8F19-3523-03C3-4C657BA3BDC7}"/>
                     </a:ext>
                   </a:extLst>
                 </p:cNvPr>
@@ -5992,16 +4811,16 @@
               </p:nvSpPr>
               <p:spPr>
                 <a:xfrm>
-                  <a:off x="10704560" y="5858156"/>
-                  <a:ext cx="1072108" cy="369332"/>
+                  <a:off x="1642142" y="1753209"/>
+                  <a:ext cx="985309" cy="381515"/>
                 </a:xfrm>
                 <a:prstGeom prst="rect">
                   <a:avLst/>
                 </a:prstGeom>
                 <a:blipFill>
-                  <a:blip r:embed="rId9"/>
+                  <a:blip r:embed="rId5"/>
                   <a:stretch>
-                    <a:fillRect b="-6667"/>
+                    <a:fillRect/>
                   </a:stretch>
                 </a:blipFill>
               </p:spPr>
@@ -6010,7 +4829,7 @@
                 <a:lstStyle/>
                 <a:p>
                   <a:r>
-                    <a:rPr lang="en-CN">
+                    <a:rPr lang="en-US">
                       <a:noFill/>
                     </a:rPr>
                     <a:t> </a:t>
@@ -6020,58 +4839,14 @@
             </p:sp>
           </mc:Fallback>
         </mc:AlternateContent>
-        <p:cxnSp>
-          <p:nvCxnSpPr>
-            <p:cNvPr id="74" name="Curved Connector 73">
-              <a:extLst>
-                <a:ext uri="{FF2B5EF4-FFF2-40B4-BE49-F238E27FC236}">
-                  <a16:creationId xmlns:a16="http://schemas.microsoft.com/office/drawing/2014/main" id="{3F981598-8A0E-C535-DDE2-956658286662}"/>
-                </a:ext>
-              </a:extLst>
-            </p:cNvPr>
-            <p:cNvCxnSpPr>
-              <a:cxnSpLocks/>
-            </p:cNvCxnSpPr>
-            <p:nvPr/>
-          </p:nvCxnSpPr>
-          <p:spPr>
-            <a:xfrm rot="16200000" flipH="1">
-              <a:off x="10397955" y="2649742"/>
-              <a:ext cx="273788" cy="339422"/>
-            </a:xfrm>
-            <a:prstGeom prst="curvedConnector2">
-              <a:avLst/>
-            </a:prstGeom>
-            <a:ln>
-              <a:solidFill>
-                <a:schemeClr val="tx1"/>
-              </a:solidFill>
-              <a:tailEnd type="triangle"/>
-            </a:ln>
-          </p:spPr>
-          <p:style>
-            <a:lnRef idx="2">
-              <a:schemeClr val="accent1"/>
-            </a:lnRef>
-            <a:fillRef idx="0">
-              <a:schemeClr val="accent1"/>
-            </a:fillRef>
-            <a:effectRef idx="1">
-              <a:schemeClr val="accent1"/>
-            </a:effectRef>
-            <a:fontRef idx="minor">
-              <a:schemeClr val="tx1"/>
-            </a:fontRef>
-          </p:style>
-        </p:cxnSp>
-        <mc:AlternateContent xmlns:mc="http://schemas.openxmlformats.org/markup-compatibility/2006" xmlns:a14="http://schemas.microsoft.com/office/drawing/2010/main">
-          <mc:Choice Requires="a14">
+        <mc:AlternateContent xmlns:mc="http://schemas.openxmlformats.org/markup-compatibility/2006">
+          <mc:Choice xmlns:a14="http://schemas.microsoft.com/office/drawing/2010/main" Requires="a14">
             <p:sp>
               <p:nvSpPr>
-                <p:cNvPr id="75" name="TextBox 74">
+                <p:cNvPr id="43" name="TextBox 42">
                   <a:extLst>
                     <a:ext uri="{FF2B5EF4-FFF2-40B4-BE49-F238E27FC236}">
-                      <a16:creationId xmlns:a16="http://schemas.microsoft.com/office/drawing/2014/main" id="{9855D999-B57A-7DE3-94D4-AD2DE88D5860}"/>
+                      <a16:creationId xmlns:a16="http://schemas.microsoft.com/office/drawing/2014/main" id="{07AAB73D-E575-EEAD-AC8C-92897F1CB8AB}"/>
                     </a:ext>
                   </a:extLst>
                 </p:cNvPr>
@@ -6080,8 +4855,8 @@
               </p:nvSpPr>
               <p:spPr>
                 <a:xfrm>
-                  <a:off x="10623843" y="2766622"/>
-                  <a:ext cx="364010" cy="369332"/>
+                  <a:off x="3953134" y="968410"/>
+                  <a:ext cx="985309" cy="381515"/>
                 </a:xfrm>
                 <a:prstGeom prst="rect">
                   <a:avLst/>
@@ -6101,12 +4876,37 @@
                         <m:jc m:val="centerGroup"/>
                       </m:oMathParaPr>
                       <m:oMath xmlns:m="http://schemas.openxmlformats.org/officeDocument/2006/math">
-                        <m:r>
-                          <a:rPr lang="en-US" b="0" i="1" smtClean="0">
-                            <a:latin typeface="Cambria Math" panose="02040503050406030204" pitchFamily="18" charset="0"/>
-                          </a:rPr>
-                          <m:t>𝜇</m:t>
-                        </m:r>
+                        <m:sSub>
+                          <m:sSubPr>
+                            <m:ctrlPr>
+                              <a:rPr lang="en-US" b="0" i="1" smtClean="0">
+                                <a:latin typeface="Cambria Math" panose="02040503050406030204" pitchFamily="18" charset="0"/>
+                              </a:rPr>
+                            </m:ctrlPr>
+                          </m:sSubPr>
+                          <m:e>
+                            <m:r>
+                              <a:rPr lang="en-US" b="0" i="1" smtClean="0">
+                                <a:latin typeface="Cambria Math" panose="02040503050406030204" pitchFamily="18" charset="0"/>
+                              </a:rPr>
+                              <m:t>𝜆</m:t>
+                            </m:r>
+                          </m:e>
+                          <m:sub>
+                            <m:r>
+                              <a:rPr lang="en-US" b="0" i="1" smtClean="0">
+                                <a:latin typeface="Cambria Math" panose="02040503050406030204" pitchFamily="18" charset="0"/>
+                              </a:rPr>
+                              <m:t>3,</m:t>
+                            </m:r>
+                            <m:r>
+                              <a:rPr lang="en-US" b="0" i="1" smtClean="0">
+                                <a:latin typeface="Cambria Math" panose="02040503050406030204" pitchFamily="18" charset="0"/>
+                              </a:rPr>
+                              <m:t>𝑖</m:t>
+                            </m:r>
+                          </m:sub>
+                        </m:sSub>
                       </m:oMath>
                     </m:oMathPara>
                   </a14:m>
@@ -6115,13 +4915,13 @@
               </p:txBody>
             </p:sp>
           </mc:Choice>
-          <mc:Fallback xmlns="">
+          <mc:Fallback>
             <p:sp>
               <p:nvSpPr>
-                <p:cNvPr id="75" name="TextBox 74">
+                <p:cNvPr id="43" name="TextBox 42">
                   <a:extLst>
                     <a:ext uri="{FF2B5EF4-FFF2-40B4-BE49-F238E27FC236}">
-                      <a16:creationId xmlns:a16="http://schemas.microsoft.com/office/drawing/2014/main" id="{9855D999-B57A-7DE3-94D4-AD2DE88D5860}"/>
+                      <a16:creationId xmlns:a16="http://schemas.microsoft.com/office/drawing/2014/main" id="{07AAB73D-E575-EEAD-AC8C-92897F1CB8AB}"/>
                     </a:ext>
                   </a:extLst>
                 </p:cNvPr>
@@ -6132,16 +4932,16 @@
               </p:nvSpPr>
               <p:spPr>
                 <a:xfrm>
-                  <a:off x="10623843" y="2766622"/>
-                  <a:ext cx="364010" cy="369332"/>
+                  <a:off x="3953134" y="968410"/>
+                  <a:ext cx="985309" cy="381515"/>
                 </a:xfrm>
                 <a:prstGeom prst="rect">
                   <a:avLst/>
                 </a:prstGeom>
                 <a:blipFill>
-                  <a:blip r:embed="rId10"/>
+                  <a:blip r:embed="rId6"/>
                   <a:stretch>
-                    <a:fillRect b="-6667"/>
+                    <a:fillRect/>
                   </a:stretch>
                 </a:blipFill>
               </p:spPr>
@@ -6150,7 +4950,7 @@
                 <a:lstStyle/>
                 <a:p>
                   <a:r>
-                    <a:rPr lang="en-CN">
+                    <a:rPr lang="en-US">
                       <a:noFill/>
                     </a:rPr>
                     <a:t> </a:t>
@@ -6162,56 +4962,55 @@
         </mc:AlternateContent>
         <p:cxnSp>
           <p:nvCxnSpPr>
-            <p:cNvPr id="76" name="Curved Connector 75">
+            <p:cNvPr id="55" name="Straight Arrow Connector 54">
               <a:extLst>
                 <a:ext uri="{FF2B5EF4-FFF2-40B4-BE49-F238E27FC236}">
-                  <a16:creationId xmlns:a16="http://schemas.microsoft.com/office/drawing/2014/main" id="{E4D27BC6-B1FE-6715-C20D-A9FF38B7F0BA}"/>
+                  <a16:creationId xmlns:a16="http://schemas.microsoft.com/office/drawing/2014/main" id="{F5F14229-A059-AC4C-06D0-FE6C95D92B41}"/>
                 </a:ext>
               </a:extLst>
             </p:cNvPr>
             <p:cNvCxnSpPr>
               <a:cxnSpLocks/>
+              <a:stCxn id="6" idx="3"/>
+              <a:endCxn id="10" idx="1"/>
             </p:cNvCxnSpPr>
             <p:nvPr/>
           </p:nvCxnSpPr>
           <p:spPr>
-            <a:xfrm rot="16200000" flipH="1">
-              <a:off x="9307325" y="3640022"/>
-              <a:ext cx="273788" cy="339422"/>
+            <a:xfrm>
+              <a:off x="3965033" y="2132993"/>
+              <a:ext cx="948810" cy="1313954"/>
             </a:xfrm>
-            <a:prstGeom prst="curvedConnector2">
+            <a:prstGeom prst="straightConnector1">
               <a:avLst/>
             </a:prstGeom>
             <a:ln>
-              <a:solidFill>
-                <a:schemeClr val="tx1"/>
-              </a:solidFill>
               <a:tailEnd type="triangle"/>
             </a:ln>
           </p:spPr>
           <p:style>
             <a:lnRef idx="2">
-              <a:schemeClr val="accent1"/>
+              <a:schemeClr val="dk1"/>
             </a:lnRef>
             <a:fillRef idx="0">
-              <a:schemeClr val="accent1"/>
+              <a:schemeClr val="dk1"/>
             </a:fillRef>
             <a:effectRef idx="1">
-              <a:schemeClr val="accent1"/>
+              <a:schemeClr val="dk1"/>
             </a:effectRef>
             <a:fontRef idx="minor">
               <a:schemeClr val="tx1"/>
             </a:fontRef>
           </p:style>
         </p:cxnSp>
-        <mc:AlternateContent xmlns:mc="http://schemas.openxmlformats.org/markup-compatibility/2006" xmlns:a14="http://schemas.microsoft.com/office/drawing/2010/main">
-          <mc:Choice Requires="a14">
+        <mc:AlternateContent xmlns:mc="http://schemas.openxmlformats.org/markup-compatibility/2006">
+          <mc:Choice xmlns:a14="http://schemas.microsoft.com/office/drawing/2010/main" Requires="a14">
             <p:sp>
               <p:nvSpPr>
-                <p:cNvPr id="77" name="TextBox 76">
+                <p:cNvPr id="85" name="TextBox 84">
                   <a:extLst>
                     <a:ext uri="{FF2B5EF4-FFF2-40B4-BE49-F238E27FC236}">
-                      <a16:creationId xmlns:a16="http://schemas.microsoft.com/office/drawing/2014/main" id="{2FA1AE9B-F1D1-A157-25D5-32E10E932CA6}"/>
+                      <a16:creationId xmlns:a16="http://schemas.microsoft.com/office/drawing/2014/main" id="{DCEF069B-014F-43AF-9D39-A008838BD8C0}"/>
                     </a:ext>
                   </a:extLst>
                 </p:cNvPr>
@@ -6220,8 +5019,8 @@
               </p:nvSpPr>
               <p:spPr>
                 <a:xfrm>
-                  <a:off x="9533213" y="3756902"/>
-                  <a:ext cx="364010" cy="369332"/>
+                  <a:off x="3946784" y="1794096"/>
+                  <a:ext cx="985309" cy="381515"/>
                 </a:xfrm>
                 <a:prstGeom prst="rect">
                   <a:avLst/>
@@ -6241,12 +5040,62 @@
                         <m:jc m:val="centerGroup"/>
                       </m:oMathParaPr>
                       <m:oMath xmlns:m="http://schemas.openxmlformats.org/officeDocument/2006/math">
-                        <m:r>
-                          <a:rPr lang="en-US" b="0" i="1" smtClean="0">
-                            <a:latin typeface="Cambria Math" panose="02040503050406030204" pitchFamily="18" charset="0"/>
-                          </a:rPr>
-                          <m:t>𝜇</m:t>
-                        </m:r>
+                        <m:sSub>
+                          <m:sSubPr>
+                            <m:ctrlPr>
+                              <a:rPr lang="en-US" b="0" i="1" smtClean="0">
+                                <a:latin typeface="Cambria Math" panose="02040503050406030204" pitchFamily="18" charset="0"/>
+                              </a:rPr>
+                            </m:ctrlPr>
+                          </m:sSubPr>
+                          <m:e>
+                            <m:r>
+                              <a:rPr lang="en-US" b="0" i="1" smtClean="0">
+                                <a:latin typeface="Cambria Math" panose="02040503050406030204" pitchFamily="18" charset="0"/>
+                              </a:rPr>
+                              <m:t>𝜋</m:t>
+                            </m:r>
+                          </m:e>
+                          <m:sub>
+                            <m:r>
+                              <a:rPr lang="en-US" b="0" i="1" smtClean="0">
+                                <a:latin typeface="Cambria Math" panose="02040503050406030204" pitchFamily="18" charset="0"/>
+                              </a:rPr>
+                              <m:t>𝑖</m:t>
+                            </m:r>
+                          </m:sub>
+                        </m:sSub>
+                        <m:sSub>
+                          <m:sSubPr>
+                            <m:ctrlPr>
+                              <a:rPr lang="en-US" b="0" i="1" smtClean="0">
+                                <a:latin typeface="Cambria Math" panose="02040503050406030204" pitchFamily="18" charset="0"/>
+                              </a:rPr>
+                            </m:ctrlPr>
+                          </m:sSubPr>
+                          <m:e>
+                            <m:r>
+                              <a:rPr lang="en-US" b="0" i="1" smtClean="0">
+                                <a:latin typeface="Cambria Math" panose="02040503050406030204" pitchFamily="18" charset="0"/>
+                              </a:rPr>
+                              <m:t>𝜆</m:t>
+                            </m:r>
+                          </m:e>
+                          <m:sub>
+                            <m:r>
+                              <a:rPr lang="en-US" b="0" i="1" smtClean="0">
+                                <a:latin typeface="Cambria Math" panose="02040503050406030204" pitchFamily="18" charset="0"/>
+                              </a:rPr>
+                              <m:t>2,</m:t>
+                            </m:r>
+                            <m:r>
+                              <a:rPr lang="en-US" b="0" i="1" smtClean="0">
+                                <a:latin typeface="Cambria Math" panose="02040503050406030204" pitchFamily="18" charset="0"/>
+                              </a:rPr>
+                              <m:t>𝑖</m:t>
+                            </m:r>
+                          </m:sub>
+                        </m:sSub>
                       </m:oMath>
                     </m:oMathPara>
                   </a14:m>
@@ -6255,13 +5104,13 @@
               </p:txBody>
             </p:sp>
           </mc:Choice>
-          <mc:Fallback xmlns="">
+          <mc:Fallback>
             <p:sp>
               <p:nvSpPr>
-                <p:cNvPr id="77" name="TextBox 76">
+                <p:cNvPr id="85" name="TextBox 84">
                   <a:extLst>
                     <a:ext uri="{FF2B5EF4-FFF2-40B4-BE49-F238E27FC236}">
-                      <a16:creationId xmlns:a16="http://schemas.microsoft.com/office/drawing/2014/main" id="{2FA1AE9B-F1D1-A157-25D5-32E10E932CA6}"/>
+                      <a16:creationId xmlns:a16="http://schemas.microsoft.com/office/drawing/2014/main" id="{DCEF069B-014F-43AF-9D39-A008838BD8C0}"/>
                     </a:ext>
                   </a:extLst>
                 </p:cNvPr>
@@ -6272,16 +5121,16 @@
               </p:nvSpPr>
               <p:spPr>
                 <a:xfrm>
-                  <a:off x="9533213" y="3756902"/>
-                  <a:ext cx="364010" cy="369332"/>
+                  <a:off x="3946784" y="1794096"/>
+                  <a:ext cx="985309" cy="381515"/>
                 </a:xfrm>
                 <a:prstGeom prst="rect">
                   <a:avLst/>
                 </a:prstGeom>
                 <a:blipFill>
-                  <a:blip r:embed="rId11"/>
+                  <a:blip r:embed="rId7"/>
                   <a:stretch>
-                    <a:fillRect b="-6667"/>
+                    <a:fillRect/>
                   </a:stretch>
                 </a:blipFill>
               </p:spPr>
@@ -6290,7 +5139,7 @@
                 <a:lstStyle/>
                 <a:p>
                   <a:r>
-                    <a:rPr lang="en-CN">
+                    <a:rPr lang="en-US">
                       <a:noFill/>
                     </a:rPr>
                     <a:t> </a:t>
@@ -6300,58 +5149,14 @@
             </p:sp>
           </mc:Fallback>
         </mc:AlternateContent>
-        <p:cxnSp>
-          <p:nvCxnSpPr>
-            <p:cNvPr id="78" name="Curved Connector 77">
-              <a:extLst>
-                <a:ext uri="{FF2B5EF4-FFF2-40B4-BE49-F238E27FC236}">
-                  <a16:creationId xmlns:a16="http://schemas.microsoft.com/office/drawing/2014/main" id="{E8BC46C0-AF96-0E79-2D42-5D390E3B9C44}"/>
-                </a:ext>
-              </a:extLst>
-            </p:cNvPr>
-            <p:cNvCxnSpPr>
-              <a:cxnSpLocks/>
-            </p:cNvCxnSpPr>
-            <p:nvPr/>
-          </p:nvCxnSpPr>
-          <p:spPr>
-            <a:xfrm rot="16200000" flipH="1">
-              <a:off x="7728882" y="2654801"/>
-              <a:ext cx="273788" cy="339422"/>
-            </a:xfrm>
-            <a:prstGeom prst="curvedConnector2">
-              <a:avLst/>
-            </a:prstGeom>
-            <a:ln>
-              <a:solidFill>
-                <a:schemeClr val="tx1"/>
-              </a:solidFill>
-              <a:tailEnd type="triangle"/>
-            </a:ln>
-          </p:spPr>
-          <p:style>
-            <a:lnRef idx="2">
-              <a:schemeClr val="accent1"/>
-            </a:lnRef>
-            <a:fillRef idx="0">
-              <a:schemeClr val="accent1"/>
-            </a:fillRef>
-            <a:effectRef idx="1">
-              <a:schemeClr val="accent1"/>
-            </a:effectRef>
-            <a:fontRef idx="minor">
-              <a:schemeClr val="tx1"/>
-            </a:fontRef>
-          </p:style>
-        </p:cxnSp>
-        <mc:AlternateContent xmlns:mc="http://schemas.openxmlformats.org/markup-compatibility/2006" xmlns:a14="http://schemas.microsoft.com/office/drawing/2010/main">
-          <mc:Choice Requires="a14">
+        <mc:AlternateContent xmlns:mc="http://schemas.openxmlformats.org/markup-compatibility/2006">
+          <mc:Choice xmlns:a14="http://schemas.microsoft.com/office/drawing/2010/main" Requires="a14">
             <p:sp>
               <p:nvSpPr>
-                <p:cNvPr id="79" name="TextBox 78">
+                <p:cNvPr id="86" name="TextBox 85">
                   <a:extLst>
                     <a:ext uri="{FF2B5EF4-FFF2-40B4-BE49-F238E27FC236}">
-                      <a16:creationId xmlns:a16="http://schemas.microsoft.com/office/drawing/2014/main" id="{551B2DEE-2E56-1246-99B3-054D3E96310F}"/>
+                      <a16:creationId xmlns:a16="http://schemas.microsoft.com/office/drawing/2014/main" id="{4D356928-7A48-C9D7-F363-9272160B918D}"/>
                     </a:ext>
                   </a:extLst>
                 </p:cNvPr>
@@ -6359,9 +5164,9 @@
                 <p:nvPr/>
               </p:nvSpPr>
               <p:spPr>
-                <a:xfrm>
-                  <a:off x="7954770" y="2771681"/>
-                  <a:ext cx="364010" cy="369332"/>
+                <a:xfrm rot="3219132">
+                  <a:off x="3774883" y="2616136"/>
+                  <a:ext cx="985309" cy="381515"/>
                 </a:xfrm>
                 <a:prstGeom prst="rect">
                   <a:avLst/>
@@ -6381,12 +5186,74 @@
                         <m:jc m:val="centerGroup"/>
                       </m:oMathParaPr>
                       <m:oMath xmlns:m="http://schemas.openxmlformats.org/officeDocument/2006/math">
-                        <m:r>
-                          <a:rPr lang="en-US" b="0" i="1" smtClean="0">
-                            <a:latin typeface="Cambria Math" panose="02040503050406030204" pitchFamily="18" charset="0"/>
-                          </a:rPr>
-                          <m:t>𝜇</m:t>
-                        </m:r>
+                        <m:sSub>
+                          <m:sSubPr>
+                            <m:ctrlPr>
+                              <a:rPr lang="en-US" b="0" i="1" smtClean="0">
+                                <a:latin typeface="Cambria Math" panose="02040503050406030204" pitchFamily="18" charset="0"/>
+                              </a:rPr>
+                            </m:ctrlPr>
+                          </m:sSubPr>
+                          <m:e>
+                            <m:r>
+                              <a:rPr lang="en-US" b="0" i="1" smtClean="0">
+                                <a:latin typeface="Cambria Math" panose="02040503050406030204" pitchFamily="18" charset="0"/>
+                              </a:rPr>
+                              <m:t>(1−</m:t>
+                            </m:r>
+                            <m:r>
+                              <a:rPr lang="en-US" b="0" i="1" smtClean="0">
+                                <a:latin typeface="Cambria Math" panose="02040503050406030204" pitchFamily="18" charset="0"/>
+                              </a:rPr>
+                              <m:t>𝜋</m:t>
+                            </m:r>
+                          </m:e>
+                          <m:sub>
+                            <m:r>
+                              <a:rPr lang="en-US" b="0" i="1" smtClean="0">
+                                <a:latin typeface="Cambria Math" panose="02040503050406030204" pitchFamily="18" charset="0"/>
+                              </a:rPr>
+                              <m:t>𝑖</m:t>
+                            </m:r>
+                          </m:sub>
+                        </m:sSub>
+                        <m:sSub>
+                          <m:sSubPr>
+                            <m:ctrlPr>
+                              <a:rPr lang="en-US" b="0" i="1" smtClean="0">
+                                <a:latin typeface="Cambria Math" panose="02040503050406030204" pitchFamily="18" charset="0"/>
+                              </a:rPr>
+                            </m:ctrlPr>
+                          </m:sSubPr>
+                          <m:e>
+                            <m:r>
+                              <a:rPr lang="en-US" b="0" i="1" smtClean="0">
+                                <a:latin typeface="Cambria Math" panose="02040503050406030204" pitchFamily="18" charset="0"/>
+                              </a:rPr>
+                              <m:t>)</m:t>
+                            </m:r>
+                            <m:r>
+                              <a:rPr lang="en-US" b="0" i="1" smtClean="0">
+                                <a:latin typeface="Cambria Math" panose="02040503050406030204" pitchFamily="18" charset="0"/>
+                              </a:rPr>
+                              <m:t>𝜆</m:t>
+                            </m:r>
+                          </m:e>
+                          <m:sub>
+                            <m:r>
+                              <a:rPr lang="en-US" b="0" i="1" smtClean="0">
+                                <a:latin typeface="Cambria Math" panose="02040503050406030204" pitchFamily="18" charset="0"/>
+                              </a:rPr>
+                              <m:t>2,</m:t>
+                            </m:r>
+                            <m:r>
+                              <a:rPr lang="en-US" b="0" i="1" smtClean="0">
+                                <a:latin typeface="Cambria Math" panose="02040503050406030204" pitchFamily="18" charset="0"/>
+                              </a:rPr>
+                              <m:t>𝑖</m:t>
+                            </m:r>
+                          </m:sub>
+                        </m:sSub>
                       </m:oMath>
                     </m:oMathPara>
                   </a14:m>
@@ -6395,13 +5262,13 @@
               </p:txBody>
             </p:sp>
           </mc:Choice>
-          <mc:Fallback xmlns="">
+          <mc:Fallback>
             <p:sp>
               <p:nvSpPr>
-                <p:cNvPr id="79" name="TextBox 78">
+                <p:cNvPr id="86" name="TextBox 85">
                   <a:extLst>
                     <a:ext uri="{FF2B5EF4-FFF2-40B4-BE49-F238E27FC236}">
-                      <a16:creationId xmlns:a16="http://schemas.microsoft.com/office/drawing/2014/main" id="{551B2DEE-2E56-1246-99B3-054D3E96310F}"/>
+                      <a16:creationId xmlns:a16="http://schemas.microsoft.com/office/drawing/2014/main" id="{4D356928-7A48-C9D7-F363-9272160B918D}"/>
                     </a:ext>
                   </a:extLst>
                 </p:cNvPr>
@@ -6411,17 +5278,17 @@
                 <p:nvPr/>
               </p:nvSpPr>
               <p:spPr>
-                <a:xfrm>
-                  <a:off x="7954770" y="2771681"/>
-                  <a:ext cx="364010" cy="369332"/>
+                <a:xfrm rot="3219132">
+                  <a:off x="3774883" y="2616136"/>
+                  <a:ext cx="985309" cy="381515"/>
                 </a:xfrm>
                 <a:prstGeom prst="rect">
                   <a:avLst/>
                 </a:prstGeom>
                 <a:blipFill>
-                  <a:blip r:embed="rId12"/>
+                  <a:blip r:embed="rId8"/>
                   <a:stretch>
-                    <a:fillRect b="-6667"/>
+                    <a:fillRect l="-4167" r="-2778" b="-19512"/>
                   </a:stretch>
                 </a:blipFill>
               </p:spPr>
@@ -6430,147 +5297,7 @@
                 <a:lstStyle/>
                 <a:p>
                   <a:r>
-                    <a:rPr lang="en-CN">
-                      <a:noFill/>
-                    </a:rPr>
-                    <a:t> </a:t>
-                  </a:r>
-                </a:p>
-              </p:txBody>
-            </p:sp>
-          </mc:Fallback>
-        </mc:AlternateContent>
-        <p:cxnSp>
-          <p:nvCxnSpPr>
-            <p:cNvPr id="80" name="Curved Connector 79">
-              <a:extLst>
-                <a:ext uri="{FF2B5EF4-FFF2-40B4-BE49-F238E27FC236}">
-                  <a16:creationId xmlns:a16="http://schemas.microsoft.com/office/drawing/2014/main" id="{35BBE7D9-D8CC-00E6-0256-738FF53B9C02}"/>
-                </a:ext>
-              </a:extLst>
-            </p:cNvPr>
-            <p:cNvCxnSpPr>
-              <a:cxnSpLocks/>
-            </p:cNvCxnSpPr>
-            <p:nvPr/>
-          </p:nvCxnSpPr>
-          <p:spPr>
-            <a:xfrm rot="16200000" flipH="1">
-              <a:off x="10144735" y="1661874"/>
-              <a:ext cx="273788" cy="339422"/>
-            </a:xfrm>
-            <a:prstGeom prst="curvedConnector2">
-              <a:avLst/>
-            </a:prstGeom>
-            <a:ln>
-              <a:solidFill>
-                <a:schemeClr val="tx1"/>
-              </a:solidFill>
-              <a:tailEnd type="triangle"/>
-            </a:ln>
-          </p:spPr>
-          <p:style>
-            <a:lnRef idx="2">
-              <a:schemeClr val="accent1"/>
-            </a:lnRef>
-            <a:fillRef idx="0">
-              <a:schemeClr val="accent1"/>
-            </a:fillRef>
-            <a:effectRef idx="1">
-              <a:schemeClr val="accent1"/>
-            </a:effectRef>
-            <a:fontRef idx="minor">
-              <a:schemeClr val="tx1"/>
-            </a:fontRef>
-          </p:style>
-        </p:cxnSp>
-        <mc:AlternateContent xmlns:mc="http://schemas.openxmlformats.org/markup-compatibility/2006" xmlns:a14="http://schemas.microsoft.com/office/drawing/2010/main">
-          <mc:Choice Requires="a14">
-            <p:sp>
-              <p:nvSpPr>
-                <p:cNvPr id="81" name="TextBox 80">
-                  <a:extLst>
-                    <a:ext uri="{FF2B5EF4-FFF2-40B4-BE49-F238E27FC236}">
-                      <a16:creationId xmlns:a16="http://schemas.microsoft.com/office/drawing/2014/main" id="{18349301-CF51-3133-8D4C-E1467ED83C99}"/>
-                    </a:ext>
-                  </a:extLst>
-                </p:cNvPr>
-                <p:cNvSpPr txBox="1"/>
-                <p:nvPr/>
-              </p:nvSpPr>
-              <p:spPr>
-                <a:xfrm>
-                  <a:off x="10370623" y="1778754"/>
-                  <a:ext cx="364010" cy="369332"/>
-                </a:xfrm>
-                <a:prstGeom prst="rect">
-                  <a:avLst/>
-                </a:prstGeom>
-                <a:noFill/>
-              </p:spPr>
-              <p:txBody>
-                <a:bodyPr wrap="square" rtlCol="0">
-                  <a:spAutoFit/>
-                </a:bodyPr>
-                <a:lstStyle/>
-                <a:p>
-                  <a:pPr/>
-                  <a14:m>
-                    <m:oMathPara xmlns:m="http://schemas.openxmlformats.org/officeDocument/2006/math">
-                      <m:oMathParaPr>
-                        <m:jc m:val="centerGroup"/>
-                      </m:oMathParaPr>
-                      <m:oMath xmlns:m="http://schemas.openxmlformats.org/officeDocument/2006/math">
-                        <m:r>
-                          <a:rPr lang="en-US" b="0" i="1" smtClean="0">
-                            <a:latin typeface="Cambria Math" panose="02040503050406030204" pitchFamily="18" charset="0"/>
-                          </a:rPr>
-                          <m:t>𝜇</m:t>
-                        </m:r>
-                      </m:oMath>
-                    </m:oMathPara>
-                  </a14:m>
-                  <a:endParaRPr lang="en-CN" dirty="0"/>
-                </a:p>
-              </p:txBody>
-            </p:sp>
-          </mc:Choice>
-          <mc:Fallback xmlns="">
-            <p:sp>
-              <p:nvSpPr>
-                <p:cNvPr id="81" name="TextBox 80">
-                  <a:extLst>
-                    <a:ext uri="{FF2B5EF4-FFF2-40B4-BE49-F238E27FC236}">
-                      <a16:creationId xmlns:a16="http://schemas.microsoft.com/office/drawing/2014/main" id="{18349301-CF51-3133-8D4C-E1467ED83C99}"/>
-                    </a:ext>
-                  </a:extLst>
-                </p:cNvPr>
-                <p:cNvSpPr txBox="1">
-                  <a:spLocks noRot="1" noChangeAspect="1" noMove="1" noResize="1" noEditPoints="1" noAdjustHandles="1" noChangeArrowheads="1" noChangeShapeType="1" noTextEdit="1"/>
-                </p:cNvSpPr>
-                <p:nvPr/>
-              </p:nvSpPr>
-              <p:spPr>
-                <a:xfrm>
-                  <a:off x="10370623" y="1778754"/>
-                  <a:ext cx="364010" cy="369332"/>
-                </a:xfrm>
-                <a:prstGeom prst="rect">
-                  <a:avLst/>
-                </a:prstGeom>
-                <a:blipFill>
-                  <a:blip r:embed="rId13"/>
-                  <a:stretch>
-                    <a:fillRect b="-6897"/>
-                  </a:stretch>
-                </a:blipFill>
-              </p:spPr>
-              <p:txBody>
-                <a:bodyPr/>
-                <a:lstStyle/>
-                <a:p>
-                  <a:r>
-                    <a:rPr lang="en-CN">
+                    <a:rPr lang="en-US">
                       <a:noFill/>
                     </a:rPr>
                     <a:t> </a:t>
@@ -6581,10 +5308,558 @@
           </mc:Fallback>
         </mc:AlternateContent>
       </p:grpSp>
+      <p:grpSp>
+        <p:nvGrpSpPr>
+          <p:cNvPr id="113" name="Group 112">
+            <a:extLst>
+              <a:ext uri="{FF2B5EF4-FFF2-40B4-BE49-F238E27FC236}">
+                <a16:creationId xmlns:a16="http://schemas.microsoft.com/office/drawing/2014/main" id="{C1C54AFF-4678-A2D9-3CFC-ADCA1CFA199E}"/>
+              </a:ext>
+            </a:extLst>
+          </p:cNvPr>
+          <p:cNvGrpSpPr/>
+          <p:nvPr/>
+        </p:nvGrpSpPr>
+        <p:grpSpPr>
+          <a:xfrm>
+            <a:off x="7261640" y="1171936"/>
+            <a:ext cx="4023360" cy="2507194"/>
+            <a:chOff x="7261640" y="1171936"/>
+            <a:chExt cx="4023360" cy="2507194"/>
+          </a:xfrm>
+        </p:grpSpPr>
+        <p:sp>
+          <p:nvSpPr>
+            <p:cNvPr id="4" name="Rounded Rectangle 3">
+              <a:extLst>
+                <a:ext uri="{FF2B5EF4-FFF2-40B4-BE49-F238E27FC236}">
+                  <a16:creationId xmlns:a16="http://schemas.microsoft.com/office/drawing/2014/main" id="{7E225726-A6F1-6D67-BCB6-C499E3EA06A9}"/>
+                </a:ext>
+              </a:extLst>
+            </p:cNvPr>
+            <p:cNvSpPr/>
+            <p:nvPr/>
+          </p:nvSpPr>
+          <p:spPr>
+            <a:xfrm>
+              <a:off x="8359332" y="1171936"/>
+              <a:ext cx="1840781" cy="523222"/>
+            </a:xfrm>
+            <a:prstGeom prst="roundRect">
+              <a:avLst/>
+            </a:prstGeom>
+            <a:noFill/>
+          </p:spPr>
+          <p:style>
+            <a:lnRef idx="2">
+              <a:schemeClr val="accent1">
+                <a:shade val="15000"/>
+              </a:schemeClr>
+            </a:lnRef>
+            <a:fillRef idx="1">
+              <a:schemeClr val="accent1"/>
+            </a:fillRef>
+            <a:effectRef idx="0">
+              <a:schemeClr val="accent1"/>
+            </a:effectRef>
+            <a:fontRef idx="minor">
+              <a:schemeClr val="lt1"/>
+            </a:fontRef>
+          </p:style>
+          <p:txBody>
+            <a:bodyPr rtlCol="0" anchor="ctr"/>
+            <a:lstStyle/>
+            <a:p>
+              <a:pPr algn="ctr"/>
+              <a:r>
+                <a:rPr lang="en-US" sz="1600" dirty="0">
+                  <a:solidFill>
+                    <a:schemeClr val="tx1"/>
+                  </a:solidFill>
+                </a:rPr>
+                <a:t>Susceptible (U)</a:t>
+              </a:r>
+            </a:p>
+          </p:txBody>
+        </p:sp>
+        <p:cxnSp>
+          <p:nvCxnSpPr>
+            <p:cNvPr id="8" name="Straight Arrow Connector 7">
+              <a:extLst>
+                <a:ext uri="{FF2B5EF4-FFF2-40B4-BE49-F238E27FC236}">
+                  <a16:creationId xmlns:a16="http://schemas.microsoft.com/office/drawing/2014/main" id="{AFE0E9AE-8B3B-4B64-9E86-979260D9A7C4}"/>
+                </a:ext>
+              </a:extLst>
+            </p:cNvPr>
+            <p:cNvCxnSpPr>
+              <a:cxnSpLocks/>
+            </p:cNvCxnSpPr>
+            <p:nvPr/>
+          </p:nvCxnSpPr>
+          <p:spPr>
+            <a:xfrm>
+              <a:off x="8881499" y="1695158"/>
+              <a:ext cx="0" cy="452929"/>
+            </a:xfrm>
+            <a:prstGeom prst="straightConnector1">
+              <a:avLst/>
+            </a:prstGeom>
+            <a:ln>
+              <a:tailEnd type="triangle"/>
+            </a:ln>
+          </p:spPr>
+          <p:style>
+            <a:lnRef idx="2">
+              <a:schemeClr val="dk1"/>
+            </a:lnRef>
+            <a:fillRef idx="0">
+              <a:schemeClr val="dk1"/>
+            </a:fillRef>
+            <a:effectRef idx="1">
+              <a:schemeClr val="dk1"/>
+            </a:effectRef>
+            <a:fontRef idx="minor">
+              <a:schemeClr val="tx1"/>
+            </a:fontRef>
+          </p:style>
+        </p:cxnSp>
+        <p:sp>
+          <p:nvSpPr>
+            <p:cNvPr id="9" name="Rounded Rectangle 8">
+              <a:extLst>
+                <a:ext uri="{FF2B5EF4-FFF2-40B4-BE49-F238E27FC236}">
+                  <a16:creationId xmlns:a16="http://schemas.microsoft.com/office/drawing/2014/main" id="{671973AD-3B69-E60E-92E7-411987B1CFD8}"/>
+                </a:ext>
+              </a:extLst>
+            </p:cNvPr>
+            <p:cNvSpPr/>
+            <p:nvPr/>
+          </p:nvSpPr>
+          <p:spPr>
+            <a:xfrm>
+              <a:off x="8359331" y="3155908"/>
+              <a:ext cx="1840781" cy="523222"/>
+            </a:xfrm>
+            <a:prstGeom prst="roundRect">
+              <a:avLst/>
+            </a:prstGeom>
+            <a:noFill/>
+          </p:spPr>
+          <p:style>
+            <a:lnRef idx="2">
+              <a:schemeClr val="accent1">
+                <a:shade val="15000"/>
+              </a:schemeClr>
+            </a:lnRef>
+            <a:fillRef idx="1">
+              <a:schemeClr val="accent1"/>
+            </a:fillRef>
+            <a:effectRef idx="0">
+              <a:schemeClr val="accent1"/>
+            </a:effectRef>
+            <a:fontRef idx="minor">
+              <a:schemeClr val="lt1"/>
+            </a:fontRef>
+          </p:style>
+          <p:txBody>
+            <a:bodyPr rtlCol="0" anchor="ctr"/>
+            <a:lstStyle/>
+            <a:p>
+              <a:pPr algn="ctr"/>
+              <a:r>
+                <a:rPr lang="en-US" sz="1600" dirty="0">
+                  <a:solidFill>
+                    <a:schemeClr val="tx1"/>
+                  </a:solidFill>
+                </a:rPr>
+                <a:t>Chronic infection (C)</a:t>
+              </a:r>
+            </a:p>
+          </p:txBody>
+        </p:sp>
+        <p:sp>
+          <p:nvSpPr>
+            <p:cNvPr id="11" name="Rounded Rectangle 10">
+              <a:extLst>
+                <a:ext uri="{FF2B5EF4-FFF2-40B4-BE49-F238E27FC236}">
+                  <a16:creationId xmlns:a16="http://schemas.microsoft.com/office/drawing/2014/main" id="{B29284CE-0C23-7E3C-4C55-21EA2100AB28}"/>
+                </a:ext>
+              </a:extLst>
+            </p:cNvPr>
+            <p:cNvSpPr/>
+            <p:nvPr/>
+          </p:nvSpPr>
+          <p:spPr>
+            <a:xfrm>
+              <a:off x="7261640" y="2159337"/>
+              <a:ext cx="1840781" cy="523222"/>
+            </a:xfrm>
+            <a:prstGeom prst="roundRect">
+              <a:avLst/>
+            </a:prstGeom>
+            <a:noFill/>
+          </p:spPr>
+          <p:style>
+            <a:lnRef idx="2">
+              <a:schemeClr val="accent1">
+                <a:shade val="15000"/>
+              </a:schemeClr>
+            </a:lnRef>
+            <a:fillRef idx="1">
+              <a:schemeClr val="accent1"/>
+            </a:fillRef>
+            <a:effectRef idx="0">
+              <a:schemeClr val="accent1"/>
+            </a:effectRef>
+            <a:fontRef idx="minor">
+              <a:schemeClr val="lt1"/>
+            </a:fontRef>
+          </p:style>
+          <p:txBody>
+            <a:bodyPr rtlCol="0" anchor="ctr"/>
+            <a:lstStyle/>
+            <a:p>
+              <a:pPr algn="ctr"/>
+              <a:r>
+                <a:rPr lang="en-US" sz="1600" dirty="0">
+                  <a:solidFill>
+                    <a:schemeClr val="tx1"/>
+                  </a:solidFill>
+                </a:rPr>
+                <a:t>Acute infection (A)</a:t>
+              </a:r>
+            </a:p>
+          </p:txBody>
+        </p:sp>
+        <p:sp>
+          <p:nvSpPr>
+            <p:cNvPr id="14" name="Rounded Rectangle 13">
+              <a:extLst>
+                <a:ext uri="{FF2B5EF4-FFF2-40B4-BE49-F238E27FC236}">
+                  <a16:creationId xmlns:a16="http://schemas.microsoft.com/office/drawing/2014/main" id="{C6DBEC1D-AC46-9640-0B7E-5A00B469A63A}"/>
+                </a:ext>
+              </a:extLst>
+            </p:cNvPr>
+            <p:cNvSpPr/>
+            <p:nvPr/>
+          </p:nvSpPr>
+          <p:spPr>
+            <a:xfrm>
+              <a:off x="9444219" y="2159337"/>
+              <a:ext cx="1840781" cy="523222"/>
+            </a:xfrm>
+            <a:prstGeom prst="roundRect">
+              <a:avLst/>
+            </a:prstGeom>
+            <a:noFill/>
+          </p:spPr>
+          <p:style>
+            <a:lnRef idx="2">
+              <a:schemeClr val="accent1">
+                <a:shade val="15000"/>
+              </a:schemeClr>
+            </a:lnRef>
+            <a:fillRef idx="1">
+              <a:schemeClr val="accent1"/>
+            </a:fillRef>
+            <a:effectRef idx="0">
+              <a:schemeClr val="accent1"/>
+            </a:effectRef>
+            <a:fontRef idx="minor">
+              <a:schemeClr val="lt1"/>
+            </a:fontRef>
+          </p:style>
+          <p:txBody>
+            <a:bodyPr rtlCol="0" anchor="ctr"/>
+            <a:lstStyle/>
+            <a:p>
+              <a:pPr algn="ctr"/>
+              <a:r>
+                <a:rPr lang="en-US" sz="1600" dirty="0">
+                  <a:solidFill>
+                    <a:schemeClr val="tx1"/>
+                  </a:solidFill>
+                </a:rPr>
+                <a:t>Treatment (T)</a:t>
+              </a:r>
+            </a:p>
+          </p:txBody>
+        </p:sp>
+        <p:cxnSp>
+          <p:nvCxnSpPr>
+            <p:cNvPr id="15" name="Straight Arrow Connector 14">
+              <a:extLst>
+                <a:ext uri="{FF2B5EF4-FFF2-40B4-BE49-F238E27FC236}">
+                  <a16:creationId xmlns:a16="http://schemas.microsoft.com/office/drawing/2014/main" id="{04E83AFE-8E72-B66F-FF9E-75B77009C1F7}"/>
+                </a:ext>
+              </a:extLst>
+            </p:cNvPr>
+            <p:cNvCxnSpPr>
+              <a:cxnSpLocks/>
+            </p:cNvCxnSpPr>
+            <p:nvPr/>
+          </p:nvCxnSpPr>
+          <p:spPr>
+            <a:xfrm>
+              <a:off x="8881499" y="2682559"/>
+              <a:ext cx="0" cy="452929"/>
+            </a:xfrm>
+            <a:prstGeom prst="straightConnector1">
+              <a:avLst/>
+            </a:prstGeom>
+            <a:ln>
+              <a:tailEnd type="triangle"/>
+            </a:ln>
+          </p:spPr>
+          <p:style>
+            <a:lnRef idx="2">
+              <a:schemeClr val="dk1"/>
+            </a:lnRef>
+            <a:fillRef idx="0">
+              <a:schemeClr val="dk1"/>
+            </a:fillRef>
+            <a:effectRef idx="1">
+              <a:schemeClr val="dk1"/>
+            </a:effectRef>
+            <a:fontRef idx="minor">
+              <a:schemeClr val="tx1"/>
+            </a:fontRef>
+          </p:style>
+        </p:cxnSp>
+        <p:cxnSp>
+          <p:nvCxnSpPr>
+            <p:cNvPr id="16" name="Straight Arrow Connector 15">
+              <a:extLst>
+                <a:ext uri="{FF2B5EF4-FFF2-40B4-BE49-F238E27FC236}">
+                  <a16:creationId xmlns:a16="http://schemas.microsoft.com/office/drawing/2014/main" id="{44DC0C02-EC2B-7159-5548-73B4ED77A98C}"/>
+                </a:ext>
+              </a:extLst>
+            </p:cNvPr>
+            <p:cNvCxnSpPr/>
+            <p:nvPr/>
+          </p:nvCxnSpPr>
+          <p:spPr>
+            <a:xfrm flipV="1">
+              <a:off x="9650869" y="2676250"/>
+              <a:ext cx="0" cy="458696"/>
+            </a:xfrm>
+            <a:prstGeom prst="straightConnector1">
+              <a:avLst/>
+            </a:prstGeom>
+            <a:ln>
+              <a:tailEnd type="triangle"/>
+            </a:ln>
+          </p:spPr>
+          <p:style>
+            <a:lnRef idx="2">
+              <a:schemeClr val="dk1"/>
+            </a:lnRef>
+            <a:fillRef idx="0">
+              <a:schemeClr val="dk1"/>
+            </a:fillRef>
+            <a:effectRef idx="1">
+              <a:schemeClr val="dk1"/>
+            </a:effectRef>
+            <a:fontRef idx="minor">
+              <a:schemeClr val="tx1"/>
+            </a:fontRef>
+          </p:style>
+        </p:cxnSp>
+        <p:cxnSp>
+          <p:nvCxnSpPr>
+            <p:cNvPr id="17" name="Straight Arrow Connector 16">
+              <a:extLst>
+                <a:ext uri="{FF2B5EF4-FFF2-40B4-BE49-F238E27FC236}">
+                  <a16:creationId xmlns:a16="http://schemas.microsoft.com/office/drawing/2014/main" id="{1F47FB46-22DA-3D6F-2D57-A85F37862FF1}"/>
+                </a:ext>
+              </a:extLst>
+            </p:cNvPr>
+            <p:cNvCxnSpPr/>
+            <p:nvPr/>
+          </p:nvCxnSpPr>
+          <p:spPr>
+            <a:xfrm flipV="1">
+              <a:off x="9642313" y="1689390"/>
+              <a:ext cx="0" cy="458696"/>
+            </a:xfrm>
+            <a:prstGeom prst="straightConnector1">
+              <a:avLst/>
+            </a:prstGeom>
+            <a:ln>
+              <a:tailEnd type="triangle"/>
+            </a:ln>
+          </p:spPr>
+          <p:style>
+            <a:lnRef idx="2">
+              <a:schemeClr val="dk1"/>
+            </a:lnRef>
+            <a:fillRef idx="0">
+              <a:schemeClr val="dk1"/>
+            </a:fillRef>
+            <a:effectRef idx="1">
+              <a:schemeClr val="dk1"/>
+            </a:effectRef>
+            <a:fontRef idx="minor">
+              <a:schemeClr val="tx1"/>
+            </a:fontRef>
+          </p:style>
+        </p:cxnSp>
+        <p:cxnSp>
+          <p:nvCxnSpPr>
+            <p:cNvPr id="97" name="Curved Connector 96">
+              <a:extLst>
+                <a:ext uri="{FF2B5EF4-FFF2-40B4-BE49-F238E27FC236}">
+                  <a16:creationId xmlns:a16="http://schemas.microsoft.com/office/drawing/2014/main" id="{4F00687E-D2BE-7CFF-FA3C-7659BE177EAC}"/>
+                </a:ext>
+              </a:extLst>
+            </p:cNvPr>
+            <p:cNvCxnSpPr>
+              <a:stCxn id="11" idx="0"/>
+              <a:endCxn id="4" idx="1"/>
+            </p:cNvCxnSpPr>
+            <p:nvPr/>
+          </p:nvCxnSpPr>
+          <p:spPr>
+            <a:xfrm rot="5400000" flipH="1" flipV="1">
+              <a:off x="7907786" y="1707792"/>
+              <a:ext cx="725790" cy="177301"/>
+            </a:xfrm>
+            <a:prstGeom prst="curvedConnector2">
+              <a:avLst/>
+            </a:prstGeom>
+            <a:ln>
+              <a:tailEnd type="triangle"/>
+            </a:ln>
+          </p:spPr>
+          <p:style>
+            <a:lnRef idx="2">
+              <a:schemeClr val="dk1"/>
+            </a:lnRef>
+            <a:fillRef idx="0">
+              <a:schemeClr val="dk1"/>
+            </a:fillRef>
+            <a:effectRef idx="1">
+              <a:schemeClr val="dk1"/>
+            </a:effectRef>
+            <a:fontRef idx="minor">
+              <a:schemeClr val="tx1"/>
+            </a:fontRef>
+          </p:style>
+        </p:cxnSp>
+        <p:cxnSp>
+          <p:nvCxnSpPr>
+            <p:cNvPr id="108" name="Curved Connector 107">
+              <a:extLst>
+                <a:ext uri="{FF2B5EF4-FFF2-40B4-BE49-F238E27FC236}">
+                  <a16:creationId xmlns:a16="http://schemas.microsoft.com/office/drawing/2014/main" id="{71E75BA4-CBD8-E30A-6ABB-6C2F5CE8ECEC}"/>
+                </a:ext>
+              </a:extLst>
+            </p:cNvPr>
+            <p:cNvCxnSpPr>
+              <a:cxnSpLocks/>
+              <a:stCxn id="14" idx="2"/>
+              <a:endCxn id="9" idx="3"/>
+            </p:cNvCxnSpPr>
+            <p:nvPr/>
+          </p:nvCxnSpPr>
+          <p:spPr>
+            <a:xfrm rot="5400000">
+              <a:off x="9914881" y="2967790"/>
+              <a:ext cx="734960" cy="164498"/>
+            </a:xfrm>
+            <a:prstGeom prst="curvedConnector2">
+              <a:avLst/>
+            </a:prstGeom>
+            <a:ln>
+              <a:tailEnd type="triangle"/>
+            </a:ln>
+          </p:spPr>
+          <p:style>
+            <a:lnRef idx="2">
+              <a:schemeClr val="dk1"/>
+            </a:lnRef>
+            <a:fillRef idx="0">
+              <a:schemeClr val="dk1"/>
+            </a:fillRef>
+            <a:effectRef idx="1">
+              <a:schemeClr val="dk1"/>
+            </a:effectRef>
+            <a:fontRef idx="minor">
+              <a:schemeClr val="tx1"/>
+            </a:fontRef>
+          </p:style>
+        </p:cxnSp>
+      </p:grpSp>
     </p:spTree>
     <p:extLst>
       <p:ext uri="{BB962C8B-B14F-4D97-AF65-F5344CB8AC3E}">
         <p14:creationId xmlns:p14="http://schemas.microsoft.com/office/powerpoint/2010/main" val="3942779213"/>
+      </p:ext>
+    </p:extLst>
+  </p:cSld>
+  <p:clrMapOvr>
+    <a:masterClrMapping/>
+  </p:clrMapOvr>
+</p:sld>
+</file>
+
+<file path=ppt/slides/slide10.xml><?xml version="1.0" encoding="utf-8"?>
+<p:sld xmlns:a="http://schemas.openxmlformats.org/drawingml/2006/main" xmlns:r="http://schemas.openxmlformats.org/officeDocument/2006/relationships" xmlns:p="http://schemas.openxmlformats.org/presentationml/2006/main">
+  <p:cSld>
+    <p:spTree>
+      <p:nvGrpSpPr>
+        <p:cNvPr id="1" name="">
+          <a:extLst>
+            <a:ext uri="{FF2B5EF4-FFF2-40B4-BE49-F238E27FC236}">
+              <a16:creationId xmlns:a16="http://schemas.microsoft.com/office/drawing/2014/main" id="{B0659AB9-D41E-DD5E-2E49-19D38004AB0C}"/>
+            </a:ext>
+          </a:extLst>
+        </p:cNvPr>
+        <p:cNvGrpSpPr/>
+        <p:nvPr/>
+      </p:nvGrpSpPr>
+      <p:grpSpPr>
+        <a:xfrm>
+          <a:off x="0" y="0"/>
+          <a:ext cx="0" cy="0"/>
+          <a:chOff x="0" y="0"/>
+          <a:chExt cx="0" cy="0"/>
+        </a:xfrm>
+      </p:grpSpPr>
+      <p:pic>
+        <p:nvPicPr>
+          <p:cNvPr id="2" name="Picture 1">
+            <a:extLst>
+              <a:ext uri="{FF2B5EF4-FFF2-40B4-BE49-F238E27FC236}">
+                <a16:creationId xmlns:a16="http://schemas.microsoft.com/office/drawing/2014/main" id="{9013385E-C070-DC86-9C10-20EA98250E1C}"/>
+              </a:ext>
+            </a:extLst>
+          </p:cNvPr>
+          <p:cNvPicPr>
+            <a:picLocks noChangeAspect="1"/>
+          </p:cNvPicPr>
+          <p:nvPr/>
+        </p:nvPicPr>
+        <p:blipFill>
+          <a:blip r:embed="rId2"/>
+          <a:stretch>
+            <a:fillRect/>
+          </a:stretch>
+        </p:blipFill>
+        <p:spPr>
+          <a:xfrm>
+            <a:off x="2296186" y="401161"/>
+            <a:ext cx="5915717" cy="5308441"/>
+          </a:xfrm>
+          <a:prstGeom prst="rect">
+            <a:avLst/>
+          </a:prstGeom>
+        </p:spPr>
+      </p:pic>
+    </p:spTree>
+    <p:extLst>
+      <p:ext uri="{BB962C8B-B14F-4D97-AF65-F5344CB8AC3E}">
+        <p14:creationId xmlns:p14="http://schemas.microsoft.com/office/powerpoint/2010/main" val="1312514313"/>
       </p:ext>
     </p:extLst>
   </p:cSld>
@@ -6660,10 +5935,10 @@
         </p:nvGrpSpPr>
         <p:grpSpPr>
           <a:xfrm>
-            <a:off x="242011" y="1842709"/>
-            <a:ext cx="11213111" cy="1189995"/>
-            <a:chOff x="242011" y="1842709"/>
-            <a:chExt cx="11213111" cy="1189995"/>
+            <a:off x="242011" y="2437706"/>
+            <a:ext cx="11213111" cy="594998"/>
+            <a:chOff x="242011" y="2437706"/>
+            <a:chExt cx="11213111" cy="594998"/>
           </a:xfrm>
         </p:grpSpPr>
         <p:sp>
@@ -6884,87 +6159,6 @@
         </p:sp>
         <p:cxnSp>
           <p:nvCxnSpPr>
-            <p:cNvPr id="124" name="Elbow Connector 123">
-              <a:extLst>
-                <a:ext uri="{FF2B5EF4-FFF2-40B4-BE49-F238E27FC236}">
-                  <a16:creationId xmlns:a16="http://schemas.microsoft.com/office/drawing/2014/main" id="{1A57A054-3F0A-313B-4889-8A62A55BE057}"/>
-                </a:ext>
-              </a:extLst>
-            </p:cNvPr>
-            <p:cNvCxnSpPr>
-              <a:cxnSpLocks/>
-              <a:stCxn id="31" idx="0"/>
-              <a:endCxn id="98" idx="0"/>
-            </p:cNvCxnSpPr>
-            <p:nvPr/>
-          </p:nvCxnSpPr>
-          <p:spPr>
-            <a:xfrm rot="5400000" flipH="1" flipV="1">
-              <a:off x="7351547" y="-568255"/>
-              <a:ext cx="12700" cy="6011923"/>
-            </a:xfrm>
-            <a:prstGeom prst="bentConnector3">
-              <a:avLst>
-                <a:gd name="adj1" fmla="val 1800000"/>
-              </a:avLst>
-            </a:prstGeom>
-            <a:ln>
-              <a:prstDash val="sysDash"/>
-              <a:tailEnd type="triangle"/>
-            </a:ln>
-          </p:spPr>
-          <p:style>
-            <a:lnRef idx="2">
-              <a:schemeClr val="dk1"/>
-            </a:lnRef>
-            <a:fillRef idx="0">
-              <a:schemeClr val="dk1"/>
-            </a:fillRef>
-            <a:effectRef idx="1">
-              <a:schemeClr val="dk1"/>
-            </a:effectRef>
-            <a:fontRef idx="minor">
-              <a:schemeClr val="tx1"/>
-            </a:fontRef>
-          </p:style>
-        </p:cxnSp>
-        <p:sp>
-          <p:nvSpPr>
-            <p:cNvPr id="127" name="TextBox 126">
-              <a:extLst>
-                <a:ext uri="{FF2B5EF4-FFF2-40B4-BE49-F238E27FC236}">
-                  <a16:creationId xmlns:a16="http://schemas.microsoft.com/office/drawing/2014/main" id="{24828A13-0ABB-4092-4FE7-E2461035A995}"/>
-                </a:ext>
-              </a:extLst>
-            </p:cNvPr>
-            <p:cNvSpPr txBox="1"/>
-            <p:nvPr/>
-          </p:nvSpPr>
-          <p:spPr>
-            <a:xfrm>
-              <a:off x="5848567" y="1842709"/>
-              <a:ext cx="3163896" cy="369332"/>
-            </a:xfrm>
-            <a:prstGeom prst="rect">
-              <a:avLst/>
-            </a:prstGeom>
-            <a:noFill/>
-          </p:spPr>
-          <p:txBody>
-            <a:bodyPr wrap="square" rtlCol="0">
-              <a:spAutoFit/>
-            </a:bodyPr>
-            <a:lstStyle/>
-            <a:p>
-              <a:r>
-                <a:rPr lang="en-US" dirty="0"/>
-                <a:t>Slower progression rate if SVR</a:t>
-              </a:r>
-            </a:p>
-          </p:txBody>
-        </p:sp>
-        <p:cxnSp>
-          <p:nvCxnSpPr>
             <p:cNvPr id="46" name="Straight Arrow Connector 45">
               <a:extLst>
                 <a:ext uri="{FF2B5EF4-FFF2-40B4-BE49-F238E27FC236}">
@@ -7101,6 +6295,50 @@
           </p:style>
         </p:cxnSp>
       </p:grpSp>
+      <p:cxnSp>
+        <p:nvCxnSpPr>
+          <p:cNvPr id="3" name="Curved Connector 2">
+            <a:extLst>
+              <a:ext uri="{FF2B5EF4-FFF2-40B4-BE49-F238E27FC236}">
+                <a16:creationId xmlns:a16="http://schemas.microsoft.com/office/drawing/2014/main" id="{B73A496E-BBF3-40F2-00A7-C18820F097D3}"/>
+              </a:ext>
+            </a:extLst>
+          </p:cNvPr>
+          <p:cNvCxnSpPr>
+            <a:stCxn id="31" idx="0"/>
+            <a:endCxn id="98" idx="0"/>
+          </p:cNvCxnSpPr>
+          <p:nvPr/>
+        </p:nvCxnSpPr>
+        <p:spPr>
+          <a:xfrm rot="5400000" flipH="1" flipV="1">
+            <a:off x="7351547" y="-568255"/>
+            <a:ext cx="12700" cy="6011923"/>
+          </a:xfrm>
+          <a:prstGeom prst="curvedConnector3">
+            <a:avLst>
+              <a:gd name="adj1" fmla="val 3434354"/>
+            </a:avLst>
+          </a:prstGeom>
+          <a:ln>
+            <a:tailEnd type="triangle"/>
+          </a:ln>
+        </p:spPr>
+        <p:style>
+          <a:lnRef idx="2">
+            <a:schemeClr val="dk1"/>
+          </a:lnRef>
+          <a:fillRef idx="0">
+            <a:schemeClr val="dk1"/>
+          </a:fillRef>
+          <a:effectRef idx="1">
+            <a:schemeClr val="dk1"/>
+          </a:effectRef>
+          <a:fontRef idx="minor">
+            <a:schemeClr val="tx1"/>
+          </a:fontRef>
+        </p:style>
+      </p:cxnSp>
     </p:spTree>
     <p:extLst>
       <p:ext uri="{BB962C8B-B14F-4D97-AF65-F5344CB8AC3E}">
@@ -7137,563 +6375,6 @@
           <a:chExt cx="0" cy="0"/>
         </a:xfrm>
       </p:grpSpPr>
-      <p:grpSp>
-        <p:nvGrpSpPr>
-          <p:cNvPr id="22" name="Group 21">
-            <a:extLst>
-              <a:ext uri="{FF2B5EF4-FFF2-40B4-BE49-F238E27FC236}">
-                <a16:creationId xmlns:a16="http://schemas.microsoft.com/office/drawing/2014/main" id="{31B04CF9-AFA0-242E-EF1A-DA5D93B53A6A}"/>
-              </a:ext>
-            </a:extLst>
-          </p:cNvPr>
-          <p:cNvGrpSpPr/>
-          <p:nvPr/>
-        </p:nvGrpSpPr>
-        <p:grpSpPr>
-          <a:xfrm>
-            <a:off x="4919687" y="1985850"/>
-            <a:ext cx="2651739" cy="2886300"/>
-            <a:chOff x="1383547" y="879532"/>
-            <a:chExt cx="2894380" cy="3150404"/>
-          </a:xfrm>
-        </p:grpSpPr>
-        <p:sp>
-          <p:nvSpPr>
-            <p:cNvPr id="4" name="Rounded Rectangle 3">
-              <a:extLst>
-                <a:ext uri="{FF2B5EF4-FFF2-40B4-BE49-F238E27FC236}">
-                  <a16:creationId xmlns:a16="http://schemas.microsoft.com/office/drawing/2014/main" id="{56DC7DE5-F2D1-9B14-626E-F34206460CE5}"/>
-                </a:ext>
-              </a:extLst>
-            </p:cNvPr>
-            <p:cNvSpPr/>
-            <p:nvPr/>
-          </p:nvSpPr>
-          <p:spPr>
-            <a:xfrm>
-              <a:off x="2185502" y="879532"/>
-              <a:ext cx="1265418" cy="773904"/>
-            </a:xfrm>
-            <a:prstGeom prst="roundRect">
-              <a:avLst/>
-            </a:prstGeom>
-            <a:noFill/>
-          </p:spPr>
-          <p:style>
-            <a:lnRef idx="2">
-              <a:schemeClr val="accent1">
-                <a:shade val="15000"/>
-              </a:schemeClr>
-            </a:lnRef>
-            <a:fillRef idx="1">
-              <a:schemeClr val="accent1"/>
-            </a:fillRef>
-            <a:effectRef idx="0">
-              <a:schemeClr val="accent1"/>
-            </a:effectRef>
-            <a:fontRef idx="minor">
-              <a:schemeClr val="lt1"/>
-            </a:fontRef>
-          </p:style>
-          <p:txBody>
-            <a:bodyPr rtlCol="0" anchor="ctr"/>
-            <a:lstStyle/>
-            <a:p>
-              <a:pPr algn="ctr"/>
-              <a:r>
-                <a:rPr lang="en-US" sz="1200" dirty="0">
-                  <a:solidFill>
-                    <a:schemeClr val="tx1"/>
-                  </a:solidFill>
-                </a:rPr>
-                <a:t>Susceptible (u)</a:t>
-              </a:r>
-            </a:p>
-          </p:txBody>
-        </p:sp>
-        <p:cxnSp>
-          <p:nvCxnSpPr>
-            <p:cNvPr id="5" name="Straight Arrow Connector 4">
-              <a:extLst>
-                <a:ext uri="{FF2B5EF4-FFF2-40B4-BE49-F238E27FC236}">
-                  <a16:creationId xmlns:a16="http://schemas.microsoft.com/office/drawing/2014/main" id="{2832B463-DA3E-AACF-855F-AC3020BA3302}"/>
-                </a:ext>
-              </a:extLst>
-            </p:cNvPr>
-            <p:cNvCxnSpPr>
-              <a:cxnSpLocks/>
-            </p:cNvCxnSpPr>
-            <p:nvPr/>
-          </p:nvCxnSpPr>
-          <p:spPr>
-            <a:xfrm>
-              <a:off x="2442575" y="1653436"/>
-              <a:ext cx="0" cy="414346"/>
-            </a:xfrm>
-            <a:prstGeom prst="straightConnector1">
-              <a:avLst/>
-            </a:prstGeom>
-            <a:ln>
-              <a:tailEnd type="triangle"/>
-            </a:ln>
-          </p:spPr>
-          <p:style>
-            <a:lnRef idx="2">
-              <a:schemeClr val="dk1"/>
-            </a:lnRef>
-            <a:fillRef idx="0">
-              <a:schemeClr val="dk1"/>
-            </a:fillRef>
-            <a:effectRef idx="1">
-              <a:schemeClr val="dk1"/>
-            </a:effectRef>
-            <a:fontRef idx="minor">
-              <a:schemeClr val="tx1"/>
-            </a:fontRef>
-          </p:style>
-        </p:cxnSp>
-        <p:sp>
-          <p:nvSpPr>
-            <p:cNvPr id="6" name="Rounded Rectangle 5">
-              <a:extLst>
-                <a:ext uri="{FF2B5EF4-FFF2-40B4-BE49-F238E27FC236}">
-                  <a16:creationId xmlns:a16="http://schemas.microsoft.com/office/drawing/2014/main" id="{959C5AF2-2962-9361-E134-8F3357BD2489}"/>
-                </a:ext>
-              </a:extLst>
-            </p:cNvPr>
-            <p:cNvSpPr/>
-            <p:nvPr/>
-          </p:nvSpPr>
-          <p:spPr>
-            <a:xfrm>
-              <a:off x="2185502" y="3256032"/>
-              <a:ext cx="1265418" cy="773904"/>
-            </a:xfrm>
-            <a:prstGeom prst="roundRect">
-              <a:avLst/>
-            </a:prstGeom>
-            <a:noFill/>
-          </p:spPr>
-          <p:style>
-            <a:lnRef idx="2">
-              <a:schemeClr val="accent1">
-                <a:shade val="15000"/>
-              </a:schemeClr>
-            </a:lnRef>
-            <a:fillRef idx="1">
-              <a:schemeClr val="accent1"/>
-            </a:fillRef>
-            <a:effectRef idx="0">
-              <a:schemeClr val="accent1"/>
-            </a:effectRef>
-            <a:fontRef idx="minor">
-              <a:schemeClr val="lt1"/>
-            </a:fontRef>
-          </p:style>
-          <p:txBody>
-            <a:bodyPr rtlCol="0" anchor="ctr"/>
-            <a:lstStyle/>
-            <a:p>
-              <a:pPr algn="ctr"/>
-              <a:r>
-                <a:rPr lang="en-US" sz="1200" dirty="0">
-                  <a:solidFill>
-                    <a:schemeClr val="tx1"/>
-                  </a:solidFill>
-                </a:rPr>
-                <a:t>Chronic infection (c)</a:t>
-              </a:r>
-            </a:p>
-          </p:txBody>
-        </p:sp>
-        <p:sp>
-          <p:nvSpPr>
-            <p:cNvPr id="7" name="Rounded Rectangle 6">
-              <a:extLst>
-                <a:ext uri="{FF2B5EF4-FFF2-40B4-BE49-F238E27FC236}">
-                  <a16:creationId xmlns:a16="http://schemas.microsoft.com/office/drawing/2014/main" id="{CAE852B0-F189-5A92-48FC-D7416685FB13}"/>
-                </a:ext>
-              </a:extLst>
-            </p:cNvPr>
-            <p:cNvSpPr/>
-            <p:nvPr/>
-          </p:nvSpPr>
-          <p:spPr>
-            <a:xfrm>
-              <a:off x="1383547" y="2067782"/>
-              <a:ext cx="1265418" cy="773904"/>
-            </a:xfrm>
-            <a:prstGeom prst="roundRect">
-              <a:avLst/>
-            </a:prstGeom>
-            <a:noFill/>
-          </p:spPr>
-          <p:style>
-            <a:lnRef idx="2">
-              <a:schemeClr val="accent1">
-                <a:shade val="15000"/>
-              </a:schemeClr>
-            </a:lnRef>
-            <a:fillRef idx="1">
-              <a:schemeClr val="accent1"/>
-            </a:fillRef>
-            <a:effectRef idx="0">
-              <a:schemeClr val="accent1"/>
-            </a:effectRef>
-            <a:fontRef idx="minor">
-              <a:schemeClr val="lt1"/>
-            </a:fontRef>
-          </p:style>
-          <p:txBody>
-            <a:bodyPr rtlCol="0" anchor="ctr"/>
-            <a:lstStyle/>
-            <a:p>
-              <a:pPr algn="ctr"/>
-              <a:r>
-                <a:rPr lang="en-US" sz="1200" dirty="0">
-                  <a:solidFill>
-                    <a:schemeClr val="tx1"/>
-                  </a:solidFill>
-                </a:rPr>
-                <a:t>Acute infection (a)</a:t>
-              </a:r>
-            </a:p>
-          </p:txBody>
-        </p:sp>
-        <p:sp>
-          <p:nvSpPr>
-            <p:cNvPr id="8" name="Rounded Rectangle 7">
-              <a:extLst>
-                <a:ext uri="{FF2B5EF4-FFF2-40B4-BE49-F238E27FC236}">
-                  <a16:creationId xmlns:a16="http://schemas.microsoft.com/office/drawing/2014/main" id="{98C122C1-D9E0-449E-D90E-1BE7DC75093A}"/>
-                </a:ext>
-              </a:extLst>
-            </p:cNvPr>
-            <p:cNvSpPr/>
-            <p:nvPr/>
-          </p:nvSpPr>
-          <p:spPr>
-            <a:xfrm>
-              <a:off x="3012509" y="2067782"/>
-              <a:ext cx="1265418" cy="773904"/>
-            </a:xfrm>
-            <a:prstGeom prst="roundRect">
-              <a:avLst/>
-            </a:prstGeom>
-            <a:noFill/>
-          </p:spPr>
-          <p:style>
-            <a:lnRef idx="2">
-              <a:schemeClr val="accent1">
-                <a:shade val="15000"/>
-              </a:schemeClr>
-            </a:lnRef>
-            <a:fillRef idx="1">
-              <a:schemeClr val="accent1"/>
-            </a:fillRef>
-            <a:effectRef idx="0">
-              <a:schemeClr val="accent1"/>
-            </a:effectRef>
-            <a:fontRef idx="minor">
-              <a:schemeClr val="lt1"/>
-            </a:fontRef>
-          </p:style>
-          <p:txBody>
-            <a:bodyPr rtlCol="0" anchor="ctr"/>
-            <a:lstStyle/>
-            <a:p>
-              <a:pPr algn="ctr"/>
-              <a:r>
-                <a:rPr lang="en-US" sz="1200" dirty="0">
-                  <a:solidFill>
-                    <a:schemeClr val="tx1"/>
-                  </a:solidFill>
-                </a:rPr>
-                <a:t>Treatment (t)</a:t>
-              </a:r>
-            </a:p>
-          </p:txBody>
-        </p:sp>
-        <p:cxnSp>
-          <p:nvCxnSpPr>
-            <p:cNvPr id="11" name="Straight Arrow Connector 10">
-              <a:extLst>
-                <a:ext uri="{FF2B5EF4-FFF2-40B4-BE49-F238E27FC236}">
-                  <a16:creationId xmlns:a16="http://schemas.microsoft.com/office/drawing/2014/main" id="{498BEC07-9437-0DEF-D716-5A48A6FE39EA}"/>
-                </a:ext>
-              </a:extLst>
-            </p:cNvPr>
-            <p:cNvCxnSpPr>
-              <a:cxnSpLocks/>
-            </p:cNvCxnSpPr>
-            <p:nvPr/>
-          </p:nvCxnSpPr>
-          <p:spPr>
-            <a:xfrm>
-              <a:off x="2444662" y="2841686"/>
-              <a:ext cx="0" cy="414346"/>
-            </a:xfrm>
-            <a:prstGeom prst="straightConnector1">
-              <a:avLst/>
-            </a:prstGeom>
-            <a:ln>
-              <a:tailEnd type="triangle"/>
-            </a:ln>
-          </p:spPr>
-          <p:style>
-            <a:lnRef idx="2">
-              <a:schemeClr val="dk1"/>
-            </a:lnRef>
-            <a:fillRef idx="0">
-              <a:schemeClr val="dk1"/>
-            </a:fillRef>
-            <a:effectRef idx="1">
-              <a:schemeClr val="dk1"/>
-            </a:effectRef>
-            <a:fontRef idx="minor">
-              <a:schemeClr val="tx1"/>
-            </a:fontRef>
-          </p:style>
-        </p:cxnSp>
-        <p:cxnSp>
-          <p:nvCxnSpPr>
-            <p:cNvPr id="14" name="Straight Arrow Connector 13">
-              <a:extLst>
-                <a:ext uri="{FF2B5EF4-FFF2-40B4-BE49-F238E27FC236}">
-                  <a16:creationId xmlns:a16="http://schemas.microsoft.com/office/drawing/2014/main" id="{71020ACA-CCA8-2D87-C491-5C9E7B7CBAEE}"/>
-                </a:ext>
-              </a:extLst>
-            </p:cNvPr>
-            <p:cNvCxnSpPr/>
-            <p:nvPr/>
-          </p:nvCxnSpPr>
-          <p:spPr>
-            <a:xfrm flipV="1">
-              <a:off x="3175348" y="2835916"/>
-              <a:ext cx="0" cy="419622"/>
-            </a:xfrm>
-            <a:prstGeom prst="straightConnector1">
-              <a:avLst/>
-            </a:prstGeom>
-            <a:ln>
-              <a:tailEnd type="triangle"/>
-            </a:ln>
-          </p:spPr>
-          <p:style>
-            <a:lnRef idx="2">
-              <a:schemeClr val="dk1"/>
-            </a:lnRef>
-            <a:fillRef idx="0">
-              <a:schemeClr val="dk1"/>
-            </a:fillRef>
-            <a:effectRef idx="1">
-              <a:schemeClr val="dk1"/>
-            </a:effectRef>
-            <a:fontRef idx="minor">
-              <a:schemeClr val="tx1"/>
-            </a:fontRef>
-          </p:style>
-        </p:cxnSp>
-        <p:cxnSp>
-          <p:nvCxnSpPr>
-            <p:cNvPr id="16" name="Straight Arrow Connector 15">
-              <a:extLst>
-                <a:ext uri="{FF2B5EF4-FFF2-40B4-BE49-F238E27FC236}">
-                  <a16:creationId xmlns:a16="http://schemas.microsoft.com/office/drawing/2014/main" id="{12838710-8017-D148-689F-143D0809E311}"/>
-                </a:ext>
-              </a:extLst>
-            </p:cNvPr>
-            <p:cNvCxnSpPr/>
-            <p:nvPr/>
-          </p:nvCxnSpPr>
-          <p:spPr>
-            <a:xfrm flipV="1">
-              <a:off x="3175348" y="1648160"/>
-              <a:ext cx="0" cy="419622"/>
-            </a:xfrm>
-            <a:prstGeom prst="straightConnector1">
-              <a:avLst/>
-            </a:prstGeom>
-            <a:ln>
-              <a:tailEnd type="triangle"/>
-            </a:ln>
-          </p:spPr>
-          <p:style>
-            <a:lnRef idx="2">
-              <a:schemeClr val="dk1"/>
-            </a:lnRef>
-            <a:fillRef idx="0">
-              <a:schemeClr val="dk1"/>
-            </a:fillRef>
-            <a:effectRef idx="1">
-              <a:schemeClr val="dk1"/>
-            </a:effectRef>
-            <a:fontRef idx="minor">
-              <a:schemeClr val="tx1"/>
-            </a:fontRef>
-          </p:style>
-        </p:cxnSp>
-        <p:cxnSp>
-          <p:nvCxnSpPr>
-            <p:cNvPr id="17" name="Straight Arrow Connector 16">
-              <a:extLst>
-                <a:ext uri="{FF2B5EF4-FFF2-40B4-BE49-F238E27FC236}">
-                  <a16:creationId xmlns:a16="http://schemas.microsoft.com/office/drawing/2014/main" id="{A4F227C9-2472-CBCF-C20E-61F51F161E95}"/>
-                </a:ext>
-              </a:extLst>
-            </p:cNvPr>
-            <p:cNvCxnSpPr/>
-            <p:nvPr/>
-          </p:nvCxnSpPr>
-          <p:spPr>
-            <a:xfrm flipV="1">
-              <a:off x="2294351" y="1648160"/>
-              <a:ext cx="0" cy="419622"/>
-            </a:xfrm>
-            <a:prstGeom prst="straightConnector1">
-              <a:avLst/>
-            </a:prstGeom>
-            <a:ln>
-              <a:tailEnd type="triangle"/>
-            </a:ln>
-          </p:spPr>
-          <p:style>
-            <a:lnRef idx="2">
-              <a:schemeClr val="dk1"/>
-            </a:lnRef>
-            <a:fillRef idx="0">
-              <a:schemeClr val="dk1"/>
-            </a:fillRef>
-            <a:effectRef idx="1">
-              <a:schemeClr val="dk1"/>
-            </a:effectRef>
-            <a:fontRef idx="minor">
-              <a:schemeClr val="tx1"/>
-            </a:fontRef>
-          </p:style>
-        </p:cxnSp>
-        <p:cxnSp>
-          <p:nvCxnSpPr>
-            <p:cNvPr id="18" name="Straight Arrow Connector 17">
-              <a:extLst>
-                <a:ext uri="{FF2B5EF4-FFF2-40B4-BE49-F238E27FC236}">
-                  <a16:creationId xmlns:a16="http://schemas.microsoft.com/office/drawing/2014/main" id="{C5F47FC6-E24A-CAAB-6F47-10A50319A70E}"/>
-                </a:ext>
-              </a:extLst>
-            </p:cNvPr>
-            <p:cNvCxnSpPr/>
-            <p:nvPr/>
-          </p:nvCxnSpPr>
-          <p:spPr>
-            <a:xfrm flipV="1">
-              <a:off x="2294351" y="2835916"/>
-              <a:ext cx="0" cy="419622"/>
-            </a:xfrm>
-            <a:prstGeom prst="straightConnector1">
-              <a:avLst/>
-            </a:prstGeom>
-            <a:ln>
-              <a:tailEnd type="triangle"/>
-            </a:ln>
-          </p:spPr>
-          <p:style>
-            <a:lnRef idx="2">
-              <a:schemeClr val="dk1"/>
-            </a:lnRef>
-            <a:fillRef idx="0">
-              <a:schemeClr val="dk1"/>
-            </a:fillRef>
-            <a:effectRef idx="1">
-              <a:schemeClr val="dk1"/>
-            </a:effectRef>
-            <a:fontRef idx="minor">
-              <a:schemeClr val="tx1"/>
-            </a:fontRef>
-          </p:style>
-        </p:cxnSp>
-        <p:cxnSp>
-          <p:nvCxnSpPr>
-            <p:cNvPr id="20" name="Straight Arrow Connector 19">
-              <a:extLst>
-                <a:ext uri="{FF2B5EF4-FFF2-40B4-BE49-F238E27FC236}">
-                  <a16:creationId xmlns:a16="http://schemas.microsoft.com/office/drawing/2014/main" id="{C960DFC0-4719-94E4-2FCC-091155BB4685}"/>
-                </a:ext>
-              </a:extLst>
-            </p:cNvPr>
-            <p:cNvCxnSpPr>
-              <a:cxnSpLocks/>
-            </p:cNvCxnSpPr>
-            <p:nvPr/>
-          </p:nvCxnSpPr>
-          <p:spPr>
-            <a:xfrm>
-              <a:off x="3334010" y="1659643"/>
-              <a:ext cx="0" cy="414346"/>
-            </a:xfrm>
-            <a:prstGeom prst="straightConnector1">
-              <a:avLst/>
-            </a:prstGeom>
-            <a:ln>
-              <a:tailEnd type="triangle"/>
-            </a:ln>
-          </p:spPr>
-          <p:style>
-            <a:lnRef idx="2">
-              <a:schemeClr val="dk1"/>
-            </a:lnRef>
-            <a:fillRef idx="0">
-              <a:schemeClr val="dk1"/>
-            </a:fillRef>
-            <a:effectRef idx="1">
-              <a:schemeClr val="dk1"/>
-            </a:effectRef>
-            <a:fontRef idx="minor">
-              <a:schemeClr val="tx1"/>
-            </a:fontRef>
-          </p:style>
-        </p:cxnSp>
-        <p:cxnSp>
-          <p:nvCxnSpPr>
-            <p:cNvPr id="21" name="Straight Arrow Connector 20">
-              <a:extLst>
-                <a:ext uri="{FF2B5EF4-FFF2-40B4-BE49-F238E27FC236}">
-                  <a16:creationId xmlns:a16="http://schemas.microsoft.com/office/drawing/2014/main" id="{D5946712-156A-104C-C555-F72071A32B33}"/>
-                </a:ext>
-              </a:extLst>
-            </p:cNvPr>
-            <p:cNvCxnSpPr>
-              <a:cxnSpLocks/>
-            </p:cNvCxnSpPr>
-            <p:nvPr/>
-          </p:nvCxnSpPr>
-          <p:spPr>
-            <a:xfrm>
-              <a:off x="3334010" y="2841192"/>
-              <a:ext cx="0" cy="414346"/>
-            </a:xfrm>
-            <a:prstGeom prst="straightConnector1">
-              <a:avLst/>
-            </a:prstGeom>
-            <a:ln>
-              <a:tailEnd type="triangle"/>
-            </a:ln>
-          </p:spPr>
-          <p:style>
-            <a:lnRef idx="2">
-              <a:schemeClr val="dk1"/>
-            </a:lnRef>
-            <a:fillRef idx="0">
-              <a:schemeClr val="dk1"/>
-            </a:fillRef>
-            <a:effectRef idx="1">
-              <a:schemeClr val="dk1"/>
-            </a:effectRef>
-            <a:fontRef idx="minor">
-              <a:schemeClr val="tx1"/>
-            </a:fontRef>
-          </p:style>
-        </p:cxnSp>
-      </p:grpSp>
       <p:sp>
         <p:nvSpPr>
           <p:cNvPr id="130" name="TextBox 129">
@@ -7729,6 +6410,1107 @@
           </a:p>
         </p:txBody>
       </p:sp>
+      <p:grpSp>
+        <p:nvGrpSpPr>
+          <p:cNvPr id="143" name="Group 142">
+            <a:extLst>
+              <a:ext uri="{FF2B5EF4-FFF2-40B4-BE49-F238E27FC236}">
+                <a16:creationId xmlns:a16="http://schemas.microsoft.com/office/drawing/2014/main" id="{3615AA44-A37A-0B05-226C-80BEC0861FBA}"/>
+              </a:ext>
+            </a:extLst>
+          </p:cNvPr>
+          <p:cNvGrpSpPr/>
+          <p:nvPr/>
+        </p:nvGrpSpPr>
+        <p:grpSpPr>
+          <a:xfrm>
+            <a:off x="1357233" y="1387898"/>
+            <a:ext cx="9766181" cy="1685010"/>
+            <a:chOff x="1357233" y="1387898"/>
+            <a:chExt cx="9766181" cy="1685010"/>
+          </a:xfrm>
+        </p:grpSpPr>
+        <p:sp>
+          <p:nvSpPr>
+            <p:cNvPr id="3" name="Rounded Rectangle 2">
+              <a:extLst>
+                <a:ext uri="{FF2B5EF4-FFF2-40B4-BE49-F238E27FC236}">
+                  <a16:creationId xmlns:a16="http://schemas.microsoft.com/office/drawing/2014/main" id="{A27920FA-AAEE-6639-1F69-5359DC207481}"/>
+                </a:ext>
+              </a:extLst>
+            </p:cNvPr>
+            <p:cNvSpPr/>
+            <p:nvPr/>
+          </p:nvSpPr>
+          <p:spPr>
+            <a:xfrm>
+              <a:off x="1357233" y="1907562"/>
+              <a:ext cx="1840781" cy="523222"/>
+            </a:xfrm>
+            <a:prstGeom prst="roundRect">
+              <a:avLst/>
+            </a:prstGeom>
+            <a:noFill/>
+          </p:spPr>
+          <p:style>
+            <a:lnRef idx="2">
+              <a:schemeClr val="accent1">
+                <a:shade val="15000"/>
+              </a:schemeClr>
+            </a:lnRef>
+            <a:fillRef idx="1">
+              <a:schemeClr val="accent1"/>
+            </a:fillRef>
+            <a:effectRef idx="0">
+              <a:schemeClr val="accent1"/>
+            </a:effectRef>
+            <a:fontRef idx="minor">
+              <a:schemeClr val="lt1"/>
+            </a:fontRef>
+          </p:style>
+          <p:txBody>
+            <a:bodyPr rtlCol="0" anchor="ctr"/>
+            <a:lstStyle/>
+            <a:p>
+              <a:pPr algn="ctr"/>
+              <a:r>
+                <a:rPr lang="en-US" sz="1600" dirty="0">
+                  <a:solidFill>
+                    <a:schemeClr val="tx1"/>
+                  </a:solidFill>
+                </a:rPr>
+                <a:t>Susceptible (U)</a:t>
+              </a:r>
+            </a:p>
+          </p:txBody>
+        </p:sp>
+        <p:sp>
+          <p:nvSpPr>
+            <p:cNvPr id="10" name="Rounded Rectangle 9">
+              <a:extLst>
+                <a:ext uri="{FF2B5EF4-FFF2-40B4-BE49-F238E27FC236}">
+                  <a16:creationId xmlns:a16="http://schemas.microsoft.com/office/drawing/2014/main" id="{69994278-C636-A871-A99C-FCE84AA77D33}"/>
+                </a:ext>
+              </a:extLst>
+            </p:cNvPr>
+            <p:cNvSpPr/>
+            <p:nvPr/>
+          </p:nvSpPr>
+          <p:spPr>
+            <a:xfrm>
+              <a:off x="6640833" y="1901212"/>
+              <a:ext cx="1840781" cy="523222"/>
+            </a:xfrm>
+            <a:prstGeom prst="roundRect">
+              <a:avLst/>
+            </a:prstGeom>
+            <a:noFill/>
+          </p:spPr>
+          <p:style>
+            <a:lnRef idx="2">
+              <a:schemeClr val="accent1">
+                <a:shade val="15000"/>
+              </a:schemeClr>
+            </a:lnRef>
+            <a:fillRef idx="1">
+              <a:schemeClr val="accent1"/>
+            </a:fillRef>
+            <a:effectRef idx="0">
+              <a:schemeClr val="accent1"/>
+            </a:effectRef>
+            <a:fontRef idx="minor">
+              <a:schemeClr val="lt1"/>
+            </a:fontRef>
+          </p:style>
+          <p:txBody>
+            <a:bodyPr rtlCol="0" anchor="ctr"/>
+            <a:lstStyle/>
+            <a:p>
+              <a:pPr algn="ctr"/>
+              <a:r>
+                <a:rPr lang="en-US" sz="1600" dirty="0">
+                  <a:solidFill>
+                    <a:schemeClr val="tx1"/>
+                  </a:solidFill>
+                </a:rPr>
+                <a:t>Chronic infection (C)</a:t>
+              </a:r>
+            </a:p>
+          </p:txBody>
+        </p:sp>
+        <p:sp>
+          <p:nvSpPr>
+            <p:cNvPr id="12" name="Rounded Rectangle 11">
+              <a:extLst>
+                <a:ext uri="{FF2B5EF4-FFF2-40B4-BE49-F238E27FC236}">
+                  <a16:creationId xmlns:a16="http://schemas.microsoft.com/office/drawing/2014/main" id="{DFA6E815-DAE5-8980-6597-ED06BD32C413}"/>
+                </a:ext>
+              </a:extLst>
+            </p:cNvPr>
+            <p:cNvSpPr/>
+            <p:nvPr/>
+          </p:nvSpPr>
+          <p:spPr>
+            <a:xfrm>
+              <a:off x="3999033" y="1901212"/>
+              <a:ext cx="1840781" cy="523222"/>
+            </a:xfrm>
+            <a:prstGeom prst="roundRect">
+              <a:avLst/>
+            </a:prstGeom>
+            <a:noFill/>
+          </p:spPr>
+          <p:style>
+            <a:lnRef idx="2">
+              <a:schemeClr val="accent1">
+                <a:shade val="15000"/>
+              </a:schemeClr>
+            </a:lnRef>
+            <a:fillRef idx="1">
+              <a:schemeClr val="accent1"/>
+            </a:fillRef>
+            <a:effectRef idx="0">
+              <a:schemeClr val="accent1"/>
+            </a:effectRef>
+            <a:fontRef idx="minor">
+              <a:schemeClr val="lt1"/>
+            </a:fontRef>
+          </p:style>
+          <p:txBody>
+            <a:bodyPr rtlCol="0" anchor="ctr"/>
+            <a:lstStyle/>
+            <a:p>
+              <a:pPr algn="ctr"/>
+              <a:r>
+                <a:rPr lang="en-US" sz="1600" dirty="0">
+                  <a:solidFill>
+                    <a:schemeClr val="tx1"/>
+                  </a:solidFill>
+                </a:rPr>
+                <a:t>Acute infection (A)</a:t>
+              </a:r>
+            </a:p>
+          </p:txBody>
+        </p:sp>
+        <p:cxnSp>
+          <p:nvCxnSpPr>
+            <p:cNvPr id="25" name="Straight Arrow Connector 24">
+              <a:extLst>
+                <a:ext uri="{FF2B5EF4-FFF2-40B4-BE49-F238E27FC236}">
+                  <a16:creationId xmlns:a16="http://schemas.microsoft.com/office/drawing/2014/main" id="{191CEACE-0D81-6832-99C5-D9DDD4042DF4}"/>
+                </a:ext>
+              </a:extLst>
+            </p:cNvPr>
+            <p:cNvCxnSpPr>
+              <a:stCxn id="3" idx="3"/>
+              <a:endCxn id="12" idx="1"/>
+            </p:cNvCxnSpPr>
+            <p:nvPr/>
+          </p:nvCxnSpPr>
+          <p:spPr>
+            <a:xfrm flipV="1">
+              <a:off x="3198014" y="2162823"/>
+              <a:ext cx="801019" cy="6350"/>
+            </a:xfrm>
+            <a:prstGeom prst="straightConnector1">
+              <a:avLst/>
+            </a:prstGeom>
+            <a:ln>
+              <a:tailEnd type="triangle"/>
+            </a:ln>
+          </p:spPr>
+          <p:style>
+            <a:lnRef idx="2">
+              <a:schemeClr val="dk1"/>
+            </a:lnRef>
+            <a:fillRef idx="0">
+              <a:schemeClr val="dk1"/>
+            </a:fillRef>
+            <a:effectRef idx="1">
+              <a:schemeClr val="dk1"/>
+            </a:effectRef>
+            <a:fontRef idx="minor">
+              <a:schemeClr val="tx1"/>
+            </a:fontRef>
+          </p:style>
+        </p:cxnSp>
+        <p:cxnSp>
+          <p:nvCxnSpPr>
+            <p:cNvPr id="26" name="Straight Arrow Connector 25">
+              <a:extLst>
+                <a:ext uri="{FF2B5EF4-FFF2-40B4-BE49-F238E27FC236}">
+                  <a16:creationId xmlns:a16="http://schemas.microsoft.com/office/drawing/2014/main" id="{020A7D3C-C808-6C1B-1542-5963EA28F9AF}"/>
+                </a:ext>
+              </a:extLst>
+            </p:cNvPr>
+            <p:cNvCxnSpPr>
+              <a:cxnSpLocks/>
+              <a:stCxn id="12" idx="3"/>
+              <a:endCxn id="10" idx="1"/>
+            </p:cNvCxnSpPr>
+            <p:nvPr/>
+          </p:nvCxnSpPr>
+          <p:spPr>
+            <a:xfrm>
+              <a:off x="5839814" y="2162823"/>
+              <a:ext cx="801019" cy="0"/>
+            </a:xfrm>
+            <a:prstGeom prst="straightConnector1">
+              <a:avLst/>
+            </a:prstGeom>
+            <a:ln>
+              <a:tailEnd type="triangle"/>
+            </a:ln>
+          </p:spPr>
+          <p:style>
+            <a:lnRef idx="2">
+              <a:schemeClr val="dk1"/>
+            </a:lnRef>
+            <a:fillRef idx="0">
+              <a:schemeClr val="dk1"/>
+            </a:fillRef>
+            <a:effectRef idx="1">
+              <a:schemeClr val="dk1"/>
+            </a:effectRef>
+            <a:fontRef idx="minor">
+              <a:schemeClr val="tx1"/>
+            </a:fontRef>
+          </p:style>
+        </p:cxnSp>
+        <p:cxnSp>
+          <p:nvCxnSpPr>
+            <p:cNvPr id="33" name="Curved Connector 32">
+              <a:extLst>
+                <a:ext uri="{FF2B5EF4-FFF2-40B4-BE49-F238E27FC236}">
+                  <a16:creationId xmlns:a16="http://schemas.microsoft.com/office/drawing/2014/main" id="{6A9C9D0F-DA25-CAA5-A813-8A37D5DF7B92}"/>
+                </a:ext>
+              </a:extLst>
+            </p:cNvPr>
+            <p:cNvCxnSpPr>
+              <a:stCxn id="12" idx="0"/>
+              <a:endCxn id="3" idx="0"/>
+            </p:cNvCxnSpPr>
+            <p:nvPr/>
+          </p:nvCxnSpPr>
+          <p:spPr>
+            <a:xfrm rot="16200000" flipH="1" flipV="1">
+              <a:off x="3595349" y="583487"/>
+              <a:ext cx="6350" cy="2641800"/>
+            </a:xfrm>
+            <a:prstGeom prst="curvedConnector3">
+              <a:avLst>
+                <a:gd name="adj1" fmla="val -3600000"/>
+              </a:avLst>
+            </a:prstGeom>
+            <a:ln>
+              <a:tailEnd type="triangle"/>
+            </a:ln>
+          </p:spPr>
+          <p:style>
+            <a:lnRef idx="2">
+              <a:schemeClr val="dk1"/>
+            </a:lnRef>
+            <a:fillRef idx="0">
+              <a:schemeClr val="dk1"/>
+            </a:fillRef>
+            <a:effectRef idx="1">
+              <a:schemeClr val="dk1"/>
+            </a:effectRef>
+            <a:fontRef idx="minor">
+              <a:schemeClr val="tx1"/>
+            </a:fontRef>
+          </p:style>
+        </p:cxnSp>
+        <p:sp>
+          <p:nvSpPr>
+            <p:cNvPr id="50" name="Rounded Rectangle 49">
+              <a:extLst>
+                <a:ext uri="{FF2B5EF4-FFF2-40B4-BE49-F238E27FC236}">
+                  <a16:creationId xmlns:a16="http://schemas.microsoft.com/office/drawing/2014/main" id="{A9616304-83B5-E281-0BD2-6907640F6576}"/>
+                </a:ext>
+              </a:extLst>
+            </p:cNvPr>
+            <p:cNvSpPr/>
+            <p:nvPr/>
+          </p:nvSpPr>
+          <p:spPr>
+            <a:xfrm>
+              <a:off x="9282633" y="1901212"/>
+              <a:ext cx="1840781" cy="523222"/>
+            </a:xfrm>
+            <a:prstGeom prst="roundRect">
+              <a:avLst/>
+            </a:prstGeom>
+            <a:noFill/>
+          </p:spPr>
+          <p:style>
+            <a:lnRef idx="2">
+              <a:schemeClr val="accent1">
+                <a:shade val="15000"/>
+              </a:schemeClr>
+            </a:lnRef>
+            <a:fillRef idx="1">
+              <a:schemeClr val="accent1"/>
+            </a:fillRef>
+            <a:effectRef idx="0">
+              <a:schemeClr val="accent1"/>
+            </a:effectRef>
+            <a:fontRef idx="minor">
+              <a:schemeClr val="lt1"/>
+            </a:fontRef>
+          </p:style>
+          <p:txBody>
+            <a:bodyPr rtlCol="0" anchor="ctr"/>
+            <a:lstStyle/>
+            <a:p>
+              <a:pPr algn="ctr"/>
+              <a:r>
+                <a:rPr lang="en-US" sz="1600" dirty="0">
+                  <a:solidFill>
+                    <a:schemeClr val="tx1"/>
+                  </a:solidFill>
+                </a:rPr>
+                <a:t>Treatment (T)</a:t>
+              </a:r>
+            </a:p>
+          </p:txBody>
+        </p:sp>
+        <mc:AlternateContent xmlns:mc="http://schemas.openxmlformats.org/markup-compatibility/2006">
+          <mc:Choice xmlns:a14="http://schemas.microsoft.com/office/drawing/2010/main" Requires="a14">
+            <p:sp>
+              <p:nvSpPr>
+                <p:cNvPr id="51" name="TextBox 50">
+                  <a:extLst>
+                    <a:ext uri="{FF2B5EF4-FFF2-40B4-BE49-F238E27FC236}">
+                      <a16:creationId xmlns:a16="http://schemas.microsoft.com/office/drawing/2014/main" id="{50CD35B7-3197-5A0D-F68F-20F6D45D01F6}"/>
+                    </a:ext>
+                  </a:extLst>
+                </p:cNvPr>
+                <p:cNvSpPr txBox="1"/>
+                <p:nvPr/>
+              </p:nvSpPr>
+              <p:spPr>
+                <a:xfrm>
+                  <a:off x="3105869" y="1852739"/>
+                  <a:ext cx="985309" cy="325089"/>
+                </a:xfrm>
+                <a:prstGeom prst="rect">
+                  <a:avLst/>
+                </a:prstGeom>
+                <a:noFill/>
+              </p:spPr>
+              <p:txBody>
+                <a:bodyPr wrap="square" rtlCol="0">
+                  <a:spAutoFit/>
+                </a:bodyPr>
+                <a:lstStyle/>
+                <a:p>
+                  <a:pPr/>
+                  <a14:m>
+                    <m:oMathPara xmlns:m="http://schemas.openxmlformats.org/officeDocument/2006/math">
+                      <m:oMathParaPr>
+                        <m:jc m:val="centerGroup"/>
+                      </m:oMathParaPr>
+                      <m:oMath xmlns:m="http://schemas.openxmlformats.org/officeDocument/2006/math">
+                        <m:sSub>
+                          <m:sSubPr>
+                            <m:ctrlPr>
+                              <a:rPr lang="en-US" sz="1400" b="0" i="1" smtClean="0">
+                                <a:latin typeface="Cambria Math" panose="02040503050406030204" pitchFamily="18" charset="0"/>
+                              </a:rPr>
+                            </m:ctrlPr>
+                          </m:sSubPr>
+                          <m:e>
+                            <m:r>
+                              <a:rPr lang="en-US" sz="1400" b="0" i="1" smtClean="0">
+                                <a:latin typeface="Cambria Math" panose="02040503050406030204" pitchFamily="18" charset="0"/>
+                              </a:rPr>
+                              <m:t>𝛾</m:t>
+                            </m:r>
+                          </m:e>
+                          <m:sub>
+                            <m:r>
+                              <a:rPr lang="en-US" sz="1400" b="0" i="1" smtClean="0">
+                                <a:latin typeface="Cambria Math" panose="02040503050406030204" pitchFamily="18" charset="0"/>
+                              </a:rPr>
+                              <m:t>𝑖</m:t>
+                            </m:r>
+                            <m:r>
+                              <a:rPr lang="en-US" sz="1400" b="0" i="1" smtClean="0">
+                                <a:latin typeface="Cambria Math" panose="02040503050406030204" pitchFamily="18" charset="0"/>
+                              </a:rPr>
+                              <m:t>,</m:t>
+                            </m:r>
+                            <m:r>
+                              <a:rPr lang="en-US" sz="1400" b="0" i="1" smtClean="0">
+                                <a:latin typeface="Cambria Math" panose="02040503050406030204" pitchFamily="18" charset="0"/>
+                              </a:rPr>
+                              <m:t>𝑗</m:t>
+                            </m:r>
+                          </m:sub>
+                        </m:sSub>
+                        <m:r>
+                          <a:rPr lang="en-US" sz="1400" b="0" i="1" smtClean="0">
+                            <a:latin typeface="Cambria Math" panose="02040503050406030204" pitchFamily="18" charset="0"/>
+                          </a:rPr>
+                          <m:t>(</m:t>
+                        </m:r>
+                        <m:r>
+                          <a:rPr lang="en-US" sz="1400" b="0" i="1" smtClean="0">
+                            <a:latin typeface="Cambria Math" panose="02040503050406030204" pitchFamily="18" charset="0"/>
+                          </a:rPr>
+                          <m:t>𝑡</m:t>
+                        </m:r>
+                        <m:r>
+                          <a:rPr lang="en-US" sz="1400" b="0" i="1" smtClean="0">
+                            <a:latin typeface="Cambria Math" panose="02040503050406030204" pitchFamily="18" charset="0"/>
+                          </a:rPr>
+                          <m:t>)</m:t>
+                        </m:r>
+                      </m:oMath>
+                    </m:oMathPara>
+                  </a14:m>
+                  <a:endParaRPr lang="en-CN" sz="1400" dirty="0"/>
+                </a:p>
+              </p:txBody>
+            </p:sp>
+          </mc:Choice>
+          <mc:Fallback>
+            <p:sp>
+              <p:nvSpPr>
+                <p:cNvPr id="51" name="TextBox 50">
+                  <a:extLst>
+                    <a:ext uri="{FF2B5EF4-FFF2-40B4-BE49-F238E27FC236}">
+                      <a16:creationId xmlns:a16="http://schemas.microsoft.com/office/drawing/2014/main" id="{50CD35B7-3197-5A0D-F68F-20F6D45D01F6}"/>
+                    </a:ext>
+                  </a:extLst>
+                </p:cNvPr>
+                <p:cNvSpPr txBox="1">
+                  <a:spLocks noRot="1" noChangeAspect="1" noMove="1" noResize="1" noEditPoints="1" noAdjustHandles="1" noChangeArrowheads="1" noChangeShapeType="1" noTextEdit="1"/>
+                </p:cNvSpPr>
+                <p:nvPr/>
+              </p:nvSpPr>
+              <p:spPr>
+                <a:xfrm>
+                  <a:off x="3105869" y="1852739"/>
+                  <a:ext cx="985309" cy="325089"/>
+                </a:xfrm>
+                <a:prstGeom prst="rect">
+                  <a:avLst/>
+                </a:prstGeom>
+                <a:blipFill>
+                  <a:blip r:embed="rId2"/>
+                  <a:stretch>
+                    <a:fillRect b="-3704"/>
+                  </a:stretch>
+                </a:blipFill>
+              </p:spPr>
+              <p:txBody>
+                <a:bodyPr/>
+                <a:lstStyle/>
+                <a:p>
+                  <a:r>
+                    <a:rPr lang="en-US">
+                      <a:noFill/>
+                    </a:rPr>
+                    <a:t> </a:t>
+                  </a:r>
+                </a:p>
+              </p:txBody>
+            </p:sp>
+          </mc:Fallback>
+        </mc:AlternateContent>
+        <p:cxnSp>
+          <p:nvCxnSpPr>
+            <p:cNvPr id="52" name="Straight Arrow Connector 51">
+              <a:extLst>
+                <a:ext uri="{FF2B5EF4-FFF2-40B4-BE49-F238E27FC236}">
+                  <a16:creationId xmlns:a16="http://schemas.microsoft.com/office/drawing/2014/main" id="{AF2D1486-906C-CB7D-B7EC-F2AB40453B06}"/>
+                </a:ext>
+              </a:extLst>
+            </p:cNvPr>
+            <p:cNvCxnSpPr>
+              <a:cxnSpLocks/>
+              <a:stCxn id="10" idx="3"/>
+              <a:endCxn id="50" idx="1"/>
+            </p:cNvCxnSpPr>
+            <p:nvPr/>
+          </p:nvCxnSpPr>
+          <p:spPr>
+            <a:xfrm>
+              <a:off x="8481614" y="2162823"/>
+              <a:ext cx="801019" cy="0"/>
+            </a:xfrm>
+            <a:prstGeom prst="straightConnector1">
+              <a:avLst/>
+            </a:prstGeom>
+            <a:ln>
+              <a:tailEnd type="triangle"/>
+            </a:ln>
+          </p:spPr>
+          <p:style>
+            <a:lnRef idx="2">
+              <a:schemeClr val="dk1"/>
+            </a:lnRef>
+            <a:fillRef idx="0">
+              <a:schemeClr val="dk1"/>
+            </a:fillRef>
+            <a:effectRef idx="1">
+              <a:schemeClr val="dk1"/>
+            </a:effectRef>
+            <a:fontRef idx="minor">
+              <a:schemeClr val="tx1"/>
+            </a:fontRef>
+          </p:style>
+        </p:cxnSp>
+        <p:cxnSp>
+          <p:nvCxnSpPr>
+            <p:cNvPr id="55" name="Curved Connector 54">
+              <a:extLst>
+                <a:ext uri="{FF2B5EF4-FFF2-40B4-BE49-F238E27FC236}">
+                  <a16:creationId xmlns:a16="http://schemas.microsoft.com/office/drawing/2014/main" id="{2BCDA284-B036-E30F-41D2-D5EE9C93ACD8}"/>
+                </a:ext>
+              </a:extLst>
+            </p:cNvPr>
+            <p:cNvCxnSpPr>
+              <a:cxnSpLocks/>
+              <a:stCxn id="50" idx="2"/>
+              <a:endCxn id="3" idx="2"/>
+            </p:cNvCxnSpPr>
+            <p:nvPr/>
+          </p:nvCxnSpPr>
+          <p:spPr>
+            <a:xfrm rot="5400000">
+              <a:off x="6237149" y="-1535091"/>
+              <a:ext cx="6350" cy="7925400"/>
+            </a:xfrm>
+            <a:prstGeom prst="curvedConnector3">
+              <a:avLst>
+                <a:gd name="adj1" fmla="val 5378520"/>
+              </a:avLst>
+            </a:prstGeom>
+            <a:ln>
+              <a:tailEnd type="triangle"/>
+            </a:ln>
+          </p:spPr>
+          <p:style>
+            <a:lnRef idx="2">
+              <a:schemeClr val="dk1"/>
+            </a:lnRef>
+            <a:fillRef idx="0">
+              <a:schemeClr val="dk1"/>
+            </a:fillRef>
+            <a:effectRef idx="1">
+              <a:schemeClr val="dk1"/>
+            </a:effectRef>
+            <a:fontRef idx="minor">
+              <a:schemeClr val="tx1"/>
+            </a:fontRef>
+          </p:style>
+        </p:cxnSp>
+        <mc:AlternateContent xmlns:mc="http://schemas.openxmlformats.org/markup-compatibility/2006">
+          <mc:Choice xmlns:a14="http://schemas.microsoft.com/office/drawing/2010/main" Requires="a14">
+            <p:sp>
+              <p:nvSpPr>
+                <p:cNvPr id="128" name="TextBox 127">
+                  <a:extLst>
+                    <a:ext uri="{FF2B5EF4-FFF2-40B4-BE49-F238E27FC236}">
+                      <a16:creationId xmlns:a16="http://schemas.microsoft.com/office/drawing/2014/main" id="{BCB02996-96D8-DC39-2F38-6C662B776582}"/>
+                    </a:ext>
+                  </a:extLst>
+                </p:cNvPr>
+                <p:cNvSpPr txBox="1"/>
+                <p:nvPr/>
+              </p:nvSpPr>
+              <p:spPr>
+                <a:xfrm>
+                  <a:off x="3105868" y="1387898"/>
+                  <a:ext cx="985309" cy="307777"/>
+                </a:xfrm>
+                <a:prstGeom prst="rect">
+                  <a:avLst/>
+                </a:prstGeom>
+                <a:noFill/>
+              </p:spPr>
+              <p:txBody>
+                <a:bodyPr wrap="square" rtlCol="0">
+                  <a:spAutoFit/>
+                </a:bodyPr>
+                <a:lstStyle/>
+                <a:p>
+                  <a:pPr/>
+                  <a14:m>
+                    <m:oMathPara xmlns:m="http://schemas.openxmlformats.org/officeDocument/2006/math">
+                      <m:oMathParaPr>
+                        <m:jc m:val="centerGroup"/>
+                      </m:oMathParaPr>
+                      <m:oMath xmlns:m="http://schemas.openxmlformats.org/officeDocument/2006/math">
+                        <m:r>
+                          <a:rPr lang="en-US" sz="1400" b="0" i="1" smtClean="0">
+                            <a:latin typeface="Cambria Math" panose="02040503050406030204" pitchFamily="18" charset="0"/>
+                          </a:rPr>
+                          <m:t>𝜅</m:t>
+                        </m:r>
+                        <m:r>
+                          <a:rPr lang="en-US" sz="1400" b="0" i="1" smtClean="0">
+                            <a:latin typeface="Cambria Math" panose="02040503050406030204" pitchFamily="18" charset="0"/>
+                          </a:rPr>
+                          <m:t>/</m:t>
+                        </m:r>
+                        <m:sSub>
+                          <m:sSubPr>
+                            <m:ctrlPr>
+                              <a:rPr lang="en-US" sz="1400" b="0" i="1" smtClean="0">
+                                <a:latin typeface="Cambria Math" panose="02040503050406030204" pitchFamily="18" charset="0"/>
+                              </a:rPr>
+                            </m:ctrlPr>
+                          </m:sSubPr>
+                          <m:e>
+                            <m:r>
+                              <a:rPr lang="en-US" sz="1400" b="0" i="1" smtClean="0">
+                                <a:latin typeface="Cambria Math" panose="02040503050406030204" pitchFamily="18" charset="0"/>
+                              </a:rPr>
+                              <m:t>𝜄</m:t>
+                            </m:r>
+                          </m:e>
+                          <m:sub>
+                            <m:r>
+                              <a:rPr lang="en-US" sz="1400" b="0" i="1" smtClean="0">
+                                <a:latin typeface="Cambria Math" panose="02040503050406030204" pitchFamily="18" charset="0"/>
+                              </a:rPr>
+                              <m:t>1</m:t>
+                            </m:r>
+                          </m:sub>
+                        </m:sSub>
+                      </m:oMath>
+                    </m:oMathPara>
+                  </a14:m>
+                  <a:endParaRPr lang="en-CN" sz="1400" dirty="0"/>
+                </a:p>
+              </p:txBody>
+            </p:sp>
+          </mc:Choice>
+          <mc:Fallback>
+            <p:sp>
+              <p:nvSpPr>
+                <p:cNvPr id="128" name="TextBox 127">
+                  <a:extLst>
+                    <a:ext uri="{FF2B5EF4-FFF2-40B4-BE49-F238E27FC236}">
+                      <a16:creationId xmlns:a16="http://schemas.microsoft.com/office/drawing/2014/main" id="{BCB02996-96D8-DC39-2F38-6C662B776582}"/>
+                    </a:ext>
+                  </a:extLst>
+                </p:cNvPr>
+                <p:cNvSpPr txBox="1">
+                  <a:spLocks noRot="1" noChangeAspect="1" noMove="1" noResize="1" noEditPoints="1" noAdjustHandles="1" noChangeArrowheads="1" noChangeShapeType="1" noTextEdit="1"/>
+                </p:cNvSpPr>
+                <p:nvPr/>
+              </p:nvSpPr>
+              <p:spPr>
+                <a:xfrm>
+                  <a:off x="3105868" y="1387898"/>
+                  <a:ext cx="985309" cy="307777"/>
+                </a:xfrm>
+                <a:prstGeom prst="rect">
+                  <a:avLst/>
+                </a:prstGeom>
+                <a:blipFill>
+                  <a:blip r:embed="rId3"/>
+                  <a:stretch>
+                    <a:fillRect b="-8000"/>
+                  </a:stretch>
+                </a:blipFill>
+              </p:spPr>
+              <p:txBody>
+                <a:bodyPr/>
+                <a:lstStyle/>
+                <a:p>
+                  <a:r>
+                    <a:rPr lang="en-US">
+                      <a:noFill/>
+                    </a:rPr>
+                    <a:t> </a:t>
+                  </a:r>
+                </a:p>
+              </p:txBody>
+            </p:sp>
+          </mc:Fallback>
+        </mc:AlternateContent>
+        <mc:AlternateContent xmlns:mc="http://schemas.openxmlformats.org/markup-compatibility/2006">
+          <mc:Choice xmlns:a14="http://schemas.microsoft.com/office/drawing/2010/main" Requires="a14">
+            <p:sp>
+              <p:nvSpPr>
+                <p:cNvPr id="129" name="TextBox 128">
+                  <a:extLst>
+                    <a:ext uri="{FF2B5EF4-FFF2-40B4-BE49-F238E27FC236}">
+                      <a16:creationId xmlns:a16="http://schemas.microsoft.com/office/drawing/2014/main" id="{304378B9-03FF-2A55-17A5-4354AA102D55}"/>
+                    </a:ext>
+                  </a:extLst>
+                </p:cNvPr>
+                <p:cNvSpPr txBox="1"/>
+                <p:nvPr/>
+              </p:nvSpPr>
+              <p:spPr>
+                <a:xfrm>
+                  <a:off x="5747668" y="1861396"/>
+                  <a:ext cx="985309" cy="307777"/>
+                </a:xfrm>
+                <a:prstGeom prst="rect">
+                  <a:avLst/>
+                </a:prstGeom>
+                <a:noFill/>
+              </p:spPr>
+              <p:txBody>
+                <a:bodyPr wrap="square" rtlCol="0">
+                  <a:spAutoFit/>
+                </a:bodyPr>
+                <a:lstStyle/>
+                <a:p>
+                  <a:pPr/>
+                  <a14:m>
+                    <m:oMathPara xmlns:m="http://schemas.openxmlformats.org/officeDocument/2006/math">
+                      <m:oMathParaPr>
+                        <m:jc m:val="centerGroup"/>
+                      </m:oMathParaPr>
+                      <m:oMath xmlns:m="http://schemas.openxmlformats.org/officeDocument/2006/math">
+                        <m:r>
+                          <a:rPr lang="en-US" sz="1400" i="1" smtClean="0">
+                            <a:latin typeface="Cambria Math" panose="02040503050406030204" pitchFamily="18" charset="0"/>
+                          </a:rPr>
+                          <m:t>(</m:t>
+                        </m:r>
+                        <m:r>
+                          <a:rPr lang="en-US" sz="1400" b="0" i="1" smtClean="0">
+                            <a:latin typeface="Cambria Math" panose="02040503050406030204" pitchFamily="18" charset="0"/>
+                          </a:rPr>
+                          <m:t>1−</m:t>
+                        </m:r>
+                        <m:r>
+                          <a:rPr lang="en-US" sz="1400" b="0" i="1" smtClean="0">
+                            <a:latin typeface="Cambria Math" panose="02040503050406030204" pitchFamily="18" charset="0"/>
+                          </a:rPr>
+                          <m:t>𝜅</m:t>
+                        </m:r>
+                        <m:r>
+                          <a:rPr lang="en-US" sz="1400" b="0" i="1" smtClean="0">
+                            <a:latin typeface="Cambria Math" panose="02040503050406030204" pitchFamily="18" charset="0"/>
+                          </a:rPr>
+                          <m:t>)/</m:t>
+                        </m:r>
+                        <m:sSub>
+                          <m:sSubPr>
+                            <m:ctrlPr>
+                              <a:rPr lang="en-US" sz="1400" b="0" i="1" smtClean="0">
+                                <a:latin typeface="Cambria Math" panose="02040503050406030204" pitchFamily="18" charset="0"/>
+                              </a:rPr>
+                            </m:ctrlPr>
+                          </m:sSubPr>
+                          <m:e>
+                            <m:r>
+                              <a:rPr lang="en-US" sz="1400" b="0" i="1" smtClean="0">
+                                <a:latin typeface="Cambria Math" panose="02040503050406030204" pitchFamily="18" charset="0"/>
+                              </a:rPr>
+                              <m:t>𝜄</m:t>
+                            </m:r>
+                          </m:e>
+                          <m:sub>
+                            <m:r>
+                              <a:rPr lang="en-US" sz="1400" b="0" i="1" smtClean="0">
+                                <a:latin typeface="Cambria Math" panose="02040503050406030204" pitchFamily="18" charset="0"/>
+                              </a:rPr>
+                              <m:t>1</m:t>
+                            </m:r>
+                          </m:sub>
+                        </m:sSub>
+                      </m:oMath>
+                    </m:oMathPara>
+                  </a14:m>
+                  <a:endParaRPr lang="en-CN" sz="1400" dirty="0"/>
+                </a:p>
+              </p:txBody>
+            </p:sp>
+          </mc:Choice>
+          <mc:Fallback>
+            <p:sp>
+              <p:nvSpPr>
+                <p:cNvPr id="129" name="TextBox 128">
+                  <a:extLst>
+                    <a:ext uri="{FF2B5EF4-FFF2-40B4-BE49-F238E27FC236}">
+                      <a16:creationId xmlns:a16="http://schemas.microsoft.com/office/drawing/2014/main" id="{304378B9-03FF-2A55-17A5-4354AA102D55}"/>
+                    </a:ext>
+                  </a:extLst>
+                </p:cNvPr>
+                <p:cNvSpPr txBox="1">
+                  <a:spLocks noRot="1" noChangeAspect="1" noMove="1" noResize="1" noEditPoints="1" noAdjustHandles="1" noChangeArrowheads="1" noChangeShapeType="1" noTextEdit="1"/>
+                </p:cNvSpPr>
+                <p:nvPr/>
+              </p:nvSpPr>
+              <p:spPr>
+                <a:xfrm>
+                  <a:off x="5747668" y="1861396"/>
+                  <a:ext cx="985309" cy="307777"/>
+                </a:xfrm>
+                <a:prstGeom prst="rect">
+                  <a:avLst/>
+                </a:prstGeom>
+                <a:blipFill>
+                  <a:blip r:embed="rId4"/>
+                  <a:stretch>
+                    <a:fillRect b="-8000"/>
+                  </a:stretch>
+                </a:blipFill>
+              </p:spPr>
+              <p:txBody>
+                <a:bodyPr/>
+                <a:lstStyle/>
+                <a:p>
+                  <a:r>
+                    <a:rPr lang="en-US">
+                      <a:noFill/>
+                    </a:rPr>
+                    <a:t> </a:t>
+                  </a:r>
+                </a:p>
+              </p:txBody>
+            </p:sp>
+          </mc:Fallback>
+        </mc:AlternateContent>
+        <mc:AlternateContent xmlns:mc="http://schemas.openxmlformats.org/markup-compatibility/2006">
+          <mc:Choice xmlns:a14="http://schemas.microsoft.com/office/drawing/2010/main" Requires="a14">
+            <p:sp>
+              <p:nvSpPr>
+                <p:cNvPr id="141" name="TextBox 140">
+                  <a:extLst>
+                    <a:ext uri="{FF2B5EF4-FFF2-40B4-BE49-F238E27FC236}">
+                      <a16:creationId xmlns:a16="http://schemas.microsoft.com/office/drawing/2014/main" id="{07509EF8-CE86-2EE1-B376-5C8A59C880C8}"/>
+                    </a:ext>
+                  </a:extLst>
+                </p:cNvPr>
+                <p:cNvSpPr txBox="1"/>
+                <p:nvPr/>
+              </p:nvSpPr>
+              <p:spPr>
+                <a:xfrm>
+                  <a:off x="5747668" y="2765131"/>
+                  <a:ext cx="985309" cy="307777"/>
+                </a:xfrm>
+                <a:prstGeom prst="rect">
+                  <a:avLst/>
+                </a:prstGeom>
+                <a:noFill/>
+              </p:spPr>
+              <p:txBody>
+                <a:bodyPr wrap="square" rtlCol="0">
+                  <a:spAutoFit/>
+                </a:bodyPr>
+                <a:lstStyle/>
+                <a:p>
+                  <a:pPr/>
+                  <a14:m>
+                    <m:oMathPara xmlns:m="http://schemas.openxmlformats.org/officeDocument/2006/math">
+                      <m:oMathParaPr>
+                        <m:jc m:val="centerGroup"/>
+                      </m:oMathParaPr>
+                      <m:oMath xmlns:m="http://schemas.openxmlformats.org/officeDocument/2006/math">
+                        <m:r>
+                          <a:rPr lang="en-US" sz="1400" b="0" i="1" smtClean="0">
+                            <a:latin typeface="Cambria Math" panose="02040503050406030204" pitchFamily="18" charset="0"/>
+                          </a:rPr>
+                          <m:t>1/</m:t>
+                        </m:r>
+                        <m:sSub>
+                          <m:sSubPr>
+                            <m:ctrlPr>
+                              <a:rPr lang="en-US" sz="1400" b="0" i="1" smtClean="0">
+                                <a:latin typeface="Cambria Math" panose="02040503050406030204" pitchFamily="18" charset="0"/>
+                              </a:rPr>
+                            </m:ctrlPr>
+                          </m:sSubPr>
+                          <m:e>
+                            <m:r>
+                              <a:rPr lang="en-US" sz="1400" b="0" i="1" smtClean="0">
+                                <a:latin typeface="Cambria Math" panose="02040503050406030204" pitchFamily="18" charset="0"/>
+                              </a:rPr>
+                              <m:t>𝜄</m:t>
+                            </m:r>
+                          </m:e>
+                          <m:sub>
+                            <m:r>
+                              <a:rPr lang="en-US" sz="1400" b="0" i="1" smtClean="0">
+                                <a:latin typeface="Cambria Math" panose="02040503050406030204" pitchFamily="18" charset="0"/>
+                              </a:rPr>
+                              <m:t>2</m:t>
+                            </m:r>
+                          </m:sub>
+                        </m:sSub>
+                      </m:oMath>
+                    </m:oMathPara>
+                  </a14:m>
+                  <a:endParaRPr lang="en-CN" sz="1400" dirty="0"/>
+                </a:p>
+              </p:txBody>
+            </p:sp>
+          </mc:Choice>
+          <mc:Fallback>
+            <p:sp>
+              <p:nvSpPr>
+                <p:cNvPr id="141" name="TextBox 140">
+                  <a:extLst>
+                    <a:ext uri="{FF2B5EF4-FFF2-40B4-BE49-F238E27FC236}">
+                      <a16:creationId xmlns:a16="http://schemas.microsoft.com/office/drawing/2014/main" id="{07509EF8-CE86-2EE1-B376-5C8A59C880C8}"/>
+                    </a:ext>
+                  </a:extLst>
+                </p:cNvPr>
+                <p:cNvSpPr txBox="1">
+                  <a:spLocks noRot="1" noChangeAspect="1" noMove="1" noResize="1" noEditPoints="1" noAdjustHandles="1" noChangeArrowheads="1" noChangeShapeType="1" noTextEdit="1"/>
+                </p:cNvSpPr>
+                <p:nvPr/>
+              </p:nvSpPr>
+              <p:spPr>
+                <a:xfrm>
+                  <a:off x="5747668" y="2765131"/>
+                  <a:ext cx="985309" cy="307777"/>
+                </a:xfrm>
+                <a:prstGeom prst="rect">
+                  <a:avLst/>
+                </a:prstGeom>
+                <a:blipFill>
+                  <a:blip r:embed="rId5"/>
+                  <a:stretch>
+                    <a:fillRect b="-8000"/>
+                  </a:stretch>
+                </a:blipFill>
+              </p:spPr>
+              <p:txBody>
+                <a:bodyPr/>
+                <a:lstStyle/>
+                <a:p>
+                  <a:r>
+                    <a:rPr lang="en-US">
+                      <a:noFill/>
+                    </a:rPr>
+                    <a:t> </a:t>
+                  </a:r>
+                </a:p>
+              </p:txBody>
+            </p:sp>
+          </mc:Fallback>
+        </mc:AlternateContent>
+        <mc:AlternateContent xmlns:mc="http://schemas.openxmlformats.org/markup-compatibility/2006">
+          <mc:Choice xmlns:a14="http://schemas.microsoft.com/office/drawing/2010/main" Requires="a14">
+            <p:sp>
+              <p:nvSpPr>
+                <p:cNvPr id="142" name="TextBox 141">
+                  <a:extLst>
+                    <a:ext uri="{FF2B5EF4-FFF2-40B4-BE49-F238E27FC236}">
+                      <a16:creationId xmlns:a16="http://schemas.microsoft.com/office/drawing/2014/main" id="{A03719DF-92F6-84C3-FB5E-0F7C492C21EB}"/>
+                    </a:ext>
+                  </a:extLst>
+                </p:cNvPr>
+                <p:cNvSpPr txBox="1"/>
+                <p:nvPr/>
+              </p:nvSpPr>
+              <p:spPr>
+                <a:xfrm>
+                  <a:off x="8426866" y="1858210"/>
+                  <a:ext cx="985309" cy="307777"/>
+                </a:xfrm>
+                <a:prstGeom prst="rect">
+                  <a:avLst/>
+                </a:prstGeom>
+                <a:noFill/>
+              </p:spPr>
+              <p:txBody>
+                <a:bodyPr wrap="square" rtlCol="0">
+                  <a:spAutoFit/>
+                </a:bodyPr>
+                <a:lstStyle/>
+                <a:p>
+                  <a:pPr/>
+                  <a14:m>
+                    <m:oMathPara xmlns:m="http://schemas.openxmlformats.org/officeDocument/2006/math">
+                      <m:oMathParaPr>
+                        <m:jc m:val="centerGroup"/>
+                      </m:oMathParaPr>
+                      <m:oMath xmlns:m="http://schemas.openxmlformats.org/officeDocument/2006/math">
+                        <m:sSub>
+                          <m:sSubPr>
+                            <m:ctrlPr>
+                              <a:rPr lang="en-US" sz="1400" b="0" i="1" smtClean="0">
+                                <a:latin typeface="Cambria Math" panose="02040503050406030204" pitchFamily="18" charset="0"/>
+                              </a:rPr>
+                            </m:ctrlPr>
+                          </m:sSubPr>
+                          <m:e>
+                            <m:r>
+                              <a:rPr lang="en-US" sz="1400" b="0" i="1" smtClean="0">
+                                <a:latin typeface="Cambria Math" panose="02040503050406030204" pitchFamily="18" charset="0"/>
+                              </a:rPr>
+                              <m:t>𝜏</m:t>
+                            </m:r>
+                          </m:e>
+                          <m:sub>
+                            <m:r>
+                              <a:rPr lang="en-US" sz="1400" b="0" i="1" smtClean="0">
+                                <a:latin typeface="Cambria Math" panose="02040503050406030204" pitchFamily="18" charset="0"/>
+                              </a:rPr>
+                              <m:t>𝑘</m:t>
+                            </m:r>
+                          </m:sub>
+                        </m:sSub>
+                      </m:oMath>
+                    </m:oMathPara>
+                  </a14:m>
+                  <a:endParaRPr lang="en-CN" sz="1400" dirty="0"/>
+                </a:p>
+              </p:txBody>
+            </p:sp>
+          </mc:Choice>
+          <mc:Fallback>
+            <p:sp>
+              <p:nvSpPr>
+                <p:cNvPr id="142" name="TextBox 141">
+                  <a:extLst>
+                    <a:ext uri="{FF2B5EF4-FFF2-40B4-BE49-F238E27FC236}">
+                      <a16:creationId xmlns:a16="http://schemas.microsoft.com/office/drawing/2014/main" id="{A03719DF-92F6-84C3-FB5E-0F7C492C21EB}"/>
+                    </a:ext>
+                  </a:extLst>
+                </p:cNvPr>
+                <p:cNvSpPr txBox="1">
+                  <a:spLocks noRot="1" noChangeAspect="1" noMove="1" noResize="1" noEditPoints="1" noAdjustHandles="1" noChangeArrowheads="1" noChangeShapeType="1" noTextEdit="1"/>
+                </p:cNvSpPr>
+                <p:nvPr/>
+              </p:nvSpPr>
+              <p:spPr>
+                <a:xfrm>
+                  <a:off x="8426866" y="1858210"/>
+                  <a:ext cx="985309" cy="307777"/>
+                </a:xfrm>
+                <a:prstGeom prst="rect">
+                  <a:avLst/>
+                </a:prstGeom>
+                <a:blipFill>
+                  <a:blip r:embed="rId6"/>
+                  <a:stretch>
+                    <a:fillRect/>
+                  </a:stretch>
+                </a:blipFill>
+              </p:spPr>
+              <p:txBody>
+                <a:bodyPr/>
+                <a:lstStyle/>
+                <a:p>
+                  <a:r>
+                    <a:rPr lang="en-US">
+                      <a:noFill/>
+                    </a:rPr>
+                    <a:t> </a:t>
+                  </a:r>
+                </a:p>
+              </p:txBody>
+            </p:sp>
+          </mc:Fallback>
+        </mc:AlternateContent>
+      </p:grpSp>
     </p:spTree>
     <p:extLst>
       <p:ext uri="{BB962C8B-B14F-4D97-AF65-F5344CB8AC3E}">
@@ -11063,7 +10845,7 @@
         </p:nvGrpSpPr>
         <p:grpSpPr>
           <a:xfrm>
-            <a:off x="0" y="-6067781"/>
+            <a:off x="0" y="-6062171"/>
             <a:ext cx="11561222" cy="13349114"/>
             <a:chOff x="0" y="-6067781"/>
             <a:chExt cx="11561222" cy="13349114"/>
@@ -16107,23 +15889,12 @@
                 <a:p>
                   <a:pPr algn="ctr"/>
                   <a:r>
-                    <a:rPr lang="en-US" dirty="0">
+                    <a:rPr lang="en-US" sz="1200" dirty="0">
                       <a:solidFill>
                         <a:sysClr val="windowText" lastClr="000000"/>
                       </a:solidFill>
                     </a:rPr>
-                    <a:t>False</a:t>
-                  </a:r>
-                </a:p>
-                <a:p>
-                  <a:pPr algn="ctr"/>
-                  <a:r>
-                    <a:rPr lang="en-US" dirty="0">
-                      <a:solidFill>
-                        <a:sysClr val="windowText" lastClr="000000"/>
-                      </a:solidFill>
-                    </a:rPr>
-                    <a:t>Positive?</a:t>
+                    <a:t>Prostate Cancer Confirmed</a:t>
                   </a:r>
                 </a:p>
               </p:txBody>
